--- a/Baterias_SIN_Economia_Setor_Eletrico_I.pptx
+++ b/Baterias_SIN_Economia_Setor_Eletrico_I.pptx
@@ -121,12 +121,12 @@
   <p:extLst>
     <p:ext uri="{521415D9-36F7-43E2-AB2F-B90AF26B5E84}">
       <p14:sectionLst xmlns:p14="http://schemas.microsoft.com/office/powerpoint/2010/main">
-        <p14:section name="Abertura" id="{9a0fbf1f-498b-a105-d8c4-e321a4530428}">
+        <p14:section name="Abertura" id="{a85628f9-75e7-075f-a306-1f8cf666f13e}">
           <p14:sldIdLst>
             <p14:sldId id="256"/>
           </p14:sldIdLst>
         </p14:section>
-        <p14:section name="Introdução" id="{d208181f-e6d8-59bf-8df5-2838b1307c78}">
+        <p14:section name="Introdução" id="{ab0bd54b-b354-a689-3d6c-2fa5098d71df}">
           <p14:sldIdLst>
             <p14:sldId id="257"/>
             <p14:sldId id="258"/>
@@ -134,13 +134,13 @@
             <p14:sldId id="260"/>
           </p14:sldIdLst>
         </p14:section>
-        <p14:section name="Objetivos" id="{c9dde1c5-58e0-5602-cd3e-2f6668ce6d20}">
+        <p14:section name="Objetivos" id="{4556daed-491e-7b07-4bab-df590511e6c9}">
           <p14:sldIdLst>
             <p14:sldId id="261"/>
             <p14:sldId id="262"/>
           </p14:sldIdLst>
         </p14:section>
-        <p14:section name="Método" id="{66048603-3e36-c244-63a5-f702bb4db51d}">
+        <p14:section name="Método" id="{21ddb656-e38e-9c13-4ae2-8b23d795d092}">
           <p14:sldIdLst>
             <p14:sldId id="263"/>
             <p14:sldId id="264"/>
@@ -148,14 +148,14 @@
             <p14:sldId id="266"/>
           </p14:sldIdLst>
         </p14:section>
-        <p14:section name="Análise" id="{f5414e24-f20b-8b06-d46b-4605979fbb8d}">
+        <p14:section name="Análise" id="{82c8d00c-77f6-9648-fca7-d10aff6001f0}">
           <p14:sldIdLst>
             <p14:sldId id="267"/>
             <p14:sldId id="268"/>
             <p14:sldId id="269"/>
           </p14:sldIdLst>
         </p14:section>
-        <p14:section name="Referências" id="{6884f414-8b62-e3d0-0a3e-c734bcb2c5b8}">
+        <p14:section name="Referências" id="{a855a8d2-c74c-d247-62a4-37029c857692}">
           <p14:sldIdLst>
             <p14:sldId id="270"/>
           </p14:sldIdLst>
@@ -1620,7 +1620,7 @@
           <a:p>
             <a:r>
               <a:rPr lang="en-US" dirty="0"/>
-              <a:t>Cinco objetivos específicos, cada um ligado a uma variável de saída da simulação. OE1 a OE4 vêm das simulações; OE5 depende do cálculo dos encargos por fonte.</a:t>
+              <a:t>Os cinco objetivos específicos formam uma cadeia: efeitos das baterias (OE1 e OE2), ganho sistêmico (OE3), custo (OE4) e comparação final (OE5), que responde à pergunta de pesquisa.</a:t>
             </a:r>
             <a:endParaRPr lang="en-US" dirty="0"/>
           </a:p>
@@ -4807,7 +4807,7 @@
                           <a:ea typeface="Calibri" pitchFamily="34" charset="-122"/>
                           <a:cs typeface="Calibri" pitchFamily="34" charset="-120"/>
                         </a:rPr>
-                        <a:t>Sem × com BESS, por cenário</a:t>
+                        <a:t>Sem × com BESS, por nível de MMGD</a:t>
                       </a:r>
                       <a:endParaRPr lang="en-US" sz="1400" dirty="0">
                         <a:latin typeface="Calibri" charset="0"/>
@@ -4945,7 +4945,7 @@
                           <a:ea typeface="Calibri" pitchFamily="34" charset="-122"/>
                           <a:cs typeface="Calibri" pitchFamily="34" charset="-120"/>
                         </a:rPr>
-                        <a:t>Despacho de UHEs, UTEs, UFVs e eólicas</a:t>
+                        <a:t>Despacho por fonte e energia armazenada nas UHEs</a:t>
                       </a:r>
                       <a:endParaRPr lang="en-US" sz="1400" dirty="0">
                         <a:latin typeface="Calibri" charset="0"/>
@@ -5013,7 +5013,7 @@
                           <a:ea typeface="Calibri" pitchFamily="34" charset="-122"/>
                           <a:cs typeface="Calibri" pitchFamily="34" charset="-120"/>
                         </a:rPr>
-                        <a:t>MWh/ano e MW médios horários</a:t>
+                        <a:t>MWh/ano, MW médios e % da capacidade</a:t>
                       </a:r>
                       <a:endParaRPr lang="en-US" sz="1400" dirty="0">
                         <a:latin typeface="Calibri" charset="0"/>
@@ -5152,280 +5152,6 @@
                           <a:cs typeface="Calibri" pitchFamily="34" charset="-120"/>
                         </a:rPr>
                         <a:t>OE3</a:t>
-                      </a:r>
-                      <a:endParaRPr lang="en-US" sz="1400" dirty="0">
-                        <a:latin typeface="Calibri" charset="0"/>
-                        <a:ea typeface="Calibri" charset="0"/>
-                        <a:cs typeface="Calibri" charset="0"/>
-                      </a:endParaRPr>
-                    </a:p>
-                  </a:txBody>
-                  <a:tcPr marL="137160" marR="137160" marT="45720" marB="45720" anchor="ctr">
-                    <a:lnL w="12700" cap="flat" cmpd="sng" algn="ctr">
-                      <a:solidFill>
-                        <a:srgbClr val="EEF3F8"/>
-                      </a:solidFill>
-                      <a:prstDash val="solid"/>
-                      <a:round/>
-                      <a:headEnd type="none" w="med" len="med"/>
-                      <a:tailEnd type="none" w="med" len="med"/>
-                    </a:lnL>
-                    <a:lnR w="12700" cap="flat" cmpd="sng" algn="ctr">
-                      <a:solidFill>
-                        <a:srgbClr val="EEF3F8"/>
-                      </a:solidFill>
-                      <a:prstDash val="solid"/>
-                      <a:round/>
-                      <a:headEnd type="none" w="med" len="med"/>
-                      <a:tailEnd type="none" w="med" len="med"/>
-                    </a:lnR>
-                    <a:lnT w="12700" cap="flat" cmpd="sng" algn="ctr">
-                      <a:solidFill>
-                        <a:srgbClr val="EEF3F8"/>
-                      </a:solidFill>
-                      <a:prstDash val="solid"/>
-                      <a:round/>
-                      <a:headEnd type="none" w="med" len="med"/>
-                      <a:tailEnd type="none" w="med" len="med"/>
-                    </a:lnT>
-                    <a:lnB w="12700" cap="flat" cmpd="sng" algn="ctr">
-                      <a:solidFill>
-                        <a:srgbClr val="EEF3F8"/>
-                      </a:solidFill>
-                      <a:prstDash val="solid"/>
-                      <a:round/>
-                      <a:headEnd type="none" w="med" len="med"/>
-                      <a:tailEnd type="none" w="med" len="med"/>
-                    </a:lnB>
-                    <a:solidFill>
-                      <a:schemeClr val="bg1"/>
-                    </a:solidFill>
-                  </a:tcPr>
-                </a:tc>
-                <a:tc>
-                  <a:txBody>
-                    <a:bodyPr/>
-                    <a:lstStyle/>
-                    <a:p>
-                      <a:pPr indent="0" marL="0">
-                        <a:buNone/>
-                      </a:pPr>
-                      <a:r>
-                        <a:rPr lang="en-US" sz="1400" dirty="0">
-                          <a:solidFill>
-                            <a:schemeClr val="tx1"/>
-                          </a:solidFill>
-                          <a:latin typeface="Calibri" pitchFamily="34" charset="0"/>
-                          <a:ea typeface="Calibri" pitchFamily="34" charset="-122"/>
-                          <a:cs typeface="Calibri" pitchFamily="34" charset="-120"/>
-                        </a:rPr>
-                        <a:t>Energia armazenada nas UHEs</a:t>
-                      </a:r>
-                      <a:endParaRPr lang="en-US" sz="1400" dirty="0">
-                        <a:latin typeface="Calibri" charset="0"/>
-                        <a:ea typeface="Calibri" charset="0"/>
-                        <a:cs typeface="Calibri" charset="0"/>
-                      </a:endParaRPr>
-                    </a:p>
-                  </a:txBody>
-                  <a:tcPr marL="137160" marR="137160" marT="45720" marB="45720" anchor="ctr">
-                    <a:lnL w="12700" cap="flat" cmpd="sng" algn="ctr">
-                      <a:solidFill>
-                        <a:srgbClr val="EEF3F8"/>
-                      </a:solidFill>
-                      <a:prstDash val="solid"/>
-                      <a:round/>
-                      <a:headEnd type="none" w="med" len="med"/>
-                      <a:tailEnd type="none" w="med" len="med"/>
-                    </a:lnL>
-                    <a:lnR w="12700" cap="flat" cmpd="sng" algn="ctr">
-                      <a:solidFill>
-                        <a:srgbClr val="EEF3F8"/>
-                      </a:solidFill>
-                      <a:prstDash val="solid"/>
-                      <a:round/>
-                      <a:headEnd type="none" w="med" len="med"/>
-                      <a:tailEnd type="none" w="med" len="med"/>
-                    </a:lnR>
-                    <a:lnT w="12700" cap="flat" cmpd="sng" algn="ctr">
-                      <a:solidFill>
-                        <a:srgbClr val="EEF3F8"/>
-                      </a:solidFill>
-                      <a:prstDash val="solid"/>
-                      <a:round/>
-                      <a:headEnd type="none" w="med" len="med"/>
-                      <a:tailEnd type="none" w="med" len="med"/>
-                    </a:lnT>
-                    <a:lnB w="12700" cap="flat" cmpd="sng" algn="ctr">
-                      <a:solidFill>
-                        <a:srgbClr val="EEF3F8"/>
-                      </a:solidFill>
-                      <a:prstDash val="solid"/>
-                      <a:round/>
-                      <a:headEnd type="none" w="med" len="med"/>
-                      <a:tailEnd type="none" w="med" len="med"/>
-                    </a:lnB>
-                    <a:solidFill>
-                      <a:schemeClr val="bg1"/>
-                    </a:solidFill>
-                  </a:tcPr>
-                </a:tc>
-                <a:tc>
-                  <a:txBody>
-                    <a:bodyPr/>
-                    <a:lstStyle/>
-                    <a:p>
-                      <a:pPr indent="0" marL="0">
-                        <a:buNone/>
-                      </a:pPr>
-                      <a:r>
-                        <a:rPr lang="en-US" sz="1400" dirty="0">
-                          <a:solidFill>
-                            <a:schemeClr val="tx1"/>
-                          </a:solidFill>
-                          <a:latin typeface="Calibri" pitchFamily="34" charset="0"/>
-                          <a:ea typeface="Calibri" pitchFamily="34" charset="-122"/>
-                          <a:cs typeface="Calibri" pitchFamily="34" charset="-120"/>
-                        </a:rPr>
-                        <a:t>% da capacidade, mensal</a:t>
-                      </a:r>
-                      <a:endParaRPr lang="en-US" sz="1400" dirty="0">
-                        <a:latin typeface="Calibri" charset="0"/>
-                        <a:ea typeface="Calibri" charset="0"/>
-                        <a:cs typeface="Calibri" charset="0"/>
-                      </a:endParaRPr>
-                    </a:p>
-                  </a:txBody>
-                  <a:tcPr marL="137160" marR="137160" marT="45720" marB="45720" anchor="ctr">
-                    <a:lnL w="12700" cap="flat" cmpd="sng" algn="ctr">
-                      <a:solidFill>
-                        <a:srgbClr val="EEF3F8"/>
-                      </a:solidFill>
-                      <a:prstDash val="solid"/>
-                      <a:round/>
-                      <a:headEnd type="none" w="med" len="med"/>
-                      <a:tailEnd type="none" w="med" len="med"/>
-                    </a:lnL>
-                    <a:lnR w="12700" cap="flat" cmpd="sng" algn="ctr">
-                      <a:solidFill>
-                        <a:srgbClr val="EEF3F8"/>
-                      </a:solidFill>
-                      <a:prstDash val="solid"/>
-                      <a:round/>
-                      <a:headEnd type="none" w="med" len="med"/>
-                      <a:tailEnd type="none" w="med" len="med"/>
-                    </a:lnR>
-                    <a:lnT w="12700" cap="flat" cmpd="sng" algn="ctr">
-                      <a:solidFill>
-                        <a:srgbClr val="EEF3F8"/>
-                      </a:solidFill>
-                      <a:prstDash val="solid"/>
-                      <a:round/>
-                      <a:headEnd type="none" w="med" len="med"/>
-                      <a:tailEnd type="none" w="med" len="med"/>
-                    </a:lnT>
-                    <a:lnB w="12700" cap="flat" cmpd="sng" algn="ctr">
-                      <a:solidFill>
-                        <a:srgbClr val="EEF3F8"/>
-                      </a:solidFill>
-                      <a:prstDash val="solid"/>
-                      <a:round/>
-                      <a:headEnd type="none" w="med" len="med"/>
-                      <a:tailEnd type="none" w="med" len="med"/>
-                    </a:lnB>
-                    <a:solidFill>
-                      <a:schemeClr val="bg1"/>
-                    </a:solidFill>
-                  </a:tcPr>
-                </a:tc>
-                <a:tc>
-                  <a:txBody>
-                    <a:bodyPr/>
-                    <a:lstStyle/>
-                    <a:p>
-                      <a:pPr indent="0" marL="0">
-                        <a:buNone/>
-                      </a:pPr>
-                      <a:r>
-                        <a:rPr lang="en-US" sz="1400" dirty="0">
-                          <a:solidFill>
-                            <a:schemeClr val="tx1"/>
-                          </a:solidFill>
-                          <a:latin typeface="Calibri" pitchFamily="34" charset="0"/>
-                          <a:ea typeface="Calibri" pitchFamily="34" charset="-122"/>
-                          <a:cs typeface="Calibri" pitchFamily="34" charset="-120"/>
-                        </a:rPr>
-                        <a:t>Trajetória sem × com BESS</a:t>
-                      </a:r>
-                      <a:endParaRPr lang="en-US" sz="1400" dirty="0">
-                        <a:latin typeface="Calibri" charset="0"/>
-                        <a:ea typeface="Calibri" charset="0"/>
-                        <a:cs typeface="Calibri" charset="0"/>
-                      </a:endParaRPr>
-                    </a:p>
-                  </a:txBody>
-                  <a:tcPr marL="137160" marR="137160" marT="45720" marB="45720" anchor="ctr">
-                    <a:lnL w="12700" cap="flat" cmpd="sng" algn="ctr">
-                      <a:solidFill>
-                        <a:srgbClr val="EEF3F8"/>
-                      </a:solidFill>
-                      <a:prstDash val="solid"/>
-                      <a:round/>
-                      <a:headEnd type="none" w="med" len="med"/>
-                      <a:tailEnd type="none" w="med" len="med"/>
-                    </a:lnL>
-                    <a:lnR w="12700" cap="flat" cmpd="sng" algn="ctr">
-                      <a:solidFill>
-                        <a:srgbClr val="EEF3F8"/>
-                      </a:solidFill>
-                      <a:prstDash val="solid"/>
-                      <a:round/>
-                      <a:headEnd type="none" w="med" len="med"/>
-                      <a:tailEnd type="none" w="med" len="med"/>
-                    </a:lnR>
-                    <a:lnT w="12700" cap="flat" cmpd="sng" algn="ctr">
-                      <a:solidFill>
-                        <a:srgbClr val="EEF3F8"/>
-                      </a:solidFill>
-                      <a:prstDash val="solid"/>
-                      <a:round/>
-                      <a:headEnd type="none" w="med" len="med"/>
-                      <a:tailEnd type="none" w="med" len="med"/>
-                    </a:lnT>
-                    <a:lnB w="12700" cap="flat" cmpd="sng" algn="ctr">
-                      <a:solidFill>
-                        <a:srgbClr val="EEF3F8"/>
-                      </a:solidFill>
-                      <a:prstDash val="solid"/>
-                      <a:round/>
-                      <a:headEnd type="none" w="med" len="med"/>
-                      <a:tailEnd type="none" w="med" len="med"/>
-                    </a:lnB>
-                    <a:solidFill>
-                      <a:schemeClr val="bg1"/>
-                    </a:solidFill>
-                  </a:tcPr>
-                </a:tc>
-              </a:tr>
-              <a:tr h="713232">
-                <a:tc>
-                  <a:txBody>
-                    <a:bodyPr/>
-                    <a:lstStyle/>
-                    <a:p>
-                      <a:pPr indent="0" marL="0">
-                        <a:buNone/>
-                      </a:pPr>
-                      <a:r>
-                        <a:rPr lang="en-US" sz="1400" b="1" dirty="0">
-                          <a:solidFill>
-                            <a:schemeClr val="tx1"/>
-                          </a:solidFill>
-                          <a:latin typeface="Calibri" pitchFamily="34" charset="0"/>
-                          <a:ea typeface="Calibri" pitchFamily="34" charset="-122"/>
-                          <a:cs typeface="Calibri" pitchFamily="34" charset="-120"/>
-                        </a:rPr>
-                        <a:t>OE4</a:t>
                       </a:r>
                       <a:endParaRPr lang="en-US" sz="1400" dirty="0">
                         <a:latin typeface="Calibri" charset="0"/>
@@ -5699,7 +5425,7 @@
                           <a:ea typeface="Calibri" pitchFamily="34" charset="-122"/>
                           <a:cs typeface="Calibri" pitchFamily="34" charset="-120"/>
                         </a:rPr>
-                        <a:t>OE5</a:t>
+                        <a:t>OE4</a:t>
                       </a:r>
                       <a:endParaRPr lang="en-US" sz="1400" dirty="0">
                         <a:latin typeface="Calibri" charset="0"/>
@@ -5903,7 +5629,281 @@
                           <a:ea typeface="Calibri" pitchFamily="34" charset="-122"/>
                           <a:cs typeface="Calibri" pitchFamily="34" charset="-120"/>
                         </a:rPr>
-                        <a:t>ΔCTO ÷ Σ encargos ≥ 1?</a:t>
+                        <a:t>Conforme a regra de rateio</a:t>
+                      </a:r>
+                      <a:endParaRPr lang="en-US" sz="1400" dirty="0">
+                        <a:latin typeface="Calibri" charset="0"/>
+                        <a:ea typeface="Calibri" charset="0"/>
+                        <a:cs typeface="Calibri" charset="0"/>
+                      </a:endParaRPr>
+                    </a:p>
+                  </a:txBody>
+                  <a:tcPr marL="137160" marR="137160" marT="45720" marB="45720" anchor="ctr">
+                    <a:lnL w="12700" cap="flat" cmpd="sng" algn="ctr">
+                      <a:solidFill>
+                        <a:srgbClr val="EEF3F8"/>
+                      </a:solidFill>
+                      <a:prstDash val="solid"/>
+                      <a:round/>
+                      <a:headEnd type="none" w="med" len="med"/>
+                      <a:tailEnd type="none" w="med" len="med"/>
+                    </a:lnL>
+                    <a:lnR w="12700" cap="flat" cmpd="sng" algn="ctr">
+                      <a:solidFill>
+                        <a:srgbClr val="EEF3F8"/>
+                      </a:solidFill>
+                      <a:prstDash val="solid"/>
+                      <a:round/>
+                      <a:headEnd type="none" w="med" len="med"/>
+                      <a:tailEnd type="none" w="med" len="med"/>
+                    </a:lnR>
+                    <a:lnT w="12700" cap="flat" cmpd="sng" algn="ctr">
+                      <a:solidFill>
+                        <a:srgbClr val="EEF3F8"/>
+                      </a:solidFill>
+                      <a:prstDash val="solid"/>
+                      <a:round/>
+                      <a:headEnd type="none" w="med" len="med"/>
+                      <a:tailEnd type="none" w="med" len="med"/>
+                    </a:lnT>
+                    <a:lnB w="12700" cap="flat" cmpd="sng" algn="ctr">
+                      <a:solidFill>
+                        <a:srgbClr val="EEF3F8"/>
+                      </a:solidFill>
+                      <a:prstDash val="solid"/>
+                      <a:round/>
+                      <a:headEnd type="none" w="med" len="med"/>
+                      <a:tailEnd type="none" w="med" len="med"/>
+                    </a:lnB>
+                    <a:solidFill>
+                      <a:schemeClr val="bg1"/>
+                    </a:solidFill>
+                  </a:tcPr>
+                </a:tc>
+              </a:tr>
+              <a:tr h="713232">
+                <a:tc>
+                  <a:txBody>
+                    <a:bodyPr/>
+                    <a:lstStyle/>
+                    <a:p>
+                      <a:pPr indent="0" marL="0">
+                        <a:buNone/>
+                      </a:pPr>
+                      <a:r>
+                        <a:rPr lang="en-US" sz="1400" b="1" dirty="0">
+                          <a:solidFill>
+                            <a:schemeClr val="tx1"/>
+                          </a:solidFill>
+                          <a:latin typeface="Calibri" pitchFamily="34" charset="0"/>
+                          <a:ea typeface="Calibri" pitchFamily="34" charset="-122"/>
+                          <a:cs typeface="Calibri" pitchFamily="34" charset="-120"/>
+                        </a:rPr>
+                        <a:t>OE5</a:t>
+                      </a:r>
+                      <a:endParaRPr lang="en-US" sz="1400" dirty="0">
+                        <a:latin typeface="Calibri" charset="0"/>
+                        <a:ea typeface="Calibri" charset="0"/>
+                        <a:cs typeface="Calibri" charset="0"/>
+                      </a:endParaRPr>
+                    </a:p>
+                  </a:txBody>
+                  <a:tcPr marL="137160" marR="137160" marT="45720" marB="45720" anchor="ctr">
+                    <a:lnL w="12700" cap="flat" cmpd="sng" algn="ctr">
+                      <a:solidFill>
+                        <a:srgbClr val="EEF3F8"/>
+                      </a:solidFill>
+                      <a:prstDash val="solid"/>
+                      <a:round/>
+                      <a:headEnd type="none" w="med" len="med"/>
+                      <a:tailEnd type="none" w="med" len="med"/>
+                    </a:lnL>
+                    <a:lnR w="12700" cap="flat" cmpd="sng" algn="ctr">
+                      <a:solidFill>
+                        <a:srgbClr val="EEF3F8"/>
+                      </a:solidFill>
+                      <a:prstDash val="solid"/>
+                      <a:round/>
+                      <a:headEnd type="none" w="med" len="med"/>
+                      <a:tailEnd type="none" w="med" len="med"/>
+                    </a:lnR>
+                    <a:lnT w="12700" cap="flat" cmpd="sng" algn="ctr">
+                      <a:solidFill>
+                        <a:srgbClr val="EEF3F8"/>
+                      </a:solidFill>
+                      <a:prstDash val="solid"/>
+                      <a:round/>
+                      <a:headEnd type="none" w="med" len="med"/>
+                      <a:tailEnd type="none" w="med" len="med"/>
+                    </a:lnT>
+                    <a:lnB w="12700" cap="flat" cmpd="sng" algn="ctr">
+                      <a:solidFill>
+                        <a:srgbClr val="EEF3F8"/>
+                      </a:solidFill>
+                      <a:prstDash val="solid"/>
+                      <a:round/>
+                      <a:headEnd type="none" w="med" len="med"/>
+                      <a:tailEnd type="none" w="med" len="med"/>
+                    </a:lnB>
+                    <a:solidFill>
+                      <a:schemeClr val="bg1"/>
+                    </a:solidFill>
+                  </a:tcPr>
+                </a:tc>
+                <a:tc>
+                  <a:txBody>
+                    <a:bodyPr/>
+                    <a:lstStyle/>
+                    <a:p>
+                      <a:pPr indent="0" marL="0">
+                        <a:buNone/>
+                      </a:pPr>
+                      <a:r>
+                        <a:rPr lang="en-US" sz="1400" dirty="0">
+                          <a:solidFill>
+                            <a:schemeClr val="tx1"/>
+                          </a:solidFill>
+                          <a:latin typeface="Calibri" pitchFamily="34" charset="0"/>
+                          <a:ea typeface="Calibri" pitchFamily="34" charset="-122"/>
+                          <a:cs typeface="Calibri" pitchFamily="34" charset="-120"/>
+                        </a:rPr>
+                        <a:t>Razão ΔCTO ÷ Σ encargos e resultado por fonte</a:t>
+                      </a:r>
+                      <a:endParaRPr lang="en-US" sz="1400" dirty="0">
+                        <a:latin typeface="Calibri" charset="0"/>
+                        <a:ea typeface="Calibri" charset="0"/>
+                        <a:cs typeface="Calibri" charset="0"/>
+                      </a:endParaRPr>
+                    </a:p>
+                  </a:txBody>
+                  <a:tcPr marL="137160" marR="137160" marT="45720" marB="45720" anchor="ctr">
+                    <a:lnL w="12700" cap="flat" cmpd="sng" algn="ctr">
+                      <a:solidFill>
+                        <a:srgbClr val="EEF3F8"/>
+                      </a:solidFill>
+                      <a:prstDash val="solid"/>
+                      <a:round/>
+                      <a:headEnd type="none" w="med" len="med"/>
+                      <a:tailEnd type="none" w="med" len="med"/>
+                    </a:lnL>
+                    <a:lnR w="12700" cap="flat" cmpd="sng" algn="ctr">
+                      <a:solidFill>
+                        <a:srgbClr val="EEF3F8"/>
+                      </a:solidFill>
+                      <a:prstDash val="solid"/>
+                      <a:round/>
+                      <a:headEnd type="none" w="med" len="med"/>
+                      <a:tailEnd type="none" w="med" len="med"/>
+                    </a:lnR>
+                    <a:lnT w="12700" cap="flat" cmpd="sng" algn="ctr">
+                      <a:solidFill>
+                        <a:srgbClr val="EEF3F8"/>
+                      </a:solidFill>
+                      <a:prstDash val="solid"/>
+                      <a:round/>
+                      <a:headEnd type="none" w="med" len="med"/>
+                      <a:tailEnd type="none" w="med" len="med"/>
+                    </a:lnT>
+                    <a:lnB w="12700" cap="flat" cmpd="sng" algn="ctr">
+                      <a:solidFill>
+                        <a:srgbClr val="EEF3F8"/>
+                      </a:solidFill>
+                      <a:prstDash val="solid"/>
+                      <a:round/>
+                      <a:headEnd type="none" w="med" len="med"/>
+                      <a:tailEnd type="none" w="med" len="med"/>
+                    </a:lnB>
+                    <a:solidFill>
+                      <a:schemeClr val="bg1"/>
+                    </a:solidFill>
+                  </a:tcPr>
+                </a:tc>
+                <a:tc>
+                  <a:txBody>
+                    <a:bodyPr/>
+                    <a:lstStyle/>
+                    <a:p>
+                      <a:pPr indent="0" marL="0">
+                        <a:buNone/>
+                      </a:pPr>
+                      <a:r>
+                        <a:rPr lang="en-US" sz="1400" dirty="0">
+                          <a:solidFill>
+                            <a:schemeClr val="tx1"/>
+                          </a:solidFill>
+                          <a:latin typeface="Calibri" pitchFamily="34" charset="0"/>
+                          <a:ea typeface="Calibri" pitchFamily="34" charset="-122"/>
+                          <a:cs typeface="Calibri" pitchFamily="34" charset="-120"/>
+                        </a:rPr>
+                        <a:t>Razão e R$ milhões/ano</a:t>
+                      </a:r>
+                      <a:endParaRPr lang="en-US" sz="1400" dirty="0">
+                        <a:latin typeface="Calibri" charset="0"/>
+                        <a:ea typeface="Calibri" charset="0"/>
+                        <a:cs typeface="Calibri" charset="0"/>
+                      </a:endParaRPr>
+                    </a:p>
+                  </a:txBody>
+                  <a:tcPr marL="137160" marR="137160" marT="45720" marB="45720" anchor="ctr">
+                    <a:lnL w="12700" cap="flat" cmpd="sng" algn="ctr">
+                      <a:solidFill>
+                        <a:srgbClr val="EEF3F8"/>
+                      </a:solidFill>
+                      <a:prstDash val="solid"/>
+                      <a:round/>
+                      <a:headEnd type="none" w="med" len="med"/>
+                      <a:tailEnd type="none" w="med" len="med"/>
+                    </a:lnL>
+                    <a:lnR w="12700" cap="flat" cmpd="sng" algn="ctr">
+                      <a:solidFill>
+                        <a:srgbClr val="EEF3F8"/>
+                      </a:solidFill>
+                      <a:prstDash val="solid"/>
+                      <a:round/>
+                      <a:headEnd type="none" w="med" len="med"/>
+                      <a:tailEnd type="none" w="med" len="med"/>
+                    </a:lnR>
+                    <a:lnT w="12700" cap="flat" cmpd="sng" algn="ctr">
+                      <a:solidFill>
+                        <a:srgbClr val="EEF3F8"/>
+                      </a:solidFill>
+                      <a:prstDash val="solid"/>
+                      <a:round/>
+                      <a:headEnd type="none" w="med" len="med"/>
+                      <a:tailEnd type="none" w="med" len="med"/>
+                    </a:lnT>
+                    <a:lnB w="12700" cap="flat" cmpd="sng" algn="ctr">
+                      <a:solidFill>
+                        <a:srgbClr val="EEF3F8"/>
+                      </a:solidFill>
+                      <a:prstDash val="solid"/>
+                      <a:round/>
+                      <a:headEnd type="none" w="med" len="med"/>
+                      <a:tailEnd type="none" w="med" len="med"/>
+                    </a:lnB>
+                    <a:solidFill>
+                      <a:schemeClr val="bg1"/>
+                    </a:solidFill>
+                  </a:tcPr>
+                </a:tc>
+                <a:tc>
+                  <a:txBody>
+                    <a:bodyPr/>
+                    <a:lstStyle/>
+                    <a:p>
+                      <a:pPr indent="0" marL="0">
+                        <a:buNone/>
+                      </a:pPr>
+                      <a:r>
+                        <a:rPr lang="en-US" sz="1400" dirty="0">
+                          <a:solidFill>
+                            <a:schemeClr val="tx1"/>
+                          </a:solidFill>
+                          <a:latin typeface="Calibri" pitchFamily="34" charset="0"/>
+                          <a:ea typeface="Calibri" pitchFamily="34" charset="-122"/>
+                          <a:cs typeface="Calibri" pitchFamily="34" charset="-120"/>
+                        </a:rPr>
+                        <a:t>≥ 1 confirma H1; varia com a MMGD</a:t>
                       </a:r>
                       <a:endParaRPr lang="en-US" sz="1400" dirty="0">
                         <a:latin typeface="Calibri" charset="0"/>
@@ -5989,7 +5989,7 @@
                   <a:schemeClr val="tx2"/>
                 </a:solidFill>
               </a:rPr>
-              <a:t>Todas as variáveis vêm das simulações horárias, exceto os encargos (OE5), calculados a partir do custo das baterias e da regra de rateio.</a:t>
+              <a:t>Todas as variáveis vêm das simulações horárias, exceto os encargos (OE4), calculados a partir do custo das baterias e da regra de rateio.</a:t>
             </a:r>
             <a:endParaRPr lang="en-US" sz="1400" dirty="0"/>
           </a:p>
@@ -12608,7 +12608,7 @@
                 <a:ea typeface="Cambria" pitchFamily="34" charset="-122"/>
                 <a:cs typeface="Cambria" pitchFamily="34" charset="-120"/>
               </a:rPr>
-              <a:t>Avaliar se o ganho econômico sistêmico obtido com a redução do curtailment e do custo total de operação do SIN, após a inserção de baterias, é equivalente aos encargos pagos pelas demais fontes para sua implantação.</a:t>
+              <a:t>Verificar, por meio de simulações horárias do SIN sem e com baterias, se o ganho econômico com a redução do curtailment (menor custo total de operação) é equivalente aos encargos que as demais fontes pagarão pela implantação das baterias.</a:t>
             </a:r>
             <a:endParaRPr lang="en-US" sz="2200" dirty="0"/>
           </a:p>
@@ -12756,7 +12756,7 @@
                   <a:schemeClr val="bg1"/>
                 </a:solidFill>
               </a:rPr>
-              <a:t>Medir a variação do CTO e do curtailment do SIN e confrontá-la com os encargos por fonte.</a:t>
+              <a:t>Ganho sistêmico (redução do CTO) em confronto com os encargos pagos por cada fonte.</a:t>
             </a:r>
             <a:endParaRPr lang="en-US" sz="1400" dirty="0"/>
           </a:p>
@@ -12904,7 +12904,7 @@
                   <a:schemeClr val="bg1"/>
                 </a:solidFill>
               </a:rPr>
-              <a:t>Simulações horárias do SIN sem e com baterias (NE e SE, 4 h), em cenários crescentes de MMGD.</a:t>
+              <a:t>Simulações horárias do SIN sem e com baterias (NE e SE, 4 h), em níveis crescentes de MMGD.</a:t>
             </a:r>
             <a:endParaRPr lang="en-US" sz="1400" dirty="0"/>
           </a:p>
@@ -13052,7 +13052,7 @@
                   <a:schemeClr val="bg1"/>
                 </a:solidFill>
               </a:rPr>
-              <a:t>Subsidiar o debate sobre o rateio dos custos das baterias entre as fontes.</a:t>
+              <a:t>Dizer se as baterias se pagam e quais fontes ganham ou perdem, subsidiando o rateio dos custos.</a:t>
             </a:r>
             <a:endParaRPr lang="en-US" sz="1400" dirty="0"/>
           </a:p>
@@ -13129,12 +13129,12 @@
         </p:nvSpPr>
         <p:spPr>
           <a:xfrm>
-            <a:off x="548640" y="1417320"/>
-            <a:ext cx="11094415" cy="896112"/>
+            <a:off x="548640" y="1371600"/>
+            <a:ext cx="11094415" cy="822960"/>
           </a:xfrm>
           <a:prstGeom prst="roundRect">
             <a:avLst>
-              <a:gd name="adj" fmla="val 12245"/>
+              <a:gd name="adj" fmla="val 13333"/>
             </a:avLst>
           </a:prstGeom>
           <a:solidFill>
@@ -13156,7 +13156,7 @@
         </p:nvSpPr>
         <p:spPr>
           <a:xfrm>
-            <a:off x="731520" y="1591056"/>
+            <a:off x="731520" y="1508760"/>
             <a:ext cx="914400" cy="548640"/>
           </a:xfrm>
           <a:prstGeom prst="roundRect">
@@ -13183,7 +13183,7 @@
         </p:nvSpPr>
         <p:spPr>
           <a:xfrm>
-            <a:off x="731520" y="1591056"/>
+            <a:off x="731520" y="1508760"/>
             <a:ext cx="914400" cy="548640"/>
           </a:xfrm>
           <a:prstGeom prst="rect">
@@ -13222,8 +13222,8 @@
         </p:nvSpPr>
         <p:spPr>
           <a:xfrm>
-            <a:off x="1920240" y="1508760"/>
-            <a:ext cx="3566160" cy="713232"/>
+            <a:off x="1920240" y="1463040"/>
+            <a:ext cx="3383280" cy="640080"/>
           </a:xfrm>
           <a:prstGeom prst="rect">
             <a:avLst/>
@@ -13247,7 +13247,7 @@
                 <a:ea typeface="Cambria" pitchFamily="34" charset="-122"/>
                 <a:cs typeface="Cambria" pitchFamily="34" charset="-120"/>
               </a:rPr>
-              <a:t>Quantificar o curtailment</a:t>
+              <a:t>Quantificar a redução do curtailment</a:t>
             </a:r>
             <a:endParaRPr lang="en-US" sz="1800" dirty="0"/>
           </a:p>
@@ -13261,8 +13261,8 @@
         </p:nvSpPr>
         <p:spPr>
           <a:xfrm>
-            <a:off x="5577840" y="1490472"/>
-            <a:ext cx="5120640" cy="749808"/>
+            <a:off x="5715000" y="1444752"/>
+            <a:ext cx="5029200" cy="676656"/>
           </a:xfrm>
           <a:prstGeom prst="rect">
             <a:avLst/>
@@ -13283,7 +13283,7 @@
                   <a:schemeClr val="tx2"/>
                 </a:solidFill>
               </a:rPr>
-              <a:t>de eólicas, UFVs centralizadas e UHEs, antes e depois das baterias, em cada cenário de MMGD.</a:t>
+              <a:t>de eólicas, UFVs centralizadas e UHEs com baterias, em cada nível de MMGD.</a:t>
             </a:r>
             <a:endParaRPr lang="en-US" sz="1400" dirty="0"/>
           </a:p>
@@ -13291,7 +13291,7 @@
       </p:sp>
       <p:pic>
         <p:nvPicPr>
-          <p:cNvPr id="8" name="Image 0" descr="Quantificar o curtailment">    </p:cNvPr>
+          <p:cNvPr id="8" name="Image 0" descr="Quantificar a redução do curtailment">    </p:cNvPr>
           <p:cNvPicPr>
             <a:picLocks noChangeAspect="1"/>
           </p:cNvPicPr>
@@ -13305,7 +13305,7 @@
         </p:blipFill>
         <p:spPr>
           <a:xfrm>
-            <a:off x="10957255" y="1664208"/>
+            <a:off x="10957255" y="1577340"/>
             <a:ext cx="411480" cy="411480"/>
           </a:xfrm>
           <a:prstGeom prst="rect">
@@ -13321,12 +13321,12 @@
         </p:nvSpPr>
         <p:spPr>
           <a:xfrm>
-            <a:off x="548640" y="2441448"/>
-            <a:ext cx="11094415" cy="896112"/>
+            <a:off x="548640" y="2304288"/>
+            <a:ext cx="11094415" cy="822960"/>
           </a:xfrm>
           <a:prstGeom prst="roundRect">
             <a:avLst>
-              <a:gd name="adj" fmla="val 12245"/>
+              <a:gd name="adj" fmla="val 13333"/>
             </a:avLst>
           </a:prstGeom>
           <a:solidFill>
@@ -13348,7 +13348,7 @@
         </p:nvSpPr>
         <p:spPr>
           <a:xfrm>
-            <a:off x="731520" y="2615184"/>
+            <a:off x="731520" y="2441448"/>
             <a:ext cx="914400" cy="548640"/>
           </a:xfrm>
           <a:prstGeom prst="roundRect">
@@ -13375,7 +13375,7 @@
         </p:nvSpPr>
         <p:spPr>
           <a:xfrm>
-            <a:off x="731520" y="2615184"/>
+            <a:off x="731520" y="2441448"/>
             <a:ext cx="914400" cy="548640"/>
           </a:xfrm>
           <a:prstGeom prst="rect">
@@ -13414,8 +13414,8 @@
         </p:nvSpPr>
         <p:spPr>
           <a:xfrm>
-            <a:off x="1920240" y="2532888"/>
-            <a:ext cx="3566160" cy="713232"/>
+            <a:off x="1920240" y="2395728"/>
+            <a:ext cx="3383280" cy="640080"/>
           </a:xfrm>
           <a:prstGeom prst="rect">
             <a:avLst/>
@@ -13439,7 +13439,7 @@
                 <a:ea typeface="Cambria" pitchFamily="34" charset="-122"/>
                 <a:cs typeface="Cambria" pitchFamily="34" charset="-120"/>
               </a:rPr>
-              <a:t>Comparar o despacho por fonte</a:t>
+              <a:t>Analisar despacho e armazenamento</a:t>
             </a:r>
             <a:endParaRPr lang="en-US" sz="1800" dirty="0"/>
           </a:p>
@@ -13453,8 +13453,8 @@
         </p:nvSpPr>
         <p:spPr>
           <a:xfrm>
-            <a:off x="5577840" y="2514600"/>
-            <a:ext cx="5120640" cy="749808"/>
+            <a:off x="5715000" y="2377440"/>
+            <a:ext cx="5029200" cy="676656"/>
           </a:xfrm>
           <a:prstGeom prst="rect">
             <a:avLst/>
@@ -13475,7 +13475,7 @@
                   <a:schemeClr val="tx2"/>
                 </a:solidFill>
               </a:rPr>
-              <a:t>UHEs, UTEs, UFVs e eólicas: identificar quais fontes são beneficiadas e quais são deslocadas.</a:t>
+              <a:t>identificar fontes beneficiadas e deslocadas e se a energia armazenada nas UHEs aumenta.</a:t>
             </a:r>
             <a:endParaRPr lang="en-US" sz="1400" dirty="0"/>
           </a:p>
@@ -13483,7 +13483,7 @@
       </p:sp>
       <p:pic>
         <p:nvPicPr>
-          <p:cNvPr id="14" name="Image 1" descr="Comparar o despacho por fonte">    </p:cNvPr>
+          <p:cNvPr id="14" name="Image 1" descr="Analisar despacho e armazenamento">    </p:cNvPr>
           <p:cNvPicPr>
             <a:picLocks noChangeAspect="1"/>
           </p:cNvPicPr>
@@ -13497,7 +13497,7 @@
         </p:blipFill>
         <p:spPr>
           <a:xfrm>
-            <a:off x="10957255" y="2688336"/>
+            <a:off x="10957255" y="2510028"/>
             <a:ext cx="411480" cy="411480"/>
           </a:xfrm>
           <a:prstGeom prst="rect">
@@ -13513,12 +13513,12 @@
         </p:nvSpPr>
         <p:spPr>
           <a:xfrm>
-            <a:off x="548640" y="3465576"/>
-            <a:ext cx="11094415" cy="896112"/>
+            <a:off x="548640" y="3236976"/>
+            <a:ext cx="11094415" cy="822960"/>
           </a:xfrm>
           <a:prstGeom prst="roundRect">
             <a:avLst>
-              <a:gd name="adj" fmla="val 12245"/>
+              <a:gd name="adj" fmla="val 13333"/>
             </a:avLst>
           </a:prstGeom>
           <a:solidFill>
@@ -13540,7 +13540,7 @@
         </p:nvSpPr>
         <p:spPr>
           <a:xfrm>
-            <a:off x="731520" y="3639312"/>
+            <a:off x="731520" y="3374136"/>
             <a:ext cx="914400" cy="548640"/>
           </a:xfrm>
           <a:prstGeom prst="roundRect">
@@ -13567,7 +13567,7 @@
         </p:nvSpPr>
         <p:spPr>
           <a:xfrm>
-            <a:off x="731520" y="3639312"/>
+            <a:off x="731520" y="3374136"/>
             <a:ext cx="914400" cy="548640"/>
           </a:xfrm>
           <a:prstGeom prst="rect">
@@ -13606,8 +13606,8 @@
         </p:nvSpPr>
         <p:spPr>
           <a:xfrm>
-            <a:off x="1920240" y="3557016"/>
-            <a:ext cx="3566160" cy="713232"/>
+            <a:off x="1920240" y="3328416"/>
+            <a:ext cx="3383280" cy="640080"/>
           </a:xfrm>
           <a:prstGeom prst="rect">
             <a:avLst/>
@@ -13631,7 +13631,7 @@
                 <a:ea typeface="Cambria" pitchFamily="34" charset="-122"/>
                 <a:cs typeface="Cambria" pitchFamily="34" charset="-120"/>
               </a:rPr>
-              <a:t>Verificar o armazenamento das UHEs</a:t>
+              <a:t>Calcular o ganho sistêmico (ΔCTO)</a:t>
             </a:r>
             <a:endParaRPr lang="en-US" sz="1800" dirty="0"/>
           </a:p>
@@ -13645,8 +13645,8 @@
         </p:nvSpPr>
         <p:spPr>
           <a:xfrm>
-            <a:off x="5577840" y="3538728"/>
-            <a:ext cx="5120640" cy="749808"/>
+            <a:off x="5715000" y="3310128"/>
+            <a:ext cx="5029200" cy="676656"/>
           </a:xfrm>
           <a:prstGeom prst="rect">
             <a:avLst/>
@@ -13667,7 +13667,7 @@
                   <a:schemeClr val="tx2"/>
                 </a:solidFill>
               </a:rPr>
-              <a:t>avaliar se as baterias aumentam ou não a energia armazenada nos reservatórios.</a:t>
+              <a:t>variação do custo total de operação do SIN, sem e com baterias.</a:t>
             </a:r>
             <a:endParaRPr lang="en-US" sz="1400" dirty="0"/>
           </a:p>
@@ -13675,7 +13675,7 @@
       </p:sp>
       <p:pic>
         <p:nvPicPr>
-          <p:cNvPr id="20" name="Image 2" descr="Verificar o armazenamento das UHEs">    </p:cNvPr>
+          <p:cNvPr id="20" name="Image 2" descr="Calcular o ganho sistêmico (ΔCTO)">    </p:cNvPr>
           <p:cNvPicPr>
             <a:picLocks noChangeAspect="1"/>
           </p:cNvPicPr>
@@ -13689,7 +13689,7 @@
         </p:blipFill>
         <p:spPr>
           <a:xfrm>
-            <a:off x="10957255" y="3712464"/>
+            <a:off x="10957255" y="3442716"/>
             <a:ext cx="411480" cy="411480"/>
           </a:xfrm>
           <a:prstGeom prst="rect">
@@ -13705,12 +13705,12 @@
         </p:nvSpPr>
         <p:spPr>
           <a:xfrm>
-            <a:off x="548640" y="4489704"/>
-            <a:ext cx="11094415" cy="896112"/>
+            <a:off x="548640" y="4169664"/>
+            <a:ext cx="11094415" cy="822960"/>
           </a:xfrm>
           <a:prstGeom prst="roundRect">
             <a:avLst>
-              <a:gd name="adj" fmla="val 12245"/>
+              <a:gd name="adj" fmla="val 13333"/>
             </a:avLst>
           </a:prstGeom>
           <a:solidFill>
@@ -13732,7 +13732,7 @@
         </p:nvSpPr>
         <p:spPr>
           <a:xfrm>
-            <a:off x="731520" y="4663440"/>
+            <a:off x="731520" y="4306824"/>
             <a:ext cx="914400" cy="548640"/>
           </a:xfrm>
           <a:prstGeom prst="roundRect">
@@ -13759,7 +13759,7 @@
         </p:nvSpPr>
         <p:spPr>
           <a:xfrm>
-            <a:off x="731520" y="4663440"/>
+            <a:off x="731520" y="4306824"/>
             <a:ext cx="914400" cy="548640"/>
           </a:xfrm>
           <a:prstGeom prst="rect">
@@ -13798,8 +13798,8 @@
         </p:nvSpPr>
         <p:spPr>
           <a:xfrm>
-            <a:off x="1920240" y="4581144"/>
-            <a:ext cx="3566160" cy="713232"/>
+            <a:off x="1920240" y="4261104"/>
+            <a:ext cx="3383280" cy="640080"/>
           </a:xfrm>
           <a:prstGeom prst="rect">
             <a:avLst/>
@@ -13823,7 +13823,7 @@
                 <a:ea typeface="Cambria" pitchFamily="34" charset="-122"/>
                 <a:cs typeface="Cambria" pitchFamily="34" charset="-120"/>
               </a:rPr>
-              <a:t>Calcular a variação do CTO</a:t>
+              <a:t>Estimar os encargos por fonte</a:t>
             </a:r>
             <a:endParaRPr lang="en-US" sz="1800" dirty="0"/>
           </a:p>
@@ -13837,8 +13837,8 @@
         </p:nvSpPr>
         <p:spPr>
           <a:xfrm>
-            <a:off x="5577840" y="4562856"/>
-            <a:ext cx="5120640" cy="749808"/>
+            <a:off x="5715000" y="4242816"/>
+            <a:ext cx="5029200" cy="676656"/>
           </a:xfrm>
           <a:prstGeom prst="rect">
             <a:avLst/>
@@ -13859,7 +13859,7 @@
                   <a:schemeClr val="tx2"/>
                 </a:solidFill>
               </a:rPr>
-              <a:t>diferença do custo total de operação do SIN sem e com baterias.</a:t>
+              <a:t>valor a ser pago por UHEs, UTEs, eólicas e UFVs pela implantação das baterias.</a:t>
             </a:r>
             <a:endParaRPr lang="en-US" sz="1400" dirty="0"/>
           </a:p>
@@ -13867,7 +13867,7 @@
       </p:sp>
       <p:pic>
         <p:nvPicPr>
-          <p:cNvPr id="26" name="Image 3" descr="Calcular a variação do CTO">    </p:cNvPr>
+          <p:cNvPr id="26" name="Image 3" descr="Estimar os encargos por fonte">    </p:cNvPr>
           <p:cNvPicPr>
             <a:picLocks noChangeAspect="1"/>
           </p:cNvPicPr>
@@ -13881,7 +13881,7 @@
         </p:blipFill>
         <p:spPr>
           <a:xfrm>
-            <a:off x="10957255" y="4736592"/>
+            <a:off x="10957255" y="4375404"/>
             <a:ext cx="411480" cy="411480"/>
           </a:xfrm>
           <a:prstGeom prst="rect">
@@ -13897,12 +13897,12 @@
         </p:nvSpPr>
         <p:spPr>
           <a:xfrm>
-            <a:off x="548640" y="5513832"/>
-            <a:ext cx="11094415" cy="896112"/>
+            <a:off x="548640" y="5102352"/>
+            <a:ext cx="11094415" cy="822960"/>
           </a:xfrm>
           <a:prstGeom prst="roundRect">
             <a:avLst>
-              <a:gd name="adj" fmla="val 12245"/>
+              <a:gd name="adj" fmla="val 13333"/>
             </a:avLst>
           </a:prstGeom>
           <a:solidFill>
@@ -13924,7 +13924,7 @@
         </p:nvSpPr>
         <p:spPr>
           <a:xfrm>
-            <a:off x="731520" y="5687568"/>
+            <a:off x="731520" y="5239512"/>
             <a:ext cx="914400" cy="548640"/>
           </a:xfrm>
           <a:prstGeom prst="roundRect">
@@ -13951,7 +13951,7 @@
         </p:nvSpPr>
         <p:spPr>
           <a:xfrm>
-            <a:off x="731520" y="5687568"/>
+            <a:off x="731520" y="5239512"/>
             <a:ext cx="914400" cy="548640"/>
           </a:xfrm>
           <a:prstGeom prst="rect">
@@ -13990,8 +13990,8 @@
         </p:nvSpPr>
         <p:spPr>
           <a:xfrm>
-            <a:off x="1920240" y="5605272"/>
-            <a:ext cx="3566160" cy="713232"/>
+            <a:off x="1920240" y="5193792"/>
+            <a:ext cx="3383280" cy="640080"/>
           </a:xfrm>
           <a:prstGeom prst="rect">
             <a:avLst/>
@@ -14015,7 +14015,7 @@
                 <a:ea typeface="Cambria" pitchFamily="34" charset="-122"/>
                 <a:cs typeface="Cambria" pitchFamily="34" charset="-120"/>
               </a:rPr>
-              <a:t>Estimar os encargos por fonte</a:t>
+              <a:t>Comparar ganho e encargos</a:t>
             </a:r>
             <a:endParaRPr lang="en-US" sz="1800" dirty="0"/>
           </a:p>
@@ -14029,8 +14029,8 @@
         </p:nvSpPr>
         <p:spPr>
           <a:xfrm>
-            <a:off x="5577840" y="5586984"/>
-            <a:ext cx="5120640" cy="749808"/>
+            <a:off x="5715000" y="5175504"/>
+            <a:ext cx="5029200" cy="676656"/>
           </a:xfrm>
           <a:prstGeom prst="rect">
             <a:avLst/>
@@ -14051,7 +14051,7 @@
                   <a:schemeClr val="tx2"/>
                 </a:solidFill>
               </a:rPr>
-              <a:t>valor a ser pago por cada fonte pelas baterias e comparação com a variação do CTO.</a:t>
+              <a:t>no sistema e por fonte, testando H1 e a sensibilidade ao nível de MMGD.</a:t>
             </a:r>
             <a:endParaRPr lang="en-US" sz="1400" dirty="0"/>
           </a:p>
@@ -14059,7 +14059,7 @@
       </p:sp>
       <p:pic>
         <p:nvPicPr>
-          <p:cNvPr id="32" name="Image 4" descr="Estimar os encargos por fonte">    </p:cNvPr>
+          <p:cNvPr id="32" name="Image 4" descr="Comparar ganho e encargos">    </p:cNvPr>
           <p:cNvPicPr>
             <a:picLocks noChangeAspect="1"/>
           </p:cNvPicPr>
@@ -14073,7 +14073,7 @@
         </p:blipFill>
         <p:spPr>
           <a:xfrm>
-            <a:off x="10957255" y="5760720"/>
+            <a:off x="10957255" y="5308092"/>
             <a:ext cx="411480" cy="411480"/>
           </a:xfrm>
           <a:prstGeom prst="rect">
@@ -14081,6 +14081,42 @@
           </a:prstGeom>
         </p:spPr>
       </p:pic>
+      <p:sp>
+        <p:nvSpPr>
+          <p:cNvPr id="33" name="Text 26"/>
+          <p:cNvSpPr txBox="1"/>
+          <p:nvPr/>
+        </p:nvSpPr>
+        <p:spPr>
+          <a:xfrm>
+            <a:off x="548640" y="6053328"/>
+            <a:ext cx="10180015" cy="320040"/>
+          </a:xfrm>
+          <a:prstGeom prst="rect">
+            <a:avLst/>
+          </a:prstGeom>
+          <a:noFill/>
+          <a:ln/>
+        </p:spPr>
+        <p:txBody>
+          <a:bodyPr wrap="square" lIns="0" tIns="0" rIns="0" bIns="0" rtlCol="0" anchor="t"/>
+          <a:lstStyle/>
+          <a:p>
+            <a:pPr indent="0" marL="0">
+              <a:buNone/>
+            </a:pPr>
+            <a:r>
+              <a:rPr lang="en-US" sz="1400" b="1" dirty="0">
+                <a:solidFill>
+                  <a:schemeClr val="tx2"/>
+                </a:solidFill>
+              </a:rPr>
+              <a:t>OE1 a OE3 medem o ganho, OE4 mede o custo e OE5 responde à pergunta de pesquisa.</a:t>
+            </a:r>
+            <a:endParaRPr lang="en-US" sz="1400" dirty="0"/>
+          </a:p>
+        </p:txBody>
+      </p:sp>
       <p:sp>
         <p:nvSpPr>
           <p:cNvPr id="25" name="Slide Number Placeholder 0"/>

--- a/Baterias_SIN_Economia_Setor_Eletrico_I.pptx
+++ b/Baterias_SIN_Economia_Setor_Eletrico_I.pptx
@@ -20,9 +20,15 @@
     <p:sldId id="268" r:id="rId14"/>
     <p:sldId id="269" r:id="rId15"/>
     <p:sldId id="270" r:id="rId16"/>
+    <p:sldId id="271" r:id="rId17"/>
+    <p:sldId id="272" r:id="rId18"/>
+    <p:sldId id="273" r:id="rId19"/>
+    <p:sldId id="274" r:id="rId20"/>
+    <p:sldId id="275" r:id="rId21"/>
+    <p:sldId id="276" r:id="rId22"/>
   </p:sldIdLst>
   <p:notesMasterIdLst>
-    <p:notesMasterId r:id="rId17"/>
+    <p:notesMasterId r:id="rId23"/>
   </p:notesMasterIdLst>
   <p:sldSz cx="12192000" cy="6858000"/>
   <p:notesSz cx="6858000" cy="12192000"/>
@@ -121,12 +127,12 @@
   <p:extLst>
     <p:ext uri="{521415D9-36F7-43E2-AB2F-B90AF26B5E84}">
       <p14:sectionLst xmlns:p14="http://schemas.microsoft.com/office/powerpoint/2010/main">
-        <p14:section name="Abertura" id="{a85628f9-75e7-075f-a306-1f8cf666f13e}">
+        <p14:section name="Abertura" id="{9e83f80d-1974-442e-621d-9cfa1c0eb03a}">
           <p14:sldIdLst>
             <p14:sldId id="256"/>
           </p14:sldIdLst>
         </p14:section>
-        <p14:section name="Introdução" id="{ab0bd54b-b354-a689-3d6c-2fa5098d71df}">
+        <p14:section name="Introdução" id="{976cb22c-1c3d-9128-d66e-a5be9b271e92}">
           <p14:sldIdLst>
             <p14:sldId id="257"/>
             <p14:sldId id="258"/>
@@ -134,13 +140,13 @@
             <p14:sldId id="260"/>
           </p14:sldIdLst>
         </p14:section>
-        <p14:section name="Objetivos" id="{4556daed-491e-7b07-4bab-df590511e6c9}">
+        <p14:section name="Objetivos" id="{c6186bae-ee6a-4ca3-9c17-c4dc70eddbcc}">
           <p14:sldIdLst>
             <p14:sldId id="261"/>
             <p14:sldId id="262"/>
           </p14:sldIdLst>
         </p14:section>
-        <p14:section name="Método" id="{21ddb656-e38e-9c13-4ae2-8b23d795d092}">
+        <p14:section name="Método" id="{26493bf6-070c-154d-cb02-d0a5aeba2246}">
           <p14:sldIdLst>
             <p14:sldId id="263"/>
             <p14:sldId id="264"/>
@@ -148,16 +154,26 @@
             <p14:sldId id="266"/>
           </p14:sldIdLst>
         </p14:section>
-        <p14:section name="Análise" id="{82c8d00c-77f6-9648-fca7-d10aff6001f0}">
+        <p14:section name="Análise" id="{f783c7a7-d89f-e7c7-1169-8de2f534e1e7}">
           <p14:sldIdLst>
             <p14:sldId id="267"/>
             <p14:sldId id="268"/>
-            <p14:sldId id="269"/>
           </p14:sldIdLst>
         </p14:section>
-        <p14:section name="Referências" id="{a855a8d2-c74c-d247-62a4-37029c857692}">
+        <p14:section name="Encargos e benefícios" id="{064a48ef-eaac-293f-da8d-524665e1eaf9}">
           <p14:sldIdLst>
+            <p14:sldId id="269"/>
             <p14:sldId id="270"/>
+            <p14:sldId id="271"/>
+            <p14:sldId id="272"/>
+            <p14:sldId id="273"/>
+            <p14:sldId id="274"/>
+          </p14:sldIdLst>
+        </p14:section>
+        <p14:section name="Fechamento" id="{a8e2627d-1f9e-b4db-ad49-e8edfa0436c7}">
+          <p14:sldIdLst>
+            <p14:sldId id="275"/>
+            <p14:sldId id="276"/>
           </p14:sldIdLst>
         </p14:section>
       </p14:sectionLst>
@@ -167,6 +183,651 @@
     </p:ext>
   </p:extLst>
 </p:presentation>
+</file>
+
+<file path=ppt/charts/chart1.xml><?xml version="1.0" encoding="utf-8"?>
+<c:chartSpace xmlns:c="http://schemas.openxmlformats.org/drawingml/2006/chart" xmlns:a="http://schemas.openxmlformats.org/drawingml/2006/main" xmlns:r="http://schemas.openxmlformats.org/officeDocument/2006/relationships">
+  <c:date1904 val="0"/>
+  <c:roundedCorners val="1"/>
+  <c:chart>
+    <c:title>
+      <c:tx>
+        <c:rich>
+          <a:bodyPr/>
+          <a:lstStyle/>
+          <a:p>
+            <a:pPr>
+              <a:defRPr sz="1400" b="0" i="0" u="none" strike="noStrike">
+                <a:solidFill>
+                  <a:srgbClr val="0B1A2E"/>
+                </a:solidFill>
+                <a:latin typeface="+mn-lt"/>
+              </a:defRPr>
+            </a:pPr>
+            <a:r>
+              <a:rPr sz="1400" b="0" i="0" u="none" strike="noStrike">
+                <a:solidFill>
+                  <a:srgbClr val="0B1A2E"/>
+                </a:solidFill>
+                <a:latin typeface="+mn-lt"/>
+              </a:rPr>
+              <a:t>Parcela do encargo por fonte (%)</a:t>
+            </a:r>
+          </a:p>
+        </c:rich>
+      </c:tx>
+      <c:layout/>
+      <c:overlay val="0"/>
+    </c:title>
+    <c:autoTitleDeleted val="0"/>
+    <c:plotArea>
+      <c:layout/>
+      <c:barChart>
+        <c:barDir val="col"/>
+        <c:grouping val="clustered"/>
+        <c:varyColors val="0"/>
+        <c:ser>
+          <c:idx val="0"/>
+          <c:order val="0"/>
+          <c:tx>
+            <c:strRef>
+              <c:f>Sheet1!$B$1</c:f>
+              <c:strCache>
+                <c:ptCount val="1"/>
+                <c:pt idx="0">
+                  <c:v>R1: rateio universal</c:v>
+                </c:pt>
+              </c:strCache>
+            </c:strRef>
+          </c:tx>
+          <c:spPr>
+            <a:solidFill>
+              <a:srgbClr val="2F6FDE"/>
+            </a:solidFill>
+            <a:effectLst/>
+          </c:spPr>
+          <c:invertIfNegative val="0"/>
+          <c:dLbls>
+            <c:numFmt formatCode="0.0" sourceLinked="0"/>
+            <c:txPr>
+              <a:bodyPr/>
+              <a:lstStyle/>
+              <a:p>
+                <a:pPr>
+                  <a:defRPr b="0" i="0" strike="noStrike" sz="1200" u="none">
+                    <a:solidFill>
+                      <a:srgbClr val="0B1A2E"/>
+                    </a:solidFill>
+                    <a:latin typeface="+mn-lt"/>
+                  </a:defRPr>
+                </a:pPr>
+              </a:p>
+            </c:txPr>
+            <c:showLegendKey val="0"/>
+            <c:showVal val="1"/>
+            <c:showCatName val="0"/>
+            <c:showSerName val="0"/>
+            <c:showPercent val="0"/>
+            <c:showBubbleSize val="0"/>
+            <c:showLeaderLines val="0"/>
+          </c:dLbls>
+          <c:cat>
+            <c:multiLvlStrRef>
+              <c:f>Sheet1!$A$2:$A$4</c:f>
+              <c:multiLvlStrCache>
+                <c:ptCount val="3"/>
+                <c:lvl>
+                  <c:pt idx="0">
+                    <c:v>Hidrelétricas</c:v>
+                  </c:pt>
+                  <c:pt idx="1">
+                    <c:v>Eólicas e solares</c:v>
+                  </c:pt>
+                  <c:pt idx="2">
+                    <c:v>Térmicas e demais</c:v>
+                  </c:pt>
+                </c:lvl>
+              </c:multiLvlStrCache>
+            </c:multiLvlStrRef>
+          </c:cat>
+          <c:val>
+            <c:numRef>
+              <c:f>Sheet1!$B$2:$B$4</c:f>
+              <c:numCache>
+                <c:formatCode>General</c:formatCode>
+                <c:ptCount val="3"/>
+                <c:pt idx="0">
+                  <c:v>51.7</c:v>
+                </c:pt>
+                <c:pt idx="1">
+                  <c:v>26.4</c:v>
+                </c:pt>
+                <c:pt idx="2">
+                  <c:v>21.9</c:v>
+                </c:pt>
+              </c:numCache>
+            </c:numRef>
+          </c:val>
+        </c:ser>
+        <c:ser>
+          <c:idx val="1"/>
+          <c:order val="1"/>
+          <c:tx>
+            <c:strRef>
+              <c:f>Sheet1!$C$1</c:f>
+              <c:strCache>
+                <c:ptCount val="1"/>
+                <c:pt idx="0">
+                  <c:v>R2: modulado por flexibilidade</c:v>
+                </c:pt>
+              </c:strCache>
+            </c:strRef>
+          </c:tx>
+          <c:spPr>
+            <a:solidFill>
+              <a:srgbClr val="F5A524"/>
+            </a:solidFill>
+            <a:effectLst/>
+          </c:spPr>
+          <c:invertIfNegative val="0"/>
+          <c:dLbls>
+            <c:numFmt formatCode="0.0" sourceLinked="0"/>
+            <c:txPr>
+              <a:bodyPr/>
+              <a:lstStyle/>
+              <a:p>
+                <a:pPr>
+                  <a:defRPr b="0" i="0" strike="noStrike" sz="1200" u="none">
+                    <a:solidFill>
+                      <a:srgbClr val="0B1A2E"/>
+                    </a:solidFill>
+                    <a:latin typeface="+mn-lt"/>
+                  </a:defRPr>
+                </a:pPr>
+              </a:p>
+            </c:txPr>
+            <c:showLegendKey val="0"/>
+            <c:showVal val="1"/>
+            <c:showCatName val="0"/>
+            <c:showSerName val="0"/>
+            <c:showPercent val="0"/>
+            <c:showBubbleSize val="0"/>
+            <c:showLeaderLines val="0"/>
+          </c:dLbls>
+          <c:cat>
+            <c:multiLvlStrRef>
+              <c:f>Sheet1!$A$2:$A$4</c:f>
+              <c:multiLvlStrCache>
+                <c:ptCount val="3"/>
+                <c:lvl>
+                  <c:pt idx="0">
+                    <c:v>Hidrelétricas</c:v>
+                  </c:pt>
+                  <c:pt idx="1">
+                    <c:v>Eólicas e solares</c:v>
+                  </c:pt>
+                  <c:pt idx="2">
+                    <c:v>Térmicas e demais</c:v>
+                  </c:pt>
+                </c:lvl>
+              </c:multiLvlStrCache>
+            </c:multiLvlStrRef>
+          </c:cat>
+          <c:val>
+            <c:numRef>
+              <c:f>Sheet1!$C$2:$C$4</c:f>
+              <c:numCache>
+                <c:formatCode>General</c:formatCode>
+                <c:ptCount val="3"/>
+                <c:pt idx="0">
+                  <c:v>24.4</c:v>
+                </c:pt>
+                <c:pt idx="1">
+                  <c:v>49.8</c:v>
+                </c:pt>
+                <c:pt idx="2">
+                  <c:v>25.8</c:v>
+                </c:pt>
+              </c:numCache>
+            </c:numRef>
+          </c:val>
+        </c:ser>
+        <c:dLbls>
+          <c:numFmt formatCode="0.0" sourceLinked="0"/>
+          <c:txPr>
+            <a:bodyPr/>
+            <a:lstStyle/>
+            <a:p>
+              <a:pPr>
+                <a:defRPr b="0" i="0" strike="noStrike" sz="1200" u="none">
+                  <a:solidFill>
+                    <a:srgbClr val="0B1A2E"/>
+                  </a:solidFill>
+                  <a:latin typeface="+mn-lt"/>
+                </a:defRPr>
+              </a:pPr>
+            </a:p>
+          </c:txPr>
+          <c:showLegendKey val="0"/>
+          <c:showVal val="1"/>
+          <c:showCatName val="0"/>
+          <c:showSerName val="0"/>
+          <c:showPercent val="0"/>
+          <c:showBubbleSize val="0"/>
+          <c:showLeaderLines val="0"/>
+        </c:dLbls>
+        <c:gapWidth val="50"/>
+        <c:overlap val="0"/>
+        <c:axId val="2094734554"/>
+        <c:axId val="2094734552"/>
+        <c:axId val="2094734556"/>
+      </c:barChart>
+      <c:catAx>
+        <c:axId val="2094734554"/>
+        <c:scaling>
+          <c:orientation val="minMax"/>
+        </c:scaling>
+        <c:delete val="0"/>
+        <c:axPos val="b"/>
+        <c:numFmt formatCode="General" sourceLinked="1"/>
+        <c:majorTickMark val="out"/>
+        <c:minorTickMark val="none"/>
+        <c:tickLblPos val="low"/>
+        <c:spPr>
+          <a:ln w="12700" cap="flat">
+            <a:solidFill>
+              <a:srgbClr val="888888"/>
+            </a:solidFill>
+            <a:prstDash val="solid"/>
+            <a:round/>
+          </a:ln>
+        </c:spPr>
+        <c:txPr>
+          <a:bodyPr/>
+          <a:lstStyle/>
+          <a:p>
+            <a:pPr>
+              <a:defRPr sz="1200" b="0" i="0" u="none" strike="noStrike">
+                <a:solidFill>
+                  <a:srgbClr val="0B1A2E"/>
+                </a:solidFill>
+                <a:latin typeface="+mn-lt"/>
+              </a:defRPr>
+            </a:pPr>
+            <a:endParaRPr lang="en-US"/>
+          </a:p>
+        </c:txPr>
+        <c:crossAx val="2094734552"/>
+        <c:crosses val="autoZero"/>
+        <c:auto val="1"/>
+        <c:lblAlgn val="ctr"/>
+        <c:noMultiLvlLbl val="1"/>
+      </c:catAx>
+      <c:valAx>
+        <c:axId val="2094734552"/>
+        <c:scaling>
+          <c:orientation val="minMax"/>
+          <c:max val="70"/>
+          <c:min val="0"/>
+        </c:scaling>
+        <c:delete val="0"/>
+        <c:axPos val="l"/>
+        <c:majorGridlines>
+          <c:spPr>
+            <a:ln w="6350" cap="flat">
+              <a:solidFill>
+                <a:srgbClr val="D5DEE8"/>
+              </a:solidFill>
+              <a:prstDash val="solid"/>
+              <a:round/>
+            </a:ln>
+          </c:spPr>
+        </c:majorGridlines>
+        <c:numFmt formatCode="General" sourceLinked="0"/>
+        <c:majorTickMark val="out"/>
+        <c:minorTickMark val="none"/>
+        <c:tickLblPos val="nextTo"/>
+        <c:spPr>
+          <a:ln w="12700" cap="flat">
+            <a:solidFill>
+              <a:srgbClr val="888888"/>
+            </a:solidFill>
+            <a:prstDash val="solid"/>
+            <a:round/>
+          </a:ln>
+        </c:spPr>
+        <c:txPr>
+          <a:bodyPr/>
+          <a:lstStyle/>
+          <a:p>
+            <a:pPr>
+              <a:defRPr sz="1200" b="0" i="0" u="none" strike="noStrike">
+                <a:solidFill>
+                  <a:srgbClr val="5B6B80"/>
+                </a:solidFill>
+                <a:latin typeface="+mn-lt"/>
+              </a:defRPr>
+            </a:pPr>
+            <a:endParaRPr lang="en-US"/>
+          </a:p>
+        </c:txPr>
+        <c:crossAx val="2094734554"/>
+        <c:crosses val="autoZero"/>
+        <c:crossBetween val="between"/>
+      </c:valAx>
+      <c:spPr>
+        <a:noFill/>
+        <a:ln>
+          <a:noFill/>
+        </a:ln>
+        <a:effectLst/>
+      </c:spPr>
+    </c:plotArea>
+    <c:legend>
+      <c:legendPos val="b"/>
+      <c:overlay val="0"/>
+      <c:txPr>
+        <a:bodyPr/>
+        <a:lstStyle/>
+        <a:p>
+          <a:pPr>
+            <a:defRPr sz="1200">
+              <a:solidFill>
+                <a:srgbClr val="0B1A2E"/>
+              </a:solidFill>
+              <a:latin typeface="+mn-lt"/>
+              <a:cs typeface="+mn-lt"/>
+            </a:defRPr>
+          </a:pPr>
+          <a:endParaRPr lang="en-US"/>
+        </a:p>
+      </c:txPr>
+    </c:legend>
+    <c:plotVisOnly val="1"/>
+    <c:dispBlanksAs val="span"/>
+  </c:chart>
+  <c:spPr>
+    <a:noFill/>
+    <a:ln>
+      <a:noFill/>
+    </a:ln>
+    <a:effectLst/>
+  </c:spPr>
+  <c:externalData r:id="rId1">
+    <c:autoUpdate val="0"/>
+  </c:externalData>
+</c:chartSpace>
+</file>
+
+<file path=ppt/charts/chart2.xml><?xml version="1.0" encoding="utf-8"?>
+<c:chartSpace xmlns:c="http://schemas.openxmlformats.org/drawingml/2006/chart" xmlns:a="http://schemas.openxmlformats.org/drawingml/2006/main" xmlns:r="http://schemas.openxmlformats.org/officeDocument/2006/relationships">
+  <c:date1904 val="0"/>
+  <c:roundedCorners val="1"/>
+  <c:chart>
+    <c:title>
+      <c:tx>
+        <c:rich>
+          <a:bodyPr/>
+          <a:lstStyle/>
+          <a:p>
+            <a:pPr>
+              <a:defRPr sz="1400" b="0" i="0" u="none" strike="noStrike">
+                <a:solidFill>
+                  <a:srgbClr val="0B1A2E"/>
+                </a:solidFill>
+                <a:latin typeface="+mn-lt"/>
+              </a:defRPr>
+            </a:pPr>
+            <a:r>
+              <a:rPr sz="1400" b="0" i="0" u="none" strike="noStrike">
+                <a:solidFill>
+                  <a:srgbClr val="0B1A2E"/>
+                </a:solidFill>
+                <a:latin typeface="+mn-lt"/>
+              </a:rPr>
+              <a:t>Benefício anual estimado (R$ bilhões)</a:t>
+            </a:r>
+          </a:p>
+        </c:rich>
+      </c:tx>
+      <c:layout/>
+      <c:overlay val="0"/>
+    </c:title>
+    <c:autoTitleDeleted val="0"/>
+    <c:plotArea>
+      <c:layout/>
+      <c:barChart>
+        <c:barDir val="col"/>
+        <c:grouping val="clustered"/>
+        <c:varyColors val="0"/>
+        <c:ser>
+          <c:idx val="0"/>
+          <c:order val="0"/>
+          <c:tx>
+            <c:strRef>
+              <c:f>Sheet1!$B$1</c:f>
+              <c:strCache>
+                <c:ptCount val="1"/>
+                <c:pt idx="0">
+                  <c:v>Benefício estimado (R$ bi/ano)</c:v>
+                </c:pt>
+              </c:strCache>
+            </c:strRef>
+          </c:tx>
+          <c:spPr>
+            <a:solidFill>
+              <a:srgbClr val="1FB5A8"/>
+            </a:solidFill>
+            <a:effectLst/>
+          </c:spPr>
+          <c:invertIfNegative val="0"/>
+          <c:dLbls>
+            <c:numFmt formatCode="0.0" sourceLinked="0"/>
+            <c:txPr>
+              <a:bodyPr/>
+              <a:lstStyle/>
+              <a:p>
+                <a:pPr>
+                  <a:defRPr b="0" i="0" strike="noStrike" sz="1400" u="none">
+                    <a:solidFill>
+                      <a:srgbClr val="0B1A2E"/>
+                    </a:solidFill>
+                    <a:latin typeface="+mn-lt"/>
+                  </a:defRPr>
+                </a:pPr>
+              </a:p>
+            </c:txPr>
+            <c:showLegendKey val="0"/>
+            <c:showVal val="1"/>
+            <c:showCatName val="0"/>
+            <c:showSerName val="0"/>
+            <c:showPercent val="0"/>
+            <c:showBubbleSize val="0"/>
+            <c:showLeaderLines val="0"/>
+          </c:dLbls>
+          <c:cat>
+            <c:multiLvlStrRef>
+              <c:f>Sheet1!$A$2:$A$4</c:f>
+              <c:multiLvlStrCache>
+                <c:ptCount val="3"/>
+                <c:lvl>
+                  <c:pt idx="0">
+                    <c:v>4,5 GW (Volt Robotics e ABSAE)</c:v>
+                  </c:pt>
+                  <c:pt idx="1">
+                    <c:v>Até 6 GW (ABSAE e Volt Robotics)</c:v>
+                  </c:pt>
+                  <c:pt idx="2">
+                    <c:v>2 GW (ABSAE)</c:v>
+                  </c:pt>
+                </c:lvl>
+              </c:multiLvlStrCache>
+            </c:multiLvlStrRef>
+          </c:cat>
+          <c:val>
+            <c:numRef>
+              <c:f>Sheet1!$B$2:$B$4</c:f>
+              <c:numCache>
+                <c:formatCode>General</c:formatCode>
+                <c:ptCount val="3"/>
+                <c:pt idx="0">
+                  <c:v>8.9</c:v>
+                </c:pt>
+                <c:pt idx="1">
+                  <c:v>6</c:v>
+                </c:pt>
+                <c:pt idx="2">
+                  <c:v>3.2</c:v>
+                </c:pt>
+              </c:numCache>
+            </c:numRef>
+          </c:val>
+        </c:ser>
+        <c:dLbls>
+          <c:numFmt formatCode="0.0" sourceLinked="0"/>
+          <c:txPr>
+            <a:bodyPr/>
+            <a:lstStyle/>
+            <a:p>
+              <a:pPr>
+                <a:defRPr b="0" i="0" strike="noStrike" sz="1400" u="none">
+                  <a:solidFill>
+                    <a:srgbClr val="0B1A2E"/>
+                  </a:solidFill>
+                  <a:latin typeface="+mn-lt"/>
+                </a:defRPr>
+              </a:pPr>
+            </a:p>
+          </c:txPr>
+          <c:showLegendKey val="0"/>
+          <c:showVal val="1"/>
+          <c:showCatName val="0"/>
+          <c:showSerName val="0"/>
+          <c:showPercent val="0"/>
+          <c:showBubbleSize val="0"/>
+          <c:showLeaderLines val="0"/>
+        </c:dLbls>
+        <c:gapWidth val="60"/>
+        <c:overlap val="0"/>
+        <c:axId val="2094734554"/>
+        <c:axId val="2094734552"/>
+        <c:axId val="2094734556"/>
+      </c:barChart>
+      <c:catAx>
+        <c:axId val="2094734554"/>
+        <c:scaling>
+          <c:orientation val="minMax"/>
+        </c:scaling>
+        <c:delete val="0"/>
+        <c:axPos val="b"/>
+        <c:numFmt formatCode="General" sourceLinked="1"/>
+        <c:majorTickMark val="out"/>
+        <c:minorTickMark val="none"/>
+        <c:tickLblPos val="low"/>
+        <c:spPr>
+          <a:ln w="12700" cap="flat">
+            <a:solidFill>
+              <a:srgbClr val="888888"/>
+            </a:solidFill>
+            <a:prstDash val="solid"/>
+            <a:round/>
+          </a:ln>
+        </c:spPr>
+        <c:txPr>
+          <a:bodyPr/>
+          <a:lstStyle/>
+          <a:p>
+            <a:pPr>
+              <a:defRPr sz="1200" b="0" i="0" u="none" strike="noStrike">
+                <a:solidFill>
+                  <a:srgbClr val="0B1A2E"/>
+                </a:solidFill>
+                <a:latin typeface="+mn-lt"/>
+              </a:defRPr>
+            </a:pPr>
+            <a:endParaRPr lang="en-US"/>
+          </a:p>
+        </c:txPr>
+        <c:crossAx val="2094734552"/>
+        <c:crosses val="autoZero"/>
+        <c:auto val="1"/>
+        <c:lblAlgn val="ctr"/>
+        <c:noMultiLvlLbl val="1"/>
+      </c:catAx>
+      <c:valAx>
+        <c:axId val="2094734552"/>
+        <c:scaling>
+          <c:orientation val="minMax"/>
+          <c:max val="10"/>
+          <c:min val="0"/>
+        </c:scaling>
+        <c:delete val="0"/>
+        <c:axPos val="l"/>
+        <c:majorGridlines>
+          <c:spPr>
+            <a:ln w="6350" cap="flat">
+              <a:solidFill>
+                <a:srgbClr val="D5DEE8"/>
+              </a:solidFill>
+              <a:prstDash val="solid"/>
+              <a:round/>
+            </a:ln>
+          </c:spPr>
+        </c:majorGridlines>
+        <c:numFmt formatCode="General" sourceLinked="0"/>
+        <c:majorTickMark val="out"/>
+        <c:minorTickMark val="none"/>
+        <c:tickLblPos val="nextTo"/>
+        <c:spPr>
+          <a:ln w="12700" cap="flat">
+            <a:solidFill>
+              <a:srgbClr val="888888"/>
+            </a:solidFill>
+            <a:prstDash val="solid"/>
+            <a:round/>
+          </a:ln>
+        </c:spPr>
+        <c:txPr>
+          <a:bodyPr/>
+          <a:lstStyle/>
+          <a:p>
+            <a:pPr>
+              <a:defRPr sz="1200" b="0" i="0" u="none" strike="noStrike">
+                <a:solidFill>
+                  <a:srgbClr val="5B6B80"/>
+                </a:solidFill>
+                <a:latin typeface="+mn-lt"/>
+              </a:defRPr>
+            </a:pPr>
+            <a:endParaRPr lang="en-US"/>
+          </a:p>
+        </c:txPr>
+        <c:crossAx val="2094734554"/>
+        <c:crosses val="autoZero"/>
+        <c:crossBetween val="between"/>
+      </c:valAx>
+      <c:spPr>
+        <a:noFill/>
+        <a:ln>
+          <a:noFill/>
+        </a:ln>
+        <a:effectLst/>
+      </c:spPr>
+    </c:plotArea>
+    <c:plotVisOnly val="1"/>
+    <c:dispBlanksAs val="span"/>
+  </c:chart>
+  <c:spPr>
+    <a:noFill/>
+    <a:ln>
+      <a:noFill/>
+    </a:ln>
+    <a:effectLst/>
+  </c:spPr>
+  <c:externalData r:id="rId1">
+    <c:autoUpdate val="0"/>
+  </c:externalData>
+</c:chartSpace>
 </file>
 
 <file path=ppt/notesMasters/notesMaster1.xml><?xml version="1.0" encoding="utf-8"?>
@@ -1004,7 +1665,7 @@
           <a:p>
             <a:r>
               <a:rPr lang="en-US" dirty="0"/>
-              <a:t>Fechamento: problema, pergunta, método e resposta esperada, em uma linha cada.</a:t>
+              <a:t>Pela Lei 15.269/2025, o custo das baterias é rateado só entre geradores; a ANEEL regulamenta a divisão. A regra ainda está em consulta pública e há projetos de lei para incluir os consumidores. A data da Portaria 136/2026 varia entre as fontes (início de junho de 2026).</a:t>
             </a:r>
             <a:endParaRPr lang="en-US" dirty="0"/>
           </a:p>
@@ -1092,7 +1753,7 @@
           <a:p>
             <a:r>
               <a:rPr lang="en-US" dirty="0"/>
-              <a:t>Algumas fontes são imprensa e consultorias setoriais; vale conferir os dados nas fontes primárias (ONS, EPE, ANEEL) antes da apresentação.</a:t>
+              <a:t>O vencedor recebe receita fixa, e o conjunto de receitas mais a energia de recarga forma o encargo Ercap-SAE, que a lei manda ratear entre os geradores. As penalidades são as da minuta em consulta.</a:t>
             </a:r>
             <a:endParaRPr lang="en-US" dirty="0"/>
           </a:p>
@@ -1116,6 +1777,358 @@
             <a:fld id="{F7021451-1387-4CA6-816F-3879F97B5CBC}" type="slidenum">
               <a:rPr lang="en-US"/>
               <a:t>15</a:t>
+            </a:fld>
+            <a:endParaRPr lang="en-US"/>
+          </a:p>
+        </p:txBody>
+      </p:sp>
+    </p:spTree>
+    <p:extLst>
+      <p:ext uri="{BB962C8B-B14F-4D97-AF65-F5344CB8AC3E}">
+        <p14:creationId xmlns:p14="http://schemas.microsoft.com/office/powerpoint/2010/main" val="1024086991"/>
+      </p:ext>
+    </p:extLst>
+  </p:cSld>
+  <p:clrMapOvr>
+    <a:masterClrMapping/>
+  </p:clrMapOvr>
+</p:notes>
+</file>
+
+<file path=ppt/notesSlides/notesSlide16.xml><?xml version="1.0" encoding="utf-8"?>
+<p:notes xmlns:a="http://schemas.openxmlformats.org/drawingml/2006/main" xmlns:r="http://schemas.openxmlformats.org/officeDocument/2006/relationships" xmlns:p="http://schemas.openxmlformats.org/presentationml/2006/main">
+  <p:cSld>
+    <p:spTree>
+      <p:nvGrpSpPr>
+        <p:cNvPr id="1" name=""/>
+        <p:cNvGrpSpPr/>
+        <p:nvPr/>
+      </p:nvGrpSpPr>
+      <p:grpSpPr>
+        <a:xfrm>
+          <a:off x="0" y="0"/>
+          <a:ext cx="0" cy="0"/>
+          <a:chOff x="0" y="0"/>
+          <a:chExt cx="0" cy="0"/>
+        </a:xfrm>
+      </p:grpSpPr>
+      <p:sp>
+        <p:nvSpPr>
+          <p:cNvPr id="2" name="Slide Image Placeholder 1"/>
+          <p:cNvSpPr>
+            <a:spLocks noGrp="1" noRot="1" noChangeAspect="1"/>
+          </p:cNvSpPr>
+          <p:nvPr>
+            <p:ph type="sldImg"/>
+          </p:nvPr>
+        </p:nvSpPr>
+        <p:spPr/>
+      </p:sp>
+      <p:sp>
+        <p:nvSpPr>
+          <p:cNvPr id="3" name="Notes Placeholder 2"/>
+          <p:cNvSpPr>
+            <a:spLocks noGrp="1"/>
+          </p:cNvSpPr>
+          <p:nvPr>
+            <p:ph type="body" idx="1"/>
+          </p:nvPr>
+        </p:nvSpPr>
+        <p:spPr/>
+        <p:txBody>
+          <a:bodyPr/>
+          <a:lstStyle/>
+          <a:p>
+            <a:r>
+              <a:rPr lang="en-US" dirty="0"/>
+              <a:t>Os coeficientes de 100% a 25% são da proposta da área técnica em consulta pública; podem mudar. Os três cenários de rateio (R1 a R3) alimentam a análise de sensibilidade do OE4 e do OE5.</a:t>
+            </a:r>
+            <a:endParaRPr lang="en-US" dirty="0"/>
+          </a:p>
+        </p:txBody>
+      </p:sp>
+      <p:sp>
+        <p:nvSpPr>
+          <p:cNvPr id="4" name="Slide Number Placeholder 3"/>
+          <p:cNvSpPr>
+            <a:spLocks noGrp="1"/>
+          </p:cNvSpPr>
+          <p:nvPr>
+            <p:ph type="sldNum" sz="quarter" idx="10"/>
+          </p:nvPr>
+        </p:nvSpPr>
+        <p:spPr/>
+        <p:txBody>
+          <a:bodyPr/>
+          <a:lstStyle/>
+          <a:p>
+            <a:fld id="{F7021451-1387-4CA6-816F-3879F97B5CBC}" type="slidenum">
+              <a:rPr lang="en-US"/>
+              <a:t>16</a:t>
+            </a:fld>
+            <a:endParaRPr lang="en-US"/>
+          </a:p>
+        </p:txBody>
+      </p:sp>
+    </p:spTree>
+    <p:extLst>
+      <p:ext uri="{BB962C8B-B14F-4D97-AF65-F5344CB8AC3E}">
+        <p14:creationId xmlns:p14="http://schemas.microsoft.com/office/powerpoint/2010/main" val="1024086991"/>
+      </p:ext>
+    </p:extLst>
+  </p:cSld>
+  <p:clrMapOvr>
+    <a:masterClrMapping/>
+  </p:clrMapOvr>
+</p:notes>
+</file>
+
+<file path=ppt/notesSlides/notesSlide17.xml><?xml version="1.0" encoding="utf-8"?>
+<p:notes xmlns:a="http://schemas.openxmlformats.org/drawingml/2006/main" xmlns:r="http://schemas.openxmlformats.org/officeDocument/2006/relationships" xmlns:p="http://schemas.openxmlformats.org/presentationml/2006/main">
+  <p:cSld>
+    <p:spTree>
+      <p:nvGrpSpPr>
+        <p:cNvPr id="1" name=""/>
+        <p:cNvGrpSpPr/>
+        <p:nvPr/>
+      </p:nvGrpSpPr>
+      <p:grpSpPr>
+        <a:xfrm>
+          <a:off x="0" y="0"/>
+          <a:ext cx="0" cy="0"/>
+          <a:chOff x="0" y="0"/>
+          <a:chExt cx="0" cy="0"/>
+        </a:xfrm>
+      </p:grpSpPr>
+      <p:sp>
+        <p:nvSpPr>
+          <p:cNvPr id="2" name="Slide Image Placeholder 1"/>
+          <p:cNvSpPr>
+            <a:spLocks noGrp="1" noRot="1" noChangeAspect="1"/>
+          </p:cNvSpPr>
+          <p:nvPr>
+            <p:ph type="sldImg"/>
+          </p:nvPr>
+        </p:nvSpPr>
+        <p:spPr/>
+      </p:sp>
+      <p:sp>
+        <p:nvSpPr>
+          <p:cNvPr id="3" name="Notes Placeholder 2"/>
+          <p:cNvSpPr>
+            <a:spLocks noGrp="1"/>
+          </p:cNvSpPr>
+          <p:nvPr>
+            <p:ph type="body" idx="1"/>
+          </p:nvPr>
+        </p:nvSpPr>
+        <p:spPr/>
+        <p:txBody>
+          <a:bodyPr/>
+          <a:lstStyle/>
+          <a:p>
+            <a:r>
+              <a:rPr lang="en-US" dirty="0"/>
+              <a:t>Exercício ilustrativo, não é a regra oficial. Parcela da fonte = geração x coeficiente, dividida pela soma. R1 não usa coeficiente. Em R2, hidro 25% e eólica e solar 100% são as pontas citadas na proposta; as térmicas variam de 25% a 100% e o gráfico usa o ponto médio. Resultado do ponto médio: hidro 24,4%, eólica e solar 49,8%, térmicas 25,8%. Faixas: térmicas a 100% dá hidro 21,1%, eólica e solar 43,1%, térmicas 35,8%; térmicas a 25% dá 28,9%, 58,9% e 12,2%. A MMGD está fora do rateio e a amostra da EPE pode incluí-la na geração.</a:t>
+            </a:r>
+            <a:endParaRPr lang="en-US" dirty="0"/>
+          </a:p>
+        </p:txBody>
+      </p:sp>
+      <p:sp>
+        <p:nvSpPr>
+          <p:cNvPr id="4" name="Slide Number Placeholder 3"/>
+          <p:cNvSpPr>
+            <a:spLocks noGrp="1"/>
+          </p:cNvSpPr>
+          <p:nvPr>
+            <p:ph type="sldNum" sz="quarter" idx="10"/>
+          </p:nvPr>
+        </p:nvSpPr>
+        <p:spPr/>
+        <p:txBody>
+          <a:bodyPr/>
+          <a:lstStyle/>
+          <a:p>
+            <a:fld id="{F7021451-1387-4CA6-816F-3879F97B5CBC}" type="slidenum">
+              <a:rPr lang="en-US"/>
+              <a:t>17</a:t>
+            </a:fld>
+            <a:endParaRPr lang="en-US"/>
+          </a:p>
+        </p:txBody>
+      </p:sp>
+    </p:spTree>
+    <p:extLst>
+      <p:ext uri="{BB962C8B-B14F-4D97-AF65-F5344CB8AC3E}">
+        <p14:creationId xmlns:p14="http://schemas.microsoft.com/office/powerpoint/2010/main" val="1024086991"/>
+      </p:ext>
+    </p:extLst>
+  </p:cSld>
+  <p:clrMapOvr>
+    <a:masterClrMapping/>
+  </p:clrMapOvr>
+</p:notes>
+</file>
+
+<file path=ppt/notesSlides/notesSlide18.xml><?xml version="1.0" encoding="utf-8"?>
+<p:notes xmlns:a="http://schemas.openxmlformats.org/drawingml/2006/main" xmlns:r="http://schemas.openxmlformats.org/officeDocument/2006/relationships" xmlns:p="http://schemas.openxmlformats.org/presentationml/2006/main">
+  <p:cSld>
+    <p:spTree>
+      <p:nvGrpSpPr>
+        <p:cNvPr id="1" name=""/>
+        <p:cNvGrpSpPr/>
+        <p:nvPr/>
+      </p:nvGrpSpPr>
+      <p:grpSpPr>
+        <a:xfrm>
+          <a:off x="0" y="0"/>
+          <a:ext cx="0" cy="0"/>
+          <a:chOff x="0" y="0"/>
+          <a:chExt cx="0" cy="0"/>
+        </a:xfrm>
+      </p:grpSpPr>
+      <p:sp>
+        <p:nvSpPr>
+          <p:cNvPr id="2" name="Slide Image Placeholder 1"/>
+          <p:cNvSpPr>
+            <a:spLocks noGrp="1" noRot="1" noChangeAspect="1"/>
+          </p:cNvSpPr>
+          <p:nvPr>
+            <p:ph type="sldImg"/>
+          </p:nvPr>
+        </p:nvSpPr>
+        <p:spPr/>
+      </p:sp>
+      <p:sp>
+        <p:nvSpPr>
+          <p:cNvPr id="3" name="Notes Placeholder 2"/>
+          <p:cNvSpPr>
+            <a:spLocks noGrp="1"/>
+          </p:cNvSpPr>
+          <p:nvPr>
+            <p:ph type="body" idx="1"/>
+          </p:nvPr>
+        </p:nvSpPr>
+        <p:spPr/>
+        <p:txBody>
+          <a:bodyPr/>
+          <a:lstStyle/>
+          <a:p>
+            <a:r>
+              <a:rPr lang="en-US" dirty="0"/>
+              <a:t>Os números são de estudos do setor (ABSAE e Volt Robotics) e variam entre R$ 3 e R$ 9 bilhões por ano conforme a potência e as premissas. Não são resultados do nosso trabalho; servem de ordem de grandeza para comparar com o encargo.</a:t>
+            </a:r>
+            <a:endParaRPr lang="en-US" dirty="0"/>
+          </a:p>
+        </p:txBody>
+      </p:sp>
+      <p:sp>
+        <p:nvSpPr>
+          <p:cNvPr id="4" name="Slide Number Placeholder 3"/>
+          <p:cNvSpPr>
+            <a:spLocks noGrp="1"/>
+          </p:cNvSpPr>
+          <p:nvPr>
+            <p:ph type="sldNum" sz="quarter" idx="10"/>
+          </p:nvPr>
+        </p:nvSpPr>
+        <p:spPr/>
+        <p:txBody>
+          <a:bodyPr/>
+          <a:lstStyle/>
+          <a:p>
+            <a:fld id="{F7021451-1387-4CA6-816F-3879F97B5CBC}" type="slidenum">
+              <a:rPr lang="en-US"/>
+              <a:t>18</a:t>
+            </a:fld>
+            <a:endParaRPr lang="en-US"/>
+          </a:p>
+        </p:txBody>
+      </p:sp>
+    </p:spTree>
+    <p:extLst>
+      <p:ext uri="{BB962C8B-B14F-4D97-AF65-F5344CB8AC3E}">
+        <p14:creationId xmlns:p14="http://schemas.microsoft.com/office/powerpoint/2010/main" val="1024086991"/>
+      </p:ext>
+    </p:extLst>
+  </p:cSld>
+  <p:clrMapOvr>
+    <a:masterClrMapping/>
+  </p:clrMapOvr>
+</p:notes>
+</file>
+
+<file path=ppt/notesSlides/notesSlide19.xml><?xml version="1.0" encoding="utf-8"?>
+<p:notes xmlns:a="http://schemas.openxmlformats.org/drawingml/2006/main" xmlns:r="http://schemas.openxmlformats.org/officeDocument/2006/relationships" xmlns:p="http://schemas.openxmlformats.org/presentationml/2006/main">
+  <p:cSld>
+    <p:spTree>
+      <p:nvGrpSpPr>
+        <p:cNvPr id="1" name=""/>
+        <p:cNvGrpSpPr/>
+        <p:nvPr/>
+      </p:nvGrpSpPr>
+      <p:grpSpPr>
+        <a:xfrm>
+          <a:off x="0" y="0"/>
+          <a:ext cx="0" cy="0"/>
+          <a:chOff x="0" y="0"/>
+          <a:chExt cx="0" cy="0"/>
+        </a:xfrm>
+      </p:grpSpPr>
+      <p:sp>
+        <p:nvSpPr>
+          <p:cNvPr id="2" name="Slide Image Placeholder 1"/>
+          <p:cNvSpPr>
+            <a:spLocks noGrp="1" noRot="1" noChangeAspect="1"/>
+          </p:cNvSpPr>
+          <p:nvPr>
+            <p:ph type="sldImg"/>
+          </p:nvPr>
+        </p:nvSpPr>
+        <p:spPr/>
+      </p:sp>
+      <p:sp>
+        <p:nvSpPr>
+          <p:cNvPr id="3" name="Notes Placeholder 2"/>
+          <p:cNvSpPr>
+            <a:spLocks noGrp="1"/>
+          </p:cNvSpPr>
+          <p:nvPr>
+            <p:ph type="body" idx="1"/>
+          </p:nvPr>
+        </p:nvSpPr>
+        <p:spPr/>
+        <p:txBody>
+          <a:bodyPr/>
+          <a:lstStyle/>
+          <a:p>
+            <a:r>
+              <a:rPr lang="en-US" dirty="0"/>
+              <a:t>Esta tabela organiza as hipóteses: eólicas e UFVs pagam mais, mas são as que mais ganham com menos corte. As térmicas podem perder despacho. As hidrelétricas pagam menos e ganham em risco hidrológico e armazenamento. As simulações dirão o saldo real.</a:t>
+            </a:r>
+            <a:endParaRPr lang="en-US" dirty="0"/>
+          </a:p>
+        </p:txBody>
+      </p:sp>
+      <p:sp>
+        <p:nvSpPr>
+          <p:cNvPr id="4" name="Slide Number Placeholder 3"/>
+          <p:cNvSpPr>
+            <a:spLocks noGrp="1"/>
+          </p:cNvSpPr>
+          <p:nvPr>
+            <p:ph type="sldNum" sz="quarter" idx="10"/>
+          </p:nvPr>
+        </p:nvSpPr>
+        <p:spPr/>
+        <p:txBody>
+          <a:bodyPr/>
+          <a:lstStyle/>
+          <a:p>
+            <a:fld id="{F7021451-1387-4CA6-816F-3879F97B5CBC}" type="slidenum">
+              <a:rPr lang="en-US"/>
+              <a:t>19</a:t>
             </a:fld>
             <a:endParaRPr lang="en-US"/>
           </a:p>
@@ -1204,6 +2217,182 @@
             <a:fld id="{F7021451-1387-4CA6-816F-3879F97B5CBC}" type="slidenum">
               <a:rPr lang="en-US"/>
               <a:t>2</a:t>
+            </a:fld>
+            <a:endParaRPr lang="en-US"/>
+          </a:p>
+        </p:txBody>
+      </p:sp>
+    </p:spTree>
+    <p:extLst>
+      <p:ext uri="{BB962C8B-B14F-4D97-AF65-F5344CB8AC3E}">
+        <p14:creationId xmlns:p14="http://schemas.microsoft.com/office/powerpoint/2010/main" val="1024086991"/>
+      </p:ext>
+    </p:extLst>
+  </p:cSld>
+  <p:clrMapOvr>
+    <a:masterClrMapping/>
+  </p:clrMapOvr>
+</p:notes>
+</file>
+
+<file path=ppt/notesSlides/notesSlide20.xml><?xml version="1.0" encoding="utf-8"?>
+<p:notes xmlns:a="http://schemas.openxmlformats.org/drawingml/2006/main" xmlns:r="http://schemas.openxmlformats.org/officeDocument/2006/relationships" xmlns:p="http://schemas.openxmlformats.org/presentationml/2006/main">
+  <p:cSld>
+    <p:spTree>
+      <p:nvGrpSpPr>
+        <p:cNvPr id="1" name=""/>
+        <p:cNvGrpSpPr/>
+        <p:nvPr/>
+      </p:nvGrpSpPr>
+      <p:grpSpPr>
+        <a:xfrm>
+          <a:off x="0" y="0"/>
+          <a:ext cx="0" cy="0"/>
+          <a:chOff x="0" y="0"/>
+          <a:chExt cx="0" cy="0"/>
+        </a:xfrm>
+      </p:grpSpPr>
+      <p:sp>
+        <p:nvSpPr>
+          <p:cNvPr id="2" name="Slide Image Placeholder 1"/>
+          <p:cNvSpPr>
+            <a:spLocks noGrp="1" noRot="1" noChangeAspect="1"/>
+          </p:cNvSpPr>
+          <p:nvPr>
+            <p:ph type="sldImg"/>
+          </p:nvPr>
+        </p:nvSpPr>
+        <p:spPr/>
+      </p:sp>
+      <p:sp>
+        <p:nvSpPr>
+          <p:cNvPr id="3" name="Notes Placeholder 2"/>
+          <p:cNvSpPr>
+            <a:spLocks noGrp="1"/>
+          </p:cNvSpPr>
+          <p:nvPr>
+            <p:ph type="body" idx="1"/>
+          </p:nvPr>
+        </p:nvSpPr>
+        <p:spPr/>
+        <p:txBody>
+          <a:bodyPr/>
+          <a:lstStyle/>
+          <a:p>
+            <a:r>
+              <a:rPr lang="en-US" dirty="0"/>
+              <a:t>Fechamento: problema, pergunta, método e resposta esperada, em uma linha cada.</a:t>
+            </a:r>
+            <a:endParaRPr lang="en-US" dirty="0"/>
+          </a:p>
+        </p:txBody>
+      </p:sp>
+      <p:sp>
+        <p:nvSpPr>
+          <p:cNvPr id="4" name="Slide Number Placeholder 3"/>
+          <p:cNvSpPr>
+            <a:spLocks noGrp="1"/>
+          </p:cNvSpPr>
+          <p:nvPr>
+            <p:ph type="sldNum" sz="quarter" idx="10"/>
+          </p:nvPr>
+        </p:nvSpPr>
+        <p:spPr/>
+        <p:txBody>
+          <a:bodyPr/>
+          <a:lstStyle/>
+          <a:p>
+            <a:fld id="{F7021451-1387-4CA6-816F-3879F97B5CBC}" type="slidenum">
+              <a:rPr lang="en-US"/>
+              <a:t>20</a:t>
+            </a:fld>
+            <a:endParaRPr lang="en-US"/>
+          </a:p>
+        </p:txBody>
+      </p:sp>
+    </p:spTree>
+    <p:extLst>
+      <p:ext uri="{BB962C8B-B14F-4D97-AF65-F5344CB8AC3E}">
+        <p14:creationId xmlns:p14="http://schemas.microsoft.com/office/powerpoint/2010/main" val="1024086991"/>
+      </p:ext>
+    </p:extLst>
+  </p:cSld>
+  <p:clrMapOvr>
+    <a:masterClrMapping/>
+  </p:clrMapOvr>
+</p:notes>
+</file>
+
+<file path=ppt/notesSlides/notesSlide21.xml><?xml version="1.0" encoding="utf-8"?>
+<p:notes xmlns:a="http://schemas.openxmlformats.org/drawingml/2006/main" xmlns:r="http://schemas.openxmlformats.org/officeDocument/2006/relationships" xmlns:p="http://schemas.openxmlformats.org/presentationml/2006/main">
+  <p:cSld>
+    <p:spTree>
+      <p:nvGrpSpPr>
+        <p:cNvPr id="1" name=""/>
+        <p:cNvGrpSpPr/>
+        <p:nvPr/>
+      </p:nvGrpSpPr>
+      <p:grpSpPr>
+        <a:xfrm>
+          <a:off x="0" y="0"/>
+          <a:ext cx="0" cy="0"/>
+          <a:chOff x="0" y="0"/>
+          <a:chExt cx="0" cy="0"/>
+        </a:xfrm>
+      </p:grpSpPr>
+      <p:sp>
+        <p:nvSpPr>
+          <p:cNvPr id="2" name="Slide Image Placeholder 1"/>
+          <p:cNvSpPr>
+            <a:spLocks noGrp="1" noRot="1" noChangeAspect="1"/>
+          </p:cNvSpPr>
+          <p:nvPr>
+            <p:ph type="sldImg"/>
+          </p:nvPr>
+        </p:nvSpPr>
+        <p:spPr/>
+      </p:sp>
+      <p:sp>
+        <p:nvSpPr>
+          <p:cNvPr id="3" name="Notes Placeholder 2"/>
+          <p:cNvSpPr>
+            <a:spLocks noGrp="1"/>
+          </p:cNvSpPr>
+          <p:nvPr>
+            <p:ph type="body" idx="1"/>
+          </p:nvPr>
+        </p:nvSpPr>
+        <p:spPr/>
+        <p:txBody>
+          <a:bodyPr/>
+          <a:lstStyle/>
+          <a:p>
+            <a:r>
+              <a:rPr lang="en-US" dirty="0"/>
+              <a:t>Algumas fontes são imprensa e consultorias setoriais; vale conferir os dados nas fontes primárias (ONS, EPE, ANEEL) antes da apresentação.</a:t>
+            </a:r>
+            <a:endParaRPr lang="en-US" dirty="0"/>
+          </a:p>
+        </p:txBody>
+      </p:sp>
+      <p:sp>
+        <p:nvSpPr>
+          <p:cNvPr id="4" name="Slide Number Placeholder 3"/>
+          <p:cNvSpPr>
+            <a:spLocks noGrp="1"/>
+          </p:cNvSpPr>
+          <p:nvPr>
+            <p:ph type="sldNum" sz="quarter" idx="10"/>
+          </p:nvPr>
+        </p:nvSpPr>
+        <p:spPr/>
+        <p:txBody>
+          <a:bodyPr/>
+          <a:lstStyle/>
+          <a:p>
+            <a:fld id="{F7021451-1387-4CA6-816F-3879F97B5CBC}" type="slidenum">
+              <a:rPr lang="en-US"/>
+              <a:t>21</a:t>
             </a:fld>
             <a:endParaRPr lang="en-US"/>
           </a:p>
@@ -7809,10 +8998,10 @@
             <a:r>
               <a:rPr lang="en-US" sz="3200" b="1" dirty="0">
                 <a:solidFill>
-                  <a:schemeClr val="bg1"/>
-                </a:solidFill>
-              </a:rPr>
-              <a:t>Síntese</a:t>
+                  <a:schemeClr val="tx1"/>
+                </a:solidFill>
+              </a:rPr>
+              <a:t>Quem paga: base legal e regulatória</a:t>
             </a:r>
             <a:endParaRPr lang="en-US" sz="3200" dirty="0"/>
           </a:p>
@@ -7820,18 +9009,18 @@
       </p:sp>
       <p:sp>
         <p:nvSpPr>
-          <p:cNvPr id="3" name="Summary row 1"/>
+          <p:cNvPr id="3" name="Date chip 1"/>
           <p:cNvSpPr/>
           <p:nvPr/>
         </p:nvSpPr>
         <p:spPr>
           <a:xfrm>
-            <a:off x="548640" y="1463040"/>
-            <a:ext cx="11094415" cy="1097280"/>
+            <a:off x="548640" y="1417320"/>
+            <a:ext cx="1828800" cy="1097280"/>
           </a:xfrm>
           <a:prstGeom prst="roundRect">
             <a:avLst>
-              <a:gd name="adj" fmla="val 10000"/>
+              <a:gd name="adj" fmla="val 8333"/>
             </a:avLst>
           </a:prstGeom>
           <a:solidFill>
@@ -7853,8 +9042,8 @@
         </p:nvSpPr>
         <p:spPr>
           <a:xfrm>
-            <a:off x="914400" y="1463040"/>
-            <a:ext cx="2194560" cy="1097280"/>
+            <a:off x="548640" y="1417320"/>
+            <a:ext cx="1828800" cy="1097280"/>
           </a:xfrm>
           <a:prstGeom prst="rect">
             <a:avLst/>
@@ -7866,74 +9055,189 @@
           <a:bodyPr wrap="square" lIns="0" tIns="0" rIns="0" bIns="0" rtlCol="0" anchor="ctr"/>
           <a:lstStyle/>
           <a:p>
-            <a:pPr indent="0" marL="0">
-              <a:buNone/>
-            </a:pPr>
-            <a:r>
-              <a:rPr lang="en-US" sz="2000" b="1" dirty="0">
-                <a:solidFill>
-                  <a:schemeClr val="accent1"/>
+            <a:pPr algn="ctr" indent="0" marL="0">
+              <a:buNone/>
+            </a:pPr>
+            <a:r>
+              <a:rPr lang="en-US" sz="1600" b="1" dirty="0">
+                <a:solidFill>
+                  <a:schemeClr val="bg1"/>
                 </a:solidFill>
                 <a:latin typeface="Cambria" pitchFamily="34" charset="0"/>
                 <a:ea typeface="Cambria" pitchFamily="34" charset="-122"/>
                 <a:cs typeface="Cambria" pitchFamily="34" charset="-120"/>
               </a:rPr>
-              <a:t>Problema</a:t>
-            </a:r>
-            <a:endParaRPr lang="en-US" sz="2000" dirty="0"/>
-          </a:p>
-        </p:txBody>
-      </p:sp>
-      <p:sp>
-        <p:nvSpPr>
-          <p:cNvPr id="5" name="Text 3"/>
-          <p:cNvSpPr txBox="1"/>
-          <p:nvPr/>
-        </p:nvSpPr>
-        <p:spPr>
-          <a:xfrm>
-            <a:off x="3291840" y="1463040"/>
-            <a:ext cx="7985455" cy="1097280"/>
-          </a:xfrm>
-          <a:prstGeom prst="rect">
-            <a:avLst/>
-          </a:prstGeom>
-          <a:noFill/>
-          <a:ln/>
-        </p:spPr>
-        <p:txBody>
-          <a:bodyPr wrap="square" lIns="0" tIns="0" rIns="0" bIns="0" rtlCol="0" anchor="ctr"/>
-          <a:lstStyle/>
-          <a:p>
-            <a:pPr indent="0" marL="0">
-              <a:buNone/>
-            </a:pPr>
-            <a:r>
-              <a:rPr lang="en-US" sz="1800" dirty="0">
-                <a:solidFill>
-                  <a:schemeClr val="bg1"/>
-                </a:solidFill>
-              </a:rPr>
-              <a:t>MMGD em expansão gera curtailment e perdas bilionárias.</a:t>
-            </a:r>
-            <a:endParaRPr lang="en-US" sz="1800" dirty="0"/>
-          </a:p>
-        </p:txBody>
-      </p:sp>
-      <p:sp>
-        <p:nvSpPr>
-          <p:cNvPr id="6" name="Summary row 2"/>
+              <a:t>24/11/2025</a:t>
+            </a:r>
+            <a:endParaRPr lang="en-US" sz="1600" dirty="0"/>
+          </a:p>
+        </p:txBody>
+      </p:sp>
+      <p:sp>
+        <p:nvSpPr>
+          <p:cNvPr id="5" name="Legal card 1"/>
           <p:cNvSpPr/>
           <p:nvPr/>
         </p:nvSpPr>
         <p:spPr>
           <a:xfrm>
-            <a:off x="548640" y="2743200"/>
-            <a:ext cx="11094415" cy="1097280"/>
+            <a:off x="2606040" y="1417320"/>
+            <a:ext cx="9037015" cy="1097280"/>
           </a:xfrm>
           <a:prstGeom prst="roundRect">
             <a:avLst>
               <a:gd name="adj" fmla="val 10000"/>
+            </a:avLst>
+          </a:prstGeom>
+          <a:solidFill>
+            <a:schemeClr val="bg2"/>
+          </a:solidFill>
+          <a:ln w="12700">
+            <a:solidFill>
+              <a:schemeClr val="bg2"/>
+            </a:solidFill>
+            <a:prstDash val="solid"/>
+          </a:ln>
+        </p:spPr>
+      </p:sp>
+      <p:sp>
+        <p:nvSpPr>
+          <p:cNvPr id="6" name="Icon circle"/>
+          <p:cNvSpPr/>
+          <p:nvPr/>
+        </p:nvSpPr>
+        <p:spPr>
+          <a:xfrm>
+            <a:off x="2834640" y="1673352"/>
+            <a:ext cx="585216" cy="585216"/>
+          </a:xfrm>
+          <a:prstGeom prst="ellipse">
+            <a:avLst/>
+          </a:prstGeom>
+          <a:solidFill>
+            <a:schemeClr val="accent1"/>
+          </a:solidFill>
+          <a:ln w="12700">
+            <a:solidFill>
+              <a:schemeClr val="accent1"/>
+            </a:solidFill>
+            <a:prstDash val="solid"/>
+          </a:ln>
+        </p:spPr>
+      </p:sp>
+      <p:pic>
+        <p:nvPicPr>
+          <p:cNvPr id="7" name="Image 0" descr="FaGavel">    </p:cNvPr>
+          <p:cNvPicPr>
+            <a:picLocks noChangeAspect="1"/>
+          </p:cNvPicPr>
+          <p:nvPr/>
+        </p:nvPicPr>
+        <p:blipFill>
+          <a:blip r:embed="rId1"/>
+          <a:stretch>
+            <a:fillRect/>
+          </a:stretch>
+        </p:blipFill>
+        <p:spPr>
+          <a:xfrm>
+            <a:off x="2980944" y="1819656"/>
+            <a:ext cx="292608" cy="292608"/>
+          </a:xfrm>
+          <a:prstGeom prst="rect">
+            <a:avLst/>
+          </a:prstGeom>
+        </p:spPr>
+      </p:pic>
+      <p:sp>
+        <p:nvSpPr>
+          <p:cNvPr id="8" name="Text 5"/>
+          <p:cNvSpPr txBox="1"/>
+          <p:nvPr/>
+        </p:nvSpPr>
+        <p:spPr>
+          <a:xfrm>
+            <a:off x="3657600" y="1527048"/>
+            <a:ext cx="7863840" cy="365760"/>
+          </a:xfrm>
+          <a:prstGeom prst="rect">
+            <a:avLst/>
+          </a:prstGeom>
+          <a:noFill/>
+          <a:ln/>
+        </p:spPr>
+        <p:txBody>
+          <a:bodyPr wrap="square" lIns="0" tIns="0" rIns="0" bIns="0" rtlCol="0" anchor="ctr"/>
+          <a:lstStyle/>
+          <a:p>
+            <a:pPr indent="0" marL="0">
+              <a:buNone/>
+            </a:pPr>
+            <a:r>
+              <a:rPr lang="en-US" sz="1800" b="1" dirty="0">
+                <a:solidFill>
+                  <a:schemeClr val="tx1"/>
+                </a:solidFill>
+                <a:latin typeface="Cambria" pitchFamily="34" charset="0"/>
+                <a:ea typeface="Cambria" pitchFamily="34" charset="-122"/>
+                <a:cs typeface="Cambria" pitchFamily="34" charset="-120"/>
+              </a:rPr>
+              <a:t>Lei 15.269/2025</a:t>
+            </a:r>
+            <a:endParaRPr lang="en-US" sz="1800" dirty="0"/>
+          </a:p>
+        </p:txBody>
+      </p:sp>
+      <p:sp>
+        <p:nvSpPr>
+          <p:cNvPr id="9" name="Text 6"/>
+          <p:cNvSpPr txBox="1"/>
+          <p:nvPr/>
+        </p:nvSpPr>
+        <p:spPr>
+          <a:xfrm>
+            <a:off x="3657600" y="1920240"/>
+            <a:ext cx="7863840" cy="548640"/>
+          </a:xfrm>
+          <a:prstGeom prst="rect">
+            <a:avLst/>
+          </a:prstGeom>
+          <a:noFill/>
+          <a:ln/>
+        </p:spPr>
+        <p:txBody>
+          <a:bodyPr wrap="square" lIns="0" tIns="0" rIns="0" bIns="0" rtlCol="0" anchor="t"/>
+          <a:lstStyle/>
+          <a:p>
+            <a:pPr indent="0" marL="0">
+              <a:buNone/>
+            </a:pPr>
+            <a:r>
+              <a:rPr lang="en-US" sz="1400" dirty="0">
+                <a:solidFill>
+                  <a:schemeClr val="tx2"/>
+                </a:solidFill>
+              </a:rPr>
+              <a:t>Inclui o § 6º no art. 3º-A da Lei 10.848/2004: o custo da contratação de baterias é rateado apenas entre os agentes de geração, conforme regulamentação da ANEEL.</a:t>
+            </a:r>
+            <a:endParaRPr lang="en-US" sz="1400" dirty="0"/>
+          </a:p>
+        </p:txBody>
+      </p:sp>
+      <p:sp>
+        <p:nvSpPr>
+          <p:cNvPr id="10" name="Date chip 2"/>
+          <p:cNvSpPr/>
+          <p:nvPr/>
+        </p:nvSpPr>
+        <p:spPr>
+          <a:xfrm>
+            <a:off x="548640" y="2651760"/>
+            <a:ext cx="1828800" cy="1097280"/>
+          </a:xfrm>
+          <a:prstGeom prst="roundRect">
+            <a:avLst>
+              <a:gd name="adj" fmla="val 8333"/>
             </a:avLst>
           </a:prstGeom>
           <a:solidFill>
@@ -7949,14 +9253,14 @@
       </p:sp>
       <p:sp>
         <p:nvSpPr>
-          <p:cNvPr id="7" name="Text 5"/>
+          <p:cNvPr id="11" name="Text 8"/>
           <p:cNvSpPr txBox="1"/>
           <p:nvPr/>
         </p:nvSpPr>
         <p:spPr>
           <a:xfrm>
-            <a:off x="914400" y="2743200"/>
-            <a:ext cx="2194560" cy="1097280"/>
+            <a:off x="548640" y="2651760"/>
+            <a:ext cx="1828800" cy="1097280"/>
           </a:xfrm>
           <a:prstGeom prst="rect">
             <a:avLst/>
@@ -7968,74 +9272,189 @@
           <a:bodyPr wrap="square" lIns="0" tIns="0" rIns="0" bIns="0" rtlCol="0" anchor="ctr"/>
           <a:lstStyle/>
           <a:p>
-            <a:pPr indent="0" marL="0">
-              <a:buNone/>
-            </a:pPr>
-            <a:r>
-              <a:rPr lang="en-US" sz="2000" b="1" dirty="0">
-                <a:solidFill>
-                  <a:schemeClr val="accent1"/>
+            <a:pPr algn="ctr" indent="0" marL="0">
+              <a:buNone/>
+            </a:pPr>
+            <a:r>
+              <a:rPr lang="en-US" sz="1600" b="1" dirty="0">
+                <a:solidFill>
+                  <a:schemeClr val="bg1"/>
                 </a:solidFill>
                 <a:latin typeface="Cambria" pitchFamily="34" charset="0"/>
                 <a:ea typeface="Cambria" pitchFamily="34" charset="-122"/>
                 <a:cs typeface="Cambria" pitchFamily="34" charset="-120"/>
               </a:rPr>
-              <a:t>Pergunta</a:t>
-            </a:r>
-            <a:endParaRPr lang="en-US" sz="2000" dirty="0"/>
-          </a:p>
-        </p:txBody>
-      </p:sp>
-      <p:sp>
-        <p:nvSpPr>
-          <p:cNvPr id="8" name="Text 6"/>
-          <p:cNvSpPr txBox="1"/>
-          <p:nvPr/>
-        </p:nvSpPr>
-        <p:spPr>
-          <a:xfrm>
-            <a:off x="3291840" y="2743200"/>
-            <a:ext cx="7985455" cy="1097280"/>
-          </a:xfrm>
-          <a:prstGeom prst="rect">
-            <a:avLst/>
-          </a:prstGeom>
-          <a:noFill/>
-          <a:ln/>
-        </p:spPr>
-        <p:txBody>
-          <a:bodyPr wrap="square" lIns="0" tIns="0" rIns="0" bIns="0" rtlCol="0" anchor="ctr"/>
-          <a:lstStyle/>
-          <a:p>
-            <a:pPr indent="0" marL="0">
-              <a:buNone/>
-            </a:pPr>
-            <a:r>
-              <a:rPr lang="en-US" sz="1800" dirty="0">
-                <a:solidFill>
-                  <a:schemeClr val="bg1"/>
-                </a:solidFill>
-              </a:rPr>
-              <a:t>O ganho do sistema com baterias cobre os encargos das fontes?</a:t>
-            </a:r>
-            <a:endParaRPr lang="en-US" sz="1800" dirty="0"/>
-          </a:p>
-        </p:txBody>
-      </p:sp>
-      <p:sp>
-        <p:nvSpPr>
-          <p:cNvPr id="9" name="Summary row 3"/>
+              <a:t>Jun/2026</a:t>
+            </a:r>
+            <a:endParaRPr lang="en-US" sz="1600" dirty="0"/>
+          </a:p>
+        </p:txBody>
+      </p:sp>
+      <p:sp>
+        <p:nvSpPr>
+          <p:cNvPr id="12" name="Legal card 2"/>
           <p:cNvSpPr/>
           <p:nvPr/>
         </p:nvSpPr>
         <p:spPr>
           <a:xfrm>
-            <a:off x="548640" y="4023360"/>
-            <a:ext cx="11094415" cy="1097280"/>
+            <a:off x="2606040" y="2651760"/>
+            <a:ext cx="9037015" cy="1097280"/>
           </a:xfrm>
           <a:prstGeom prst="roundRect">
             <a:avLst>
               <a:gd name="adj" fmla="val 10000"/>
+            </a:avLst>
+          </a:prstGeom>
+          <a:solidFill>
+            <a:schemeClr val="bg2"/>
+          </a:solidFill>
+          <a:ln w="12700">
+            <a:solidFill>
+              <a:schemeClr val="bg2"/>
+            </a:solidFill>
+            <a:prstDash val="solid"/>
+          </a:ln>
+        </p:spPr>
+      </p:sp>
+      <p:sp>
+        <p:nvSpPr>
+          <p:cNvPr id="13" name="Icon circle"/>
+          <p:cNvSpPr/>
+          <p:nvPr/>
+        </p:nvSpPr>
+        <p:spPr>
+          <a:xfrm>
+            <a:off x="2834640" y="2907792"/>
+            <a:ext cx="585216" cy="585216"/>
+          </a:xfrm>
+          <a:prstGeom prst="ellipse">
+            <a:avLst/>
+          </a:prstGeom>
+          <a:solidFill>
+            <a:schemeClr val="accent2"/>
+          </a:solidFill>
+          <a:ln w="12700">
+            <a:solidFill>
+              <a:schemeClr val="accent2"/>
+            </a:solidFill>
+            <a:prstDash val="solid"/>
+          </a:ln>
+        </p:spPr>
+      </p:sp>
+      <p:pic>
+        <p:nvPicPr>
+          <p:cNvPr id="14" name="Image 1" descr="FaFileAlt">    </p:cNvPr>
+          <p:cNvPicPr>
+            <a:picLocks noChangeAspect="1"/>
+          </p:cNvPicPr>
+          <p:nvPr/>
+        </p:nvPicPr>
+        <p:blipFill>
+          <a:blip r:embed="rId2"/>
+          <a:stretch>
+            <a:fillRect/>
+          </a:stretch>
+        </p:blipFill>
+        <p:spPr>
+          <a:xfrm>
+            <a:off x="2980944" y="3054096"/>
+            <a:ext cx="292608" cy="292608"/>
+          </a:xfrm>
+          <a:prstGeom prst="rect">
+            <a:avLst/>
+          </a:prstGeom>
+        </p:spPr>
+      </p:pic>
+      <p:sp>
+        <p:nvSpPr>
+          <p:cNvPr id="15" name="Text 11"/>
+          <p:cNvSpPr txBox="1"/>
+          <p:nvPr/>
+        </p:nvSpPr>
+        <p:spPr>
+          <a:xfrm>
+            <a:off x="3657600" y="2761488"/>
+            <a:ext cx="7863840" cy="365760"/>
+          </a:xfrm>
+          <a:prstGeom prst="rect">
+            <a:avLst/>
+          </a:prstGeom>
+          <a:noFill/>
+          <a:ln/>
+        </p:spPr>
+        <p:txBody>
+          <a:bodyPr wrap="square" lIns="0" tIns="0" rIns="0" bIns="0" rtlCol="0" anchor="ctr"/>
+          <a:lstStyle/>
+          <a:p>
+            <a:pPr indent="0" marL="0">
+              <a:buNone/>
+            </a:pPr>
+            <a:r>
+              <a:rPr lang="en-US" sz="1800" b="1" dirty="0">
+                <a:solidFill>
+                  <a:schemeClr val="tx1"/>
+                </a:solidFill>
+                <a:latin typeface="Cambria" pitchFamily="34" charset="0"/>
+                <a:ea typeface="Cambria" pitchFamily="34" charset="-122"/>
+                <a:cs typeface="Cambria" pitchFamily="34" charset="-120"/>
+              </a:rPr>
+              <a:t>Portaria GM/MME 136/2026</a:t>
+            </a:r>
+            <a:endParaRPr lang="en-US" sz="1800" dirty="0"/>
+          </a:p>
+        </p:txBody>
+      </p:sp>
+      <p:sp>
+        <p:nvSpPr>
+          <p:cNvPr id="16" name="Text 12"/>
+          <p:cNvSpPr txBox="1"/>
+          <p:nvPr/>
+        </p:nvSpPr>
+        <p:spPr>
+          <a:xfrm>
+            <a:off x="3657600" y="3154680"/>
+            <a:ext cx="7863840" cy="548640"/>
+          </a:xfrm>
+          <a:prstGeom prst="rect">
+            <a:avLst/>
+          </a:prstGeom>
+          <a:noFill/>
+          <a:ln/>
+        </p:spPr>
+        <p:txBody>
+          <a:bodyPr wrap="square" lIns="0" tIns="0" rIns="0" bIns="0" rtlCol="0" anchor="t"/>
+          <a:lstStyle/>
+          <a:p>
+            <a:pPr indent="0" marL="0">
+              <a:buNone/>
+            </a:pPr>
+            <a:r>
+              <a:rPr lang="en-US" sz="1400" dirty="0">
+                <a:solidFill>
+                  <a:schemeClr val="tx2"/>
+                </a:solidFill>
+              </a:rPr>
+              <a:t>Diretrizes do LRCAP armazenamento: leilões em 2 e 4/12/2026, contratos de 15 anos desde 1/8/2028, mínimo de 30 MW, 4 h de descarga e eficiência de 85%.</a:t>
+            </a:r>
+            <a:endParaRPr lang="en-US" sz="1400" dirty="0"/>
+          </a:p>
+        </p:txBody>
+      </p:sp>
+      <p:sp>
+        <p:nvSpPr>
+          <p:cNvPr id="17" name="Date chip 3"/>
+          <p:cNvSpPr/>
+          <p:nvPr/>
+        </p:nvSpPr>
+        <p:spPr>
+          <a:xfrm>
+            <a:off x="548640" y="3886200"/>
+            <a:ext cx="1828800" cy="1097280"/>
+          </a:xfrm>
+          <a:prstGeom prst="roundRect">
+            <a:avLst>
+              <a:gd name="adj" fmla="val 8333"/>
             </a:avLst>
           </a:prstGeom>
           <a:solidFill>
@@ -8051,14 +9470,14 @@
       </p:sp>
       <p:sp>
         <p:nvSpPr>
-          <p:cNvPr id="10" name="Text 8"/>
+          <p:cNvPr id="18" name="Text 14"/>
           <p:cNvSpPr txBox="1"/>
           <p:nvPr/>
         </p:nvSpPr>
         <p:spPr>
           <a:xfrm>
-            <a:off x="914400" y="4023360"/>
-            <a:ext cx="2194560" cy="1097280"/>
+            <a:off x="548640" y="3886200"/>
+            <a:ext cx="1828800" cy="1097280"/>
           </a:xfrm>
           <a:prstGeom prst="rect">
             <a:avLst/>
@@ -8070,74 +9489,189 @@
           <a:bodyPr wrap="square" lIns="0" tIns="0" rIns="0" bIns="0" rtlCol="0" anchor="ctr"/>
           <a:lstStyle/>
           <a:p>
-            <a:pPr indent="0" marL="0">
-              <a:buNone/>
-            </a:pPr>
-            <a:r>
-              <a:rPr lang="en-US" sz="2000" b="1" dirty="0">
-                <a:solidFill>
-                  <a:schemeClr val="accent1"/>
+            <a:pPr algn="ctr" indent="0" marL="0">
+              <a:buNone/>
+            </a:pPr>
+            <a:r>
+              <a:rPr lang="en-US" sz="1600" b="1" dirty="0">
+                <a:solidFill>
+                  <a:schemeClr val="bg1"/>
                 </a:solidFill>
                 <a:latin typeface="Cambria" pitchFamily="34" charset="0"/>
                 <a:ea typeface="Cambria" pitchFamily="34" charset="-122"/>
                 <a:cs typeface="Cambria" pitchFamily="34" charset="-120"/>
               </a:rPr>
-              <a:t>Método</a:t>
-            </a:r>
-            <a:endParaRPr lang="en-US" sz="2000" dirty="0"/>
-          </a:p>
-        </p:txBody>
-      </p:sp>
-      <p:sp>
-        <p:nvSpPr>
-          <p:cNvPr id="11" name="Text 9"/>
-          <p:cNvSpPr txBox="1"/>
-          <p:nvPr/>
-        </p:nvSpPr>
-        <p:spPr>
-          <a:xfrm>
-            <a:off x="3291840" y="4023360"/>
-            <a:ext cx="7985455" cy="1097280"/>
-          </a:xfrm>
-          <a:prstGeom prst="rect">
-            <a:avLst/>
-          </a:prstGeom>
-          <a:noFill/>
-          <a:ln/>
-        </p:spPr>
-        <p:txBody>
-          <a:bodyPr wrap="square" lIns="0" tIns="0" rIns="0" bIns="0" rtlCol="0" anchor="ctr"/>
-          <a:lstStyle/>
-          <a:p>
-            <a:pPr indent="0" marL="0">
-              <a:buNone/>
-            </a:pPr>
-            <a:r>
-              <a:rPr lang="en-US" sz="1800" dirty="0">
-                <a:solidFill>
-                  <a:schemeClr val="bg1"/>
-                </a:solidFill>
-              </a:rPr>
-              <a:t>Simulações horárias sem e com baterias (NE + SE, 4 h) em cenários de MMGD.</a:t>
-            </a:r>
-            <a:endParaRPr lang="en-US" sz="1800" dirty="0"/>
-          </a:p>
-        </p:txBody>
-      </p:sp>
-      <p:sp>
-        <p:nvSpPr>
-          <p:cNvPr id="12" name="Summary row 4"/>
+              <a:t>8/10/2026</a:t>
+            </a:r>
+            <a:endParaRPr lang="en-US" sz="1600" dirty="0"/>
+          </a:p>
+        </p:txBody>
+      </p:sp>
+      <p:sp>
+        <p:nvSpPr>
+          <p:cNvPr id="19" name="Legal card 3"/>
           <p:cNvSpPr/>
           <p:nvPr/>
         </p:nvSpPr>
         <p:spPr>
           <a:xfrm>
-            <a:off x="548640" y="5303520"/>
-            <a:ext cx="11094415" cy="1097280"/>
+            <a:off x="2606040" y="3886200"/>
+            <a:ext cx="9037015" cy="1097280"/>
           </a:xfrm>
           <a:prstGeom prst="roundRect">
             <a:avLst>
               <a:gd name="adj" fmla="val 10000"/>
+            </a:avLst>
+          </a:prstGeom>
+          <a:solidFill>
+            <a:schemeClr val="bg2"/>
+          </a:solidFill>
+          <a:ln w="12700">
+            <a:solidFill>
+              <a:schemeClr val="bg2"/>
+            </a:solidFill>
+            <a:prstDash val="solid"/>
+          </a:ln>
+        </p:spPr>
+      </p:sp>
+      <p:sp>
+        <p:nvSpPr>
+          <p:cNvPr id="20" name="Icon circle"/>
+          <p:cNvSpPr/>
+          <p:nvPr/>
+        </p:nvSpPr>
+        <p:spPr>
+          <a:xfrm>
+            <a:off x="2834640" y="4142232"/>
+            <a:ext cx="585216" cy="585216"/>
+          </a:xfrm>
+          <a:prstGeom prst="ellipse">
+            <a:avLst/>
+          </a:prstGeom>
+          <a:solidFill>
+            <a:schemeClr val="accent3"/>
+          </a:solidFill>
+          <a:ln w="12700">
+            <a:solidFill>
+              <a:schemeClr val="accent3"/>
+            </a:solidFill>
+            <a:prstDash val="solid"/>
+          </a:ln>
+        </p:spPr>
+      </p:sp>
+      <p:pic>
+        <p:nvPicPr>
+          <p:cNvPr id="21" name="Image 2" descr="FaBalanceScale">    </p:cNvPr>
+          <p:cNvPicPr>
+            <a:picLocks noChangeAspect="1"/>
+          </p:cNvPicPr>
+          <p:nvPr/>
+        </p:nvPicPr>
+        <p:blipFill>
+          <a:blip r:embed="rId3"/>
+          <a:stretch>
+            <a:fillRect/>
+          </a:stretch>
+        </p:blipFill>
+        <p:spPr>
+          <a:xfrm>
+            <a:off x="2980944" y="4288536"/>
+            <a:ext cx="292608" cy="292608"/>
+          </a:xfrm>
+          <a:prstGeom prst="rect">
+            <a:avLst/>
+          </a:prstGeom>
+        </p:spPr>
+      </p:pic>
+      <p:sp>
+        <p:nvSpPr>
+          <p:cNvPr id="22" name="Text 17"/>
+          <p:cNvSpPr txBox="1"/>
+          <p:nvPr/>
+        </p:nvSpPr>
+        <p:spPr>
+          <a:xfrm>
+            <a:off x="3657600" y="3995928"/>
+            <a:ext cx="7863840" cy="365760"/>
+          </a:xfrm>
+          <a:prstGeom prst="rect">
+            <a:avLst/>
+          </a:prstGeom>
+          <a:noFill/>
+          <a:ln/>
+        </p:spPr>
+        <p:txBody>
+          <a:bodyPr wrap="square" lIns="0" tIns="0" rIns="0" bIns="0" rtlCol="0" anchor="ctr"/>
+          <a:lstStyle/>
+          <a:p>
+            <a:pPr indent="0" marL="0">
+              <a:buNone/>
+            </a:pPr>
+            <a:r>
+              <a:rPr lang="en-US" sz="1800" b="1" dirty="0">
+                <a:solidFill>
+                  <a:schemeClr val="tx1"/>
+                </a:solidFill>
+                <a:latin typeface="Cambria" pitchFamily="34" charset="0"/>
+                <a:ea typeface="Cambria" pitchFamily="34" charset="-122"/>
+                <a:cs typeface="Cambria" pitchFamily="34" charset="-120"/>
+              </a:rPr>
+              <a:t>Consulta Pública 37/2026 (ANEEL)</a:t>
+            </a:r>
+            <a:endParaRPr lang="en-US" sz="1800" dirty="0"/>
+          </a:p>
+        </p:txBody>
+      </p:sp>
+      <p:sp>
+        <p:nvSpPr>
+          <p:cNvPr id="23" name="Text 18"/>
+          <p:cNvSpPr txBox="1"/>
+          <p:nvPr/>
+        </p:nvSpPr>
+        <p:spPr>
+          <a:xfrm>
+            <a:off x="3657600" y="4389120"/>
+            <a:ext cx="7863840" cy="548640"/>
+          </a:xfrm>
+          <a:prstGeom prst="rect">
+            <a:avLst/>
+          </a:prstGeom>
+          <a:noFill/>
+          <a:ln/>
+        </p:spPr>
+        <p:txBody>
+          <a:bodyPr wrap="square" lIns="0" tIns="0" rIns="0" bIns="0" rtlCol="0" anchor="t"/>
+          <a:lstStyle/>
+          <a:p>
+            <a:pPr indent="0" marL="0">
+              <a:buNone/>
+            </a:pPr>
+            <a:r>
+              <a:rPr lang="en-US" sz="1400" dirty="0">
+                <a:solidFill>
+                  <a:schemeClr val="tx2"/>
+                </a:solidFill>
+              </a:rPr>
+              <a:t>A Nota Técnica 101/2026 propõe a base de custeio e a metodologia de rateio do Ercap-SAE. Contribuições até 6/11/2026.</a:t>
+            </a:r>
+            <a:endParaRPr lang="en-US" sz="1400" dirty="0"/>
+          </a:p>
+        </p:txBody>
+      </p:sp>
+      <p:sp>
+        <p:nvSpPr>
+          <p:cNvPr id="24" name="Date chip 4"/>
+          <p:cNvSpPr/>
+          <p:nvPr/>
+        </p:nvSpPr>
+        <p:spPr>
+          <a:xfrm>
+            <a:off x="548640" y="5120640"/>
+            <a:ext cx="1828800" cy="1097280"/>
+          </a:xfrm>
+          <a:prstGeom prst="roundRect">
+            <a:avLst>
+              <a:gd name="adj" fmla="val 8333"/>
             </a:avLst>
           </a:prstGeom>
           <a:solidFill>
@@ -8153,14 +9687,14 @@
       </p:sp>
       <p:sp>
         <p:nvSpPr>
-          <p:cNvPr id="13" name="Text 11"/>
+          <p:cNvPr id="25" name="Text 20"/>
           <p:cNvSpPr txBox="1"/>
           <p:nvPr/>
         </p:nvSpPr>
         <p:spPr>
           <a:xfrm>
-            <a:off x="914400" y="5303520"/>
-            <a:ext cx="2194560" cy="1097280"/>
+            <a:off x="548640" y="5120640"/>
+            <a:ext cx="1828800" cy="1097280"/>
           </a:xfrm>
           <a:prstGeom prst="rect">
             <a:avLst/>
@@ -8172,34 +9706,110 @@
           <a:bodyPr wrap="square" lIns="0" tIns="0" rIns="0" bIns="0" rtlCol="0" anchor="ctr"/>
           <a:lstStyle/>
           <a:p>
-            <a:pPr indent="0" marL="0">
-              <a:buNone/>
-            </a:pPr>
-            <a:r>
-              <a:rPr lang="en-US" sz="2000" b="1" dirty="0">
-                <a:solidFill>
-                  <a:schemeClr val="accent1"/>
+            <a:pPr algn="ctr" indent="0" marL="0">
+              <a:buNone/>
+            </a:pPr>
+            <a:r>
+              <a:rPr lang="en-US" sz="1600" b="1" dirty="0">
+                <a:solidFill>
+                  <a:schemeClr val="bg1"/>
                 </a:solidFill>
                 <a:latin typeface="Cambria" pitchFamily="34" charset="0"/>
                 <a:ea typeface="Cambria" pitchFamily="34" charset="-122"/>
                 <a:cs typeface="Cambria" pitchFamily="34" charset="-120"/>
               </a:rPr>
-              <a:t>Resposta</a:t>
-            </a:r>
-            <a:endParaRPr lang="en-US" sz="2000" dirty="0"/>
-          </a:p>
-        </p:txBody>
-      </p:sp>
-      <p:sp>
-        <p:nvSpPr>
-          <p:cNvPr id="14" name="Text 12"/>
+              <a:t>Em tramitação</a:t>
+            </a:r>
+            <a:endParaRPr lang="en-US" sz="1600" dirty="0"/>
+          </a:p>
+        </p:txBody>
+      </p:sp>
+      <p:sp>
+        <p:nvSpPr>
+          <p:cNvPr id="26" name="Legal card 4"/>
+          <p:cNvSpPr/>
+          <p:nvPr/>
+        </p:nvSpPr>
+        <p:spPr>
+          <a:xfrm>
+            <a:off x="2606040" y="5120640"/>
+            <a:ext cx="9037015" cy="1097280"/>
+          </a:xfrm>
+          <a:prstGeom prst="roundRect">
+            <a:avLst>
+              <a:gd name="adj" fmla="val 10000"/>
+            </a:avLst>
+          </a:prstGeom>
+          <a:solidFill>
+            <a:schemeClr val="bg2"/>
+          </a:solidFill>
+          <a:ln w="12700">
+            <a:solidFill>
+              <a:schemeClr val="bg2"/>
+            </a:solidFill>
+            <a:prstDash val="solid"/>
+          </a:ln>
+        </p:spPr>
+      </p:sp>
+      <p:sp>
+        <p:nvSpPr>
+          <p:cNvPr id="27" name="Icon circle"/>
+          <p:cNvSpPr/>
+          <p:nvPr/>
+        </p:nvSpPr>
+        <p:spPr>
+          <a:xfrm>
+            <a:off x="2834640" y="5376672"/>
+            <a:ext cx="585216" cy="585216"/>
+          </a:xfrm>
+          <a:prstGeom prst="ellipse">
+            <a:avLst/>
+          </a:prstGeom>
+          <a:solidFill>
+            <a:schemeClr val="accent4"/>
+          </a:solidFill>
+          <a:ln w="12700">
+            <a:solidFill>
+              <a:schemeClr val="accent4"/>
+            </a:solidFill>
+            <a:prstDash val="solid"/>
+          </a:ln>
+        </p:spPr>
+      </p:sp>
+      <p:pic>
+        <p:nvPicPr>
+          <p:cNvPr id="28" name="Image 3" descr="FaUsers">    </p:cNvPr>
+          <p:cNvPicPr>
+            <a:picLocks noChangeAspect="1"/>
+          </p:cNvPicPr>
+          <p:nvPr/>
+        </p:nvPicPr>
+        <p:blipFill>
+          <a:blip r:embed="rId4"/>
+          <a:stretch>
+            <a:fillRect/>
+          </a:stretch>
+        </p:blipFill>
+        <p:spPr>
+          <a:xfrm>
+            <a:off x="2980944" y="5522976"/>
+            <a:ext cx="292608" cy="292608"/>
+          </a:xfrm>
+          <a:prstGeom prst="rect">
+            <a:avLst/>
+          </a:prstGeom>
+        </p:spPr>
+      </p:pic>
+      <p:sp>
+        <p:nvSpPr>
+          <p:cNvPr id="29" name="Text 23"/>
           <p:cNvSpPr txBox="1"/>
           <p:nvPr/>
         </p:nvSpPr>
         <p:spPr>
           <a:xfrm>
-            <a:off x="3291840" y="5303520"/>
-            <a:ext cx="7985455" cy="1097280"/>
+            <a:off x="3657600" y="5230368"/>
+            <a:ext cx="7863840" cy="365760"/>
           </a:xfrm>
           <a:prstGeom prst="rect">
             <a:avLst/>
@@ -8215,14 +9825,134 @@
               <a:buNone/>
             </a:pPr>
             <a:r>
-              <a:rPr lang="en-US" sz="1800" dirty="0">
-                <a:solidFill>
-                  <a:schemeClr val="bg1"/>
-                </a:solidFill>
-              </a:rPr>
-              <a:t>ΔCTO comparado à soma dos encargos, no sistema e por fonte.</a:t>
+              <a:rPr lang="en-US" sz="1800" b="1" dirty="0">
+                <a:solidFill>
+                  <a:schemeClr val="tx1"/>
+                </a:solidFill>
+                <a:latin typeface="Cambria" pitchFamily="34" charset="0"/>
+                <a:ea typeface="Cambria" pitchFamily="34" charset="-122"/>
+                <a:cs typeface="Cambria" pitchFamily="34" charset="-120"/>
+              </a:rPr>
+              <a:t>PL 3.716/2026 e PL 5.017/2019</a:t>
             </a:r>
             <a:endParaRPr lang="en-US" sz="1800" dirty="0"/>
+          </a:p>
+        </p:txBody>
+      </p:sp>
+      <p:sp>
+        <p:nvSpPr>
+          <p:cNvPr id="30" name="Text 24"/>
+          <p:cNvSpPr txBox="1"/>
+          <p:nvPr/>
+        </p:nvSpPr>
+        <p:spPr>
+          <a:xfrm>
+            <a:off x="3657600" y="5623560"/>
+            <a:ext cx="7863840" cy="548640"/>
+          </a:xfrm>
+          <a:prstGeom prst="rect">
+            <a:avLst/>
+          </a:prstGeom>
+          <a:noFill/>
+          <a:ln/>
+        </p:spPr>
+        <p:txBody>
+          <a:bodyPr wrap="square" lIns="0" tIns="0" rIns="0" bIns="0" rtlCol="0" anchor="t"/>
+          <a:lstStyle/>
+          <a:p>
+            <a:pPr indent="0" marL="0">
+              <a:buNone/>
+            </a:pPr>
+            <a:r>
+              <a:rPr lang="en-US" sz="1400" dirty="0">
+                <a:solidFill>
+                  <a:schemeClr val="tx2"/>
+                </a:solidFill>
+              </a:rPr>
+              <a:t>Propõem revogar o rateio apenas entre geradores e incluir os consumidores na cobrança do encargo.</a:t>
+            </a:r>
+            <a:endParaRPr lang="en-US" sz="1400" dirty="0"/>
+          </a:p>
+        </p:txBody>
+      </p:sp>
+      <p:sp>
+        <p:nvSpPr>
+          <p:cNvPr id="31" name="Text 25"/>
+          <p:cNvSpPr txBox="1"/>
+          <p:nvPr/>
+        </p:nvSpPr>
+        <p:spPr>
+          <a:xfrm>
+            <a:off x="548640" y="6382512"/>
+            <a:ext cx="10424160" cy="274320"/>
+          </a:xfrm>
+          <a:prstGeom prst="rect">
+            <a:avLst/>
+          </a:prstGeom>
+          <a:noFill/>
+          <a:ln/>
+        </p:spPr>
+        <p:txBody>
+          <a:bodyPr wrap="square" lIns="0" tIns="0" rIns="0" bIns="0" rtlCol="0" anchor="ctr"/>
+          <a:lstStyle/>
+          <a:p>
+            <a:pPr indent="0" marL="0">
+              <a:buNone/>
+            </a:pPr>
+            <a:r>
+              <a:rPr lang="en-US" sz="1000" i="1" dirty="0">
+                <a:solidFill>
+                  <a:schemeClr val="tx2"/>
+                </a:solidFill>
+              </a:rPr>
+              <a:t>Fontes: Lei 15.269/2025; Canal Solar e MME (2026); ANEEL, CP 37/2026 e NT 101/2026-SGM; CNN Brasil (2026); TAGD Law (2026).</a:t>
+            </a:r>
+            <a:endParaRPr lang="en-US" sz="1000" dirty="0"/>
+          </a:p>
+        </p:txBody>
+      </p:sp>
+      <p:sp>
+        <p:nvSpPr>
+          <p:cNvPr id="25" name="Slide Number Placeholder 0"/>
+          <p:cNvSpPr>
+            <a:spLocks noGrp="1"/>
+          </p:cNvSpPr>
+          <p:nvPr>
+            <p:ph type="sldNum" sz="quarter" idx="4294967295"/>
+          </p:nvPr>
+        </p:nvSpPr>
+        <p:spPr>
+          <a:xfrm>
+            <a:off x="11155680" y="6400800"/>
+            <a:ext cx="548640" cy="274320"/>
+          </a:xfrm>
+          <a:prstGeom prst="rect">
+            <a:avLst/>
+          </a:prstGeom>
+          <a:extLst>
+            <a:ext uri="{C572A759-6A51-4108-AA02-DFA0A04FC94B}">
+              <ma14:wrappingTextBoxFlag xmlns:ma14="http://schemas.microsoft.com/office/mac/drawingml/2011/main" val="0"/>
+            </a:ext>
+          </a:extLst>
+        </p:spPr>
+        <p:txBody>
+          <a:bodyPr/>
+          <a:lstStyle>
+            <a:lvl1pPr>
+              <a:defRPr sz="1100">
+                <a:solidFill>
+                  <a:schemeClr val="tx2"/>
+                </a:solidFill>
+              </a:defRPr>
+            </a:lvl1pPr>
+          </a:lstStyle>
+          <a:p>
+            <a:pPr algn="r"/>
+            <a:fld id="{F7021451-1387-4CA6-816F-3879F97B5CBC}" type="slidenum">
+              <a:rPr b="0" lang="en-US"/>
+              <a:t>14</a:t>
+            </a:fld>
+            <a:endParaRPr lang="en-US"/>
           </a:p>
         </p:txBody>
       </p:sp>
@@ -8283,7 +10013,7 @@
                   <a:schemeClr val="tx1"/>
                 </a:solidFill>
               </a:rPr>
-              <a:t>Referências</a:t>
+              <a:t>Da receita fixa ao encargo das fontes</a:t>
             </a:r>
             <a:endParaRPr lang="en-US" sz="3200" dirty="0"/>
           </a:p>
@@ -8291,14 +10021,97 @@
       </p:sp>
       <p:sp>
         <p:nvSpPr>
-          <p:cNvPr id="3" name="Text 1"/>
+          <p:cNvPr id="3" name="Mechanism step 1"/>
+          <p:cNvSpPr/>
+          <p:nvPr/>
+        </p:nvSpPr>
+        <p:spPr>
+          <a:xfrm>
+            <a:off x="548640" y="1463040"/>
+            <a:ext cx="1965960" cy="2560320"/>
+          </a:xfrm>
+          <a:prstGeom prst="roundRect">
+            <a:avLst>
+              <a:gd name="adj" fmla="val 5581"/>
+            </a:avLst>
+          </a:prstGeom>
+          <a:solidFill>
+            <a:schemeClr val="bg1"/>
+          </a:solidFill>
+          <a:ln w="12700">
+            <a:solidFill>
+              <a:schemeClr val="bg1"/>
+            </a:solidFill>
+            <a:prstDash val="solid"/>
+          </a:ln>
+          <a:effectLst>
+            <a:outerShdw sx="100000" sy="100000" kx="0" ky="0" algn="bl" rotWithShape="0" blurRad="101600" dist="25400" dir="5400000">
+              <a:srgbClr val="0B1A2E">
+                <a:alpha val="12000"/>
+              </a:srgbClr>
+            </a:outerShdw>
+          </a:effectLst>
+        </p:spPr>
+      </p:sp>
+      <p:sp>
+        <p:nvSpPr>
+          <p:cNvPr id="4" name="Icon circle"/>
+          <p:cNvSpPr/>
+          <p:nvPr/>
+        </p:nvSpPr>
+        <p:spPr>
+          <a:xfrm>
+            <a:off x="777240" y="1691640"/>
+            <a:ext cx="548640" cy="548640"/>
+          </a:xfrm>
+          <a:prstGeom prst="ellipse">
+            <a:avLst/>
+          </a:prstGeom>
+          <a:solidFill>
+            <a:schemeClr val="accent2"/>
+          </a:solidFill>
+          <a:ln w="12700">
+            <a:solidFill>
+              <a:schemeClr val="accent2"/>
+            </a:solidFill>
+            <a:prstDash val="solid"/>
+          </a:ln>
+        </p:spPr>
+      </p:sp>
+      <p:pic>
+        <p:nvPicPr>
+          <p:cNvPr id="5" name="Image 0" descr="FaGavel">    </p:cNvPr>
+          <p:cNvPicPr>
+            <a:picLocks noChangeAspect="1"/>
+          </p:cNvPicPr>
+          <p:nvPr/>
+        </p:nvPicPr>
+        <p:blipFill>
+          <a:blip r:embed="rId1"/>
+          <a:stretch>
+            <a:fillRect/>
+          </a:stretch>
+        </p:blipFill>
+        <p:spPr>
+          <a:xfrm>
+            <a:off x="914400" y="1828800"/>
+            <a:ext cx="274320" cy="274320"/>
+          </a:xfrm>
+          <a:prstGeom prst="rect">
+            <a:avLst/>
+          </a:prstGeom>
+        </p:spPr>
+      </p:pic>
+      <p:sp>
+        <p:nvSpPr>
+          <p:cNvPr id="6" name="Text 3"/>
           <p:cNvSpPr txBox="1"/>
           <p:nvPr/>
         </p:nvSpPr>
         <p:spPr>
           <a:xfrm>
-            <a:off x="548640" y="1463040"/>
-            <a:ext cx="11094415" cy="4663440"/>
+            <a:off x="1920240" y="1645920"/>
+            <a:ext cx="365760" cy="365760"/>
           </a:xfrm>
           <a:prstGeom prst="rect">
             <a:avLst/>
@@ -8310,156 +10123,1460 @@
           <a:bodyPr wrap="square" lIns="0" tIns="0" rIns="0" bIns="0" rtlCol="0" anchor="t"/>
           <a:lstStyle/>
           <a:p>
-            <a:pPr marL="342900" indent="-342900">
-              <a:spcAft>
-                <a:spcPts val="1200"/>
-              </a:spcAft>
-              <a:buSzPct val="100000"/>
-              <a:buFont typeface="+mj-lt"/>
-              <a:buAutoNum type="arabicPeriod" startAt="1"/>
-            </a:pPr>
-            <a:r>
-              <a:rPr lang="en-US" sz="1600" dirty="0">
+            <a:pPr algn="r" indent="0" marL="0">
+              <a:buNone/>
+            </a:pPr>
+            <a:r>
+              <a:rPr lang="en-US" sz="1400" b="1" dirty="0">
+                <a:solidFill>
+                  <a:schemeClr val="tx2"/>
+                </a:solidFill>
+              </a:rPr>
+              <a:t>1</a:t>
+            </a:r>
+            <a:endParaRPr lang="en-US" sz="1400" dirty="0"/>
+          </a:p>
+        </p:txBody>
+      </p:sp>
+      <p:sp>
+        <p:nvSpPr>
+          <p:cNvPr id="7" name="Text 4"/>
+          <p:cNvSpPr txBox="1"/>
+          <p:nvPr/>
+        </p:nvSpPr>
+        <p:spPr>
+          <a:xfrm>
+            <a:off x="777240" y="2377440"/>
+            <a:ext cx="1554480" cy="594360"/>
+          </a:xfrm>
+          <a:prstGeom prst="rect">
+            <a:avLst/>
+          </a:prstGeom>
+          <a:noFill/>
+          <a:ln/>
+        </p:spPr>
+        <p:txBody>
+          <a:bodyPr wrap="square" lIns="0" tIns="0" rIns="0" bIns="0" rtlCol="0" anchor="t"/>
+          <a:lstStyle/>
+          <a:p>
+            <a:pPr indent="0" marL="0">
+              <a:buNone/>
+            </a:pPr>
+            <a:r>
+              <a:rPr lang="en-US" sz="1600" b="1" dirty="0">
                 <a:solidFill>
                   <a:schemeClr val="tx1"/>
                 </a:solidFill>
               </a:rPr>
-              <a:t>ONS (2025). Diagnóstico e perspectiva da evolução dos cortes de geração no Brasil. RT DGL-ONS 0189/2025.</a:t>
+              <a:t>Leilão LRCAP armazenamento</a:t>
             </a:r>
             <a:endParaRPr lang="en-US" sz="1600" dirty="0"/>
           </a:p>
-          <a:p>
-            <a:pPr marL="342900" indent="-342900">
-              <a:spcAft>
-                <a:spcPts val="1200"/>
-              </a:spcAft>
-              <a:buSzPct val="100000"/>
-              <a:buFont typeface="+mj-lt"/>
-              <a:buAutoNum type="arabicPeriod" startAt="1"/>
-            </a:pPr>
-            <a:r>
-              <a:rPr lang="en-US" sz="1600" dirty="0">
+        </p:txBody>
+      </p:sp>
+      <p:sp>
+        <p:nvSpPr>
+          <p:cNvPr id="8" name="Text 5"/>
+          <p:cNvSpPr txBox="1"/>
+          <p:nvPr/>
+        </p:nvSpPr>
+        <p:spPr>
+          <a:xfrm>
+            <a:off x="777240" y="3017520"/>
+            <a:ext cx="1554480" cy="960120"/>
+          </a:xfrm>
+          <a:prstGeom prst="rect">
+            <a:avLst/>
+          </a:prstGeom>
+          <a:noFill/>
+          <a:ln/>
+        </p:spPr>
+        <p:txBody>
+          <a:bodyPr wrap="square" lIns="0" tIns="0" rIns="0" bIns="0" rtlCol="0" anchor="t"/>
+          <a:lstStyle/>
+          <a:p>
+            <a:pPr indent="0" marL="0">
+              <a:buNone/>
+            </a:pPr>
+            <a:r>
+              <a:rPr lang="en-US" sz="1400" dirty="0">
+                <a:solidFill>
+                  <a:schemeClr val="tx2"/>
+                </a:solidFill>
+              </a:rPr>
+              <a:t>ANEEL e CCEE contratam potência de baterias (mín. 30 MW, 4 h)</a:t>
+            </a:r>
+            <a:endParaRPr lang="en-US" sz="1400" dirty="0"/>
+          </a:p>
+        </p:txBody>
+      </p:sp>
+      <p:sp>
+        <p:nvSpPr>
+          <p:cNvPr id="9" name="Arrow"/>
+          <p:cNvSpPr/>
+          <p:nvPr/>
+        </p:nvSpPr>
+        <p:spPr>
+          <a:xfrm>
+            <a:off x="2551176" y="2743200"/>
+            <a:ext cx="237744" cy="0"/>
+          </a:xfrm>
+          <a:prstGeom prst="line">
+            <a:avLst/>
+          </a:prstGeom>
+          <a:noFill/>
+          <a:ln w="25400">
+            <a:solidFill>
+              <a:srgbClr val="5B6B80"/>
+            </a:solidFill>
+            <a:prstDash val="solid"/>
+            <a:tailEnd type="triangle"/>
+          </a:ln>
+        </p:spPr>
+      </p:sp>
+      <p:sp>
+        <p:nvSpPr>
+          <p:cNvPr id="10" name="Mechanism step 2"/>
+          <p:cNvSpPr/>
+          <p:nvPr/>
+        </p:nvSpPr>
+        <p:spPr>
+          <a:xfrm>
+            <a:off x="2825496" y="1463040"/>
+            <a:ext cx="1965960" cy="2560320"/>
+          </a:xfrm>
+          <a:prstGeom prst="roundRect">
+            <a:avLst>
+              <a:gd name="adj" fmla="val 5581"/>
+            </a:avLst>
+          </a:prstGeom>
+          <a:solidFill>
+            <a:schemeClr val="bg1"/>
+          </a:solidFill>
+          <a:ln w="12700">
+            <a:solidFill>
+              <a:schemeClr val="bg1"/>
+            </a:solidFill>
+            <a:prstDash val="solid"/>
+          </a:ln>
+          <a:effectLst>
+            <a:outerShdw sx="100000" sy="100000" kx="0" ky="0" algn="bl" rotWithShape="0" blurRad="101600" dist="25400" dir="5400000">
+              <a:srgbClr val="0B1A2E">
+                <a:alpha val="12000"/>
+              </a:srgbClr>
+            </a:outerShdw>
+          </a:effectLst>
+        </p:spPr>
+      </p:sp>
+      <p:sp>
+        <p:nvSpPr>
+          <p:cNvPr id="11" name="Icon circle"/>
+          <p:cNvSpPr/>
+          <p:nvPr/>
+        </p:nvSpPr>
+        <p:spPr>
+          <a:xfrm>
+            <a:off x="3054096" y="1691640"/>
+            <a:ext cx="548640" cy="548640"/>
+          </a:xfrm>
+          <a:prstGeom prst="ellipse">
+            <a:avLst/>
+          </a:prstGeom>
+          <a:solidFill>
+            <a:schemeClr val="accent2"/>
+          </a:solidFill>
+          <a:ln w="12700">
+            <a:solidFill>
+              <a:schemeClr val="accent2"/>
+            </a:solidFill>
+            <a:prstDash val="solid"/>
+          </a:ln>
+        </p:spPr>
+      </p:sp>
+      <p:pic>
+        <p:nvPicPr>
+          <p:cNvPr id="12" name="Image 1" descr="FaCoins">    </p:cNvPr>
+          <p:cNvPicPr>
+            <a:picLocks noChangeAspect="1"/>
+          </p:cNvPicPr>
+          <p:nvPr/>
+        </p:nvPicPr>
+        <p:blipFill>
+          <a:blip r:embed="rId2"/>
+          <a:stretch>
+            <a:fillRect/>
+          </a:stretch>
+        </p:blipFill>
+        <p:spPr>
+          <a:xfrm>
+            <a:off x="3191256" y="1828800"/>
+            <a:ext cx="274320" cy="274320"/>
+          </a:xfrm>
+          <a:prstGeom prst="rect">
+            <a:avLst/>
+          </a:prstGeom>
+        </p:spPr>
+      </p:pic>
+      <p:sp>
+        <p:nvSpPr>
+          <p:cNvPr id="13" name="Text 9"/>
+          <p:cNvSpPr txBox="1"/>
+          <p:nvPr/>
+        </p:nvSpPr>
+        <p:spPr>
+          <a:xfrm>
+            <a:off x="4197096" y="1645920"/>
+            <a:ext cx="365760" cy="365760"/>
+          </a:xfrm>
+          <a:prstGeom prst="rect">
+            <a:avLst/>
+          </a:prstGeom>
+          <a:noFill/>
+          <a:ln/>
+        </p:spPr>
+        <p:txBody>
+          <a:bodyPr wrap="square" lIns="0" tIns="0" rIns="0" bIns="0" rtlCol="0" anchor="t"/>
+          <a:lstStyle/>
+          <a:p>
+            <a:pPr algn="r" indent="0" marL="0">
+              <a:buNone/>
+            </a:pPr>
+            <a:r>
+              <a:rPr lang="en-US" sz="1400" b="1" dirty="0">
+                <a:solidFill>
+                  <a:schemeClr val="tx2"/>
+                </a:solidFill>
+              </a:rPr>
+              <a:t>2</a:t>
+            </a:r>
+            <a:endParaRPr lang="en-US" sz="1400" dirty="0"/>
+          </a:p>
+        </p:txBody>
+      </p:sp>
+      <p:sp>
+        <p:nvSpPr>
+          <p:cNvPr id="14" name="Text 10"/>
+          <p:cNvSpPr txBox="1"/>
+          <p:nvPr/>
+        </p:nvSpPr>
+        <p:spPr>
+          <a:xfrm>
+            <a:off x="3054096" y="2377440"/>
+            <a:ext cx="1554480" cy="594360"/>
+          </a:xfrm>
+          <a:prstGeom prst="rect">
+            <a:avLst/>
+          </a:prstGeom>
+          <a:noFill/>
+          <a:ln/>
+        </p:spPr>
+        <p:txBody>
+          <a:bodyPr wrap="square" lIns="0" tIns="0" rIns="0" bIns="0" rtlCol="0" anchor="t"/>
+          <a:lstStyle/>
+          <a:p>
+            <a:pPr indent="0" marL="0">
+              <a:buNone/>
+            </a:pPr>
+            <a:r>
+              <a:rPr lang="en-US" sz="1600" b="1" dirty="0">
                 <a:solidFill>
                   <a:schemeClr val="tx1"/>
                 </a:solidFill>
               </a:rPr>
-              <a:t>ONS (2025). Critérios para Gestão de Excedentes Energéticos. NT-ONS DOP 0022/2025.</a:t>
+              <a:t>Receita fixa anual</a:t>
             </a:r>
             <a:endParaRPr lang="en-US" sz="1600" dirty="0"/>
           </a:p>
-          <a:p>
-            <a:pPr marL="342900" indent="-342900">
-              <a:spcAft>
-                <a:spcPts val="1200"/>
-              </a:spcAft>
-              <a:buSzPct val="100000"/>
-              <a:buFont typeface="+mj-lt"/>
-              <a:buAutoNum type="arabicPeriod" startAt="1"/>
-            </a:pPr>
-            <a:r>
-              <a:rPr lang="en-US" sz="1600" dirty="0">
+        </p:txBody>
+      </p:sp>
+      <p:sp>
+        <p:nvSpPr>
+          <p:cNvPr id="15" name="Text 11"/>
+          <p:cNvSpPr txBox="1"/>
+          <p:nvPr/>
+        </p:nvSpPr>
+        <p:spPr>
+          <a:xfrm>
+            <a:off x="3054096" y="3017520"/>
+            <a:ext cx="1554480" cy="960120"/>
+          </a:xfrm>
+          <a:prstGeom prst="rect">
+            <a:avLst/>
+          </a:prstGeom>
+          <a:noFill/>
+          <a:ln/>
+        </p:spPr>
+        <p:txBody>
+          <a:bodyPr wrap="square" lIns="0" tIns="0" rIns="0" bIns="0" rtlCol="0" anchor="t"/>
+          <a:lstStyle/>
+          <a:p>
+            <a:pPr indent="0" marL="0">
+              <a:buNone/>
+            </a:pPr>
+            <a:r>
+              <a:rPr lang="en-US" sz="1400" dirty="0">
+                <a:solidFill>
+                  <a:schemeClr val="tx2"/>
+                </a:solidFill>
+              </a:rPr>
+              <a:t>R$/ano em 12 parcelas mensais, reajustada pelo IPCA, por 15 anos</a:t>
+            </a:r>
+            <a:endParaRPr lang="en-US" sz="1400" dirty="0"/>
+          </a:p>
+        </p:txBody>
+      </p:sp>
+      <p:sp>
+        <p:nvSpPr>
+          <p:cNvPr id="16" name="Arrow"/>
+          <p:cNvSpPr/>
+          <p:nvPr/>
+        </p:nvSpPr>
+        <p:spPr>
+          <a:xfrm>
+            <a:off x="4828032" y="2743200"/>
+            <a:ext cx="237744" cy="0"/>
+          </a:xfrm>
+          <a:prstGeom prst="line">
+            <a:avLst/>
+          </a:prstGeom>
+          <a:noFill/>
+          <a:ln w="25400">
+            <a:solidFill>
+              <a:srgbClr val="5B6B80"/>
+            </a:solidFill>
+            <a:prstDash val="solid"/>
+            <a:tailEnd type="triangle"/>
+          </a:ln>
+        </p:spPr>
+      </p:sp>
+      <p:sp>
+        <p:nvSpPr>
+          <p:cNvPr id="17" name="Mechanism step 3"/>
+          <p:cNvSpPr/>
+          <p:nvPr/>
+        </p:nvSpPr>
+        <p:spPr>
+          <a:xfrm>
+            <a:off x="5102352" y="1463040"/>
+            <a:ext cx="1965960" cy="2560320"/>
+          </a:xfrm>
+          <a:prstGeom prst="roundRect">
+            <a:avLst>
+              <a:gd name="adj" fmla="val 5581"/>
+            </a:avLst>
+          </a:prstGeom>
+          <a:solidFill>
+            <a:schemeClr val="bg1"/>
+          </a:solidFill>
+          <a:ln w="12700">
+            <a:solidFill>
+              <a:schemeClr val="bg1"/>
+            </a:solidFill>
+            <a:prstDash val="solid"/>
+          </a:ln>
+          <a:effectLst>
+            <a:outerShdw sx="100000" sy="100000" kx="0" ky="0" algn="bl" rotWithShape="0" blurRad="101600" dist="25400" dir="5400000">
+              <a:srgbClr val="0B1A2E">
+                <a:alpha val="12000"/>
+              </a:srgbClr>
+            </a:outerShdw>
+          </a:effectLst>
+        </p:spPr>
+      </p:sp>
+      <p:sp>
+        <p:nvSpPr>
+          <p:cNvPr id="18" name="Icon circle"/>
+          <p:cNvSpPr/>
+          <p:nvPr/>
+        </p:nvSpPr>
+        <p:spPr>
+          <a:xfrm>
+            <a:off x="5330952" y="1691640"/>
+            <a:ext cx="548640" cy="548640"/>
+          </a:xfrm>
+          <a:prstGeom prst="ellipse">
+            <a:avLst/>
+          </a:prstGeom>
+          <a:solidFill>
+            <a:schemeClr val="accent2"/>
+          </a:solidFill>
+          <a:ln w="12700">
+            <a:solidFill>
+              <a:schemeClr val="accent2"/>
+            </a:solidFill>
+            <a:prstDash val="solid"/>
+          </a:ln>
+        </p:spPr>
+      </p:sp>
+      <p:pic>
+        <p:nvPicPr>
+          <p:cNvPr id="19" name="Image 2" descr="FaBatteryFull">    </p:cNvPr>
+          <p:cNvPicPr>
+            <a:picLocks noChangeAspect="1"/>
+          </p:cNvPicPr>
+          <p:nvPr/>
+        </p:nvPicPr>
+        <p:blipFill>
+          <a:blip r:embed="rId3"/>
+          <a:stretch>
+            <a:fillRect/>
+          </a:stretch>
+        </p:blipFill>
+        <p:spPr>
+          <a:xfrm>
+            <a:off x="5468112" y="1828800"/>
+            <a:ext cx="274320" cy="274320"/>
+          </a:xfrm>
+          <a:prstGeom prst="rect">
+            <a:avLst/>
+          </a:prstGeom>
+        </p:spPr>
+      </p:pic>
+      <p:sp>
+        <p:nvSpPr>
+          <p:cNvPr id="20" name="Text 15"/>
+          <p:cNvSpPr txBox="1"/>
+          <p:nvPr/>
+        </p:nvSpPr>
+        <p:spPr>
+          <a:xfrm>
+            <a:off x="6473952" y="1645920"/>
+            <a:ext cx="365760" cy="365760"/>
+          </a:xfrm>
+          <a:prstGeom prst="rect">
+            <a:avLst/>
+          </a:prstGeom>
+          <a:noFill/>
+          <a:ln/>
+        </p:spPr>
+        <p:txBody>
+          <a:bodyPr wrap="square" lIns="0" tIns="0" rIns="0" bIns="0" rtlCol="0" anchor="t"/>
+          <a:lstStyle/>
+          <a:p>
+            <a:pPr algn="r" indent="0" marL="0">
+              <a:buNone/>
+            </a:pPr>
+            <a:r>
+              <a:rPr lang="en-US" sz="1400" b="1" dirty="0">
+                <a:solidFill>
+                  <a:schemeClr val="tx2"/>
+                </a:solidFill>
+              </a:rPr>
+              <a:t>3</a:t>
+            </a:r>
+            <a:endParaRPr lang="en-US" sz="1400" dirty="0"/>
+          </a:p>
+        </p:txBody>
+      </p:sp>
+      <p:sp>
+        <p:nvSpPr>
+          <p:cNvPr id="21" name="Text 16"/>
+          <p:cNvSpPr txBox="1"/>
+          <p:nvPr/>
+        </p:nvSpPr>
+        <p:spPr>
+          <a:xfrm>
+            <a:off x="5330952" y="2377440"/>
+            <a:ext cx="1554480" cy="594360"/>
+          </a:xfrm>
+          <a:prstGeom prst="rect">
+            <a:avLst/>
+          </a:prstGeom>
+          <a:noFill/>
+          <a:ln/>
+        </p:spPr>
+        <p:txBody>
+          <a:bodyPr wrap="square" lIns="0" tIns="0" rIns="0" bIns="0" rtlCol="0" anchor="t"/>
+          <a:lstStyle/>
+          <a:p>
+            <a:pPr indent="0" marL="0">
+              <a:buNone/>
+            </a:pPr>
+            <a:r>
+              <a:rPr lang="en-US" sz="1600" b="1" dirty="0">
                 <a:solidFill>
                   <a:schemeClr val="tx1"/>
                 </a:solidFill>
               </a:rPr>
-              <a:t>EPE/MME (2024). PDE 2034, Caderno Micro e Minigeração Distribuída e Bateria atrás do Medidor.</a:t>
+              <a:t>Custo total (Ercap-SAE)</a:t>
             </a:r>
             <a:endParaRPr lang="en-US" sz="1600" dirty="0"/>
           </a:p>
-          <a:p>
-            <a:pPr marL="342900" indent="-342900">
-              <a:spcAft>
-                <a:spcPts val="1200"/>
-              </a:spcAft>
-              <a:buSzPct val="100000"/>
-              <a:buFont typeface="+mj-lt"/>
-              <a:buAutoNum type="arabicPeriod" startAt="1"/>
-            </a:pPr>
-            <a:r>
-              <a:rPr lang="en-US" sz="1600" dirty="0">
+        </p:txBody>
+      </p:sp>
+      <p:sp>
+        <p:nvSpPr>
+          <p:cNvPr id="22" name="Text 17"/>
+          <p:cNvSpPr txBox="1"/>
+          <p:nvPr/>
+        </p:nvSpPr>
+        <p:spPr>
+          <a:xfrm>
+            <a:off x="5330952" y="3017520"/>
+            <a:ext cx="1554480" cy="960120"/>
+          </a:xfrm>
+          <a:prstGeom prst="rect">
+            <a:avLst/>
+          </a:prstGeom>
+          <a:noFill/>
+          <a:ln/>
+        </p:spPr>
+        <p:txBody>
+          <a:bodyPr wrap="square" lIns="0" tIns="0" rIns="0" bIns="0" rtlCol="0" anchor="t"/>
+          <a:lstStyle/>
+          <a:p>
+            <a:pPr indent="0" marL="0">
+              <a:buNone/>
+            </a:pPr>
+            <a:r>
+              <a:rPr lang="en-US" sz="1400" dirty="0">
+                <a:solidFill>
+                  <a:schemeClr val="tx2"/>
+                </a:solidFill>
+              </a:rPr>
+              <a:t>Receita fixa mais a energia de recarga, com eficiência mínima de 85%</a:t>
+            </a:r>
+            <a:endParaRPr lang="en-US" sz="1400" dirty="0"/>
+          </a:p>
+        </p:txBody>
+      </p:sp>
+      <p:sp>
+        <p:nvSpPr>
+          <p:cNvPr id="23" name="Arrow"/>
+          <p:cNvSpPr/>
+          <p:nvPr/>
+        </p:nvSpPr>
+        <p:spPr>
+          <a:xfrm>
+            <a:off x="7104888" y="2743200"/>
+            <a:ext cx="237744" cy="0"/>
+          </a:xfrm>
+          <a:prstGeom prst="line">
+            <a:avLst/>
+          </a:prstGeom>
+          <a:noFill/>
+          <a:ln w="25400">
+            <a:solidFill>
+              <a:srgbClr val="5B6B80"/>
+            </a:solidFill>
+            <a:prstDash val="solid"/>
+            <a:tailEnd type="triangle"/>
+          </a:ln>
+        </p:spPr>
+      </p:sp>
+      <p:sp>
+        <p:nvSpPr>
+          <p:cNvPr id="24" name="Mechanism step 4"/>
+          <p:cNvSpPr/>
+          <p:nvPr/>
+        </p:nvSpPr>
+        <p:spPr>
+          <a:xfrm>
+            <a:off x="7379208" y="1463040"/>
+            <a:ext cx="1965960" cy="2560320"/>
+          </a:xfrm>
+          <a:prstGeom prst="roundRect">
+            <a:avLst>
+              <a:gd name="adj" fmla="val 5581"/>
+            </a:avLst>
+          </a:prstGeom>
+          <a:solidFill>
+            <a:schemeClr val="bg1"/>
+          </a:solidFill>
+          <a:ln w="12700">
+            <a:solidFill>
+              <a:schemeClr val="bg1"/>
+            </a:solidFill>
+            <a:prstDash val="solid"/>
+          </a:ln>
+          <a:effectLst>
+            <a:outerShdw sx="100000" sy="100000" kx="0" ky="0" algn="bl" rotWithShape="0" blurRad="101600" dist="25400" dir="5400000">
+              <a:srgbClr val="0B1A2E">
+                <a:alpha val="12000"/>
+              </a:srgbClr>
+            </a:outerShdw>
+          </a:effectLst>
+        </p:spPr>
+      </p:sp>
+      <p:sp>
+        <p:nvSpPr>
+          <p:cNvPr id="25" name="Icon circle"/>
+          <p:cNvSpPr/>
+          <p:nvPr/>
+        </p:nvSpPr>
+        <p:spPr>
+          <a:xfrm>
+            <a:off x="7607808" y="1691640"/>
+            <a:ext cx="548640" cy="548640"/>
+          </a:xfrm>
+          <a:prstGeom prst="ellipse">
+            <a:avLst/>
+          </a:prstGeom>
+          <a:solidFill>
+            <a:schemeClr val="accent2"/>
+          </a:solidFill>
+          <a:ln w="12700">
+            <a:solidFill>
+              <a:schemeClr val="accent2"/>
+            </a:solidFill>
+            <a:prstDash val="solid"/>
+          </a:ln>
+        </p:spPr>
+      </p:sp>
+      <p:pic>
+        <p:nvPicPr>
+          <p:cNvPr id="26" name="Image 3" descr="FaBalanceScale">    </p:cNvPr>
+          <p:cNvPicPr>
+            <a:picLocks noChangeAspect="1"/>
+          </p:cNvPicPr>
+          <p:nvPr/>
+        </p:nvPicPr>
+        <p:blipFill>
+          <a:blip r:embed="rId4"/>
+          <a:stretch>
+            <a:fillRect/>
+          </a:stretch>
+        </p:blipFill>
+        <p:spPr>
+          <a:xfrm>
+            <a:off x="7744968" y="1828800"/>
+            <a:ext cx="274320" cy="274320"/>
+          </a:xfrm>
+          <a:prstGeom prst="rect">
+            <a:avLst/>
+          </a:prstGeom>
+        </p:spPr>
+      </p:pic>
+      <p:sp>
+        <p:nvSpPr>
+          <p:cNvPr id="27" name="Text 21"/>
+          <p:cNvSpPr txBox="1"/>
+          <p:nvPr/>
+        </p:nvSpPr>
+        <p:spPr>
+          <a:xfrm>
+            <a:off x="8750808" y="1645920"/>
+            <a:ext cx="365760" cy="365760"/>
+          </a:xfrm>
+          <a:prstGeom prst="rect">
+            <a:avLst/>
+          </a:prstGeom>
+          <a:noFill/>
+          <a:ln/>
+        </p:spPr>
+        <p:txBody>
+          <a:bodyPr wrap="square" lIns="0" tIns="0" rIns="0" bIns="0" rtlCol="0" anchor="t"/>
+          <a:lstStyle/>
+          <a:p>
+            <a:pPr algn="r" indent="0" marL="0">
+              <a:buNone/>
+            </a:pPr>
+            <a:r>
+              <a:rPr lang="en-US" sz="1400" b="1" dirty="0">
+                <a:solidFill>
+                  <a:schemeClr val="tx2"/>
+                </a:solidFill>
+              </a:rPr>
+              <a:t>4</a:t>
+            </a:r>
+            <a:endParaRPr lang="en-US" sz="1400" dirty="0"/>
+          </a:p>
+        </p:txBody>
+      </p:sp>
+      <p:sp>
+        <p:nvSpPr>
+          <p:cNvPr id="28" name="Text 22"/>
+          <p:cNvSpPr txBox="1"/>
+          <p:nvPr/>
+        </p:nvSpPr>
+        <p:spPr>
+          <a:xfrm>
+            <a:off x="7607808" y="2377440"/>
+            <a:ext cx="1554480" cy="594360"/>
+          </a:xfrm>
+          <a:prstGeom prst="rect">
+            <a:avLst/>
+          </a:prstGeom>
+          <a:noFill/>
+          <a:ln/>
+        </p:spPr>
+        <p:txBody>
+          <a:bodyPr wrap="square" lIns="0" tIns="0" rIns="0" bIns="0" rtlCol="0" anchor="t"/>
+          <a:lstStyle/>
+          <a:p>
+            <a:pPr indent="0" marL="0">
+              <a:buNone/>
+            </a:pPr>
+            <a:r>
+              <a:rPr lang="en-US" sz="1600" b="1" dirty="0">
                 <a:solidFill>
                   <a:schemeClr val="tx1"/>
                 </a:solidFill>
               </a:rPr>
-              <a:t>Acende Brasil (2025). Custos dos cortes de energia solar e eólica devem ser compartilhados com a geração distribuída (via ABDIB).</a:t>
+              <a:t>Rateio entre geradores</a:t>
             </a:r>
             <a:endParaRPr lang="en-US" sz="1600" dirty="0"/>
           </a:p>
-          <a:p>
-            <a:pPr marL="342900" indent="-342900">
-              <a:spcAft>
-                <a:spcPts val="1200"/>
-              </a:spcAft>
-              <a:buSzPct val="100000"/>
-              <a:buFont typeface="+mj-lt"/>
-              <a:buAutoNum type="arabicPeriod" startAt="1"/>
-            </a:pPr>
-            <a:r>
-              <a:rPr lang="en-US" sz="1600" dirty="0">
+        </p:txBody>
+      </p:sp>
+      <p:sp>
+        <p:nvSpPr>
+          <p:cNvPr id="29" name="Text 23"/>
+          <p:cNvSpPr txBox="1"/>
+          <p:nvPr/>
+        </p:nvSpPr>
+        <p:spPr>
+          <a:xfrm>
+            <a:off x="7607808" y="3017520"/>
+            <a:ext cx="1554480" cy="960120"/>
+          </a:xfrm>
+          <a:prstGeom prst="rect">
+            <a:avLst/>
+          </a:prstGeom>
+          <a:noFill/>
+          <a:ln/>
+        </p:spPr>
+        <p:txBody>
+          <a:bodyPr wrap="square" lIns="0" tIns="0" rIns="0" bIns="0" rtlCol="0" anchor="t"/>
+          <a:lstStyle/>
+          <a:p>
+            <a:pPr indent="0" marL="0">
+              <a:buNone/>
+            </a:pPr>
+            <a:r>
+              <a:rPr lang="en-US" sz="1400" dirty="0">
+                <a:solidFill>
+                  <a:schemeClr val="tx2"/>
+                </a:solidFill>
+              </a:rPr>
+              <a:t>Agentes da CCEE, sem MMGD nem armazenamento autônomo</a:t>
+            </a:r>
+            <a:endParaRPr lang="en-US" sz="1400" dirty="0"/>
+          </a:p>
+        </p:txBody>
+      </p:sp>
+      <p:sp>
+        <p:nvSpPr>
+          <p:cNvPr id="30" name="Arrow"/>
+          <p:cNvSpPr/>
+          <p:nvPr/>
+        </p:nvSpPr>
+        <p:spPr>
+          <a:xfrm>
+            <a:off x="9381744" y="2743200"/>
+            <a:ext cx="237744" cy="0"/>
+          </a:xfrm>
+          <a:prstGeom prst="line">
+            <a:avLst/>
+          </a:prstGeom>
+          <a:noFill/>
+          <a:ln w="25400">
+            <a:solidFill>
+              <a:srgbClr val="5B6B80"/>
+            </a:solidFill>
+            <a:prstDash val="solid"/>
+            <a:tailEnd type="triangle"/>
+          </a:ln>
+        </p:spPr>
+      </p:sp>
+      <p:sp>
+        <p:nvSpPr>
+          <p:cNvPr id="31" name="Mechanism step 5"/>
+          <p:cNvSpPr/>
+          <p:nvPr/>
+        </p:nvSpPr>
+        <p:spPr>
+          <a:xfrm>
+            <a:off x="9656064" y="1463040"/>
+            <a:ext cx="1965960" cy="2560320"/>
+          </a:xfrm>
+          <a:prstGeom prst="roundRect">
+            <a:avLst>
+              <a:gd name="adj" fmla="val 5581"/>
+            </a:avLst>
+          </a:prstGeom>
+          <a:solidFill>
+            <a:schemeClr val="bg1"/>
+          </a:solidFill>
+          <a:ln w="12700">
+            <a:solidFill>
+              <a:schemeClr val="bg1"/>
+            </a:solidFill>
+            <a:prstDash val="solid"/>
+          </a:ln>
+          <a:effectLst>
+            <a:outerShdw sx="100000" sy="100000" kx="0" ky="0" algn="bl" rotWithShape="0" blurRad="101600" dist="25400" dir="5400000">
+              <a:srgbClr val="0B1A2E">
+                <a:alpha val="12000"/>
+              </a:srgbClr>
+            </a:outerShdw>
+          </a:effectLst>
+        </p:spPr>
+      </p:sp>
+      <p:sp>
+        <p:nvSpPr>
+          <p:cNvPr id="32" name="Icon circle"/>
+          <p:cNvSpPr/>
+          <p:nvPr/>
+        </p:nvSpPr>
+        <p:spPr>
+          <a:xfrm>
+            <a:off x="9884664" y="1691640"/>
+            <a:ext cx="548640" cy="548640"/>
+          </a:xfrm>
+          <a:prstGeom prst="ellipse">
+            <a:avLst/>
+          </a:prstGeom>
+          <a:solidFill>
+            <a:schemeClr val="accent3"/>
+          </a:solidFill>
+          <a:ln w="12700">
+            <a:solidFill>
+              <a:schemeClr val="accent3"/>
+            </a:solidFill>
+            <a:prstDash val="solid"/>
+          </a:ln>
+        </p:spPr>
+      </p:sp>
+      <p:pic>
+        <p:nvPicPr>
+          <p:cNvPr id="33" name="Image 4" descr="FaIndustry">    </p:cNvPr>
+          <p:cNvPicPr>
+            <a:picLocks noChangeAspect="1"/>
+          </p:cNvPicPr>
+          <p:nvPr/>
+        </p:nvPicPr>
+        <p:blipFill>
+          <a:blip r:embed="rId5"/>
+          <a:stretch>
+            <a:fillRect/>
+          </a:stretch>
+        </p:blipFill>
+        <p:spPr>
+          <a:xfrm>
+            <a:off x="10021824" y="1828800"/>
+            <a:ext cx="274320" cy="274320"/>
+          </a:xfrm>
+          <a:prstGeom prst="rect">
+            <a:avLst/>
+          </a:prstGeom>
+        </p:spPr>
+      </p:pic>
+      <p:sp>
+        <p:nvSpPr>
+          <p:cNvPr id="34" name="Text 27"/>
+          <p:cNvSpPr txBox="1"/>
+          <p:nvPr/>
+        </p:nvSpPr>
+        <p:spPr>
+          <a:xfrm>
+            <a:off x="11027664" y="1645920"/>
+            <a:ext cx="365760" cy="365760"/>
+          </a:xfrm>
+          <a:prstGeom prst="rect">
+            <a:avLst/>
+          </a:prstGeom>
+          <a:noFill/>
+          <a:ln/>
+        </p:spPr>
+        <p:txBody>
+          <a:bodyPr wrap="square" lIns="0" tIns="0" rIns="0" bIns="0" rtlCol="0" anchor="t"/>
+          <a:lstStyle/>
+          <a:p>
+            <a:pPr algn="r" indent="0" marL="0">
+              <a:buNone/>
+            </a:pPr>
+            <a:r>
+              <a:rPr lang="en-US" sz="1400" b="1" dirty="0">
+                <a:solidFill>
+                  <a:schemeClr val="tx2"/>
+                </a:solidFill>
+              </a:rPr>
+              <a:t>5</a:t>
+            </a:r>
+            <a:endParaRPr lang="en-US" sz="1400" dirty="0"/>
+          </a:p>
+        </p:txBody>
+      </p:sp>
+      <p:sp>
+        <p:nvSpPr>
+          <p:cNvPr id="35" name="Text 28"/>
+          <p:cNvSpPr txBox="1"/>
+          <p:nvPr/>
+        </p:nvSpPr>
+        <p:spPr>
+          <a:xfrm>
+            <a:off x="9884664" y="2377440"/>
+            <a:ext cx="1554480" cy="594360"/>
+          </a:xfrm>
+          <a:prstGeom prst="rect">
+            <a:avLst/>
+          </a:prstGeom>
+          <a:noFill/>
+          <a:ln/>
+        </p:spPr>
+        <p:txBody>
+          <a:bodyPr wrap="square" lIns="0" tIns="0" rIns="0" bIns="0" rtlCol="0" anchor="t"/>
+          <a:lstStyle/>
+          <a:p>
+            <a:pPr indent="0" marL="0">
+              <a:buNone/>
+            </a:pPr>
+            <a:r>
+              <a:rPr lang="en-US" sz="1600" b="1" dirty="0">
                 <a:solidFill>
                   <a:schemeClr val="tx1"/>
                 </a:solidFill>
               </a:rPr>
-              <a:t>Gesel-UFRJ (2025). Gesel Broadcast: Medidas para Mitigação dos Curtailments.</a:t>
+              <a:t>Parcela de cada fonte</a:t>
             </a:r>
             <a:endParaRPr lang="en-US" sz="1600" dirty="0"/>
           </a:p>
-          <a:p>
-            <a:pPr marL="342900" indent="-342900">
-              <a:spcAft>
-                <a:spcPts val="1200"/>
-              </a:spcAft>
-              <a:buSzPct val="100000"/>
-              <a:buFont typeface="+mj-lt"/>
-              <a:buAutoNum type="arabicPeriod" startAt="1"/>
-            </a:pPr>
-            <a:r>
-              <a:rPr lang="en-US" sz="1600" dirty="0">
+        </p:txBody>
+      </p:sp>
+      <p:sp>
+        <p:nvSpPr>
+          <p:cNvPr id="36" name="Text 29"/>
+          <p:cNvSpPr txBox="1"/>
+          <p:nvPr/>
+        </p:nvSpPr>
+        <p:spPr>
+          <a:xfrm>
+            <a:off x="9884664" y="3017520"/>
+            <a:ext cx="1554480" cy="960120"/>
+          </a:xfrm>
+          <a:prstGeom prst="rect">
+            <a:avLst/>
+          </a:prstGeom>
+          <a:noFill/>
+          <a:ln/>
+        </p:spPr>
+        <p:txBody>
+          <a:bodyPr wrap="square" lIns="0" tIns="0" rIns="0" bIns="0" rtlCol="0" anchor="t"/>
+          <a:lstStyle/>
+          <a:p>
+            <a:pPr indent="0" marL="0">
+              <a:buNone/>
+            </a:pPr>
+            <a:r>
+              <a:rPr lang="en-US" sz="1400" dirty="0">
+                <a:solidFill>
+                  <a:schemeClr val="tx2"/>
+                </a:solidFill>
+              </a:rPr>
+              <a:t>UHE, UTE, eólica e UFV pagam conforme a regra de rateio</a:t>
+            </a:r>
+            <a:endParaRPr lang="en-US" sz="1400" dirty="0"/>
+          </a:p>
+        </p:txBody>
+      </p:sp>
+      <p:sp>
+        <p:nvSpPr>
+          <p:cNvPr id="37" name="Rule card 1"/>
+          <p:cNvSpPr/>
+          <p:nvPr/>
+        </p:nvSpPr>
+        <p:spPr>
+          <a:xfrm>
+            <a:off x="548640" y="4251960"/>
+            <a:ext cx="3520440" cy="1920240"/>
+          </a:xfrm>
+          <a:prstGeom prst="roundRect">
+            <a:avLst>
+              <a:gd name="adj" fmla="val 5714"/>
+            </a:avLst>
+          </a:prstGeom>
+          <a:solidFill>
+            <a:schemeClr val="bg1"/>
+          </a:solidFill>
+          <a:ln w="12700">
+            <a:solidFill>
+              <a:schemeClr val="bg1"/>
+            </a:solidFill>
+            <a:prstDash val="solid"/>
+          </a:ln>
+          <a:effectLst>
+            <a:outerShdw sx="100000" sy="100000" kx="0" ky="0" algn="bl" rotWithShape="0" blurRad="101600" dist="25400" dir="5400000">
+              <a:srgbClr val="0B1A2E">
+                <a:alpha val="12000"/>
+              </a:srgbClr>
+            </a:outerShdw>
+          </a:effectLst>
+        </p:spPr>
+      </p:sp>
+      <p:sp>
+        <p:nvSpPr>
+          <p:cNvPr id="38" name="Icon circle"/>
+          <p:cNvSpPr/>
+          <p:nvPr/>
+        </p:nvSpPr>
+        <p:spPr>
+          <a:xfrm>
+            <a:off x="822960" y="4480560"/>
+            <a:ext cx="502920" cy="502920"/>
+          </a:xfrm>
+          <a:prstGeom prst="ellipse">
+            <a:avLst/>
+          </a:prstGeom>
+          <a:solidFill>
+            <a:schemeClr val="accent1"/>
+          </a:solidFill>
+          <a:ln w="12700">
+            <a:solidFill>
+              <a:schemeClr val="accent1"/>
+            </a:solidFill>
+            <a:prstDash val="solid"/>
+          </a:ln>
+        </p:spPr>
+      </p:sp>
+      <p:pic>
+        <p:nvPicPr>
+          <p:cNvPr id="39" name="Image 5" descr="FaChartLine">    </p:cNvPr>
+          <p:cNvPicPr>
+            <a:picLocks noChangeAspect="1"/>
+          </p:cNvPicPr>
+          <p:nvPr/>
+        </p:nvPicPr>
+        <p:blipFill>
+          <a:blip r:embed="rId6"/>
+          <a:stretch>
+            <a:fillRect/>
+          </a:stretch>
+        </p:blipFill>
+        <p:spPr>
+          <a:xfrm>
+            <a:off x="948690" y="4606290"/>
+            <a:ext cx="251460" cy="251460"/>
+          </a:xfrm>
+          <a:prstGeom prst="rect">
+            <a:avLst/>
+          </a:prstGeom>
+        </p:spPr>
+      </p:pic>
+      <p:sp>
+        <p:nvSpPr>
+          <p:cNvPr id="40" name="Text 32"/>
+          <p:cNvSpPr txBox="1"/>
+          <p:nvPr/>
+        </p:nvSpPr>
+        <p:spPr>
+          <a:xfrm>
+            <a:off x="1508760" y="4480560"/>
+            <a:ext cx="2377440" cy="502920"/>
+          </a:xfrm>
+          <a:prstGeom prst="rect">
+            <a:avLst/>
+          </a:prstGeom>
+          <a:noFill/>
+          <a:ln/>
+        </p:spPr>
+        <p:txBody>
+          <a:bodyPr wrap="square" lIns="0" tIns="0" rIns="0" bIns="0" rtlCol="0" anchor="ctr"/>
+          <a:lstStyle/>
+          <a:p>
+            <a:pPr indent="0" marL="0">
+              <a:buNone/>
+            </a:pPr>
+            <a:r>
+              <a:rPr lang="en-US" sz="1800" b="1" dirty="0">
                 <a:solidFill>
                   <a:schemeClr val="tx1"/>
                 </a:solidFill>
-              </a:rPr>
-              <a:t>Agência Infra (2025). Agentes têm prejuízo de R$ 6,5 bi por curtailment em 2025, diz estudo (Volts Robotics).</a:t>
-            </a:r>
-            <a:endParaRPr lang="en-US" sz="1600" dirty="0"/>
-          </a:p>
-          <a:p>
-            <a:pPr marL="342900" indent="-342900">
-              <a:spcAft>
-                <a:spcPts val="1200"/>
-              </a:spcAft>
-              <a:buSzPct val="100000"/>
-              <a:buFont typeface="+mj-lt"/>
-              <a:buAutoNum type="arabicPeriod" startAt="1"/>
-            </a:pPr>
-            <a:r>
-              <a:rPr lang="en-US" sz="1600" dirty="0">
+                <a:latin typeface="Cambria" pitchFamily="34" charset="0"/>
+                <a:ea typeface="Cambria" pitchFamily="34" charset="-122"/>
+                <a:cs typeface="Cambria" pitchFamily="34" charset="-120"/>
+              </a:rPr>
+              <a:t>Desempenho</a:t>
+            </a:r>
+            <a:endParaRPr lang="en-US" sz="1800" dirty="0"/>
+          </a:p>
+        </p:txBody>
+      </p:sp>
+      <p:sp>
+        <p:nvSpPr>
+          <p:cNvPr id="41" name="Text 33"/>
+          <p:cNvSpPr txBox="1"/>
+          <p:nvPr/>
+        </p:nvSpPr>
+        <p:spPr>
+          <a:xfrm>
+            <a:off x="822960" y="5166360"/>
+            <a:ext cx="3017520" cy="914400"/>
+          </a:xfrm>
+          <a:prstGeom prst="rect">
+            <a:avLst/>
+          </a:prstGeom>
+          <a:noFill/>
+          <a:ln/>
+        </p:spPr>
+        <p:txBody>
+          <a:bodyPr wrap="square" lIns="0" tIns="0" rIns="0" bIns="0" rtlCol="0" anchor="t"/>
+          <a:lstStyle/>
+          <a:p>
+            <a:pPr indent="0" marL="0">
+              <a:buNone/>
+            </a:pPr>
+            <a:r>
+              <a:rPr lang="en-US" sz="1400" dirty="0">
+                <a:solidFill>
+                  <a:schemeClr val="tx2"/>
+                </a:solidFill>
+              </a:rPr>
+              <a:t>A receita é reduzida se a bateria não entregar a potência contratada.</a:t>
+            </a:r>
+            <a:endParaRPr lang="en-US" sz="1400" dirty="0"/>
+          </a:p>
+        </p:txBody>
+      </p:sp>
+      <p:sp>
+        <p:nvSpPr>
+          <p:cNvPr id="42" name="Rule card 2"/>
+          <p:cNvSpPr/>
+          <p:nvPr/>
+        </p:nvSpPr>
+        <p:spPr>
+          <a:xfrm>
+            <a:off x="4334256" y="4251960"/>
+            <a:ext cx="3520440" cy="1920240"/>
+          </a:xfrm>
+          <a:prstGeom prst="roundRect">
+            <a:avLst>
+              <a:gd name="adj" fmla="val 5714"/>
+            </a:avLst>
+          </a:prstGeom>
+          <a:solidFill>
+            <a:schemeClr val="bg1"/>
+          </a:solidFill>
+          <a:ln w="12700">
+            <a:solidFill>
+              <a:schemeClr val="bg1"/>
+            </a:solidFill>
+            <a:prstDash val="solid"/>
+          </a:ln>
+          <a:effectLst>
+            <a:outerShdw sx="100000" sy="100000" kx="0" ky="0" algn="bl" rotWithShape="0" blurRad="101600" dist="25400" dir="5400000">
+              <a:srgbClr val="0B1A2E">
+                <a:alpha val="12000"/>
+              </a:srgbClr>
+            </a:outerShdw>
+          </a:effectLst>
+        </p:spPr>
+      </p:sp>
+      <p:sp>
+        <p:nvSpPr>
+          <p:cNvPr id="43" name="Icon circle"/>
+          <p:cNvSpPr/>
+          <p:nvPr/>
+        </p:nvSpPr>
+        <p:spPr>
+          <a:xfrm>
+            <a:off x="4608576" y="4480560"/>
+            <a:ext cx="502920" cy="502920"/>
+          </a:xfrm>
+          <a:prstGeom prst="ellipse">
+            <a:avLst/>
+          </a:prstGeom>
+          <a:solidFill>
+            <a:schemeClr val="accent1"/>
+          </a:solidFill>
+          <a:ln w="12700">
+            <a:solidFill>
+              <a:schemeClr val="accent1"/>
+            </a:solidFill>
+            <a:prstDash val="solid"/>
+          </a:ln>
+        </p:spPr>
+      </p:sp>
+      <p:pic>
+        <p:nvPicPr>
+          <p:cNvPr id="44" name="Image 6" descr="FaGavel">    </p:cNvPr>
+          <p:cNvPicPr>
+            <a:picLocks noChangeAspect="1"/>
+          </p:cNvPicPr>
+          <p:nvPr/>
+        </p:nvPicPr>
+        <p:blipFill>
+          <a:blip r:embed="rId7"/>
+          <a:stretch>
+            <a:fillRect/>
+          </a:stretch>
+        </p:blipFill>
+        <p:spPr>
+          <a:xfrm>
+            <a:off x="4734306" y="4606290"/>
+            <a:ext cx="251460" cy="251460"/>
+          </a:xfrm>
+          <a:prstGeom prst="rect">
+            <a:avLst/>
+          </a:prstGeom>
+        </p:spPr>
+      </p:pic>
+      <p:sp>
+        <p:nvSpPr>
+          <p:cNvPr id="45" name="Text 36"/>
+          <p:cNvSpPr txBox="1"/>
+          <p:nvPr/>
+        </p:nvSpPr>
+        <p:spPr>
+          <a:xfrm>
+            <a:off x="5294376" y="4480560"/>
+            <a:ext cx="2377440" cy="502920"/>
+          </a:xfrm>
+          <a:prstGeom prst="rect">
+            <a:avLst/>
+          </a:prstGeom>
+          <a:noFill/>
+          <a:ln/>
+        </p:spPr>
+        <p:txBody>
+          <a:bodyPr wrap="square" lIns="0" tIns="0" rIns="0" bIns="0" rtlCol="0" anchor="ctr"/>
+          <a:lstStyle/>
+          <a:p>
+            <a:pPr indent="0" marL="0">
+              <a:buNone/>
+            </a:pPr>
+            <a:r>
+              <a:rPr lang="en-US" sz="1800" b="1" dirty="0">
                 <a:solidFill>
                   <a:schemeClr val="tx1"/>
                 </a:solidFill>
-              </a:rPr>
-              <a:t>ePowerBay (2026). Análise do Leilão de Baterias LRCAP 2026.</a:t>
-            </a:r>
-            <a:endParaRPr lang="en-US" sz="1600" dirty="0"/>
-          </a:p>
-          <a:p>
-            <a:pPr marL="342900" indent="-342900">
-              <a:spcAft>
-                <a:spcPts val="1200"/>
-              </a:spcAft>
-              <a:buSzPct val="100000"/>
-              <a:buFont typeface="+mj-lt"/>
-              <a:buAutoNum type="arabicPeriod" startAt="1"/>
-            </a:pPr>
-            <a:r>
-              <a:rPr lang="en-US" sz="1600" dirty="0">
+                <a:latin typeface="Cambria" pitchFamily="34" charset="0"/>
+                <a:ea typeface="Cambria" pitchFamily="34" charset="-122"/>
+                <a:cs typeface="Cambria" pitchFamily="34" charset="-120"/>
+              </a:rPr>
+              <a:t>Penalidades (proposta)</a:t>
+            </a:r>
+            <a:endParaRPr lang="en-US" sz="1800" dirty="0"/>
+          </a:p>
+        </p:txBody>
+      </p:sp>
+      <p:sp>
+        <p:nvSpPr>
+          <p:cNvPr id="46" name="Text 37"/>
+          <p:cNvSpPr txBox="1"/>
+          <p:nvPr/>
+        </p:nvSpPr>
+        <p:spPr>
+          <a:xfrm>
+            <a:off x="4608576" y="5166360"/>
+            <a:ext cx="3017520" cy="914400"/>
+          </a:xfrm>
+          <a:prstGeom prst="rect">
+            <a:avLst/>
+          </a:prstGeom>
+          <a:noFill/>
+          <a:ln/>
+        </p:spPr>
+        <p:txBody>
+          <a:bodyPr wrap="square" lIns="0" tIns="0" rIns="0" bIns="0" rtlCol="0" anchor="t"/>
+          <a:lstStyle/>
+          <a:p>
+            <a:pPr indent="0" marL="0">
+              <a:buNone/>
+            </a:pPr>
+            <a:r>
+              <a:rPr lang="en-US" sz="1400" dirty="0">
+                <a:solidFill>
+                  <a:schemeClr val="tx2"/>
+                </a:solidFill>
+              </a:rPr>
+              <a:t>1,15 vez a receita fixa unitária por descumprir comandos do ONS e 1,10 vez por indisponibilidade.</a:t>
+            </a:r>
+            <a:endParaRPr lang="en-US" sz="1400" dirty="0"/>
+          </a:p>
+        </p:txBody>
+      </p:sp>
+      <p:sp>
+        <p:nvSpPr>
+          <p:cNvPr id="47" name="Rule card 3"/>
+          <p:cNvSpPr/>
+          <p:nvPr/>
+        </p:nvSpPr>
+        <p:spPr>
+          <a:xfrm>
+            <a:off x="8119872" y="4251960"/>
+            <a:ext cx="3520440" cy="1920240"/>
+          </a:xfrm>
+          <a:prstGeom prst="roundRect">
+            <a:avLst>
+              <a:gd name="adj" fmla="val 5714"/>
+            </a:avLst>
+          </a:prstGeom>
+          <a:solidFill>
+            <a:schemeClr val="bg1"/>
+          </a:solidFill>
+          <a:ln w="12700">
+            <a:solidFill>
+              <a:schemeClr val="bg1"/>
+            </a:solidFill>
+            <a:prstDash val="solid"/>
+          </a:ln>
+          <a:effectLst>
+            <a:outerShdw sx="100000" sy="100000" kx="0" ky="0" algn="bl" rotWithShape="0" blurRad="101600" dist="25400" dir="5400000">
+              <a:srgbClr val="0B1A2E">
+                <a:alpha val="12000"/>
+              </a:srgbClr>
+            </a:outerShdw>
+          </a:effectLst>
+        </p:spPr>
+      </p:sp>
+      <p:sp>
+        <p:nvSpPr>
+          <p:cNvPr id="48" name="Icon circle"/>
+          <p:cNvSpPr/>
+          <p:nvPr/>
+        </p:nvSpPr>
+        <p:spPr>
+          <a:xfrm>
+            <a:off x="8394192" y="4480560"/>
+            <a:ext cx="502920" cy="502920"/>
+          </a:xfrm>
+          <a:prstGeom prst="ellipse">
+            <a:avLst/>
+          </a:prstGeom>
+          <a:solidFill>
+            <a:schemeClr val="accent1"/>
+          </a:solidFill>
+          <a:ln w="12700">
+            <a:solidFill>
+              <a:schemeClr val="accent1"/>
+            </a:solidFill>
+            <a:prstDash val="solid"/>
+          </a:ln>
+        </p:spPr>
+      </p:sp>
+      <p:pic>
+        <p:nvPicPr>
+          <p:cNvPr id="49" name="Image 7" descr="FaBolt">    </p:cNvPr>
+          <p:cNvPicPr>
+            <a:picLocks noChangeAspect="1"/>
+          </p:cNvPicPr>
+          <p:nvPr/>
+        </p:nvPicPr>
+        <p:blipFill>
+          <a:blip r:embed="rId8"/>
+          <a:stretch>
+            <a:fillRect/>
+          </a:stretch>
+        </p:blipFill>
+        <p:spPr>
+          <a:xfrm>
+            <a:off x="8519922" y="4606290"/>
+            <a:ext cx="251460" cy="251460"/>
+          </a:xfrm>
+          <a:prstGeom prst="rect">
+            <a:avLst/>
+          </a:prstGeom>
+        </p:spPr>
+      </p:pic>
+      <p:sp>
+        <p:nvSpPr>
+          <p:cNvPr id="50" name="Text 40"/>
+          <p:cNvSpPr txBox="1"/>
+          <p:nvPr/>
+        </p:nvSpPr>
+        <p:spPr>
+          <a:xfrm>
+            <a:off x="9079992" y="4480560"/>
+            <a:ext cx="2377440" cy="502920"/>
+          </a:xfrm>
+          <a:prstGeom prst="rect">
+            <a:avLst/>
+          </a:prstGeom>
+          <a:noFill/>
+          <a:ln/>
+        </p:spPr>
+        <p:txBody>
+          <a:bodyPr wrap="square" lIns="0" tIns="0" rIns="0" bIns="0" rtlCol="0" anchor="ctr"/>
+          <a:lstStyle/>
+          <a:p>
+            <a:pPr indent="0" marL="0">
+              <a:buNone/>
+            </a:pPr>
+            <a:r>
+              <a:rPr lang="en-US" sz="1800" b="1" dirty="0">
                 <a:solidFill>
                   <a:schemeClr val="tx1"/>
                 </a:solidFill>
-              </a:rPr>
-              <a:t>TAGD Law (2026). Projeto muda rateio do Ercap de baterias (Lei 15.269/2025 e PL 3.716/2026).</a:t>
-            </a:r>
-            <a:endParaRPr lang="en-US" sz="1600" dirty="0"/>
+                <a:latin typeface="Cambria" pitchFamily="34" charset="0"/>
+                <a:ea typeface="Cambria" pitchFamily="34" charset="-122"/>
+                <a:cs typeface="Cambria" pitchFamily="34" charset="-120"/>
+              </a:rPr>
+              <a:t>Consumo interno</a:t>
+            </a:r>
+            <a:endParaRPr lang="en-US" sz="1800" dirty="0"/>
+          </a:p>
+        </p:txBody>
+      </p:sp>
+      <p:sp>
+        <p:nvSpPr>
+          <p:cNvPr id="51" name="Text 41"/>
+          <p:cNvSpPr txBox="1"/>
+          <p:nvPr/>
+        </p:nvSpPr>
+        <p:spPr>
+          <a:xfrm>
+            <a:off x="8394192" y="5166360"/>
+            <a:ext cx="3017520" cy="914400"/>
+          </a:xfrm>
+          <a:prstGeom prst="rect">
+            <a:avLst/>
+          </a:prstGeom>
+          <a:noFill/>
+          <a:ln/>
+        </p:spPr>
+        <p:txBody>
+          <a:bodyPr wrap="square" lIns="0" tIns="0" rIns="0" bIns="0" rtlCol="0" anchor="t"/>
+          <a:lstStyle/>
+          <a:p>
+            <a:pPr indent="0" marL="0">
+              <a:buNone/>
+            </a:pPr>
+            <a:r>
+              <a:rPr lang="en-US" sz="1400" dirty="0">
+                <a:solidFill>
+                  <a:schemeClr val="tx2"/>
+                </a:solidFill>
+              </a:rPr>
+              <a:t>Acima de 15% da energia utilizada, o excedente fica com o dono e é descontado da receita.</a:t>
+            </a:r>
+            <a:endParaRPr lang="en-US" sz="1400" dirty="0"/>
+          </a:p>
+        </p:txBody>
+      </p:sp>
+      <p:sp>
+        <p:nvSpPr>
+          <p:cNvPr id="52" name="Text 42"/>
+          <p:cNvSpPr txBox="1"/>
+          <p:nvPr/>
+        </p:nvSpPr>
+        <p:spPr>
+          <a:xfrm>
+            <a:off x="548640" y="6382512"/>
+            <a:ext cx="10424160" cy="274320"/>
+          </a:xfrm>
+          <a:prstGeom prst="rect">
+            <a:avLst/>
+          </a:prstGeom>
+          <a:noFill/>
+          <a:ln/>
+        </p:spPr>
+        <p:txBody>
+          <a:bodyPr wrap="square" lIns="0" tIns="0" rIns="0" bIns="0" rtlCol="0" anchor="ctr"/>
+          <a:lstStyle/>
+          <a:p>
+            <a:pPr indent="0" marL="0">
+              <a:buNone/>
+            </a:pPr>
+            <a:r>
+              <a:rPr lang="en-US" sz="1000" i="1" dirty="0">
+                <a:solidFill>
+                  <a:schemeClr val="tx2"/>
+                </a:solidFill>
+              </a:rPr>
+              <a:t>Fontes: Portaria GM/MME 136/2026 e minutas dos editais, via Canal Solar e ANEEL (2026). Valores em consulta pública, sujeitos a mudança no edital final.</a:t>
+            </a:r>
+            <a:endParaRPr lang="en-US" sz="1000" dirty="0"/>
           </a:p>
         </p:txBody>
       </p:sp>
@@ -8503,6 +11620,4856 @@
             <a:fld id="{F7021451-1387-4CA6-816F-3879F97B5CBC}" type="slidenum">
               <a:rPr b="0" lang="en-US"/>
               <a:t>15</a:t>
+            </a:fld>
+            <a:endParaRPr lang="en-US"/>
+          </a:p>
+        </p:txBody>
+      </p:sp>
+    </p:spTree>
+  </p:cSld>
+  <p:clrMapOvr>
+    <a:masterClrMapping/>
+  </p:clrMapOvr>
+</p:sld>
+</file>
+
+<file path=ppt/slides/slide16.xml><?xml version="1.0" encoding="utf-8"?>
+<p:sld xmlns:a="http://schemas.openxmlformats.org/drawingml/2006/main" xmlns:r="http://schemas.openxmlformats.org/officeDocument/2006/relationships" xmlns:p="http://schemas.openxmlformats.org/presentationml/2006/main">
+  <p:cSld name="Slide 16">
+    <p:spTree>
+      <p:nvGrpSpPr>
+        <p:cNvPr id="1" name=""/>
+        <p:cNvGrpSpPr/>
+        <p:nvPr/>
+      </p:nvGrpSpPr>
+      <p:grpSpPr>
+        <a:xfrm>
+          <a:off x="0" y="0"/>
+          <a:ext cx="0" cy="0"/>
+          <a:chOff x="0" y="0"/>
+          <a:chExt cx="0" cy="0"/>
+        </a:xfrm>
+      </p:grpSpPr>
+      <p:sp>
+        <p:nvSpPr>
+          <p:cNvPr id="2" name="Text 0"/>
+          <p:cNvSpPr/>
+          <p:nvPr>
+            <p:ph idx="100" type="title" hasCustomPrompt="1"/>
+          </p:nvPr>
+        </p:nvSpPr>
+        <p:spPr>
+          <a:xfrm>
+            <a:off x="548640" y="365760"/>
+            <a:ext cx="11094415" cy="822960"/>
+          </a:xfrm>
+          <a:prstGeom prst="rect">
+            <a:avLst/>
+          </a:prstGeom>
+          <a:noFill/>
+          <a:ln/>
+        </p:spPr>
+        <p:txBody>
+          <a:bodyPr wrap="square" lIns="0" tIns="0" rIns="0" bIns="0" rtlCol="0" anchor="ctr"/>
+          <a:lstStyle/>
+          <a:p>
+            <a:pPr algn="l" indent="0" marL="0">
+              <a:buNone/>
+            </a:pPr>
+            <a:r>
+              <a:rPr lang="en-US" sz="3200" b="1" dirty="0">
+                <a:solidFill>
+                  <a:schemeClr val="tx1"/>
+                </a:solidFill>
+              </a:rPr>
+              <a:t>Como o encargo pode ser dividido</a:t>
+            </a:r>
+            <a:endParaRPr lang="en-US" sz="3200" dirty="0"/>
+          </a:p>
+        </p:txBody>
+      </p:sp>
+      <p:sp>
+        <p:nvSpPr>
+          <p:cNvPr id="3" name="Text 1"/>
+          <p:cNvSpPr txBox="1"/>
+          <p:nvPr/>
+        </p:nvSpPr>
+        <p:spPr>
+          <a:xfrm>
+            <a:off x="548640" y="1280160"/>
+            <a:ext cx="6583680" cy="640080"/>
+          </a:xfrm>
+          <a:prstGeom prst="rect">
+            <a:avLst/>
+          </a:prstGeom>
+          <a:noFill/>
+          <a:ln/>
+        </p:spPr>
+        <p:txBody>
+          <a:bodyPr wrap="square" lIns="0" tIns="0" rIns="0" bIns="0" rtlCol="0" anchor="t"/>
+          <a:lstStyle/>
+          <a:p>
+            <a:pPr indent="0" marL="0">
+              <a:buNone/>
+            </a:pPr>
+            <a:r>
+              <a:rPr lang="en-US" sz="1600" b="1" dirty="0">
+                <a:solidFill>
+                  <a:schemeClr val="tx1"/>
+                </a:solidFill>
+              </a:rPr>
+              <a:t>Proposta da área técnica da ANEEL (NT 101/2026): quanto menos flexível a fonte, maior a parcela</a:t>
+            </a:r>
+            <a:endParaRPr lang="en-US" sz="1600" dirty="0"/>
+          </a:p>
+        </p:txBody>
+      </p:sp>
+      <p:sp>
+        <p:nvSpPr>
+          <p:cNvPr id="4" name="Text 2"/>
+          <p:cNvSpPr txBox="1"/>
+          <p:nvPr/>
+        </p:nvSpPr>
+        <p:spPr>
+          <a:xfrm>
+            <a:off x="548640" y="2194560"/>
+            <a:ext cx="6126480" cy="320040"/>
+          </a:xfrm>
+          <a:prstGeom prst="rect">
+            <a:avLst/>
+          </a:prstGeom>
+          <a:noFill/>
+          <a:ln/>
+        </p:spPr>
+        <p:txBody>
+          <a:bodyPr wrap="square" lIns="0" tIns="0" rIns="0" bIns="0" rtlCol="0" anchor="t"/>
+          <a:lstStyle/>
+          <a:p>
+            <a:pPr indent="0" marL="0">
+              <a:buNone/>
+            </a:pPr>
+            <a:r>
+              <a:rPr lang="en-US" sz="1400" dirty="0">
+                <a:solidFill>
+                  <a:schemeClr val="tx2"/>
+                </a:solidFill>
+              </a:rPr>
+              <a:t>Inflexíveis e intermitentes</a:t>
+            </a:r>
+            <a:endParaRPr lang="en-US" sz="1400" dirty="0"/>
+          </a:p>
+        </p:txBody>
+      </p:sp>
+      <p:sp>
+        <p:nvSpPr>
+          <p:cNvPr id="5" name="Share bar 1"/>
+          <p:cNvSpPr/>
+          <p:nvPr/>
+        </p:nvSpPr>
+        <p:spPr>
+          <a:xfrm>
+            <a:off x="548640" y="2560320"/>
+            <a:ext cx="6126480" cy="457200"/>
+          </a:xfrm>
+          <a:prstGeom prst="roundRect">
+            <a:avLst>
+              <a:gd name="adj" fmla="val 16000"/>
+            </a:avLst>
+          </a:prstGeom>
+          <a:solidFill>
+            <a:schemeClr val="accent4"/>
+          </a:solidFill>
+          <a:ln w="12700">
+            <a:solidFill>
+              <a:schemeClr val="accent4"/>
+            </a:solidFill>
+            <a:prstDash val="solid"/>
+          </a:ln>
+        </p:spPr>
+      </p:sp>
+      <p:sp>
+        <p:nvSpPr>
+          <p:cNvPr id="6" name="Text 4"/>
+          <p:cNvSpPr txBox="1"/>
+          <p:nvPr/>
+        </p:nvSpPr>
+        <p:spPr>
+          <a:xfrm>
+            <a:off x="685800" y="2560320"/>
+            <a:ext cx="2743200" cy="457200"/>
+          </a:xfrm>
+          <a:prstGeom prst="rect">
+            <a:avLst/>
+          </a:prstGeom>
+          <a:noFill/>
+          <a:ln/>
+        </p:spPr>
+        <p:txBody>
+          <a:bodyPr wrap="square" lIns="0" tIns="0" rIns="0" bIns="0" rtlCol="0" anchor="ctr"/>
+          <a:lstStyle/>
+          <a:p>
+            <a:pPr indent="0" marL="0">
+              <a:buNone/>
+            </a:pPr>
+            <a:r>
+              <a:rPr lang="en-US" sz="1600" b="1" dirty="0">
+                <a:solidFill>
+                  <a:schemeClr val="bg1"/>
+                </a:solidFill>
+              </a:rPr>
+              <a:t>100%</a:t>
+            </a:r>
+            <a:endParaRPr lang="en-US" sz="1600" dirty="0"/>
+          </a:p>
+        </p:txBody>
+      </p:sp>
+      <p:sp>
+        <p:nvSpPr>
+          <p:cNvPr id="7" name="Text 5"/>
+          <p:cNvSpPr txBox="1"/>
+          <p:nvPr/>
+        </p:nvSpPr>
+        <p:spPr>
+          <a:xfrm>
+            <a:off x="548640" y="3154680"/>
+            <a:ext cx="6126480" cy="320040"/>
+          </a:xfrm>
+          <a:prstGeom prst="rect">
+            <a:avLst/>
+          </a:prstGeom>
+          <a:noFill/>
+          <a:ln/>
+        </p:spPr>
+        <p:txBody>
+          <a:bodyPr wrap="square" lIns="0" tIns="0" rIns="0" bIns="0" rtlCol="0" anchor="t"/>
+          <a:lstStyle/>
+          <a:p>
+            <a:pPr indent="0" marL="0">
+              <a:buNone/>
+            </a:pPr>
+            <a:r>
+              <a:rPr lang="en-US" sz="1400" dirty="0">
+                <a:solidFill>
+                  <a:schemeClr val="tx2"/>
+                </a:solidFill>
+              </a:rPr>
+              <a:t>Flexibilidade intermediária</a:t>
+            </a:r>
+            <a:endParaRPr lang="en-US" sz="1400" dirty="0"/>
+          </a:p>
+        </p:txBody>
+      </p:sp>
+      <p:sp>
+        <p:nvSpPr>
+          <p:cNvPr id="8" name="Share bar 2"/>
+          <p:cNvSpPr/>
+          <p:nvPr/>
+        </p:nvSpPr>
+        <p:spPr>
+          <a:xfrm>
+            <a:off x="548640" y="3520440"/>
+            <a:ext cx="3063240" cy="457200"/>
+          </a:xfrm>
+          <a:prstGeom prst="roundRect">
+            <a:avLst>
+              <a:gd name="adj" fmla="val 16000"/>
+            </a:avLst>
+          </a:prstGeom>
+          <a:solidFill>
+            <a:schemeClr val="accent1"/>
+          </a:solidFill>
+          <a:ln w="12700">
+            <a:solidFill>
+              <a:schemeClr val="accent1"/>
+            </a:solidFill>
+            <a:prstDash val="solid"/>
+          </a:ln>
+        </p:spPr>
+      </p:sp>
+      <p:sp>
+        <p:nvSpPr>
+          <p:cNvPr id="9" name="Text 7"/>
+          <p:cNvSpPr txBox="1"/>
+          <p:nvPr/>
+        </p:nvSpPr>
+        <p:spPr>
+          <a:xfrm>
+            <a:off x="685800" y="3520440"/>
+            <a:ext cx="2743200" cy="457200"/>
+          </a:xfrm>
+          <a:prstGeom prst="rect">
+            <a:avLst/>
+          </a:prstGeom>
+          <a:noFill/>
+          <a:ln/>
+        </p:spPr>
+        <p:txBody>
+          <a:bodyPr wrap="square" lIns="0" tIns="0" rIns="0" bIns="0" rtlCol="0" anchor="ctr"/>
+          <a:lstStyle/>
+          <a:p>
+            <a:pPr indent="0" marL="0">
+              <a:buNone/>
+            </a:pPr>
+            <a:r>
+              <a:rPr lang="en-US" sz="1600" b="1" dirty="0">
+                <a:solidFill>
+                  <a:schemeClr val="tx1"/>
+                </a:solidFill>
+              </a:rPr>
+              <a:t>75% a 25%</a:t>
+            </a:r>
+            <a:endParaRPr lang="en-US" sz="1600" dirty="0"/>
+          </a:p>
+        </p:txBody>
+      </p:sp>
+      <p:sp>
+        <p:nvSpPr>
+          <p:cNvPr id="10" name="Text 8"/>
+          <p:cNvSpPr txBox="1"/>
+          <p:nvPr/>
+        </p:nvSpPr>
+        <p:spPr>
+          <a:xfrm>
+            <a:off x="548640" y="4114800"/>
+            <a:ext cx="6126480" cy="320040"/>
+          </a:xfrm>
+          <a:prstGeom prst="rect">
+            <a:avLst/>
+          </a:prstGeom>
+          <a:noFill/>
+          <a:ln/>
+        </p:spPr>
+        <p:txBody>
+          <a:bodyPr wrap="square" lIns="0" tIns="0" rIns="0" bIns="0" rtlCol="0" anchor="t"/>
+          <a:lstStyle/>
+          <a:p>
+            <a:pPr indent="0" marL="0">
+              <a:buNone/>
+            </a:pPr>
+            <a:r>
+              <a:rPr lang="en-US" sz="1400" dirty="0">
+                <a:solidFill>
+                  <a:schemeClr val="tx2"/>
+                </a:solidFill>
+              </a:rPr>
+              <a:t>Flexibilidade muito alta</a:t>
+            </a:r>
+            <a:endParaRPr lang="en-US" sz="1400" dirty="0"/>
+          </a:p>
+        </p:txBody>
+      </p:sp>
+      <p:sp>
+        <p:nvSpPr>
+          <p:cNvPr id="11" name="Share bar 3"/>
+          <p:cNvSpPr/>
+          <p:nvPr/>
+        </p:nvSpPr>
+        <p:spPr>
+          <a:xfrm>
+            <a:off x="548640" y="4480560"/>
+            <a:ext cx="1531620" cy="457200"/>
+          </a:xfrm>
+          <a:prstGeom prst="roundRect">
+            <a:avLst>
+              <a:gd name="adj" fmla="val 16000"/>
+            </a:avLst>
+          </a:prstGeom>
+          <a:solidFill>
+            <a:schemeClr val="accent2"/>
+          </a:solidFill>
+          <a:ln w="12700">
+            <a:solidFill>
+              <a:schemeClr val="accent2"/>
+            </a:solidFill>
+            <a:prstDash val="solid"/>
+          </a:ln>
+        </p:spPr>
+      </p:sp>
+      <p:sp>
+        <p:nvSpPr>
+          <p:cNvPr id="12" name="Text 10"/>
+          <p:cNvSpPr txBox="1"/>
+          <p:nvPr/>
+        </p:nvSpPr>
+        <p:spPr>
+          <a:xfrm>
+            <a:off x="685800" y="4480560"/>
+            <a:ext cx="2743200" cy="457200"/>
+          </a:xfrm>
+          <a:prstGeom prst="rect">
+            <a:avLst/>
+          </a:prstGeom>
+          <a:noFill/>
+          <a:ln/>
+        </p:spPr>
+        <p:txBody>
+          <a:bodyPr wrap="square" lIns="0" tIns="0" rIns="0" bIns="0" rtlCol="0" anchor="ctr"/>
+          <a:lstStyle/>
+          <a:p>
+            <a:pPr indent="0" marL="0">
+              <a:buNone/>
+            </a:pPr>
+            <a:r>
+              <a:rPr lang="en-US" sz="1600" b="1" dirty="0">
+                <a:solidFill>
+                  <a:schemeClr val="tx1"/>
+                </a:solidFill>
+              </a:rPr>
+              <a:t>25%</a:t>
+            </a:r>
+            <a:endParaRPr lang="en-US" sz="1600" dirty="0"/>
+          </a:p>
+        </p:txBody>
+      </p:sp>
+      <p:sp>
+        <p:nvSpPr>
+          <p:cNvPr id="13" name="Text 11"/>
+          <p:cNvSpPr txBox="1"/>
+          <p:nvPr/>
+        </p:nvSpPr>
+        <p:spPr>
+          <a:xfrm>
+            <a:off x="548640" y="5120640"/>
+            <a:ext cx="6126480" cy="914400"/>
+          </a:xfrm>
+          <a:prstGeom prst="rect">
+            <a:avLst/>
+          </a:prstGeom>
+          <a:noFill/>
+          <a:ln/>
+        </p:spPr>
+        <p:txBody>
+          <a:bodyPr wrap="square" lIns="0" tIns="0" rIns="0" bIns="0" rtlCol="0" anchor="t"/>
+          <a:lstStyle/>
+          <a:p>
+            <a:pPr indent="0" marL="0">
+              <a:buNone/>
+            </a:pPr>
+            <a:r>
+              <a:rPr lang="en-US" sz="1400" dirty="0">
+                <a:solidFill>
+                  <a:schemeClr val="tx2"/>
+                </a:solidFill>
+              </a:rPr>
+              <a:t>Na prática: eólicas, UFVs e nucleares pagam mais, as térmicas um pouco menos e as hidrelétricas o menor patamar. A MMGD ficaria fora do rateio.</a:t>
+            </a:r>
+            <a:endParaRPr lang="en-US" sz="1400" dirty="0"/>
+          </a:p>
+        </p:txBody>
+      </p:sp>
+      <p:sp>
+        <p:nvSpPr>
+          <p:cNvPr id="14" name="Text 12"/>
+          <p:cNvSpPr txBox="1"/>
+          <p:nvPr/>
+        </p:nvSpPr>
+        <p:spPr>
+          <a:xfrm>
+            <a:off x="7315200" y="1280160"/>
+            <a:ext cx="4297680" cy="457200"/>
+          </a:xfrm>
+          <a:prstGeom prst="rect">
+            <a:avLst/>
+          </a:prstGeom>
+          <a:noFill/>
+          <a:ln/>
+        </p:spPr>
+        <p:txBody>
+          <a:bodyPr wrap="square" lIns="0" tIns="0" rIns="0" bIns="0" rtlCol="0" anchor="t"/>
+          <a:lstStyle/>
+          <a:p>
+            <a:pPr indent="0" marL="0">
+              <a:buNone/>
+            </a:pPr>
+            <a:r>
+              <a:rPr lang="en-US" sz="1600" b="1" dirty="0">
+                <a:solidFill>
+                  <a:schemeClr val="tx1"/>
+                </a:solidFill>
+              </a:rPr>
+              <a:t>Cenários de rateio a simular no estudo</a:t>
+            </a:r>
+            <a:endParaRPr lang="en-US" sz="1600" dirty="0"/>
+          </a:p>
+        </p:txBody>
+      </p:sp>
+      <p:sp>
+        <p:nvSpPr>
+          <p:cNvPr id="15" name="Rateio scenario R1"/>
+          <p:cNvSpPr/>
+          <p:nvPr/>
+        </p:nvSpPr>
+        <p:spPr>
+          <a:xfrm>
+            <a:off x="7315200" y="1920240"/>
+            <a:ext cx="4327855" cy="1143000"/>
+          </a:xfrm>
+          <a:prstGeom prst="roundRect">
+            <a:avLst>
+              <a:gd name="adj" fmla="val 9600"/>
+            </a:avLst>
+          </a:prstGeom>
+          <a:solidFill>
+            <a:schemeClr val="bg2"/>
+          </a:solidFill>
+          <a:ln w="12700">
+            <a:solidFill>
+              <a:schemeClr val="bg2"/>
+            </a:solidFill>
+            <a:prstDash val="solid"/>
+          </a:ln>
+        </p:spPr>
+      </p:sp>
+      <p:sp>
+        <p:nvSpPr>
+          <p:cNvPr id="16" name="Scenario tag R1"/>
+          <p:cNvSpPr/>
+          <p:nvPr/>
+        </p:nvSpPr>
+        <p:spPr>
+          <a:xfrm>
+            <a:off x="7498080" y="2194560"/>
+            <a:ext cx="731520" cy="640080"/>
+          </a:xfrm>
+          <a:prstGeom prst="roundRect">
+            <a:avLst>
+              <a:gd name="adj" fmla="val 14286"/>
+            </a:avLst>
+          </a:prstGeom>
+          <a:solidFill>
+            <a:schemeClr val="accent3"/>
+          </a:solidFill>
+          <a:ln w="12700">
+            <a:solidFill>
+              <a:schemeClr val="accent3"/>
+            </a:solidFill>
+            <a:prstDash val="solid"/>
+          </a:ln>
+        </p:spPr>
+      </p:sp>
+      <p:sp>
+        <p:nvSpPr>
+          <p:cNvPr id="17" name="Text 15"/>
+          <p:cNvSpPr txBox="1"/>
+          <p:nvPr/>
+        </p:nvSpPr>
+        <p:spPr>
+          <a:xfrm>
+            <a:off x="7498080" y="2194560"/>
+            <a:ext cx="731520" cy="640080"/>
+          </a:xfrm>
+          <a:prstGeom prst="rect">
+            <a:avLst/>
+          </a:prstGeom>
+          <a:noFill/>
+          <a:ln/>
+        </p:spPr>
+        <p:txBody>
+          <a:bodyPr wrap="square" lIns="0" tIns="0" rIns="0" bIns="0" rtlCol="0" anchor="ctr"/>
+          <a:lstStyle/>
+          <a:p>
+            <a:pPr algn="ctr" indent="0" marL="0">
+              <a:buNone/>
+            </a:pPr>
+            <a:r>
+              <a:rPr lang="en-US" sz="2000" b="1" dirty="0">
+                <a:solidFill>
+                  <a:schemeClr val="bg1"/>
+                </a:solidFill>
+                <a:latin typeface="Cambria" pitchFamily="34" charset="0"/>
+                <a:ea typeface="Cambria" pitchFamily="34" charset="-122"/>
+                <a:cs typeface="Cambria" pitchFamily="34" charset="-120"/>
+              </a:rPr>
+              <a:t>R1</a:t>
+            </a:r>
+            <a:endParaRPr lang="en-US" sz="2000" dirty="0"/>
+          </a:p>
+        </p:txBody>
+      </p:sp>
+      <p:sp>
+        <p:nvSpPr>
+          <p:cNvPr id="18" name="Text 16"/>
+          <p:cNvSpPr txBox="1"/>
+          <p:nvPr/>
+        </p:nvSpPr>
+        <p:spPr>
+          <a:xfrm>
+            <a:off x="8412480" y="2057400"/>
+            <a:ext cx="3093415" cy="365760"/>
+          </a:xfrm>
+          <a:prstGeom prst="rect">
+            <a:avLst/>
+          </a:prstGeom>
+          <a:noFill/>
+          <a:ln/>
+        </p:spPr>
+        <p:txBody>
+          <a:bodyPr wrap="square" lIns="0" tIns="0" rIns="0" bIns="0" rtlCol="0" anchor="ctr"/>
+          <a:lstStyle/>
+          <a:p>
+            <a:pPr indent="0" marL="0">
+              <a:buNone/>
+            </a:pPr>
+            <a:r>
+              <a:rPr lang="en-US" sz="1600" b="1" dirty="0">
+                <a:solidFill>
+                  <a:schemeClr val="tx1"/>
+                </a:solidFill>
+                <a:latin typeface="Cambria" pitchFamily="34" charset="0"/>
+                <a:ea typeface="Cambria" pitchFamily="34" charset="-122"/>
+                <a:cs typeface="Cambria" pitchFamily="34" charset="-120"/>
+              </a:rPr>
+              <a:t>Rateio universal</a:t>
+            </a:r>
+            <a:endParaRPr lang="en-US" sz="1600" dirty="0"/>
+          </a:p>
+        </p:txBody>
+      </p:sp>
+      <p:sp>
+        <p:nvSpPr>
+          <p:cNvPr id="19" name="Text 17"/>
+          <p:cNvSpPr txBox="1"/>
+          <p:nvPr/>
+        </p:nvSpPr>
+        <p:spPr>
+          <a:xfrm>
+            <a:off x="8412480" y="2468880"/>
+            <a:ext cx="3093415" cy="594360"/>
+          </a:xfrm>
+          <a:prstGeom prst="rect">
+            <a:avLst/>
+          </a:prstGeom>
+          <a:noFill/>
+          <a:ln/>
+        </p:spPr>
+        <p:txBody>
+          <a:bodyPr wrap="square" lIns="0" tIns="0" rIns="0" bIns="0" rtlCol="0" anchor="t"/>
+          <a:lstStyle/>
+          <a:p>
+            <a:pPr indent="0" marL="0">
+              <a:buNone/>
+            </a:pPr>
+            <a:r>
+              <a:rPr lang="en-US" sz="1400" dirty="0">
+                <a:solidFill>
+                  <a:schemeClr val="tx2"/>
+                </a:solidFill>
+              </a:rPr>
+              <a:t>Todos os geradores da CCEE, sem diferenciar a flexibilidade.</a:t>
+            </a:r>
+            <a:endParaRPr lang="en-US" sz="1400" dirty="0"/>
+          </a:p>
+        </p:txBody>
+      </p:sp>
+      <p:sp>
+        <p:nvSpPr>
+          <p:cNvPr id="20" name="Rateio scenario R2"/>
+          <p:cNvSpPr/>
+          <p:nvPr/>
+        </p:nvSpPr>
+        <p:spPr>
+          <a:xfrm>
+            <a:off x="7315200" y="3246120"/>
+            <a:ext cx="4327855" cy="1143000"/>
+          </a:xfrm>
+          <a:prstGeom prst="roundRect">
+            <a:avLst>
+              <a:gd name="adj" fmla="val 9600"/>
+            </a:avLst>
+          </a:prstGeom>
+          <a:solidFill>
+            <a:schemeClr val="bg2"/>
+          </a:solidFill>
+          <a:ln w="12700">
+            <a:solidFill>
+              <a:schemeClr val="bg2"/>
+            </a:solidFill>
+            <a:prstDash val="solid"/>
+          </a:ln>
+        </p:spPr>
+      </p:sp>
+      <p:sp>
+        <p:nvSpPr>
+          <p:cNvPr id="21" name="Scenario tag R2"/>
+          <p:cNvSpPr/>
+          <p:nvPr/>
+        </p:nvSpPr>
+        <p:spPr>
+          <a:xfrm>
+            <a:off x="7498080" y="3520440"/>
+            <a:ext cx="731520" cy="640080"/>
+          </a:xfrm>
+          <a:prstGeom prst="roundRect">
+            <a:avLst>
+              <a:gd name="adj" fmla="val 14286"/>
+            </a:avLst>
+          </a:prstGeom>
+          <a:solidFill>
+            <a:schemeClr val="accent2"/>
+          </a:solidFill>
+          <a:ln w="12700">
+            <a:solidFill>
+              <a:schemeClr val="accent2"/>
+            </a:solidFill>
+            <a:prstDash val="solid"/>
+          </a:ln>
+        </p:spPr>
+      </p:sp>
+      <p:sp>
+        <p:nvSpPr>
+          <p:cNvPr id="22" name="Text 20"/>
+          <p:cNvSpPr txBox="1"/>
+          <p:nvPr/>
+        </p:nvSpPr>
+        <p:spPr>
+          <a:xfrm>
+            <a:off x="7498080" y="3520440"/>
+            <a:ext cx="731520" cy="640080"/>
+          </a:xfrm>
+          <a:prstGeom prst="rect">
+            <a:avLst/>
+          </a:prstGeom>
+          <a:noFill/>
+          <a:ln/>
+        </p:spPr>
+        <p:txBody>
+          <a:bodyPr wrap="square" lIns="0" tIns="0" rIns="0" bIns="0" rtlCol="0" anchor="ctr"/>
+          <a:lstStyle/>
+          <a:p>
+            <a:pPr algn="ctr" indent="0" marL="0">
+              <a:buNone/>
+            </a:pPr>
+            <a:r>
+              <a:rPr lang="en-US" sz="2000" b="1" dirty="0">
+                <a:solidFill>
+                  <a:schemeClr val="tx1"/>
+                </a:solidFill>
+                <a:latin typeface="Cambria" pitchFamily="34" charset="0"/>
+                <a:ea typeface="Cambria" pitchFamily="34" charset="-122"/>
+                <a:cs typeface="Cambria" pitchFamily="34" charset="-120"/>
+              </a:rPr>
+              <a:t>R2</a:t>
+            </a:r>
+            <a:endParaRPr lang="en-US" sz="2000" dirty="0"/>
+          </a:p>
+        </p:txBody>
+      </p:sp>
+      <p:sp>
+        <p:nvSpPr>
+          <p:cNvPr id="23" name="Text 21"/>
+          <p:cNvSpPr txBox="1"/>
+          <p:nvPr/>
+        </p:nvSpPr>
+        <p:spPr>
+          <a:xfrm>
+            <a:off x="8412480" y="3383280"/>
+            <a:ext cx="3093415" cy="365760"/>
+          </a:xfrm>
+          <a:prstGeom prst="rect">
+            <a:avLst/>
+          </a:prstGeom>
+          <a:noFill/>
+          <a:ln/>
+        </p:spPr>
+        <p:txBody>
+          <a:bodyPr wrap="square" lIns="0" tIns="0" rIns="0" bIns="0" rtlCol="0" anchor="ctr"/>
+          <a:lstStyle/>
+          <a:p>
+            <a:pPr indent="0" marL="0">
+              <a:buNone/>
+            </a:pPr>
+            <a:r>
+              <a:rPr lang="en-US" sz="1600" b="1" dirty="0">
+                <a:solidFill>
+                  <a:schemeClr val="tx1"/>
+                </a:solidFill>
+                <a:latin typeface="Cambria" pitchFamily="34" charset="0"/>
+                <a:ea typeface="Cambria" pitchFamily="34" charset="-122"/>
+                <a:cs typeface="Cambria" pitchFamily="34" charset="-120"/>
+              </a:rPr>
+              <a:t>Modulado por flexibilidade</a:t>
+            </a:r>
+            <a:endParaRPr lang="en-US" sz="1600" dirty="0"/>
+          </a:p>
+        </p:txBody>
+      </p:sp>
+      <p:sp>
+        <p:nvSpPr>
+          <p:cNvPr id="24" name="Text 22"/>
+          <p:cNvSpPr txBox="1"/>
+          <p:nvPr/>
+        </p:nvSpPr>
+        <p:spPr>
+          <a:xfrm>
+            <a:off x="8412480" y="3794760"/>
+            <a:ext cx="3093415" cy="594360"/>
+          </a:xfrm>
+          <a:prstGeom prst="rect">
+            <a:avLst/>
+          </a:prstGeom>
+          <a:noFill/>
+          <a:ln/>
+        </p:spPr>
+        <p:txBody>
+          <a:bodyPr wrap="square" lIns="0" tIns="0" rIns="0" bIns="0" rtlCol="0" anchor="t"/>
+          <a:lstStyle/>
+          <a:p>
+            <a:pPr indent="0" marL="0">
+              <a:buNone/>
+            </a:pPr>
+            <a:r>
+              <a:rPr lang="en-US" sz="1400" dirty="0">
+                <a:solidFill>
+                  <a:schemeClr val="tx2"/>
+                </a:solidFill>
+              </a:rPr>
+              <a:t>Proposta da ANEEL em consulta: coeficientes de 100% a 25%.</a:t>
+            </a:r>
+            <a:endParaRPr lang="en-US" sz="1400" dirty="0"/>
+          </a:p>
+        </p:txBody>
+      </p:sp>
+      <p:sp>
+        <p:nvSpPr>
+          <p:cNvPr id="25" name="Rateio scenario R3"/>
+          <p:cNvSpPr/>
+          <p:nvPr/>
+        </p:nvSpPr>
+        <p:spPr>
+          <a:xfrm>
+            <a:off x="7315200" y="4572000"/>
+            <a:ext cx="4327855" cy="1143000"/>
+          </a:xfrm>
+          <a:prstGeom prst="roundRect">
+            <a:avLst>
+              <a:gd name="adj" fmla="val 9600"/>
+            </a:avLst>
+          </a:prstGeom>
+          <a:solidFill>
+            <a:schemeClr val="bg2"/>
+          </a:solidFill>
+          <a:ln w="12700">
+            <a:solidFill>
+              <a:schemeClr val="bg2"/>
+            </a:solidFill>
+            <a:prstDash val="solid"/>
+          </a:ln>
+        </p:spPr>
+      </p:sp>
+      <p:sp>
+        <p:nvSpPr>
+          <p:cNvPr id="26" name="Scenario tag R3"/>
+          <p:cNvSpPr/>
+          <p:nvPr/>
+        </p:nvSpPr>
+        <p:spPr>
+          <a:xfrm>
+            <a:off x="7498080" y="4846320"/>
+            <a:ext cx="731520" cy="640080"/>
+          </a:xfrm>
+          <a:prstGeom prst="roundRect">
+            <a:avLst>
+              <a:gd name="adj" fmla="val 14286"/>
+            </a:avLst>
+          </a:prstGeom>
+          <a:solidFill>
+            <a:schemeClr val="accent1"/>
+          </a:solidFill>
+          <a:ln w="12700">
+            <a:solidFill>
+              <a:schemeClr val="accent1"/>
+            </a:solidFill>
+            <a:prstDash val="solid"/>
+          </a:ln>
+        </p:spPr>
+      </p:sp>
+      <p:sp>
+        <p:nvSpPr>
+          <p:cNvPr id="27" name="Text 25"/>
+          <p:cNvSpPr txBox="1"/>
+          <p:nvPr/>
+        </p:nvSpPr>
+        <p:spPr>
+          <a:xfrm>
+            <a:off x="7498080" y="4846320"/>
+            <a:ext cx="731520" cy="640080"/>
+          </a:xfrm>
+          <a:prstGeom prst="rect">
+            <a:avLst/>
+          </a:prstGeom>
+          <a:noFill/>
+          <a:ln/>
+        </p:spPr>
+        <p:txBody>
+          <a:bodyPr wrap="square" lIns="0" tIns="0" rIns="0" bIns="0" rtlCol="0" anchor="ctr"/>
+          <a:lstStyle/>
+          <a:p>
+            <a:pPr algn="ctr" indent="0" marL="0">
+              <a:buNone/>
+            </a:pPr>
+            <a:r>
+              <a:rPr lang="en-US" sz="2000" b="1" dirty="0">
+                <a:solidFill>
+                  <a:schemeClr val="tx1"/>
+                </a:solidFill>
+                <a:latin typeface="Cambria" pitchFamily="34" charset="0"/>
+                <a:ea typeface="Cambria" pitchFamily="34" charset="-122"/>
+                <a:cs typeface="Cambria" pitchFamily="34" charset="-120"/>
+              </a:rPr>
+              <a:t>R3</a:t>
+            </a:r>
+            <a:endParaRPr lang="en-US" sz="2000" dirty="0"/>
+          </a:p>
+        </p:txBody>
+      </p:sp>
+      <p:sp>
+        <p:nvSpPr>
+          <p:cNvPr id="28" name="Text 26"/>
+          <p:cNvSpPr txBox="1"/>
+          <p:nvPr/>
+        </p:nvSpPr>
+        <p:spPr>
+          <a:xfrm>
+            <a:off x="8412480" y="4709160"/>
+            <a:ext cx="3093415" cy="365760"/>
+          </a:xfrm>
+          <a:prstGeom prst="rect">
+            <a:avLst/>
+          </a:prstGeom>
+          <a:noFill/>
+          <a:ln/>
+        </p:spPr>
+        <p:txBody>
+          <a:bodyPr wrap="square" lIns="0" tIns="0" rIns="0" bIns="0" rtlCol="0" anchor="ctr"/>
+          <a:lstStyle/>
+          <a:p>
+            <a:pPr indent="0" marL="0">
+              <a:buNone/>
+            </a:pPr>
+            <a:r>
+              <a:rPr lang="en-US" sz="1600" b="1" dirty="0">
+                <a:solidFill>
+                  <a:schemeClr val="tx1"/>
+                </a:solidFill>
+                <a:latin typeface="Cambria" pitchFamily="34" charset="0"/>
+                <a:ea typeface="Cambria" pitchFamily="34" charset="-122"/>
+                <a:cs typeface="Cambria" pitchFamily="34" charset="-120"/>
+              </a:rPr>
+              <a:t>Com consumidores</a:t>
+            </a:r>
+            <a:endParaRPr lang="en-US" sz="1600" dirty="0"/>
+          </a:p>
+        </p:txBody>
+      </p:sp>
+      <p:sp>
+        <p:nvSpPr>
+          <p:cNvPr id="29" name="Text 27"/>
+          <p:cNvSpPr txBox="1"/>
+          <p:nvPr/>
+        </p:nvSpPr>
+        <p:spPr>
+          <a:xfrm>
+            <a:off x="8412480" y="5120640"/>
+            <a:ext cx="3093415" cy="594360"/>
+          </a:xfrm>
+          <a:prstGeom prst="rect">
+            <a:avLst/>
+          </a:prstGeom>
+          <a:noFill/>
+          <a:ln/>
+        </p:spPr>
+        <p:txBody>
+          <a:bodyPr wrap="square" lIns="0" tIns="0" rIns="0" bIns="0" rtlCol="0" anchor="t"/>
+          <a:lstStyle/>
+          <a:p>
+            <a:pPr indent="0" marL="0">
+              <a:buNone/>
+            </a:pPr>
+            <a:r>
+              <a:rPr lang="en-US" sz="1400" dirty="0">
+                <a:solidFill>
+                  <a:schemeClr val="tx2"/>
+                </a:solidFill>
+              </a:rPr>
+              <a:t>Mudança da lei pelos PLs 3.716/2026 e 5.017/2019.</a:t>
+            </a:r>
+            <a:endParaRPr lang="en-US" sz="1400" dirty="0"/>
+          </a:p>
+        </p:txBody>
+      </p:sp>
+      <p:sp>
+        <p:nvSpPr>
+          <p:cNvPr id="30" name="Text 28"/>
+          <p:cNvSpPr txBox="1"/>
+          <p:nvPr/>
+        </p:nvSpPr>
+        <p:spPr>
+          <a:xfrm>
+            <a:off x="7315200" y="5852160"/>
+            <a:ext cx="4327855" cy="457200"/>
+          </a:xfrm>
+          <a:prstGeom prst="rect">
+            <a:avLst/>
+          </a:prstGeom>
+          <a:noFill/>
+          <a:ln/>
+        </p:spPr>
+        <p:txBody>
+          <a:bodyPr wrap="square" lIns="0" tIns="0" rIns="0" bIns="0" rtlCol="0" anchor="t"/>
+          <a:lstStyle/>
+          <a:p>
+            <a:pPr indent="0" marL="0">
+              <a:buNone/>
+            </a:pPr>
+            <a:r>
+              <a:rPr lang="en-US" sz="1100" i="1" dirty="0">
+                <a:solidFill>
+                  <a:schemeClr val="tx2"/>
+                </a:solidFill>
+              </a:rPr>
+              <a:t>A ABRACE defende manter o custo só com geradores. ABSAE, Absolar e ABEEólica pedem tratar as baterias como as demais fontes.</a:t>
+            </a:r>
+            <a:endParaRPr lang="en-US" sz="1100" dirty="0"/>
+          </a:p>
+        </p:txBody>
+      </p:sp>
+      <p:sp>
+        <p:nvSpPr>
+          <p:cNvPr id="31" name="Text 29"/>
+          <p:cNvSpPr txBox="1"/>
+          <p:nvPr/>
+        </p:nvSpPr>
+        <p:spPr>
+          <a:xfrm>
+            <a:off x="548640" y="6382512"/>
+            <a:ext cx="10424160" cy="274320"/>
+          </a:xfrm>
+          <a:prstGeom prst="rect">
+            <a:avLst/>
+          </a:prstGeom>
+          <a:noFill/>
+          <a:ln/>
+        </p:spPr>
+        <p:txBody>
+          <a:bodyPr wrap="square" lIns="0" tIns="0" rIns="0" bIns="0" rtlCol="0" anchor="ctr"/>
+          <a:lstStyle/>
+          <a:p>
+            <a:pPr indent="0" marL="0">
+              <a:buNone/>
+            </a:pPr>
+            <a:r>
+              <a:rPr lang="en-US" sz="1000" i="1" dirty="0">
+                <a:solidFill>
+                  <a:schemeClr val="tx2"/>
+                </a:solidFill>
+              </a:rPr>
+              <a:t>Fontes: Agência iNFRA (6/10/2026); TAGD Law (2026); Canal Energia (2026); ANEEL, CP 37/2026. A fórmula final ainda será definida pela ANEEL.</a:t>
+            </a:r>
+            <a:endParaRPr lang="en-US" sz="1000" dirty="0"/>
+          </a:p>
+        </p:txBody>
+      </p:sp>
+      <p:sp>
+        <p:nvSpPr>
+          <p:cNvPr id="25" name="Slide Number Placeholder 0"/>
+          <p:cNvSpPr>
+            <a:spLocks noGrp="1"/>
+          </p:cNvSpPr>
+          <p:nvPr>
+            <p:ph type="sldNum" sz="quarter" idx="4294967295"/>
+          </p:nvPr>
+        </p:nvSpPr>
+        <p:spPr>
+          <a:xfrm>
+            <a:off x="11155680" y="6400800"/>
+            <a:ext cx="548640" cy="274320"/>
+          </a:xfrm>
+          <a:prstGeom prst="rect">
+            <a:avLst/>
+          </a:prstGeom>
+          <a:extLst>
+            <a:ext uri="{C572A759-6A51-4108-AA02-DFA0A04FC94B}">
+              <ma14:wrappingTextBoxFlag xmlns:ma14="http://schemas.microsoft.com/office/mac/drawingml/2011/main" val="0"/>
+            </a:ext>
+          </a:extLst>
+        </p:spPr>
+        <p:txBody>
+          <a:bodyPr/>
+          <a:lstStyle>
+            <a:lvl1pPr>
+              <a:defRPr sz="1100">
+                <a:solidFill>
+                  <a:schemeClr val="tx2"/>
+                </a:solidFill>
+              </a:defRPr>
+            </a:lvl1pPr>
+          </a:lstStyle>
+          <a:p>
+            <a:pPr algn="r"/>
+            <a:fld id="{F7021451-1387-4CA6-816F-3879F97B5CBC}" type="slidenum">
+              <a:rPr b="0" lang="en-US"/>
+              <a:t>16</a:t>
+            </a:fld>
+            <a:endParaRPr lang="en-US"/>
+          </a:p>
+        </p:txBody>
+      </p:sp>
+    </p:spTree>
+  </p:cSld>
+  <p:clrMapOvr>
+    <a:masterClrMapping/>
+  </p:clrMapOvr>
+</p:sld>
+</file>
+
+<file path=ppt/slides/slide17.xml><?xml version="1.0" encoding="utf-8"?>
+<p:sld xmlns:a="http://schemas.openxmlformats.org/drawingml/2006/main" xmlns:r="http://schemas.openxmlformats.org/officeDocument/2006/relationships" xmlns:p="http://schemas.openxmlformats.org/presentationml/2006/main">
+  <p:cSld name="Slide 17">
+    <p:spTree>
+      <p:nvGrpSpPr>
+        <p:cNvPr id="1" name=""/>
+        <p:cNvGrpSpPr/>
+        <p:nvPr/>
+      </p:nvGrpSpPr>
+      <p:grpSpPr>
+        <a:xfrm>
+          <a:off x="0" y="0"/>
+          <a:ext cx="0" cy="0"/>
+          <a:chOff x="0" y="0"/>
+          <a:chExt cx="0" cy="0"/>
+        </a:xfrm>
+      </p:grpSpPr>
+      <p:sp>
+        <p:nvSpPr>
+          <p:cNvPr id="2" name="Text 0"/>
+          <p:cNvSpPr/>
+          <p:nvPr>
+            <p:ph idx="100" type="title" hasCustomPrompt="1"/>
+          </p:nvPr>
+        </p:nvSpPr>
+        <p:spPr>
+          <a:xfrm>
+            <a:off x="548640" y="365760"/>
+            <a:ext cx="11094415" cy="822960"/>
+          </a:xfrm>
+          <a:prstGeom prst="rect">
+            <a:avLst/>
+          </a:prstGeom>
+          <a:noFill/>
+          <a:ln/>
+        </p:spPr>
+        <p:txBody>
+          <a:bodyPr wrap="square" lIns="0" tIns="0" rIns="0" bIns="0" rtlCol="0" anchor="ctr"/>
+          <a:lstStyle/>
+          <a:p>
+            <a:pPr algn="l" indent="0" marL="0">
+              <a:buNone/>
+            </a:pPr>
+            <a:r>
+              <a:rPr lang="en-US" sz="3200" b="1" dirty="0">
+                <a:solidFill>
+                  <a:schemeClr val="tx1"/>
+                </a:solidFill>
+              </a:rPr>
+              <a:t>Quanto cada fonte pagaria: exercício ilustrativo</a:t>
+            </a:r>
+            <a:endParaRPr lang="en-US" sz="3200" dirty="0"/>
+          </a:p>
+        </p:txBody>
+      </p:sp>
+      <p:sp>
+        <p:nvSpPr>
+          <p:cNvPr id="3" name="Share chart card"/>
+          <p:cNvSpPr/>
+          <p:nvPr/>
+        </p:nvSpPr>
+        <p:spPr>
+          <a:xfrm>
+            <a:off x="548640" y="1417320"/>
+            <a:ext cx="6126480" cy="4069080"/>
+          </a:xfrm>
+          <a:prstGeom prst="roundRect">
+            <a:avLst>
+              <a:gd name="adj" fmla="val 2697"/>
+            </a:avLst>
+          </a:prstGeom>
+          <a:solidFill>
+            <a:schemeClr val="bg2"/>
+          </a:solidFill>
+          <a:ln w="12700">
+            <a:solidFill>
+              <a:schemeClr val="bg2"/>
+            </a:solidFill>
+            <a:prstDash val="solid"/>
+          </a:ln>
+        </p:spPr>
+      </p:sp>
+      <p:graphicFrame>
+        <p:nvGraphicFramePr>
+          <p:cNvPr id="4" name="Chart 0" descr=""/>
+          <p:cNvGraphicFramePr/>
+          <p:nvPr/>
+        </p:nvGraphicFramePr>
+        <p:xfrm>
+          <a:off x="685800" y="1508760"/>
+          <a:ext cx="5852160" cy="3886200"/>
+        </p:xfrm>
+        <a:graphic xmlns:a="http://schemas.openxmlformats.org/drawingml/2006/main">
+          <a:graphicData uri="http://schemas.openxmlformats.org/drawingml/2006/chart">
+            <c:chart xmlns:c="http://schemas.openxmlformats.org/drawingml/2006/chart" r:id="rId1"/>
+          </a:graphicData>
+        </a:graphic>
+      </p:graphicFrame>
+      <p:graphicFrame>
+        <p:nvGraphicFramePr>
+          <p:cNvPr id="18" name="Table 0"/>
+          <p:cNvGraphicFramePr>
+            <a:graphicFrameLocks noGrp="1"/>
+          </p:cNvGraphicFramePr>
+          <p:nvPr>
+            <p:extLst>
+              <p:ext uri="{D42A27DB-BD31-4B8C-83A1-F6EECF244321}">
+                <p14:modId xmlns:p14="http://schemas.microsoft.com/office/powerpoint/2010/main" val="1579011935"/>
+              </p:ext>
+            </p:extLst>
+          </p:nvPr>
+        </p:nvGraphicFramePr>
+        <p:xfrm>
+          <a:off x="6903720" y="1417320"/>
+          <a:ext cx="4739335" cy="914400"/>
+        </p:xfrm>
+        <a:graphic>
+          <a:graphicData uri="http://schemas.openxmlformats.org/drawingml/2006/table">
+            <a:tbl>
+              <a:tblPr/>
+              <a:tblGrid>
+                <a:gridCol w="1280160"/>
+                <a:gridCol w="640080"/>
+                <a:gridCol w="1051560"/>
+                <a:gridCol w="1764792"/>
+              </a:tblGrid>
+              <a:tr h="548640">
+                <a:tc>
+                  <a:txBody>
+                    <a:bodyPr/>
+                    <a:lstStyle/>
+                    <a:p>
+                      <a:pPr indent="0" marL="0">
+                        <a:buNone/>
+                      </a:pPr>
+                      <a:r>
+                        <a:rPr lang="en-US" sz="1400" b="1" dirty="0">
+                          <a:solidFill>
+                            <a:schemeClr val="bg1"/>
+                          </a:solidFill>
+                          <a:latin typeface="Calibri" pitchFamily="34" charset="0"/>
+                          <a:ea typeface="Calibri" pitchFamily="34" charset="-122"/>
+                          <a:cs typeface="Calibri" pitchFamily="34" charset="-120"/>
+                        </a:rPr>
+                        <a:t>Fonte</a:t>
+                      </a:r>
+                      <a:endParaRPr lang="en-US" sz="1400" dirty="0">
+                        <a:latin typeface="Calibri" charset="0"/>
+                        <a:ea typeface="Calibri" charset="0"/>
+                        <a:cs typeface="Calibri" charset="0"/>
+                      </a:endParaRPr>
+                    </a:p>
+                  </a:txBody>
+                  <a:tcPr marL="91440" marR="91440" marT="45720" marB="45720" anchor="ctr">
+                    <a:lnL w="12700" cap="flat" cmpd="sng" algn="ctr">
+                      <a:solidFill>
+                        <a:srgbClr val="EEF3F8"/>
+                      </a:solidFill>
+                      <a:prstDash val="solid"/>
+                      <a:round/>
+                      <a:headEnd type="none" w="med" len="med"/>
+                      <a:tailEnd type="none" w="med" len="med"/>
+                    </a:lnL>
+                    <a:lnR w="12700" cap="flat" cmpd="sng" algn="ctr">
+                      <a:solidFill>
+                        <a:srgbClr val="EEF3F8"/>
+                      </a:solidFill>
+                      <a:prstDash val="solid"/>
+                      <a:round/>
+                      <a:headEnd type="none" w="med" len="med"/>
+                      <a:tailEnd type="none" w="med" len="med"/>
+                    </a:lnR>
+                    <a:lnT w="12700" cap="flat" cmpd="sng" algn="ctr">
+                      <a:solidFill>
+                        <a:srgbClr val="EEF3F8"/>
+                      </a:solidFill>
+                      <a:prstDash val="solid"/>
+                      <a:round/>
+                      <a:headEnd type="none" w="med" len="med"/>
+                      <a:tailEnd type="none" w="med" len="med"/>
+                    </a:lnT>
+                    <a:lnB w="12700" cap="flat" cmpd="sng" algn="ctr">
+                      <a:solidFill>
+                        <a:srgbClr val="EEF3F8"/>
+                      </a:solidFill>
+                      <a:prstDash val="solid"/>
+                      <a:round/>
+                      <a:headEnd type="none" w="med" len="med"/>
+                      <a:tailEnd type="none" w="med" len="med"/>
+                    </a:lnB>
+                    <a:solidFill>
+                      <a:schemeClr val="tx2"/>
+                    </a:solidFill>
+                  </a:tcPr>
+                </a:tc>
+                <a:tc>
+                  <a:txBody>
+                    <a:bodyPr/>
+                    <a:lstStyle/>
+                    <a:p>
+                      <a:pPr indent="0" marL="0">
+                        <a:buNone/>
+                      </a:pPr>
+                      <a:r>
+                        <a:rPr lang="en-US" sz="1400" b="1" dirty="0">
+                          <a:solidFill>
+                            <a:schemeClr val="bg1"/>
+                          </a:solidFill>
+                          <a:latin typeface="Calibri" pitchFamily="34" charset="0"/>
+                          <a:ea typeface="Calibri" pitchFamily="34" charset="-122"/>
+                          <a:cs typeface="Calibri" pitchFamily="34" charset="-120"/>
+                        </a:rPr>
+                        <a:t>R1</a:t>
+                      </a:r>
+                      <a:endParaRPr lang="en-US" sz="1400" dirty="0">
+                        <a:latin typeface="Calibri" charset="0"/>
+                        <a:ea typeface="Calibri" charset="0"/>
+                        <a:cs typeface="Calibri" charset="0"/>
+                      </a:endParaRPr>
+                    </a:p>
+                  </a:txBody>
+                  <a:tcPr marL="91440" marR="91440" marT="45720" marB="45720" anchor="ctr">
+                    <a:lnL w="12700" cap="flat" cmpd="sng" algn="ctr">
+                      <a:solidFill>
+                        <a:srgbClr val="EEF3F8"/>
+                      </a:solidFill>
+                      <a:prstDash val="solid"/>
+                      <a:round/>
+                      <a:headEnd type="none" w="med" len="med"/>
+                      <a:tailEnd type="none" w="med" len="med"/>
+                    </a:lnL>
+                    <a:lnR w="12700" cap="flat" cmpd="sng" algn="ctr">
+                      <a:solidFill>
+                        <a:srgbClr val="EEF3F8"/>
+                      </a:solidFill>
+                      <a:prstDash val="solid"/>
+                      <a:round/>
+                      <a:headEnd type="none" w="med" len="med"/>
+                      <a:tailEnd type="none" w="med" len="med"/>
+                    </a:lnR>
+                    <a:lnT w="12700" cap="flat" cmpd="sng" algn="ctr">
+                      <a:solidFill>
+                        <a:srgbClr val="EEF3F8"/>
+                      </a:solidFill>
+                      <a:prstDash val="solid"/>
+                      <a:round/>
+                      <a:headEnd type="none" w="med" len="med"/>
+                      <a:tailEnd type="none" w="med" len="med"/>
+                    </a:lnT>
+                    <a:lnB w="12700" cap="flat" cmpd="sng" algn="ctr">
+                      <a:solidFill>
+                        <a:srgbClr val="EEF3F8"/>
+                      </a:solidFill>
+                      <a:prstDash val="solid"/>
+                      <a:round/>
+                      <a:headEnd type="none" w="med" len="med"/>
+                      <a:tailEnd type="none" w="med" len="med"/>
+                    </a:lnB>
+                    <a:solidFill>
+                      <a:schemeClr val="tx2"/>
+                    </a:solidFill>
+                  </a:tcPr>
+                </a:tc>
+                <a:tc>
+                  <a:txBody>
+                    <a:bodyPr/>
+                    <a:lstStyle/>
+                    <a:p>
+                      <a:pPr indent="0" marL="0">
+                        <a:buNone/>
+                      </a:pPr>
+                      <a:r>
+                        <a:rPr lang="en-US" sz="1400" b="1" dirty="0">
+                          <a:solidFill>
+                            <a:schemeClr val="bg1"/>
+                          </a:solidFill>
+                          <a:latin typeface="Calibri" pitchFamily="34" charset="0"/>
+                          <a:ea typeface="Calibri" pitchFamily="34" charset="-122"/>
+                          <a:cs typeface="Calibri" pitchFamily="34" charset="-120"/>
+                        </a:rPr>
+                        <a:t>R2 (faixa)</a:t>
+                      </a:r>
+                      <a:endParaRPr lang="en-US" sz="1400" dirty="0">
+                        <a:latin typeface="Calibri" charset="0"/>
+                        <a:ea typeface="Calibri" charset="0"/>
+                        <a:cs typeface="Calibri" charset="0"/>
+                      </a:endParaRPr>
+                    </a:p>
+                  </a:txBody>
+                  <a:tcPr marL="91440" marR="91440" marT="45720" marB="45720" anchor="ctr">
+                    <a:lnL w="12700" cap="flat" cmpd="sng" algn="ctr">
+                      <a:solidFill>
+                        <a:srgbClr val="EEF3F8"/>
+                      </a:solidFill>
+                      <a:prstDash val="solid"/>
+                      <a:round/>
+                      <a:headEnd type="none" w="med" len="med"/>
+                      <a:tailEnd type="none" w="med" len="med"/>
+                    </a:lnL>
+                    <a:lnR w="12700" cap="flat" cmpd="sng" algn="ctr">
+                      <a:solidFill>
+                        <a:srgbClr val="EEF3F8"/>
+                      </a:solidFill>
+                      <a:prstDash val="solid"/>
+                      <a:round/>
+                      <a:headEnd type="none" w="med" len="med"/>
+                      <a:tailEnd type="none" w="med" len="med"/>
+                    </a:lnR>
+                    <a:lnT w="12700" cap="flat" cmpd="sng" algn="ctr">
+                      <a:solidFill>
+                        <a:srgbClr val="EEF3F8"/>
+                      </a:solidFill>
+                      <a:prstDash val="solid"/>
+                      <a:round/>
+                      <a:headEnd type="none" w="med" len="med"/>
+                      <a:tailEnd type="none" w="med" len="med"/>
+                    </a:lnT>
+                    <a:lnB w="12700" cap="flat" cmpd="sng" algn="ctr">
+                      <a:solidFill>
+                        <a:srgbClr val="EEF3F8"/>
+                      </a:solidFill>
+                      <a:prstDash val="solid"/>
+                      <a:round/>
+                      <a:headEnd type="none" w="med" len="med"/>
+                      <a:tailEnd type="none" w="med" len="med"/>
+                    </a:lnB>
+                    <a:solidFill>
+                      <a:schemeClr val="tx2"/>
+                    </a:solidFill>
+                  </a:tcPr>
+                </a:tc>
+                <a:tc>
+                  <a:txBody>
+                    <a:bodyPr/>
+                    <a:lstStyle/>
+                    <a:p>
+                      <a:pPr indent="0" marL="0">
+                        <a:buNone/>
+                      </a:pPr>
+                      <a:r>
+                        <a:rPr lang="en-US" sz="1400" b="1" dirty="0">
+                          <a:solidFill>
+                            <a:schemeClr val="bg1"/>
+                          </a:solidFill>
+                          <a:latin typeface="Calibri" pitchFamily="34" charset="0"/>
+                          <a:ea typeface="Calibri" pitchFamily="34" charset="-122"/>
+                          <a:cs typeface="Calibri" pitchFamily="34" charset="-120"/>
+                        </a:rPr>
+                        <a:t>R$ mi / R$ 1 bi</a:t>
+                      </a:r>
+                      <a:endParaRPr lang="en-US" sz="1400" dirty="0">
+                        <a:latin typeface="Calibri" charset="0"/>
+                        <a:ea typeface="Calibri" charset="0"/>
+                        <a:cs typeface="Calibri" charset="0"/>
+                      </a:endParaRPr>
+                    </a:p>
+                  </a:txBody>
+                  <a:tcPr marL="91440" marR="91440" marT="45720" marB="45720" anchor="ctr">
+                    <a:lnL w="12700" cap="flat" cmpd="sng" algn="ctr">
+                      <a:solidFill>
+                        <a:srgbClr val="EEF3F8"/>
+                      </a:solidFill>
+                      <a:prstDash val="solid"/>
+                      <a:round/>
+                      <a:headEnd type="none" w="med" len="med"/>
+                      <a:tailEnd type="none" w="med" len="med"/>
+                    </a:lnL>
+                    <a:lnR w="12700" cap="flat" cmpd="sng" algn="ctr">
+                      <a:solidFill>
+                        <a:srgbClr val="EEF3F8"/>
+                      </a:solidFill>
+                      <a:prstDash val="solid"/>
+                      <a:round/>
+                      <a:headEnd type="none" w="med" len="med"/>
+                      <a:tailEnd type="none" w="med" len="med"/>
+                    </a:lnR>
+                    <a:lnT w="12700" cap="flat" cmpd="sng" algn="ctr">
+                      <a:solidFill>
+                        <a:srgbClr val="EEF3F8"/>
+                      </a:solidFill>
+                      <a:prstDash val="solid"/>
+                      <a:round/>
+                      <a:headEnd type="none" w="med" len="med"/>
+                      <a:tailEnd type="none" w="med" len="med"/>
+                    </a:lnT>
+                    <a:lnB w="12700" cap="flat" cmpd="sng" algn="ctr">
+                      <a:solidFill>
+                        <a:srgbClr val="EEF3F8"/>
+                      </a:solidFill>
+                      <a:prstDash val="solid"/>
+                      <a:round/>
+                      <a:headEnd type="none" w="med" len="med"/>
+                      <a:tailEnd type="none" w="med" len="med"/>
+                    </a:lnB>
+                    <a:solidFill>
+                      <a:schemeClr val="tx2"/>
+                    </a:solidFill>
+                  </a:tcPr>
+                </a:tc>
+              </a:tr>
+              <a:tr h="777240">
+                <a:tc>
+                  <a:txBody>
+                    <a:bodyPr/>
+                    <a:lstStyle/>
+                    <a:p>
+                      <a:pPr indent="0" marL="0">
+                        <a:buNone/>
+                      </a:pPr>
+                      <a:r>
+                        <a:rPr lang="en-US" sz="1400" b="1" dirty="0">
+                          <a:solidFill>
+                            <a:schemeClr val="tx1"/>
+                          </a:solidFill>
+                          <a:latin typeface="Calibri" pitchFamily="34" charset="0"/>
+                          <a:ea typeface="Calibri" pitchFamily="34" charset="-122"/>
+                          <a:cs typeface="Calibri" pitchFamily="34" charset="-120"/>
+                        </a:rPr>
+                        <a:t>Hidrelétricas</a:t>
+                      </a:r>
+                      <a:endParaRPr lang="en-US" sz="1400" dirty="0">
+                        <a:latin typeface="Calibri" charset="0"/>
+                        <a:ea typeface="Calibri" charset="0"/>
+                        <a:cs typeface="Calibri" charset="0"/>
+                      </a:endParaRPr>
+                    </a:p>
+                  </a:txBody>
+                  <a:tcPr marL="91440" marR="91440" marT="45720" marB="45720" anchor="ctr">
+                    <a:lnL w="12700" cap="flat" cmpd="sng" algn="ctr">
+                      <a:solidFill>
+                        <a:srgbClr val="EEF3F8"/>
+                      </a:solidFill>
+                      <a:prstDash val="solid"/>
+                      <a:round/>
+                      <a:headEnd type="none" w="med" len="med"/>
+                      <a:tailEnd type="none" w="med" len="med"/>
+                    </a:lnL>
+                    <a:lnR w="12700" cap="flat" cmpd="sng" algn="ctr">
+                      <a:solidFill>
+                        <a:srgbClr val="EEF3F8"/>
+                      </a:solidFill>
+                      <a:prstDash val="solid"/>
+                      <a:round/>
+                      <a:headEnd type="none" w="med" len="med"/>
+                      <a:tailEnd type="none" w="med" len="med"/>
+                    </a:lnR>
+                    <a:lnT w="12700" cap="flat" cmpd="sng" algn="ctr">
+                      <a:solidFill>
+                        <a:srgbClr val="EEF3F8"/>
+                      </a:solidFill>
+                      <a:prstDash val="solid"/>
+                      <a:round/>
+                      <a:headEnd type="none" w="med" len="med"/>
+                      <a:tailEnd type="none" w="med" len="med"/>
+                    </a:lnT>
+                    <a:lnB w="12700" cap="flat" cmpd="sng" algn="ctr">
+                      <a:solidFill>
+                        <a:srgbClr val="EEF3F8"/>
+                      </a:solidFill>
+                      <a:prstDash val="solid"/>
+                      <a:round/>
+                      <a:headEnd type="none" w="med" len="med"/>
+                      <a:tailEnd type="none" w="med" len="med"/>
+                    </a:lnB>
+                    <a:solidFill>
+                      <a:schemeClr val="bg1"/>
+                    </a:solidFill>
+                  </a:tcPr>
+                </a:tc>
+                <a:tc>
+                  <a:txBody>
+                    <a:bodyPr/>
+                    <a:lstStyle/>
+                    <a:p>
+                      <a:pPr indent="0" marL="0">
+                        <a:buNone/>
+                      </a:pPr>
+                      <a:r>
+                        <a:rPr lang="en-US" sz="1400" dirty="0">
+                          <a:solidFill>
+                            <a:schemeClr val="tx1"/>
+                          </a:solidFill>
+                          <a:latin typeface="Calibri" pitchFamily="34" charset="0"/>
+                          <a:ea typeface="Calibri" pitchFamily="34" charset="-122"/>
+                          <a:cs typeface="Calibri" pitchFamily="34" charset="-120"/>
+                        </a:rPr>
+                        <a:t>51,7%</a:t>
+                      </a:r>
+                      <a:endParaRPr lang="en-US" sz="1400" dirty="0">
+                        <a:latin typeface="Calibri" charset="0"/>
+                        <a:ea typeface="Calibri" charset="0"/>
+                        <a:cs typeface="Calibri" charset="0"/>
+                      </a:endParaRPr>
+                    </a:p>
+                  </a:txBody>
+                  <a:tcPr marL="91440" marR="91440" marT="45720" marB="45720" anchor="ctr">
+                    <a:lnL w="12700" cap="flat" cmpd="sng" algn="ctr">
+                      <a:solidFill>
+                        <a:srgbClr val="EEF3F8"/>
+                      </a:solidFill>
+                      <a:prstDash val="solid"/>
+                      <a:round/>
+                      <a:headEnd type="none" w="med" len="med"/>
+                      <a:tailEnd type="none" w="med" len="med"/>
+                    </a:lnL>
+                    <a:lnR w="12700" cap="flat" cmpd="sng" algn="ctr">
+                      <a:solidFill>
+                        <a:srgbClr val="EEF3F8"/>
+                      </a:solidFill>
+                      <a:prstDash val="solid"/>
+                      <a:round/>
+                      <a:headEnd type="none" w="med" len="med"/>
+                      <a:tailEnd type="none" w="med" len="med"/>
+                    </a:lnR>
+                    <a:lnT w="12700" cap="flat" cmpd="sng" algn="ctr">
+                      <a:solidFill>
+                        <a:srgbClr val="EEF3F8"/>
+                      </a:solidFill>
+                      <a:prstDash val="solid"/>
+                      <a:round/>
+                      <a:headEnd type="none" w="med" len="med"/>
+                      <a:tailEnd type="none" w="med" len="med"/>
+                    </a:lnT>
+                    <a:lnB w="12700" cap="flat" cmpd="sng" algn="ctr">
+                      <a:solidFill>
+                        <a:srgbClr val="EEF3F8"/>
+                      </a:solidFill>
+                      <a:prstDash val="solid"/>
+                      <a:round/>
+                      <a:headEnd type="none" w="med" len="med"/>
+                      <a:tailEnd type="none" w="med" len="med"/>
+                    </a:lnB>
+                    <a:solidFill>
+                      <a:schemeClr val="bg1"/>
+                    </a:solidFill>
+                  </a:tcPr>
+                </a:tc>
+                <a:tc>
+                  <a:txBody>
+                    <a:bodyPr/>
+                    <a:lstStyle/>
+                    <a:p>
+                      <a:pPr indent="0" marL="0">
+                        <a:buNone/>
+                      </a:pPr>
+                      <a:r>
+                        <a:rPr lang="en-US" sz="1400" dirty="0">
+                          <a:solidFill>
+                            <a:schemeClr val="tx1"/>
+                          </a:solidFill>
+                          <a:latin typeface="Calibri" pitchFamily="34" charset="0"/>
+                          <a:ea typeface="Calibri" pitchFamily="34" charset="-122"/>
+                          <a:cs typeface="Calibri" pitchFamily="34" charset="-120"/>
+                        </a:rPr>
+                        <a:t>21% a 29%</a:t>
+                      </a:r>
+                      <a:endParaRPr lang="en-US" sz="1400" dirty="0">
+                        <a:latin typeface="Calibri" charset="0"/>
+                        <a:ea typeface="Calibri" charset="0"/>
+                        <a:cs typeface="Calibri" charset="0"/>
+                      </a:endParaRPr>
+                    </a:p>
+                  </a:txBody>
+                  <a:tcPr marL="91440" marR="91440" marT="45720" marB="45720" anchor="ctr">
+                    <a:lnL w="12700" cap="flat" cmpd="sng" algn="ctr">
+                      <a:solidFill>
+                        <a:srgbClr val="EEF3F8"/>
+                      </a:solidFill>
+                      <a:prstDash val="solid"/>
+                      <a:round/>
+                      <a:headEnd type="none" w="med" len="med"/>
+                      <a:tailEnd type="none" w="med" len="med"/>
+                    </a:lnL>
+                    <a:lnR w="12700" cap="flat" cmpd="sng" algn="ctr">
+                      <a:solidFill>
+                        <a:srgbClr val="EEF3F8"/>
+                      </a:solidFill>
+                      <a:prstDash val="solid"/>
+                      <a:round/>
+                      <a:headEnd type="none" w="med" len="med"/>
+                      <a:tailEnd type="none" w="med" len="med"/>
+                    </a:lnR>
+                    <a:lnT w="12700" cap="flat" cmpd="sng" algn="ctr">
+                      <a:solidFill>
+                        <a:srgbClr val="EEF3F8"/>
+                      </a:solidFill>
+                      <a:prstDash val="solid"/>
+                      <a:round/>
+                      <a:headEnd type="none" w="med" len="med"/>
+                      <a:tailEnd type="none" w="med" len="med"/>
+                    </a:lnT>
+                    <a:lnB w="12700" cap="flat" cmpd="sng" algn="ctr">
+                      <a:solidFill>
+                        <a:srgbClr val="EEF3F8"/>
+                      </a:solidFill>
+                      <a:prstDash val="solid"/>
+                      <a:round/>
+                      <a:headEnd type="none" w="med" len="med"/>
+                      <a:tailEnd type="none" w="med" len="med"/>
+                    </a:lnB>
+                    <a:solidFill>
+                      <a:schemeClr val="bg1"/>
+                    </a:solidFill>
+                  </a:tcPr>
+                </a:tc>
+                <a:tc>
+                  <a:txBody>
+                    <a:bodyPr/>
+                    <a:lstStyle/>
+                    <a:p>
+                      <a:pPr indent="0" marL="0">
+                        <a:buNone/>
+                      </a:pPr>
+                      <a:r>
+                        <a:rPr lang="en-US" sz="1400" dirty="0">
+                          <a:solidFill>
+                            <a:schemeClr val="tx1"/>
+                          </a:solidFill>
+                          <a:latin typeface="Calibri" pitchFamily="34" charset="0"/>
+                          <a:ea typeface="Calibri" pitchFamily="34" charset="-122"/>
+                          <a:cs typeface="Calibri" pitchFamily="34" charset="-120"/>
+                        </a:rPr>
+                        <a:t>517 (R1) | 244 (R2)</a:t>
+                      </a:r>
+                      <a:endParaRPr lang="en-US" sz="1400" dirty="0">
+                        <a:latin typeface="Calibri" charset="0"/>
+                        <a:ea typeface="Calibri" charset="0"/>
+                        <a:cs typeface="Calibri" charset="0"/>
+                      </a:endParaRPr>
+                    </a:p>
+                  </a:txBody>
+                  <a:tcPr marL="91440" marR="91440" marT="45720" marB="45720" anchor="ctr">
+                    <a:lnL w="12700" cap="flat" cmpd="sng" algn="ctr">
+                      <a:solidFill>
+                        <a:srgbClr val="EEF3F8"/>
+                      </a:solidFill>
+                      <a:prstDash val="solid"/>
+                      <a:round/>
+                      <a:headEnd type="none" w="med" len="med"/>
+                      <a:tailEnd type="none" w="med" len="med"/>
+                    </a:lnL>
+                    <a:lnR w="12700" cap="flat" cmpd="sng" algn="ctr">
+                      <a:solidFill>
+                        <a:srgbClr val="EEF3F8"/>
+                      </a:solidFill>
+                      <a:prstDash val="solid"/>
+                      <a:round/>
+                      <a:headEnd type="none" w="med" len="med"/>
+                      <a:tailEnd type="none" w="med" len="med"/>
+                    </a:lnR>
+                    <a:lnT w="12700" cap="flat" cmpd="sng" algn="ctr">
+                      <a:solidFill>
+                        <a:srgbClr val="EEF3F8"/>
+                      </a:solidFill>
+                      <a:prstDash val="solid"/>
+                      <a:round/>
+                      <a:headEnd type="none" w="med" len="med"/>
+                      <a:tailEnd type="none" w="med" len="med"/>
+                    </a:lnT>
+                    <a:lnB w="12700" cap="flat" cmpd="sng" algn="ctr">
+                      <a:solidFill>
+                        <a:srgbClr val="EEF3F8"/>
+                      </a:solidFill>
+                      <a:prstDash val="solid"/>
+                      <a:round/>
+                      <a:headEnd type="none" w="med" len="med"/>
+                      <a:tailEnd type="none" w="med" len="med"/>
+                    </a:lnB>
+                    <a:solidFill>
+                      <a:schemeClr val="bg1"/>
+                    </a:solidFill>
+                  </a:tcPr>
+                </a:tc>
+              </a:tr>
+              <a:tr h="777240">
+                <a:tc>
+                  <a:txBody>
+                    <a:bodyPr/>
+                    <a:lstStyle/>
+                    <a:p>
+                      <a:pPr indent="0" marL="0">
+                        <a:buNone/>
+                      </a:pPr>
+                      <a:r>
+                        <a:rPr lang="en-US" sz="1400" b="1" dirty="0">
+                          <a:solidFill>
+                            <a:schemeClr val="tx1"/>
+                          </a:solidFill>
+                          <a:latin typeface="Calibri" pitchFamily="34" charset="0"/>
+                          <a:ea typeface="Calibri" pitchFamily="34" charset="-122"/>
+                          <a:cs typeface="Calibri" pitchFamily="34" charset="-120"/>
+                        </a:rPr>
+                        <a:t>Eólicas e solares</a:t>
+                      </a:r>
+                      <a:endParaRPr lang="en-US" sz="1400" dirty="0">
+                        <a:latin typeface="Calibri" charset="0"/>
+                        <a:ea typeface="Calibri" charset="0"/>
+                        <a:cs typeface="Calibri" charset="0"/>
+                      </a:endParaRPr>
+                    </a:p>
+                  </a:txBody>
+                  <a:tcPr marL="91440" marR="91440" marT="45720" marB="45720" anchor="ctr">
+                    <a:lnL w="12700" cap="flat" cmpd="sng" algn="ctr">
+                      <a:solidFill>
+                        <a:srgbClr val="EEF3F8"/>
+                      </a:solidFill>
+                      <a:prstDash val="solid"/>
+                      <a:round/>
+                      <a:headEnd type="none" w="med" len="med"/>
+                      <a:tailEnd type="none" w="med" len="med"/>
+                    </a:lnL>
+                    <a:lnR w="12700" cap="flat" cmpd="sng" algn="ctr">
+                      <a:solidFill>
+                        <a:srgbClr val="EEF3F8"/>
+                      </a:solidFill>
+                      <a:prstDash val="solid"/>
+                      <a:round/>
+                      <a:headEnd type="none" w="med" len="med"/>
+                      <a:tailEnd type="none" w="med" len="med"/>
+                    </a:lnR>
+                    <a:lnT w="12700" cap="flat" cmpd="sng" algn="ctr">
+                      <a:solidFill>
+                        <a:srgbClr val="EEF3F8"/>
+                      </a:solidFill>
+                      <a:prstDash val="solid"/>
+                      <a:round/>
+                      <a:headEnd type="none" w="med" len="med"/>
+                      <a:tailEnd type="none" w="med" len="med"/>
+                    </a:lnT>
+                    <a:lnB w="12700" cap="flat" cmpd="sng" algn="ctr">
+                      <a:solidFill>
+                        <a:srgbClr val="EEF3F8"/>
+                      </a:solidFill>
+                      <a:prstDash val="solid"/>
+                      <a:round/>
+                      <a:headEnd type="none" w="med" len="med"/>
+                      <a:tailEnd type="none" w="med" len="med"/>
+                    </a:lnB>
+                    <a:solidFill>
+                      <a:schemeClr val="bg1"/>
+                    </a:solidFill>
+                  </a:tcPr>
+                </a:tc>
+                <a:tc>
+                  <a:txBody>
+                    <a:bodyPr/>
+                    <a:lstStyle/>
+                    <a:p>
+                      <a:pPr indent="0" marL="0">
+                        <a:buNone/>
+                      </a:pPr>
+                      <a:r>
+                        <a:rPr lang="en-US" sz="1400" dirty="0">
+                          <a:solidFill>
+                            <a:schemeClr val="tx1"/>
+                          </a:solidFill>
+                          <a:latin typeface="Calibri" pitchFamily="34" charset="0"/>
+                          <a:ea typeface="Calibri" pitchFamily="34" charset="-122"/>
+                          <a:cs typeface="Calibri" pitchFamily="34" charset="-120"/>
+                        </a:rPr>
+                        <a:t>26,4%</a:t>
+                      </a:r>
+                      <a:endParaRPr lang="en-US" sz="1400" dirty="0">
+                        <a:latin typeface="Calibri" charset="0"/>
+                        <a:ea typeface="Calibri" charset="0"/>
+                        <a:cs typeface="Calibri" charset="0"/>
+                      </a:endParaRPr>
+                    </a:p>
+                  </a:txBody>
+                  <a:tcPr marL="91440" marR="91440" marT="45720" marB="45720" anchor="ctr">
+                    <a:lnL w="12700" cap="flat" cmpd="sng" algn="ctr">
+                      <a:solidFill>
+                        <a:srgbClr val="EEF3F8"/>
+                      </a:solidFill>
+                      <a:prstDash val="solid"/>
+                      <a:round/>
+                      <a:headEnd type="none" w="med" len="med"/>
+                      <a:tailEnd type="none" w="med" len="med"/>
+                    </a:lnL>
+                    <a:lnR w="12700" cap="flat" cmpd="sng" algn="ctr">
+                      <a:solidFill>
+                        <a:srgbClr val="EEF3F8"/>
+                      </a:solidFill>
+                      <a:prstDash val="solid"/>
+                      <a:round/>
+                      <a:headEnd type="none" w="med" len="med"/>
+                      <a:tailEnd type="none" w="med" len="med"/>
+                    </a:lnR>
+                    <a:lnT w="12700" cap="flat" cmpd="sng" algn="ctr">
+                      <a:solidFill>
+                        <a:srgbClr val="EEF3F8"/>
+                      </a:solidFill>
+                      <a:prstDash val="solid"/>
+                      <a:round/>
+                      <a:headEnd type="none" w="med" len="med"/>
+                      <a:tailEnd type="none" w="med" len="med"/>
+                    </a:lnT>
+                    <a:lnB w="12700" cap="flat" cmpd="sng" algn="ctr">
+                      <a:solidFill>
+                        <a:srgbClr val="EEF3F8"/>
+                      </a:solidFill>
+                      <a:prstDash val="solid"/>
+                      <a:round/>
+                      <a:headEnd type="none" w="med" len="med"/>
+                      <a:tailEnd type="none" w="med" len="med"/>
+                    </a:lnB>
+                    <a:solidFill>
+                      <a:schemeClr val="bg1"/>
+                    </a:solidFill>
+                  </a:tcPr>
+                </a:tc>
+                <a:tc>
+                  <a:txBody>
+                    <a:bodyPr/>
+                    <a:lstStyle/>
+                    <a:p>
+                      <a:pPr indent="0" marL="0">
+                        <a:buNone/>
+                      </a:pPr>
+                      <a:r>
+                        <a:rPr lang="en-US" sz="1400" dirty="0">
+                          <a:solidFill>
+                            <a:schemeClr val="tx1"/>
+                          </a:solidFill>
+                          <a:latin typeface="Calibri" pitchFamily="34" charset="0"/>
+                          <a:ea typeface="Calibri" pitchFamily="34" charset="-122"/>
+                          <a:cs typeface="Calibri" pitchFamily="34" charset="-120"/>
+                        </a:rPr>
+                        <a:t>43% a 59%</a:t>
+                      </a:r>
+                      <a:endParaRPr lang="en-US" sz="1400" dirty="0">
+                        <a:latin typeface="Calibri" charset="0"/>
+                        <a:ea typeface="Calibri" charset="0"/>
+                        <a:cs typeface="Calibri" charset="0"/>
+                      </a:endParaRPr>
+                    </a:p>
+                  </a:txBody>
+                  <a:tcPr marL="91440" marR="91440" marT="45720" marB="45720" anchor="ctr">
+                    <a:lnL w="12700" cap="flat" cmpd="sng" algn="ctr">
+                      <a:solidFill>
+                        <a:srgbClr val="EEF3F8"/>
+                      </a:solidFill>
+                      <a:prstDash val="solid"/>
+                      <a:round/>
+                      <a:headEnd type="none" w="med" len="med"/>
+                      <a:tailEnd type="none" w="med" len="med"/>
+                    </a:lnL>
+                    <a:lnR w="12700" cap="flat" cmpd="sng" algn="ctr">
+                      <a:solidFill>
+                        <a:srgbClr val="EEF3F8"/>
+                      </a:solidFill>
+                      <a:prstDash val="solid"/>
+                      <a:round/>
+                      <a:headEnd type="none" w="med" len="med"/>
+                      <a:tailEnd type="none" w="med" len="med"/>
+                    </a:lnR>
+                    <a:lnT w="12700" cap="flat" cmpd="sng" algn="ctr">
+                      <a:solidFill>
+                        <a:srgbClr val="EEF3F8"/>
+                      </a:solidFill>
+                      <a:prstDash val="solid"/>
+                      <a:round/>
+                      <a:headEnd type="none" w="med" len="med"/>
+                      <a:tailEnd type="none" w="med" len="med"/>
+                    </a:lnT>
+                    <a:lnB w="12700" cap="flat" cmpd="sng" algn="ctr">
+                      <a:solidFill>
+                        <a:srgbClr val="EEF3F8"/>
+                      </a:solidFill>
+                      <a:prstDash val="solid"/>
+                      <a:round/>
+                      <a:headEnd type="none" w="med" len="med"/>
+                      <a:tailEnd type="none" w="med" len="med"/>
+                    </a:lnB>
+                    <a:solidFill>
+                      <a:schemeClr val="bg1"/>
+                    </a:solidFill>
+                  </a:tcPr>
+                </a:tc>
+                <a:tc>
+                  <a:txBody>
+                    <a:bodyPr/>
+                    <a:lstStyle/>
+                    <a:p>
+                      <a:pPr indent="0" marL="0">
+                        <a:buNone/>
+                      </a:pPr>
+                      <a:r>
+                        <a:rPr lang="en-US" sz="1400" dirty="0">
+                          <a:solidFill>
+                            <a:schemeClr val="tx1"/>
+                          </a:solidFill>
+                          <a:latin typeface="Calibri" pitchFamily="34" charset="0"/>
+                          <a:ea typeface="Calibri" pitchFamily="34" charset="-122"/>
+                          <a:cs typeface="Calibri" pitchFamily="34" charset="-120"/>
+                        </a:rPr>
+                        <a:t>264 (R1) | 498 (R2)</a:t>
+                      </a:r>
+                      <a:endParaRPr lang="en-US" sz="1400" dirty="0">
+                        <a:latin typeface="Calibri" charset="0"/>
+                        <a:ea typeface="Calibri" charset="0"/>
+                        <a:cs typeface="Calibri" charset="0"/>
+                      </a:endParaRPr>
+                    </a:p>
+                  </a:txBody>
+                  <a:tcPr marL="91440" marR="91440" marT="45720" marB="45720" anchor="ctr">
+                    <a:lnL w="12700" cap="flat" cmpd="sng" algn="ctr">
+                      <a:solidFill>
+                        <a:srgbClr val="EEF3F8"/>
+                      </a:solidFill>
+                      <a:prstDash val="solid"/>
+                      <a:round/>
+                      <a:headEnd type="none" w="med" len="med"/>
+                      <a:tailEnd type="none" w="med" len="med"/>
+                    </a:lnL>
+                    <a:lnR w="12700" cap="flat" cmpd="sng" algn="ctr">
+                      <a:solidFill>
+                        <a:srgbClr val="EEF3F8"/>
+                      </a:solidFill>
+                      <a:prstDash val="solid"/>
+                      <a:round/>
+                      <a:headEnd type="none" w="med" len="med"/>
+                      <a:tailEnd type="none" w="med" len="med"/>
+                    </a:lnR>
+                    <a:lnT w="12700" cap="flat" cmpd="sng" algn="ctr">
+                      <a:solidFill>
+                        <a:srgbClr val="EEF3F8"/>
+                      </a:solidFill>
+                      <a:prstDash val="solid"/>
+                      <a:round/>
+                      <a:headEnd type="none" w="med" len="med"/>
+                      <a:tailEnd type="none" w="med" len="med"/>
+                    </a:lnT>
+                    <a:lnB w="12700" cap="flat" cmpd="sng" algn="ctr">
+                      <a:solidFill>
+                        <a:srgbClr val="EEF3F8"/>
+                      </a:solidFill>
+                      <a:prstDash val="solid"/>
+                      <a:round/>
+                      <a:headEnd type="none" w="med" len="med"/>
+                      <a:tailEnd type="none" w="med" len="med"/>
+                    </a:lnB>
+                    <a:solidFill>
+                      <a:schemeClr val="bg1"/>
+                    </a:solidFill>
+                  </a:tcPr>
+                </a:tc>
+              </a:tr>
+              <a:tr h="777240">
+                <a:tc>
+                  <a:txBody>
+                    <a:bodyPr/>
+                    <a:lstStyle/>
+                    <a:p>
+                      <a:pPr indent="0" marL="0">
+                        <a:buNone/>
+                      </a:pPr>
+                      <a:r>
+                        <a:rPr lang="en-US" sz="1300" b="1" dirty="0">
+                          <a:solidFill>
+                            <a:schemeClr val="tx1"/>
+                          </a:solidFill>
+                          <a:latin typeface="Calibri" pitchFamily="34" charset="0"/>
+                          <a:ea typeface="Calibri" pitchFamily="34" charset="-122"/>
+                          <a:cs typeface="Calibri" pitchFamily="34" charset="-120"/>
+                        </a:rPr>
+                        <a:t>Térmicas e demais</a:t>
+                      </a:r>
+                      <a:endParaRPr lang="en-US" sz="1300" dirty="0">
+                        <a:latin typeface="Calibri" charset="0"/>
+                        <a:ea typeface="Calibri" charset="0"/>
+                        <a:cs typeface="Calibri" charset="0"/>
+                      </a:endParaRPr>
+                    </a:p>
+                  </a:txBody>
+                  <a:tcPr marL="91440" marR="91440" marT="45720" marB="45720" anchor="ctr">
+                    <a:lnL w="12700" cap="flat" cmpd="sng" algn="ctr">
+                      <a:solidFill>
+                        <a:srgbClr val="EEF3F8"/>
+                      </a:solidFill>
+                      <a:prstDash val="solid"/>
+                      <a:round/>
+                      <a:headEnd type="none" w="med" len="med"/>
+                      <a:tailEnd type="none" w="med" len="med"/>
+                    </a:lnL>
+                    <a:lnR w="12700" cap="flat" cmpd="sng" algn="ctr">
+                      <a:solidFill>
+                        <a:srgbClr val="EEF3F8"/>
+                      </a:solidFill>
+                      <a:prstDash val="solid"/>
+                      <a:round/>
+                      <a:headEnd type="none" w="med" len="med"/>
+                      <a:tailEnd type="none" w="med" len="med"/>
+                    </a:lnR>
+                    <a:lnT w="12700" cap="flat" cmpd="sng" algn="ctr">
+                      <a:solidFill>
+                        <a:srgbClr val="EEF3F8"/>
+                      </a:solidFill>
+                      <a:prstDash val="solid"/>
+                      <a:round/>
+                      <a:headEnd type="none" w="med" len="med"/>
+                      <a:tailEnd type="none" w="med" len="med"/>
+                    </a:lnT>
+                    <a:lnB w="12700" cap="flat" cmpd="sng" algn="ctr">
+                      <a:solidFill>
+                        <a:srgbClr val="EEF3F8"/>
+                      </a:solidFill>
+                      <a:prstDash val="solid"/>
+                      <a:round/>
+                      <a:headEnd type="none" w="med" len="med"/>
+                      <a:tailEnd type="none" w="med" len="med"/>
+                    </a:lnB>
+                    <a:solidFill>
+                      <a:schemeClr val="bg1"/>
+                    </a:solidFill>
+                  </a:tcPr>
+                </a:tc>
+                <a:tc>
+                  <a:txBody>
+                    <a:bodyPr/>
+                    <a:lstStyle/>
+                    <a:p>
+                      <a:pPr indent="0" marL="0">
+                        <a:buNone/>
+                      </a:pPr>
+                      <a:r>
+                        <a:rPr lang="en-US" sz="1400" dirty="0">
+                          <a:solidFill>
+                            <a:schemeClr val="tx1"/>
+                          </a:solidFill>
+                          <a:latin typeface="Calibri" pitchFamily="34" charset="0"/>
+                          <a:ea typeface="Calibri" pitchFamily="34" charset="-122"/>
+                          <a:cs typeface="Calibri" pitchFamily="34" charset="-120"/>
+                        </a:rPr>
+                        <a:t>21,9%</a:t>
+                      </a:r>
+                      <a:endParaRPr lang="en-US" sz="1400" dirty="0">
+                        <a:latin typeface="Calibri" charset="0"/>
+                        <a:ea typeface="Calibri" charset="0"/>
+                        <a:cs typeface="Calibri" charset="0"/>
+                      </a:endParaRPr>
+                    </a:p>
+                  </a:txBody>
+                  <a:tcPr marL="91440" marR="91440" marT="45720" marB="45720" anchor="ctr">
+                    <a:lnL w="12700" cap="flat" cmpd="sng" algn="ctr">
+                      <a:solidFill>
+                        <a:srgbClr val="EEF3F8"/>
+                      </a:solidFill>
+                      <a:prstDash val="solid"/>
+                      <a:round/>
+                      <a:headEnd type="none" w="med" len="med"/>
+                      <a:tailEnd type="none" w="med" len="med"/>
+                    </a:lnL>
+                    <a:lnR w="12700" cap="flat" cmpd="sng" algn="ctr">
+                      <a:solidFill>
+                        <a:srgbClr val="EEF3F8"/>
+                      </a:solidFill>
+                      <a:prstDash val="solid"/>
+                      <a:round/>
+                      <a:headEnd type="none" w="med" len="med"/>
+                      <a:tailEnd type="none" w="med" len="med"/>
+                    </a:lnR>
+                    <a:lnT w="12700" cap="flat" cmpd="sng" algn="ctr">
+                      <a:solidFill>
+                        <a:srgbClr val="EEF3F8"/>
+                      </a:solidFill>
+                      <a:prstDash val="solid"/>
+                      <a:round/>
+                      <a:headEnd type="none" w="med" len="med"/>
+                      <a:tailEnd type="none" w="med" len="med"/>
+                    </a:lnT>
+                    <a:lnB w="12700" cap="flat" cmpd="sng" algn="ctr">
+                      <a:solidFill>
+                        <a:srgbClr val="EEF3F8"/>
+                      </a:solidFill>
+                      <a:prstDash val="solid"/>
+                      <a:round/>
+                      <a:headEnd type="none" w="med" len="med"/>
+                      <a:tailEnd type="none" w="med" len="med"/>
+                    </a:lnB>
+                    <a:solidFill>
+                      <a:schemeClr val="bg1"/>
+                    </a:solidFill>
+                  </a:tcPr>
+                </a:tc>
+                <a:tc>
+                  <a:txBody>
+                    <a:bodyPr/>
+                    <a:lstStyle/>
+                    <a:p>
+                      <a:pPr indent="0" marL="0">
+                        <a:buNone/>
+                      </a:pPr>
+                      <a:r>
+                        <a:rPr lang="en-US" sz="1400" dirty="0">
+                          <a:solidFill>
+                            <a:schemeClr val="tx1"/>
+                          </a:solidFill>
+                          <a:latin typeface="Calibri" pitchFamily="34" charset="0"/>
+                          <a:ea typeface="Calibri" pitchFamily="34" charset="-122"/>
+                          <a:cs typeface="Calibri" pitchFamily="34" charset="-120"/>
+                        </a:rPr>
+                        <a:t>12% a 36%</a:t>
+                      </a:r>
+                      <a:endParaRPr lang="en-US" sz="1400" dirty="0">
+                        <a:latin typeface="Calibri" charset="0"/>
+                        <a:ea typeface="Calibri" charset="0"/>
+                        <a:cs typeface="Calibri" charset="0"/>
+                      </a:endParaRPr>
+                    </a:p>
+                  </a:txBody>
+                  <a:tcPr marL="91440" marR="91440" marT="45720" marB="45720" anchor="ctr">
+                    <a:lnL w="12700" cap="flat" cmpd="sng" algn="ctr">
+                      <a:solidFill>
+                        <a:srgbClr val="EEF3F8"/>
+                      </a:solidFill>
+                      <a:prstDash val="solid"/>
+                      <a:round/>
+                      <a:headEnd type="none" w="med" len="med"/>
+                      <a:tailEnd type="none" w="med" len="med"/>
+                    </a:lnL>
+                    <a:lnR w="12700" cap="flat" cmpd="sng" algn="ctr">
+                      <a:solidFill>
+                        <a:srgbClr val="EEF3F8"/>
+                      </a:solidFill>
+                      <a:prstDash val="solid"/>
+                      <a:round/>
+                      <a:headEnd type="none" w="med" len="med"/>
+                      <a:tailEnd type="none" w="med" len="med"/>
+                    </a:lnR>
+                    <a:lnT w="12700" cap="flat" cmpd="sng" algn="ctr">
+                      <a:solidFill>
+                        <a:srgbClr val="EEF3F8"/>
+                      </a:solidFill>
+                      <a:prstDash val="solid"/>
+                      <a:round/>
+                      <a:headEnd type="none" w="med" len="med"/>
+                      <a:tailEnd type="none" w="med" len="med"/>
+                    </a:lnT>
+                    <a:lnB w="12700" cap="flat" cmpd="sng" algn="ctr">
+                      <a:solidFill>
+                        <a:srgbClr val="EEF3F8"/>
+                      </a:solidFill>
+                      <a:prstDash val="solid"/>
+                      <a:round/>
+                      <a:headEnd type="none" w="med" len="med"/>
+                      <a:tailEnd type="none" w="med" len="med"/>
+                    </a:lnB>
+                    <a:solidFill>
+                      <a:schemeClr val="bg1"/>
+                    </a:solidFill>
+                  </a:tcPr>
+                </a:tc>
+                <a:tc>
+                  <a:txBody>
+                    <a:bodyPr/>
+                    <a:lstStyle/>
+                    <a:p>
+                      <a:pPr indent="0" marL="0">
+                        <a:buNone/>
+                      </a:pPr>
+                      <a:r>
+                        <a:rPr lang="en-US" sz="1400" dirty="0">
+                          <a:solidFill>
+                            <a:schemeClr val="tx1"/>
+                          </a:solidFill>
+                          <a:latin typeface="Calibri" pitchFamily="34" charset="0"/>
+                          <a:ea typeface="Calibri" pitchFamily="34" charset="-122"/>
+                          <a:cs typeface="Calibri" pitchFamily="34" charset="-120"/>
+                        </a:rPr>
+                        <a:t>219 (R1) | 258 (R2)</a:t>
+                      </a:r>
+                      <a:endParaRPr lang="en-US" sz="1400" dirty="0">
+                        <a:latin typeface="Calibri" charset="0"/>
+                        <a:ea typeface="Calibri" charset="0"/>
+                        <a:cs typeface="Calibri" charset="0"/>
+                      </a:endParaRPr>
+                    </a:p>
+                  </a:txBody>
+                  <a:tcPr marL="91440" marR="91440" marT="45720" marB="45720" anchor="ctr">
+                    <a:lnL w="12700" cap="flat" cmpd="sng" algn="ctr">
+                      <a:solidFill>
+                        <a:srgbClr val="EEF3F8"/>
+                      </a:solidFill>
+                      <a:prstDash val="solid"/>
+                      <a:round/>
+                      <a:headEnd type="none" w="med" len="med"/>
+                      <a:tailEnd type="none" w="med" len="med"/>
+                    </a:lnL>
+                    <a:lnR w="12700" cap="flat" cmpd="sng" algn="ctr">
+                      <a:solidFill>
+                        <a:srgbClr val="EEF3F8"/>
+                      </a:solidFill>
+                      <a:prstDash val="solid"/>
+                      <a:round/>
+                      <a:headEnd type="none" w="med" len="med"/>
+                      <a:tailEnd type="none" w="med" len="med"/>
+                    </a:lnR>
+                    <a:lnT w="12700" cap="flat" cmpd="sng" algn="ctr">
+                      <a:solidFill>
+                        <a:srgbClr val="EEF3F8"/>
+                      </a:solidFill>
+                      <a:prstDash val="solid"/>
+                      <a:round/>
+                      <a:headEnd type="none" w="med" len="med"/>
+                      <a:tailEnd type="none" w="med" len="med"/>
+                    </a:lnT>
+                    <a:lnB w="12700" cap="flat" cmpd="sng" algn="ctr">
+                      <a:solidFill>
+                        <a:srgbClr val="EEF3F8"/>
+                      </a:solidFill>
+                      <a:prstDash val="solid"/>
+                      <a:round/>
+                      <a:headEnd type="none" w="med" len="med"/>
+                      <a:tailEnd type="none" w="med" len="med"/>
+                    </a:lnB>
+                    <a:solidFill>
+                      <a:schemeClr val="bg1"/>
+                    </a:solidFill>
+                  </a:tcPr>
+                </a:tc>
+              </a:tr>
+            </a:tbl>
+          </a:graphicData>
+        </a:graphic>
+      </p:graphicFrame>
+      <p:sp>
+        <p:nvSpPr>
+          <p:cNvPr id="6" name="Text 2"/>
+          <p:cNvSpPr txBox="1"/>
+          <p:nvPr/>
+        </p:nvSpPr>
+        <p:spPr>
+          <a:xfrm>
+            <a:off x="6903720" y="4617720"/>
+            <a:ext cx="4739335" cy="822960"/>
+          </a:xfrm>
+          <a:prstGeom prst="rect">
+            <a:avLst/>
+          </a:prstGeom>
+          <a:noFill/>
+          <a:ln/>
+        </p:spPr>
+        <p:txBody>
+          <a:bodyPr wrap="square" lIns="0" tIns="0" rIns="0" bIns="0" rtlCol="0" anchor="t"/>
+          <a:lstStyle/>
+          <a:p>
+            <a:pPr indent="0" marL="0">
+              <a:buNone/>
+            </a:pPr>
+            <a:r>
+              <a:rPr lang="en-US" sz="1200" i="1" dirty="0">
+                <a:solidFill>
+                  <a:schemeClr val="tx2"/>
+                </a:solidFill>
+              </a:rPr>
+              <a:t>Valores em R$ milhões por R$ 1 bilhão de receita fixa anual. R2 usa o ponto médio das térmicas (62,5%).</a:t>
+            </a:r>
+            <a:endParaRPr lang="en-US" sz="1200" dirty="0"/>
+          </a:p>
+        </p:txBody>
+      </p:sp>
+      <p:sp>
+        <p:nvSpPr>
+          <p:cNvPr id="7" name="Illustrative caveat"/>
+          <p:cNvSpPr/>
+          <p:nvPr/>
+        </p:nvSpPr>
+        <p:spPr>
+          <a:xfrm>
+            <a:off x="548640" y="5577840"/>
+            <a:ext cx="11094415" cy="713232"/>
+          </a:xfrm>
+          <a:prstGeom prst="roundRect">
+            <a:avLst>
+              <a:gd name="adj" fmla="val 15385"/>
+            </a:avLst>
+          </a:prstGeom>
+          <a:solidFill>
+            <a:schemeClr val="tx2"/>
+          </a:solidFill>
+          <a:ln w="12700">
+            <a:solidFill>
+              <a:schemeClr val="tx2"/>
+            </a:solidFill>
+            <a:prstDash val="solid"/>
+          </a:ln>
+        </p:spPr>
+      </p:sp>
+      <p:sp>
+        <p:nvSpPr>
+          <p:cNvPr id="8" name="Text 4"/>
+          <p:cNvSpPr txBox="1"/>
+          <p:nvPr/>
+        </p:nvSpPr>
+        <p:spPr>
+          <a:xfrm>
+            <a:off x="822960" y="5577840"/>
+            <a:ext cx="10545775" cy="713232"/>
+          </a:xfrm>
+          <a:prstGeom prst="rect">
+            <a:avLst/>
+          </a:prstGeom>
+          <a:noFill/>
+          <a:ln/>
+        </p:spPr>
+        <p:txBody>
+          <a:bodyPr wrap="square" lIns="0" tIns="0" rIns="0" bIns="0" rtlCol="0" anchor="ctr"/>
+          <a:lstStyle/>
+          <a:p>
+            <a:pPr indent="0" marL="0">
+              <a:buNone/>
+            </a:pPr>
+            <a:r>
+              <a:rPr lang="en-US" sz="1400" b="1" dirty="0">
+                <a:solidFill>
+                  <a:schemeClr val="accent1"/>
+                </a:solidFill>
+              </a:rPr>
+              <a:t>Não há percentual oficial. </a:t>
+            </a:r>
+            <a:pPr indent="0" marL="0">
+              <a:buNone/>
+            </a:pPr>
+            <a:r>
+              <a:rPr lang="en-US" sz="1400" dirty="0">
+                <a:solidFill>
+                  <a:schemeClr val="bg1"/>
+                </a:solidFill>
+              </a:rPr>
+              <a:t>A ANEEL ainda define a fórmula. Premissas: base = geração de 2025 (EPE); coeficientes assumidos de 25% (hidro), 100% (eólica e solar) e 25% a 100% (térmicas).</a:t>
+            </a:r>
+            <a:endParaRPr lang="en-US" sz="1400" dirty="0"/>
+          </a:p>
+        </p:txBody>
+      </p:sp>
+      <p:sp>
+        <p:nvSpPr>
+          <p:cNvPr id="9" name="Text 5"/>
+          <p:cNvSpPr txBox="1"/>
+          <p:nvPr/>
+        </p:nvSpPr>
+        <p:spPr>
+          <a:xfrm>
+            <a:off x="548640" y="6382512"/>
+            <a:ext cx="10424160" cy="274320"/>
+          </a:xfrm>
+          <a:prstGeom prst="rect">
+            <a:avLst/>
+          </a:prstGeom>
+          <a:noFill/>
+          <a:ln/>
+        </p:spPr>
+        <p:txBody>
+          <a:bodyPr wrap="square" lIns="0" tIns="0" rIns="0" bIns="0" rtlCol="0" anchor="ctr"/>
+          <a:lstStyle/>
+          <a:p>
+            <a:pPr indent="0" marL="0">
+              <a:buNone/>
+            </a:pPr>
+            <a:r>
+              <a:rPr lang="en-US" sz="1000" i="1" dirty="0">
+                <a:solidFill>
+                  <a:schemeClr val="tx2"/>
+                </a:solidFill>
+              </a:rPr>
+              <a:t>Cálculo próprio com geração de 2025 do Anuário Estatístico de Energia Elétrica 2025 (EPE): hidráulica 51,7%, eólica e solar 26,4% e demais 21,9% (resíduo).</a:t>
+            </a:r>
+            <a:endParaRPr lang="en-US" sz="1000" dirty="0"/>
+          </a:p>
+        </p:txBody>
+      </p:sp>
+      <p:sp>
+        <p:nvSpPr>
+          <p:cNvPr id="25" name="Slide Number Placeholder 0"/>
+          <p:cNvSpPr>
+            <a:spLocks noGrp="1"/>
+          </p:cNvSpPr>
+          <p:nvPr>
+            <p:ph type="sldNum" sz="quarter" idx="4294967295"/>
+          </p:nvPr>
+        </p:nvSpPr>
+        <p:spPr>
+          <a:xfrm>
+            <a:off x="11155680" y="6400800"/>
+            <a:ext cx="548640" cy="274320"/>
+          </a:xfrm>
+          <a:prstGeom prst="rect">
+            <a:avLst/>
+          </a:prstGeom>
+          <a:extLst>
+            <a:ext uri="{C572A759-6A51-4108-AA02-DFA0A04FC94B}">
+              <ma14:wrappingTextBoxFlag xmlns:ma14="http://schemas.microsoft.com/office/mac/drawingml/2011/main" val="0"/>
+            </a:ext>
+          </a:extLst>
+        </p:spPr>
+        <p:txBody>
+          <a:bodyPr/>
+          <a:lstStyle>
+            <a:lvl1pPr>
+              <a:defRPr sz="1100">
+                <a:solidFill>
+                  <a:schemeClr val="tx2"/>
+                </a:solidFill>
+              </a:defRPr>
+            </a:lvl1pPr>
+          </a:lstStyle>
+          <a:p>
+            <a:pPr algn="r"/>
+            <a:fld id="{F7021451-1387-4CA6-816F-3879F97B5CBC}" type="slidenum">
+              <a:rPr b="0" lang="en-US"/>
+              <a:t>17</a:t>
+            </a:fld>
+            <a:endParaRPr lang="en-US"/>
+          </a:p>
+        </p:txBody>
+      </p:sp>
+    </p:spTree>
+  </p:cSld>
+  <p:clrMapOvr>
+    <a:masterClrMapping/>
+  </p:clrMapOvr>
+</p:sld>
+</file>
+
+<file path=ppt/slides/slide18.xml><?xml version="1.0" encoding="utf-8"?>
+<p:sld xmlns:a="http://schemas.openxmlformats.org/drawingml/2006/main" xmlns:r="http://schemas.openxmlformats.org/officeDocument/2006/relationships" xmlns:p="http://schemas.openxmlformats.org/presentationml/2006/main">
+  <p:cSld name="Slide 18">
+    <p:spTree>
+      <p:nvGrpSpPr>
+        <p:cNvPr id="1" name=""/>
+        <p:cNvGrpSpPr/>
+        <p:nvPr/>
+      </p:nvGrpSpPr>
+      <p:grpSpPr>
+        <a:xfrm>
+          <a:off x="0" y="0"/>
+          <a:ext cx="0" cy="0"/>
+          <a:chOff x="0" y="0"/>
+          <a:chExt cx="0" cy="0"/>
+        </a:xfrm>
+      </p:grpSpPr>
+      <p:sp>
+        <p:nvSpPr>
+          <p:cNvPr id="2" name="Text 0"/>
+          <p:cNvSpPr/>
+          <p:nvPr>
+            <p:ph idx="100" type="title" hasCustomPrompt="1"/>
+          </p:nvPr>
+        </p:nvSpPr>
+        <p:spPr>
+          <a:xfrm>
+            <a:off x="548640" y="365760"/>
+            <a:ext cx="11094415" cy="822960"/>
+          </a:xfrm>
+          <a:prstGeom prst="rect">
+            <a:avLst/>
+          </a:prstGeom>
+          <a:noFill/>
+          <a:ln/>
+        </p:spPr>
+        <p:txBody>
+          <a:bodyPr wrap="square" lIns="0" tIns="0" rIns="0" bIns="0" rtlCol="0" anchor="ctr"/>
+          <a:lstStyle/>
+          <a:p>
+            <a:pPr algn="l" indent="0" marL="0">
+              <a:buNone/>
+            </a:pPr>
+            <a:r>
+              <a:rPr lang="en-US" sz="3200" b="1" dirty="0">
+                <a:solidFill>
+                  <a:schemeClr val="tx1"/>
+                </a:solidFill>
+              </a:rPr>
+              <a:t>O que as baterias podem economizar</a:t>
+            </a:r>
+            <a:endParaRPr lang="en-US" sz="3200" dirty="0"/>
+          </a:p>
+        </p:txBody>
+      </p:sp>
+      <p:sp>
+        <p:nvSpPr>
+          <p:cNvPr id="3" name="Chart card"/>
+          <p:cNvSpPr/>
+          <p:nvPr/>
+        </p:nvSpPr>
+        <p:spPr>
+          <a:xfrm>
+            <a:off x="548640" y="1417320"/>
+            <a:ext cx="6035040" cy="4114800"/>
+          </a:xfrm>
+          <a:prstGeom prst="roundRect">
+            <a:avLst>
+              <a:gd name="adj" fmla="val 2667"/>
+            </a:avLst>
+          </a:prstGeom>
+          <a:solidFill>
+            <a:schemeClr val="bg1"/>
+          </a:solidFill>
+          <a:ln w="12700">
+            <a:solidFill>
+              <a:schemeClr val="bg1"/>
+            </a:solidFill>
+            <a:prstDash val="solid"/>
+          </a:ln>
+          <a:effectLst>
+            <a:outerShdw sx="100000" sy="100000" kx="0" ky="0" algn="bl" rotWithShape="0" blurRad="101600" dist="25400" dir="5400000">
+              <a:srgbClr val="0B1A2E">
+                <a:alpha val="12000"/>
+              </a:srgbClr>
+            </a:outerShdw>
+          </a:effectLst>
+        </p:spPr>
+      </p:sp>
+      <p:graphicFrame>
+        <p:nvGraphicFramePr>
+          <p:cNvPr id="4" name="Chart 0" descr=""/>
+          <p:cNvGraphicFramePr/>
+          <p:nvPr/>
+        </p:nvGraphicFramePr>
+        <p:xfrm>
+          <a:off x="731520" y="1554480"/>
+          <a:ext cx="5669280" cy="3840480"/>
+        </p:xfrm>
+        <a:graphic xmlns:a="http://schemas.openxmlformats.org/drawingml/2006/main">
+          <a:graphicData uri="http://schemas.openxmlformats.org/drawingml/2006/chart">
+            <c:chart xmlns:c="http://schemas.openxmlformats.org/drawingml/2006/chart" r:id="rId1"/>
+          </a:graphicData>
+        </a:graphic>
+      </p:graphicFrame>
+      <p:sp>
+        <p:nvSpPr>
+          <p:cNvPr id="5" name="Breakdown card"/>
+          <p:cNvSpPr/>
+          <p:nvPr/>
+        </p:nvSpPr>
+        <p:spPr>
+          <a:xfrm>
+            <a:off x="6858000" y="1417320"/>
+            <a:ext cx="4785055" cy="4114800"/>
+          </a:xfrm>
+          <a:prstGeom prst="roundRect">
+            <a:avLst>
+              <a:gd name="adj" fmla="val 2667"/>
+            </a:avLst>
+          </a:prstGeom>
+          <a:solidFill>
+            <a:schemeClr val="bg1"/>
+          </a:solidFill>
+          <a:ln w="12700">
+            <a:solidFill>
+              <a:schemeClr val="bg1"/>
+            </a:solidFill>
+            <a:prstDash val="solid"/>
+          </a:ln>
+          <a:effectLst>
+            <a:outerShdw sx="100000" sy="100000" kx="0" ky="0" algn="bl" rotWithShape="0" blurRad="101600" dist="25400" dir="5400000">
+              <a:srgbClr val="0B1A2E">
+                <a:alpha val="12000"/>
+              </a:srgbClr>
+            </a:outerShdw>
+          </a:effectLst>
+        </p:spPr>
+      </p:sp>
+      <p:sp>
+        <p:nvSpPr>
+          <p:cNvPr id="6" name="Text 3"/>
+          <p:cNvSpPr txBox="1"/>
+          <p:nvPr/>
+        </p:nvSpPr>
+        <p:spPr>
+          <a:xfrm>
+            <a:off x="7132320" y="1600200"/>
+            <a:ext cx="4236415" cy="365760"/>
+          </a:xfrm>
+          <a:prstGeom prst="rect">
+            <a:avLst/>
+          </a:prstGeom>
+          <a:noFill/>
+          <a:ln/>
+        </p:spPr>
+        <p:txBody>
+          <a:bodyPr wrap="square" lIns="0" tIns="0" rIns="0" bIns="0" rtlCol="0" anchor="t"/>
+          <a:lstStyle/>
+          <a:p>
+            <a:pPr indent="0" marL="0">
+              <a:buNone/>
+            </a:pPr>
+            <a:r>
+              <a:rPr lang="en-US" sz="1600" b="1" dirty="0">
+                <a:solidFill>
+                  <a:schemeClr val="tx1"/>
+                </a:solidFill>
+                <a:latin typeface="Cambria" pitchFamily="34" charset="0"/>
+                <a:ea typeface="Cambria" pitchFamily="34" charset="-122"/>
+                <a:cs typeface="Cambria" pitchFamily="34" charset="-120"/>
+              </a:rPr>
+              <a:t>Composição do estudo de 4,5 GW</a:t>
+            </a:r>
+            <a:endParaRPr lang="en-US" sz="1600" dirty="0"/>
+          </a:p>
+        </p:txBody>
+      </p:sp>
+      <p:sp>
+        <p:nvSpPr>
+          <p:cNvPr id="7" name="Text 4"/>
+          <p:cNvSpPr txBox="1"/>
+          <p:nvPr/>
+        </p:nvSpPr>
+        <p:spPr>
+          <a:xfrm>
+            <a:off x="7132320" y="2103120"/>
+            <a:ext cx="2011680" cy="548640"/>
+          </a:xfrm>
+          <a:prstGeom prst="rect">
+            <a:avLst/>
+          </a:prstGeom>
+          <a:noFill/>
+          <a:ln/>
+        </p:spPr>
+        <p:txBody>
+          <a:bodyPr wrap="square" lIns="0" tIns="0" rIns="0" bIns="0" rtlCol="0" anchor="ctr"/>
+          <a:lstStyle/>
+          <a:p>
+            <a:pPr indent="0" marL="0">
+              <a:buNone/>
+            </a:pPr>
+            <a:r>
+              <a:rPr lang="en-US" sz="1600" b="1" dirty="0">
+                <a:solidFill>
+                  <a:schemeClr val="tx2"/>
+                </a:solidFill>
+                <a:latin typeface="Cambria" pitchFamily="34" charset="0"/>
+                <a:ea typeface="Cambria" pitchFamily="34" charset="-122"/>
+                <a:cs typeface="Cambria" pitchFamily="34" charset="-120"/>
+              </a:rPr>
+              <a:t>R$ 8,9 bi/ano</a:t>
+            </a:r>
+            <a:endParaRPr lang="en-US" sz="1600" dirty="0"/>
+          </a:p>
+        </p:txBody>
+      </p:sp>
+      <p:sp>
+        <p:nvSpPr>
+          <p:cNvPr id="8" name="Text 5"/>
+          <p:cNvSpPr txBox="1"/>
+          <p:nvPr/>
+        </p:nvSpPr>
+        <p:spPr>
+          <a:xfrm>
+            <a:off x="9189720" y="2103120"/>
+            <a:ext cx="2179015" cy="548640"/>
+          </a:xfrm>
+          <a:prstGeom prst="rect">
+            <a:avLst/>
+          </a:prstGeom>
+          <a:noFill/>
+          <a:ln/>
+        </p:spPr>
+        <p:txBody>
+          <a:bodyPr wrap="square" lIns="0" tIns="0" rIns="0" bIns="0" rtlCol="0" anchor="ctr"/>
+          <a:lstStyle/>
+          <a:p>
+            <a:pPr indent="0" marL="0">
+              <a:buNone/>
+            </a:pPr>
+            <a:r>
+              <a:rPr lang="en-US" sz="1400" dirty="0">
+                <a:solidFill>
+                  <a:schemeClr val="tx1"/>
+                </a:solidFill>
+              </a:rPr>
+              <a:t>benefício total para os consumidores</a:t>
+            </a:r>
+            <a:endParaRPr lang="en-US" sz="1400" dirty="0"/>
+          </a:p>
+        </p:txBody>
+      </p:sp>
+      <p:sp>
+        <p:nvSpPr>
+          <p:cNvPr id="9" name="Text 6"/>
+          <p:cNvSpPr txBox="1"/>
+          <p:nvPr/>
+        </p:nvSpPr>
+        <p:spPr>
+          <a:xfrm>
+            <a:off x="7132320" y="2779776"/>
+            <a:ext cx="2011680" cy="548640"/>
+          </a:xfrm>
+          <a:prstGeom prst="rect">
+            <a:avLst/>
+          </a:prstGeom>
+          <a:noFill/>
+          <a:ln/>
+        </p:spPr>
+        <p:txBody>
+          <a:bodyPr wrap="square" lIns="0" tIns="0" rIns="0" bIns="0" rtlCol="0" anchor="ctr"/>
+          <a:lstStyle/>
+          <a:p>
+            <a:pPr indent="0" marL="0">
+              <a:buNone/>
+            </a:pPr>
+            <a:r>
+              <a:rPr lang="en-US" sz="1600" b="1" dirty="0">
+                <a:solidFill>
+                  <a:schemeClr val="tx2"/>
+                </a:solidFill>
+                <a:latin typeface="Cambria" pitchFamily="34" charset="0"/>
+                <a:ea typeface="Cambria" pitchFamily="34" charset="-122"/>
+                <a:cs typeface="Cambria" pitchFamily="34" charset="-120"/>
+              </a:rPr>
+              <a:t>R$ 660 mi/ano</a:t>
+            </a:r>
+            <a:endParaRPr lang="en-US" sz="1600" dirty="0"/>
+          </a:p>
+        </p:txBody>
+      </p:sp>
+      <p:sp>
+        <p:nvSpPr>
+          <p:cNvPr id="10" name="Text 7"/>
+          <p:cNvSpPr txBox="1"/>
+          <p:nvPr/>
+        </p:nvSpPr>
+        <p:spPr>
+          <a:xfrm>
+            <a:off x="9189720" y="2779776"/>
+            <a:ext cx="2179015" cy="548640"/>
+          </a:xfrm>
+          <a:prstGeom prst="rect">
+            <a:avLst/>
+          </a:prstGeom>
+          <a:noFill/>
+          <a:ln/>
+        </p:spPr>
+        <p:txBody>
+          <a:bodyPr wrap="square" lIns="0" tIns="0" rIns="0" bIns="0" rtlCol="0" anchor="ctr"/>
+          <a:lstStyle/>
+          <a:p>
+            <a:pPr indent="0" marL="0">
+              <a:buNone/>
+            </a:pPr>
+            <a:r>
+              <a:rPr lang="en-US" sz="1400" dirty="0">
+                <a:solidFill>
+                  <a:schemeClr val="tx1"/>
+                </a:solidFill>
+              </a:rPr>
+              <a:t>menor custo do risco hidrológico (GSF)</a:t>
+            </a:r>
+            <a:endParaRPr lang="en-US" sz="1400" dirty="0"/>
+          </a:p>
+        </p:txBody>
+      </p:sp>
+      <p:sp>
+        <p:nvSpPr>
+          <p:cNvPr id="11" name="Text 8"/>
+          <p:cNvSpPr txBox="1"/>
+          <p:nvPr/>
+        </p:nvSpPr>
+        <p:spPr>
+          <a:xfrm>
+            <a:off x="7132320" y="3456432"/>
+            <a:ext cx="2011680" cy="548640"/>
+          </a:xfrm>
+          <a:prstGeom prst="rect">
+            <a:avLst/>
+          </a:prstGeom>
+          <a:noFill/>
+          <a:ln/>
+        </p:spPr>
+        <p:txBody>
+          <a:bodyPr wrap="square" lIns="0" tIns="0" rIns="0" bIns="0" rtlCol="0" anchor="ctr"/>
+          <a:lstStyle/>
+          <a:p>
+            <a:pPr indent="0" marL="0">
+              <a:buNone/>
+            </a:pPr>
+            <a:r>
+              <a:rPr lang="en-US" sz="1600" b="1" dirty="0">
+                <a:solidFill>
+                  <a:schemeClr val="tx2"/>
+                </a:solidFill>
+                <a:latin typeface="Cambria" pitchFamily="34" charset="0"/>
+                <a:ea typeface="Cambria" pitchFamily="34" charset="-122"/>
+                <a:cs typeface="Cambria" pitchFamily="34" charset="-120"/>
+              </a:rPr>
+              <a:t>até R$ 550 mi/ano</a:t>
+            </a:r>
+            <a:endParaRPr lang="en-US" sz="1600" dirty="0"/>
+          </a:p>
+        </p:txBody>
+      </p:sp>
+      <p:sp>
+        <p:nvSpPr>
+          <p:cNvPr id="12" name="Text 9"/>
+          <p:cNvSpPr txBox="1"/>
+          <p:nvPr/>
+        </p:nvSpPr>
+        <p:spPr>
+          <a:xfrm>
+            <a:off x="9189720" y="3456432"/>
+            <a:ext cx="2179015" cy="548640"/>
+          </a:xfrm>
+          <a:prstGeom prst="rect">
+            <a:avLst/>
+          </a:prstGeom>
+          <a:noFill/>
+          <a:ln/>
+        </p:spPr>
+        <p:txBody>
+          <a:bodyPr wrap="square" lIns="0" tIns="0" rIns="0" bIns="0" rtlCol="0" anchor="ctr"/>
+          <a:lstStyle/>
+          <a:p>
+            <a:pPr indent="0" marL="0">
+              <a:buNone/>
+            </a:pPr>
+            <a:r>
+              <a:rPr lang="en-US" sz="1400" dirty="0">
+                <a:solidFill>
+                  <a:schemeClr val="tx1"/>
+                </a:solidFill>
+              </a:rPr>
+              <a:t>menor curtailment de solar e eólica</a:t>
+            </a:r>
+            <a:endParaRPr lang="en-US" sz="1400" dirty="0"/>
+          </a:p>
+        </p:txBody>
+      </p:sp>
+      <p:sp>
+        <p:nvSpPr>
+          <p:cNvPr id="13" name="Text 10"/>
+          <p:cNvSpPr txBox="1"/>
+          <p:nvPr/>
+        </p:nvSpPr>
+        <p:spPr>
+          <a:xfrm>
+            <a:off x="7132320" y="4133088"/>
+            <a:ext cx="2011680" cy="548640"/>
+          </a:xfrm>
+          <a:prstGeom prst="rect">
+            <a:avLst/>
+          </a:prstGeom>
+          <a:noFill/>
+          <a:ln/>
+        </p:spPr>
+        <p:txBody>
+          <a:bodyPr wrap="square" lIns="0" tIns="0" rIns="0" bIns="0" rtlCol="0" anchor="ctr"/>
+          <a:lstStyle/>
+          <a:p>
+            <a:pPr indent="0" marL="0">
+              <a:buNone/>
+            </a:pPr>
+            <a:r>
+              <a:rPr lang="en-US" sz="1600" b="1" dirty="0">
+                <a:solidFill>
+                  <a:schemeClr val="tx2"/>
+                </a:solidFill>
+                <a:latin typeface="Cambria" pitchFamily="34" charset="0"/>
+                <a:ea typeface="Cambria" pitchFamily="34" charset="-122"/>
+                <a:cs typeface="Cambria" pitchFamily="34" charset="-120"/>
+              </a:rPr>
+              <a:t>R$ 550 mi/ano</a:t>
+            </a:r>
+            <a:endParaRPr lang="en-US" sz="1600" dirty="0"/>
+          </a:p>
+        </p:txBody>
+      </p:sp>
+      <p:sp>
+        <p:nvSpPr>
+          <p:cNvPr id="14" name="Text 11"/>
+          <p:cNvSpPr txBox="1"/>
+          <p:nvPr/>
+        </p:nvSpPr>
+        <p:spPr>
+          <a:xfrm>
+            <a:off x="9189720" y="4133088"/>
+            <a:ext cx="2179015" cy="548640"/>
+          </a:xfrm>
+          <a:prstGeom prst="rect">
+            <a:avLst/>
+          </a:prstGeom>
+          <a:noFill/>
+          <a:ln/>
+        </p:spPr>
+        <p:txBody>
+          <a:bodyPr wrap="square" lIns="0" tIns="0" rIns="0" bIns="0" rtlCol="0" anchor="ctr"/>
+          <a:lstStyle/>
+          <a:p>
+            <a:pPr indent="0" marL="0">
+              <a:buNone/>
+            </a:pPr>
+            <a:r>
+              <a:rPr lang="en-US" sz="1400" dirty="0">
+                <a:solidFill>
+                  <a:schemeClr val="tx1"/>
+                </a:solidFill>
+              </a:rPr>
+              <a:t>economia atribuída aos geradores</a:t>
+            </a:r>
+            <a:endParaRPr lang="en-US" sz="1400" dirty="0"/>
+          </a:p>
+        </p:txBody>
+      </p:sp>
+      <p:sp>
+        <p:nvSpPr>
+          <p:cNvPr id="15" name="Text 12"/>
+          <p:cNvSpPr txBox="1"/>
+          <p:nvPr/>
+        </p:nvSpPr>
+        <p:spPr>
+          <a:xfrm>
+            <a:off x="7132320" y="4809744"/>
+            <a:ext cx="2011680" cy="548640"/>
+          </a:xfrm>
+          <a:prstGeom prst="rect">
+            <a:avLst/>
+          </a:prstGeom>
+          <a:noFill/>
+          <a:ln/>
+        </p:spPr>
+        <p:txBody>
+          <a:bodyPr wrap="square" lIns="0" tIns="0" rIns="0" bIns="0" rtlCol="0" anchor="ctr"/>
+          <a:lstStyle/>
+          <a:p>
+            <a:pPr indent="0" marL="0">
+              <a:buNone/>
+            </a:pPr>
+            <a:r>
+              <a:rPr lang="en-US" sz="1600" b="1" dirty="0">
+                <a:solidFill>
+                  <a:schemeClr val="tx2"/>
+                </a:solidFill>
+                <a:latin typeface="Cambria" pitchFamily="34" charset="0"/>
+                <a:ea typeface="Cambria" pitchFamily="34" charset="-122"/>
+                <a:cs typeface="Cambria" pitchFamily="34" charset="-120"/>
+              </a:rPr>
+              <a:t>R$ 629 mi/ano</a:t>
+            </a:r>
+            <a:endParaRPr lang="en-US" sz="1600" dirty="0"/>
+          </a:p>
+        </p:txBody>
+      </p:sp>
+      <p:sp>
+        <p:nvSpPr>
+          <p:cNvPr id="16" name="Text 13"/>
+          <p:cNvSpPr txBox="1"/>
+          <p:nvPr/>
+        </p:nvSpPr>
+        <p:spPr>
+          <a:xfrm>
+            <a:off x="9189720" y="4809744"/>
+            <a:ext cx="2179015" cy="548640"/>
+          </a:xfrm>
+          <a:prstGeom prst="rect">
+            <a:avLst/>
+          </a:prstGeom>
+          <a:noFill/>
+          <a:ln/>
+        </p:spPr>
+        <p:txBody>
+          <a:bodyPr wrap="square" lIns="0" tIns="0" rIns="0" bIns="0" rtlCol="0" anchor="ctr"/>
+          <a:lstStyle/>
+          <a:p>
+            <a:pPr indent="0" marL="0">
+              <a:buNone/>
+            </a:pPr>
+            <a:r>
+              <a:rPr lang="en-US" sz="1400" dirty="0">
+                <a:solidFill>
+                  <a:schemeClr val="tx1"/>
+                </a:solidFill>
+              </a:rPr>
+              <a:t>encargos evitados em outra simulação da Volt Robotics</a:t>
+            </a:r>
+            <a:endParaRPr lang="en-US" sz="1400" dirty="0"/>
+          </a:p>
+        </p:txBody>
+      </p:sp>
+      <p:sp>
+        <p:nvSpPr>
+          <p:cNvPr id="17" name="Caveat banner"/>
+          <p:cNvSpPr/>
+          <p:nvPr/>
+        </p:nvSpPr>
+        <p:spPr>
+          <a:xfrm>
+            <a:off x="548640" y="5669280"/>
+            <a:ext cx="11094415" cy="594360"/>
+          </a:xfrm>
+          <a:prstGeom prst="roundRect">
+            <a:avLst>
+              <a:gd name="adj" fmla="val 18462"/>
+            </a:avLst>
+          </a:prstGeom>
+          <a:solidFill>
+            <a:schemeClr val="tx2"/>
+          </a:solidFill>
+          <a:ln w="12700">
+            <a:solidFill>
+              <a:schemeClr val="tx2"/>
+            </a:solidFill>
+            <a:prstDash val="solid"/>
+          </a:ln>
+        </p:spPr>
+      </p:sp>
+      <p:sp>
+        <p:nvSpPr>
+          <p:cNvPr id="18" name="Text 15"/>
+          <p:cNvSpPr txBox="1"/>
+          <p:nvPr/>
+        </p:nvSpPr>
+        <p:spPr>
+          <a:xfrm>
+            <a:off x="822960" y="5669280"/>
+            <a:ext cx="10545775" cy="594360"/>
+          </a:xfrm>
+          <a:prstGeom prst="rect">
+            <a:avLst/>
+          </a:prstGeom>
+          <a:noFill/>
+          <a:ln/>
+        </p:spPr>
+        <p:txBody>
+          <a:bodyPr wrap="square" lIns="0" tIns="0" rIns="0" bIns="0" rtlCol="0" anchor="ctr"/>
+          <a:lstStyle/>
+          <a:p>
+            <a:pPr indent="0" marL="0">
+              <a:buNone/>
+            </a:pPr>
+            <a:r>
+              <a:rPr lang="en-US" sz="1400" b="1" dirty="0">
+                <a:solidFill>
+                  <a:schemeClr val="accent1"/>
+                </a:solidFill>
+              </a:rPr>
+              <a:t>Cautela: </a:t>
+            </a:r>
+            <a:pPr indent="0" marL="0">
+              <a:buNone/>
+            </a:pPr>
+            <a:r>
+              <a:rPr lang="en-US" sz="1400" dirty="0">
+                <a:solidFill>
+                  <a:schemeClr val="bg1"/>
+                </a:solidFill>
+              </a:rPr>
+              <a:t>estudos encomendados pelo setor de armazenamento. Potência e premissas diferem, então os valores não são comparáveis entre si.</a:t>
+            </a:r>
+            <a:endParaRPr lang="en-US" sz="1400" dirty="0"/>
+          </a:p>
+        </p:txBody>
+      </p:sp>
+      <p:sp>
+        <p:nvSpPr>
+          <p:cNvPr id="19" name="Text 16"/>
+          <p:cNvSpPr txBox="1"/>
+          <p:nvPr/>
+        </p:nvSpPr>
+        <p:spPr>
+          <a:xfrm>
+            <a:off x="548640" y="6382512"/>
+            <a:ext cx="10424160" cy="274320"/>
+          </a:xfrm>
+          <a:prstGeom prst="rect">
+            <a:avLst/>
+          </a:prstGeom>
+          <a:noFill/>
+          <a:ln/>
+        </p:spPr>
+        <p:txBody>
+          <a:bodyPr wrap="square" lIns="0" tIns="0" rIns="0" bIns="0" rtlCol="0" anchor="ctr"/>
+          <a:lstStyle/>
+          <a:p>
+            <a:pPr indent="0" marL="0">
+              <a:buNone/>
+            </a:pPr>
+            <a:r>
+              <a:rPr lang="en-US" sz="1000" i="1" dirty="0">
+                <a:solidFill>
+                  <a:schemeClr val="tx2"/>
+                </a:solidFill>
+              </a:rPr>
+              <a:t>Fontes: Volt Robotics via Tribuna do Sertão (1/10/2026); ABSAE (2026); Canal Solar (2026). Estimativas de simulação, não economia já realizada.</a:t>
+            </a:r>
+            <a:endParaRPr lang="en-US" sz="1000" dirty="0"/>
+          </a:p>
+        </p:txBody>
+      </p:sp>
+      <p:sp>
+        <p:nvSpPr>
+          <p:cNvPr id="25" name="Slide Number Placeholder 0"/>
+          <p:cNvSpPr>
+            <a:spLocks noGrp="1"/>
+          </p:cNvSpPr>
+          <p:nvPr>
+            <p:ph type="sldNum" sz="quarter" idx="4294967295"/>
+          </p:nvPr>
+        </p:nvSpPr>
+        <p:spPr>
+          <a:xfrm>
+            <a:off x="11155680" y="6400800"/>
+            <a:ext cx="548640" cy="274320"/>
+          </a:xfrm>
+          <a:prstGeom prst="rect">
+            <a:avLst/>
+          </a:prstGeom>
+          <a:extLst>
+            <a:ext uri="{C572A759-6A51-4108-AA02-DFA0A04FC94B}">
+              <ma14:wrappingTextBoxFlag xmlns:ma14="http://schemas.microsoft.com/office/mac/drawingml/2011/main" val="0"/>
+            </a:ext>
+          </a:extLst>
+        </p:spPr>
+        <p:txBody>
+          <a:bodyPr/>
+          <a:lstStyle>
+            <a:lvl1pPr>
+              <a:defRPr sz="1100">
+                <a:solidFill>
+                  <a:schemeClr val="tx2"/>
+                </a:solidFill>
+              </a:defRPr>
+            </a:lvl1pPr>
+          </a:lstStyle>
+          <a:p>
+            <a:pPr algn="r"/>
+            <a:fld id="{F7021451-1387-4CA6-816F-3879F97B5CBC}" type="slidenum">
+              <a:rPr b="0" lang="en-US"/>
+              <a:t>18</a:t>
+            </a:fld>
+            <a:endParaRPr lang="en-US"/>
+          </a:p>
+        </p:txBody>
+      </p:sp>
+    </p:spTree>
+  </p:cSld>
+  <p:clrMapOvr>
+    <a:masterClrMapping/>
+  </p:clrMapOvr>
+</p:sld>
+</file>
+
+<file path=ppt/slides/slide19.xml><?xml version="1.0" encoding="utf-8"?>
+<p:sld xmlns:a="http://schemas.openxmlformats.org/drawingml/2006/main" xmlns:r="http://schemas.openxmlformats.org/officeDocument/2006/relationships" xmlns:p="http://schemas.openxmlformats.org/presentationml/2006/main">
+  <p:cSld name="Slide 19">
+    <p:spTree>
+      <p:nvGrpSpPr>
+        <p:cNvPr id="1" name=""/>
+        <p:cNvGrpSpPr/>
+        <p:nvPr/>
+      </p:nvGrpSpPr>
+      <p:grpSpPr>
+        <a:xfrm>
+          <a:off x="0" y="0"/>
+          <a:ext cx="0" cy="0"/>
+          <a:chOff x="0" y="0"/>
+          <a:chExt cx="0" cy="0"/>
+        </a:xfrm>
+      </p:grpSpPr>
+      <p:sp>
+        <p:nvSpPr>
+          <p:cNvPr id="2" name="Text 0"/>
+          <p:cNvSpPr/>
+          <p:nvPr>
+            <p:ph idx="100" type="title" hasCustomPrompt="1"/>
+          </p:nvPr>
+        </p:nvSpPr>
+        <p:spPr>
+          <a:xfrm>
+            <a:off x="548640" y="365760"/>
+            <a:ext cx="11094415" cy="822960"/>
+          </a:xfrm>
+          <a:prstGeom prst="rect">
+            <a:avLst/>
+          </a:prstGeom>
+          <a:noFill/>
+          <a:ln/>
+        </p:spPr>
+        <p:txBody>
+          <a:bodyPr wrap="square" lIns="0" tIns="0" rIns="0" bIns="0" rtlCol="0" anchor="ctr"/>
+          <a:lstStyle/>
+          <a:p>
+            <a:pPr algn="l" indent="0" marL="0">
+              <a:buNone/>
+            </a:pPr>
+            <a:r>
+              <a:rPr lang="en-US" sz="3200" b="1" dirty="0">
+                <a:solidFill>
+                  <a:schemeClr val="tx1"/>
+                </a:solidFill>
+              </a:rPr>
+              <a:t>Comparativo por fonte: encargo × benefício</a:t>
+            </a:r>
+            <a:endParaRPr lang="en-US" sz="3200" dirty="0"/>
+          </a:p>
+        </p:txBody>
+      </p:sp>
+      <p:graphicFrame>
+        <p:nvGraphicFramePr>
+          <p:cNvPr id="20" name="Table 0"/>
+          <p:cNvGraphicFramePr>
+            <a:graphicFrameLocks noGrp="1"/>
+          </p:cNvGraphicFramePr>
+          <p:nvPr>
+            <p:extLst>
+              <p:ext uri="{D42A27DB-BD31-4B8C-83A1-F6EECF244321}">
+                <p14:modId xmlns:p14="http://schemas.microsoft.com/office/powerpoint/2010/main" val="1579011935"/>
+              </p:ext>
+            </p:extLst>
+          </p:nvPr>
+        </p:nvGraphicFramePr>
+        <p:xfrm>
+          <a:off x="548640" y="1463040"/>
+          <a:ext cx="11094415" cy="914400"/>
+        </p:xfrm>
+        <a:graphic>
+          <a:graphicData uri="http://schemas.openxmlformats.org/drawingml/2006/table">
+            <a:tbl>
+              <a:tblPr/>
+              <a:tblGrid>
+                <a:gridCol w="1920240"/>
+                <a:gridCol w="3017520"/>
+                <a:gridCol w="3291840"/>
+                <a:gridCol w="2862072"/>
+              </a:tblGrid>
+              <a:tr h="502920">
+                <a:tc>
+                  <a:txBody>
+                    <a:bodyPr/>
+                    <a:lstStyle/>
+                    <a:p>
+                      <a:pPr indent="0" marL="0">
+                        <a:buNone/>
+                      </a:pPr>
+                      <a:r>
+                        <a:rPr lang="en-US" sz="1400" b="1" dirty="0">
+                          <a:solidFill>
+                            <a:schemeClr val="bg1"/>
+                          </a:solidFill>
+                          <a:latin typeface="Calibri" pitchFamily="34" charset="0"/>
+                          <a:ea typeface="Calibri" pitchFamily="34" charset="-122"/>
+                          <a:cs typeface="Calibri" pitchFamily="34" charset="-120"/>
+                        </a:rPr>
+                        <a:t>Fonte</a:t>
+                      </a:r>
+                      <a:endParaRPr lang="en-US" sz="1400" dirty="0">
+                        <a:latin typeface="Calibri" charset="0"/>
+                        <a:ea typeface="Calibri" charset="0"/>
+                        <a:cs typeface="Calibri" charset="0"/>
+                      </a:endParaRPr>
+                    </a:p>
+                  </a:txBody>
+                  <a:tcPr marL="137160" marR="137160" marT="45720" marB="45720" anchor="ctr">
+                    <a:lnL w="12700" cap="flat" cmpd="sng" algn="ctr">
+                      <a:solidFill>
+                        <a:srgbClr val="EEF3F8"/>
+                      </a:solidFill>
+                      <a:prstDash val="solid"/>
+                      <a:round/>
+                      <a:headEnd type="none" w="med" len="med"/>
+                      <a:tailEnd type="none" w="med" len="med"/>
+                    </a:lnL>
+                    <a:lnR w="12700" cap="flat" cmpd="sng" algn="ctr">
+                      <a:solidFill>
+                        <a:srgbClr val="EEF3F8"/>
+                      </a:solidFill>
+                      <a:prstDash val="solid"/>
+                      <a:round/>
+                      <a:headEnd type="none" w="med" len="med"/>
+                      <a:tailEnd type="none" w="med" len="med"/>
+                    </a:lnR>
+                    <a:lnT w="12700" cap="flat" cmpd="sng" algn="ctr">
+                      <a:solidFill>
+                        <a:srgbClr val="EEF3F8"/>
+                      </a:solidFill>
+                      <a:prstDash val="solid"/>
+                      <a:round/>
+                      <a:headEnd type="none" w="med" len="med"/>
+                      <a:tailEnd type="none" w="med" len="med"/>
+                    </a:lnT>
+                    <a:lnB w="12700" cap="flat" cmpd="sng" algn="ctr">
+                      <a:solidFill>
+                        <a:srgbClr val="EEF3F8"/>
+                      </a:solidFill>
+                      <a:prstDash val="solid"/>
+                      <a:round/>
+                      <a:headEnd type="none" w="med" len="med"/>
+                      <a:tailEnd type="none" w="med" len="med"/>
+                    </a:lnB>
+                    <a:solidFill>
+                      <a:schemeClr val="tx2"/>
+                    </a:solidFill>
+                  </a:tcPr>
+                </a:tc>
+                <a:tc>
+                  <a:txBody>
+                    <a:bodyPr/>
+                    <a:lstStyle/>
+                    <a:p>
+                      <a:pPr indent="0" marL="0">
+                        <a:buNone/>
+                      </a:pPr>
+                      <a:r>
+                        <a:rPr lang="en-US" sz="1400" b="1" dirty="0">
+                          <a:solidFill>
+                            <a:schemeClr val="bg1"/>
+                          </a:solidFill>
+                          <a:latin typeface="Calibri" pitchFamily="34" charset="0"/>
+                          <a:ea typeface="Calibri" pitchFamily="34" charset="-122"/>
+                          <a:cs typeface="Calibri" pitchFamily="34" charset="-120"/>
+                        </a:rPr>
+                        <a:t>Encargo (proposta em consulta)</a:t>
+                      </a:r>
+                      <a:endParaRPr lang="en-US" sz="1400" dirty="0">
+                        <a:latin typeface="Calibri" charset="0"/>
+                        <a:ea typeface="Calibri" charset="0"/>
+                        <a:cs typeface="Calibri" charset="0"/>
+                      </a:endParaRPr>
+                    </a:p>
+                  </a:txBody>
+                  <a:tcPr marL="137160" marR="137160" marT="45720" marB="45720" anchor="ctr">
+                    <a:lnL w="12700" cap="flat" cmpd="sng" algn="ctr">
+                      <a:solidFill>
+                        <a:srgbClr val="EEF3F8"/>
+                      </a:solidFill>
+                      <a:prstDash val="solid"/>
+                      <a:round/>
+                      <a:headEnd type="none" w="med" len="med"/>
+                      <a:tailEnd type="none" w="med" len="med"/>
+                    </a:lnL>
+                    <a:lnR w="12700" cap="flat" cmpd="sng" algn="ctr">
+                      <a:solidFill>
+                        <a:srgbClr val="EEF3F8"/>
+                      </a:solidFill>
+                      <a:prstDash val="solid"/>
+                      <a:round/>
+                      <a:headEnd type="none" w="med" len="med"/>
+                      <a:tailEnd type="none" w="med" len="med"/>
+                    </a:lnR>
+                    <a:lnT w="12700" cap="flat" cmpd="sng" algn="ctr">
+                      <a:solidFill>
+                        <a:srgbClr val="EEF3F8"/>
+                      </a:solidFill>
+                      <a:prstDash val="solid"/>
+                      <a:round/>
+                      <a:headEnd type="none" w="med" len="med"/>
+                      <a:tailEnd type="none" w="med" len="med"/>
+                    </a:lnT>
+                    <a:lnB w="12700" cap="flat" cmpd="sng" algn="ctr">
+                      <a:solidFill>
+                        <a:srgbClr val="EEF3F8"/>
+                      </a:solidFill>
+                      <a:prstDash val="solid"/>
+                      <a:round/>
+                      <a:headEnd type="none" w="med" len="med"/>
+                      <a:tailEnd type="none" w="med" len="med"/>
+                    </a:lnB>
+                    <a:solidFill>
+                      <a:schemeClr val="tx2"/>
+                    </a:solidFill>
+                  </a:tcPr>
+                </a:tc>
+                <a:tc>
+                  <a:txBody>
+                    <a:bodyPr/>
+                    <a:lstStyle/>
+                    <a:p>
+                      <a:pPr indent="0" marL="0">
+                        <a:buNone/>
+                      </a:pPr>
+                      <a:r>
+                        <a:rPr lang="en-US" sz="1400" b="1" dirty="0">
+                          <a:solidFill>
+                            <a:schemeClr val="bg1"/>
+                          </a:solidFill>
+                          <a:latin typeface="Calibri" pitchFamily="34" charset="0"/>
+                          <a:ea typeface="Calibri" pitchFamily="34" charset="-122"/>
+                          <a:cs typeface="Calibri" pitchFamily="34" charset="-120"/>
+                        </a:rPr>
+                        <a:t>Benefício esperado com baterias</a:t>
+                      </a:r>
+                      <a:endParaRPr lang="en-US" sz="1400" dirty="0">
+                        <a:latin typeface="Calibri" charset="0"/>
+                        <a:ea typeface="Calibri" charset="0"/>
+                        <a:cs typeface="Calibri" charset="0"/>
+                      </a:endParaRPr>
+                    </a:p>
+                  </a:txBody>
+                  <a:tcPr marL="137160" marR="137160" marT="45720" marB="45720" anchor="ctr">
+                    <a:lnL w="12700" cap="flat" cmpd="sng" algn="ctr">
+                      <a:solidFill>
+                        <a:srgbClr val="EEF3F8"/>
+                      </a:solidFill>
+                      <a:prstDash val="solid"/>
+                      <a:round/>
+                      <a:headEnd type="none" w="med" len="med"/>
+                      <a:tailEnd type="none" w="med" len="med"/>
+                    </a:lnL>
+                    <a:lnR w="12700" cap="flat" cmpd="sng" algn="ctr">
+                      <a:solidFill>
+                        <a:srgbClr val="EEF3F8"/>
+                      </a:solidFill>
+                      <a:prstDash val="solid"/>
+                      <a:round/>
+                      <a:headEnd type="none" w="med" len="med"/>
+                      <a:tailEnd type="none" w="med" len="med"/>
+                    </a:lnR>
+                    <a:lnT w="12700" cap="flat" cmpd="sng" algn="ctr">
+                      <a:solidFill>
+                        <a:srgbClr val="EEF3F8"/>
+                      </a:solidFill>
+                      <a:prstDash val="solid"/>
+                      <a:round/>
+                      <a:headEnd type="none" w="med" len="med"/>
+                      <a:tailEnd type="none" w="med" len="med"/>
+                    </a:lnT>
+                    <a:lnB w="12700" cap="flat" cmpd="sng" algn="ctr">
+                      <a:solidFill>
+                        <a:srgbClr val="EEF3F8"/>
+                      </a:solidFill>
+                      <a:prstDash val="solid"/>
+                      <a:round/>
+                      <a:headEnd type="none" w="med" len="med"/>
+                      <a:tailEnd type="none" w="med" len="med"/>
+                    </a:lnB>
+                    <a:solidFill>
+                      <a:schemeClr val="tx2"/>
+                    </a:solidFill>
+                  </a:tcPr>
+                </a:tc>
+                <a:tc>
+                  <a:txBody>
+                    <a:bodyPr/>
+                    <a:lstStyle/>
+                    <a:p>
+                      <a:pPr indent="0" marL="0">
+                        <a:buNone/>
+                      </a:pPr>
+                      <a:r>
+                        <a:rPr lang="en-US" sz="1400" b="1" dirty="0">
+                          <a:solidFill>
+                            <a:schemeClr val="bg1"/>
+                          </a:solidFill>
+                          <a:latin typeface="Calibri" pitchFamily="34" charset="0"/>
+                          <a:ea typeface="Calibri" pitchFamily="34" charset="-122"/>
+                          <a:cs typeface="Calibri" pitchFamily="34" charset="-120"/>
+                        </a:rPr>
+                        <a:t>Saldo (hipótese a testar)</a:t>
+                      </a:r>
+                      <a:endParaRPr lang="en-US" sz="1400" dirty="0">
+                        <a:latin typeface="Calibri" charset="0"/>
+                        <a:ea typeface="Calibri" charset="0"/>
+                        <a:cs typeface="Calibri" charset="0"/>
+                      </a:endParaRPr>
+                    </a:p>
+                  </a:txBody>
+                  <a:tcPr marL="137160" marR="137160" marT="45720" marB="45720" anchor="ctr">
+                    <a:lnL w="12700" cap="flat" cmpd="sng" algn="ctr">
+                      <a:solidFill>
+                        <a:srgbClr val="EEF3F8"/>
+                      </a:solidFill>
+                      <a:prstDash val="solid"/>
+                      <a:round/>
+                      <a:headEnd type="none" w="med" len="med"/>
+                      <a:tailEnd type="none" w="med" len="med"/>
+                    </a:lnL>
+                    <a:lnR w="12700" cap="flat" cmpd="sng" algn="ctr">
+                      <a:solidFill>
+                        <a:srgbClr val="EEF3F8"/>
+                      </a:solidFill>
+                      <a:prstDash val="solid"/>
+                      <a:round/>
+                      <a:headEnd type="none" w="med" len="med"/>
+                      <a:tailEnd type="none" w="med" len="med"/>
+                    </a:lnR>
+                    <a:lnT w="12700" cap="flat" cmpd="sng" algn="ctr">
+                      <a:solidFill>
+                        <a:srgbClr val="EEF3F8"/>
+                      </a:solidFill>
+                      <a:prstDash val="solid"/>
+                      <a:round/>
+                      <a:headEnd type="none" w="med" len="med"/>
+                      <a:tailEnd type="none" w="med" len="med"/>
+                    </a:lnT>
+                    <a:lnB w="12700" cap="flat" cmpd="sng" algn="ctr">
+                      <a:solidFill>
+                        <a:srgbClr val="EEF3F8"/>
+                      </a:solidFill>
+                      <a:prstDash val="solid"/>
+                      <a:round/>
+                      <a:headEnd type="none" w="med" len="med"/>
+                      <a:tailEnd type="none" w="med" len="med"/>
+                    </a:lnB>
+                    <a:solidFill>
+                      <a:schemeClr val="tx2"/>
+                    </a:solidFill>
+                  </a:tcPr>
+                </a:tc>
+              </a:tr>
+              <a:tr h="777240">
+                <a:tc>
+                  <a:txBody>
+                    <a:bodyPr/>
+                    <a:lstStyle/>
+                    <a:p>
+                      <a:pPr indent="0" marL="0">
+                        <a:buNone/>
+                      </a:pPr>
+                      <a:r>
+                        <a:rPr lang="en-US" sz="1400" b="1" dirty="0">
+                          <a:solidFill>
+                            <a:schemeClr val="tx1"/>
+                          </a:solidFill>
+                          <a:latin typeface="Calibri" pitchFamily="34" charset="0"/>
+                          <a:ea typeface="Calibri" pitchFamily="34" charset="-122"/>
+                          <a:cs typeface="Calibri" pitchFamily="34" charset="-120"/>
+                        </a:rPr>
+                        <a:t>Eólicas e UFVs</a:t>
+                      </a:r>
+                      <a:endParaRPr lang="en-US" sz="1400" dirty="0">
+                        <a:latin typeface="Calibri" charset="0"/>
+                        <a:ea typeface="Calibri" charset="0"/>
+                        <a:cs typeface="Calibri" charset="0"/>
+                      </a:endParaRPr>
+                    </a:p>
+                  </a:txBody>
+                  <a:tcPr marL="137160" marR="137160" marT="45720" marB="45720" anchor="ctr">
+                    <a:lnL w="12700" cap="flat" cmpd="sng" algn="ctr">
+                      <a:solidFill>
+                        <a:srgbClr val="EEF3F8"/>
+                      </a:solidFill>
+                      <a:prstDash val="solid"/>
+                      <a:round/>
+                      <a:headEnd type="none" w="med" len="med"/>
+                      <a:tailEnd type="none" w="med" len="med"/>
+                    </a:lnL>
+                    <a:lnR w="12700" cap="flat" cmpd="sng" algn="ctr">
+                      <a:solidFill>
+                        <a:srgbClr val="EEF3F8"/>
+                      </a:solidFill>
+                      <a:prstDash val="solid"/>
+                      <a:round/>
+                      <a:headEnd type="none" w="med" len="med"/>
+                      <a:tailEnd type="none" w="med" len="med"/>
+                    </a:lnR>
+                    <a:lnT w="12700" cap="flat" cmpd="sng" algn="ctr">
+                      <a:solidFill>
+                        <a:srgbClr val="EEF3F8"/>
+                      </a:solidFill>
+                      <a:prstDash val="solid"/>
+                      <a:round/>
+                      <a:headEnd type="none" w="med" len="med"/>
+                      <a:tailEnd type="none" w="med" len="med"/>
+                    </a:lnT>
+                    <a:lnB w="12700" cap="flat" cmpd="sng" algn="ctr">
+                      <a:solidFill>
+                        <a:srgbClr val="EEF3F8"/>
+                      </a:solidFill>
+                      <a:prstDash val="solid"/>
+                      <a:round/>
+                      <a:headEnd type="none" w="med" len="med"/>
+                      <a:tailEnd type="none" w="med" len="med"/>
+                    </a:lnB>
+                    <a:solidFill>
+                      <a:schemeClr val="bg1"/>
+                    </a:solidFill>
+                  </a:tcPr>
+                </a:tc>
+                <a:tc>
+                  <a:txBody>
+                    <a:bodyPr/>
+                    <a:lstStyle/>
+                    <a:p>
+                      <a:pPr indent="0" marL="0">
+                        <a:buNone/>
+                      </a:pPr>
+                      <a:r>
+                        <a:rPr lang="en-US" sz="1400" dirty="0">
+                          <a:solidFill>
+                            <a:schemeClr val="tx1"/>
+                          </a:solidFill>
+                          <a:latin typeface="Calibri" pitchFamily="34" charset="0"/>
+                          <a:ea typeface="Calibri" pitchFamily="34" charset="-122"/>
+                          <a:cs typeface="Calibri" pitchFamily="34" charset="-120"/>
+                        </a:rPr>
+                        <a:t>100%, por serem intermitentes</a:t>
+                      </a:r>
+                      <a:endParaRPr lang="en-US" sz="1400" dirty="0">
+                        <a:latin typeface="Calibri" charset="0"/>
+                        <a:ea typeface="Calibri" charset="0"/>
+                        <a:cs typeface="Calibri" charset="0"/>
+                      </a:endParaRPr>
+                    </a:p>
+                  </a:txBody>
+                  <a:tcPr marL="137160" marR="137160" marT="45720" marB="45720" anchor="ctr">
+                    <a:lnL w="12700" cap="flat" cmpd="sng" algn="ctr">
+                      <a:solidFill>
+                        <a:srgbClr val="EEF3F8"/>
+                      </a:solidFill>
+                      <a:prstDash val="solid"/>
+                      <a:round/>
+                      <a:headEnd type="none" w="med" len="med"/>
+                      <a:tailEnd type="none" w="med" len="med"/>
+                    </a:lnL>
+                    <a:lnR w="12700" cap="flat" cmpd="sng" algn="ctr">
+                      <a:solidFill>
+                        <a:srgbClr val="EEF3F8"/>
+                      </a:solidFill>
+                      <a:prstDash val="solid"/>
+                      <a:round/>
+                      <a:headEnd type="none" w="med" len="med"/>
+                      <a:tailEnd type="none" w="med" len="med"/>
+                    </a:lnR>
+                    <a:lnT w="12700" cap="flat" cmpd="sng" algn="ctr">
+                      <a:solidFill>
+                        <a:srgbClr val="EEF3F8"/>
+                      </a:solidFill>
+                      <a:prstDash val="solid"/>
+                      <a:round/>
+                      <a:headEnd type="none" w="med" len="med"/>
+                      <a:tailEnd type="none" w="med" len="med"/>
+                    </a:lnT>
+                    <a:lnB w="12700" cap="flat" cmpd="sng" algn="ctr">
+                      <a:solidFill>
+                        <a:srgbClr val="EEF3F8"/>
+                      </a:solidFill>
+                      <a:prstDash val="solid"/>
+                      <a:round/>
+                      <a:headEnd type="none" w="med" len="med"/>
+                      <a:tailEnd type="none" w="med" len="med"/>
+                    </a:lnB>
+                    <a:solidFill>
+                      <a:schemeClr val="bg1"/>
+                    </a:solidFill>
+                  </a:tcPr>
+                </a:tc>
+                <a:tc>
+                  <a:txBody>
+                    <a:bodyPr/>
+                    <a:lstStyle/>
+                    <a:p>
+                      <a:pPr indent="0" marL="0">
+                        <a:buNone/>
+                      </a:pPr>
+                      <a:r>
+                        <a:rPr lang="en-US" sz="1400" dirty="0">
+                          <a:solidFill>
+                            <a:schemeClr val="tx1"/>
+                          </a:solidFill>
+                          <a:latin typeface="Calibri" pitchFamily="34" charset="0"/>
+                          <a:ea typeface="Calibri" pitchFamily="34" charset="-122"/>
+                          <a:cs typeface="Calibri" pitchFamily="34" charset="-120"/>
+                        </a:rPr>
+                        <a:t>Menos curtailment: mais energia vendida</a:t>
+                      </a:r>
+                      <a:endParaRPr lang="en-US" sz="1400" dirty="0">
+                        <a:latin typeface="Calibri" charset="0"/>
+                        <a:ea typeface="Calibri" charset="0"/>
+                        <a:cs typeface="Calibri" charset="0"/>
+                      </a:endParaRPr>
+                    </a:p>
+                  </a:txBody>
+                  <a:tcPr marL="137160" marR="137160" marT="45720" marB="45720" anchor="ctr">
+                    <a:lnL w="12700" cap="flat" cmpd="sng" algn="ctr">
+                      <a:solidFill>
+                        <a:srgbClr val="EEF3F8"/>
+                      </a:solidFill>
+                      <a:prstDash val="solid"/>
+                      <a:round/>
+                      <a:headEnd type="none" w="med" len="med"/>
+                      <a:tailEnd type="none" w="med" len="med"/>
+                    </a:lnL>
+                    <a:lnR w="12700" cap="flat" cmpd="sng" algn="ctr">
+                      <a:solidFill>
+                        <a:srgbClr val="EEF3F8"/>
+                      </a:solidFill>
+                      <a:prstDash val="solid"/>
+                      <a:round/>
+                      <a:headEnd type="none" w="med" len="med"/>
+                      <a:tailEnd type="none" w="med" len="med"/>
+                    </a:lnR>
+                    <a:lnT w="12700" cap="flat" cmpd="sng" algn="ctr">
+                      <a:solidFill>
+                        <a:srgbClr val="EEF3F8"/>
+                      </a:solidFill>
+                      <a:prstDash val="solid"/>
+                      <a:round/>
+                      <a:headEnd type="none" w="med" len="med"/>
+                      <a:tailEnd type="none" w="med" len="med"/>
+                    </a:lnT>
+                    <a:lnB w="12700" cap="flat" cmpd="sng" algn="ctr">
+                      <a:solidFill>
+                        <a:srgbClr val="EEF3F8"/>
+                      </a:solidFill>
+                      <a:prstDash val="solid"/>
+                      <a:round/>
+                      <a:headEnd type="none" w="med" len="med"/>
+                      <a:tailEnd type="none" w="med" len="med"/>
+                    </a:lnB>
+                    <a:solidFill>
+                      <a:schemeClr val="bg1"/>
+                    </a:solidFill>
+                  </a:tcPr>
+                </a:tc>
+                <a:tc>
+                  <a:txBody>
+                    <a:bodyPr/>
+                    <a:lstStyle/>
+                    <a:p>
+                      <a:pPr indent="0" marL="0">
+                        <a:buNone/>
+                      </a:pPr>
+                      <a:r>
+                        <a:rPr lang="en-US" sz="1400" dirty="0">
+                          <a:solidFill>
+                            <a:schemeClr val="tx1"/>
+                          </a:solidFill>
+                          <a:latin typeface="Calibri" pitchFamily="34" charset="0"/>
+                          <a:ea typeface="Calibri" pitchFamily="34" charset="-122"/>
+                          <a:cs typeface="Calibri" pitchFamily="34" charset="-120"/>
+                        </a:rPr>
+                        <a:t>Depende do corte evitado</a:t>
+                      </a:r>
+                      <a:endParaRPr lang="en-US" sz="1400" dirty="0">
+                        <a:latin typeface="Calibri" charset="0"/>
+                        <a:ea typeface="Calibri" charset="0"/>
+                        <a:cs typeface="Calibri" charset="0"/>
+                      </a:endParaRPr>
+                    </a:p>
+                  </a:txBody>
+                  <a:tcPr marL="137160" marR="137160" marT="45720" marB="45720" anchor="ctr">
+                    <a:lnL w="12700" cap="flat" cmpd="sng" algn="ctr">
+                      <a:solidFill>
+                        <a:srgbClr val="EEF3F8"/>
+                      </a:solidFill>
+                      <a:prstDash val="solid"/>
+                      <a:round/>
+                      <a:headEnd type="none" w="med" len="med"/>
+                      <a:tailEnd type="none" w="med" len="med"/>
+                    </a:lnL>
+                    <a:lnR w="12700" cap="flat" cmpd="sng" algn="ctr">
+                      <a:solidFill>
+                        <a:srgbClr val="EEF3F8"/>
+                      </a:solidFill>
+                      <a:prstDash val="solid"/>
+                      <a:round/>
+                      <a:headEnd type="none" w="med" len="med"/>
+                      <a:tailEnd type="none" w="med" len="med"/>
+                    </a:lnR>
+                    <a:lnT w="12700" cap="flat" cmpd="sng" algn="ctr">
+                      <a:solidFill>
+                        <a:srgbClr val="EEF3F8"/>
+                      </a:solidFill>
+                      <a:prstDash val="solid"/>
+                      <a:round/>
+                      <a:headEnd type="none" w="med" len="med"/>
+                      <a:tailEnd type="none" w="med" len="med"/>
+                    </a:lnT>
+                    <a:lnB w="12700" cap="flat" cmpd="sng" algn="ctr">
+                      <a:solidFill>
+                        <a:srgbClr val="EEF3F8"/>
+                      </a:solidFill>
+                      <a:prstDash val="solid"/>
+                      <a:round/>
+                      <a:headEnd type="none" w="med" len="med"/>
+                      <a:tailEnd type="none" w="med" len="med"/>
+                    </a:lnB>
+                    <a:solidFill>
+                      <a:schemeClr val="bg1"/>
+                    </a:solidFill>
+                  </a:tcPr>
+                </a:tc>
+              </a:tr>
+              <a:tr h="777240">
+                <a:tc>
+                  <a:txBody>
+                    <a:bodyPr/>
+                    <a:lstStyle/>
+                    <a:p>
+                      <a:pPr indent="0" marL="0">
+                        <a:buNone/>
+                      </a:pPr>
+                      <a:r>
+                        <a:rPr lang="en-US" sz="1400" b="1" dirty="0">
+                          <a:solidFill>
+                            <a:schemeClr val="tx1"/>
+                          </a:solidFill>
+                          <a:latin typeface="Calibri" pitchFamily="34" charset="0"/>
+                          <a:ea typeface="Calibri" pitchFamily="34" charset="-122"/>
+                          <a:cs typeface="Calibri" pitchFamily="34" charset="-120"/>
+                        </a:rPr>
+                        <a:t>Termelétricas</a:t>
+                      </a:r>
+                      <a:endParaRPr lang="en-US" sz="1400" dirty="0">
+                        <a:latin typeface="Calibri" charset="0"/>
+                        <a:ea typeface="Calibri" charset="0"/>
+                        <a:cs typeface="Calibri" charset="0"/>
+                      </a:endParaRPr>
+                    </a:p>
+                  </a:txBody>
+                  <a:tcPr marL="137160" marR="137160" marT="45720" marB="45720" anchor="ctr">
+                    <a:lnL w="12700" cap="flat" cmpd="sng" algn="ctr">
+                      <a:solidFill>
+                        <a:srgbClr val="EEF3F8"/>
+                      </a:solidFill>
+                      <a:prstDash val="solid"/>
+                      <a:round/>
+                      <a:headEnd type="none" w="med" len="med"/>
+                      <a:tailEnd type="none" w="med" len="med"/>
+                    </a:lnL>
+                    <a:lnR w="12700" cap="flat" cmpd="sng" algn="ctr">
+                      <a:solidFill>
+                        <a:srgbClr val="EEF3F8"/>
+                      </a:solidFill>
+                      <a:prstDash val="solid"/>
+                      <a:round/>
+                      <a:headEnd type="none" w="med" len="med"/>
+                      <a:tailEnd type="none" w="med" len="med"/>
+                    </a:lnR>
+                    <a:lnT w="12700" cap="flat" cmpd="sng" algn="ctr">
+                      <a:solidFill>
+                        <a:srgbClr val="EEF3F8"/>
+                      </a:solidFill>
+                      <a:prstDash val="solid"/>
+                      <a:round/>
+                      <a:headEnd type="none" w="med" len="med"/>
+                      <a:tailEnd type="none" w="med" len="med"/>
+                    </a:lnT>
+                    <a:lnB w="12700" cap="flat" cmpd="sng" algn="ctr">
+                      <a:solidFill>
+                        <a:srgbClr val="EEF3F8"/>
+                      </a:solidFill>
+                      <a:prstDash val="solid"/>
+                      <a:round/>
+                      <a:headEnd type="none" w="med" len="med"/>
+                      <a:tailEnd type="none" w="med" len="med"/>
+                    </a:lnB>
+                    <a:solidFill>
+                      <a:schemeClr val="bg1"/>
+                    </a:solidFill>
+                  </a:tcPr>
+                </a:tc>
+                <a:tc>
+                  <a:txBody>
+                    <a:bodyPr/>
+                    <a:lstStyle/>
+                    <a:p>
+                      <a:pPr indent="0" marL="0">
+                        <a:buNone/>
+                      </a:pPr>
+                      <a:r>
+                        <a:rPr lang="en-US" sz="1400" dirty="0">
+                          <a:solidFill>
+                            <a:schemeClr val="tx1"/>
+                          </a:solidFill>
+                          <a:latin typeface="Calibri" pitchFamily="34" charset="0"/>
+                          <a:ea typeface="Calibri" pitchFamily="34" charset="-122"/>
+                          <a:cs typeface="Calibri" pitchFamily="34" charset="-120"/>
+                        </a:rPr>
+                        <a:t>De 100% a 25%, conforme a flexibilidade</a:t>
+                      </a:r>
+                      <a:endParaRPr lang="en-US" sz="1400" dirty="0">
+                        <a:latin typeface="Calibri" charset="0"/>
+                        <a:ea typeface="Calibri" charset="0"/>
+                        <a:cs typeface="Calibri" charset="0"/>
+                      </a:endParaRPr>
+                    </a:p>
+                  </a:txBody>
+                  <a:tcPr marL="137160" marR="137160" marT="45720" marB="45720" anchor="ctr">
+                    <a:lnL w="12700" cap="flat" cmpd="sng" algn="ctr">
+                      <a:solidFill>
+                        <a:srgbClr val="EEF3F8"/>
+                      </a:solidFill>
+                      <a:prstDash val="solid"/>
+                      <a:round/>
+                      <a:headEnd type="none" w="med" len="med"/>
+                      <a:tailEnd type="none" w="med" len="med"/>
+                    </a:lnL>
+                    <a:lnR w="12700" cap="flat" cmpd="sng" algn="ctr">
+                      <a:solidFill>
+                        <a:srgbClr val="EEF3F8"/>
+                      </a:solidFill>
+                      <a:prstDash val="solid"/>
+                      <a:round/>
+                      <a:headEnd type="none" w="med" len="med"/>
+                      <a:tailEnd type="none" w="med" len="med"/>
+                    </a:lnR>
+                    <a:lnT w="12700" cap="flat" cmpd="sng" algn="ctr">
+                      <a:solidFill>
+                        <a:srgbClr val="EEF3F8"/>
+                      </a:solidFill>
+                      <a:prstDash val="solid"/>
+                      <a:round/>
+                      <a:headEnd type="none" w="med" len="med"/>
+                      <a:tailEnd type="none" w="med" len="med"/>
+                    </a:lnT>
+                    <a:lnB w="12700" cap="flat" cmpd="sng" algn="ctr">
+                      <a:solidFill>
+                        <a:srgbClr val="EEF3F8"/>
+                      </a:solidFill>
+                      <a:prstDash val="solid"/>
+                      <a:round/>
+                      <a:headEnd type="none" w="med" len="med"/>
+                      <a:tailEnd type="none" w="med" len="med"/>
+                    </a:lnB>
+                    <a:solidFill>
+                      <a:schemeClr val="bg1"/>
+                    </a:solidFill>
+                  </a:tcPr>
+                </a:tc>
+                <a:tc>
+                  <a:txBody>
+                    <a:bodyPr/>
+                    <a:lstStyle/>
+                    <a:p>
+                      <a:pPr indent="0" marL="0">
+                        <a:buNone/>
+                      </a:pPr>
+                      <a:r>
+                        <a:rPr lang="en-US" sz="1400" dirty="0">
+                          <a:solidFill>
+                            <a:schemeClr val="tx1"/>
+                          </a:solidFill>
+                          <a:latin typeface="Calibri" pitchFamily="34" charset="0"/>
+                          <a:ea typeface="Calibri" pitchFamily="34" charset="-122"/>
+                          <a:cs typeface="Calibri" pitchFamily="34" charset="-120"/>
+                        </a:rPr>
+                        <a:t>Menos acionamento na rampa do fim da tarde</a:t>
+                      </a:r>
+                      <a:endParaRPr lang="en-US" sz="1400" dirty="0">
+                        <a:latin typeface="Calibri" charset="0"/>
+                        <a:ea typeface="Calibri" charset="0"/>
+                        <a:cs typeface="Calibri" charset="0"/>
+                      </a:endParaRPr>
+                    </a:p>
+                  </a:txBody>
+                  <a:tcPr marL="137160" marR="137160" marT="45720" marB="45720" anchor="ctr">
+                    <a:lnL w="12700" cap="flat" cmpd="sng" algn="ctr">
+                      <a:solidFill>
+                        <a:srgbClr val="EEF3F8"/>
+                      </a:solidFill>
+                      <a:prstDash val="solid"/>
+                      <a:round/>
+                      <a:headEnd type="none" w="med" len="med"/>
+                      <a:tailEnd type="none" w="med" len="med"/>
+                    </a:lnL>
+                    <a:lnR w="12700" cap="flat" cmpd="sng" algn="ctr">
+                      <a:solidFill>
+                        <a:srgbClr val="EEF3F8"/>
+                      </a:solidFill>
+                      <a:prstDash val="solid"/>
+                      <a:round/>
+                      <a:headEnd type="none" w="med" len="med"/>
+                      <a:tailEnd type="none" w="med" len="med"/>
+                    </a:lnR>
+                    <a:lnT w="12700" cap="flat" cmpd="sng" algn="ctr">
+                      <a:solidFill>
+                        <a:srgbClr val="EEF3F8"/>
+                      </a:solidFill>
+                      <a:prstDash val="solid"/>
+                      <a:round/>
+                      <a:headEnd type="none" w="med" len="med"/>
+                      <a:tailEnd type="none" w="med" len="med"/>
+                    </a:lnT>
+                    <a:lnB w="12700" cap="flat" cmpd="sng" algn="ctr">
+                      <a:solidFill>
+                        <a:srgbClr val="EEF3F8"/>
+                      </a:solidFill>
+                      <a:prstDash val="solid"/>
+                      <a:round/>
+                      <a:headEnd type="none" w="med" len="med"/>
+                      <a:tailEnd type="none" w="med" len="med"/>
+                    </a:lnB>
+                    <a:solidFill>
+                      <a:schemeClr val="bg1"/>
+                    </a:solidFill>
+                  </a:tcPr>
+                </a:tc>
+                <a:tc>
+                  <a:txBody>
+                    <a:bodyPr/>
+                    <a:lstStyle/>
+                    <a:p>
+                      <a:pPr indent="0" marL="0">
+                        <a:buNone/>
+                      </a:pPr>
+                      <a:r>
+                        <a:rPr lang="en-US" sz="1400" dirty="0">
+                          <a:solidFill>
+                            <a:schemeClr val="tx1"/>
+                          </a:solidFill>
+                          <a:latin typeface="Calibri" pitchFamily="34" charset="0"/>
+                          <a:ea typeface="Calibri" pitchFamily="34" charset="-122"/>
+                          <a:cs typeface="Calibri" pitchFamily="34" charset="-120"/>
+                        </a:rPr>
+                        <a:t>Tende a ser negativo: perdem despacho</a:t>
+                      </a:r>
+                      <a:endParaRPr lang="en-US" sz="1400" dirty="0">
+                        <a:latin typeface="Calibri" charset="0"/>
+                        <a:ea typeface="Calibri" charset="0"/>
+                        <a:cs typeface="Calibri" charset="0"/>
+                      </a:endParaRPr>
+                    </a:p>
+                  </a:txBody>
+                  <a:tcPr marL="137160" marR="137160" marT="45720" marB="45720" anchor="ctr">
+                    <a:lnL w="12700" cap="flat" cmpd="sng" algn="ctr">
+                      <a:solidFill>
+                        <a:srgbClr val="EEF3F8"/>
+                      </a:solidFill>
+                      <a:prstDash val="solid"/>
+                      <a:round/>
+                      <a:headEnd type="none" w="med" len="med"/>
+                      <a:tailEnd type="none" w="med" len="med"/>
+                    </a:lnL>
+                    <a:lnR w="12700" cap="flat" cmpd="sng" algn="ctr">
+                      <a:solidFill>
+                        <a:srgbClr val="EEF3F8"/>
+                      </a:solidFill>
+                      <a:prstDash val="solid"/>
+                      <a:round/>
+                      <a:headEnd type="none" w="med" len="med"/>
+                      <a:tailEnd type="none" w="med" len="med"/>
+                    </a:lnR>
+                    <a:lnT w="12700" cap="flat" cmpd="sng" algn="ctr">
+                      <a:solidFill>
+                        <a:srgbClr val="EEF3F8"/>
+                      </a:solidFill>
+                      <a:prstDash val="solid"/>
+                      <a:round/>
+                      <a:headEnd type="none" w="med" len="med"/>
+                      <a:tailEnd type="none" w="med" len="med"/>
+                    </a:lnT>
+                    <a:lnB w="12700" cap="flat" cmpd="sng" algn="ctr">
+                      <a:solidFill>
+                        <a:srgbClr val="EEF3F8"/>
+                      </a:solidFill>
+                      <a:prstDash val="solid"/>
+                      <a:round/>
+                      <a:headEnd type="none" w="med" len="med"/>
+                      <a:tailEnd type="none" w="med" len="med"/>
+                    </a:lnB>
+                    <a:solidFill>
+                      <a:schemeClr val="bg1"/>
+                    </a:solidFill>
+                  </a:tcPr>
+                </a:tc>
+              </a:tr>
+              <a:tr h="777240">
+                <a:tc>
+                  <a:txBody>
+                    <a:bodyPr/>
+                    <a:lstStyle/>
+                    <a:p>
+                      <a:pPr indent="0" marL="0">
+                        <a:buNone/>
+                      </a:pPr>
+                      <a:r>
+                        <a:rPr lang="en-US" sz="1400" b="1" dirty="0">
+                          <a:solidFill>
+                            <a:schemeClr val="tx1"/>
+                          </a:solidFill>
+                          <a:latin typeface="Calibri" pitchFamily="34" charset="0"/>
+                          <a:ea typeface="Calibri" pitchFamily="34" charset="-122"/>
+                          <a:cs typeface="Calibri" pitchFamily="34" charset="-120"/>
+                        </a:rPr>
+                        <a:t>Hidrelétricas</a:t>
+                      </a:r>
+                      <a:endParaRPr lang="en-US" sz="1400" dirty="0">
+                        <a:latin typeface="Calibri" charset="0"/>
+                        <a:ea typeface="Calibri" charset="0"/>
+                        <a:cs typeface="Calibri" charset="0"/>
+                      </a:endParaRPr>
+                    </a:p>
+                  </a:txBody>
+                  <a:tcPr marL="137160" marR="137160" marT="45720" marB="45720" anchor="ctr">
+                    <a:lnL w="12700" cap="flat" cmpd="sng" algn="ctr">
+                      <a:solidFill>
+                        <a:srgbClr val="EEF3F8"/>
+                      </a:solidFill>
+                      <a:prstDash val="solid"/>
+                      <a:round/>
+                      <a:headEnd type="none" w="med" len="med"/>
+                      <a:tailEnd type="none" w="med" len="med"/>
+                    </a:lnL>
+                    <a:lnR w="12700" cap="flat" cmpd="sng" algn="ctr">
+                      <a:solidFill>
+                        <a:srgbClr val="EEF3F8"/>
+                      </a:solidFill>
+                      <a:prstDash val="solid"/>
+                      <a:round/>
+                      <a:headEnd type="none" w="med" len="med"/>
+                      <a:tailEnd type="none" w="med" len="med"/>
+                    </a:lnR>
+                    <a:lnT w="12700" cap="flat" cmpd="sng" algn="ctr">
+                      <a:solidFill>
+                        <a:srgbClr val="EEF3F8"/>
+                      </a:solidFill>
+                      <a:prstDash val="solid"/>
+                      <a:round/>
+                      <a:headEnd type="none" w="med" len="med"/>
+                      <a:tailEnd type="none" w="med" len="med"/>
+                    </a:lnT>
+                    <a:lnB w="12700" cap="flat" cmpd="sng" algn="ctr">
+                      <a:solidFill>
+                        <a:srgbClr val="EEF3F8"/>
+                      </a:solidFill>
+                      <a:prstDash val="solid"/>
+                      <a:round/>
+                      <a:headEnd type="none" w="med" len="med"/>
+                      <a:tailEnd type="none" w="med" len="med"/>
+                    </a:lnB>
+                    <a:solidFill>
+                      <a:schemeClr val="bg1"/>
+                    </a:solidFill>
+                  </a:tcPr>
+                </a:tc>
+                <a:tc>
+                  <a:txBody>
+                    <a:bodyPr/>
+                    <a:lstStyle/>
+                    <a:p>
+                      <a:pPr indent="0" marL="0">
+                        <a:buNone/>
+                      </a:pPr>
+                      <a:r>
+                        <a:rPr lang="en-US" sz="1400" dirty="0">
+                          <a:solidFill>
+                            <a:schemeClr val="tx1"/>
+                          </a:solidFill>
+                          <a:latin typeface="Calibri" pitchFamily="34" charset="0"/>
+                          <a:ea typeface="Calibri" pitchFamily="34" charset="-122"/>
+                          <a:cs typeface="Calibri" pitchFamily="34" charset="-120"/>
+                        </a:rPr>
+                        <a:t>Menor patamar (25%)</a:t>
+                      </a:r>
+                      <a:endParaRPr lang="en-US" sz="1400" dirty="0">
+                        <a:latin typeface="Calibri" charset="0"/>
+                        <a:ea typeface="Calibri" charset="0"/>
+                        <a:cs typeface="Calibri" charset="0"/>
+                      </a:endParaRPr>
+                    </a:p>
+                  </a:txBody>
+                  <a:tcPr marL="137160" marR="137160" marT="45720" marB="45720" anchor="ctr">
+                    <a:lnL w="12700" cap="flat" cmpd="sng" algn="ctr">
+                      <a:solidFill>
+                        <a:srgbClr val="EEF3F8"/>
+                      </a:solidFill>
+                      <a:prstDash val="solid"/>
+                      <a:round/>
+                      <a:headEnd type="none" w="med" len="med"/>
+                      <a:tailEnd type="none" w="med" len="med"/>
+                    </a:lnL>
+                    <a:lnR w="12700" cap="flat" cmpd="sng" algn="ctr">
+                      <a:solidFill>
+                        <a:srgbClr val="EEF3F8"/>
+                      </a:solidFill>
+                      <a:prstDash val="solid"/>
+                      <a:round/>
+                      <a:headEnd type="none" w="med" len="med"/>
+                      <a:tailEnd type="none" w="med" len="med"/>
+                    </a:lnR>
+                    <a:lnT w="12700" cap="flat" cmpd="sng" algn="ctr">
+                      <a:solidFill>
+                        <a:srgbClr val="EEF3F8"/>
+                      </a:solidFill>
+                      <a:prstDash val="solid"/>
+                      <a:round/>
+                      <a:headEnd type="none" w="med" len="med"/>
+                      <a:tailEnd type="none" w="med" len="med"/>
+                    </a:lnT>
+                    <a:lnB w="12700" cap="flat" cmpd="sng" algn="ctr">
+                      <a:solidFill>
+                        <a:srgbClr val="EEF3F8"/>
+                      </a:solidFill>
+                      <a:prstDash val="solid"/>
+                      <a:round/>
+                      <a:headEnd type="none" w="med" len="med"/>
+                      <a:tailEnd type="none" w="med" len="med"/>
+                    </a:lnB>
+                    <a:solidFill>
+                      <a:schemeClr val="bg1"/>
+                    </a:solidFill>
+                  </a:tcPr>
+                </a:tc>
+                <a:tc>
+                  <a:txBody>
+                    <a:bodyPr/>
+                    <a:lstStyle/>
+                    <a:p>
+                      <a:pPr indent="0" marL="0">
+                        <a:buNone/>
+                      </a:pPr>
+                      <a:r>
+                        <a:rPr lang="en-US" sz="1400" dirty="0">
+                          <a:solidFill>
+                            <a:schemeClr val="tx1"/>
+                          </a:solidFill>
+                          <a:latin typeface="Calibri" pitchFamily="34" charset="0"/>
+                          <a:ea typeface="Calibri" pitchFamily="34" charset="-122"/>
+                          <a:cs typeface="Calibri" pitchFamily="34" charset="-120"/>
+                        </a:rPr>
+                        <a:t>Menor risco hidrológico e mais água armazenada</a:t>
+                      </a:r>
+                      <a:endParaRPr lang="en-US" sz="1400" dirty="0">
+                        <a:latin typeface="Calibri" charset="0"/>
+                        <a:ea typeface="Calibri" charset="0"/>
+                        <a:cs typeface="Calibri" charset="0"/>
+                      </a:endParaRPr>
+                    </a:p>
+                  </a:txBody>
+                  <a:tcPr marL="137160" marR="137160" marT="45720" marB="45720" anchor="ctr">
+                    <a:lnL w="12700" cap="flat" cmpd="sng" algn="ctr">
+                      <a:solidFill>
+                        <a:srgbClr val="EEF3F8"/>
+                      </a:solidFill>
+                      <a:prstDash val="solid"/>
+                      <a:round/>
+                      <a:headEnd type="none" w="med" len="med"/>
+                      <a:tailEnd type="none" w="med" len="med"/>
+                    </a:lnL>
+                    <a:lnR w="12700" cap="flat" cmpd="sng" algn="ctr">
+                      <a:solidFill>
+                        <a:srgbClr val="EEF3F8"/>
+                      </a:solidFill>
+                      <a:prstDash val="solid"/>
+                      <a:round/>
+                      <a:headEnd type="none" w="med" len="med"/>
+                      <a:tailEnd type="none" w="med" len="med"/>
+                    </a:lnR>
+                    <a:lnT w="12700" cap="flat" cmpd="sng" algn="ctr">
+                      <a:solidFill>
+                        <a:srgbClr val="EEF3F8"/>
+                      </a:solidFill>
+                      <a:prstDash val="solid"/>
+                      <a:round/>
+                      <a:headEnd type="none" w="med" len="med"/>
+                      <a:tailEnd type="none" w="med" len="med"/>
+                    </a:lnT>
+                    <a:lnB w="12700" cap="flat" cmpd="sng" algn="ctr">
+                      <a:solidFill>
+                        <a:srgbClr val="EEF3F8"/>
+                      </a:solidFill>
+                      <a:prstDash val="solid"/>
+                      <a:round/>
+                      <a:headEnd type="none" w="med" len="med"/>
+                      <a:tailEnd type="none" w="med" len="med"/>
+                    </a:lnB>
+                    <a:solidFill>
+                      <a:schemeClr val="bg1"/>
+                    </a:solidFill>
+                  </a:tcPr>
+                </a:tc>
+                <a:tc>
+                  <a:txBody>
+                    <a:bodyPr/>
+                    <a:lstStyle/>
+                    <a:p>
+                      <a:pPr indent="0" marL="0">
+                        <a:buNone/>
+                      </a:pPr>
+                      <a:r>
+                        <a:rPr lang="en-US" sz="1400" dirty="0">
+                          <a:solidFill>
+                            <a:schemeClr val="tx1"/>
+                          </a:solidFill>
+                          <a:latin typeface="Calibri" pitchFamily="34" charset="0"/>
+                          <a:ea typeface="Calibri" pitchFamily="34" charset="-122"/>
+                          <a:cs typeface="Calibri" pitchFamily="34" charset="-120"/>
+                        </a:rPr>
+                        <a:t>Tende a ser positivo</a:t>
+                      </a:r>
+                      <a:endParaRPr lang="en-US" sz="1400" dirty="0">
+                        <a:latin typeface="Calibri" charset="0"/>
+                        <a:ea typeface="Calibri" charset="0"/>
+                        <a:cs typeface="Calibri" charset="0"/>
+                      </a:endParaRPr>
+                    </a:p>
+                  </a:txBody>
+                  <a:tcPr marL="137160" marR="137160" marT="45720" marB="45720" anchor="ctr">
+                    <a:lnL w="12700" cap="flat" cmpd="sng" algn="ctr">
+                      <a:solidFill>
+                        <a:srgbClr val="EEF3F8"/>
+                      </a:solidFill>
+                      <a:prstDash val="solid"/>
+                      <a:round/>
+                      <a:headEnd type="none" w="med" len="med"/>
+                      <a:tailEnd type="none" w="med" len="med"/>
+                    </a:lnL>
+                    <a:lnR w="12700" cap="flat" cmpd="sng" algn="ctr">
+                      <a:solidFill>
+                        <a:srgbClr val="EEF3F8"/>
+                      </a:solidFill>
+                      <a:prstDash val="solid"/>
+                      <a:round/>
+                      <a:headEnd type="none" w="med" len="med"/>
+                      <a:tailEnd type="none" w="med" len="med"/>
+                    </a:lnR>
+                    <a:lnT w="12700" cap="flat" cmpd="sng" algn="ctr">
+                      <a:solidFill>
+                        <a:srgbClr val="EEF3F8"/>
+                      </a:solidFill>
+                      <a:prstDash val="solid"/>
+                      <a:round/>
+                      <a:headEnd type="none" w="med" len="med"/>
+                      <a:tailEnd type="none" w="med" len="med"/>
+                    </a:lnT>
+                    <a:lnB w="12700" cap="flat" cmpd="sng" algn="ctr">
+                      <a:solidFill>
+                        <a:srgbClr val="EEF3F8"/>
+                      </a:solidFill>
+                      <a:prstDash val="solid"/>
+                      <a:round/>
+                      <a:headEnd type="none" w="med" len="med"/>
+                      <a:tailEnd type="none" w="med" len="med"/>
+                    </a:lnB>
+                    <a:solidFill>
+                      <a:schemeClr val="bg1"/>
+                    </a:solidFill>
+                  </a:tcPr>
+                </a:tc>
+              </a:tr>
+              <a:tr h="777240">
+                <a:tc>
+                  <a:txBody>
+                    <a:bodyPr/>
+                    <a:lstStyle/>
+                    <a:p>
+                      <a:pPr indent="0" marL="0">
+                        <a:buNone/>
+                      </a:pPr>
+                      <a:r>
+                        <a:rPr lang="en-US" sz="1400" b="1" dirty="0">
+                          <a:solidFill>
+                            <a:schemeClr val="tx1"/>
+                          </a:solidFill>
+                          <a:latin typeface="Calibri" pitchFamily="34" charset="0"/>
+                          <a:ea typeface="Calibri" pitchFamily="34" charset="-122"/>
+                          <a:cs typeface="Calibri" pitchFamily="34" charset="-120"/>
+                        </a:rPr>
+                        <a:t>MMGD</a:t>
+                      </a:r>
+                      <a:endParaRPr lang="en-US" sz="1400" dirty="0">
+                        <a:latin typeface="Calibri" charset="0"/>
+                        <a:ea typeface="Calibri" charset="0"/>
+                        <a:cs typeface="Calibri" charset="0"/>
+                      </a:endParaRPr>
+                    </a:p>
+                  </a:txBody>
+                  <a:tcPr marL="137160" marR="137160" marT="45720" marB="45720" anchor="ctr">
+                    <a:lnL w="12700" cap="flat" cmpd="sng" algn="ctr">
+                      <a:solidFill>
+                        <a:srgbClr val="EEF3F8"/>
+                      </a:solidFill>
+                      <a:prstDash val="solid"/>
+                      <a:round/>
+                      <a:headEnd type="none" w="med" len="med"/>
+                      <a:tailEnd type="none" w="med" len="med"/>
+                    </a:lnL>
+                    <a:lnR w="12700" cap="flat" cmpd="sng" algn="ctr">
+                      <a:solidFill>
+                        <a:srgbClr val="EEF3F8"/>
+                      </a:solidFill>
+                      <a:prstDash val="solid"/>
+                      <a:round/>
+                      <a:headEnd type="none" w="med" len="med"/>
+                      <a:tailEnd type="none" w="med" len="med"/>
+                    </a:lnR>
+                    <a:lnT w="12700" cap="flat" cmpd="sng" algn="ctr">
+                      <a:solidFill>
+                        <a:srgbClr val="EEF3F8"/>
+                      </a:solidFill>
+                      <a:prstDash val="solid"/>
+                      <a:round/>
+                      <a:headEnd type="none" w="med" len="med"/>
+                      <a:tailEnd type="none" w="med" len="med"/>
+                    </a:lnT>
+                    <a:lnB w="12700" cap="flat" cmpd="sng" algn="ctr">
+                      <a:solidFill>
+                        <a:srgbClr val="EEF3F8"/>
+                      </a:solidFill>
+                      <a:prstDash val="solid"/>
+                      <a:round/>
+                      <a:headEnd type="none" w="med" len="med"/>
+                      <a:tailEnd type="none" w="med" len="med"/>
+                    </a:lnB>
+                    <a:solidFill>
+                      <a:schemeClr val="bg1"/>
+                    </a:solidFill>
+                  </a:tcPr>
+                </a:tc>
+                <a:tc>
+                  <a:txBody>
+                    <a:bodyPr/>
+                    <a:lstStyle/>
+                    <a:p>
+                      <a:pPr indent="0" marL="0">
+                        <a:buNone/>
+                      </a:pPr>
+                      <a:r>
+                        <a:rPr lang="en-US" sz="1400" dirty="0">
+                          <a:solidFill>
+                            <a:schemeClr val="tx1"/>
+                          </a:solidFill>
+                          <a:latin typeface="Calibri" pitchFamily="34" charset="0"/>
+                          <a:ea typeface="Calibri" pitchFamily="34" charset="-122"/>
+                          <a:cs typeface="Calibri" pitchFamily="34" charset="-120"/>
+                        </a:rPr>
+                        <a:t>Fora do rateio</a:t>
+                      </a:r>
+                      <a:endParaRPr lang="en-US" sz="1400" dirty="0">
+                        <a:latin typeface="Calibri" charset="0"/>
+                        <a:ea typeface="Calibri" charset="0"/>
+                        <a:cs typeface="Calibri" charset="0"/>
+                      </a:endParaRPr>
+                    </a:p>
+                  </a:txBody>
+                  <a:tcPr marL="137160" marR="137160" marT="45720" marB="45720" anchor="ctr">
+                    <a:lnL w="12700" cap="flat" cmpd="sng" algn="ctr">
+                      <a:solidFill>
+                        <a:srgbClr val="EEF3F8"/>
+                      </a:solidFill>
+                      <a:prstDash val="solid"/>
+                      <a:round/>
+                      <a:headEnd type="none" w="med" len="med"/>
+                      <a:tailEnd type="none" w="med" len="med"/>
+                    </a:lnL>
+                    <a:lnR w="12700" cap="flat" cmpd="sng" algn="ctr">
+                      <a:solidFill>
+                        <a:srgbClr val="EEF3F8"/>
+                      </a:solidFill>
+                      <a:prstDash val="solid"/>
+                      <a:round/>
+                      <a:headEnd type="none" w="med" len="med"/>
+                      <a:tailEnd type="none" w="med" len="med"/>
+                    </a:lnR>
+                    <a:lnT w="12700" cap="flat" cmpd="sng" algn="ctr">
+                      <a:solidFill>
+                        <a:srgbClr val="EEF3F8"/>
+                      </a:solidFill>
+                      <a:prstDash val="solid"/>
+                      <a:round/>
+                      <a:headEnd type="none" w="med" len="med"/>
+                      <a:tailEnd type="none" w="med" len="med"/>
+                    </a:lnT>
+                    <a:lnB w="12700" cap="flat" cmpd="sng" algn="ctr">
+                      <a:solidFill>
+                        <a:srgbClr val="EEF3F8"/>
+                      </a:solidFill>
+                      <a:prstDash val="solid"/>
+                      <a:round/>
+                      <a:headEnd type="none" w="med" len="med"/>
+                      <a:tailEnd type="none" w="med" len="med"/>
+                    </a:lnB>
+                    <a:solidFill>
+                      <a:schemeClr val="bg1"/>
+                    </a:solidFill>
+                  </a:tcPr>
+                </a:tc>
+                <a:tc>
+                  <a:txBody>
+                    <a:bodyPr/>
+                    <a:lstStyle/>
+                    <a:p>
+                      <a:pPr indent="0" marL="0">
+                        <a:buNone/>
+                      </a:pPr>
+                      <a:r>
+                        <a:rPr lang="en-US" sz="1400" dirty="0">
+                          <a:solidFill>
+                            <a:schemeClr val="tx1"/>
+                          </a:solidFill>
+                          <a:latin typeface="Calibri" pitchFamily="34" charset="0"/>
+                          <a:ea typeface="Calibri" pitchFamily="34" charset="-122"/>
+                          <a:cs typeface="Calibri" pitchFamily="34" charset="-120"/>
+                        </a:rPr>
+                        <a:t>Menos excedente e menos cortes na rede</a:t>
+                      </a:r>
+                      <a:endParaRPr lang="en-US" sz="1400" dirty="0">
+                        <a:latin typeface="Calibri" charset="0"/>
+                        <a:ea typeface="Calibri" charset="0"/>
+                        <a:cs typeface="Calibri" charset="0"/>
+                      </a:endParaRPr>
+                    </a:p>
+                  </a:txBody>
+                  <a:tcPr marL="137160" marR="137160" marT="45720" marB="45720" anchor="ctr">
+                    <a:lnL w="12700" cap="flat" cmpd="sng" algn="ctr">
+                      <a:solidFill>
+                        <a:srgbClr val="EEF3F8"/>
+                      </a:solidFill>
+                      <a:prstDash val="solid"/>
+                      <a:round/>
+                      <a:headEnd type="none" w="med" len="med"/>
+                      <a:tailEnd type="none" w="med" len="med"/>
+                    </a:lnL>
+                    <a:lnR w="12700" cap="flat" cmpd="sng" algn="ctr">
+                      <a:solidFill>
+                        <a:srgbClr val="EEF3F8"/>
+                      </a:solidFill>
+                      <a:prstDash val="solid"/>
+                      <a:round/>
+                      <a:headEnd type="none" w="med" len="med"/>
+                      <a:tailEnd type="none" w="med" len="med"/>
+                    </a:lnR>
+                    <a:lnT w="12700" cap="flat" cmpd="sng" algn="ctr">
+                      <a:solidFill>
+                        <a:srgbClr val="EEF3F8"/>
+                      </a:solidFill>
+                      <a:prstDash val="solid"/>
+                      <a:round/>
+                      <a:headEnd type="none" w="med" len="med"/>
+                      <a:tailEnd type="none" w="med" len="med"/>
+                    </a:lnT>
+                    <a:lnB w="12700" cap="flat" cmpd="sng" algn="ctr">
+                      <a:solidFill>
+                        <a:srgbClr val="EEF3F8"/>
+                      </a:solidFill>
+                      <a:prstDash val="solid"/>
+                      <a:round/>
+                      <a:headEnd type="none" w="med" len="med"/>
+                      <a:tailEnd type="none" w="med" len="med"/>
+                    </a:lnB>
+                    <a:solidFill>
+                      <a:schemeClr val="bg1"/>
+                    </a:solidFill>
+                  </a:tcPr>
+                </a:tc>
+                <a:tc>
+                  <a:txBody>
+                    <a:bodyPr/>
+                    <a:lstStyle/>
+                    <a:p>
+                      <a:pPr indent="0" marL="0">
+                        <a:buNone/>
+                      </a:pPr>
+                      <a:r>
+                        <a:rPr lang="en-US" sz="1400" dirty="0">
+                          <a:solidFill>
+                            <a:schemeClr val="tx1"/>
+                          </a:solidFill>
+                          <a:latin typeface="Calibri" pitchFamily="34" charset="0"/>
+                          <a:ea typeface="Calibri" pitchFamily="34" charset="-122"/>
+                          <a:cs typeface="Calibri" pitchFamily="34" charset="-120"/>
+                        </a:rPr>
+                        <a:t>Não paga, mas é a origem do excedente</a:t>
+                      </a:r>
+                      <a:endParaRPr lang="en-US" sz="1400" dirty="0">
+                        <a:latin typeface="Calibri" charset="0"/>
+                        <a:ea typeface="Calibri" charset="0"/>
+                        <a:cs typeface="Calibri" charset="0"/>
+                      </a:endParaRPr>
+                    </a:p>
+                  </a:txBody>
+                  <a:tcPr marL="137160" marR="137160" marT="45720" marB="45720" anchor="ctr">
+                    <a:lnL w="12700" cap="flat" cmpd="sng" algn="ctr">
+                      <a:solidFill>
+                        <a:srgbClr val="EEF3F8"/>
+                      </a:solidFill>
+                      <a:prstDash val="solid"/>
+                      <a:round/>
+                      <a:headEnd type="none" w="med" len="med"/>
+                      <a:tailEnd type="none" w="med" len="med"/>
+                    </a:lnL>
+                    <a:lnR w="12700" cap="flat" cmpd="sng" algn="ctr">
+                      <a:solidFill>
+                        <a:srgbClr val="EEF3F8"/>
+                      </a:solidFill>
+                      <a:prstDash val="solid"/>
+                      <a:round/>
+                      <a:headEnd type="none" w="med" len="med"/>
+                      <a:tailEnd type="none" w="med" len="med"/>
+                    </a:lnR>
+                    <a:lnT w="12700" cap="flat" cmpd="sng" algn="ctr">
+                      <a:solidFill>
+                        <a:srgbClr val="EEF3F8"/>
+                      </a:solidFill>
+                      <a:prstDash val="solid"/>
+                      <a:round/>
+                      <a:headEnd type="none" w="med" len="med"/>
+                      <a:tailEnd type="none" w="med" len="med"/>
+                    </a:lnT>
+                    <a:lnB w="12700" cap="flat" cmpd="sng" algn="ctr">
+                      <a:solidFill>
+                        <a:srgbClr val="EEF3F8"/>
+                      </a:solidFill>
+                      <a:prstDash val="solid"/>
+                      <a:round/>
+                      <a:headEnd type="none" w="med" len="med"/>
+                      <a:tailEnd type="none" w="med" len="med"/>
+                    </a:lnB>
+                    <a:solidFill>
+                      <a:schemeClr val="bg1"/>
+                    </a:solidFill>
+                  </a:tcPr>
+                </a:tc>
+              </a:tr>
+            </a:tbl>
+          </a:graphicData>
+        </a:graphic>
+      </p:graphicFrame>
+      <p:sp>
+        <p:nvSpPr>
+          <p:cNvPr id="4" name="Link to objectives"/>
+          <p:cNvSpPr/>
+          <p:nvPr/>
+        </p:nvSpPr>
+        <p:spPr>
+          <a:xfrm>
+            <a:off x="548640" y="5440680"/>
+            <a:ext cx="11094415" cy="777240"/>
+          </a:xfrm>
+          <a:prstGeom prst="roundRect">
+            <a:avLst>
+              <a:gd name="adj" fmla="val 14118"/>
+            </a:avLst>
+          </a:prstGeom>
+          <a:solidFill>
+            <a:schemeClr val="bg2"/>
+          </a:solidFill>
+          <a:ln w="12700">
+            <a:solidFill>
+              <a:schemeClr val="bg2"/>
+            </a:solidFill>
+            <a:prstDash val="solid"/>
+          </a:ln>
+        </p:spPr>
+      </p:sp>
+      <p:sp>
+        <p:nvSpPr>
+          <p:cNvPr id="5" name="Text 2"/>
+          <p:cNvSpPr txBox="1"/>
+          <p:nvPr/>
+        </p:nvSpPr>
+        <p:spPr>
+          <a:xfrm>
+            <a:off x="822960" y="5440680"/>
+            <a:ext cx="10545775" cy="777240"/>
+          </a:xfrm>
+          <a:prstGeom prst="rect">
+            <a:avLst/>
+          </a:prstGeom>
+          <a:noFill/>
+          <a:ln/>
+        </p:spPr>
+        <p:txBody>
+          <a:bodyPr wrap="square" lIns="0" tIns="0" rIns="0" bIns="0" rtlCol="0" anchor="ctr"/>
+          <a:lstStyle/>
+          <a:p>
+            <a:pPr indent="0" marL="0">
+              <a:buNone/>
+            </a:pPr>
+            <a:r>
+              <a:rPr lang="en-US" sz="1600" b="1" dirty="0">
+                <a:solidFill>
+                  <a:schemeClr val="tx1"/>
+                </a:solidFill>
+              </a:rPr>
+              <a:t>Saldo da fonte i = ganho com baterias − Ei. </a:t>
+            </a:r>
+            <a:pPr indent="0" marL="0">
+              <a:buNone/>
+            </a:pPr>
+            <a:r>
+              <a:rPr lang="en-US" sz="1600" dirty="0">
+                <a:solidFill>
+                  <a:schemeClr val="tx1"/>
+                </a:solidFill>
+              </a:rPr>
+              <a:t>As simulações (OE2 a OE5) quantificam cada célula e testam os três cenários de rateio (R1 a R3).</a:t>
+            </a:r>
+            <a:endParaRPr lang="en-US" sz="1600" dirty="0"/>
+          </a:p>
+        </p:txBody>
+      </p:sp>
+      <p:sp>
+        <p:nvSpPr>
+          <p:cNvPr id="6" name="Text 3"/>
+          <p:cNvSpPr txBox="1"/>
+          <p:nvPr/>
+        </p:nvSpPr>
+        <p:spPr>
+          <a:xfrm>
+            <a:off x="548640" y="6382512"/>
+            <a:ext cx="10424160" cy="274320"/>
+          </a:xfrm>
+          <a:prstGeom prst="rect">
+            <a:avLst/>
+          </a:prstGeom>
+          <a:noFill/>
+          <a:ln/>
+        </p:spPr>
+        <p:txBody>
+          <a:bodyPr wrap="square" lIns="0" tIns="0" rIns="0" bIns="0" rtlCol="0" anchor="ctr"/>
+          <a:lstStyle/>
+          <a:p>
+            <a:pPr indent="0" marL="0">
+              <a:buNone/>
+            </a:pPr>
+            <a:r>
+              <a:rPr lang="en-US" sz="1000" i="1" dirty="0">
+                <a:solidFill>
+                  <a:schemeClr val="tx2"/>
+                </a:solidFill>
+              </a:rPr>
+              <a:t>Encargos: proposta da ANEEL (NT 101/2026) e Agência iNFRA (2026). Os sinais do saldo são hipóteses de trabalho, não resultados.</a:t>
+            </a:r>
+            <a:endParaRPr lang="en-US" sz="1000" dirty="0"/>
+          </a:p>
+        </p:txBody>
+      </p:sp>
+      <p:sp>
+        <p:nvSpPr>
+          <p:cNvPr id="25" name="Slide Number Placeholder 0"/>
+          <p:cNvSpPr>
+            <a:spLocks noGrp="1"/>
+          </p:cNvSpPr>
+          <p:nvPr>
+            <p:ph type="sldNum" sz="quarter" idx="4294967295"/>
+          </p:nvPr>
+        </p:nvSpPr>
+        <p:spPr>
+          <a:xfrm>
+            <a:off x="11155680" y="6400800"/>
+            <a:ext cx="548640" cy="274320"/>
+          </a:xfrm>
+          <a:prstGeom prst="rect">
+            <a:avLst/>
+          </a:prstGeom>
+          <a:extLst>
+            <a:ext uri="{C572A759-6A51-4108-AA02-DFA0A04FC94B}">
+              <ma14:wrappingTextBoxFlag xmlns:ma14="http://schemas.microsoft.com/office/mac/drawingml/2011/main" val="0"/>
+            </a:ext>
+          </a:extLst>
+        </p:spPr>
+        <p:txBody>
+          <a:bodyPr/>
+          <a:lstStyle>
+            <a:lvl1pPr>
+              <a:defRPr sz="1100">
+                <a:solidFill>
+                  <a:schemeClr val="tx2"/>
+                </a:solidFill>
+              </a:defRPr>
+            </a:lvl1pPr>
+          </a:lstStyle>
+          <a:p>
+            <a:pPr algn="r"/>
+            <a:fld id="{F7021451-1387-4CA6-816F-3879F97B5CBC}" type="slidenum">
+              <a:rPr b="0" lang="en-US"/>
+              <a:t>19</a:t>
             </a:fld>
             <a:endParaRPr lang="en-US"/>
           </a:p>
@@ -9336,6 +17303,971 @@
 </p:sld>
 </file>
 
+<file path=ppt/slides/slide20.xml><?xml version="1.0" encoding="utf-8"?>
+<p:sld xmlns:a="http://schemas.openxmlformats.org/drawingml/2006/main" xmlns:r="http://schemas.openxmlformats.org/officeDocument/2006/relationships" xmlns:p="http://schemas.openxmlformats.org/presentationml/2006/main">
+  <p:cSld name="Slide 20">
+    <p:spTree>
+      <p:nvGrpSpPr>
+        <p:cNvPr id="1" name=""/>
+        <p:cNvGrpSpPr/>
+        <p:nvPr/>
+      </p:nvGrpSpPr>
+      <p:grpSpPr>
+        <a:xfrm>
+          <a:off x="0" y="0"/>
+          <a:ext cx="0" cy="0"/>
+          <a:chOff x="0" y="0"/>
+          <a:chExt cx="0" cy="0"/>
+        </a:xfrm>
+      </p:grpSpPr>
+      <p:sp>
+        <p:nvSpPr>
+          <p:cNvPr id="2" name="Text 0"/>
+          <p:cNvSpPr/>
+          <p:nvPr>
+            <p:ph idx="100" type="title" hasCustomPrompt="1"/>
+          </p:nvPr>
+        </p:nvSpPr>
+        <p:spPr>
+          <a:xfrm>
+            <a:off x="548640" y="365760"/>
+            <a:ext cx="11094415" cy="822960"/>
+          </a:xfrm>
+          <a:prstGeom prst="rect">
+            <a:avLst/>
+          </a:prstGeom>
+          <a:noFill/>
+          <a:ln/>
+        </p:spPr>
+        <p:txBody>
+          <a:bodyPr wrap="square" lIns="0" tIns="0" rIns="0" bIns="0" rtlCol="0" anchor="ctr"/>
+          <a:lstStyle/>
+          <a:p>
+            <a:pPr algn="l" indent="0" marL="0">
+              <a:buNone/>
+            </a:pPr>
+            <a:r>
+              <a:rPr lang="en-US" sz="3200" b="1" dirty="0">
+                <a:solidFill>
+                  <a:schemeClr val="bg1"/>
+                </a:solidFill>
+              </a:rPr>
+              <a:t>Síntese</a:t>
+            </a:r>
+            <a:endParaRPr lang="en-US" sz="3200" dirty="0"/>
+          </a:p>
+        </p:txBody>
+      </p:sp>
+      <p:sp>
+        <p:nvSpPr>
+          <p:cNvPr id="3" name="Summary row 1"/>
+          <p:cNvSpPr/>
+          <p:nvPr/>
+        </p:nvSpPr>
+        <p:spPr>
+          <a:xfrm>
+            <a:off x="548640" y="1463040"/>
+            <a:ext cx="11094415" cy="1097280"/>
+          </a:xfrm>
+          <a:prstGeom prst="roundRect">
+            <a:avLst>
+              <a:gd name="adj" fmla="val 10000"/>
+            </a:avLst>
+          </a:prstGeom>
+          <a:solidFill>
+            <a:schemeClr val="tx2"/>
+          </a:solidFill>
+          <a:ln w="12700">
+            <a:solidFill>
+              <a:schemeClr val="tx2"/>
+            </a:solidFill>
+            <a:prstDash val="solid"/>
+          </a:ln>
+        </p:spPr>
+      </p:sp>
+      <p:sp>
+        <p:nvSpPr>
+          <p:cNvPr id="4" name="Text 2"/>
+          <p:cNvSpPr txBox="1"/>
+          <p:nvPr/>
+        </p:nvSpPr>
+        <p:spPr>
+          <a:xfrm>
+            <a:off x="914400" y="1463040"/>
+            <a:ext cx="2194560" cy="1097280"/>
+          </a:xfrm>
+          <a:prstGeom prst="rect">
+            <a:avLst/>
+          </a:prstGeom>
+          <a:noFill/>
+          <a:ln/>
+        </p:spPr>
+        <p:txBody>
+          <a:bodyPr wrap="square" lIns="0" tIns="0" rIns="0" bIns="0" rtlCol="0" anchor="ctr"/>
+          <a:lstStyle/>
+          <a:p>
+            <a:pPr indent="0" marL="0">
+              <a:buNone/>
+            </a:pPr>
+            <a:r>
+              <a:rPr lang="en-US" sz="2000" b="1" dirty="0">
+                <a:solidFill>
+                  <a:schemeClr val="accent1"/>
+                </a:solidFill>
+                <a:latin typeface="Cambria" pitchFamily="34" charset="0"/>
+                <a:ea typeface="Cambria" pitchFamily="34" charset="-122"/>
+                <a:cs typeface="Cambria" pitchFamily="34" charset="-120"/>
+              </a:rPr>
+              <a:t>Problema</a:t>
+            </a:r>
+            <a:endParaRPr lang="en-US" sz="2000" dirty="0"/>
+          </a:p>
+        </p:txBody>
+      </p:sp>
+      <p:sp>
+        <p:nvSpPr>
+          <p:cNvPr id="5" name="Text 3"/>
+          <p:cNvSpPr txBox="1"/>
+          <p:nvPr/>
+        </p:nvSpPr>
+        <p:spPr>
+          <a:xfrm>
+            <a:off x="3291840" y="1463040"/>
+            <a:ext cx="7985455" cy="1097280"/>
+          </a:xfrm>
+          <a:prstGeom prst="rect">
+            <a:avLst/>
+          </a:prstGeom>
+          <a:noFill/>
+          <a:ln/>
+        </p:spPr>
+        <p:txBody>
+          <a:bodyPr wrap="square" lIns="0" tIns="0" rIns="0" bIns="0" rtlCol="0" anchor="ctr"/>
+          <a:lstStyle/>
+          <a:p>
+            <a:pPr indent="0" marL="0">
+              <a:buNone/>
+            </a:pPr>
+            <a:r>
+              <a:rPr lang="en-US" sz="1800" dirty="0">
+                <a:solidFill>
+                  <a:schemeClr val="bg1"/>
+                </a:solidFill>
+              </a:rPr>
+              <a:t>MMGD em expansão gera curtailment e perdas bilionárias.</a:t>
+            </a:r>
+            <a:endParaRPr lang="en-US" sz="1800" dirty="0"/>
+          </a:p>
+        </p:txBody>
+      </p:sp>
+      <p:sp>
+        <p:nvSpPr>
+          <p:cNvPr id="6" name="Summary row 2"/>
+          <p:cNvSpPr/>
+          <p:nvPr/>
+        </p:nvSpPr>
+        <p:spPr>
+          <a:xfrm>
+            <a:off x="548640" y="2743200"/>
+            <a:ext cx="11094415" cy="1097280"/>
+          </a:xfrm>
+          <a:prstGeom prst="roundRect">
+            <a:avLst>
+              <a:gd name="adj" fmla="val 10000"/>
+            </a:avLst>
+          </a:prstGeom>
+          <a:solidFill>
+            <a:schemeClr val="tx2"/>
+          </a:solidFill>
+          <a:ln w="12700">
+            <a:solidFill>
+              <a:schemeClr val="tx2"/>
+            </a:solidFill>
+            <a:prstDash val="solid"/>
+          </a:ln>
+        </p:spPr>
+      </p:sp>
+      <p:sp>
+        <p:nvSpPr>
+          <p:cNvPr id="7" name="Text 5"/>
+          <p:cNvSpPr txBox="1"/>
+          <p:nvPr/>
+        </p:nvSpPr>
+        <p:spPr>
+          <a:xfrm>
+            <a:off x="914400" y="2743200"/>
+            <a:ext cx="2194560" cy="1097280"/>
+          </a:xfrm>
+          <a:prstGeom prst="rect">
+            <a:avLst/>
+          </a:prstGeom>
+          <a:noFill/>
+          <a:ln/>
+        </p:spPr>
+        <p:txBody>
+          <a:bodyPr wrap="square" lIns="0" tIns="0" rIns="0" bIns="0" rtlCol="0" anchor="ctr"/>
+          <a:lstStyle/>
+          <a:p>
+            <a:pPr indent="0" marL="0">
+              <a:buNone/>
+            </a:pPr>
+            <a:r>
+              <a:rPr lang="en-US" sz="2000" b="1" dirty="0">
+                <a:solidFill>
+                  <a:schemeClr val="accent1"/>
+                </a:solidFill>
+                <a:latin typeface="Cambria" pitchFamily="34" charset="0"/>
+                <a:ea typeface="Cambria" pitchFamily="34" charset="-122"/>
+                <a:cs typeface="Cambria" pitchFamily="34" charset="-120"/>
+              </a:rPr>
+              <a:t>Pergunta</a:t>
+            </a:r>
+            <a:endParaRPr lang="en-US" sz="2000" dirty="0"/>
+          </a:p>
+        </p:txBody>
+      </p:sp>
+      <p:sp>
+        <p:nvSpPr>
+          <p:cNvPr id="8" name="Text 6"/>
+          <p:cNvSpPr txBox="1"/>
+          <p:nvPr/>
+        </p:nvSpPr>
+        <p:spPr>
+          <a:xfrm>
+            <a:off x="3291840" y="2743200"/>
+            <a:ext cx="7985455" cy="1097280"/>
+          </a:xfrm>
+          <a:prstGeom prst="rect">
+            <a:avLst/>
+          </a:prstGeom>
+          <a:noFill/>
+          <a:ln/>
+        </p:spPr>
+        <p:txBody>
+          <a:bodyPr wrap="square" lIns="0" tIns="0" rIns="0" bIns="0" rtlCol="0" anchor="ctr"/>
+          <a:lstStyle/>
+          <a:p>
+            <a:pPr indent="0" marL="0">
+              <a:buNone/>
+            </a:pPr>
+            <a:r>
+              <a:rPr lang="en-US" sz="1800" dirty="0">
+                <a:solidFill>
+                  <a:schemeClr val="bg1"/>
+                </a:solidFill>
+              </a:rPr>
+              <a:t>O ganho do sistema com baterias cobre os encargos das fontes?</a:t>
+            </a:r>
+            <a:endParaRPr lang="en-US" sz="1800" dirty="0"/>
+          </a:p>
+        </p:txBody>
+      </p:sp>
+      <p:sp>
+        <p:nvSpPr>
+          <p:cNvPr id="9" name="Summary row 3"/>
+          <p:cNvSpPr/>
+          <p:nvPr/>
+        </p:nvSpPr>
+        <p:spPr>
+          <a:xfrm>
+            <a:off x="548640" y="4023360"/>
+            <a:ext cx="11094415" cy="1097280"/>
+          </a:xfrm>
+          <a:prstGeom prst="roundRect">
+            <a:avLst>
+              <a:gd name="adj" fmla="val 10000"/>
+            </a:avLst>
+          </a:prstGeom>
+          <a:solidFill>
+            <a:schemeClr val="tx2"/>
+          </a:solidFill>
+          <a:ln w="12700">
+            <a:solidFill>
+              <a:schemeClr val="tx2"/>
+            </a:solidFill>
+            <a:prstDash val="solid"/>
+          </a:ln>
+        </p:spPr>
+      </p:sp>
+      <p:sp>
+        <p:nvSpPr>
+          <p:cNvPr id="10" name="Text 8"/>
+          <p:cNvSpPr txBox="1"/>
+          <p:nvPr/>
+        </p:nvSpPr>
+        <p:spPr>
+          <a:xfrm>
+            <a:off x="914400" y="4023360"/>
+            <a:ext cx="2194560" cy="1097280"/>
+          </a:xfrm>
+          <a:prstGeom prst="rect">
+            <a:avLst/>
+          </a:prstGeom>
+          <a:noFill/>
+          <a:ln/>
+        </p:spPr>
+        <p:txBody>
+          <a:bodyPr wrap="square" lIns="0" tIns="0" rIns="0" bIns="0" rtlCol="0" anchor="ctr"/>
+          <a:lstStyle/>
+          <a:p>
+            <a:pPr indent="0" marL="0">
+              <a:buNone/>
+            </a:pPr>
+            <a:r>
+              <a:rPr lang="en-US" sz="2000" b="1" dirty="0">
+                <a:solidFill>
+                  <a:schemeClr val="accent1"/>
+                </a:solidFill>
+                <a:latin typeface="Cambria" pitchFamily="34" charset="0"/>
+                <a:ea typeface="Cambria" pitchFamily="34" charset="-122"/>
+                <a:cs typeface="Cambria" pitchFamily="34" charset="-120"/>
+              </a:rPr>
+              <a:t>Método</a:t>
+            </a:r>
+            <a:endParaRPr lang="en-US" sz="2000" dirty="0"/>
+          </a:p>
+        </p:txBody>
+      </p:sp>
+      <p:sp>
+        <p:nvSpPr>
+          <p:cNvPr id="11" name="Text 9"/>
+          <p:cNvSpPr txBox="1"/>
+          <p:nvPr/>
+        </p:nvSpPr>
+        <p:spPr>
+          <a:xfrm>
+            <a:off x="3291840" y="4023360"/>
+            <a:ext cx="7985455" cy="1097280"/>
+          </a:xfrm>
+          <a:prstGeom prst="rect">
+            <a:avLst/>
+          </a:prstGeom>
+          <a:noFill/>
+          <a:ln/>
+        </p:spPr>
+        <p:txBody>
+          <a:bodyPr wrap="square" lIns="0" tIns="0" rIns="0" bIns="0" rtlCol="0" anchor="ctr"/>
+          <a:lstStyle/>
+          <a:p>
+            <a:pPr indent="0" marL="0">
+              <a:buNone/>
+            </a:pPr>
+            <a:r>
+              <a:rPr lang="en-US" sz="1800" dirty="0">
+                <a:solidFill>
+                  <a:schemeClr val="bg1"/>
+                </a:solidFill>
+              </a:rPr>
+              <a:t>Simulações horárias sem e com baterias (NE + SE, 4 h) em cenários de MMGD.</a:t>
+            </a:r>
+            <a:endParaRPr lang="en-US" sz="1800" dirty="0"/>
+          </a:p>
+        </p:txBody>
+      </p:sp>
+      <p:sp>
+        <p:nvSpPr>
+          <p:cNvPr id="12" name="Summary row 4"/>
+          <p:cNvSpPr/>
+          <p:nvPr/>
+        </p:nvSpPr>
+        <p:spPr>
+          <a:xfrm>
+            <a:off x="548640" y="5303520"/>
+            <a:ext cx="11094415" cy="1097280"/>
+          </a:xfrm>
+          <a:prstGeom prst="roundRect">
+            <a:avLst>
+              <a:gd name="adj" fmla="val 10000"/>
+            </a:avLst>
+          </a:prstGeom>
+          <a:solidFill>
+            <a:schemeClr val="tx2"/>
+          </a:solidFill>
+          <a:ln w="12700">
+            <a:solidFill>
+              <a:schemeClr val="tx2"/>
+            </a:solidFill>
+            <a:prstDash val="solid"/>
+          </a:ln>
+        </p:spPr>
+      </p:sp>
+      <p:sp>
+        <p:nvSpPr>
+          <p:cNvPr id="13" name="Text 11"/>
+          <p:cNvSpPr txBox="1"/>
+          <p:nvPr/>
+        </p:nvSpPr>
+        <p:spPr>
+          <a:xfrm>
+            <a:off x="914400" y="5303520"/>
+            <a:ext cx="2194560" cy="1097280"/>
+          </a:xfrm>
+          <a:prstGeom prst="rect">
+            <a:avLst/>
+          </a:prstGeom>
+          <a:noFill/>
+          <a:ln/>
+        </p:spPr>
+        <p:txBody>
+          <a:bodyPr wrap="square" lIns="0" tIns="0" rIns="0" bIns="0" rtlCol="0" anchor="ctr"/>
+          <a:lstStyle/>
+          <a:p>
+            <a:pPr indent="0" marL="0">
+              <a:buNone/>
+            </a:pPr>
+            <a:r>
+              <a:rPr lang="en-US" sz="2000" b="1" dirty="0">
+                <a:solidFill>
+                  <a:schemeClr val="accent1"/>
+                </a:solidFill>
+                <a:latin typeface="Cambria" pitchFamily="34" charset="0"/>
+                <a:ea typeface="Cambria" pitchFamily="34" charset="-122"/>
+                <a:cs typeface="Cambria" pitchFamily="34" charset="-120"/>
+              </a:rPr>
+              <a:t>Resposta</a:t>
+            </a:r>
+            <a:endParaRPr lang="en-US" sz="2000" dirty="0"/>
+          </a:p>
+        </p:txBody>
+      </p:sp>
+      <p:sp>
+        <p:nvSpPr>
+          <p:cNvPr id="14" name="Text 12"/>
+          <p:cNvSpPr txBox="1"/>
+          <p:nvPr/>
+        </p:nvSpPr>
+        <p:spPr>
+          <a:xfrm>
+            <a:off x="3291840" y="5303520"/>
+            <a:ext cx="7985455" cy="1097280"/>
+          </a:xfrm>
+          <a:prstGeom prst="rect">
+            <a:avLst/>
+          </a:prstGeom>
+          <a:noFill/>
+          <a:ln/>
+        </p:spPr>
+        <p:txBody>
+          <a:bodyPr wrap="square" lIns="0" tIns="0" rIns="0" bIns="0" rtlCol="0" anchor="ctr"/>
+          <a:lstStyle/>
+          <a:p>
+            <a:pPr indent="0" marL="0">
+              <a:buNone/>
+            </a:pPr>
+            <a:r>
+              <a:rPr lang="en-US" sz="1800" dirty="0">
+                <a:solidFill>
+                  <a:schemeClr val="bg1"/>
+                </a:solidFill>
+              </a:rPr>
+              <a:t>ΔCTO comparado à soma dos encargos, no sistema e por fonte.</a:t>
+            </a:r>
+            <a:endParaRPr lang="en-US" sz="1800" dirty="0"/>
+          </a:p>
+        </p:txBody>
+      </p:sp>
+    </p:spTree>
+  </p:cSld>
+  <p:clrMapOvr>
+    <a:masterClrMapping/>
+  </p:clrMapOvr>
+</p:sld>
+</file>
+
+<file path=ppt/slides/slide21.xml><?xml version="1.0" encoding="utf-8"?>
+<p:sld xmlns:a="http://schemas.openxmlformats.org/drawingml/2006/main" xmlns:r="http://schemas.openxmlformats.org/officeDocument/2006/relationships" xmlns:p="http://schemas.openxmlformats.org/presentationml/2006/main">
+  <p:cSld name="Slide 21">
+    <p:spTree>
+      <p:nvGrpSpPr>
+        <p:cNvPr id="1" name=""/>
+        <p:cNvGrpSpPr/>
+        <p:nvPr/>
+      </p:nvGrpSpPr>
+      <p:grpSpPr>
+        <a:xfrm>
+          <a:off x="0" y="0"/>
+          <a:ext cx="0" cy="0"/>
+          <a:chOff x="0" y="0"/>
+          <a:chExt cx="0" cy="0"/>
+        </a:xfrm>
+      </p:grpSpPr>
+      <p:sp>
+        <p:nvSpPr>
+          <p:cNvPr id="2" name="Text 0"/>
+          <p:cNvSpPr/>
+          <p:nvPr>
+            <p:ph idx="100" type="title" hasCustomPrompt="1"/>
+          </p:nvPr>
+        </p:nvSpPr>
+        <p:spPr>
+          <a:xfrm>
+            <a:off x="548640" y="365760"/>
+            <a:ext cx="11094415" cy="822960"/>
+          </a:xfrm>
+          <a:prstGeom prst="rect">
+            <a:avLst/>
+          </a:prstGeom>
+          <a:noFill/>
+          <a:ln/>
+        </p:spPr>
+        <p:txBody>
+          <a:bodyPr wrap="square" lIns="0" tIns="0" rIns="0" bIns="0" rtlCol="0" anchor="ctr"/>
+          <a:lstStyle/>
+          <a:p>
+            <a:pPr algn="l" indent="0" marL="0">
+              <a:buNone/>
+            </a:pPr>
+            <a:r>
+              <a:rPr lang="en-US" sz="3200" b="1" dirty="0">
+                <a:solidFill>
+                  <a:schemeClr val="tx1"/>
+                </a:solidFill>
+              </a:rPr>
+              <a:t>Referências</a:t>
+            </a:r>
+            <a:endParaRPr lang="en-US" sz="3200" dirty="0"/>
+          </a:p>
+        </p:txBody>
+      </p:sp>
+      <p:sp>
+        <p:nvSpPr>
+          <p:cNvPr id="3" name="Text 1"/>
+          <p:cNvSpPr txBox="1"/>
+          <p:nvPr/>
+        </p:nvSpPr>
+        <p:spPr>
+          <a:xfrm>
+            <a:off x="548640" y="1417320"/>
+            <a:ext cx="5394960" cy="4846320"/>
+          </a:xfrm>
+          <a:prstGeom prst="rect">
+            <a:avLst/>
+          </a:prstGeom>
+          <a:noFill/>
+          <a:ln/>
+        </p:spPr>
+        <p:txBody>
+          <a:bodyPr wrap="square" lIns="0" tIns="0" rIns="0" bIns="0" rtlCol="0" anchor="t"/>
+          <a:lstStyle/>
+          <a:p>
+            <a:pPr marL="342900" indent="-342900">
+              <a:spcAft>
+                <a:spcPts val="600"/>
+              </a:spcAft>
+              <a:buSzPct val="100000"/>
+              <a:buFont typeface="+mj-lt"/>
+              <a:buAutoNum type="arabicPeriod" startAt="1"/>
+            </a:pPr>
+            <a:r>
+              <a:rPr lang="en-US" sz="1200" dirty="0">
+                <a:solidFill>
+                  <a:schemeClr val="tx1"/>
+                </a:solidFill>
+              </a:rPr>
+              <a:t>Brasil (2025). Lei nº 15.269/2025, que inclui o § 6º no art. 3º-A da Lei nº 10.848/2004.</a:t>
+            </a:r>
+            <a:endParaRPr lang="en-US" sz="1200" dirty="0"/>
+          </a:p>
+          <a:p>
+            <a:pPr marL="342900" indent="-342900">
+              <a:spcAft>
+                <a:spcPts val="600"/>
+              </a:spcAft>
+              <a:buSzPct val="100000"/>
+              <a:buFont typeface="+mj-lt"/>
+              <a:buAutoNum type="arabicPeriod" startAt="1"/>
+            </a:pPr>
+            <a:r>
+              <a:rPr lang="en-US" sz="1200" dirty="0">
+                <a:solidFill>
+                  <a:schemeClr val="tx1"/>
+                </a:solidFill>
+              </a:rPr>
+              <a:t>MME (2026). Portaria GM/MME nº 136/2026: diretrizes do LRCAP armazenamento.</a:t>
+            </a:r>
+            <a:endParaRPr lang="en-US" sz="1200" dirty="0"/>
+          </a:p>
+          <a:p>
+            <a:pPr marL="342900" indent="-342900">
+              <a:spcAft>
+                <a:spcPts val="600"/>
+              </a:spcAft>
+              <a:buSzPct val="100000"/>
+              <a:buFont typeface="+mj-lt"/>
+              <a:buAutoNum type="arabicPeriod" startAt="1"/>
+            </a:pPr>
+            <a:r>
+              <a:rPr lang="en-US" sz="1200" dirty="0">
+                <a:solidFill>
+                  <a:schemeClr val="tx1"/>
+                </a:solidFill>
+              </a:rPr>
+              <a:t>ANEEL (2026). Consulta Pública 37/2026 e Nota Técnica 101/2026-SGM: Ercap-SAE.</a:t>
+            </a:r>
+            <a:endParaRPr lang="en-US" sz="1200" dirty="0"/>
+          </a:p>
+          <a:p>
+            <a:pPr marL="342900" indent="-342900">
+              <a:spcAft>
+                <a:spcPts val="600"/>
+              </a:spcAft>
+              <a:buSzPct val="100000"/>
+              <a:buFont typeface="+mj-lt"/>
+              <a:buAutoNum type="arabicPeriod" startAt="1"/>
+            </a:pPr>
+            <a:r>
+              <a:rPr lang="en-US" sz="1200" dirty="0">
+                <a:solidFill>
+                  <a:schemeClr val="tx1"/>
+                </a:solidFill>
+              </a:rPr>
+              <a:t>ANEEL (2026). Consultas públicas dos editais dos leilões de armazenamento.</a:t>
+            </a:r>
+            <a:endParaRPr lang="en-US" sz="1200" dirty="0"/>
+          </a:p>
+          <a:p>
+            <a:pPr marL="342900" indent="-342900">
+              <a:spcAft>
+                <a:spcPts val="600"/>
+              </a:spcAft>
+              <a:buSzPct val="100000"/>
+              <a:buFont typeface="+mj-lt"/>
+              <a:buAutoNum type="arabicPeriod" startAt="1"/>
+            </a:pPr>
+            <a:r>
+              <a:rPr lang="en-US" sz="1200" dirty="0">
+                <a:solidFill>
+                  <a:schemeClr val="tx1"/>
+                </a:solidFill>
+              </a:rPr>
+              <a:t>Canal Energia (2026). Nota técnica sugere manter custo do LRCAP de baterias com geradores; Proposta prevê modulação no rateio; Projeto visa revogar alocação de custos a geradores.</a:t>
+            </a:r>
+            <a:endParaRPr lang="en-US" sz="1200" dirty="0"/>
+          </a:p>
+          <a:p>
+            <a:pPr marL="342900" indent="-342900">
+              <a:spcAft>
+                <a:spcPts val="600"/>
+              </a:spcAft>
+              <a:buSzPct val="100000"/>
+              <a:buFont typeface="+mj-lt"/>
+              <a:buAutoNum type="arabicPeriod" startAt="1"/>
+            </a:pPr>
+            <a:r>
+              <a:rPr lang="en-US" sz="1200" dirty="0">
+                <a:solidFill>
+                  <a:schemeClr val="tx1"/>
+                </a:solidFill>
+              </a:rPr>
+              <a:t>Agência iNFRA (2026). Reportagem de 6/10/2026 sobre o rateio por flexibilidade.</a:t>
+            </a:r>
+            <a:endParaRPr lang="en-US" sz="1200" dirty="0"/>
+          </a:p>
+          <a:p>
+            <a:pPr marL="342900" indent="-342900">
+              <a:spcAft>
+                <a:spcPts val="600"/>
+              </a:spcAft>
+              <a:buSzPct val="100000"/>
+              <a:buFont typeface="+mj-lt"/>
+              <a:buAutoNum type="arabicPeriod" startAt="1"/>
+            </a:pPr>
+            <a:r>
+              <a:rPr lang="en-US" sz="1200" dirty="0">
+                <a:solidFill>
+                  <a:schemeClr val="tx1"/>
+                </a:solidFill>
+              </a:rPr>
+              <a:t>TAGD Law (2026). Encargo das baterias entra em consulta com duas propostas de rateio.</a:t>
+            </a:r>
+            <a:endParaRPr lang="en-US" sz="1200" dirty="0"/>
+          </a:p>
+          <a:p>
+            <a:pPr marL="342900" indent="-342900">
+              <a:spcAft>
+                <a:spcPts val="600"/>
+              </a:spcAft>
+              <a:buSzPct val="100000"/>
+              <a:buFont typeface="+mj-lt"/>
+              <a:buAutoNum type="arabicPeriod" startAt="1"/>
+            </a:pPr>
+            <a:r>
+              <a:rPr lang="en-US" sz="1200" dirty="0">
+                <a:solidFill>
+                  <a:schemeClr val="tx1"/>
+                </a:solidFill>
+              </a:rPr>
+              <a:t>CNN Brasil (2026). Aneel abre consulta para leilão de baterias; rateio segue incerto.</a:t>
+            </a:r>
+            <a:endParaRPr lang="en-US" sz="1200" dirty="0"/>
+          </a:p>
+          <a:p>
+            <a:pPr marL="342900" indent="-342900">
+              <a:spcAft>
+                <a:spcPts val="600"/>
+              </a:spcAft>
+              <a:buSzPct val="100000"/>
+              <a:buFont typeface="+mj-lt"/>
+              <a:buAutoNum type="arabicPeriod" startAt="1"/>
+            </a:pPr>
+            <a:r>
+              <a:rPr lang="en-US" sz="1200" dirty="0">
+                <a:solidFill>
+                  <a:schemeClr val="tx1"/>
+                </a:solidFill>
+              </a:rPr>
+              <a:t>Canal Solar (2026). MME publica diretrizes do 1º leilão de baterias.</a:t>
+            </a:r>
+            <a:endParaRPr lang="en-US" sz="1200" dirty="0"/>
+          </a:p>
+        </p:txBody>
+      </p:sp>
+      <p:sp>
+        <p:nvSpPr>
+          <p:cNvPr id="4" name="Text 2"/>
+          <p:cNvSpPr txBox="1"/>
+          <p:nvPr/>
+        </p:nvSpPr>
+        <p:spPr>
+          <a:xfrm>
+            <a:off x="6217920" y="1417320"/>
+            <a:ext cx="5394960" cy="4846320"/>
+          </a:xfrm>
+          <a:prstGeom prst="rect">
+            <a:avLst/>
+          </a:prstGeom>
+          <a:noFill/>
+          <a:ln/>
+        </p:spPr>
+        <p:txBody>
+          <a:bodyPr wrap="square" lIns="0" tIns="0" rIns="0" bIns="0" rtlCol="0" anchor="t"/>
+          <a:lstStyle/>
+          <a:p>
+            <a:pPr marL="342900" indent="-342900">
+              <a:spcAft>
+                <a:spcPts val="600"/>
+              </a:spcAft>
+              <a:buSzPct val="100000"/>
+              <a:buFont typeface="+mj-lt"/>
+              <a:buAutoNum type="arabicPeriod" startAt="10"/>
+            </a:pPr>
+            <a:r>
+              <a:rPr lang="en-US" sz="1200" dirty="0">
+                <a:solidFill>
+                  <a:schemeClr val="tx1"/>
+                </a:solidFill>
+              </a:rPr>
+              <a:t>ABSAE (2026). Baterias podem gerar economia superior a R$ 3 bi por ano no LRCAP.</a:t>
+            </a:r>
+            <a:endParaRPr lang="en-US" sz="1200" dirty="0"/>
+          </a:p>
+          <a:p>
+            <a:pPr marL="342900" indent="-342900">
+              <a:spcAft>
+                <a:spcPts val="600"/>
+              </a:spcAft>
+              <a:buSzPct val="100000"/>
+              <a:buFont typeface="+mj-lt"/>
+              <a:buAutoNum type="arabicPeriod" startAt="10"/>
+            </a:pPr>
+            <a:r>
+              <a:rPr lang="en-US" sz="1200" dirty="0">
+                <a:solidFill>
+                  <a:schemeClr val="tx1"/>
+                </a:solidFill>
+              </a:rPr>
+              <a:t>Volt Robotics via Tribuna do Sertão (2026). Economia de R$ 8,9 bi por ano com baterias.</a:t>
+            </a:r>
+            <a:endParaRPr lang="en-US" sz="1200" dirty="0"/>
+          </a:p>
+          <a:p>
+            <a:pPr marL="342900" indent="-342900">
+              <a:spcAft>
+                <a:spcPts val="600"/>
+              </a:spcAft>
+              <a:buSzPct val="100000"/>
+              <a:buFont typeface="+mj-lt"/>
+              <a:buAutoNum type="arabicPeriod" startAt="10"/>
+            </a:pPr>
+            <a:r>
+              <a:rPr lang="en-US" sz="1200" dirty="0">
+                <a:solidFill>
+                  <a:schemeClr val="tx1"/>
+                </a:solidFill>
+              </a:rPr>
+              <a:t>ONS (2025). Diagnóstico dos cortes de geração. RT DGL-ONS 0189/2025; NT-ONS DOP 0022/2025.</a:t>
+            </a:r>
+            <a:endParaRPr lang="en-US" sz="1200" dirty="0"/>
+          </a:p>
+          <a:p>
+            <a:pPr marL="342900" indent="-342900">
+              <a:spcAft>
+                <a:spcPts val="600"/>
+              </a:spcAft>
+              <a:buSzPct val="100000"/>
+              <a:buFont typeface="+mj-lt"/>
+              <a:buAutoNum type="arabicPeriod" startAt="10"/>
+            </a:pPr>
+            <a:r>
+              <a:rPr lang="en-US" sz="1200" dirty="0">
+                <a:solidFill>
+                  <a:schemeClr val="tx1"/>
+                </a:solidFill>
+              </a:rPr>
+              <a:t>EPE/MME (2024). PDE 2034, Caderno Micro e Minigeração Distribuída e Bateria atrás do Medidor.</a:t>
+            </a:r>
+            <a:endParaRPr lang="en-US" sz="1200" dirty="0"/>
+          </a:p>
+          <a:p>
+            <a:pPr marL="342900" indent="-342900">
+              <a:spcAft>
+                <a:spcPts val="600"/>
+              </a:spcAft>
+              <a:buSzPct val="100000"/>
+              <a:buFont typeface="+mj-lt"/>
+              <a:buAutoNum type="arabicPeriod" startAt="10"/>
+            </a:pPr>
+            <a:r>
+              <a:rPr lang="en-US" sz="1200" dirty="0">
+                <a:solidFill>
+                  <a:schemeClr val="tx1"/>
+                </a:solidFill>
+              </a:rPr>
+              <a:t>Acende Brasil (2025). Custos dos cortes devem ser compartilhados com a geração distribuída.</a:t>
+            </a:r>
+            <a:endParaRPr lang="en-US" sz="1200" dirty="0"/>
+          </a:p>
+          <a:p>
+            <a:pPr marL="342900" indent="-342900">
+              <a:spcAft>
+                <a:spcPts val="600"/>
+              </a:spcAft>
+              <a:buSzPct val="100000"/>
+              <a:buFont typeface="+mj-lt"/>
+              <a:buAutoNum type="arabicPeriod" startAt="10"/>
+            </a:pPr>
+            <a:r>
+              <a:rPr lang="en-US" sz="1200" dirty="0">
+                <a:solidFill>
+                  <a:schemeClr val="tx1"/>
+                </a:solidFill>
+              </a:rPr>
+              <a:t>Gesel-UFRJ (2025). Gesel Broadcast: Medidas para Mitigação dos Curtailments.</a:t>
+            </a:r>
+            <a:endParaRPr lang="en-US" sz="1200" dirty="0"/>
+          </a:p>
+          <a:p>
+            <a:pPr marL="342900" indent="-342900">
+              <a:spcAft>
+                <a:spcPts val="600"/>
+              </a:spcAft>
+              <a:buSzPct val="100000"/>
+              <a:buFont typeface="+mj-lt"/>
+              <a:buAutoNum type="arabicPeriod" startAt="10"/>
+            </a:pPr>
+            <a:r>
+              <a:rPr lang="en-US" sz="1200" dirty="0">
+                <a:solidFill>
+                  <a:schemeClr val="tx1"/>
+                </a:solidFill>
+              </a:rPr>
+              <a:t>Agência Infra (2025). Prejuízo de R$ 6,5 bi por curtailment em 2025 (Volt Robotics).</a:t>
+            </a:r>
+            <a:endParaRPr lang="en-US" sz="1200" dirty="0"/>
+          </a:p>
+          <a:p>
+            <a:pPr marL="342900" indent="-342900">
+              <a:spcAft>
+                <a:spcPts val="600"/>
+              </a:spcAft>
+              <a:buSzPct val="100000"/>
+              <a:buFont typeface="+mj-lt"/>
+              <a:buAutoNum type="arabicPeriod" startAt="10"/>
+            </a:pPr>
+            <a:r>
+              <a:rPr lang="en-US" sz="1200" dirty="0">
+                <a:solidFill>
+                  <a:schemeClr val="tx1"/>
+                </a:solidFill>
+              </a:rPr>
+              <a:t>ePowerBay (2026). Análise do Leilão de Baterias LRCAP 2026.</a:t>
+            </a:r>
+            <a:endParaRPr lang="en-US" sz="1200" dirty="0"/>
+          </a:p>
+          <a:p>
+            <a:pPr marL="342900" indent="-342900">
+              <a:spcAft>
+                <a:spcPts val="600"/>
+              </a:spcAft>
+              <a:buSzPct val="100000"/>
+              <a:buFont typeface="+mj-lt"/>
+              <a:buAutoNum type="arabicPeriod" startAt="10"/>
+            </a:pPr>
+            <a:r>
+              <a:rPr lang="en-US" sz="1200" dirty="0">
+                <a:solidFill>
+                  <a:schemeClr val="tx1"/>
+                </a:solidFill>
+              </a:rPr>
+              <a:t>EPE (2025). Anuário Estatístico de Energia Elétrica 2025: participação por fonte na geração.</a:t>
+            </a:r>
+            <a:endParaRPr lang="en-US" sz="1200" dirty="0"/>
+          </a:p>
+        </p:txBody>
+      </p:sp>
+      <p:sp>
+        <p:nvSpPr>
+          <p:cNvPr id="25" name="Slide Number Placeholder 0"/>
+          <p:cNvSpPr>
+            <a:spLocks noGrp="1"/>
+          </p:cNvSpPr>
+          <p:nvPr>
+            <p:ph type="sldNum" sz="quarter" idx="4294967295"/>
+          </p:nvPr>
+        </p:nvSpPr>
+        <p:spPr>
+          <a:xfrm>
+            <a:off x="11155680" y="6400800"/>
+            <a:ext cx="548640" cy="274320"/>
+          </a:xfrm>
+          <a:prstGeom prst="rect">
+            <a:avLst/>
+          </a:prstGeom>
+          <a:extLst>
+            <a:ext uri="{C572A759-6A51-4108-AA02-DFA0A04FC94B}">
+              <ma14:wrappingTextBoxFlag xmlns:ma14="http://schemas.microsoft.com/office/mac/drawingml/2011/main" val="0"/>
+            </a:ext>
+          </a:extLst>
+        </p:spPr>
+        <p:txBody>
+          <a:bodyPr/>
+          <a:lstStyle>
+            <a:lvl1pPr>
+              <a:defRPr sz="1100">
+                <a:solidFill>
+                  <a:schemeClr val="tx2"/>
+                </a:solidFill>
+              </a:defRPr>
+            </a:lvl1pPr>
+          </a:lstStyle>
+          <a:p>
+            <a:pPr algn="r"/>
+            <a:fld id="{F7021451-1387-4CA6-816F-3879F97B5CBC}" type="slidenum">
+              <a:rPr b="0" lang="en-US"/>
+              <a:t>21</a:t>
+            </a:fld>
+            <a:endParaRPr lang="en-US"/>
+          </a:p>
+        </p:txBody>
+      </p:sp>
+    </p:spTree>
+  </p:cSld>
+  <p:clrMapOvr>
+    <a:masterClrMapping/>
+  </p:clrMapOvr>
+</p:sld>
+</file>
+
 <file path=ppt/slides/slide3.xml><?xml version="1.0" encoding="utf-8"?>
 <p:sld xmlns:a="http://schemas.openxmlformats.org/drawingml/2006/main" xmlns:r="http://schemas.openxmlformats.org/officeDocument/2006/relationships" xmlns:p="http://schemas.openxmlformats.org/presentationml/2006/main">
   <p:cSld name="Slide 3">
@@ -14687,7 +23619,7 @@
                   <a:schemeClr val="tx1"/>
                 </a:solidFill>
               </a:rPr>
-              <a:t>Método de rateio dos encargos por fonte</a:t>
+              <a:t>Regra de rateio dos encargos (cenários R1 a R3)</a:t>
             </a:r>
             <a:endParaRPr lang="en-US" sz="1600" dirty="0"/>
           </a:p>

--- a/Baterias_SIN_Economia_Setor_Eletrico_I.pptx
+++ b/Baterias_SIN_Economia_Setor_Eletrico_I.pptx
@@ -127,12 +127,12 @@
   <p:extLst>
     <p:ext uri="{521415D9-36F7-43E2-AB2F-B90AF26B5E84}">
       <p14:sectionLst xmlns:p14="http://schemas.microsoft.com/office/powerpoint/2010/main">
-        <p14:section name="Abertura" id="{9e83f80d-1974-442e-621d-9cfa1c0eb03a}">
+        <p14:section name="Abertura" id="{23f4813b-2755-baf6-a32e-c49f5618e714}">
           <p14:sldIdLst>
             <p14:sldId id="256"/>
           </p14:sldIdLst>
         </p14:section>
-        <p14:section name="Introdução" id="{976cb22c-1c3d-9128-d66e-a5be9b271e92}">
+        <p14:section name="Introdução" id="{cf785abe-d753-9661-bb6f-3668b2ebf8a0}">
           <p14:sldIdLst>
             <p14:sldId id="257"/>
             <p14:sldId id="258"/>
@@ -140,13 +140,13 @@
             <p14:sldId id="260"/>
           </p14:sldIdLst>
         </p14:section>
-        <p14:section name="Objetivos" id="{c6186bae-ee6a-4ca3-9c17-c4dc70eddbcc}">
+        <p14:section name="Objetivos" id="{4421d5ee-5c2a-bb44-8130-000d2b163357}">
           <p14:sldIdLst>
             <p14:sldId id="261"/>
             <p14:sldId id="262"/>
           </p14:sldIdLst>
         </p14:section>
-        <p14:section name="Método" id="{26493bf6-070c-154d-cb02-d0a5aeba2246}">
+        <p14:section name="Método" id="{3905fe6b-e4b0-57a4-bd21-2cecb074173b}">
           <p14:sldIdLst>
             <p14:sldId id="263"/>
             <p14:sldId id="264"/>
@@ -154,13 +154,13 @@
             <p14:sldId id="266"/>
           </p14:sldIdLst>
         </p14:section>
-        <p14:section name="Análise" id="{f783c7a7-d89f-e7c7-1169-8de2f534e1e7}">
+        <p14:section name="Análise" id="{ea4407cd-10a9-8af2-8d8d-2f8754b579db}">
           <p14:sldIdLst>
             <p14:sldId id="267"/>
             <p14:sldId id="268"/>
           </p14:sldIdLst>
         </p14:section>
-        <p14:section name="Encargos e benefícios" id="{064a48ef-eaac-293f-da8d-524665e1eaf9}">
+        <p14:section name="Encargos e benefícios" id="{5ce16659-72c5-4beb-998b-e92bd871b8ad}">
           <p14:sldIdLst>
             <p14:sldId id="269"/>
             <p14:sldId id="270"/>
@@ -170,7 +170,7 @@
             <p14:sldId id="274"/>
           </p14:sldIdLst>
         </p14:section>
-        <p14:section name="Fechamento" id="{a8e2627d-1f9e-b4db-ad49-e8edfa0436c7}">
+        <p14:section name="Fechamento" id="{c211a574-f213-3be3-17c1-128c828bd6f1}">
           <p14:sldIdLst>
             <p14:sldId id="275"/>
             <p14:sldId id="276"/>
@@ -235,7 +235,7 @@
               <c:strCache>
                 <c:ptCount val="1"/>
                 <c:pt idx="0">
-                  <c:v>R1: rateio universal</c:v>
+                  <c:v>A: hidro e térmicas em P1</c:v>
                 </c:pt>
               </c:strCache>
             </c:strRef>
@@ -318,7 +318,7 @@
               <c:strCache>
                 <c:ptCount val="1"/>
                 <c:pt idx="0">
-                  <c:v>R2: modulado por flexibilidade</c:v>
+                  <c:v>B: distribuídas entre P1 e P4</c:v>
                 </c:pt>
               </c:strCache>
             </c:strRef>
@@ -380,13 +380,96 @@
                 <c:formatCode>General</c:formatCode>
                 <c:ptCount val="3"/>
                 <c:pt idx="0">
-                  <c:v>24.4</c:v>
+                  <c:v>44.6</c:v>
                 </c:pt>
                 <c:pt idx="1">
-                  <c:v>49.8</c:v>
+                  <c:v>36.5</c:v>
                 </c:pt>
                 <c:pt idx="2">
-                  <c:v>25.8</c:v>
+                  <c:v>18.9</c:v>
+                </c:pt>
+              </c:numCache>
+            </c:numRef>
+          </c:val>
+        </c:ser>
+        <c:ser>
+          <c:idx val="2"/>
+          <c:order val="2"/>
+          <c:tx>
+            <c:strRef>
+              <c:f>Sheet1!$D$1</c:f>
+              <c:strCache>
+                <c:ptCount val="1"/>
+                <c:pt idx="0">
+                  <c:v>C: hidro e térmicas em P4</c:v>
+                </c:pt>
+              </c:strCache>
+            </c:strRef>
+          </c:tx>
+          <c:spPr>
+            <a:solidFill>
+              <a:srgbClr val="1FB5A8"/>
+            </a:solidFill>
+            <a:effectLst/>
+          </c:spPr>
+          <c:invertIfNegative val="0"/>
+          <c:dLbls>
+            <c:numFmt formatCode="0.0" sourceLinked="0"/>
+            <c:txPr>
+              <a:bodyPr/>
+              <a:lstStyle/>
+              <a:p>
+                <a:pPr>
+                  <a:defRPr b="0" i="0" strike="noStrike" sz="1200" u="none">
+                    <a:solidFill>
+                      <a:srgbClr val="0B1A2E"/>
+                    </a:solidFill>
+                    <a:latin typeface="+mn-lt"/>
+                  </a:defRPr>
+                </a:pPr>
+              </a:p>
+            </c:txPr>
+            <c:showLegendKey val="0"/>
+            <c:showVal val="1"/>
+            <c:showCatName val="0"/>
+            <c:showSerName val="0"/>
+            <c:showPercent val="0"/>
+            <c:showBubbleSize val="0"/>
+            <c:showLeaderLines val="0"/>
+          </c:dLbls>
+          <c:cat>
+            <c:multiLvlStrRef>
+              <c:f>Sheet1!$A$2:$A$4</c:f>
+              <c:multiLvlStrCache>
+                <c:ptCount val="3"/>
+                <c:lvl>
+                  <c:pt idx="0">
+                    <c:v>Hidrelétricas</c:v>
+                  </c:pt>
+                  <c:pt idx="1">
+                    <c:v>Eólicas e solares</c:v>
+                  </c:pt>
+                  <c:pt idx="2">
+                    <c:v>Térmicas e demais</c:v>
+                  </c:pt>
+                </c:lvl>
+              </c:multiLvlStrCache>
+            </c:multiLvlStrRef>
+          </c:cat>
+          <c:val>
+            <c:numRef>
+              <c:f>Sheet1!$D$2:$D$4</c:f>
+              <c:numCache>
+                <c:formatCode>General</c:formatCode>
+                <c:ptCount val="3"/>
+                <c:pt idx="0">
+                  <c:v>28.9</c:v>
+                </c:pt>
+                <c:pt idx="1">
+                  <c:v>58.9</c:v>
+                </c:pt>
+                <c:pt idx="2">
+                  <c:v>12.2</c:v>
                 </c:pt>
               </c:numCache>
             </c:numRef>
@@ -416,7 +499,7 @@
           <c:showBubbleSize val="0"/>
           <c:showLeaderLines val="0"/>
         </c:dLbls>
-        <c:gapWidth val="50"/>
+        <c:gapWidth val="40"/>
         <c:overlap val="0"/>
         <c:axId val="2094734554"/>
         <c:axId val="2094734552"/>
@@ -1841,7 +1924,7 @@
           <a:p>
             <a:r>
               <a:rPr lang="en-US" dirty="0"/>
-              <a:t>Os coeficientes de 100% a 25% são da proposta da área técnica em consulta pública; podem mudar. Os três cenários de rateio (R1 a R3) alimentam a análise de sensibilidade do OE4 e do OE5.</a:t>
+              <a:t>Os quatro patamares (100%, 75%, 50% e 25%) são da proposta da área técnica em consulta pública; podem mudar. Segundo resumos da nota técnica, valem para todas as classes de geração, e eólicas e solares entram inicialmente no P1. Os critérios de cada patamar não foram localizados. Os cenários de rateio R1 a R3 alimentam a análise de sensibilidade do OE4 e do OE5.</a:t>
             </a:r>
             <a:endParaRPr lang="en-US" dirty="0"/>
           </a:p>
@@ -1929,7 +2012,7 @@
           <a:p>
             <a:r>
               <a:rPr lang="en-US" dirty="0"/>
-              <a:t>Exercício ilustrativo, não é a regra oficial. Parcela da fonte = geração x coeficiente, dividida pela soma. R1 não usa coeficiente. Em R2, hidro 25% e eólica e solar 100% são as pontas citadas na proposta; as térmicas variam de 25% a 100% e o gráfico usa o ponto médio. Resultado do ponto médio: hidro 24,4%, eólica e solar 49,8%, térmicas 25,8%. Faixas: térmicas a 100% dá hidro 21,1%, eólica e solar 43,1%, térmicas 35,8%; térmicas a 25% dá 28,9%, 58,9% e 12,2%. A MMGD está fora do rateio e a amostra da EPE pode incluí-la na geração.</a:t>
+              <a:t>Exercício ilustrativo, não é a regra oficial. Parcela da fonte = geração x coeficiente, dividida pela soma dos pesos. Eólicas e solares ficam em P1 (100%), como na proposta. Hidrelétricas e térmicas recebem o mesmo coeficiente k em cada cenário. A: k = 100% (todas em P1), que equivale ao rateio universal sem diferenciar: 51,7%, 26,4% e 21,9%. B: k = 62,5%, média simples dos quatro patamares (1 + 0,75 + 0,5 + 0,25, dividido por 4), equivalente a distribuição uniforme: pesos 32,31, 26,40 e 13,69, soma 72,4, parcelas 44,6%, 36,5% e 18,9%. C: k = 25% (todas em P4): pesos 12,93, 26,40 e 5,48, soma 44,8, parcelas 28,9%, 58,9% e 12,2%. Limitações: os critérios de cada patamar e a classificação das usinas não foram localizados; hidro e térmicas têm distribuições diferentes na prática; 'térmicas e demais' é um resíduo e pode incluir MMGD, que está fora do rateio.</a:t>
             </a:r>
             <a:endParaRPr lang="en-US" dirty="0"/>
           </a:p>
@@ -2105,7 +2188,7 @@
           <a:p>
             <a:r>
               <a:rPr lang="en-US" dirty="0"/>
-              <a:t>Esta tabela organiza as hipóteses: eólicas e UFVs pagam mais, mas são as que mais ganham com menos corte. As térmicas podem perder despacho. As hidrelétricas pagam menos e ganham em risco hidrológico e armazenamento. As simulações dirão o saldo real.</a:t>
+              <a:t>Esta tabela organiza as hipóteses: eólicas e UFVs partem do patamar mais alto, mas são as que mais ganham com menos corte. As térmicas podem perder despacho. As hidrelétricas dependem do patamar em que forem classificadas e ganham em risco hidrológico e armazenamento. As simulações dirão o saldo real.</a:t>
             </a:r>
             <a:endParaRPr lang="en-US" dirty="0"/>
           </a:p>
@@ -11718,7 +11801,7 @@
                   <a:schemeClr val="tx1"/>
                 </a:solidFill>
               </a:rPr>
-              <a:t>Proposta da área técnica da ANEEL (NT 101/2026): quanto menos flexível a fonte, maior a parcela</a:t>
+              <a:t>Proposta da área técnica da ANEEL (NT 101/2026): quanto menos flexível a usina, maior a parcela</a:t>
             </a:r>
             <a:endParaRPr lang="en-US" sz="1600" dirty="0"/>
           </a:p>
@@ -11732,8 +11815,8 @@
         </p:nvSpPr>
         <p:spPr>
           <a:xfrm>
-            <a:off x="548640" y="2194560"/>
-            <a:ext cx="6126480" cy="320040"/>
+            <a:off x="548640" y="2011680"/>
+            <a:ext cx="6126480" cy="274320"/>
           </a:xfrm>
           <a:prstGeom prst="rect">
             <a:avLst/>
@@ -11754,7 +11837,7 @@
                   <a:schemeClr val="tx2"/>
                 </a:solidFill>
               </a:rPr>
-              <a:t>Inflexíveis e intermitentes</a:t>
+              <a:t>P1: inflexível</a:t>
             </a:r>
             <a:endParaRPr lang="en-US" sz="1400" dirty="0"/>
           </a:p>
@@ -11762,18 +11845,18 @@
       </p:sp>
       <p:sp>
         <p:nvSpPr>
-          <p:cNvPr id="5" name="Share bar 1"/>
+          <p:cNvPr id="5" name="Tier bar 1"/>
           <p:cNvSpPr/>
           <p:nvPr/>
         </p:nvSpPr>
         <p:spPr>
           <a:xfrm>
-            <a:off x="548640" y="2560320"/>
-            <a:ext cx="6126480" cy="457200"/>
+            <a:off x="548640" y="2304288"/>
+            <a:ext cx="6126480" cy="384048"/>
           </a:xfrm>
           <a:prstGeom prst="roundRect">
             <a:avLst>
-              <a:gd name="adj" fmla="val 16000"/>
+              <a:gd name="adj" fmla="val 19048"/>
             </a:avLst>
           </a:prstGeom>
           <a:solidFill>
@@ -11795,8 +11878,8 @@
         </p:nvSpPr>
         <p:spPr>
           <a:xfrm>
-            <a:off x="685800" y="2560320"/>
-            <a:ext cx="2743200" cy="457200"/>
+            <a:off x="685800" y="2304288"/>
+            <a:ext cx="2743200" cy="384048"/>
           </a:xfrm>
           <a:prstGeom prst="rect">
             <a:avLst/>
@@ -11831,8 +11914,8 @@
         </p:nvSpPr>
         <p:spPr>
           <a:xfrm>
-            <a:off x="548640" y="3154680"/>
-            <a:ext cx="6126480" cy="320040"/>
+            <a:off x="548640" y="2788920"/>
+            <a:ext cx="6126480" cy="274320"/>
           </a:xfrm>
           <a:prstGeom prst="rect">
             <a:avLst/>
@@ -11853,7 +11936,7 @@
                   <a:schemeClr val="tx2"/>
                 </a:solidFill>
               </a:rPr>
-              <a:t>Flexibilidade intermediária</a:t>
+              <a:t>P2: baixa flexibilidade</a:t>
             </a:r>
             <a:endParaRPr lang="en-US" sz="1400" dirty="0"/>
           </a:p>
@@ -11861,18 +11944,18 @@
       </p:sp>
       <p:sp>
         <p:nvSpPr>
-          <p:cNvPr id="8" name="Share bar 2"/>
+          <p:cNvPr id="8" name="Tier bar 2"/>
           <p:cNvSpPr/>
           <p:nvPr/>
         </p:nvSpPr>
         <p:spPr>
           <a:xfrm>
-            <a:off x="548640" y="3520440"/>
-            <a:ext cx="3063240" cy="457200"/>
+            <a:off x="548640" y="3081528"/>
+            <a:ext cx="4594860" cy="384048"/>
           </a:xfrm>
           <a:prstGeom prst="roundRect">
             <a:avLst>
-              <a:gd name="adj" fmla="val 16000"/>
+              <a:gd name="adj" fmla="val 19048"/>
             </a:avLst>
           </a:prstGeom>
           <a:solidFill>
@@ -11894,8 +11977,8 @@
         </p:nvSpPr>
         <p:spPr>
           <a:xfrm>
-            <a:off x="685800" y="3520440"/>
-            <a:ext cx="2743200" cy="457200"/>
+            <a:off x="685800" y="3081528"/>
+            <a:ext cx="2743200" cy="384048"/>
           </a:xfrm>
           <a:prstGeom prst="rect">
             <a:avLst/>
@@ -11916,7 +11999,7 @@
                   <a:schemeClr val="tx1"/>
                 </a:solidFill>
               </a:rPr>
-              <a:t>75% a 25%</a:t>
+              <a:t>75%</a:t>
             </a:r>
             <a:endParaRPr lang="en-US" sz="1600" dirty="0"/>
           </a:p>
@@ -11930,8 +12013,8 @@
         </p:nvSpPr>
         <p:spPr>
           <a:xfrm>
-            <a:off x="548640" y="4114800"/>
-            <a:ext cx="6126480" cy="320040"/>
+            <a:off x="548640" y="3566160"/>
+            <a:ext cx="6126480" cy="274320"/>
           </a:xfrm>
           <a:prstGeom prst="rect">
             <a:avLst/>
@@ -11952,7 +12035,7 @@
                   <a:schemeClr val="tx2"/>
                 </a:solidFill>
               </a:rPr>
-              <a:t>Flexibilidade muito alta</a:t>
+              <a:t>P3: alta flexibilidade</a:t>
             </a:r>
             <a:endParaRPr lang="en-US" sz="1400" dirty="0"/>
           </a:p>
@@ -11960,18 +12043,117 @@
       </p:sp>
       <p:sp>
         <p:nvSpPr>
-          <p:cNvPr id="11" name="Share bar 3"/>
+          <p:cNvPr id="11" name="Tier bar 3"/>
           <p:cNvSpPr/>
           <p:nvPr/>
         </p:nvSpPr>
         <p:spPr>
           <a:xfrm>
-            <a:off x="548640" y="4480560"/>
-            <a:ext cx="1531620" cy="457200"/>
+            <a:off x="548640" y="3858768"/>
+            <a:ext cx="3063240" cy="384048"/>
           </a:xfrm>
           <a:prstGeom prst="roundRect">
             <a:avLst>
-              <a:gd name="adj" fmla="val 16000"/>
+              <a:gd name="adj" fmla="val 19048"/>
+            </a:avLst>
+          </a:prstGeom>
+          <a:solidFill>
+            <a:schemeClr val="accent1"/>
+          </a:solidFill>
+          <a:ln w="12700">
+            <a:solidFill>
+              <a:schemeClr val="accent1"/>
+            </a:solidFill>
+            <a:prstDash val="solid"/>
+          </a:ln>
+        </p:spPr>
+      </p:sp>
+      <p:sp>
+        <p:nvSpPr>
+          <p:cNvPr id="12" name="Text 10"/>
+          <p:cNvSpPr txBox="1"/>
+          <p:nvPr/>
+        </p:nvSpPr>
+        <p:spPr>
+          <a:xfrm>
+            <a:off x="685800" y="3858768"/>
+            <a:ext cx="2743200" cy="384048"/>
+          </a:xfrm>
+          <a:prstGeom prst="rect">
+            <a:avLst/>
+          </a:prstGeom>
+          <a:noFill/>
+          <a:ln/>
+        </p:spPr>
+        <p:txBody>
+          <a:bodyPr wrap="square" lIns="0" tIns="0" rIns="0" bIns="0" rtlCol="0" anchor="ctr"/>
+          <a:lstStyle/>
+          <a:p>
+            <a:pPr indent="0" marL="0">
+              <a:buNone/>
+            </a:pPr>
+            <a:r>
+              <a:rPr lang="en-US" sz="1600" b="1" dirty="0">
+                <a:solidFill>
+                  <a:schemeClr val="tx1"/>
+                </a:solidFill>
+              </a:rPr>
+              <a:t>50%</a:t>
+            </a:r>
+            <a:endParaRPr lang="en-US" sz="1600" dirty="0"/>
+          </a:p>
+        </p:txBody>
+      </p:sp>
+      <p:sp>
+        <p:nvSpPr>
+          <p:cNvPr id="13" name="Text 11"/>
+          <p:cNvSpPr txBox="1"/>
+          <p:nvPr/>
+        </p:nvSpPr>
+        <p:spPr>
+          <a:xfrm>
+            <a:off x="548640" y="4343400"/>
+            <a:ext cx="6126480" cy="274320"/>
+          </a:xfrm>
+          <a:prstGeom prst="rect">
+            <a:avLst/>
+          </a:prstGeom>
+          <a:noFill/>
+          <a:ln/>
+        </p:spPr>
+        <p:txBody>
+          <a:bodyPr wrap="square" lIns="0" tIns="0" rIns="0" bIns="0" rtlCol="0" anchor="t"/>
+          <a:lstStyle/>
+          <a:p>
+            <a:pPr indent="0" marL="0">
+              <a:buNone/>
+            </a:pPr>
+            <a:r>
+              <a:rPr lang="en-US" sz="1400" dirty="0">
+                <a:solidFill>
+                  <a:schemeClr val="tx2"/>
+                </a:solidFill>
+              </a:rPr>
+              <a:t>P4: flexibilidade muito alta</a:t>
+            </a:r>
+            <a:endParaRPr lang="en-US" sz="1400" dirty="0"/>
+          </a:p>
+        </p:txBody>
+      </p:sp>
+      <p:sp>
+        <p:nvSpPr>
+          <p:cNvPr id="14" name="Tier bar 4"/>
+          <p:cNvSpPr/>
+          <p:nvPr/>
+        </p:nvSpPr>
+        <p:spPr>
+          <a:xfrm>
+            <a:off x="548640" y="4636008"/>
+            <a:ext cx="1531620" cy="384048"/>
+          </a:xfrm>
+          <a:prstGeom prst="roundRect">
+            <a:avLst>
+              <a:gd name="adj" fmla="val 19048"/>
             </a:avLst>
           </a:prstGeom>
           <a:solidFill>
@@ -11987,14 +12169,14 @@
       </p:sp>
       <p:sp>
         <p:nvSpPr>
-          <p:cNvPr id="12" name="Text 10"/>
+          <p:cNvPr id="15" name="Text 13"/>
           <p:cNvSpPr txBox="1"/>
           <p:nvPr/>
         </p:nvSpPr>
         <p:spPr>
           <a:xfrm>
-            <a:off x="685800" y="4480560"/>
-            <a:ext cx="2743200" cy="457200"/>
+            <a:off x="685800" y="4636008"/>
+            <a:ext cx="2743200" cy="384048"/>
           </a:xfrm>
           <a:prstGeom prst="rect">
             <a:avLst/>
@@ -12023,14 +12205,14 @@
       </p:sp>
       <p:sp>
         <p:nvSpPr>
-          <p:cNvPr id="13" name="Text 11"/>
+          <p:cNvPr id="16" name="Text 14"/>
           <p:cNvSpPr txBox="1"/>
           <p:nvPr/>
         </p:nvSpPr>
         <p:spPr>
           <a:xfrm>
-            <a:off x="548640" y="5120640"/>
-            <a:ext cx="6126480" cy="914400"/>
+            <a:off x="548640" y="5212080"/>
+            <a:ext cx="6126480" cy="1005840"/>
           </a:xfrm>
           <a:prstGeom prst="rect">
             <a:avLst/>
@@ -12051,7 +12233,7 @@
                   <a:schemeClr val="tx2"/>
                 </a:solidFill>
               </a:rPr>
-              <a:t>Na prática: eólicas, UFVs e nucleares pagam mais, as térmicas um pouco menos e as hidrelétricas o menor patamar. A MMGD ficaria fora do rateio.</a:t>
+              <a:t>Os patamares valem para todas as classes de geração: o P4 é o mais flexível dentro de cada classe. Eólicas e solares partem do P1, sem armazenamento associado. Hidrelétricas e térmicas dependem da classificação anual do ONS.</a:t>
             </a:r>
             <a:endParaRPr lang="en-US" sz="1400" dirty="0"/>
           </a:p>
@@ -12059,7 +12241,7 @@
       </p:sp>
       <p:sp>
         <p:nvSpPr>
-          <p:cNvPr id="14" name="Text 12"/>
+          <p:cNvPr id="17" name="Text 15"/>
           <p:cNvSpPr txBox="1"/>
           <p:nvPr/>
         </p:nvSpPr>
@@ -12095,7 +12277,7 @@
       </p:sp>
       <p:sp>
         <p:nvSpPr>
-          <p:cNvPr id="15" name="Rateio scenario R1"/>
+          <p:cNvPr id="18" name="Rateio scenario R1"/>
           <p:cNvSpPr/>
           <p:nvPr/>
         </p:nvSpPr>
@@ -12122,7 +12304,7 @@
       </p:sp>
       <p:sp>
         <p:nvSpPr>
-          <p:cNvPr id="16" name="Scenario tag R1"/>
+          <p:cNvPr id="19" name="Scenario tag R1"/>
           <p:cNvSpPr/>
           <p:nvPr/>
         </p:nvSpPr>
@@ -12149,7 +12331,7 @@
       </p:sp>
       <p:sp>
         <p:nvSpPr>
-          <p:cNvPr id="17" name="Text 15"/>
+          <p:cNvPr id="20" name="Text 18"/>
           <p:cNvSpPr txBox="1"/>
           <p:nvPr/>
         </p:nvSpPr>
@@ -12188,7 +12370,7 @@
       </p:sp>
       <p:sp>
         <p:nvSpPr>
-          <p:cNvPr id="18" name="Text 16"/>
+          <p:cNvPr id="21" name="Text 19"/>
           <p:cNvSpPr txBox="1"/>
           <p:nvPr/>
         </p:nvSpPr>
@@ -12227,7 +12409,7 @@
       </p:sp>
       <p:sp>
         <p:nvSpPr>
-          <p:cNvPr id="19" name="Text 17"/>
+          <p:cNvPr id="22" name="Text 20"/>
           <p:cNvSpPr txBox="1"/>
           <p:nvPr/>
         </p:nvSpPr>
@@ -12263,7 +12445,7 @@
       </p:sp>
       <p:sp>
         <p:nvSpPr>
-          <p:cNvPr id="20" name="Rateio scenario R2"/>
+          <p:cNvPr id="23" name="Rateio scenario R2"/>
           <p:cNvSpPr/>
           <p:nvPr/>
         </p:nvSpPr>
@@ -12290,7 +12472,7 @@
       </p:sp>
       <p:sp>
         <p:nvSpPr>
-          <p:cNvPr id="21" name="Scenario tag R2"/>
+          <p:cNvPr id="24" name="Scenario tag R2"/>
           <p:cNvSpPr/>
           <p:nvPr/>
         </p:nvSpPr>
@@ -12317,7 +12499,7 @@
       </p:sp>
       <p:sp>
         <p:nvSpPr>
-          <p:cNvPr id="22" name="Text 20"/>
+          <p:cNvPr id="25" name="Text 23"/>
           <p:cNvSpPr txBox="1"/>
           <p:nvPr/>
         </p:nvSpPr>
@@ -12356,7 +12538,7 @@
       </p:sp>
       <p:sp>
         <p:nvSpPr>
-          <p:cNvPr id="23" name="Text 21"/>
+          <p:cNvPr id="26" name="Text 24"/>
           <p:cNvSpPr txBox="1"/>
           <p:nvPr/>
         </p:nvSpPr>
@@ -12395,7 +12577,7 @@
       </p:sp>
       <p:sp>
         <p:nvSpPr>
-          <p:cNvPr id="24" name="Text 22"/>
+          <p:cNvPr id="27" name="Text 25"/>
           <p:cNvSpPr txBox="1"/>
           <p:nvPr/>
         </p:nvSpPr>
@@ -12423,7 +12605,7 @@
                   <a:schemeClr val="tx2"/>
                 </a:solidFill>
               </a:rPr>
-              <a:t>Proposta da ANEEL em consulta: coeficientes de 100% a 25%.</a:t>
+              <a:t>Proposta da ANEEL em consulta: quatro patamares, de 100% a 25%.</a:t>
             </a:r>
             <a:endParaRPr lang="en-US" sz="1400" dirty="0"/>
           </a:p>
@@ -12431,7 +12613,7 @@
       </p:sp>
       <p:sp>
         <p:nvSpPr>
-          <p:cNvPr id="25" name="Rateio scenario R3"/>
+          <p:cNvPr id="28" name="Rateio scenario R3"/>
           <p:cNvSpPr/>
           <p:nvPr/>
         </p:nvSpPr>
@@ -12458,7 +12640,7 @@
       </p:sp>
       <p:sp>
         <p:nvSpPr>
-          <p:cNvPr id="26" name="Scenario tag R3"/>
+          <p:cNvPr id="29" name="Scenario tag R3"/>
           <p:cNvSpPr/>
           <p:nvPr/>
         </p:nvSpPr>
@@ -12485,7 +12667,7 @@
       </p:sp>
       <p:sp>
         <p:nvSpPr>
-          <p:cNvPr id="27" name="Text 25"/>
+          <p:cNvPr id="30" name="Text 28"/>
           <p:cNvSpPr txBox="1"/>
           <p:nvPr/>
         </p:nvSpPr>
@@ -12524,7 +12706,7 @@
       </p:sp>
       <p:sp>
         <p:nvSpPr>
-          <p:cNvPr id="28" name="Text 26"/>
+          <p:cNvPr id="31" name="Text 29"/>
           <p:cNvSpPr txBox="1"/>
           <p:nvPr/>
         </p:nvSpPr>
@@ -12563,7 +12745,7 @@
       </p:sp>
       <p:sp>
         <p:nvSpPr>
-          <p:cNvPr id="29" name="Text 27"/>
+          <p:cNvPr id="32" name="Text 30"/>
           <p:cNvSpPr txBox="1"/>
           <p:nvPr/>
         </p:nvSpPr>
@@ -12599,7 +12781,7 @@
       </p:sp>
       <p:sp>
         <p:nvSpPr>
-          <p:cNvPr id="30" name="Text 28"/>
+          <p:cNvPr id="33" name="Text 31"/>
           <p:cNvSpPr txBox="1"/>
           <p:nvPr/>
         </p:nvSpPr>
@@ -12635,7 +12817,7 @@
       </p:sp>
       <p:sp>
         <p:nvSpPr>
-          <p:cNvPr id="31" name="Text 29"/>
+          <p:cNvPr id="34" name="Text 32"/>
           <p:cNvSpPr txBox="1"/>
           <p:nvPr/>
         </p:nvSpPr>
@@ -12663,7 +12845,7 @@
                   <a:schemeClr val="tx2"/>
                 </a:solidFill>
               </a:rPr>
-              <a:t>Fontes: Agência iNFRA (6/10/2026); TAGD Law (2026); Canal Energia (2026); ANEEL, CP 37/2026. A fórmula final ainda será definida pela ANEEL.</a:t>
+              <a:t>Fontes: NT 101/2026 e CP 37/2026 (ANEEL), via Canal Solar, ePowerBay e TAGD Law (2026); Canal Energia (2026). A fórmula final ainda será definida pela ANEEL.</a:t>
             </a:r>
             <a:endParaRPr lang="en-US" sz="1000" dirty="0"/>
           </a:p>
@@ -12843,10 +13025,10 @@
             <a:tbl>
               <a:tblPr/>
               <a:tblGrid>
-                <a:gridCol w="1280160"/>
-                <a:gridCol w="640080"/>
+                <a:gridCol w="1463040"/>
                 <a:gridCol w="1051560"/>
-                <a:gridCol w="1764792"/>
+                <a:gridCol w="1097280"/>
+                <a:gridCol w="1124712"/>
               </a:tblGrid>
               <a:tr h="548640">
                 <a:tc>
@@ -12934,7 +13116,7 @@
                           <a:ea typeface="Calibri" pitchFamily="34" charset="-122"/>
                           <a:cs typeface="Calibri" pitchFamily="34" charset="-120"/>
                         </a:rPr>
-                        <a:t>R1</a:t>
+                        <a:t>A (k = 100%)</a:t>
                       </a:r>
                       <a:endParaRPr lang="en-US" sz="1400" dirty="0">
                         <a:latin typeface="Calibri" charset="0"/>
@@ -13002,7 +13184,7 @@
                           <a:ea typeface="Calibri" pitchFamily="34" charset="-122"/>
                           <a:cs typeface="Calibri" pitchFamily="34" charset="-120"/>
                         </a:rPr>
-                        <a:t>R2 (faixa)</a:t>
+                        <a:t>B (k = 62,5%)</a:t>
                       </a:r>
                       <a:endParaRPr lang="en-US" sz="1400" dirty="0">
                         <a:latin typeface="Calibri" charset="0"/>
@@ -13070,7 +13252,7 @@
                           <a:ea typeface="Calibri" pitchFamily="34" charset="-122"/>
                           <a:cs typeface="Calibri" pitchFamily="34" charset="-120"/>
                         </a:rPr>
-                        <a:t>R$ mi / R$ 1 bi</a:t>
+                        <a:t>C (k = 25%)</a:t>
                       </a:r>
                       <a:endParaRPr lang="en-US" sz="1400" dirty="0">
                         <a:latin typeface="Calibri" charset="0"/>
@@ -13122,7 +13304,7 @@
                   </a:tcPr>
                 </a:tc>
               </a:tr>
-              <a:tr h="777240">
+              <a:tr h="731520">
                 <a:tc>
                   <a:txBody>
                     <a:bodyPr/>
@@ -13276,7 +13458,7 @@
                           <a:ea typeface="Calibri" pitchFamily="34" charset="-122"/>
                           <a:cs typeface="Calibri" pitchFamily="34" charset="-120"/>
                         </a:rPr>
-                        <a:t>21% a 29%</a:t>
+                        <a:t>44,6%</a:t>
                       </a:r>
                       <a:endParaRPr lang="en-US" sz="1400" dirty="0">
                         <a:latin typeface="Calibri" charset="0"/>
@@ -13344,7 +13526,7 @@
                           <a:ea typeface="Calibri" pitchFamily="34" charset="-122"/>
                           <a:cs typeface="Calibri" pitchFamily="34" charset="-120"/>
                         </a:rPr>
-                        <a:t>517 (R1) | 244 (R2)</a:t>
+                        <a:t>28,9%</a:t>
                       </a:r>
                       <a:endParaRPr lang="en-US" sz="1400" dirty="0">
                         <a:latin typeface="Calibri" charset="0"/>
@@ -13396,7 +13578,7 @@
                   </a:tcPr>
                 </a:tc>
               </a:tr>
-              <a:tr h="777240">
+              <a:tr h="731520">
                 <a:tc>
                   <a:txBody>
                     <a:bodyPr/>
@@ -13550,7 +13732,7 @@
                           <a:ea typeface="Calibri" pitchFamily="34" charset="-122"/>
                           <a:cs typeface="Calibri" pitchFamily="34" charset="-120"/>
                         </a:rPr>
-                        <a:t>43% a 59%</a:t>
+                        <a:t>36,5%</a:t>
                       </a:r>
                       <a:endParaRPr lang="en-US" sz="1400" dirty="0">
                         <a:latin typeface="Calibri" charset="0"/>
@@ -13618,7 +13800,7 @@
                           <a:ea typeface="Calibri" pitchFamily="34" charset="-122"/>
                           <a:cs typeface="Calibri" pitchFamily="34" charset="-120"/>
                         </a:rPr>
-                        <a:t>264 (R1) | 498 (R2)</a:t>
+                        <a:t>58,9%</a:t>
                       </a:r>
                       <a:endParaRPr lang="en-US" sz="1400" dirty="0">
                         <a:latin typeface="Calibri" charset="0"/>
@@ -13670,7 +13852,7 @@
                   </a:tcPr>
                 </a:tc>
               </a:tr>
-              <a:tr h="777240">
+              <a:tr h="731520">
                 <a:tc>
                   <a:txBody>
                     <a:bodyPr/>
@@ -13824,7 +14006,7 @@
                           <a:ea typeface="Calibri" pitchFamily="34" charset="-122"/>
                           <a:cs typeface="Calibri" pitchFamily="34" charset="-120"/>
                         </a:rPr>
-                        <a:t>12% a 36%</a:t>
+                        <a:t>18,9%</a:t>
                       </a:r>
                       <a:endParaRPr lang="en-US" sz="1400" dirty="0">
                         <a:latin typeface="Calibri" charset="0"/>
@@ -13892,7 +14074,7 @@
                           <a:ea typeface="Calibri" pitchFamily="34" charset="-122"/>
                           <a:cs typeface="Calibri" pitchFamily="34" charset="-120"/>
                         </a:rPr>
-                        <a:t>219 (R1) | 258 (R2)</a:t>
+                        <a:t>12,2%</a:t>
                       </a:r>
                       <a:endParaRPr lang="en-US" sz="1400" dirty="0">
                         <a:latin typeface="Calibri" charset="0"/>
@@ -13956,8 +14138,8 @@
         </p:nvSpPr>
         <p:spPr>
           <a:xfrm>
-            <a:off x="6903720" y="4617720"/>
-            <a:ext cx="4739335" cy="822960"/>
+            <a:off x="6903720" y="4389120"/>
+            <a:ext cx="4739335" cy="1097280"/>
           </a:xfrm>
           <a:prstGeom prst="rect">
             <a:avLst/>
@@ -13978,7 +14160,7 @@
                   <a:schemeClr val="tx2"/>
                 </a:solidFill>
               </a:rPr>
-              <a:t>Valores em R$ milhões por R$ 1 bilhão de receita fixa anual. R2 usa o ponto médio das térmicas (62,5%).</a:t>
+              <a:t>Eólicas e solares fixas em P1 (100%). Hidrelétricas e térmicas usam o mesmo coeficiente k: 100% (tudo P1), 62,5% (média dos quatro patamares) e 25% (tudo P4). Para cada R$ 1 bi de receita fixa, 1% equivale a R$ 10 mi.</a:t>
             </a:r>
             <a:endParaRPr lang="en-US" sz="1200" dirty="0"/>
           </a:p>
@@ -14052,7 +14234,7 @@
                   <a:schemeClr val="bg1"/>
                 </a:solidFill>
               </a:rPr>
-              <a:t>A ANEEL ainda define a fórmula. Premissas: base = geração de 2025 (EPE); coeficientes assumidos de 25% (hidro), 100% (eólica e solar) e 25% a 100% (térmicas).</a:t>
+              <a:t>A ANEEL ainda define a fórmula e os critérios de cada patamar. Os cenários mostram o intervalo possível, com a geração de 2025 (EPE) como base.</a:t>
             </a:r>
             <a:endParaRPr lang="en-US" sz="1400" dirty="0"/>
           </a:p>
@@ -14088,7 +14270,7 @@
                   <a:schemeClr val="tx2"/>
                 </a:solidFill>
               </a:rPr>
-              <a:t>Cálculo próprio com geração de 2025 do Anuário Estatístico de Energia Elétrica 2025 (EPE): hidráulica 51,7%, eólica e solar 26,4% e demais 21,9% (resíduo).</a:t>
+              <a:t>Cálculo próprio com a geração de 2025 do Anuário Estatístico de Energia Elétrica 2025 (EPE): hidráulica 51,7%, eólica e solar 26,4% e demais 21,9% (resíduo).</a:t>
             </a:r>
             <a:endParaRPr lang="en-US" sz="1000" dirty="0"/>
           </a:p>
@@ -15306,7 +15488,7 @@
                           <a:ea typeface="Calibri" pitchFamily="34" charset="-122"/>
                           <a:cs typeface="Calibri" pitchFamily="34" charset="-120"/>
                         </a:rPr>
-                        <a:t>100%, por serem intermitentes</a:t>
+                        <a:t>Parte do P1 (100%); pode cair com armazenamento associado</a:t>
                       </a:r>
                       <a:endParaRPr lang="en-US" sz="1400" dirty="0">
                         <a:latin typeface="Calibri" charset="0"/>
@@ -15580,7 +15762,7 @@
                           <a:ea typeface="Calibri" pitchFamily="34" charset="-122"/>
                           <a:cs typeface="Calibri" pitchFamily="34" charset="-120"/>
                         </a:rPr>
-                        <a:t>De 100% a 25%, conforme a flexibilidade</a:t>
+                        <a:t>P1 a P4 (100% a 25%), conforme a classificação do ONS</a:t>
                       </a:r>
                       <a:endParaRPr lang="en-US" sz="1400" dirty="0">
                         <a:latin typeface="Calibri" charset="0"/>
@@ -15854,7 +16036,7 @@
                           <a:ea typeface="Calibri" pitchFamily="34" charset="-122"/>
                           <a:cs typeface="Calibri" pitchFamily="34" charset="-120"/>
                         </a:rPr>
-                        <a:t>Menor patamar (25%)</a:t>
+                        <a:t>P1 a P4 (100% a 25%), conforme a classificação do ONS</a:t>
                       </a:r>
                       <a:endParaRPr lang="en-US" sz="1400" dirty="0">
                         <a:latin typeface="Calibri" charset="0"/>
@@ -15990,7 +16172,7 @@
                           <a:ea typeface="Calibri" pitchFamily="34" charset="-122"/>
                           <a:cs typeface="Calibri" pitchFamily="34" charset="-120"/>
                         </a:rPr>
-                        <a:t>Tende a ser positivo</a:t>
+                        <a:t>Depende do patamar e do ganho hídrico</a:t>
                       </a:r>
                       <a:endParaRPr lang="en-US" sz="1400" dirty="0">
                         <a:latin typeface="Calibri" charset="0"/>
@@ -16424,7 +16606,7 @@
                   <a:schemeClr val="tx2"/>
                 </a:solidFill>
               </a:rPr>
-              <a:t>Encargos: proposta da ANEEL (NT 101/2026) e Agência iNFRA (2026). Os sinais do saldo são hipóteses de trabalho, não resultados.</a:t>
+              <a:t>Encargos: proposta da ANEEL (NT 101/2026), via resumos setoriais. Os sinais do saldo são hipóteses de trabalho, não resultados.</a:t>
             </a:r>
             <a:endParaRPr lang="en-US" sz="1000" dirty="0"/>
           </a:p>

--- a/Baterias_SIN_Economia_Setor_Eletrico_I.pptx
+++ b/Baterias_SIN_Economia_Setor_Eletrico_I.pptx
@@ -26,9 +26,12 @@
     <p:sldId id="274" r:id="rId20"/>
     <p:sldId id="275" r:id="rId21"/>
     <p:sldId id="276" r:id="rId22"/>
+    <p:sldId id="277" r:id="rId23"/>
+    <p:sldId id="278" r:id="rId24"/>
+    <p:sldId id="279" r:id="rId25"/>
   </p:sldIdLst>
   <p:notesMasterIdLst>
-    <p:notesMasterId r:id="rId23"/>
+    <p:notesMasterId r:id="rId26"/>
   </p:notesMasterIdLst>
   <p:sldSz cx="12192000" cy="6858000"/>
   <p:notesSz cx="6858000" cy="12192000"/>
@@ -127,12 +130,12 @@
   <p:extLst>
     <p:ext uri="{521415D9-36F7-43E2-AB2F-B90AF26B5E84}">
       <p14:sectionLst xmlns:p14="http://schemas.microsoft.com/office/powerpoint/2010/main">
-        <p14:section name="Abertura" id="{23f4813b-2755-baf6-a32e-c49f5618e714}">
+        <p14:section name="Abertura" id="{d8b60955-4889-6c0d-ffe3-90b9ba724b77}">
           <p14:sldIdLst>
             <p14:sldId id="256"/>
           </p14:sldIdLst>
         </p14:section>
-        <p14:section name="Introdução" id="{cf785abe-d753-9661-bb6f-3668b2ebf8a0}">
+        <p14:section name="Introdução" id="{0533c0fd-9597-8f5f-294e-af626ee4834e}">
           <p14:sldIdLst>
             <p14:sldId id="257"/>
             <p14:sldId id="258"/>
@@ -140,13 +143,13 @@
             <p14:sldId id="260"/>
           </p14:sldIdLst>
         </p14:section>
-        <p14:section name="Objetivos" id="{4421d5ee-5c2a-bb44-8130-000d2b163357}">
+        <p14:section name="Objetivos" id="{abe29916-fa16-2100-0741-a7aba829e55e}">
           <p14:sldIdLst>
             <p14:sldId id="261"/>
             <p14:sldId id="262"/>
           </p14:sldIdLst>
         </p14:section>
-        <p14:section name="Método" id="{3905fe6b-e4b0-57a4-bd21-2cecb074173b}">
+        <p14:section name="Método" id="{ff594270-f3f2-048f-d282-f40925085b0a}">
           <p14:sldIdLst>
             <p14:sldId id="263"/>
             <p14:sldId id="264"/>
@@ -154,13 +157,13 @@
             <p14:sldId id="266"/>
           </p14:sldIdLst>
         </p14:section>
-        <p14:section name="Análise" id="{ea4407cd-10a9-8af2-8d8d-2f8754b579db}">
+        <p14:section name="Análise" id="{b47bb3e6-8f29-4379-f65e-033d7ca5e03c}">
           <p14:sldIdLst>
             <p14:sldId id="267"/>
             <p14:sldId id="268"/>
           </p14:sldIdLst>
         </p14:section>
-        <p14:section name="Encargos e benefícios" id="{5ce16659-72c5-4beb-998b-e92bd871b8ad}">
+        <p14:section name="Encargos e benefícios" id="{d1c6a718-7a01-6530-7114-10d02a2008d9}">
           <p14:sldIdLst>
             <p14:sldId id="269"/>
             <p14:sldId id="270"/>
@@ -168,12 +171,15 @@
             <p14:sldId id="272"/>
             <p14:sldId id="273"/>
             <p14:sldId id="274"/>
+            <p14:sldId id="275"/>
+            <p14:sldId id="276"/>
+            <p14:sldId id="277"/>
           </p14:sldIdLst>
         </p14:section>
-        <p14:section name="Fechamento" id="{c211a574-f213-3be3-17c1-128c828bd6f1}">
+        <p14:section name="Fechamento" id="{caafda50-4554-8db3-e7da-e50576d7a546}">
           <p14:sldIdLst>
-            <p14:sldId id="275"/>
-            <p14:sldId id="276"/>
+            <p14:sldId id="278"/>
+            <p14:sldId id="279"/>
           </p14:sldIdLst>
         </p14:section>
       </p14:sectionLst>
@@ -2012,7 +2018,7 @@
           <a:p>
             <a:r>
               <a:rPr lang="en-US" dirty="0"/>
-              <a:t>Exercício ilustrativo, não é a regra oficial. Parcela da fonte = geração x coeficiente, dividida pela soma dos pesos. Eólicas e solares ficam em P1 (100%), como na proposta. Hidrelétricas e térmicas recebem o mesmo coeficiente k em cada cenário. A: k = 100% (todas em P1), que equivale ao rateio universal sem diferenciar: 51,7%, 26,4% e 21,9%. B: k = 62,5%, média simples dos quatro patamares (1 + 0,75 + 0,5 + 0,25, dividido por 4), equivalente a distribuição uniforme: pesos 32,31, 26,40 e 13,69, soma 72,4, parcelas 44,6%, 36,5% e 18,9%. C: k = 25% (todas em P4): pesos 12,93, 26,40 e 5,48, soma 44,8, parcelas 28,9%, 58,9% e 12,2%. Limitações: os critérios de cada patamar e a classificação das usinas não foram localizados; hidro e térmicas têm distribuições diferentes na prática; 'térmicas e demais' é um resíduo e pode incluir MMGD, que está fora do rateio.</a:t>
+              <a:t>A parcela de cada fonte é o peso dela (geração x coeficiente) dividido pela soma dos pesos. Eólicas e solares ficam em P1. Hidrelétricas e térmicas recebem o mesmo k em cada cenário, porque não há classificação por usina.</a:t>
             </a:r>
             <a:endParaRPr lang="en-US" dirty="0"/>
           </a:p>
@@ -2100,7 +2106,7 @@
           <a:p>
             <a:r>
               <a:rPr lang="en-US" dirty="0"/>
-              <a:t>Os números são de estudos do setor (ABSAE e Volt Robotics) e variam entre R$ 3 e R$ 9 bilhões por ano conforme a potência e as premissas. Não são resultados do nosso trabalho; servem de ordem de grandeza para comparar com o encargo.</a:t>
+              <a:t>Tabela completa do cálculo. No cenário A todos os coeficientes são 1, então as parcelas coincidem com a participação na geração. Nos cenários B e C, reduzir k das hidrelétricas e térmicas diminui a soma dos pesos e aumenta a parcela das eólicas e solares, que ficam em P1.</a:t>
             </a:r>
             <a:endParaRPr lang="en-US" dirty="0"/>
           </a:p>
@@ -2188,7 +2194,7 @@
           <a:p>
             <a:r>
               <a:rPr lang="en-US" dirty="0"/>
-              <a:t>Esta tabela organiza as hipóteses: eólicas e UFVs partem do patamar mais alto, mas são as que mais ganham com menos corte. As térmicas podem perder despacho. As hidrelétricas dependem do patamar em que forem classificadas e ganham em risco hidrológico e armazenamento. As simulações dirão o saldo real.</a:t>
+              <a:t>As colunas A, B e C somam R$ 1.000 milhões em cada cenário. A conversão é direta: parcela em % multiplicada por 10 dá o valor em R$ milhões por R$ 1 bilhão de receita fixa. As limitações indicam por que o resultado é só uma ordem de grandeza.</a:t>
             </a:r>
             <a:endParaRPr lang="en-US" dirty="0"/>
           </a:p>
@@ -2364,7 +2370,7 @@
           <a:p>
             <a:r>
               <a:rPr lang="en-US" dirty="0"/>
-              <a:t>Fechamento: problema, pergunta, método e resposta esperada, em uma linha cada.</a:t>
+              <a:t>Exercício ilustrativo, não é a regra oficial. Parcela da fonte = geração x coeficiente, dividida pela soma dos pesos. Eólicas e solares ficam em P1 (100%), como na proposta. Hidrelétricas e térmicas recebem o mesmo coeficiente k em cada cenário. A: k = 100% (todas em P1), que equivale ao rateio universal sem diferenciar: 51,7%, 26,4% e 21,9%. B: k = 62,5%, média simples dos quatro patamares (1 + 0,75 + 0,5 + 0,25, dividido por 4), equivalente a distribuição uniforme: pesos 32,31, 26,40 e 13,69, soma 72,4, parcelas 44,6%, 36,5% e 18,9%. C: k = 25% (todas em P4): pesos 12,93, 26,40 e 5,48, soma 44,8, parcelas 28,9%, 58,9% e 12,2%. Limitações: os critérios de cada patamar e a classificação das usinas não foram localizados; hidro e térmicas têm distribuições diferentes na prática; 'térmicas e demais' é um resíduo e pode incluir MMGD, que está fora do rateio.</a:t>
             </a:r>
             <a:endParaRPr lang="en-US" dirty="0"/>
           </a:p>
@@ -2452,7 +2458,7 @@
           <a:p>
             <a:r>
               <a:rPr lang="en-US" dirty="0"/>
-              <a:t>Algumas fontes são imprensa e consultorias setoriais; vale conferir os dados nas fontes primárias (ONS, EPE, ANEEL) antes da apresentação.</a:t>
+              <a:t>Os números são de estudos do setor (ABSAE e Volt Robotics) e variam entre R$ 3 e R$ 9 bilhões por ano conforme a potência e as premissas. Não são resultados do nosso trabalho; servem de ordem de grandeza para comparar com o encargo.</a:t>
             </a:r>
             <a:endParaRPr lang="en-US" dirty="0"/>
           </a:p>
@@ -2476,6 +2482,270 @@
             <a:fld id="{F7021451-1387-4CA6-816F-3879F97B5CBC}" type="slidenum">
               <a:rPr lang="en-US"/>
               <a:t>21</a:t>
+            </a:fld>
+            <a:endParaRPr lang="en-US"/>
+          </a:p>
+        </p:txBody>
+      </p:sp>
+    </p:spTree>
+    <p:extLst>
+      <p:ext uri="{BB962C8B-B14F-4D97-AF65-F5344CB8AC3E}">
+        <p14:creationId xmlns:p14="http://schemas.microsoft.com/office/powerpoint/2010/main" val="1024086991"/>
+      </p:ext>
+    </p:extLst>
+  </p:cSld>
+  <p:clrMapOvr>
+    <a:masterClrMapping/>
+  </p:clrMapOvr>
+</p:notes>
+</file>
+
+<file path=ppt/notesSlides/notesSlide22.xml><?xml version="1.0" encoding="utf-8"?>
+<p:notes xmlns:a="http://schemas.openxmlformats.org/drawingml/2006/main" xmlns:r="http://schemas.openxmlformats.org/officeDocument/2006/relationships" xmlns:p="http://schemas.openxmlformats.org/presentationml/2006/main">
+  <p:cSld>
+    <p:spTree>
+      <p:nvGrpSpPr>
+        <p:cNvPr id="1" name=""/>
+        <p:cNvGrpSpPr/>
+        <p:nvPr/>
+      </p:nvGrpSpPr>
+      <p:grpSpPr>
+        <a:xfrm>
+          <a:off x="0" y="0"/>
+          <a:ext cx="0" cy="0"/>
+          <a:chOff x="0" y="0"/>
+          <a:chExt cx="0" cy="0"/>
+        </a:xfrm>
+      </p:grpSpPr>
+      <p:sp>
+        <p:nvSpPr>
+          <p:cNvPr id="2" name="Slide Image Placeholder 1"/>
+          <p:cNvSpPr>
+            <a:spLocks noGrp="1" noRot="1" noChangeAspect="1"/>
+          </p:cNvSpPr>
+          <p:nvPr>
+            <p:ph type="sldImg"/>
+          </p:nvPr>
+        </p:nvSpPr>
+        <p:spPr/>
+      </p:sp>
+      <p:sp>
+        <p:nvSpPr>
+          <p:cNvPr id="3" name="Notes Placeholder 2"/>
+          <p:cNvSpPr>
+            <a:spLocks noGrp="1"/>
+          </p:cNvSpPr>
+          <p:nvPr>
+            <p:ph type="body" idx="1"/>
+          </p:nvPr>
+        </p:nvSpPr>
+        <p:spPr/>
+        <p:txBody>
+          <a:bodyPr/>
+          <a:lstStyle/>
+          <a:p>
+            <a:r>
+              <a:rPr lang="en-US" dirty="0"/>
+              <a:t>Esta tabela organiza as hipóteses: eólicas e UFVs partem do patamar mais alto, mas são as que mais ganham com menos corte. As térmicas podem perder despacho. As hidrelétricas dependem do patamar em que forem classificadas e ganham em risco hidrológico e armazenamento. As simulações dirão o saldo real.</a:t>
+            </a:r>
+            <a:endParaRPr lang="en-US" dirty="0"/>
+          </a:p>
+        </p:txBody>
+      </p:sp>
+      <p:sp>
+        <p:nvSpPr>
+          <p:cNvPr id="4" name="Slide Number Placeholder 3"/>
+          <p:cNvSpPr>
+            <a:spLocks noGrp="1"/>
+          </p:cNvSpPr>
+          <p:nvPr>
+            <p:ph type="sldNum" sz="quarter" idx="10"/>
+          </p:nvPr>
+        </p:nvSpPr>
+        <p:spPr/>
+        <p:txBody>
+          <a:bodyPr/>
+          <a:lstStyle/>
+          <a:p>
+            <a:fld id="{F7021451-1387-4CA6-816F-3879F97B5CBC}" type="slidenum">
+              <a:rPr lang="en-US"/>
+              <a:t>22</a:t>
+            </a:fld>
+            <a:endParaRPr lang="en-US"/>
+          </a:p>
+        </p:txBody>
+      </p:sp>
+    </p:spTree>
+    <p:extLst>
+      <p:ext uri="{BB962C8B-B14F-4D97-AF65-F5344CB8AC3E}">
+        <p14:creationId xmlns:p14="http://schemas.microsoft.com/office/powerpoint/2010/main" val="1024086991"/>
+      </p:ext>
+    </p:extLst>
+  </p:cSld>
+  <p:clrMapOvr>
+    <a:masterClrMapping/>
+  </p:clrMapOvr>
+</p:notes>
+</file>
+
+<file path=ppt/notesSlides/notesSlide23.xml><?xml version="1.0" encoding="utf-8"?>
+<p:notes xmlns:a="http://schemas.openxmlformats.org/drawingml/2006/main" xmlns:r="http://schemas.openxmlformats.org/officeDocument/2006/relationships" xmlns:p="http://schemas.openxmlformats.org/presentationml/2006/main">
+  <p:cSld>
+    <p:spTree>
+      <p:nvGrpSpPr>
+        <p:cNvPr id="1" name=""/>
+        <p:cNvGrpSpPr/>
+        <p:nvPr/>
+      </p:nvGrpSpPr>
+      <p:grpSpPr>
+        <a:xfrm>
+          <a:off x="0" y="0"/>
+          <a:ext cx="0" cy="0"/>
+          <a:chOff x="0" y="0"/>
+          <a:chExt cx="0" cy="0"/>
+        </a:xfrm>
+      </p:grpSpPr>
+      <p:sp>
+        <p:nvSpPr>
+          <p:cNvPr id="2" name="Slide Image Placeholder 1"/>
+          <p:cNvSpPr>
+            <a:spLocks noGrp="1" noRot="1" noChangeAspect="1"/>
+          </p:cNvSpPr>
+          <p:nvPr>
+            <p:ph type="sldImg"/>
+          </p:nvPr>
+        </p:nvSpPr>
+        <p:spPr/>
+      </p:sp>
+      <p:sp>
+        <p:nvSpPr>
+          <p:cNvPr id="3" name="Notes Placeholder 2"/>
+          <p:cNvSpPr>
+            <a:spLocks noGrp="1"/>
+          </p:cNvSpPr>
+          <p:nvPr>
+            <p:ph type="body" idx="1"/>
+          </p:nvPr>
+        </p:nvSpPr>
+        <p:spPr/>
+        <p:txBody>
+          <a:bodyPr/>
+          <a:lstStyle/>
+          <a:p>
+            <a:r>
+              <a:rPr lang="en-US" dirty="0"/>
+              <a:t>Fechamento: problema, pergunta, método e resposta esperada, em uma linha cada.</a:t>
+            </a:r>
+            <a:endParaRPr lang="en-US" dirty="0"/>
+          </a:p>
+        </p:txBody>
+      </p:sp>
+      <p:sp>
+        <p:nvSpPr>
+          <p:cNvPr id="4" name="Slide Number Placeholder 3"/>
+          <p:cNvSpPr>
+            <a:spLocks noGrp="1"/>
+          </p:cNvSpPr>
+          <p:nvPr>
+            <p:ph type="sldNum" sz="quarter" idx="10"/>
+          </p:nvPr>
+        </p:nvSpPr>
+        <p:spPr/>
+        <p:txBody>
+          <a:bodyPr/>
+          <a:lstStyle/>
+          <a:p>
+            <a:fld id="{F7021451-1387-4CA6-816F-3879F97B5CBC}" type="slidenum">
+              <a:rPr lang="en-US"/>
+              <a:t>23</a:t>
+            </a:fld>
+            <a:endParaRPr lang="en-US"/>
+          </a:p>
+        </p:txBody>
+      </p:sp>
+    </p:spTree>
+    <p:extLst>
+      <p:ext uri="{BB962C8B-B14F-4D97-AF65-F5344CB8AC3E}">
+        <p14:creationId xmlns:p14="http://schemas.microsoft.com/office/powerpoint/2010/main" val="1024086991"/>
+      </p:ext>
+    </p:extLst>
+  </p:cSld>
+  <p:clrMapOvr>
+    <a:masterClrMapping/>
+  </p:clrMapOvr>
+</p:notes>
+</file>
+
+<file path=ppt/notesSlides/notesSlide24.xml><?xml version="1.0" encoding="utf-8"?>
+<p:notes xmlns:a="http://schemas.openxmlformats.org/drawingml/2006/main" xmlns:r="http://schemas.openxmlformats.org/officeDocument/2006/relationships" xmlns:p="http://schemas.openxmlformats.org/presentationml/2006/main">
+  <p:cSld>
+    <p:spTree>
+      <p:nvGrpSpPr>
+        <p:cNvPr id="1" name=""/>
+        <p:cNvGrpSpPr/>
+        <p:nvPr/>
+      </p:nvGrpSpPr>
+      <p:grpSpPr>
+        <a:xfrm>
+          <a:off x="0" y="0"/>
+          <a:ext cx="0" cy="0"/>
+          <a:chOff x="0" y="0"/>
+          <a:chExt cx="0" cy="0"/>
+        </a:xfrm>
+      </p:grpSpPr>
+      <p:sp>
+        <p:nvSpPr>
+          <p:cNvPr id="2" name="Slide Image Placeholder 1"/>
+          <p:cNvSpPr>
+            <a:spLocks noGrp="1" noRot="1" noChangeAspect="1"/>
+          </p:cNvSpPr>
+          <p:nvPr>
+            <p:ph type="sldImg"/>
+          </p:nvPr>
+        </p:nvSpPr>
+        <p:spPr/>
+      </p:sp>
+      <p:sp>
+        <p:nvSpPr>
+          <p:cNvPr id="3" name="Notes Placeholder 2"/>
+          <p:cNvSpPr>
+            <a:spLocks noGrp="1"/>
+          </p:cNvSpPr>
+          <p:nvPr>
+            <p:ph type="body" idx="1"/>
+          </p:nvPr>
+        </p:nvSpPr>
+        <p:spPr/>
+        <p:txBody>
+          <a:bodyPr/>
+          <a:lstStyle/>
+          <a:p>
+            <a:r>
+              <a:rPr lang="en-US" dirty="0"/>
+              <a:t>Algumas fontes são imprensa e consultorias setoriais; vale conferir os dados nas fontes primárias (ONS, EPE, ANEEL) antes da apresentação.</a:t>
+            </a:r>
+            <a:endParaRPr lang="en-US" dirty="0"/>
+          </a:p>
+        </p:txBody>
+      </p:sp>
+      <p:sp>
+        <p:nvSpPr>
+          <p:cNvPr id="4" name="Slide Number Placeholder 3"/>
+          <p:cNvSpPr>
+            <a:spLocks noGrp="1"/>
+          </p:cNvSpPr>
+          <p:nvPr>
+            <p:ph type="sldNum" sz="quarter" idx="10"/>
+          </p:nvPr>
+        </p:nvSpPr>
+        <p:spPr/>
+        <p:txBody>
+          <a:bodyPr/>
+          <a:lstStyle/>
+          <a:p>
+            <a:fld id="{F7021451-1387-4CA6-816F-3879F97B5CBC}" type="slidenum">
+              <a:rPr lang="en-US"/>
+              <a:t>24</a:t>
             </a:fld>
             <a:endParaRPr lang="en-US"/>
           </a:p>
@@ -12953,6 +13223,7211 @@
                   <a:schemeClr val="tx1"/>
                 </a:solidFill>
               </a:rPr>
+              <a:t>Memória de cálculo 1/3: base e fórmula</a:t>
+            </a:r>
+            <a:endParaRPr lang="en-US" sz="3200" dirty="0"/>
+          </a:p>
+        </p:txBody>
+      </p:sp>
+      <p:sp>
+        <p:nvSpPr>
+          <p:cNvPr id="3" name="Calc base card"/>
+          <p:cNvSpPr/>
+          <p:nvPr/>
+        </p:nvSpPr>
+        <p:spPr>
+          <a:xfrm>
+            <a:off x="548640" y="1417320"/>
+            <a:ext cx="3520440" cy="4754880"/>
+          </a:xfrm>
+          <a:prstGeom prst="roundRect">
+            <a:avLst>
+              <a:gd name="adj" fmla="val 3117"/>
+            </a:avLst>
+          </a:prstGeom>
+          <a:solidFill>
+            <a:schemeClr val="bg1"/>
+          </a:solidFill>
+          <a:ln w="12700">
+            <a:solidFill>
+              <a:schemeClr val="bg1"/>
+            </a:solidFill>
+            <a:prstDash val="solid"/>
+          </a:ln>
+          <a:effectLst>
+            <a:outerShdw sx="100000" sy="100000" kx="0" ky="0" algn="bl" rotWithShape="0" blurRad="101600" dist="25400" dir="5400000">
+              <a:srgbClr val="0B1A2E">
+                <a:alpha val="12000"/>
+              </a:srgbClr>
+            </a:outerShdw>
+          </a:effectLst>
+        </p:spPr>
+      </p:sp>
+      <p:sp>
+        <p:nvSpPr>
+          <p:cNvPr id="4" name="Icon circle"/>
+          <p:cNvSpPr/>
+          <p:nvPr/>
+        </p:nvSpPr>
+        <p:spPr>
+          <a:xfrm>
+            <a:off x="822960" y="1691640"/>
+            <a:ext cx="548640" cy="548640"/>
+          </a:xfrm>
+          <a:prstGeom prst="ellipse">
+            <a:avLst/>
+          </a:prstGeom>
+          <a:solidFill>
+            <a:schemeClr val="accent2"/>
+          </a:solidFill>
+          <a:ln w="12700">
+            <a:solidFill>
+              <a:schemeClr val="accent2"/>
+            </a:solidFill>
+            <a:prstDash val="solid"/>
+          </a:ln>
+        </p:spPr>
+      </p:sp>
+      <p:pic>
+        <p:nvPicPr>
+          <p:cNvPr id="5" name="Image 0" descr="FaChartLine">    </p:cNvPr>
+          <p:cNvPicPr>
+            <a:picLocks noChangeAspect="1"/>
+          </p:cNvPicPr>
+          <p:nvPr/>
+        </p:nvPicPr>
+        <p:blipFill>
+          <a:blip r:embed="rId1"/>
+          <a:stretch>
+            <a:fillRect/>
+          </a:stretch>
+        </p:blipFill>
+        <p:spPr>
+          <a:xfrm>
+            <a:off x="960120" y="1828800"/>
+            <a:ext cx="274320" cy="274320"/>
+          </a:xfrm>
+          <a:prstGeom prst="rect">
+            <a:avLst/>
+          </a:prstGeom>
+        </p:spPr>
+      </p:pic>
+      <p:sp>
+        <p:nvSpPr>
+          <p:cNvPr id="6" name="Text 3"/>
+          <p:cNvSpPr txBox="1"/>
+          <p:nvPr/>
+        </p:nvSpPr>
+        <p:spPr>
+          <a:xfrm>
+            <a:off x="1554480" y="1691640"/>
+            <a:ext cx="2331720" cy="548640"/>
+          </a:xfrm>
+          <a:prstGeom prst="rect">
+            <a:avLst/>
+          </a:prstGeom>
+          <a:noFill/>
+          <a:ln/>
+        </p:spPr>
+        <p:txBody>
+          <a:bodyPr wrap="square" lIns="0" tIns="0" rIns="0" bIns="0" rtlCol="0" anchor="ctr"/>
+          <a:lstStyle/>
+          <a:p>
+            <a:pPr indent="0" marL="0">
+              <a:buNone/>
+            </a:pPr>
+            <a:r>
+              <a:rPr lang="en-US" sz="1800" b="1" dirty="0">
+                <a:solidFill>
+                  <a:schemeClr val="tx1"/>
+                </a:solidFill>
+                <a:latin typeface="Cambria" pitchFamily="34" charset="0"/>
+                <a:ea typeface="Cambria" pitchFamily="34" charset="-122"/>
+                <a:cs typeface="Cambria" pitchFamily="34" charset="-120"/>
+              </a:rPr>
+              <a:t>1. Base de geração</a:t>
+            </a:r>
+            <a:endParaRPr lang="en-US" sz="1800" dirty="0"/>
+          </a:p>
+        </p:txBody>
+      </p:sp>
+      <p:graphicFrame>
+        <p:nvGraphicFramePr>
+          <p:cNvPr id="18" name="Table 0"/>
+          <p:cNvGraphicFramePr>
+            <a:graphicFrameLocks noGrp="1"/>
+          </p:cNvGraphicFramePr>
+          <p:nvPr>
+            <p:extLst>
+              <p:ext uri="{D42A27DB-BD31-4B8C-83A1-F6EECF244321}">
+                <p14:modId xmlns:p14="http://schemas.microsoft.com/office/powerpoint/2010/main" val="1579011935"/>
+              </p:ext>
+            </p:extLst>
+          </p:nvPr>
+        </p:nvGraphicFramePr>
+        <p:xfrm>
+          <a:off x="822960" y="2514600"/>
+          <a:ext cx="2971800" cy="914400"/>
+        </p:xfrm>
+        <a:graphic>
+          <a:graphicData uri="http://schemas.openxmlformats.org/drawingml/2006/table">
+            <a:tbl>
+              <a:tblPr/>
+              <a:tblGrid>
+                <a:gridCol w="2057400"/>
+                <a:gridCol w="914400"/>
+              </a:tblGrid>
+              <a:tr h="457200">
+                <a:tc>
+                  <a:txBody>
+                    <a:bodyPr/>
+                    <a:lstStyle/>
+                    <a:p>
+                      <a:pPr indent="0" marL="0">
+                        <a:buNone/>
+                      </a:pPr>
+                      <a:r>
+                        <a:rPr lang="en-US" sz="1400" b="1" dirty="0">
+                          <a:solidFill>
+                            <a:schemeClr val="bg1"/>
+                          </a:solidFill>
+                          <a:latin typeface="Calibri" pitchFamily="34" charset="0"/>
+                          <a:ea typeface="Calibri" pitchFamily="34" charset="-122"/>
+                          <a:cs typeface="Calibri" pitchFamily="34" charset="-120"/>
+                        </a:rPr>
+                        <a:t>Fonte</a:t>
+                      </a:r>
+                      <a:endParaRPr lang="en-US" sz="1400" dirty="0">
+                        <a:latin typeface="Calibri" charset="0"/>
+                        <a:ea typeface="Calibri" charset="0"/>
+                        <a:cs typeface="Calibri" charset="0"/>
+                      </a:endParaRPr>
+                    </a:p>
+                  </a:txBody>
+                  <a:tcPr marL="91440" marR="91440" marT="45720" marB="45720" anchor="ctr">
+                    <a:lnL w="12700" cap="flat" cmpd="sng" algn="ctr">
+                      <a:solidFill>
+                        <a:srgbClr val="EEF3F8"/>
+                      </a:solidFill>
+                      <a:prstDash val="solid"/>
+                      <a:round/>
+                      <a:headEnd type="none" w="med" len="med"/>
+                      <a:tailEnd type="none" w="med" len="med"/>
+                    </a:lnL>
+                    <a:lnR w="12700" cap="flat" cmpd="sng" algn="ctr">
+                      <a:solidFill>
+                        <a:srgbClr val="EEF3F8"/>
+                      </a:solidFill>
+                      <a:prstDash val="solid"/>
+                      <a:round/>
+                      <a:headEnd type="none" w="med" len="med"/>
+                      <a:tailEnd type="none" w="med" len="med"/>
+                    </a:lnR>
+                    <a:lnT w="12700" cap="flat" cmpd="sng" algn="ctr">
+                      <a:solidFill>
+                        <a:srgbClr val="EEF3F8"/>
+                      </a:solidFill>
+                      <a:prstDash val="solid"/>
+                      <a:round/>
+                      <a:headEnd type="none" w="med" len="med"/>
+                      <a:tailEnd type="none" w="med" len="med"/>
+                    </a:lnT>
+                    <a:lnB w="12700" cap="flat" cmpd="sng" algn="ctr">
+                      <a:solidFill>
+                        <a:srgbClr val="EEF3F8"/>
+                      </a:solidFill>
+                      <a:prstDash val="solid"/>
+                      <a:round/>
+                      <a:headEnd type="none" w="med" len="med"/>
+                      <a:tailEnd type="none" w="med" len="med"/>
+                    </a:lnB>
+                    <a:solidFill>
+                      <a:schemeClr val="tx2"/>
+                    </a:solidFill>
+                  </a:tcPr>
+                </a:tc>
+                <a:tc>
+                  <a:txBody>
+                    <a:bodyPr/>
+                    <a:lstStyle/>
+                    <a:p>
+                      <a:pPr indent="0" marL="0">
+                        <a:buNone/>
+                      </a:pPr>
+                      <a:r>
+                        <a:rPr lang="en-US" sz="1400" b="1" dirty="0">
+                          <a:solidFill>
+                            <a:schemeClr val="bg1"/>
+                          </a:solidFill>
+                          <a:latin typeface="Calibri" pitchFamily="34" charset="0"/>
+                          <a:ea typeface="Calibri" pitchFamily="34" charset="-122"/>
+                          <a:cs typeface="Calibri" pitchFamily="34" charset="-120"/>
+                        </a:rPr>
+                        <a:t>g (%)</a:t>
+                      </a:r>
+                      <a:endParaRPr lang="en-US" sz="1400" dirty="0">
+                        <a:latin typeface="Calibri" charset="0"/>
+                        <a:ea typeface="Calibri" charset="0"/>
+                        <a:cs typeface="Calibri" charset="0"/>
+                      </a:endParaRPr>
+                    </a:p>
+                  </a:txBody>
+                  <a:tcPr marL="91440" marR="91440" marT="45720" marB="45720" anchor="ctr">
+                    <a:lnL w="12700" cap="flat" cmpd="sng" algn="ctr">
+                      <a:solidFill>
+                        <a:srgbClr val="EEF3F8"/>
+                      </a:solidFill>
+                      <a:prstDash val="solid"/>
+                      <a:round/>
+                      <a:headEnd type="none" w="med" len="med"/>
+                      <a:tailEnd type="none" w="med" len="med"/>
+                    </a:lnL>
+                    <a:lnR w="12700" cap="flat" cmpd="sng" algn="ctr">
+                      <a:solidFill>
+                        <a:srgbClr val="EEF3F8"/>
+                      </a:solidFill>
+                      <a:prstDash val="solid"/>
+                      <a:round/>
+                      <a:headEnd type="none" w="med" len="med"/>
+                      <a:tailEnd type="none" w="med" len="med"/>
+                    </a:lnR>
+                    <a:lnT w="12700" cap="flat" cmpd="sng" algn="ctr">
+                      <a:solidFill>
+                        <a:srgbClr val="EEF3F8"/>
+                      </a:solidFill>
+                      <a:prstDash val="solid"/>
+                      <a:round/>
+                      <a:headEnd type="none" w="med" len="med"/>
+                      <a:tailEnd type="none" w="med" len="med"/>
+                    </a:lnT>
+                    <a:lnB w="12700" cap="flat" cmpd="sng" algn="ctr">
+                      <a:solidFill>
+                        <a:srgbClr val="EEF3F8"/>
+                      </a:solidFill>
+                      <a:prstDash val="solid"/>
+                      <a:round/>
+                      <a:headEnd type="none" w="med" len="med"/>
+                      <a:tailEnd type="none" w="med" len="med"/>
+                    </a:lnB>
+                    <a:solidFill>
+                      <a:schemeClr val="tx2"/>
+                    </a:solidFill>
+                  </a:tcPr>
+                </a:tc>
+              </a:tr>
+              <a:tr h="502920">
+                <a:tc>
+                  <a:txBody>
+                    <a:bodyPr/>
+                    <a:lstStyle/>
+                    <a:p>
+                      <a:pPr indent="0" marL="0">
+                        <a:buNone/>
+                      </a:pPr>
+                      <a:r>
+                        <a:rPr lang="en-US" sz="1400" b="1" dirty="0">
+                          <a:solidFill>
+                            <a:schemeClr val="tx1"/>
+                          </a:solidFill>
+                          <a:latin typeface="Calibri" pitchFamily="34" charset="0"/>
+                          <a:ea typeface="Calibri" pitchFamily="34" charset="-122"/>
+                          <a:cs typeface="Calibri" pitchFamily="34" charset="-120"/>
+                        </a:rPr>
+                        <a:t>Hidrelétricas</a:t>
+                      </a:r>
+                      <a:endParaRPr lang="en-US" sz="1400" dirty="0">
+                        <a:latin typeface="Calibri" charset="0"/>
+                        <a:ea typeface="Calibri" charset="0"/>
+                        <a:cs typeface="Calibri" charset="0"/>
+                      </a:endParaRPr>
+                    </a:p>
+                  </a:txBody>
+                  <a:tcPr marL="91440" marR="91440" marT="45720" marB="45720" anchor="ctr">
+                    <a:lnL w="12700" cap="flat" cmpd="sng" algn="ctr">
+                      <a:solidFill>
+                        <a:srgbClr val="EEF3F8"/>
+                      </a:solidFill>
+                      <a:prstDash val="solid"/>
+                      <a:round/>
+                      <a:headEnd type="none" w="med" len="med"/>
+                      <a:tailEnd type="none" w="med" len="med"/>
+                    </a:lnL>
+                    <a:lnR w="12700" cap="flat" cmpd="sng" algn="ctr">
+                      <a:solidFill>
+                        <a:srgbClr val="EEF3F8"/>
+                      </a:solidFill>
+                      <a:prstDash val="solid"/>
+                      <a:round/>
+                      <a:headEnd type="none" w="med" len="med"/>
+                      <a:tailEnd type="none" w="med" len="med"/>
+                    </a:lnR>
+                    <a:lnT w="12700" cap="flat" cmpd="sng" algn="ctr">
+                      <a:solidFill>
+                        <a:srgbClr val="EEF3F8"/>
+                      </a:solidFill>
+                      <a:prstDash val="solid"/>
+                      <a:round/>
+                      <a:headEnd type="none" w="med" len="med"/>
+                      <a:tailEnd type="none" w="med" len="med"/>
+                    </a:lnT>
+                    <a:lnB w="12700" cap="flat" cmpd="sng" algn="ctr">
+                      <a:solidFill>
+                        <a:srgbClr val="EEF3F8"/>
+                      </a:solidFill>
+                      <a:prstDash val="solid"/>
+                      <a:round/>
+                      <a:headEnd type="none" w="med" len="med"/>
+                      <a:tailEnd type="none" w="med" len="med"/>
+                    </a:lnB>
+                    <a:solidFill>
+                      <a:schemeClr val="bg1"/>
+                    </a:solidFill>
+                  </a:tcPr>
+                </a:tc>
+                <a:tc>
+                  <a:txBody>
+                    <a:bodyPr/>
+                    <a:lstStyle/>
+                    <a:p>
+                      <a:pPr indent="0" marL="0">
+                        <a:buNone/>
+                      </a:pPr>
+                      <a:r>
+                        <a:rPr lang="en-US" sz="1400" dirty="0">
+                          <a:solidFill>
+                            <a:schemeClr val="tx1"/>
+                          </a:solidFill>
+                          <a:latin typeface="Calibri" pitchFamily="34" charset="0"/>
+                          <a:ea typeface="Calibri" pitchFamily="34" charset="-122"/>
+                          <a:cs typeface="Calibri" pitchFamily="34" charset="-120"/>
+                        </a:rPr>
+                        <a:t>51,7</a:t>
+                      </a:r>
+                      <a:endParaRPr lang="en-US" sz="1400" dirty="0">
+                        <a:latin typeface="Calibri" charset="0"/>
+                        <a:ea typeface="Calibri" charset="0"/>
+                        <a:cs typeface="Calibri" charset="0"/>
+                      </a:endParaRPr>
+                    </a:p>
+                  </a:txBody>
+                  <a:tcPr marL="91440" marR="91440" marT="45720" marB="45720" anchor="ctr">
+                    <a:lnL w="12700" cap="flat" cmpd="sng" algn="ctr">
+                      <a:solidFill>
+                        <a:srgbClr val="EEF3F8"/>
+                      </a:solidFill>
+                      <a:prstDash val="solid"/>
+                      <a:round/>
+                      <a:headEnd type="none" w="med" len="med"/>
+                      <a:tailEnd type="none" w="med" len="med"/>
+                    </a:lnL>
+                    <a:lnR w="12700" cap="flat" cmpd="sng" algn="ctr">
+                      <a:solidFill>
+                        <a:srgbClr val="EEF3F8"/>
+                      </a:solidFill>
+                      <a:prstDash val="solid"/>
+                      <a:round/>
+                      <a:headEnd type="none" w="med" len="med"/>
+                      <a:tailEnd type="none" w="med" len="med"/>
+                    </a:lnR>
+                    <a:lnT w="12700" cap="flat" cmpd="sng" algn="ctr">
+                      <a:solidFill>
+                        <a:srgbClr val="EEF3F8"/>
+                      </a:solidFill>
+                      <a:prstDash val="solid"/>
+                      <a:round/>
+                      <a:headEnd type="none" w="med" len="med"/>
+                      <a:tailEnd type="none" w="med" len="med"/>
+                    </a:lnT>
+                    <a:lnB w="12700" cap="flat" cmpd="sng" algn="ctr">
+                      <a:solidFill>
+                        <a:srgbClr val="EEF3F8"/>
+                      </a:solidFill>
+                      <a:prstDash val="solid"/>
+                      <a:round/>
+                      <a:headEnd type="none" w="med" len="med"/>
+                      <a:tailEnd type="none" w="med" len="med"/>
+                    </a:lnB>
+                    <a:solidFill>
+                      <a:schemeClr val="bg1"/>
+                    </a:solidFill>
+                  </a:tcPr>
+                </a:tc>
+              </a:tr>
+              <a:tr h="502920">
+                <a:tc>
+                  <a:txBody>
+                    <a:bodyPr/>
+                    <a:lstStyle/>
+                    <a:p>
+                      <a:pPr indent="0" marL="0">
+                        <a:buNone/>
+                      </a:pPr>
+                      <a:r>
+                        <a:rPr lang="en-US" sz="1400" b="1" dirty="0">
+                          <a:solidFill>
+                            <a:schemeClr val="tx1"/>
+                          </a:solidFill>
+                          <a:latin typeface="Calibri" pitchFamily="34" charset="0"/>
+                          <a:ea typeface="Calibri" pitchFamily="34" charset="-122"/>
+                          <a:cs typeface="Calibri" pitchFamily="34" charset="-120"/>
+                        </a:rPr>
+                        <a:t>Eólicas e solares</a:t>
+                      </a:r>
+                      <a:endParaRPr lang="en-US" sz="1400" dirty="0">
+                        <a:latin typeface="Calibri" charset="0"/>
+                        <a:ea typeface="Calibri" charset="0"/>
+                        <a:cs typeface="Calibri" charset="0"/>
+                      </a:endParaRPr>
+                    </a:p>
+                  </a:txBody>
+                  <a:tcPr marL="91440" marR="91440" marT="45720" marB="45720" anchor="ctr">
+                    <a:lnL w="12700" cap="flat" cmpd="sng" algn="ctr">
+                      <a:solidFill>
+                        <a:srgbClr val="EEF3F8"/>
+                      </a:solidFill>
+                      <a:prstDash val="solid"/>
+                      <a:round/>
+                      <a:headEnd type="none" w="med" len="med"/>
+                      <a:tailEnd type="none" w="med" len="med"/>
+                    </a:lnL>
+                    <a:lnR w="12700" cap="flat" cmpd="sng" algn="ctr">
+                      <a:solidFill>
+                        <a:srgbClr val="EEF3F8"/>
+                      </a:solidFill>
+                      <a:prstDash val="solid"/>
+                      <a:round/>
+                      <a:headEnd type="none" w="med" len="med"/>
+                      <a:tailEnd type="none" w="med" len="med"/>
+                    </a:lnR>
+                    <a:lnT w="12700" cap="flat" cmpd="sng" algn="ctr">
+                      <a:solidFill>
+                        <a:srgbClr val="EEF3F8"/>
+                      </a:solidFill>
+                      <a:prstDash val="solid"/>
+                      <a:round/>
+                      <a:headEnd type="none" w="med" len="med"/>
+                      <a:tailEnd type="none" w="med" len="med"/>
+                    </a:lnT>
+                    <a:lnB w="12700" cap="flat" cmpd="sng" algn="ctr">
+                      <a:solidFill>
+                        <a:srgbClr val="EEF3F8"/>
+                      </a:solidFill>
+                      <a:prstDash val="solid"/>
+                      <a:round/>
+                      <a:headEnd type="none" w="med" len="med"/>
+                      <a:tailEnd type="none" w="med" len="med"/>
+                    </a:lnB>
+                    <a:solidFill>
+                      <a:schemeClr val="bg1"/>
+                    </a:solidFill>
+                  </a:tcPr>
+                </a:tc>
+                <a:tc>
+                  <a:txBody>
+                    <a:bodyPr/>
+                    <a:lstStyle/>
+                    <a:p>
+                      <a:pPr indent="0" marL="0">
+                        <a:buNone/>
+                      </a:pPr>
+                      <a:r>
+                        <a:rPr lang="en-US" sz="1400" dirty="0">
+                          <a:solidFill>
+                            <a:schemeClr val="tx1"/>
+                          </a:solidFill>
+                          <a:latin typeface="Calibri" pitchFamily="34" charset="0"/>
+                          <a:ea typeface="Calibri" pitchFamily="34" charset="-122"/>
+                          <a:cs typeface="Calibri" pitchFamily="34" charset="-120"/>
+                        </a:rPr>
+                        <a:t>26,4</a:t>
+                      </a:r>
+                      <a:endParaRPr lang="en-US" sz="1400" dirty="0">
+                        <a:latin typeface="Calibri" charset="0"/>
+                        <a:ea typeface="Calibri" charset="0"/>
+                        <a:cs typeface="Calibri" charset="0"/>
+                      </a:endParaRPr>
+                    </a:p>
+                  </a:txBody>
+                  <a:tcPr marL="91440" marR="91440" marT="45720" marB="45720" anchor="ctr">
+                    <a:lnL w="12700" cap="flat" cmpd="sng" algn="ctr">
+                      <a:solidFill>
+                        <a:srgbClr val="EEF3F8"/>
+                      </a:solidFill>
+                      <a:prstDash val="solid"/>
+                      <a:round/>
+                      <a:headEnd type="none" w="med" len="med"/>
+                      <a:tailEnd type="none" w="med" len="med"/>
+                    </a:lnL>
+                    <a:lnR w="12700" cap="flat" cmpd="sng" algn="ctr">
+                      <a:solidFill>
+                        <a:srgbClr val="EEF3F8"/>
+                      </a:solidFill>
+                      <a:prstDash val="solid"/>
+                      <a:round/>
+                      <a:headEnd type="none" w="med" len="med"/>
+                      <a:tailEnd type="none" w="med" len="med"/>
+                    </a:lnR>
+                    <a:lnT w="12700" cap="flat" cmpd="sng" algn="ctr">
+                      <a:solidFill>
+                        <a:srgbClr val="EEF3F8"/>
+                      </a:solidFill>
+                      <a:prstDash val="solid"/>
+                      <a:round/>
+                      <a:headEnd type="none" w="med" len="med"/>
+                      <a:tailEnd type="none" w="med" len="med"/>
+                    </a:lnT>
+                    <a:lnB w="12700" cap="flat" cmpd="sng" algn="ctr">
+                      <a:solidFill>
+                        <a:srgbClr val="EEF3F8"/>
+                      </a:solidFill>
+                      <a:prstDash val="solid"/>
+                      <a:round/>
+                      <a:headEnd type="none" w="med" len="med"/>
+                      <a:tailEnd type="none" w="med" len="med"/>
+                    </a:lnB>
+                    <a:solidFill>
+                      <a:schemeClr val="bg1"/>
+                    </a:solidFill>
+                  </a:tcPr>
+                </a:tc>
+              </a:tr>
+              <a:tr h="502920">
+                <a:tc>
+                  <a:txBody>
+                    <a:bodyPr/>
+                    <a:lstStyle/>
+                    <a:p>
+                      <a:pPr indent="0" marL="0">
+                        <a:buNone/>
+                      </a:pPr>
+                      <a:r>
+                        <a:rPr lang="en-US" sz="1400" b="1" dirty="0">
+                          <a:solidFill>
+                            <a:schemeClr val="tx1"/>
+                          </a:solidFill>
+                          <a:latin typeface="Calibri" pitchFamily="34" charset="0"/>
+                          <a:ea typeface="Calibri" pitchFamily="34" charset="-122"/>
+                          <a:cs typeface="Calibri" pitchFamily="34" charset="-120"/>
+                        </a:rPr>
+                        <a:t>Térmicas e demais</a:t>
+                      </a:r>
+                      <a:endParaRPr lang="en-US" sz="1400" dirty="0">
+                        <a:latin typeface="Calibri" charset="0"/>
+                        <a:ea typeface="Calibri" charset="0"/>
+                        <a:cs typeface="Calibri" charset="0"/>
+                      </a:endParaRPr>
+                    </a:p>
+                  </a:txBody>
+                  <a:tcPr marL="91440" marR="91440" marT="45720" marB="45720" anchor="ctr">
+                    <a:lnL w="12700" cap="flat" cmpd="sng" algn="ctr">
+                      <a:solidFill>
+                        <a:srgbClr val="EEF3F8"/>
+                      </a:solidFill>
+                      <a:prstDash val="solid"/>
+                      <a:round/>
+                      <a:headEnd type="none" w="med" len="med"/>
+                      <a:tailEnd type="none" w="med" len="med"/>
+                    </a:lnL>
+                    <a:lnR w="12700" cap="flat" cmpd="sng" algn="ctr">
+                      <a:solidFill>
+                        <a:srgbClr val="EEF3F8"/>
+                      </a:solidFill>
+                      <a:prstDash val="solid"/>
+                      <a:round/>
+                      <a:headEnd type="none" w="med" len="med"/>
+                      <a:tailEnd type="none" w="med" len="med"/>
+                    </a:lnR>
+                    <a:lnT w="12700" cap="flat" cmpd="sng" algn="ctr">
+                      <a:solidFill>
+                        <a:srgbClr val="EEF3F8"/>
+                      </a:solidFill>
+                      <a:prstDash val="solid"/>
+                      <a:round/>
+                      <a:headEnd type="none" w="med" len="med"/>
+                      <a:tailEnd type="none" w="med" len="med"/>
+                    </a:lnT>
+                    <a:lnB w="12700" cap="flat" cmpd="sng" algn="ctr">
+                      <a:solidFill>
+                        <a:srgbClr val="EEF3F8"/>
+                      </a:solidFill>
+                      <a:prstDash val="solid"/>
+                      <a:round/>
+                      <a:headEnd type="none" w="med" len="med"/>
+                      <a:tailEnd type="none" w="med" len="med"/>
+                    </a:lnB>
+                    <a:solidFill>
+                      <a:schemeClr val="bg1"/>
+                    </a:solidFill>
+                  </a:tcPr>
+                </a:tc>
+                <a:tc>
+                  <a:txBody>
+                    <a:bodyPr/>
+                    <a:lstStyle/>
+                    <a:p>
+                      <a:pPr indent="0" marL="0">
+                        <a:buNone/>
+                      </a:pPr>
+                      <a:r>
+                        <a:rPr lang="en-US" sz="1400" dirty="0">
+                          <a:solidFill>
+                            <a:schemeClr val="tx1"/>
+                          </a:solidFill>
+                          <a:latin typeface="Calibri" pitchFamily="34" charset="0"/>
+                          <a:ea typeface="Calibri" pitchFamily="34" charset="-122"/>
+                          <a:cs typeface="Calibri" pitchFamily="34" charset="-120"/>
+                        </a:rPr>
+                        <a:t>21,9</a:t>
+                      </a:r>
+                      <a:endParaRPr lang="en-US" sz="1400" dirty="0">
+                        <a:latin typeface="Calibri" charset="0"/>
+                        <a:ea typeface="Calibri" charset="0"/>
+                        <a:cs typeface="Calibri" charset="0"/>
+                      </a:endParaRPr>
+                    </a:p>
+                  </a:txBody>
+                  <a:tcPr marL="91440" marR="91440" marT="45720" marB="45720" anchor="ctr">
+                    <a:lnL w="12700" cap="flat" cmpd="sng" algn="ctr">
+                      <a:solidFill>
+                        <a:srgbClr val="EEF3F8"/>
+                      </a:solidFill>
+                      <a:prstDash val="solid"/>
+                      <a:round/>
+                      <a:headEnd type="none" w="med" len="med"/>
+                      <a:tailEnd type="none" w="med" len="med"/>
+                    </a:lnL>
+                    <a:lnR w="12700" cap="flat" cmpd="sng" algn="ctr">
+                      <a:solidFill>
+                        <a:srgbClr val="EEF3F8"/>
+                      </a:solidFill>
+                      <a:prstDash val="solid"/>
+                      <a:round/>
+                      <a:headEnd type="none" w="med" len="med"/>
+                      <a:tailEnd type="none" w="med" len="med"/>
+                    </a:lnR>
+                    <a:lnT w="12700" cap="flat" cmpd="sng" algn="ctr">
+                      <a:solidFill>
+                        <a:srgbClr val="EEF3F8"/>
+                      </a:solidFill>
+                      <a:prstDash val="solid"/>
+                      <a:round/>
+                      <a:headEnd type="none" w="med" len="med"/>
+                      <a:tailEnd type="none" w="med" len="med"/>
+                    </a:lnT>
+                    <a:lnB w="12700" cap="flat" cmpd="sng" algn="ctr">
+                      <a:solidFill>
+                        <a:srgbClr val="EEF3F8"/>
+                      </a:solidFill>
+                      <a:prstDash val="solid"/>
+                      <a:round/>
+                      <a:headEnd type="none" w="med" len="med"/>
+                      <a:tailEnd type="none" w="med" len="med"/>
+                    </a:lnB>
+                    <a:solidFill>
+                      <a:schemeClr val="bg1"/>
+                    </a:solidFill>
+                  </a:tcPr>
+                </a:tc>
+              </a:tr>
+              <a:tr h="502920">
+                <a:tc>
+                  <a:txBody>
+                    <a:bodyPr/>
+                    <a:lstStyle/>
+                    <a:p>
+                      <a:pPr indent="0" marL="0">
+                        <a:buNone/>
+                      </a:pPr>
+                      <a:r>
+                        <a:rPr lang="en-US" sz="1400" b="1" dirty="0">
+                          <a:solidFill>
+                            <a:schemeClr val="tx1"/>
+                          </a:solidFill>
+                          <a:latin typeface="Calibri" pitchFamily="34" charset="0"/>
+                          <a:ea typeface="Calibri" pitchFamily="34" charset="-122"/>
+                          <a:cs typeface="Calibri" pitchFamily="34" charset="-120"/>
+                        </a:rPr>
+                        <a:t>Total</a:t>
+                      </a:r>
+                      <a:endParaRPr lang="en-US" sz="1400" dirty="0">
+                        <a:latin typeface="Calibri" charset="0"/>
+                        <a:ea typeface="Calibri" charset="0"/>
+                        <a:cs typeface="Calibri" charset="0"/>
+                      </a:endParaRPr>
+                    </a:p>
+                  </a:txBody>
+                  <a:tcPr marL="91440" marR="91440" marT="45720" marB="45720" anchor="ctr">
+                    <a:lnL w="12700" cap="flat" cmpd="sng" algn="ctr">
+                      <a:solidFill>
+                        <a:srgbClr val="EEF3F8"/>
+                      </a:solidFill>
+                      <a:prstDash val="solid"/>
+                      <a:round/>
+                      <a:headEnd type="none" w="med" len="med"/>
+                      <a:tailEnd type="none" w="med" len="med"/>
+                    </a:lnL>
+                    <a:lnR w="12700" cap="flat" cmpd="sng" algn="ctr">
+                      <a:solidFill>
+                        <a:srgbClr val="EEF3F8"/>
+                      </a:solidFill>
+                      <a:prstDash val="solid"/>
+                      <a:round/>
+                      <a:headEnd type="none" w="med" len="med"/>
+                      <a:tailEnd type="none" w="med" len="med"/>
+                    </a:lnR>
+                    <a:lnT w="12700" cap="flat" cmpd="sng" algn="ctr">
+                      <a:solidFill>
+                        <a:srgbClr val="EEF3F8"/>
+                      </a:solidFill>
+                      <a:prstDash val="solid"/>
+                      <a:round/>
+                      <a:headEnd type="none" w="med" len="med"/>
+                      <a:tailEnd type="none" w="med" len="med"/>
+                    </a:lnT>
+                    <a:lnB w="12700" cap="flat" cmpd="sng" algn="ctr">
+                      <a:solidFill>
+                        <a:srgbClr val="EEF3F8"/>
+                      </a:solidFill>
+                      <a:prstDash val="solid"/>
+                      <a:round/>
+                      <a:headEnd type="none" w="med" len="med"/>
+                      <a:tailEnd type="none" w="med" len="med"/>
+                    </a:lnB>
+                    <a:solidFill>
+                      <a:schemeClr val="bg1"/>
+                    </a:solidFill>
+                  </a:tcPr>
+                </a:tc>
+                <a:tc>
+                  <a:txBody>
+                    <a:bodyPr/>
+                    <a:lstStyle/>
+                    <a:p>
+                      <a:pPr indent="0" marL="0">
+                        <a:buNone/>
+                      </a:pPr>
+                      <a:r>
+                        <a:rPr lang="en-US" sz="1400" b="1" dirty="0">
+                          <a:solidFill>
+                            <a:schemeClr val="tx1"/>
+                          </a:solidFill>
+                          <a:latin typeface="Calibri" pitchFamily="34" charset="0"/>
+                          <a:ea typeface="Calibri" pitchFamily="34" charset="-122"/>
+                          <a:cs typeface="Calibri" pitchFamily="34" charset="-120"/>
+                        </a:rPr>
+                        <a:t>100,0</a:t>
+                      </a:r>
+                      <a:endParaRPr lang="en-US" sz="1400" dirty="0">
+                        <a:latin typeface="Calibri" charset="0"/>
+                        <a:ea typeface="Calibri" charset="0"/>
+                        <a:cs typeface="Calibri" charset="0"/>
+                      </a:endParaRPr>
+                    </a:p>
+                  </a:txBody>
+                  <a:tcPr marL="91440" marR="91440" marT="45720" marB="45720" anchor="ctr">
+                    <a:lnL w="12700" cap="flat" cmpd="sng" algn="ctr">
+                      <a:solidFill>
+                        <a:srgbClr val="EEF3F8"/>
+                      </a:solidFill>
+                      <a:prstDash val="solid"/>
+                      <a:round/>
+                      <a:headEnd type="none" w="med" len="med"/>
+                      <a:tailEnd type="none" w="med" len="med"/>
+                    </a:lnL>
+                    <a:lnR w="12700" cap="flat" cmpd="sng" algn="ctr">
+                      <a:solidFill>
+                        <a:srgbClr val="EEF3F8"/>
+                      </a:solidFill>
+                      <a:prstDash val="solid"/>
+                      <a:round/>
+                      <a:headEnd type="none" w="med" len="med"/>
+                      <a:tailEnd type="none" w="med" len="med"/>
+                    </a:lnR>
+                    <a:lnT w="12700" cap="flat" cmpd="sng" algn="ctr">
+                      <a:solidFill>
+                        <a:srgbClr val="EEF3F8"/>
+                      </a:solidFill>
+                      <a:prstDash val="solid"/>
+                      <a:round/>
+                      <a:headEnd type="none" w="med" len="med"/>
+                      <a:tailEnd type="none" w="med" len="med"/>
+                    </a:lnT>
+                    <a:lnB w="12700" cap="flat" cmpd="sng" algn="ctr">
+                      <a:solidFill>
+                        <a:srgbClr val="EEF3F8"/>
+                      </a:solidFill>
+                      <a:prstDash val="solid"/>
+                      <a:round/>
+                      <a:headEnd type="none" w="med" len="med"/>
+                      <a:tailEnd type="none" w="med" len="med"/>
+                    </a:lnB>
+                    <a:solidFill>
+                      <a:schemeClr val="bg1"/>
+                    </a:solidFill>
+                  </a:tcPr>
+                </a:tc>
+              </a:tr>
+            </a:tbl>
+          </a:graphicData>
+        </a:graphic>
+      </p:graphicFrame>
+      <p:sp>
+        <p:nvSpPr>
+          <p:cNvPr id="8" name="Text 4"/>
+          <p:cNvSpPr txBox="1"/>
+          <p:nvPr/>
+        </p:nvSpPr>
+        <p:spPr>
+          <a:xfrm>
+            <a:off x="822960" y="5166360"/>
+            <a:ext cx="2971800" cy="914400"/>
+          </a:xfrm>
+          <a:prstGeom prst="rect">
+            <a:avLst/>
+          </a:prstGeom>
+          <a:noFill/>
+          <a:ln/>
+        </p:spPr>
+        <p:txBody>
+          <a:bodyPr wrap="square" lIns="0" tIns="0" rIns="0" bIns="0" rtlCol="0" anchor="t"/>
+          <a:lstStyle/>
+          <a:p>
+            <a:pPr indent="0" marL="0">
+              <a:buNone/>
+            </a:pPr>
+            <a:r>
+              <a:rPr lang="en-US" sz="1200" i="1" dirty="0">
+                <a:solidFill>
+                  <a:schemeClr val="tx2"/>
+                </a:solidFill>
+              </a:rPr>
+              <a:t>Térmicas e demais = 100 − 51,7 − 26,4 = 21,9 (resíduo). Fonte: EPE, Anuário Estatístico de Energia Elétrica 2025.</a:t>
+            </a:r>
+            <a:endParaRPr lang="en-US" sz="1200" dirty="0"/>
+          </a:p>
+        </p:txBody>
+      </p:sp>
+      <p:sp>
+        <p:nvSpPr>
+          <p:cNvPr id="9" name="Calc formula card"/>
+          <p:cNvSpPr/>
+          <p:nvPr/>
+        </p:nvSpPr>
+        <p:spPr>
+          <a:xfrm>
+            <a:off x="4334256" y="1417320"/>
+            <a:ext cx="3520440" cy="4754880"/>
+          </a:xfrm>
+          <a:prstGeom prst="roundRect">
+            <a:avLst>
+              <a:gd name="adj" fmla="val 3117"/>
+            </a:avLst>
+          </a:prstGeom>
+          <a:solidFill>
+            <a:schemeClr val="bg1"/>
+          </a:solidFill>
+          <a:ln w="12700">
+            <a:solidFill>
+              <a:schemeClr val="bg1"/>
+            </a:solidFill>
+            <a:prstDash val="solid"/>
+          </a:ln>
+          <a:effectLst>
+            <a:outerShdw sx="100000" sy="100000" kx="0" ky="0" algn="bl" rotWithShape="0" blurRad="101600" dist="25400" dir="5400000">
+              <a:srgbClr val="0B1A2E">
+                <a:alpha val="12000"/>
+              </a:srgbClr>
+            </a:outerShdw>
+          </a:effectLst>
+        </p:spPr>
+      </p:sp>
+      <p:sp>
+        <p:nvSpPr>
+          <p:cNvPr id="10" name="Icon circle"/>
+          <p:cNvSpPr/>
+          <p:nvPr/>
+        </p:nvSpPr>
+        <p:spPr>
+          <a:xfrm>
+            <a:off x="4608576" y="1691640"/>
+            <a:ext cx="548640" cy="548640"/>
+          </a:xfrm>
+          <a:prstGeom prst="ellipse">
+            <a:avLst/>
+          </a:prstGeom>
+          <a:solidFill>
+            <a:schemeClr val="accent1"/>
+          </a:solidFill>
+          <a:ln w="12700">
+            <a:solidFill>
+              <a:schemeClr val="accent1"/>
+            </a:solidFill>
+            <a:prstDash val="solid"/>
+          </a:ln>
+        </p:spPr>
+      </p:sp>
+      <p:pic>
+        <p:nvPicPr>
+          <p:cNvPr id="11" name="Image 1" descr="FaBalanceScale">    </p:cNvPr>
+          <p:cNvPicPr>
+            <a:picLocks noChangeAspect="1"/>
+          </p:cNvPicPr>
+          <p:nvPr/>
+        </p:nvPicPr>
+        <p:blipFill>
+          <a:blip r:embed="rId2"/>
+          <a:stretch>
+            <a:fillRect/>
+          </a:stretch>
+        </p:blipFill>
+        <p:spPr>
+          <a:xfrm>
+            <a:off x="4745736" y="1828800"/>
+            <a:ext cx="274320" cy="274320"/>
+          </a:xfrm>
+          <a:prstGeom prst="rect">
+            <a:avLst/>
+          </a:prstGeom>
+        </p:spPr>
+      </p:pic>
+      <p:sp>
+        <p:nvSpPr>
+          <p:cNvPr id="12" name="Text 7"/>
+          <p:cNvSpPr txBox="1"/>
+          <p:nvPr/>
+        </p:nvSpPr>
+        <p:spPr>
+          <a:xfrm>
+            <a:off x="5340096" y="1691640"/>
+            <a:ext cx="2331720" cy="548640"/>
+          </a:xfrm>
+          <a:prstGeom prst="rect">
+            <a:avLst/>
+          </a:prstGeom>
+          <a:noFill/>
+          <a:ln/>
+        </p:spPr>
+        <p:txBody>
+          <a:bodyPr wrap="square" lIns="0" tIns="0" rIns="0" bIns="0" rtlCol="0" anchor="ctr"/>
+          <a:lstStyle/>
+          <a:p>
+            <a:pPr indent="0" marL="0">
+              <a:buNone/>
+            </a:pPr>
+            <a:r>
+              <a:rPr lang="en-US" sz="1800" b="1" dirty="0">
+                <a:solidFill>
+                  <a:schemeClr val="tx1"/>
+                </a:solidFill>
+                <a:latin typeface="Cambria" pitchFamily="34" charset="0"/>
+                <a:ea typeface="Cambria" pitchFamily="34" charset="-122"/>
+                <a:cs typeface="Cambria" pitchFamily="34" charset="-120"/>
+              </a:rPr>
+              <a:t>2. Fórmula</a:t>
+            </a:r>
+            <a:endParaRPr lang="en-US" sz="1800" dirty="0"/>
+          </a:p>
+        </p:txBody>
+      </p:sp>
+      <p:sp>
+        <p:nvSpPr>
+          <p:cNvPr id="13" name="Text 8"/>
+          <p:cNvSpPr txBox="1"/>
+          <p:nvPr/>
+        </p:nvSpPr>
+        <p:spPr>
+          <a:xfrm>
+            <a:off x="4608576" y="2606040"/>
+            <a:ext cx="2971800" cy="502920"/>
+          </a:xfrm>
+          <a:prstGeom prst="rect">
+            <a:avLst/>
+          </a:prstGeom>
+          <a:noFill/>
+          <a:ln/>
+        </p:spPr>
+        <p:txBody>
+          <a:bodyPr wrap="square" lIns="0" tIns="0" rIns="0" bIns="0" rtlCol="0" anchor="t"/>
+          <a:lstStyle/>
+          <a:p>
+            <a:pPr indent="0" marL="0">
+              <a:buNone/>
+            </a:pPr>
+            <a:r>
+              <a:rPr lang="en-US" sz="2200" b="1" dirty="0">
+                <a:solidFill>
+                  <a:schemeClr val="tx2"/>
+                </a:solidFill>
+                <a:latin typeface="Cambria" pitchFamily="34" charset="0"/>
+                <a:ea typeface="Cambria" pitchFamily="34" charset="-122"/>
+                <a:cs typeface="Cambria" pitchFamily="34" charset="-120"/>
+              </a:rPr>
+              <a:t>Peso = g × k</a:t>
+            </a:r>
+            <a:endParaRPr lang="en-US" sz="2200" dirty="0"/>
+          </a:p>
+        </p:txBody>
+      </p:sp>
+      <p:sp>
+        <p:nvSpPr>
+          <p:cNvPr id="14" name="Text 9"/>
+          <p:cNvSpPr txBox="1"/>
+          <p:nvPr/>
+        </p:nvSpPr>
+        <p:spPr>
+          <a:xfrm>
+            <a:off x="4608576" y="3246120"/>
+            <a:ext cx="2971800" cy="822960"/>
+          </a:xfrm>
+          <a:prstGeom prst="rect">
+            <a:avLst/>
+          </a:prstGeom>
+          <a:noFill/>
+          <a:ln/>
+        </p:spPr>
+        <p:txBody>
+          <a:bodyPr wrap="square" lIns="0" tIns="0" rIns="0" bIns="0" rtlCol="0" anchor="t"/>
+          <a:lstStyle/>
+          <a:p>
+            <a:pPr indent="0" marL="0">
+              <a:buNone/>
+            </a:pPr>
+            <a:r>
+              <a:rPr lang="en-US" sz="2000" b="1" dirty="0">
+                <a:solidFill>
+                  <a:schemeClr val="tx2"/>
+                </a:solidFill>
+                <a:latin typeface="Cambria" pitchFamily="34" charset="0"/>
+                <a:ea typeface="Cambria" pitchFamily="34" charset="-122"/>
+                <a:cs typeface="Cambria" pitchFamily="34" charset="-120"/>
+              </a:rPr>
+              <a:t>Parcela = peso ÷ soma dos pesos</a:t>
+            </a:r>
+            <a:endParaRPr lang="en-US" sz="2000" dirty="0"/>
+          </a:p>
+        </p:txBody>
+      </p:sp>
+      <p:sp>
+        <p:nvSpPr>
+          <p:cNvPr id="15" name="Text 10"/>
+          <p:cNvSpPr txBox="1"/>
+          <p:nvPr/>
+        </p:nvSpPr>
+        <p:spPr>
+          <a:xfrm>
+            <a:off x="4608576" y="4343400"/>
+            <a:ext cx="2971800" cy="1280160"/>
+          </a:xfrm>
+          <a:prstGeom prst="rect">
+            <a:avLst/>
+          </a:prstGeom>
+          <a:noFill/>
+          <a:ln/>
+        </p:spPr>
+        <p:txBody>
+          <a:bodyPr wrap="square" lIns="0" tIns="0" rIns="0" bIns="0" rtlCol="0" anchor="t"/>
+          <a:lstStyle/>
+          <a:p>
+            <a:pPr marL="342900" indent="-342900">
+              <a:spcAft>
+                <a:spcPts val="600"/>
+              </a:spcAft>
+              <a:buSzPct val="100000"/>
+              <a:buChar char="•"/>
+            </a:pPr>
+            <a:r>
+              <a:rPr lang="en-US" sz="1400" dirty="0">
+                <a:solidFill>
+                  <a:schemeClr val="tx1"/>
+                </a:solidFill>
+              </a:rPr>
+              <a:t>g: participação da fonte na geração</a:t>
+            </a:r>
+            <a:endParaRPr lang="en-US" sz="1400" dirty="0"/>
+          </a:p>
+          <a:p>
+            <a:pPr marL="342900" indent="-342900">
+              <a:spcAft>
+                <a:spcPts val="600"/>
+              </a:spcAft>
+              <a:buSzPct val="100000"/>
+              <a:buChar char="•"/>
+            </a:pPr>
+            <a:r>
+              <a:rPr lang="en-US" sz="1400" dirty="0">
+                <a:solidFill>
+                  <a:schemeClr val="tx1"/>
+                </a:solidFill>
+              </a:rPr>
+              <a:t>k: coeficiente de flexibilidade (P1 a P4)</a:t>
+            </a:r>
+            <a:endParaRPr lang="en-US" sz="1400" dirty="0"/>
+          </a:p>
+        </p:txBody>
+      </p:sp>
+      <p:sp>
+        <p:nvSpPr>
+          <p:cNvPr id="16" name="Calc coefficients card"/>
+          <p:cNvSpPr/>
+          <p:nvPr/>
+        </p:nvSpPr>
+        <p:spPr>
+          <a:xfrm>
+            <a:off x="8119872" y="1417320"/>
+            <a:ext cx="3520440" cy="4754880"/>
+          </a:xfrm>
+          <a:prstGeom prst="roundRect">
+            <a:avLst>
+              <a:gd name="adj" fmla="val 3117"/>
+            </a:avLst>
+          </a:prstGeom>
+          <a:solidFill>
+            <a:schemeClr val="bg1"/>
+          </a:solidFill>
+          <a:ln w="12700">
+            <a:solidFill>
+              <a:schemeClr val="bg1"/>
+            </a:solidFill>
+            <a:prstDash val="solid"/>
+          </a:ln>
+          <a:effectLst>
+            <a:outerShdw sx="100000" sy="100000" kx="0" ky="0" algn="bl" rotWithShape="0" blurRad="101600" dist="25400" dir="5400000">
+              <a:srgbClr val="0B1A2E">
+                <a:alpha val="12000"/>
+              </a:srgbClr>
+            </a:outerShdw>
+          </a:effectLst>
+        </p:spPr>
+      </p:sp>
+      <p:sp>
+        <p:nvSpPr>
+          <p:cNvPr id="17" name="Icon circle"/>
+          <p:cNvSpPr/>
+          <p:nvPr/>
+        </p:nvSpPr>
+        <p:spPr>
+          <a:xfrm>
+            <a:off x="8394192" y="1691640"/>
+            <a:ext cx="548640" cy="548640"/>
+          </a:xfrm>
+          <a:prstGeom prst="ellipse">
+            <a:avLst/>
+          </a:prstGeom>
+          <a:solidFill>
+            <a:schemeClr val="accent3"/>
+          </a:solidFill>
+          <a:ln w="12700">
+            <a:solidFill>
+              <a:schemeClr val="accent3"/>
+            </a:solidFill>
+            <a:prstDash val="solid"/>
+          </a:ln>
+        </p:spPr>
+      </p:sp>
+      <p:pic>
+        <p:nvPicPr>
+          <p:cNvPr id="18" name="Image 2" descr="FaCogs">    </p:cNvPr>
+          <p:cNvPicPr>
+            <a:picLocks noChangeAspect="1"/>
+          </p:cNvPicPr>
+          <p:nvPr/>
+        </p:nvPicPr>
+        <p:blipFill>
+          <a:blip r:embed="rId3"/>
+          <a:stretch>
+            <a:fillRect/>
+          </a:stretch>
+        </p:blipFill>
+        <p:spPr>
+          <a:xfrm>
+            <a:off x="8531352" y="1828800"/>
+            <a:ext cx="274320" cy="274320"/>
+          </a:xfrm>
+          <a:prstGeom prst="rect">
+            <a:avLst/>
+          </a:prstGeom>
+        </p:spPr>
+      </p:pic>
+      <p:sp>
+        <p:nvSpPr>
+          <p:cNvPr id="19" name="Text 13"/>
+          <p:cNvSpPr txBox="1"/>
+          <p:nvPr/>
+        </p:nvSpPr>
+        <p:spPr>
+          <a:xfrm>
+            <a:off x="9125712" y="1691640"/>
+            <a:ext cx="2331720" cy="548640"/>
+          </a:xfrm>
+          <a:prstGeom prst="rect">
+            <a:avLst/>
+          </a:prstGeom>
+          <a:noFill/>
+          <a:ln/>
+        </p:spPr>
+        <p:txBody>
+          <a:bodyPr wrap="square" lIns="0" tIns="0" rIns="0" bIns="0" rtlCol="0" anchor="ctr"/>
+          <a:lstStyle/>
+          <a:p>
+            <a:pPr indent="0" marL="0">
+              <a:buNone/>
+            </a:pPr>
+            <a:r>
+              <a:rPr lang="en-US" sz="1800" b="1" dirty="0">
+                <a:solidFill>
+                  <a:schemeClr val="tx1"/>
+                </a:solidFill>
+                <a:latin typeface="Cambria" pitchFamily="34" charset="0"/>
+                <a:ea typeface="Cambria" pitchFamily="34" charset="-122"/>
+                <a:cs typeface="Cambria" pitchFamily="34" charset="-120"/>
+              </a:rPr>
+              <a:t>3. Coeficientes k</a:t>
+            </a:r>
+            <a:endParaRPr lang="en-US" sz="1800" dirty="0"/>
+          </a:p>
+        </p:txBody>
+      </p:sp>
+      <p:sp>
+        <p:nvSpPr>
+          <p:cNvPr id="20" name="Text 14"/>
+          <p:cNvSpPr txBox="1"/>
+          <p:nvPr/>
+        </p:nvSpPr>
+        <p:spPr>
+          <a:xfrm>
+            <a:off x="8394192" y="2514600"/>
+            <a:ext cx="2971800" cy="3474720"/>
+          </a:xfrm>
+          <a:prstGeom prst="rect">
+            <a:avLst/>
+          </a:prstGeom>
+          <a:noFill/>
+          <a:ln/>
+        </p:spPr>
+        <p:txBody>
+          <a:bodyPr wrap="square" lIns="0" tIns="0" rIns="0" bIns="0" rtlCol="0" anchor="t"/>
+          <a:lstStyle/>
+          <a:p>
+            <a:pPr indent="0" marL="0">
+              <a:spcAft>
+                <a:spcPts val="800"/>
+              </a:spcAft>
+              <a:buNone/>
+            </a:pPr>
+            <a:r>
+              <a:rPr lang="en-US" sz="1400" b="1" dirty="0">
+                <a:solidFill>
+                  <a:schemeClr val="tx1"/>
+                </a:solidFill>
+              </a:rPr>
+              <a:t>P1 = 1,00 | P2 = 0,75</a:t>
+            </a:r>
+            <a:endParaRPr lang="en-US" sz="1400" dirty="0"/>
+          </a:p>
+          <a:p>
+            <a:pPr indent="0" marL="0">
+              <a:spcAft>
+                <a:spcPts val="800"/>
+              </a:spcAft>
+              <a:buNone/>
+            </a:pPr>
+            <a:r>
+              <a:rPr lang="en-US" sz="1400" b="1" dirty="0">
+                <a:solidFill>
+                  <a:schemeClr val="tx1"/>
+                </a:solidFill>
+              </a:rPr>
+              <a:t>P3 = 0,50 | P4 = 0,25</a:t>
+            </a:r>
+            <a:endParaRPr lang="en-US" sz="1400" dirty="0"/>
+          </a:p>
+          <a:p>
+            <a:pPr marL="342900" indent="-342900">
+              <a:spcAft>
+                <a:spcPts val="800"/>
+              </a:spcAft>
+              <a:buSzPct val="100000"/>
+              <a:buChar char="•"/>
+            </a:pPr>
+            <a:r>
+              <a:rPr lang="en-US" sz="1400" dirty="0">
+                <a:solidFill>
+                  <a:schemeClr val="tx1"/>
+                </a:solidFill>
+              </a:rPr>
+              <a:t>Eólicas e solares: k = 1,00 (P1)</a:t>
+            </a:r>
+            <a:endParaRPr lang="en-US" sz="1400" dirty="0"/>
+          </a:p>
+          <a:p>
+            <a:pPr marL="342900" indent="-342900">
+              <a:spcAft>
+                <a:spcPts val="800"/>
+              </a:spcAft>
+              <a:buSzPct val="100000"/>
+              <a:buChar char="•"/>
+            </a:pPr>
+            <a:r>
+              <a:rPr lang="en-US" sz="1400" dirty="0">
+                <a:solidFill>
+                  <a:schemeClr val="tx1"/>
+                </a:solidFill>
+              </a:rPr>
+              <a:t>Hidro e térmicas, por cenário:</a:t>
+            </a:r>
+            <a:endParaRPr lang="en-US" sz="1400" dirty="0"/>
+          </a:p>
+          <a:p>
+            <a:pPr marL="381000" indent="-381000">
+              <a:spcAft>
+                <a:spcPts val="800"/>
+              </a:spcAft>
+              <a:buSzPct val="100000"/>
+              <a:buChar char="•"/>
+            </a:pPr>
+            <a:r>
+              <a:rPr lang="en-US" sz="1400" dirty="0">
+                <a:solidFill>
+                  <a:schemeClr val="tx1"/>
+                </a:solidFill>
+              </a:rPr>
+              <a:t>A: todas em P1, k = 1,00</a:t>
+            </a:r>
+            <a:endParaRPr lang="en-US" sz="1400" dirty="0"/>
+          </a:p>
+          <a:p>
+            <a:pPr marL="381000" indent="-381000">
+              <a:spcAft>
+                <a:spcPts val="800"/>
+              </a:spcAft>
+              <a:buSzPct val="100000"/>
+              <a:buChar char="•"/>
+            </a:pPr>
+            <a:r>
+              <a:rPr lang="en-US" sz="1400" dirty="0">
+                <a:solidFill>
+                  <a:schemeClr val="tx1"/>
+                </a:solidFill>
+              </a:rPr>
+              <a:t>B: uniforme, k = (1 + 0,75 + 0,5 + 0,25) ÷ 4 = 0,625</a:t>
+            </a:r>
+            <a:endParaRPr lang="en-US" sz="1400" dirty="0"/>
+          </a:p>
+          <a:p>
+            <a:pPr marL="381000" indent="-381000">
+              <a:spcAft>
+                <a:spcPts val="800"/>
+              </a:spcAft>
+              <a:buSzPct val="100000"/>
+              <a:buChar char="•"/>
+            </a:pPr>
+            <a:r>
+              <a:rPr lang="en-US" sz="1400" dirty="0">
+                <a:solidFill>
+                  <a:schemeClr val="tx1"/>
+                </a:solidFill>
+              </a:rPr>
+              <a:t>C: todas em P4, k = 0,25</a:t>
+            </a:r>
+            <a:endParaRPr lang="en-US" sz="1400" dirty="0"/>
+          </a:p>
+        </p:txBody>
+      </p:sp>
+      <p:sp>
+        <p:nvSpPr>
+          <p:cNvPr id="21" name="Text 15"/>
+          <p:cNvSpPr txBox="1"/>
+          <p:nvPr/>
+        </p:nvSpPr>
+        <p:spPr>
+          <a:xfrm>
+            <a:off x="548640" y="6382512"/>
+            <a:ext cx="10424160" cy="274320"/>
+          </a:xfrm>
+          <a:prstGeom prst="rect">
+            <a:avLst/>
+          </a:prstGeom>
+          <a:noFill/>
+          <a:ln/>
+        </p:spPr>
+        <p:txBody>
+          <a:bodyPr wrap="square" lIns="0" tIns="0" rIns="0" bIns="0" rtlCol="0" anchor="ctr"/>
+          <a:lstStyle/>
+          <a:p>
+            <a:pPr indent="0" marL="0">
+              <a:buNone/>
+            </a:pPr>
+            <a:r>
+              <a:rPr lang="en-US" sz="1000" i="1" dirty="0">
+                <a:solidFill>
+                  <a:schemeClr val="tx2"/>
+                </a:solidFill>
+              </a:rPr>
+              <a:t>Patamares e coeficientes da proposta da ANEEL (NT 101/2026, CP 37/2026), via Canal Solar, ePowerBay e TAGD Law (2026). Os cenários A, B e C são hipóteses minhas.</a:t>
+            </a:r>
+            <a:endParaRPr lang="en-US" sz="1000" dirty="0"/>
+          </a:p>
+        </p:txBody>
+      </p:sp>
+      <p:sp>
+        <p:nvSpPr>
+          <p:cNvPr id="25" name="Slide Number Placeholder 0"/>
+          <p:cNvSpPr>
+            <a:spLocks noGrp="1"/>
+          </p:cNvSpPr>
+          <p:nvPr>
+            <p:ph type="sldNum" sz="quarter" idx="4294967295"/>
+          </p:nvPr>
+        </p:nvSpPr>
+        <p:spPr>
+          <a:xfrm>
+            <a:off x="11155680" y="6400800"/>
+            <a:ext cx="548640" cy="274320"/>
+          </a:xfrm>
+          <a:prstGeom prst="rect">
+            <a:avLst/>
+          </a:prstGeom>
+          <a:extLst>
+            <a:ext uri="{C572A759-6A51-4108-AA02-DFA0A04FC94B}">
+              <ma14:wrappingTextBoxFlag xmlns:ma14="http://schemas.microsoft.com/office/mac/drawingml/2011/main" val="0"/>
+            </a:ext>
+          </a:extLst>
+        </p:spPr>
+        <p:txBody>
+          <a:bodyPr/>
+          <a:lstStyle>
+            <a:lvl1pPr>
+              <a:defRPr sz="1100">
+                <a:solidFill>
+                  <a:schemeClr val="tx2"/>
+                </a:solidFill>
+              </a:defRPr>
+            </a:lvl1pPr>
+          </a:lstStyle>
+          <a:p>
+            <a:pPr algn="r"/>
+            <a:fld id="{F7021451-1387-4CA6-816F-3879F97B5CBC}" type="slidenum">
+              <a:rPr b="0" lang="en-US"/>
+              <a:t>17</a:t>
+            </a:fld>
+            <a:endParaRPr lang="en-US"/>
+          </a:p>
+        </p:txBody>
+      </p:sp>
+    </p:spTree>
+  </p:cSld>
+  <p:clrMapOvr>
+    <a:masterClrMapping/>
+  </p:clrMapOvr>
+</p:sld>
+</file>
+
+<file path=ppt/slides/slide18.xml><?xml version="1.0" encoding="utf-8"?>
+<p:sld xmlns:a="http://schemas.openxmlformats.org/drawingml/2006/main" xmlns:r="http://schemas.openxmlformats.org/officeDocument/2006/relationships" xmlns:p="http://schemas.openxmlformats.org/presentationml/2006/main">
+  <p:cSld name="Slide 18">
+    <p:spTree>
+      <p:nvGrpSpPr>
+        <p:cNvPr id="1" name=""/>
+        <p:cNvGrpSpPr/>
+        <p:nvPr/>
+      </p:nvGrpSpPr>
+      <p:grpSpPr>
+        <a:xfrm>
+          <a:off x="0" y="0"/>
+          <a:ext cx="0" cy="0"/>
+          <a:chOff x="0" y="0"/>
+          <a:chExt cx="0" cy="0"/>
+        </a:xfrm>
+      </p:grpSpPr>
+      <p:sp>
+        <p:nvSpPr>
+          <p:cNvPr id="2" name="Text 0"/>
+          <p:cNvSpPr/>
+          <p:nvPr>
+            <p:ph idx="100" type="title" hasCustomPrompt="1"/>
+          </p:nvPr>
+        </p:nvSpPr>
+        <p:spPr>
+          <a:xfrm>
+            <a:off x="548640" y="365760"/>
+            <a:ext cx="11094415" cy="822960"/>
+          </a:xfrm>
+          <a:prstGeom prst="rect">
+            <a:avLst/>
+          </a:prstGeom>
+          <a:noFill/>
+          <a:ln/>
+        </p:spPr>
+        <p:txBody>
+          <a:bodyPr wrap="square" lIns="0" tIns="0" rIns="0" bIns="0" rtlCol="0" anchor="ctr"/>
+          <a:lstStyle/>
+          <a:p>
+            <a:pPr algn="l" indent="0" marL="0">
+              <a:buNone/>
+            </a:pPr>
+            <a:r>
+              <a:rPr lang="en-US" sz="3200" b="1" dirty="0">
+                <a:solidFill>
+                  <a:schemeClr val="tx1"/>
+                </a:solidFill>
+              </a:rPr>
+              <a:t>Memória de cálculo 2/3: pesos e parcelas</a:t>
+            </a:r>
+            <a:endParaRPr lang="en-US" sz="3200" dirty="0"/>
+          </a:p>
+        </p:txBody>
+      </p:sp>
+      <p:graphicFrame>
+        <p:nvGraphicFramePr>
+          <p:cNvPr id="19" name="Table 0"/>
+          <p:cNvGraphicFramePr>
+            <a:graphicFrameLocks noGrp="1"/>
+          </p:cNvGraphicFramePr>
+          <p:nvPr>
+            <p:extLst>
+              <p:ext uri="{D42A27DB-BD31-4B8C-83A1-F6EECF244321}">
+                <p14:modId xmlns:p14="http://schemas.microsoft.com/office/powerpoint/2010/main" val="1579011935"/>
+              </p:ext>
+            </p:extLst>
+          </p:nvPr>
+        </p:nvGraphicFramePr>
+        <p:xfrm>
+          <a:off x="548640" y="1417320"/>
+          <a:ext cx="11094415" cy="914400"/>
+        </p:xfrm>
+        <a:graphic>
+          <a:graphicData uri="http://schemas.openxmlformats.org/drawingml/2006/table">
+            <a:tbl>
+              <a:tblPr/>
+              <a:tblGrid>
+                <a:gridCol w="2011680"/>
+                <a:gridCol w="914400"/>
+                <a:gridCol w="1417320"/>
+                <a:gridCol w="1188720"/>
+                <a:gridCol w="1508760"/>
+                <a:gridCol w="1188720"/>
+                <a:gridCol w="1508760"/>
+                <a:gridCol w="1353312"/>
+              </a:tblGrid>
+              <a:tr h="731520">
+                <a:tc>
+                  <a:txBody>
+                    <a:bodyPr/>
+                    <a:lstStyle/>
+                    <a:p>
+                      <a:pPr algn="ctr" indent="0" marL="0">
+                        <a:buNone/>
+                      </a:pPr>
+                      <a:r>
+                        <a:rPr lang="en-US" sz="1300" b="1" dirty="0">
+                          <a:solidFill>
+                            <a:schemeClr val="bg1"/>
+                          </a:solidFill>
+                          <a:latin typeface="Calibri" pitchFamily="34" charset="0"/>
+                          <a:ea typeface="Calibri" pitchFamily="34" charset="-122"/>
+                          <a:cs typeface="Calibri" pitchFamily="34" charset="-120"/>
+                        </a:rPr>
+                        <a:t>Fonte</a:t>
+                      </a:r>
+                      <a:endParaRPr lang="en-US" sz="1300" dirty="0">
+                        <a:latin typeface="Calibri" charset="0"/>
+                        <a:ea typeface="Calibri" charset="0"/>
+                        <a:cs typeface="Calibri" charset="0"/>
+                      </a:endParaRPr>
+                    </a:p>
+                  </a:txBody>
+                  <a:tcPr marL="91440" marR="91440" marT="45720" marB="45720" anchor="ctr">
+                    <a:lnL w="12700" cap="flat" cmpd="sng" algn="ctr">
+                      <a:solidFill>
+                        <a:srgbClr val="EEF3F8"/>
+                      </a:solidFill>
+                      <a:prstDash val="solid"/>
+                      <a:round/>
+                      <a:headEnd type="none" w="med" len="med"/>
+                      <a:tailEnd type="none" w="med" len="med"/>
+                    </a:lnL>
+                    <a:lnR w="12700" cap="flat" cmpd="sng" algn="ctr">
+                      <a:solidFill>
+                        <a:srgbClr val="EEF3F8"/>
+                      </a:solidFill>
+                      <a:prstDash val="solid"/>
+                      <a:round/>
+                      <a:headEnd type="none" w="med" len="med"/>
+                      <a:tailEnd type="none" w="med" len="med"/>
+                    </a:lnR>
+                    <a:lnT w="12700" cap="flat" cmpd="sng" algn="ctr">
+                      <a:solidFill>
+                        <a:srgbClr val="EEF3F8"/>
+                      </a:solidFill>
+                      <a:prstDash val="solid"/>
+                      <a:round/>
+                      <a:headEnd type="none" w="med" len="med"/>
+                      <a:tailEnd type="none" w="med" len="med"/>
+                    </a:lnT>
+                    <a:lnB w="12700" cap="flat" cmpd="sng" algn="ctr">
+                      <a:solidFill>
+                        <a:srgbClr val="EEF3F8"/>
+                      </a:solidFill>
+                      <a:prstDash val="solid"/>
+                      <a:round/>
+                      <a:headEnd type="none" w="med" len="med"/>
+                      <a:tailEnd type="none" w="med" len="med"/>
+                    </a:lnB>
+                    <a:solidFill>
+                      <a:schemeClr val="tx2"/>
+                    </a:solidFill>
+                  </a:tcPr>
+                </a:tc>
+                <a:tc>
+                  <a:txBody>
+                    <a:bodyPr/>
+                    <a:lstStyle/>
+                    <a:p>
+                      <a:pPr algn="ctr" indent="0" marL="0">
+                        <a:buNone/>
+                      </a:pPr>
+                      <a:r>
+                        <a:rPr lang="en-US" sz="1300" b="1" dirty="0">
+                          <a:solidFill>
+                            <a:schemeClr val="bg1"/>
+                          </a:solidFill>
+                          <a:latin typeface="Calibri" pitchFamily="34" charset="0"/>
+                          <a:ea typeface="Calibri" pitchFamily="34" charset="-122"/>
+                          <a:cs typeface="Calibri" pitchFamily="34" charset="-120"/>
+                        </a:rPr>
+                        <a:t>g (%)</a:t>
+                      </a:r>
+                      <a:endParaRPr lang="en-US" sz="1300" dirty="0">
+                        <a:latin typeface="Calibri" charset="0"/>
+                        <a:ea typeface="Calibri" charset="0"/>
+                        <a:cs typeface="Calibri" charset="0"/>
+                      </a:endParaRPr>
+                    </a:p>
+                  </a:txBody>
+                  <a:tcPr marL="91440" marR="91440" marT="45720" marB="45720" anchor="ctr">
+                    <a:lnL w="12700" cap="flat" cmpd="sng" algn="ctr">
+                      <a:solidFill>
+                        <a:srgbClr val="EEF3F8"/>
+                      </a:solidFill>
+                      <a:prstDash val="solid"/>
+                      <a:round/>
+                      <a:headEnd type="none" w="med" len="med"/>
+                      <a:tailEnd type="none" w="med" len="med"/>
+                    </a:lnL>
+                    <a:lnR w="12700" cap="flat" cmpd="sng" algn="ctr">
+                      <a:solidFill>
+                        <a:srgbClr val="EEF3F8"/>
+                      </a:solidFill>
+                      <a:prstDash val="solid"/>
+                      <a:round/>
+                      <a:headEnd type="none" w="med" len="med"/>
+                      <a:tailEnd type="none" w="med" len="med"/>
+                    </a:lnR>
+                    <a:lnT w="12700" cap="flat" cmpd="sng" algn="ctr">
+                      <a:solidFill>
+                        <a:srgbClr val="EEF3F8"/>
+                      </a:solidFill>
+                      <a:prstDash val="solid"/>
+                      <a:round/>
+                      <a:headEnd type="none" w="med" len="med"/>
+                      <a:tailEnd type="none" w="med" len="med"/>
+                    </a:lnT>
+                    <a:lnB w="12700" cap="flat" cmpd="sng" algn="ctr">
+                      <a:solidFill>
+                        <a:srgbClr val="EEF3F8"/>
+                      </a:solidFill>
+                      <a:prstDash val="solid"/>
+                      <a:round/>
+                      <a:headEnd type="none" w="med" len="med"/>
+                      <a:tailEnd type="none" w="med" len="med"/>
+                    </a:lnB>
+                    <a:solidFill>
+                      <a:schemeClr val="tx2"/>
+                    </a:solidFill>
+                  </a:tcPr>
+                </a:tc>
+                <a:tc>
+                  <a:txBody>
+                    <a:bodyPr/>
+                    <a:lstStyle/>
+                    <a:p>
+                      <a:pPr algn="ctr" indent="0" marL="0">
+                        <a:buNone/>
+                      </a:pPr>
+                      <a:r>
+                        <a:rPr lang="en-US" sz="1300" b="1" dirty="0">
+                          <a:solidFill>
+                            <a:schemeClr val="bg1"/>
+                          </a:solidFill>
+                          <a:latin typeface="Calibri" pitchFamily="34" charset="0"/>
+                          <a:ea typeface="Calibri" pitchFamily="34" charset="-122"/>
+                          <a:cs typeface="Calibri" pitchFamily="34" charset="-120"/>
+                        </a:rPr>
+                        <a:t>A: peso (g × 1,00)</a:t>
+                      </a:r>
+                      <a:endParaRPr lang="en-US" sz="1300" dirty="0">
+                        <a:latin typeface="Calibri" charset="0"/>
+                        <a:ea typeface="Calibri" charset="0"/>
+                        <a:cs typeface="Calibri" charset="0"/>
+                      </a:endParaRPr>
+                    </a:p>
+                  </a:txBody>
+                  <a:tcPr marL="91440" marR="91440" marT="45720" marB="45720" anchor="ctr">
+                    <a:lnL w="12700" cap="flat" cmpd="sng" algn="ctr">
+                      <a:solidFill>
+                        <a:srgbClr val="EEF3F8"/>
+                      </a:solidFill>
+                      <a:prstDash val="solid"/>
+                      <a:round/>
+                      <a:headEnd type="none" w="med" len="med"/>
+                      <a:tailEnd type="none" w="med" len="med"/>
+                    </a:lnL>
+                    <a:lnR w="12700" cap="flat" cmpd="sng" algn="ctr">
+                      <a:solidFill>
+                        <a:srgbClr val="EEF3F8"/>
+                      </a:solidFill>
+                      <a:prstDash val="solid"/>
+                      <a:round/>
+                      <a:headEnd type="none" w="med" len="med"/>
+                      <a:tailEnd type="none" w="med" len="med"/>
+                    </a:lnR>
+                    <a:lnT w="12700" cap="flat" cmpd="sng" algn="ctr">
+                      <a:solidFill>
+                        <a:srgbClr val="EEF3F8"/>
+                      </a:solidFill>
+                      <a:prstDash val="solid"/>
+                      <a:round/>
+                      <a:headEnd type="none" w="med" len="med"/>
+                      <a:tailEnd type="none" w="med" len="med"/>
+                    </a:lnT>
+                    <a:lnB w="12700" cap="flat" cmpd="sng" algn="ctr">
+                      <a:solidFill>
+                        <a:srgbClr val="EEF3F8"/>
+                      </a:solidFill>
+                      <a:prstDash val="solid"/>
+                      <a:round/>
+                      <a:headEnd type="none" w="med" len="med"/>
+                      <a:tailEnd type="none" w="med" len="med"/>
+                    </a:lnB>
+                    <a:solidFill>
+                      <a:schemeClr val="tx2"/>
+                    </a:solidFill>
+                  </a:tcPr>
+                </a:tc>
+                <a:tc>
+                  <a:txBody>
+                    <a:bodyPr/>
+                    <a:lstStyle/>
+                    <a:p>
+                      <a:pPr algn="ctr" indent="0" marL="0">
+                        <a:buNone/>
+                      </a:pPr>
+                      <a:r>
+                        <a:rPr lang="en-US" sz="1300" b="1" dirty="0">
+                          <a:solidFill>
+                            <a:schemeClr val="bg1"/>
+                          </a:solidFill>
+                          <a:latin typeface="Calibri" pitchFamily="34" charset="0"/>
+                          <a:ea typeface="Calibri" pitchFamily="34" charset="-122"/>
+                          <a:cs typeface="Calibri" pitchFamily="34" charset="-120"/>
+                        </a:rPr>
+                        <a:t>A: parcela</a:t>
+                      </a:r>
+                      <a:endParaRPr lang="en-US" sz="1300" dirty="0">
+                        <a:latin typeface="Calibri" charset="0"/>
+                        <a:ea typeface="Calibri" charset="0"/>
+                        <a:cs typeface="Calibri" charset="0"/>
+                      </a:endParaRPr>
+                    </a:p>
+                  </a:txBody>
+                  <a:tcPr marL="91440" marR="91440" marT="45720" marB="45720" anchor="ctr">
+                    <a:lnL w="12700" cap="flat" cmpd="sng" algn="ctr">
+                      <a:solidFill>
+                        <a:srgbClr val="EEF3F8"/>
+                      </a:solidFill>
+                      <a:prstDash val="solid"/>
+                      <a:round/>
+                      <a:headEnd type="none" w="med" len="med"/>
+                      <a:tailEnd type="none" w="med" len="med"/>
+                    </a:lnL>
+                    <a:lnR w="12700" cap="flat" cmpd="sng" algn="ctr">
+                      <a:solidFill>
+                        <a:srgbClr val="EEF3F8"/>
+                      </a:solidFill>
+                      <a:prstDash val="solid"/>
+                      <a:round/>
+                      <a:headEnd type="none" w="med" len="med"/>
+                      <a:tailEnd type="none" w="med" len="med"/>
+                    </a:lnR>
+                    <a:lnT w="12700" cap="flat" cmpd="sng" algn="ctr">
+                      <a:solidFill>
+                        <a:srgbClr val="EEF3F8"/>
+                      </a:solidFill>
+                      <a:prstDash val="solid"/>
+                      <a:round/>
+                      <a:headEnd type="none" w="med" len="med"/>
+                      <a:tailEnd type="none" w="med" len="med"/>
+                    </a:lnT>
+                    <a:lnB w="12700" cap="flat" cmpd="sng" algn="ctr">
+                      <a:solidFill>
+                        <a:srgbClr val="EEF3F8"/>
+                      </a:solidFill>
+                      <a:prstDash val="solid"/>
+                      <a:round/>
+                      <a:headEnd type="none" w="med" len="med"/>
+                      <a:tailEnd type="none" w="med" len="med"/>
+                    </a:lnB>
+                    <a:solidFill>
+                      <a:schemeClr val="tx2"/>
+                    </a:solidFill>
+                  </a:tcPr>
+                </a:tc>
+                <a:tc>
+                  <a:txBody>
+                    <a:bodyPr/>
+                    <a:lstStyle/>
+                    <a:p>
+                      <a:pPr algn="ctr" indent="0" marL="0">
+                        <a:buNone/>
+                      </a:pPr>
+                      <a:r>
+                        <a:rPr lang="en-US" sz="1300" b="1" dirty="0">
+                          <a:solidFill>
+                            <a:schemeClr val="bg1"/>
+                          </a:solidFill>
+                          <a:latin typeface="Calibri" pitchFamily="34" charset="0"/>
+                          <a:ea typeface="Calibri" pitchFamily="34" charset="-122"/>
+                          <a:cs typeface="Calibri" pitchFamily="34" charset="-120"/>
+                        </a:rPr>
+                        <a:t>B: peso (g × 0,625)</a:t>
+                      </a:r>
+                      <a:endParaRPr lang="en-US" sz="1300" dirty="0">
+                        <a:latin typeface="Calibri" charset="0"/>
+                        <a:ea typeface="Calibri" charset="0"/>
+                        <a:cs typeface="Calibri" charset="0"/>
+                      </a:endParaRPr>
+                    </a:p>
+                  </a:txBody>
+                  <a:tcPr marL="91440" marR="91440" marT="45720" marB="45720" anchor="ctr">
+                    <a:lnL w="12700" cap="flat" cmpd="sng" algn="ctr">
+                      <a:solidFill>
+                        <a:srgbClr val="EEF3F8"/>
+                      </a:solidFill>
+                      <a:prstDash val="solid"/>
+                      <a:round/>
+                      <a:headEnd type="none" w="med" len="med"/>
+                      <a:tailEnd type="none" w="med" len="med"/>
+                    </a:lnL>
+                    <a:lnR w="12700" cap="flat" cmpd="sng" algn="ctr">
+                      <a:solidFill>
+                        <a:srgbClr val="EEF3F8"/>
+                      </a:solidFill>
+                      <a:prstDash val="solid"/>
+                      <a:round/>
+                      <a:headEnd type="none" w="med" len="med"/>
+                      <a:tailEnd type="none" w="med" len="med"/>
+                    </a:lnR>
+                    <a:lnT w="12700" cap="flat" cmpd="sng" algn="ctr">
+                      <a:solidFill>
+                        <a:srgbClr val="EEF3F8"/>
+                      </a:solidFill>
+                      <a:prstDash val="solid"/>
+                      <a:round/>
+                      <a:headEnd type="none" w="med" len="med"/>
+                      <a:tailEnd type="none" w="med" len="med"/>
+                    </a:lnT>
+                    <a:lnB w="12700" cap="flat" cmpd="sng" algn="ctr">
+                      <a:solidFill>
+                        <a:srgbClr val="EEF3F8"/>
+                      </a:solidFill>
+                      <a:prstDash val="solid"/>
+                      <a:round/>
+                      <a:headEnd type="none" w="med" len="med"/>
+                      <a:tailEnd type="none" w="med" len="med"/>
+                    </a:lnB>
+                    <a:solidFill>
+                      <a:schemeClr val="tx2"/>
+                    </a:solidFill>
+                  </a:tcPr>
+                </a:tc>
+                <a:tc>
+                  <a:txBody>
+                    <a:bodyPr/>
+                    <a:lstStyle/>
+                    <a:p>
+                      <a:pPr algn="ctr" indent="0" marL="0">
+                        <a:buNone/>
+                      </a:pPr>
+                      <a:r>
+                        <a:rPr lang="en-US" sz="1300" b="1" dirty="0">
+                          <a:solidFill>
+                            <a:schemeClr val="bg1"/>
+                          </a:solidFill>
+                          <a:latin typeface="Calibri" pitchFamily="34" charset="0"/>
+                          <a:ea typeface="Calibri" pitchFamily="34" charset="-122"/>
+                          <a:cs typeface="Calibri" pitchFamily="34" charset="-120"/>
+                        </a:rPr>
+                        <a:t>B: parcela</a:t>
+                      </a:r>
+                      <a:endParaRPr lang="en-US" sz="1300" dirty="0">
+                        <a:latin typeface="Calibri" charset="0"/>
+                        <a:ea typeface="Calibri" charset="0"/>
+                        <a:cs typeface="Calibri" charset="0"/>
+                      </a:endParaRPr>
+                    </a:p>
+                  </a:txBody>
+                  <a:tcPr marL="91440" marR="91440" marT="45720" marB="45720" anchor="ctr">
+                    <a:lnL w="12700" cap="flat" cmpd="sng" algn="ctr">
+                      <a:solidFill>
+                        <a:srgbClr val="EEF3F8"/>
+                      </a:solidFill>
+                      <a:prstDash val="solid"/>
+                      <a:round/>
+                      <a:headEnd type="none" w="med" len="med"/>
+                      <a:tailEnd type="none" w="med" len="med"/>
+                    </a:lnL>
+                    <a:lnR w="12700" cap="flat" cmpd="sng" algn="ctr">
+                      <a:solidFill>
+                        <a:srgbClr val="EEF3F8"/>
+                      </a:solidFill>
+                      <a:prstDash val="solid"/>
+                      <a:round/>
+                      <a:headEnd type="none" w="med" len="med"/>
+                      <a:tailEnd type="none" w="med" len="med"/>
+                    </a:lnR>
+                    <a:lnT w="12700" cap="flat" cmpd="sng" algn="ctr">
+                      <a:solidFill>
+                        <a:srgbClr val="EEF3F8"/>
+                      </a:solidFill>
+                      <a:prstDash val="solid"/>
+                      <a:round/>
+                      <a:headEnd type="none" w="med" len="med"/>
+                      <a:tailEnd type="none" w="med" len="med"/>
+                    </a:lnT>
+                    <a:lnB w="12700" cap="flat" cmpd="sng" algn="ctr">
+                      <a:solidFill>
+                        <a:srgbClr val="EEF3F8"/>
+                      </a:solidFill>
+                      <a:prstDash val="solid"/>
+                      <a:round/>
+                      <a:headEnd type="none" w="med" len="med"/>
+                      <a:tailEnd type="none" w="med" len="med"/>
+                    </a:lnB>
+                    <a:solidFill>
+                      <a:schemeClr val="tx2"/>
+                    </a:solidFill>
+                  </a:tcPr>
+                </a:tc>
+                <a:tc>
+                  <a:txBody>
+                    <a:bodyPr/>
+                    <a:lstStyle/>
+                    <a:p>
+                      <a:pPr algn="ctr" indent="0" marL="0">
+                        <a:buNone/>
+                      </a:pPr>
+                      <a:r>
+                        <a:rPr lang="en-US" sz="1300" b="1" dirty="0">
+                          <a:solidFill>
+                            <a:schemeClr val="bg1"/>
+                          </a:solidFill>
+                          <a:latin typeface="Calibri" pitchFamily="34" charset="0"/>
+                          <a:ea typeface="Calibri" pitchFamily="34" charset="-122"/>
+                          <a:cs typeface="Calibri" pitchFamily="34" charset="-120"/>
+                        </a:rPr>
+                        <a:t>C: peso (g × 0,25)</a:t>
+                      </a:r>
+                      <a:endParaRPr lang="en-US" sz="1300" dirty="0">
+                        <a:latin typeface="Calibri" charset="0"/>
+                        <a:ea typeface="Calibri" charset="0"/>
+                        <a:cs typeface="Calibri" charset="0"/>
+                      </a:endParaRPr>
+                    </a:p>
+                  </a:txBody>
+                  <a:tcPr marL="91440" marR="91440" marT="45720" marB="45720" anchor="ctr">
+                    <a:lnL w="12700" cap="flat" cmpd="sng" algn="ctr">
+                      <a:solidFill>
+                        <a:srgbClr val="EEF3F8"/>
+                      </a:solidFill>
+                      <a:prstDash val="solid"/>
+                      <a:round/>
+                      <a:headEnd type="none" w="med" len="med"/>
+                      <a:tailEnd type="none" w="med" len="med"/>
+                    </a:lnL>
+                    <a:lnR w="12700" cap="flat" cmpd="sng" algn="ctr">
+                      <a:solidFill>
+                        <a:srgbClr val="EEF3F8"/>
+                      </a:solidFill>
+                      <a:prstDash val="solid"/>
+                      <a:round/>
+                      <a:headEnd type="none" w="med" len="med"/>
+                      <a:tailEnd type="none" w="med" len="med"/>
+                    </a:lnR>
+                    <a:lnT w="12700" cap="flat" cmpd="sng" algn="ctr">
+                      <a:solidFill>
+                        <a:srgbClr val="EEF3F8"/>
+                      </a:solidFill>
+                      <a:prstDash val="solid"/>
+                      <a:round/>
+                      <a:headEnd type="none" w="med" len="med"/>
+                      <a:tailEnd type="none" w="med" len="med"/>
+                    </a:lnT>
+                    <a:lnB w="12700" cap="flat" cmpd="sng" algn="ctr">
+                      <a:solidFill>
+                        <a:srgbClr val="EEF3F8"/>
+                      </a:solidFill>
+                      <a:prstDash val="solid"/>
+                      <a:round/>
+                      <a:headEnd type="none" w="med" len="med"/>
+                      <a:tailEnd type="none" w="med" len="med"/>
+                    </a:lnB>
+                    <a:solidFill>
+                      <a:schemeClr val="tx2"/>
+                    </a:solidFill>
+                  </a:tcPr>
+                </a:tc>
+                <a:tc>
+                  <a:txBody>
+                    <a:bodyPr/>
+                    <a:lstStyle/>
+                    <a:p>
+                      <a:pPr algn="ctr" indent="0" marL="0">
+                        <a:buNone/>
+                      </a:pPr>
+                      <a:r>
+                        <a:rPr lang="en-US" sz="1300" b="1" dirty="0">
+                          <a:solidFill>
+                            <a:schemeClr val="bg1"/>
+                          </a:solidFill>
+                          <a:latin typeface="Calibri" pitchFamily="34" charset="0"/>
+                          <a:ea typeface="Calibri" pitchFamily="34" charset="-122"/>
+                          <a:cs typeface="Calibri" pitchFamily="34" charset="-120"/>
+                        </a:rPr>
+                        <a:t>C: parcela</a:t>
+                      </a:r>
+                      <a:endParaRPr lang="en-US" sz="1300" dirty="0">
+                        <a:latin typeface="Calibri" charset="0"/>
+                        <a:ea typeface="Calibri" charset="0"/>
+                        <a:cs typeface="Calibri" charset="0"/>
+                      </a:endParaRPr>
+                    </a:p>
+                  </a:txBody>
+                  <a:tcPr marL="91440" marR="91440" marT="45720" marB="45720" anchor="ctr">
+                    <a:lnL w="12700" cap="flat" cmpd="sng" algn="ctr">
+                      <a:solidFill>
+                        <a:srgbClr val="EEF3F8"/>
+                      </a:solidFill>
+                      <a:prstDash val="solid"/>
+                      <a:round/>
+                      <a:headEnd type="none" w="med" len="med"/>
+                      <a:tailEnd type="none" w="med" len="med"/>
+                    </a:lnL>
+                    <a:lnR w="12700" cap="flat" cmpd="sng" algn="ctr">
+                      <a:solidFill>
+                        <a:srgbClr val="EEF3F8"/>
+                      </a:solidFill>
+                      <a:prstDash val="solid"/>
+                      <a:round/>
+                      <a:headEnd type="none" w="med" len="med"/>
+                      <a:tailEnd type="none" w="med" len="med"/>
+                    </a:lnR>
+                    <a:lnT w="12700" cap="flat" cmpd="sng" algn="ctr">
+                      <a:solidFill>
+                        <a:srgbClr val="EEF3F8"/>
+                      </a:solidFill>
+                      <a:prstDash val="solid"/>
+                      <a:round/>
+                      <a:headEnd type="none" w="med" len="med"/>
+                      <a:tailEnd type="none" w="med" len="med"/>
+                    </a:lnT>
+                    <a:lnB w="12700" cap="flat" cmpd="sng" algn="ctr">
+                      <a:solidFill>
+                        <a:srgbClr val="EEF3F8"/>
+                      </a:solidFill>
+                      <a:prstDash val="solid"/>
+                      <a:round/>
+                      <a:headEnd type="none" w="med" len="med"/>
+                      <a:tailEnd type="none" w="med" len="med"/>
+                    </a:lnB>
+                    <a:solidFill>
+                      <a:schemeClr val="tx2"/>
+                    </a:solidFill>
+                  </a:tcPr>
+                </a:tc>
+              </a:tr>
+              <a:tr h="594360">
+                <a:tc>
+                  <a:txBody>
+                    <a:bodyPr/>
+                    <a:lstStyle/>
+                    <a:p>
+                      <a:pPr algn="l" indent="0" marL="0">
+                        <a:buNone/>
+                      </a:pPr>
+                      <a:r>
+                        <a:rPr lang="en-US" sz="1400" b="1" dirty="0">
+                          <a:solidFill>
+                            <a:schemeClr val="tx1"/>
+                          </a:solidFill>
+                          <a:latin typeface="Calibri" pitchFamily="34" charset="0"/>
+                          <a:ea typeface="Calibri" pitchFamily="34" charset="-122"/>
+                          <a:cs typeface="Calibri" pitchFamily="34" charset="-120"/>
+                        </a:rPr>
+                        <a:t>Hidrelétricas</a:t>
+                      </a:r>
+                      <a:endParaRPr lang="en-US" sz="1400" dirty="0">
+                        <a:latin typeface="Calibri" charset="0"/>
+                        <a:ea typeface="Calibri" charset="0"/>
+                        <a:cs typeface="Calibri" charset="0"/>
+                      </a:endParaRPr>
+                    </a:p>
+                  </a:txBody>
+                  <a:tcPr marL="91440" marR="91440" marT="45720" marB="45720" anchor="ctr">
+                    <a:lnL w="12700" cap="flat" cmpd="sng" algn="ctr">
+                      <a:solidFill>
+                        <a:srgbClr val="EEF3F8"/>
+                      </a:solidFill>
+                      <a:prstDash val="solid"/>
+                      <a:round/>
+                      <a:headEnd type="none" w="med" len="med"/>
+                      <a:tailEnd type="none" w="med" len="med"/>
+                    </a:lnL>
+                    <a:lnR w="12700" cap="flat" cmpd="sng" algn="ctr">
+                      <a:solidFill>
+                        <a:srgbClr val="EEF3F8"/>
+                      </a:solidFill>
+                      <a:prstDash val="solid"/>
+                      <a:round/>
+                      <a:headEnd type="none" w="med" len="med"/>
+                      <a:tailEnd type="none" w="med" len="med"/>
+                    </a:lnR>
+                    <a:lnT w="12700" cap="flat" cmpd="sng" algn="ctr">
+                      <a:solidFill>
+                        <a:srgbClr val="EEF3F8"/>
+                      </a:solidFill>
+                      <a:prstDash val="solid"/>
+                      <a:round/>
+                      <a:headEnd type="none" w="med" len="med"/>
+                      <a:tailEnd type="none" w="med" len="med"/>
+                    </a:lnT>
+                    <a:lnB w="12700" cap="flat" cmpd="sng" algn="ctr">
+                      <a:solidFill>
+                        <a:srgbClr val="EEF3F8"/>
+                      </a:solidFill>
+                      <a:prstDash val="solid"/>
+                      <a:round/>
+                      <a:headEnd type="none" w="med" len="med"/>
+                      <a:tailEnd type="none" w="med" len="med"/>
+                    </a:lnB>
+                    <a:solidFill>
+                      <a:schemeClr val="bg1"/>
+                    </a:solidFill>
+                  </a:tcPr>
+                </a:tc>
+                <a:tc>
+                  <a:txBody>
+                    <a:bodyPr/>
+                    <a:lstStyle/>
+                    <a:p>
+                      <a:pPr algn="ctr" indent="0" marL="0">
+                        <a:buNone/>
+                      </a:pPr>
+                      <a:r>
+                        <a:rPr lang="en-US" sz="1400" dirty="0">
+                          <a:solidFill>
+                            <a:schemeClr val="tx1"/>
+                          </a:solidFill>
+                          <a:latin typeface="Calibri" pitchFamily="34" charset="0"/>
+                          <a:ea typeface="Calibri" pitchFamily="34" charset="-122"/>
+                          <a:cs typeface="Calibri" pitchFamily="34" charset="-120"/>
+                        </a:rPr>
+                        <a:t>51,7</a:t>
+                      </a:r>
+                      <a:endParaRPr lang="en-US" sz="1400" dirty="0">
+                        <a:latin typeface="Calibri" charset="0"/>
+                        <a:ea typeface="Calibri" charset="0"/>
+                        <a:cs typeface="Calibri" charset="0"/>
+                      </a:endParaRPr>
+                    </a:p>
+                  </a:txBody>
+                  <a:tcPr marL="91440" marR="91440" marT="45720" marB="45720" anchor="ctr">
+                    <a:lnL w="12700" cap="flat" cmpd="sng" algn="ctr">
+                      <a:solidFill>
+                        <a:srgbClr val="EEF3F8"/>
+                      </a:solidFill>
+                      <a:prstDash val="solid"/>
+                      <a:round/>
+                      <a:headEnd type="none" w="med" len="med"/>
+                      <a:tailEnd type="none" w="med" len="med"/>
+                    </a:lnL>
+                    <a:lnR w="12700" cap="flat" cmpd="sng" algn="ctr">
+                      <a:solidFill>
+                        <a:srgbClr val="EEF3F8"/>
+                      </a:solidFill>
+                      <a:prstDash val="solid"/>
+                      <a:round/>
+                      <a:headEnd type="none" w="med" len="med"/>
+                      <a:tailEnd type="none" w="med" len="med"/>
+                    </a:lnR>
+                    <a:lnT w="12700" cap="flat" cmpd="sng" algn="ctr">
+                      <a:solidFill>
+                        <a:srgbClr val="EEF3F8"/>
+                      </a:solidFill>
+                      <a:prstDash val="solid"/>
+                      <a:round/>
+                      <a:headEnd type="none" w="med" len="med"/>
+                      <a:tailEnd type="none" w="med" len="med"/>
+                    </a:lnT>
+                    <a:lnB w="12700" cap="flat" cmpd="sng" algn="ctr">
+                      <a:solidFill>
+                        <a:srgbClr val="EEF3F8"/>
+                      </a:solidFill>
+                      <a:prstDash val="solid"/>
+                      <a:round/>
+                      <a:headEnd type="none" w="med" len="med"/>
+                      <a:tailEnd type="none" w="med" len="med"/>
+                    </a:lnB>
+                    <a:solidFill>
+                      <a:schemeClr val="bg1"/>
+                    </a:solidFill>
+                  </a:tcPr>
+                </a:tc>
+                <a:tc>
+                  <a:txBody>
+                    <a:bodyPr/>
+                    <a:lstStyle/>
+                    <a:p>
+                      <a:pPr algn="ctr" indent="0" marL="0">
+                        <a:buNone/>
+                      </a:pPr>
+                      <a:r>
+                        <a:rPr lang="en-US" sz="1400" dirty="0">
+                          <a:solidFill>
+                            <a:schemeClr val="tx1"/>
+                          </a:solidFill>
+                          <a:latin typeface="Calibri" pitchFamily="34" charset="0"/>
+                          <a:ea typeface="Calibri" pitchFamily="34" charset="-122"/>
+                          <a:cs typeface="Calibri" pitchFamily="34" charset="-120"/>
+                        </a:rPr>
+                        <a:t>51,70</a:t>
+                      </a:r>
+                      <a:endParaRPr lang="en-US" sz="1400" dirty="0">
+                        <a:latin typeface="Calibri" charset="0"/>
+                        <a:ea typeface="Calibri" charset="0"/>
+                        <a:cs typeface="Calibri" charset="0"/>
+                      </a:endParaRPr>
+                    </a:p>
+                  </a:txBody>
+                  <a:tcPr marL="91440" marR="91440" marT="45720" marB="45720" anchor="ctr">
+                    <a:lnL w="12700" cap="flat" cmpd="sng" algn="ctr">
+                      <a:solidFill>
+                        <a:srgbClr val="EEF3F8"/>
+                      </a:solidFill>
+                      <a:prstDash val="solid"/>
+                      <a:round/>
+                      <a:headEnd type="none" w="med" len="med"/>
+                      <a:tailEnd type="none" w="med" len="med"/>
+                    </a:lnL>
+                    <a:lnR w="12700" cap="flat" cmpd="sng" algn="ctr">
+                      <a:solidFill>
+                        <a:srgbClr val="EEF3F8"/>
+                      </a:solidFill>
+                      <a:prstDash val="solid"/>
+                      <a:round/>
+                      <a:headEnd type="none" w="med" len="med"/>
+                      <a:tailEnd type="none" w="med" len="med"/>
+                    </a:lnR>
+                    <a:lnT w="12700" cap="flat" cmpd="sng" algn="ctr">
+                      <a:solidFill>
+                        <a:srgbClr val="EEF3F8"/>
+                      </a:solidFill>
+                      <a:prstDash val="solid"/>
+                      <a:round/>
+                      <a:headEnd type="none" w="med" len="med"/>
+                      <a:tailEnd type="none" w="med" len="med"/>
+                    </a:lnT>
+                    <a:lnB w="12700" cap="flat" cmpd="sng" algn="ctr">
+                      <a:solidFill>
+                        <a:srgbClr val="EEF3F8"/>
+                      </a:solidFill>
+                      <a:prstDash val="solid"/>
+                      <a:round/>
+                      <a:headEnd type="none" w="med" len="med"/>
+                      <a:tailEnd type="none" w="med" len="med"/>
+                    </a:lnB>
+                    <a:solidFill>
+                      <a:schemeClr val="bg1"/>
+                    </a:solidFill>
+                  </a:tcPr>
+                </a:tc>
+                <a:tc>
+                  <a:txBody>
+                    <a:bodyPr/>
+                    <a:lstStyle/>
+                    <a:p>
+                      <a:pPr algn="ctr" indent="0" marL="0">
+                        <a:buNone/>
+                      </a:pPr>
+                      <a:r>
+                        <a:rPr lang="en-US" sz="1400" dirty="0">
+                          <a:solidFill>
+                            <a:schemeClr val="tx1"/>
+                          </a:solidFill>
+                          <a:latin typeface="Calibri" pitchFamily="34" charset="0"/>
+                          <a:ea typeface="Calibri" pitchFamily="34" charset="-122"/>
+                          <a:cs typeface="Calibri" pitchFamily="34" charset="-120"/>
+                        </a:rPr>
+                        <a:t>51,7%</a:t>
+                      </a:r>
+                      <a:endParaRPr lang="en-US" sz="1400" dirty="0">
+                        <a:latin typeface="Calibri" charset="0"/>
+                        <a:ea typeface="Calibri" charset="0"/>
+                        <a:cs typeface="Calibri" charset="0"/>
+                      </a:endParaRPr>
+                    </a:p>
+                  </a:txBody>
+                  <a:tcPr marL="91440" marR="91440" marT="45720" marB="45720" anchor="ctr">
+                    <a:lnL w="12700" cap="flat" cmpd="sng" algn="ctr">
+                      <a:solidFill>
+                        <a:srgbClr val="EEF3F8"/>
+                      </a:solidFill>
+                      <a:prstDash val="solid"/>
+                      <a:round/>
+                      <a:headEnd type="none" w="med" len="med"/>
+                      <a:tailEnd type="none" w="med" len="med"/>
+                    </a:lnL>
+                    <a:lnR w="12700" cap="flat" cmpd="sng" algn="ctr">
+                      <a:solidFill>
+                        <a:srgbClr val="EEF3F8"/>
+                      </a:solidFill>
+                      <a:prstDash val="solid"/>
+                      <a:round/>
+                      <a:headEnd type="none" w="med" len="med"/>
+                      <a:tailEnd type="none" w="med" len="med"/>
+                    </a:lnR>
+                    <a:lnT w="12700" cap="flat" cmpd="sng" algn="ctr">
+                      <a:solidFill>
+                        <a:srgbClr val="EEF3F8"/>
+                      </a:solidFill>
+                      <a:prstDash val="solid"/>
+                      <a:round/>
+                      <a:headEnd type="none" w="med" len="med"/>
+                      <a:tailEnd type="none" w="med" len="med"/>
+                    </a:lnT>
+                    <a:lnB w="12700" cap="flat" cmpd="sng" algn="ctr">
+                      <a:solidFill>
+                        <a:srgbClr val="EEF3F8"/>
+                      </a:solidFill>
+                      <a:prstDash val="solid"/>
+                      <a:round/>
+                      <a:headEnd type="none" w="med" len="med"/>
+                      <a:tailEnd type="none" w="med" len="med"/>
+                    </a:lnB>
+                    <a:solidFill>
+                      <a:schemeClr val="bg1"/>
+                    </a:solidFill>
+                  </a:tcPr>
+                </a:tc>
+                <a:tc>
+                  <a:txBody>
+                    <a:bodyPr/>
+                    <a:lstStyle/>
+                    <a:p>
+                      <a:pPr algn="ctr" indent="0" marL="0">
+                        <a:buNone/>
+                      </a:pPr>
+                      <a:r>
+                        <a:rPr lang="en-US" sz="1400" dirty="0">
+                          <a:solidFill>
+                            <a:schemeClr val="tx1"/>
+                          </a:solidFill>
+                          <a:latin typeface="Calibri" pitchFamily="34" charset="0"/>
+                          <a:ea typeface="Calibri" pitchFamily="34" charset="-122"/>
+                          <a:cs typeface="Calibri" pitchFamily="34" charset="-120"/>
+                        </a:rPr>
+                        <a:t>32,31</a:t>
+                      </a:r>
+                      <a:endParaRPr lang="en-US" sz="1400" dirty="0">
+                        <a:latin typeface="Calibri" charset="0"/>
+                        <a:ea typeface="Calibri" charset="0"/>
+                        <a:cs typeface="Calibri" charset="0"/>
+                      </a:endParaRPr>
+                    </a:p>
+                  </a:txBody>
+                  <a:tcPr marL="91440" marR="91440" marT="45720" marB="45720" anchor="ctr">
+                    <a:lnL w="12700" cap="flat" cmpd="sng" algn="ctr">
+                      <a:solidFill>
+                        <a:srgbClr val="EEF3F8"/>
+                      </a:solidFill>
+                      <a:prstDash val="solid"/>
+                      <a:round/>
+                      <a:headEnd type="none" w="med" len="med"/>
+                      <a:tailEnd type="none" w="med" len="med"/>
+                    </a:lnL>
+                    <a:lnR w="12700" cap="flat" cmpd="sng" algn="ctr">
+                      <a:solidFill>
+                        <a:srgbClr val="EEF3F8"/>
+                      </a:solidFill>
+                      <a:prstDash val="solid"/>
+                      <a:round/>
+                      <a:headEnd type="none" w="med" len="med"/>
+                      <a:tailEnd type="none" w="med" len="med"/>
+                    </a:lnR>
+                    <a:lnT w="12700" cap="flat" cmpd="sng" algn="ctr">
+                      <a:solidFill>
+                        <a:srgbClr val="EEF3F8"/>
+                      </a:solidFill>
+                      <a:prstDash val="solid"/>
+                      <a:round/>
+                      <a:headEnd type="none" w="med" len="med"/>
+                      <a:tailEnd type="none" w="med" len="med"/>
+                    </a:lnT>
+                    <a:lnB w="12700" cap="flat" cmpd="sng" algn="ctr">
+                      <a:solidFill>
+                        <a:srgbClr val="EEF3F8"/>
+                      </a:solidFill>
+                      <a:prstDash val="solid"/>
+                      <a:round/>
+                      <a:headEnd type="none" w="med" len="med"/>
+                      <a:tailEnd type="none" w="med" len="med"/>
+                    </a:lnB>
+                    <a:solidFill>
+                      <a:schemeClr val="bg1"/>
+                    </a:solidFill>
+                  </a:tcPr>
+                </a:tc>
+                <a:tc>
+                  <a:txBody>
+                    <a:bodyPr/>
+                    <a:lstStyle/>
+                    <a:p>
+                      <a:pPr algn="ctr" indent="0" marL="0">
+                        <a:buNone/>
+                      </a:pPr>
+                      <a:r>
+                        <a:rPr lang="en-US" sz="1400" dirty="0">
+                          <a:solidFill>
+                            <a:schemeClr val="tx1"/>
+                          </a:solidFill>
+                          <a:latin typeface="Calibri" pitchFamily="34" charset="0"/>
+                          <a:ea typeface="Calibri" pitchFamily="34" charset="-122"/>
+                          <a:cs typeface="Calibri" pitchFamily="34" charset="-120"/>
+                        </a:rPr>
+                        <a:t>44,6%</a:t>
+                      </a:r>
+                      <a:endParaRPr lang="en-US" sz="1400" dirty="0">
+                        <a:latin typeface="Calibri" charset="0"/>
+                        <a:ea typeface="Calibri" charset="0"/>
+                        <a:cs typeface="Calibri" charset="0"/>
+                      </a:endParaRPr>
+                    </a:p>
+                  </a:txBody>
+                  <a:tcPr marL="91440" marR="91440" marT="45720" marB="45720" anchor="ctr">
+                    <a:lnL w="12700" cap="flat" cmpd="sng" algn="ctr">
+                      <a:solidFill>
+                        <a:srgbClr val="EEF3F8"/>
+                      </a:solidFill>
+                      <a:prstDash val="solid"/>
+                      <a:round/>
+                      <a:headEnd type="none" w="med" len="med"/>
+                      <a:tailEnd type="none" w="med" len="med"/>
+                    </a:lnL>
+                    <a:lnR w="12700" cap="flat" cmpd="sng" algn="ctr">
+                      <a:solidFill>
+                        <a:srgbClr val="EEF3F8"/>
+                      </a:solidFill>
+                      <a:prstDash val="solid"/>
+                      <a:round/>
+                      <a:headEnd type="none" w="med" len="med"/>
+                      <a:tailEnd type="none" w="med" len="med"/>
+                    </a:lnR>
+                    <a:lnT w="12700" cap="flat" cmpd="sng" algn="ctr">
+                      <a:solidFill>
+                        <a:srgbClr val="EEF3F8"/>
+                      </a:solidFill>
+                      <a:prstDash val="solid"/>
+                      <a:round/>
+                      <a:headEnd type="none" w="med" len="med"/>
+                      <a:tailEnd type="none" w="med" len="med"/>
+                    </a:lnT>
+                    <a:lnB w="12700" cap="flat" cmpd="sng" algn="ctr">
+                      <a:solidFill>
+                        <a:srgbClr val="EEF3F8"/>
+                      </a:solidFill>
+                      <a:prstDash val="solid"/>
+                      <a:round/>
+                      <a:headEnd type="none" w="med" len="med"/>
+                      <a:tailEnd type="none" w="med" len="med"/>
+                    </a:lnB>
+                    <a:solidFill>
+                      <a:schemeClr val="bg1"/>
+                    </a:solidFill>
+                  </a:tcPr>
+                </a:tc>
+                <a:tc>
+                  <a:txBody>
+                    <a:bodyPr/>
+                    <a:lstStyle/>
+                    <a:p>
+                      <a:pPr algn="ctr" indent="0" marL="0">
+                        <a:buNone/>
+                      </a:pPr>
+                      <a:r>
+                        <a:rPr lang="en-US" sz="1400" dirty="0">
+                          <a:solidFill>
+                            <a:schemeClr val="tx1"/>
+                          </a:solidFill>
+                          <a:latin typeface="Calibri" pitchFamily="34" charset="0"/>
+                          <a:ea typeface="Calibri" pitchFamily="34" charset="-122"/>
+                          <a:cs typeface="Calibri" pitchFamily="34" charset="-120"/>
+                        </a:rPr>
+                        <a:t>12,93</a:t>
+                      </a:r>
+                      <a:endParaRPr lang="en-US" sz="1400" dirty="0">
+                        <a:latin typeface="Calibri" charset="0"/>
+                        <a:ea typeface="Calibri" charset="0"/>
+                        <a:cs typeface="Calibri" charset="0"/>
+                      </a:endParaRPr>
+                    </a:p>
+                  </a:txBody>
+                  <a:tcPr marL="91440" marR="91440" marT="45720" marB="45720" anchor="ctr">
+                    <a:lnL w="12700" cap="flat" cmpd="sng" algn="ctr">
+                      <a:solidFill>
+                        <a:srgbClr val="EEF3F8"/>
+                      </a:solidFill>
+                      <a:prstDash val="solid"/>
+                      <a:round/>
+                      <a:headEnd type="none" w="med" len="med"/>
+                      <a:tailEnd type="none" w="med" len="med"/>
+                    </a:lnL>
+                    <a:lnR w="12700" cap="flat" cmpd="sng" algn="ctr">
+                      <a:solidFill>
+                        <a:srgbClr val="EEF3F8"/>
+                      </a:solidFill>
+                      <a:prstDash val="solid"/>
+                      <a:round/>
+                      <a:headEnd type="none" w="med" len="med"/>
+                      <a:tailEnd type="none" w="med" len="med"/>
+                    </a:lnR>
+                    <a:lnT w="12700" cap="flat" cmpd="sng" algn="ctr">
+                      <a:solidFill>
+                        <a:srgbClr val="EEF3F8"/>
+                      </a:solidFill>
+                      <a:prstDash val="solid"/>
+                      <a:round/>
+                      <a:headEnd type="none" w="med" len="med"/>
+                      <a:tailEnd type="none" w="med" len="med"/>
+                    </a:lnT>
+                    <a:lnB w="12700" cap="flat" cmpd="sng" algn="ctr">
+                      <a:solidFill>
+                        <a:srgbClr val="EEF3F8"/>
+                      </a:solidFill>
+                      <a:prstDash val="solid"/>
+                      <a:round/>
+                      <a:headEnd type="none" w="med" len="med"/>
+                      <a:tailEnd type="none" w="med" len="med"/>
+                    </a:lnB>
+                    <a:solidFill>
+                      <a:schemeClr val="bg1"/>
+                    </a:solidFill>
+                  </a:tcPr>
+                </a:tc>
+                <a:tc>
+                  <a:txBody>
+                    <a:bodyPr/>
+                    <a:lstStyle/>
+                    <a:p>
+                      <a:pPr algn="ctr" indent="0" marL="0">
+                        <a:buNone/>
+                      </a:pPr>
+                      <a:r>
+                        <a:rPr lang="en-US" sz="1400" dirty="0">
+                          <a:solidFill>
+                            <a:schemeClr val="tx1"/>
+                          </a:solidFill>
+                          <a:latin typeface="Calibri" pitchFamily="34" charset="0"/>
+                          <a:ea typeface="Calibri" pitchFamily="34" charset="-122"/>
+                          <a:cs typeface="Calibri" pitchFamily="34" charset="-120"/>
+                        </a:rPr>
+                        <a:t>28,9%</a:t>
+                      </a:r>
+                      <a:endParaRPr lang="en-US" sz="1400" dirty="0">
+                        <a:latin typeface="Calibri" charset="0"/>
+                        <a:ea typeface="Calibri" charset="0"/>
+                        <a:cs typeface="Calibri" charset="0"/>
+                      </a:endParaRPr>
+                    </a:p>
+                  </a:txBody>
+                  <a:tcPr marL="91440" marR="91440" marT="45720" marB="45720" anchor="ctr">
+                    <a:lnL w="12700" cap="flat" cmpd="sng" algn="ctr">
+                      <a:solidFill>
+                        <a:srgbClr val="EEF3F8"/>
+                      </a:solidFill>
+                      <a:prstDash val="solid"/>
+                      <a:round/>
+                      <a:headEnd type="none" w="med" len="med"/>
+                      <a:tailEnd type="none" w="med" len="med"/>
+                    </a:lnL>
+                    <a:lnR w="12700" cap="flat" cmpd="sng" algn="ctr">
+                      <a:solidFill>
+                        <a:srgbClr val="EEF3F8"/>
+                      </a:solidFill>
+                      <a:prstDash val="solid"/>
+                      <a:round/>
+                      <a:headEnd type="none" w="med" len="med"/>
+                      <a:tailEnd type="none" w="med" len="med"/>
+                    </a:lnR>
+                    <a:lnT w="12700" cap="flat" cmpd="sng" algn="ctr">
+                      <a:solidFill>
+                        <a:srgbClr val="EEF3F8"/>
+                      </a:solidFill>
+                      <a:prstDash val="solid"/>
+                      <a:round/>
+                      <a:headEnd type="none" w="med" len="med"/>
+                      <a:tailEnd type="none" w="med" len="med"/>
+                    </a:lnT>
+                    <a:lnB w="12700" cap="flat" cmpd="sng" algn="ctr">
+                      <a:solidFill>
+                        <a:srgbClr val="EEF3F8"/>
+                      </a:solidFill>
+                      <a:prstDash val="solid"/>
+                      <a:round/>
+                      <a:headEnd type="none" w="med" len="med"/>
+                      <a:tailEnd type="none" w="med" len="med"/>
+                    </a:lnB>
+                    <a:solidFill>
+                      <a:schemeClr val="bg1"/>
+                    </a:solidFill>
+                  </a:tcPr>
+                </a:tc>
+              </a:tr>
+              <a:tr h="594360">
+                <a:tc>
+                  <a:txBody>
+                    <a:bodyPr/>
+                    <a:lstStyle/>
+                    <a:p>
+                      <a:pPr algn="l" indent="0" marL="0">
+                        <a:buNone/>
+                      </a:pPr>
+                      <a:r>
+                        <a:rPr lang="en-US" sz="1400" b="1" dirty="0">
+                          <a:solidFill>
+                            <a:schemeClr val="tx1"/>
+                          </a:solidFill>
+                          <a:latin typeface="Calibri" pitchFamily="34" charset="0"/>
+                          <a:ea typeface="Calibri" pitchFamily="34" charset="-122"/>
+                          <a:cs typeface="Calibri" pitchFamily="34" charset="-120"/>
+                        </a:rPr>
+                        <a:t>Eólicas e solares</a:t>
+                      </a:r>
+                      <a:endParaRPr lang="en-US" sz="1400" dirty="0">
+                        <a:latin typeface="Calibri" charset="0"/>
+                        <a:ea typeface="Calibri" charset="0"/>
+                        <a:cs typeface="Calibri" charset="0"/>
+                      </a:endParaRPr>
+                    </a:p>
+                  </a:txBody>
+                  <a:tcPr marL="91440" marR="91440" marT="45720" marB="45720" anchor="ctr">
+                    <a:lnL w="12700" cap="flat" cmpd="sng" algn="ctr">
+                      <a:solidFill>
+                        <a:srgbClr val="EEF3F8"/>
+                      </a:solidFill>
+                      <a:prstDash val="solid"/>
+                      <a:round/>
+                      <a:headEnd type="none" w="med" len="med"/>
+                      <a:tailEnd type="none" w="med" len="med"/>
+                    </a:lnL>
+                    <a:lnR w="12700" cap="flat" cmpd="sng" algn="ctr">
+                      <a:solidFill>
+                        <a:srgbClr val="EEF3F8"/>
+                      </a:solidFill>
+                      <a:prstDash val="solid"/>
+                      <a:round/>
+                      <a:headEnd type="none" w="med" len="med"/>
+                      <a:tailEnd type="none" w="med" len="med"/>
+                    </a:lnR>
+                    <a:lnT w="12700" cap="flat" cmpd="sng" algn="ctr">
+                      <a:solidFill>
+                        <a:srgbClr val="EEF3F8"/>
+                      </a:solidFill>
+                      <a:prstDash val="solid"/>
+                      <a:round/>
+                      <a:headEnd type="none" w="med" len="med"/>
+                      <a:tailEnd type="none" w="med" len="med"/>
+                    </a:lnT>
+                    <a:lnB w="12700" cap="flat" cmpd="sng" algn="ctr">
+                      <a:solidFill>
+                        <a:srgbClr val="EEF3F8"/>
+                      </a:solidFill>
+                      <a:prstDash val="solid"/>
+                      <a:round/>
+                      <a:headEnd type="none" w="med" len="med"/>
+                      <a:tailEnd type="none" w="med" len="med"/>
+                    </a:lnB>
+                    <a:solidFill>
+                      <a:schemeClr val="bg1"/>
+                    </a:solidFill>
+                  </a:tcPr>
+                </a:tc>
+                <a:tc>
+                  <a:txBody>
+                    <a:bodyPr/>
+                    <a:lstStyle/>
+                    <a:p>
+                      <a:pPr algn="ctr" indent="0" marL="0">
+                        <a:buNone/>
+                      </a:pPr>
+                      <a:r>
+                        <a:rPr lang="en-US" sz="1400" dirty="0">
+                          <a:solidFill>
+                            <a:schemeClr val="tx1"/>
+                          </a:solidFill>
+                          <a:latin typeface="Calibri" pitchFamily="34" charset="0"/>
+                          <a:ea typeface="Calibri" pitchFamily="34" charset="-122"/>
+                          <a:cs typeface="Calibri" pitchFamily="34" charset="-120"/>
+                        </a:rPr>
+                        <a:t>26,4</a:t>
+                      </a:r>
+                      <a:endParaRPr lang="en-US" sz="1400" dirty="0">
+                        <a:latin typeface="Calibri" charset="0"/>
+                        <a:ea typeface="Calibri" charset="0"/>
+                        <a:cs typeface="Calibri" charset="0"/>
+                      </a:endParaRPr>
+                    </a:p>
+                  </a:txBody>
+                  <a:tcPr marL="91440" marR="91440" marT="45720" marB="45720" anchor="ctr">
+                    <a:lnL w="12700" cap="flat" cmpd="sng" algn="ctr">
+                      <a:solidFill>
+                        <a:srgbClr val="EEF3F8"/>
+                      </a:solidFill>
+                      <a:prstDash val="solid"/>
+                      <a:round/>
+                      <a:headEnd type="none" w="med" len="med"/>
+                      <a:tailEnd type="none" w="med" len="med"/>
+                    </a:lnL>
+                    <a:lnR w="12700" cap="flat" cmpd="sng" algn="ctr">
+                      <a:solidFill>
+                        <a:srgbClr val="EEF3F8"/>
+                      </a:solidFill>
+                      <a:prstDash val="solid"/>
+                      <a:round/>
+                      <a:headEnd type="none" w="med" len="med"/>
+                      <a:tailEnd type="none" w="med" len="med"/>
+                    </a:lnR>
+                    <a:lnT w="12700" cap="flat" cmpd="sng" algn="ctr">
+                      <a:solidFill>
+                        <a:srgbClr val="EEF3F8"/>
+                      </a:solidFill>
+                      <a:prstDash val="solid"/>
+                      <a:round/>
+                      <a:headEnd type="none" w="med" len="med"/>
+                      <a:tailEnd type="none" w="med" len="med"/>
+                    </a:lnT>
+                    <a:lnB w="12700" cap="flat" cmpd="sng" algn="ctr">
+                      <a:solidFill>
+                        <a:srgbClr val="EEF3F8"/>
+                      </a:solidFill>
+                      <a:prstDash val="solid"/>
+                      <a:round/>
+                      <a:headEnd type="none" w="med" len="med"/>
+                      <a:tailEnd type="none" w="med" len="med"/>
+                    </a:lnB>
+                    <a:solidFill>
+                      <a:schemeClr val="bg1"/>
+                    </a:solidFill>
+                  </a:tcPr>
+                </a:tc>
+                <a:tc>
+                  <a:txBody>
+                    <a:bodyPr/>
+                    <a:lstStyle/>
+                    <a:p>
+                      <a:pPr algn="ctr" indent="0" marL="0">
+                        <a:buNone/>
+                      </a:pPr>
+                      <a:r>
+                        <a:rPr lang="en-US" sz="1400" dirty="0">
+                          <a:solidFill>
+                            <a:schemeClr val="tx1"/>
+                          </a:solidFill>
+                          <a:latin typeface="Calibri" pitchFamily="34" charset="0"/>
+                          <a:ea typeface="Calibri" pitchFamily="34" charset="-122"/>
+                          <a:cs typeface="Calibri" pitchFamily="34" charset="-120"/>
+                        </a:rPr>
+                        <a:t>26,40</a:t>
+                      </a:r>
+                      <a:endParaRPr lang="en-US" sz="1400" dirty="0">
+                        <a:latin typeface="Calibri" charset="0"/>
+                        <a:ea typeface="Calibri" charset="0"/>
+                        <a:cs typeface="Calibri" charset="0"/>
+                      </a:endParaRPr>
+                    </a:p>
+                  </a:txBody>
+                  <a:tcPr marL="91440" marR="91440" marT="45720" marB="45720" anchor="ctr">
+                    <a:lnL w="12700" cap="flat" cmpd="sng" algn="ctr">
+                      <a:solidFill>
+                        <a:srgbClr val="EEF3F8"/>
+                      </a:solidFill>
+                      <a:prstDash val="solid"/>
+                      <a:round/>
+                      <a:headEnd type="none" w="med" len="med"/>
+                      <a:tailEnd type="none" w="med" len="med"/>
+                    </a:lnL>
+                    <a:lnR w="12700" cap="flat" cmpd="sng" algn="ctr">
+                      <a:solidFill>
+                        <a:srgbClr val="EEF3F8"/>
+                      </a:solidFill>
+                      <a:prstDash val="solid"/>
+                      <a:round/>
+                      <a:headEnd type="none" w="med" len="med"/>
+                      <a:tailEnd type="none" w="med" len="med"/>
+                    </a:lnR>
+                    <a:lnT w="12700" cap="flat" cmpd="sng" algn="ctr">
+                      <a:solidFill>
+                        <a:srgbClr val="EEF3F8"/>
+                      </a:solidFill>
+                      <a:prstDash val="solid"/>
+                      <a:round/>
+                      <a:headEnd type="none" w="med" len="med"/>
+                      <a:tailEnd type="none" w="med" len="med"/>
+                    </a:lnT>
+                    <a:lnB w="12700" cap="flat" cmpd="sng" algn="ctr">
+                      <a:solidFill>
+                        <a:srgbClr val="EEF3F8"/>
+                      </a:solidFill>
+                      <a:prstDash val="solid"/>
+                      <a:round/>
+                      <a:headEnd type="none" w="med" len="med"/>
+                      <a:tailEnd type="none" w="med" len="med"/>
+                    </a:lnB>
+                    <a:solidFill>
+                      <a:schemeClr val="bg1"/>
+                    </a:solidFill>
+                  </a:tcPr>
+                </a:tc>
+                <a:tc>
+                  <a:txBody>
+                    <a:bodyPr/>
+                    <a:lstStyle/>
+                    <a:p>
+                      <a:pPr algn="ctr" indent="0" marL="0">
+                        <a:buNone/>
+                      </a:pPr>
+                      <a:r>
+                        <a:rPr lang="en-US" sz="1400" dirty="0">
+                          <a:solidFill>
+                            <a:schemeClr val="tx1"/>
+                          </a:solidFill>
+                          <a:latin typeface="Calibri" pitchFamily="34" charset="0"/>
+                          <a:ea typeface="Calibri" pitchFamily="34" charset="-122"/>
+                          <a:cs typeface="Calibri" pitchFamily="34" charset="-120"/>
+                        </a:rPr>
+                        <a:t>26,4%</a:t>
+                      </a:r>
+                      <a:endParaRPr lang="en-US" sz="1400" dirty="0">
+                        <a:latin typeface="Calibri" charset="0"/>
+                        <a:ea typeface="Calibri" charset="0"/>
+                        <a:cs typeface="Calibri" charset="0"/>
+                      </a:endParaRPr>
+                    </a:p>
+                  </a:txBody>
+                  <a:tcPr marL="91440" marR="91440" marT="45720" marB="45720" anchor="ctr">
+                    <a:lnL w="12700" cap="flat" cmpd="sng" algn="ctr">
+                      <a:solidFill>
+                        <a:srgbClr val="EEF3F8"/>
+                      </a:solidFill>
+                      <a:prstDash val="solid"/>
+                      <a:round/>
+                      <a:headEnd type="none" w="med" len="med"/>
+                      <a:tailEnd type="none" w="med" len="med"/>
+                    </a:lnL>
+                    <a:lnR w="12700" cap="flat" cmpd="sng" algn="ctr">
+                      <a:solidFill>
+                        <a:srgbClr val="EEF3F8"/>
+                      </a:solidFill>
+                      <a:prstDash val="solid"/>
+                      <a:round/>
+                      <a:headEnd type="none" w="med" len="med"/>
+                      <a:tailEnd type="none" w="med" len="med"/>
+                    </a:lnR>
+                    <a:lnT w="12700" cap="flat" cmpd="sng" algn="ctr">
+                      <a:solidFill>
+                        <a:srgbClr val="EEF3F8"/>
+                      </a:solidFill>
+                      <a:prstDash val="solid"/>
+                      <a:round/>
+                      <a:headEnd type="none" w="med" len="med"/>
+                      <a:tailEnd type="none" w="med" len="med"/>
+                    </a:lnT>
+                    <a:lnB w="12700" cap="flat" cmpd="sng" algn="ctr">
+                      <a:solidFill>
+                        <a:srgbClr val="EEF3F8"/>
+                      </a:solidFill>
+                      <a:prstDash val="solid"/>
+                      <a:round/>
+                      <a:headEnd type="none" w="med" len="med"/>
+                      <a:tailEnd type="none" w="med" len="med"/>
+                    </a:lnB>
+                    <a:solidFill>
+                      <a:schemeClr val="bg1"/>
+                    </a:solidFill>
+                  </a:tcPr>
+                </a:tc>
+                <a:tc>
+                  <a:txBody>
+                    <a:bodyPr/>
+                    <a:lstStyle/>
+                    <a:p>
+                      <a:pPr algn="ctr" indent="0" marL="0">
+                        <a:buNone/>
+                      </a:pPr>
+                      <a:r>
+                        <a:rPr lang="en-US" sz="1400" dirty="0">
+                          <a:solidFill>
+                            <a:schemeClr val="tx1"/>
+                          </a:solidFill>
+                          <a:latin typeface="Calibri" pitchFamily="34" charset="0"/>
+                          <a:ea typeface="Calibri" pitchFamily="34" charset="-122"/>
+                          <a:cs typeface="Calibri" pitchFamily="34" charset="-120"/>
+                        </a:rPr>
+                        <a:t>26,40</a:t>
+                      </a:r>
+                      <a:endParaRPr lang="en-US" sz="1400" dirty="0">
+                        <a:latin typeface="Calibri" charset="0"/>
+                        <a:ea typeface="Calibri" charset="0"/>
+                        <a:cs typeface="Calibri" charset="0"/>
+                      </a:endParaRPr>
+                    </a:p>
+                  </a:txBody>
+                  <a:tcPr marL="91440" marR="91440" marT="45720" marB="45720" anchor="ctr">
+                    <a:lnL w="12700" cap="flat" cmpd="sng" algn="ctr">
+                      <a:solidFill>
+                        <a:srgbClr val="EEF3F8"/>
+                      </a:solidFill>
+                      <a:prstDash val="solid"/>
+                      <a:round/>
+                      <a:headEnd type="none" w="med" len="med"/>
+                      <a:tailEnd type="none" w="med" len="med"/>
+                    </a:lnL>
+                    <a:lnR w="12700" cap="flat" cmpd="sng" algn="ctr">
+                      <a:solidFill>
+                        <a:srgbClr val="EEF3F8"/>
+                      </a:solidFill>
+                      <a:prstDash val="solid"/>
+                      <a:round/>
+                      <a:headEnd type="none" w="med" len="med"/>
+                      <a:tailEnd type="none" w="med" len="med"/>
+                    </a:lnR>
+                    <a:lnT w="12700" cap="flat" cmpd="sng" algn="ctr">
+                      <a:solidFill>
+                        <a:srgbClr val="EEF3F8"/>
+                      </a:solidFill>
+                      <a:prstDash val="solid"/>
+                      <a:round/>
+                      <a:headEnd type="none" w="med" len="med"/>
+                      <a:tailEnd type="none" w="med" len="med"/>
+                    </a:lnT>
+                    <a:lnB w="12700" cap="flat" cmpd="sng" algn="ctr">
+                      <a:solidFill>
+                        <a:srgbClr val="EEF3F8"/>
+                      </a:solidFill>
+                      <a:prstDash val="solid"/>
+                      <a:round/>
+                      <a:headEnd type="none" w="med" len="med"/>
+                      <a:tailEnd type="none" w="med" len="med"/>
+                    </a:lnB>
+                    <a:solidFill>
+                      <a:schemeClr val="bg1"/>
+                    </a:solidFill>
+                  </a:tcPr>
+                </a:tc>
+                <a:tc>
+                  <a:txBody>
+                    <a:bodyPr/>
+                    <a:lstStyle/>
+                    <a:p>
+                      <a:pPr algn="ctr" indent="0" marL="0">
+                        <a:buNone/>
+                      </a:pPr>
+                      <a:r>
+                        <a:rPr lang="en-US" sz="1400" dirty="0">
+                          <a:solidFill>
+                            <a:schemeClr val="tx1"/>
+                          </a:solidFill>
+                          <a:latin typeface="Calibri" pitchFamily="34" charset="0"/>
+                          <a:ea typeface="Calibri" pitchFamily="34" charset="-122"/>
+                          <a:cs typeface="Calibri" pitchFamily="34" charset="-120"/>
+                        </a:rPr>
+                        <a:t>36,5%</a:t>
+                      </a:r>
+                      <a:endParaRPr lang="en-US" sz="1400" dirty="0">
+                        <a:latin typeface="Calibri" charset="0"/>
+                        <a:ea typeface="Calibri" charset="0"/>
+                        <a:cs typeface="Calibri" charset="0"/>
+                      </a:endParaRPr>
+                    </a:p>
+                  </a:txBody>
+                  <a:tcPr marL="91440" marR="91440" marT="45720" marB="45720" anchor="ctr">
+                    <a:lnL w="12700" cap="flat" cmpd="sng" algn="ctr">
+                      <a:solidFill>
+                        <a:srgbClr val="EEF3F8"/>
+                      </a:solidFill>
+                      <a:prstDash val="solid"/>
+                      <a:round/>
+                      <a:headEnd type="none" w="med" len="med"/>
+                      <a:tailEnd type="none" w="med" len="med"/>
+                    </a:lnL>
+                    <a:lnR w="12700" cap="flat" cmpd="sng" algn="ctr">
+                      <a:solidFill>
+                        <a:srgbClr val="EEF3F8"/>
+                      </a:solidFill>
+                      <a:prstDash val="solid"/>
+                      <a:round/>
+                      <a:headEnd type="none" w="med" len="med"/>
+                      <a:tailEnd type="none" w="med" len="med"/>
+                    </a:lnR>
+                    <a:lnT w="12700" cap="flat" cmpd="sng" algn="ctr">
+                      <a:solidFill>
+                        <a:srgbClr val="EEF3F8"/>
+                      </a:solidFill>
+                      <a:prstDash val="solid"/>
+                      <a:round/>
+                      <a:headEnd type="none" w="med" len="med"/>
+                      <a:tailEnd type="none" w="med" len="med"/>
+                    </a:lnT>
+                    <a:lnB w="12700" cap="flat" cmpd="sng" algn="ctr">
+                      <a:solidFill>
+                        <a:srgbClr val="EEF3F8"/>
+                      </a:solidFill>
+                      <a:prstDash val="solid"/>
+                      <a:round/>
+                      <a:headEnd type="none" w="med" len="med"/>
+                      <a:tailEnd type="none" w="med" len="med"/>
+                    </a:lnB>
+                    <a:solidFill>
+                      <a:schemeClr val="bg1"/>
+                    </a:solidFill>
+                  </a:tcPr>
+                </a:tc>
+                <a:tc>
+                  <a:txBody>
+                    <a:bodyPr/>
+                    <a:lstStyle/>
+                    <a:p>
+                      <a:pPr algn="ctr" indent="0" marL="0">
+                        <a:buNone/>
+                      </a:pPr>
+                      <a:r>
+                        <a:rPr lang="en-US" sz="1400" dirty="0">
+                          <a:solidFill>
+                            <a:schemeClr val="tx1"/>
+                          </a:solidFill>
+                          <a:latin typeface="Calibri" pitchFamily="34" charset="0"/>
+                          <a:ea typeface="Calibri" pitchFamily="34" charset="-122"/>
+                          <a:cs typeface="Calibri" pitchFamily="34" charset="-120"/>
+                        </a:rPr>
+                        <a:t>26,40</a:t>
+                      </a:r>
+                      <a:endParaRPr lang="en-US" sz="1400" dirty="0">
+                        <a:latin typeface="Calibri" charset="0"/>
+                        <a:ea typeface="Calibri" charset="0"/>
+                        <a:cs typeface="Calibri" charset="0"/>
+                      </a:endParaRPr>
+                    </a:p>
+                  </a:txBody>
+                  <a:tcPr marL="91440" marR="91440" marT="45720" marB="45720" anchor="ctr">
+                    <a:lnL w="12700" cap="flat" cmpd="sng" algn="ctr">
+                      <a:solidFill>
+                        <a:srgbClr val="EEF3F8"/>
+                      </a:solidFill>
+                      <a:prstDash val="solid"/>
+                      <a:round/>
+                      <a:headEnd type="none" w="med" len="med"/>
+                      <a:tailEnd type="none" w="med" len="med"/>
+                    </a:lnL>
+                    <a:lnR w="12700" cap="flat" cmpd="sng" algn="ctr">
+                      <a:solidFill>
+                        <a:srgbClr val="EEF3F8"/>
+                      </a:solidFill>
+                      <a:prstDash val="solid"/>
+                      <a:round/>
+                      <a:headEnd type="none" w="med" len="med"/>
+                      <a:tailEnd type="none" w="med" len="med"/>
+                    </a:lnR>
+                    <a:lnT w="12700" cap="flat" cmpd="sng" algn="ctr">
+                      <a:solidFill>
+                        <a:srgbClr val="EEF3F8"/>
+                      </a:solidFill>
+                      <a:prstDash val="solid"/>
+                      <a:round/>
+                      <a:headEnd type="none" w="med" len="med"/>
+                      <a:tailEnd type="none" w="med" len="med"/>
+                    </a:lnT>
+                    <a:lnB w="12700" cap="flat" cmpd="sng" algn="ctr">
+                      <a:solidFill>
+                        <a:srgbClr val="EEF3F8"/>
+                      </a:solidFill>
+                      <a:prstDash val="solid"/>
+                      <a:round/>
+                      <a:headEnd type="none" w="med" len="med"/>
+                      <a:tailEnd type="none" w="med" len="med"/>
+                    </a:lnB>
+                    <a:solidFill>
+                      <a:schemeClr val="bg1"/>
+                    </a:solidFill>
+                  </a:tcPr>
+                </a:tc>
+                <a:tc>
+                  <a:txBody>
+                    <a:bodyPr/>
+                    <a:lstStyle/>
+                    <a:p>
+                      <a:pPr algn="ctr" indent="0" marL="0">
+                        <a:buNone/>
+                      </a:pPr>
+                      <a:r>
+                        <a:rPr lang="en-US" sz="1400" dirty="0">
+                          <a:solidFill>
+                            <a:schemeClr val="tx1"/>
+                          </a:solidFill>
+                          <a:latin typeface="Calibri" pitchFamily="34" charset="0"/>
+                          <a:ea typeface="Calibri" pitchFamily="34" charset="-122"/>
+                          <a:cs typeface="Calibri" pitchFamily="34" charset="-120"/>
+                        </a:rPr>
+                        <a:t>58,9%</a:t>
+                      </a:r>
+                      <a:endParaRPr lang="en-US" sz="1400" dirty="0">
+                        <a:latin typeface="Calibri" charset="0"/>
+                        <a:ea typeface="Calibri" charset="0"/>
+                        <a:cs typeface="Calibri" charset="0"/>
+                      </a:endParaRPr>
+                    </a:p>
+                  </a:txBody>
+                  <a:tcPr marL="91440" marR="91440" marT="45720" marB="45720" anchor="ctr">
+                    <a:lnL w="12700" cap="flat" cmpd="sng" algn="ctr">
+                      <a:solidFill>
+                        <a:srgbClr val="EEF3F8"/>
+                      </a:solidFill>
+                      <a:prstDash val="solid"/>
+                      <a:round/>
+                      <a:headEnd type="none" w="med" len="med"/>
+                      <a:tailEnd type="none" w="med" len="med"/>
+                    </a:lnL>
+                    <a:lnR w="12700" cap="flat" cmpd="sng" algn="ctr">
+                      <a:solidFill>
+                        <a:srgbClr val="EEF3F8"/>
+                      </a:solidFill>
+                      <a:prstDash val="solid"/>
+                      <a:round/>
+                      <a:headEnd type="none" w="med" len="med"/>
+                      <a:tailEnd type="none" w="med" len="med"/>
+                    </a:lnR>
+                    <a:lnT w="12700" cap="flat" cmpd="sng" algn="ctr">
+                      <a:solidFill>
+                        <a:srgbClr val="EEF3F8"/>
+                      </a:solidFill>
+                      <a:prstDash val="solid"/>
+                      <a:round/>
+                      <a:headEnd type="none" w="med" len="med"/>
+                      <a:tailEnd type="none" w="med" len="med"/>
+                    </a:lnT>
+                    <a:lnB w="12700" cap="flat" cmpd="sng" algn="ctr">
+                      <a:solidFill>
+                        <a:srgbClr val="EEF3F8"/>
+                      </a:solidFill>
+                      <a:prstDash val="solid"/>
+                      <a:round/>
+                      <a:headEnd type="none" w="med" len="med"/>
+                      <a:tailEnd type="none" w="med" len="med"/>
+                    </a:lnB>
+                    <a:solidFill>
+                      <a:schemeClr val="bg1"/>
+                    </a:solidFill>
+                  </a:tcPr>
+                </a:tc>
+              </a:tr>
+              <a:tr h="594360">
+                <a:tc>
+                  <a:txBody>
+                    <a:bodyPr/>
+                    <a:lstStyle/>
+                    <a:p>
+                      <a:pPr algn="l" indent="0" marL="0">
+                        <a:buNone/>
+                      </a:pPr>
+                      <a:r>
+                        <a:rPr lang="en-US" sz="1400" b="1" dirty="0">
+                          <a:solidFill>
+                            <a:schemeClr val="tx1"/>
+                          </a:solidFill>
+                          <a:latin typeface="Calibri" pitchFamily="34" charset="0"/>
+                          <a:ea typeface="Calibri" pitchFamily="34" charset="-122"/>
+                          <a:cs typeface="Calibri" pitchFamily="34" charset="-120"/>
+                        </a:rPr>
+                        <a:t>Térmicas e demais</a:t>
+                      </a:r>
+                      <a:endParaRPr lang="en-US" sz="1400" dirty="0">
+                        <a:latin typeface="Calibri" charset="0"/>
+                        <a:ea typeface="Calibri" charset="0"/>
+                        <a:cs typeface="Calibri" charset="0"/>
+                      </a:endParaRPr>
+                    </a:p>
+                  </a:txBody>
+                  <a:tcPr marL="91440" marR="91440" marT="45720" marB="45720" anchor="ctr">
+                    <a:lnL w="12700" cap="flat" cmpd="sng" algn="ctr">
+                      <a:solidFill>
+                        <a:srgbClr val="EEF3F8"/>
+                      </a:solidFill>
+                      <a:prstDash val="solid"/>
+                      <a:round/>
+                      <a:headEnd type="none" w="med" len="med"/>
+                      <a:tailEnd type="none" w="med" len="med"/>
+                    </a:lnL>
+                    <a:lnR w="12700" cap="flat" cmpd="sng" algn="ctr">
+                      <a:solidFill>
+                        <a:srgbClr val="EEF3F8"/>
+                      </a:solidFill>
+                      <a:prstDash val="solid"/>
+                      <a:round/>
+                      <a:headEnd type="none" w="med" len="med"/>
+                      <a:tailEnd type="none" w="med" len="med"/>
+                    </a:lnR>
+                    <a:lnT w="12700" cap="flat" cmpd="sng" algn="ctr">
+                      <a:solidFill>
+                        <a:srgbClr val="EEF3F8"/>
+                      </a:solidFill>
+                      <a:prstDash val="solid"/>
+                      <a:round/>
+                      <a:headEnd type="none" w="med" len="med"/>
+                      <a:tailEnd type="none" w="med" len="med"/>
+                    </a:lnT>
+                    <a:lnB w="12700" cap="flat" cmpd="sng" algn="ctr">
+                      <a:solidFill>
+                        <a:srgbClr val="EEF3F8"/>
+                      </a:solidFill>
+                      <a:prstDash val="solid"/>
+                      <a:round/>
+                      <a:headEnd type="none" w="med" len="med"/>
+                      <a:tailEnd type="none" w="med" len="med"/>
+                    </a:lnB>
+                    <a:solidFill>
+                      <a:schemeClr val="bg1"/>
+                    </a:solidFill>
+                  </a:tcPr>
+                </a:tc>
+                <a:tc>
+                  <a:txBody>
+                    <a:bodyPr/>
+                    <a:lstStyle/>
+                    <a:p>
+                      <a:pPr algn="ctr" indent="0" marL="0">
+                        <a:buNone/>
+                      </a:pPr>
+                      <a:r>
+                        <a:rPr lang="en-US" sz="1400" dirty="0">
+                          <a:solidFill>
+                            <a:schemeClr val="tx1"/>
+                          </a:solidFill>
+                          <a:latin typeface="Calibri" pitchFamily="34" charset="0"/>
+                          <a:ea typeface="Calibri" pitchFamily="34" charset="-122"/>
+                          <a:cs typeface="Calibri" pitchFamily="34" charset="-120"/>
+                        </a:rPr>
+                        <a:t>21,9</a:t>
+                      </a:r>
+                      <a:endParaRPr lang="en-US" sz="1400" dirty="0">
+                        <a:latin typeface="Calibri" charset="0"/>
+                        <a:ea typeface="Calibri" charset="0"/>
+                        <a:cs typeface="Calibri" charset="0"/>
+                      </a:endParaRPr>
+                    </a:p>
+                  </a:txBody>
+                  <a:tcPr marL="91440" marR="91440" marT="45720" marB="45720" anchor="ctr">
+                    <a:lnL w="12700" cap="flat" cmpd="sng" algn="ctr">
+                      <a:solidFill>
+                        <a:srgbClr val="EEF3F8"/>
+                      </a:solidFill>
+                      <a:prstDash val="solid"/>
+                      <a:round/>
+                      <a:headEnd type="none" w="med" len="med"/>
+                      <a:tailEnd type="none" w="med" len="med"/>
+                    </a:lnL>
+                    <a:lnR w="12700" cap="flat" cmpd="sng" algn="ctr">
+                      <a:solidFill>
+                        <a:srgbClr val="EEF3F8"/>
+                      </a:solidFill>
+                      <a:prstDash val="solid"/>
+                      <a:round/>
+                      <a:headEnd type="none" w="med" len="med"/>
+                      <a:tailEnd type="none" w="med" len="med"/>
+                    </a:lnR>
+                    <a:lnT w="12700" cap="flat" cmpd="sng" algn="ctr">
+                      <a:solidFill>
+                        <a:srgbClr val="EEF3F8"/>
+                      </a:solidFill>
+                      <a:prstDash val="solid"/>
+                      <a:round/>
+                      <a:headEnd type="none" w="med" len="med"/>
+                      <a:tailEnd type="none" w="med" len="med"/>
+                    </a:lnT>
+                    <a:lnB w="12700" cap="flat" cmpd="sng" algn="ctr">
+                      <a:solidFill>
+                        <a:srgbClr val="EEF3F8"/>
+                      </a:solidFill>
+                      <a:prstDash val="solid"/>
+                      <a:round/>
+                      <a:headEnd type="none" w="med" len="med"/>
+                      <a:tailEnd type="none" w="med" len="med"/>
+                    </a:lnB>
+                    <a:solidFill>
+                      <a:schemeClr val="bg1"/>
+                    </a:solidFill>
+                  </a:tcPr>
+                </a:tc>
+                <a:tc>
+                  <a:txBody>
+                    <a:bodyPr/>
+                    <a:lstStyle/>
+                    <a:p>
+                      <a:pPr algn="ctr" indent="0" marL="0">
+                        <a:buNone/>
+                      </a:pPr>
+                      <a:r>
+                        <a:rPr lang="en-US" sz="1400" dirty="0">
+                          <a:solidFill>
+                            <a:schemeClr val="tx1"/>
+                          </a:solidFill>
+                          <a:latin typeface="Calibri" pitchFamily="34" charset="0"/>
+                          <a:ea typeface="Calibri" pitchFamily="34" charset="-122"/>
+                          <a:cs typeface="Calibri" pitchFamily="34" charset="-120"/>
+                        </a:rPr>
+                        <a:t>21,90</a:t>
+                      </a:r>
+                      <a:endParaRPr lang="en-US" sz="1400" dirty="0">
+                        <a:latin typeface="Calibri" charset="0"/>
+                        <a:ea typeface="Calibri" charset="0"/>
+                        <a:cs typeface="Calibri" charset="0"/>
+                      </a:endParaRPr>
+                    </a:p>
+                  </a:txBody>
+                  <a:tcPr marL="91440" marR="91440" marT="45720" marB="45720" anchor="ctr">
+                    <a:lnL w="12700" cap="flat" cmpd="sng" algn="ctr">
+                      <a:solidFill>
+                        <a:srgbClr val="EEF3F8"/>
+                      </a:solidFill>
+                      <a:prstDash val="solid"/>
+                      <a:round/>
+                      <a:headEnd type="none" w="med" len="med"/>
+                      <a:tailEnd type="none" w="med" len="med"/>
+                    </a:lnL>
+                    <a:lnR w="12700" cap="flat" cmpd="sng" algn="ctr">
+                      <a:solidFill>
+                        <a:srgbClr val="EEF3F8"/>
+                      </a:solidFill>
+                      <a:prstDash val="solid"/>
+                      <a:round/>
+                      <a:headEnd type="none" w="med" len="med"/>
+                      <a:tailEnd type="none" w="med" len="med"/>
+                    </a:lnR>
+                    <a:lnT w="12700" cap="flat" cmpd="sng" algn="ctr">
+                      <a:solidFill>
+                        <a:srgbClr val="EEF3F8"/>
+                      </a:solidFill>
+                      <a:prstDash val="solid"/>
+                      <a:round/>
+                      <a:headEnd type="none" w="med" len="med"/>
+                      <a:tailEnd type="none" w="med" len="med"/>
+                    </a:lnT>
+                    <a:lnB w="12700" cap="flat" cmpd="sng" algn="ctr">
+                      <a:solidFill>
+                        <a:srgbClr val="EEF3F8"/>
+                      </a:solidFill>
+                      <a:prstDash val="solid"/>
+                      <a:round/>
+                      <a:headEnd type="none" w="med" len="med"/>
+                      <a:tailEnd type="none" w="med" len="med"/>
+                    </a:lnB>
+                    <a:solidFill>
+                      <a:schemeClr val="bg1"/>
+                    </a:solidFill>
+                  </a:tcPr>
+                </a:tc>
+                <a:tc>
+                  <a:txBody>
+                    <a:bodyPr/>
+                    <a:lstStyle/>
+                    <a:p>
+                      <a:pPr algn="ctr" indent="0" marL="0">
+                        <a:buNone/>
+                      </a:pPr>
+                      <a:r>
+                        <a:rPr lang="en-US" sz="1400" dirty="0">
+                          <a:solidFill>
+                            <a:schemeClr val="tx1"/>
+                          </a:solidFill>
+                          <a:latin typeface="Calibri" pitchFamily="34" charset="0"/>
+                          <a:ea typeface="Calibri" pitchFamily="34" charset="-122"/>
+                          <a:cs typeface="Calibri" pitchFamily="34" charset="-120"/>
+                        </a:rPr>
+                        <a:t>21,9%</a:t>
+                      </a:r>
+                      <a:endParaRPr lang="en-US" sz="1400" dirty="0">
+                        <a:latin typeface="Calibri" charset="0"/>
+                        <a:ea typeface="Calibri" charset="0"/>
+                        <a:cs typeface="Calibri" charset="0"/>
+                      </a:endParaRPr>
+                    </a:p>
+                  </a:txBody>
+                  <a:tcPr marL="91440" marR="91440" marT="45720" marB="45720" anchor="ctr">
+                    <a:lnL w="12700" cap="flat" cmpd="sng" algn="ctr">
+                      <a:solidFill>
+                        <a:srgbClr val="EEF3F8"/>
+                      </a:solidFill>
+                      <a:prstDash val="solid"/>
+                      <a:round/>
+                      <a:headEnd type="none" w="med" len="med"/>
+                      <a:tailEnd type="none" w="med" len="med"/>
+                    </a:lnL>
+                    <a:lnR w="12700" cap="flat" cmpd="sng" algn="ctr">
+                      <a:solidFill>
+                        <a:srgbClr val="EEF3F8"/>
+                      </a:solidFill>
+                      <a:prstDash val="solid"/>
+                      <a:round/>
+                      <a:headEnd type="none" w="med" len="med"/>
+                      <a:tailEnd type="none" w="med" len="med"/>
+                    </a:lnR>
+                    <a:lnT w="12700" cap="flat" cmpd="sng" algn="ctr">
+                      <a:solidFill>
+                        <a:srgbClr val="EEF3F8"/>
+                      </a:solidFill>
+                      <a:prstDash val="solid"/>
+                      <a:round/>
+                      <a:headEnd type="none" w="med" len="med"/>
+                      <a:tailEnd type="none" w="med" len="med"/>
+                    </a:lnT>
+                    <a:lnB w="12700" cap="flat" cmpd="sng" algn="ctr">
+                      <a:solidFill>
+                        <a:srgbClr val="EEF3F8"/>
+                      </a:solidFill>
+                      <a:prstDash val="solid"/>
+                      <a:round/>
+                      <a:headEnd type="none" w="med" len="med"/>
+                      <a:tailEnd type="none" w="med" len="med"/>
+                    </a:lnB>
+                    <a:solidFill>
+                      <a:schemeClr val="bg1"/>
+                    </a:solidFill>
+                  </a:tcPr>
+                </a:tc>
+                <a:tc>
+                  <a:txBody>
+                    <a:bodyPr/>
+                    <a:lstStyle/>
+                    <a:p>
+                      <a:pPr algn="ctr" indent="0" marL="0">
+                        <a:buNone/>
+                      </a:pPr>
+                      <a:r>
+                        <a:rPr lang="en-US" sz="1400" dirty="0">
+                          <a:solidFill>
+                            <a:schemeClr val="tx1"/>
+                          </a:solidFill>
+                          <a:latin typeface="Calibri" pitchFamily="34" charset="0"/>
+                          <a:ea typeface="Calibri" pitchFamily="34" charset="-122"/>
+                          <a:cs typeface="Calibri" pitchFamily="34" charset="-120"/>
+                        </a:rPr>
+                        <a:t>13,69</a:t>
+                      </a:r>
+                      <a:endParaRPr lang="en-US" sz="1400" dirty="0">
+                        <a:latin typeface="Calibri" charset="0"/>
+                        <a:ea typeface="Calibri" charset="0"/>
+                        <a:cs typeface="Calibri" charset="0"/>
+                      </a:endParaRPr>
+                    </a:p>
+                  </a:txBody>
+                  <a:tcPr marL="91440" marR="91440" marT="45720" marB="45720" anchor="ctr">
+                    <a:lnL w="12700" cap="flat" cmpd="sng" algn="ctr">
+                      <a:solidFill>
+                        <a:srgbClr val="EEF3F8"/>
+                      </a:solidFill>
+                      <a:prstDash val="solid"/>
+                      <a:round/>
+                      <a:headEnd type="none" w="med" len="med"/>
+                      <a:tailEnd type="none" w="med" len="med"/>
+                    </a:lnL>
+                    <a:lnR w="12700" cap="flat" cmpd="sng" algn="ctr">
+                      <a:solidFill>
+                        <a:srgbClr val="EEF3F8"/>
+                      </a:solidFill>
+                      <a:prstDash val="solid"/>
+                      <a:round/>
+                      <a:headEnd type="none" w="med" len="med"/>
+                      <a:tailEnd type="none" w="med" len="med"/>
+                    </a:lnR>
+                    <a:lnT w="12700" cap="flat" cmpd="sng" algn="ctr">
+                      <a:solidFill>
+                        <a:srgbClr val="EEF3F8"/>
+                      </a:solidFill>
+                      <a:prstDash val="solid"/>
+                      <a:round/>
+                      <a:headEnd type="none" w="med" len="med"/>
+                      <a:tailEnd type="none" w="med" len="med"/>
+                    </a:lnT>
+                    <a:lnB w="12700" cap="flat" cmpd="sng" algn="ctr">
+                      <a:solidFill>
+                        <a:srgbClr val="EEF3F8"/>
+                      </a:solidFill>
+                      <a:prstDash val="solid"/>
+                      <a:round/>
+                      <a:headEnd type="none" w="med" len="med"/>
+                      <a:tailEnd type="none" w="med" len="med"/>
+                    </a:lnB>
+                    <a:solidFill>
+                      <a:schemeClr val="bg1"/>
+                    </a:solidFill>
+                  </a:tcPr>
+                </a:tc>
+                <a:tc>
+                  <a:txBody>
+                    <a:bodyPr/>
+                    <a:lstStyle/>
+                    <a:p>
+                      <a:pPr algn="ctr" indent="0" marL="0">
+                        <a:buNone/>
+                      </a:pPr>
+                      <a:r>
+                        <a:rPr lang="en-US" sz="1400" dirty="0">
+                          <a:solidFill>
+                            <a:schemeClr val="tx1"/>
+                          </a:solidFill>
+                          <a:latin typeface="Calibri" pitchFamily="34" charset="0"/>
+                          <a:ea typeface="Calibri" pitchFamily="34" charset="-122"/>
+                          <a:cs typeface="Calibri" pitchFamily="34" charset="-120"/>
+                        </a:rPr>
+                        <a:t>18,9%</a:t>
+                      </a:r>
+                      <a:endParaRPr lang="en-US" sz="1400" dirty="0">
+                        <a:latin typeface="Calibri" charset="0"/>
+                        <a:ea typeface="Calibri" charset="0"/>
+                        <a:cs typeface="Calibri" charset="0"/>
+                      </a:endParaRPr>
+                    </a:p>
+                  </a:txBody>
+                  <a:tcPr marL="91440" marR="91440" marT="45720" marB="45720" anchor="ctr">
+                    <a:lnL w="12700" cap="flat" cmpd="sng" algn="ctr">
+                      <a:solidFill>
+                        <a:srgbClr val="EEF3F8"/>
+                      </a:solidFill>
+                      <a:prstDash val="solid"/>
+                      <a:round/>
+                      <a:headEnd type="none" w="med" len="med"/>
+                      <a:tailEnd type="none" w="med" len="med"/>
+                    </a:lnL>
+                    <a:lnR w="12700" cap="flat" cmpd="sng" algn="ctr">
+                      <a:solidFill>
+                        <a:srgbClr val="EEF3F8"/>
+                      </a:solidFill>
+                      <a:prstDash val="solid"/>
+                      <a:round/>
+                      <a:headEnd type="none" w="med" len="med"/>
+                      <a:tailEnd type="none" w="med" len="med"/>
+                    </a:lnR>
+                    <a:lnT w="12700" cap="flat" cmpd="sng" algn="ctr">
+                      <a:solidFill>
+                        <a:srgbClr val="EEF3F8"/>
+                      </a:solidFill>
+                      <a:prstDash val="solid"/>
+                      <a:round/>
+                      <a:headEnd type="none" w="med" len="med"/>
+                      <a:tailEnd type="none" w="med" len="med"/>
+                    </a:lnT>
+                    <a:lnB w="12700" cap="flat" cmpd="sng" algn="ctr">
+                      <a:solidFill>
+                        <a:srgbClr val="EEF3F8"/>
+                      </a:solidFill>
+                      <a:prstDash val="solid"/>
+                      <a:round/>
+                      <a:headEnd type="none" w="med" len="med"/>
+                      <a:tailEnd type="none" w="med" len="med"/>
+                    </a:lnB>
+                    <a:solidFill>
+                      <a:schemeClr val="bg1"/>
+                    </a:solidFill>
+                  </a:tcPr>
+                </a:tc>
+                <a:tc>
+                  <a:txBody>
+                    <a:bodyPr/>
+                    <a:lstStyle/>
+                    <a:p>
+                      <a:pPr algn="ctr" indent="0" marL="0">
+                        <a:buNone/>
+                      </a:pPr>
+                      <a:r>
+                        <a:rPr lang="en-US" sz="1400" dirty="0">
+                          <a:solidFill>
+                            <a:schemeClr val="tx1"/>
+                          </a:solidFill>
+                          <a:latin typeface="Calibri" pitchFamily="34" charset="0"/>
+                          <a:ea typeface="Calibri" pitchFamily="34" charset="-122"/>
+                          <a:cs typeface="Calibri" pitchFamily="34" charset="-120"/>
+                        </a:rPr>
+                        <a:t>5,48</a:t>
+                      </a:r>
+                      <a:endParaRPr lang="en-US" sz="1400" dirty="0">
+                        <a:latin typeface="Calibri" charset="0"/>
+                        <a:ea typeface="Calibri" charset="0"/>
+                        <a:cs typeface="Calibri" charset="0"/>
+                      </a:endParaRPr>
+                    </a:p>
+                  </a:txBody>
+                  <a:tcPr marL="91440" marR="91440" marT="45720" marB="45720" anchor="ctr">
+                    <a:lnL w="12700" cap="flat" cmpd="sng" algn="ctr">
+                      <a:solidFill>
+                        <a:srgbClr val="EEF3F8"/>
+                      </a:solidFill>
+                      <a:prstDash val="solid"/>
+                      <a:round/>
+                      <a:headEnd type="none" w="med" len="med"/>
+                      <a:tailEnd type="none" w="med" len="med"/>
+                    </a:lnL>
+                    <a:lnR w="12700" cap="flat" cmpd="sng" algn="ctr">
+                      <a:solidFill>
+                        <a:srgbClr val="EEF3F8"/>
+                      </a:solidFill>
+                      <a:prstDash val="solid"/>
+                      <a:round/>
+                      <a:headEnd type="none" w="med" len="med"/>
+                      <a:tailEnd type="none" w="med" len="med"/>
+                    </a:lnR>
+                    <a:lnT w="12700" cap="flat" cmpd="sng" algn="ctr">
+                      <a:solidFill>
+                        <a:srgbClr val="EEF3F8"/>
+                      </a:solidFill>
+                      <a:prstDash val="solid"/>
+                      <a:round/>
+                      <a:headEnd type="none" w="med" len="med"/>
+                      <a:tailEnd type="none" w="med" len="med"/>
+                    </a:lnT>
+                    <a:lnB w="12700" cap="flat" cmpd="sng" algn="ctr">
+                      <a:solidFill>
+                        <a:srgbClr val="EEF3F8"/>
+                      </a:solidFill>
+                      <a:prstDash val="solid"/>
+                      <a:round/>
+                      <a:headEnd type="none" w="med" len="med"/>
+                      <a:tailEnd type="none" w="med" len="med"/>
+                    </a:lnB>
+                    <a:solidFill>
+                      <a:schemeClr val="bg1"/>
+                    </a:solidFill>
+                  </a:tcPr>
+                </a:tc>
+                <a:tc>
+                  <a:txBody>
+                    <a:bodyPr/>
+                    <a:lstStyle/>
+                    <a:p>
+                      <a:pPr algn="ctr" indent="0" marL="0">
+                        <a:buNone/>
+                      </a:pPr>
+                      <a:r>
+                        <a:rPr lang="en-US" sz="1400" dirty="0">
+                          <a:solidFill>
+                            <a:schemeClr val="tx1"/>
+                          </a:solidFill>
+                          <a:latin typeface="Calibri" pitchFamily="34" charset="0"/>
+                          <a:ea typeface="Calibri" pitchFamily="34" charset="-122"/>
+                          <a:cs typeface="Calibri" pitchFamily="34" charset="-120"/>
+                        </a:rPr>
+                        <a:t>12,2%</a:t>
+                      </a:r>
+                      <a:endParaRPr lang="en-US" sz="1400" dirty="0">
+                        <a:latin typeface="Calibri" charset="0"/>
+                        <a:ea typeface="Calibri" charset="0"/>
+                        <a:cs typeface="Calibri" charset="0"/>
+                      </a:endParaRPr>
+                    </a:p>
+                  </a:txBody>
+                  <a:tcPr marL="91440" marR="91440" marT="45720" marB="45720" anchor="ctr">
+                    <a:lnL w="12700" cap="flat" cmpd="sng" algn="ctr">
+                      <a:solidFill>
+                        <a:srgbClr val="EEF3F8"/>
+                      </a:solidFill>
+                      <a:prstDash val="solid"/>
+                      <a:round/>
+                      <a:headEnd type="none" w="med" len="med"/>
+                      <a:tailEnd type="none" w="med" len="med"/>
+                    </a:lnL>
+                    <a:lnR w="12700" cap="flat" cmpd="sng" algn="ctr">
+                      <a:solidFill>
+                        <a:srgbClr val="EEF3F8"/>
+                      </a:solidFill>
+                      <a:prstDash val="solid"/>
+                      <a:round/>
+                      <a:headEnd type="none" w="med" len="med"/>
+                      <a:tailEnd type="none" w="med" len="med"/>
+                    </a:lnR>
+                    <a:lnT w="12700" cap="flat" cmpd="sng" algn="ctr">
+                      <a:solidFill>
+                        <a:srgbClr val="EEF3F8"/>
+                      </a:solidFill>
+                      <a:prstDash val="solid"/>
+                      <a:round/>
+                      <a:headEnd type="none" w="med" len="med"/>
+                      <a:tailEnd type="none" w="med" len="med"/>
+                    </a:lnT>
+                    <a:lnB w="12700" cap="flat" cmpd="sng" algn="ctr">
+                      <a:solidFill>
+                        <a:srgbClr val="EEF3F8"/>
+                      </a:solidFill>
+                      <a:prstDash val="solid"/>
+                      <a:round/>
+                      <a:headEnd type="none" w="med" len="med"/>
+                      <a:tailEnd type="none" w="med" len="med"/>
+                    </a:lnB>
+                    <a:solidFill>
+                      <a:schemeClr val="bg1"/>
+                    </a:solidFill>
+                  </a:tcPr>
+                </a:tc>
+              </a:tr>
+              <a:tr h="594360">
+                <a:tc>
+                  <a:txBody>
+                    <a:bodyPr/>
+                    <a:lstStyle/>
+                    <a:p>
+                      <a:pPr algn="l" indent="0" marL="0">
+                        <a:buNone/>
+                      </a:pPr>
+                      <a:r>
+                        <a:rPr lang="en-US" sz="1400" b="1" dirty="0">
+                          <a:solidFill>
+                            <a:schemeClr val="tx1"/>
+                          </a:solidFill>
+                          <a:latin typeface="Calibri" pitchFamily="34" charset="0"/>
+                          <a:ea typeface="Calibri" pitchFamily="34" charset="-122"/>
+                          <a:cs typeface="Calibri" pitchFamily="34" charset="-120"/>
+                        </a:rPr>
+                        <a:t>Soma</a:t>
+                      </a:r>
+                      <a:endParaRPr lang="en-US" sz="1400" dirty="0">
+                        <a:latin typeface="Calibri" charset="0"/>
+                        <a:ea typeface="Calibri" charset="0"/>
+                        <a:cs typeface="Calibri" charset="0"/>
+                      </a:endParaRPr>
+                    </a:p>
+                  </a:txBody>
+                  <a:tcPr marL="91440" marR="91440" marT="45720" marB="45720" anchor="ctr">
+                    <a:lnL w="12700" cap="flat" cmpd="sng" algn="ctr">
+                      <a:solidFill>
+                        <a:srgbClr val="EEF3F8"/>
+                      </a:solidFill>
+                      <a:prstDash val="solid"/>
+                      <a:round/>
+                      <a:headEnd type="none" w="med" len="med"/>
+                      <a:tailEnd type="none" w="med" len="med"/>
+                    </a:lnL>
+                    <a:lnR w="12700" cap="flat" cmpd="sng" algn="ctr">
+                      <a:solidFill>
+                        <a:srgbClr val="EEF3F8"/>
+                      </a:solidFill>
+                      <a:prstDash val="solid"/>
+                      <a:round/>
+                      <a:headEnd type="none" w="med" len="med"/>
+                      <a:tailEnd type="none" w="med" len="med"/>
+                    </a:lnR>
+                    <a:lnT w="12700" cap="flat" cmpd="sng" algn="ctr">
+                      <a:solidFill>
+                        <a:srgbClr val="EEF3F8"/>
+                      </a:solidFill>
+                      <a:prstDash val="solid"/>
+                      <a:round/>
+                      <a:headEnd type="none" w="med" len="med"/>
+                      <a:tailEnd type="none" w="med" len="med"/>
+                    </a:lnT>
+                    <a:lnB w="12700" cap="flat" cmpd="sng" algn="ctr">
+                      <a:solidFill>
+                        <a:srgbClr val="EEF3F8"/>
+                      </a:solidFill>
+                      <a:prstDash val="solid"/>
+                      <a:round/>
+                      <a:headEnd type="none" w="med" len="med"/>
+                      <a:tailEnd type="none" w="med" len="med"/>
+                    </a:lnB>
+                    <a:solidFill>
+                      <a:schemeClr val="bg2"/>
+                    </a:solidFill>
+                  </a:tcPr>
+                </a:tc>
+                <a:tc>
+                  <a:txBody>
+                    <a:bodyPr/>
+                    <a:lstStyle/>
+                    <a:p>
+                      <a:pPr algn="ctr" indent="0" marL="0">
+                        <a:buNone/>
+                      </a:pPr>
+                      <a:r>
+                        <a:rPr lang="en-US" sz="1400" b="1" dirty="0">
+                          <a:solidFill>
+                            <a:schemeClr val="tx1"/>
+                          </a:solidFill>
+                          <a:latin typeface="Calibri" pitchFamily="34" charset="0"/>
+                          <a:ea typeface="Calibri" pitchFamily="34" charset="-122"/>
+                          <a:cs typeface="Calibri" pitchFamily="34" charset="-120"/>
+                        </a:rPr>
+                        <a:t>100,0</a:t>
+                      </a:r>
+                      <a:endParaRPr lang="en-US" sz="1400" dirty="0">
+                        <a:latin typeface="Calibri" charset="0"/>
+                        <a:ea typeface="Calibri" charset="0"/>
+                        <a:cs typeface="Calibri" charset="0"/>
+                      </a:endParaRPr>
+                    </a:p>
+                  </a:txBody>
+                  <a:tcPr marL="91440" marR="91440" marT="45720" marB="45720" anchor="ctr">
+                    <a:lnL w="12700" cap="flat" cmpd="sng" algn="ctr">
+                      <a:solidFill>
+                        <a:srgbClr val="EEF3F8"/>
+                      </a:solidFill>
+                      <a:prstDash val="solid"/>
+                      <a:round/>
+                      <a:headEnd type="none" w="med" len="med"/>
+                      <a:tailEnd type="none" w="med" len="med"/>
+                    </a:lnL>
+                    <a:lnR w="12700" cap="flat" cmpd="sng" algn="ctr">
+                      <a:solidFill>
+                        <a:srgbClr val="EEF3F8"/>
+                      </a:solidFill>
+                      <a:prstDash val="solid"/>
+                      <a:round/>
+                      <a:headEnd type="none" w="med" len="med"/>
+                      <a:tailEnd type="none" w="med" len="med"/>
+                    </a:lnR>
+                    <a:lnT w="12700" cap="flat" cmpd="sng" algn="ctr">
+                      <a:solidFill>
+                        <a:srgbClr val="EEF3F8"/>
+                      </a:solidFill>
+                      <a:prstDash val="solid"/>
+                      <a:round/>
+                      <a:headEnd type="none" w="med" len="med"/>
+                      <a:tailEnd type="none" w="med" len="med"/>
+                    </a:lnT>
+                    <a:lnB w="12700" cap="flat" cmpd="sng" algn="ctr">
+                      <a:solidFill>
+                        <a:srgbClr val="EEF3F8"/>
+                      </a:solidFill>
+                      <a:prstDash val="solid"/>
+                      <a:round/>
+                      <a:headEnd type="none" w="med" len="med"/>
+                      <a:tailEnd type="none" w="med" len="med"/>
+                    </a:lnB>
+                    <a:solidFill>
+                      <a:schemeClr val="bg2"/>
+                    </a:solidFill>
+                  </a:tcPr>
+                </a:tc>
+                <a:tc>
+                  <a:txBody>
+                    <a:bodyPr/>
+                    <a:lstStyle/>
+                    <a:p>
+                      <a:pPr algn="ctr" indent="0" marL="0">
+                        <a:buNone/>
+                      </a:pPr>
+                      <a:r>
+                        <a:rPr lang="en-US" sz="1400" b="1" dirty="0">
+                          <a:solidFill>
+                            <a:schemeClr val="tx1"/>
+                          </a:solidFill>
+                          <a:latin typeface="Calibri" pitchFamily="34" charset="0"/>
+                          <a:ea typeface="Calibri" pitchFamily="34" charset="-122"/>
+                          <a:cs typeface="Calibri" pitchFamily="34" charset="-120"/>
+                        </a:rPr>
+                        <a:t>100,00</a:t>
+                      </a:r>
+                      <a:endParaRPr lang="en-US" sz="1400" dirty="0">
+                        <a:latin typeface="Calibri" charset="0"/>
+                        <a:ea typeface="Calibri" charset="0"/>
+                        <a:cs typeface="Calibri" charset="0"/>
+                      </a:endParaRPr>
+                    </a:p>
+                  </a:txBody>
+                  <a:tcPr marL="91440" marR="91440" marT="45720" marB="45720" anchor="ctr">
+                    <a:lnL w="12700" cap="flat" cmpd="sng" algn="ctr">
+                      <a:solidFill>
+                        <a:srgbClr val="EEF3F8"/>
+                      </a:solidFill>
+                      <a:prstDash val="solid"/>
+                      <a:round/>
+                      <a:headEnd type="none" w="med" len="med"/>
+                      <a:tailEnd type="none" w="med" len="med"/>
+                    </a:lnL>
+                    <a:lnR w="12700" cap="flat" cmpd="sng" algn="ctr">
+                      <a:solidFill>
+                        <a:srgbClr val="EEF3F8"/>
+                      </a:solidFill>
+                      <a:prstDash val="solid"/>
+                      <a:round/>
+                      <a:headEnd type="none" w="med" len="med"/>
+                      <a:tailEnd type="none" w="med" len="med"/>
+                    </a:lnR>
+                    <a:lnT w="12700" cap="flat" cmpd="sng" algn="ctr">
+                      <a:solidFill>
+                        <a:srgbClr val="EEF3F8"/>
+                      </a:solidFill>
+                      <a:prstDash val="solid"/>
+                      <a:round/>
+                      <a:headEnd type="none" w="med" len="med"/>
+                      <a:tailEnd type="none" w="med" len="med"/>
+                    </a:lnT>
+                    <a:lnB w="12700" cap="flat" cmpd="sng" algn="ctr">
+                      <a:solidFill>
+                        <a:srgbClr val="EEF3F8"/>
+                      </a:solidFill>
+                      <a:prstDash val="solid"/>
+                      <a:round/>
+                      <a:headEnd type="none" w="med" len="med"/>
+                      <a:tailEnd type="none" w="med" len="med"/>
+                    </a:lnB>
+                    <a:solidFill>
+                      <a:schemeClr val="bg2"/>
+                    </a:solidFill>
+                  </a:tcPr>
+                </a:tc>
+                <a:tc>
+                  <a:txBody>
+                    <a:bodyPr/>
+                    <a:lstStyle/>
+                    <a:p>
+                      <a:pPr algn="ctr" indent="0" marL="0">
+                        <a:buNone/>
+                      </a:pPr>
+                      <a:r>
+                        <a:rPr lang="en-US" sz="1400" b="1" dirty="0">
+                          <a:solidFill>
+                            <a:schemeClr val="tx1"/>
+                          </a:solidFill>
+                          <a:latin typeface="Calibri" pitchFamily="34" charset="0"/>
+                          <a:ea typeface="Calibri" pitchFamily="34" charset="-122"/>
+                          <a:cs typeface="Calibri" pitchFamily="34" charset="-120"/>
+                        </a:rPr>
+                        <a:t>100,0%</a:t>
+                      </a:r>
+                      <a:endParaRPr lang="en-US" sz="1400" dirty="0">
+                        <a:latin typeface="Calibri" charset="0"/>
+                        <a:ea typeface="Calibri" charset="0"/>
+                        <a:cs typeface="Calibri" charset="0"/>
+                      </a:endParaRPr>
+                    </a:p>
+                  </a:txBody>
+                  <a:tcPr marL="91440" marR="91440" marT="45720" marB="45720" anchor="ctr">
+                    <a:lnL w="12700" cap="flat" cmpd="sng" algn="ctr">
+                      <a:solidFill>
+                        <a:srgbClr val="EEF3F8"/>
+                      </a:solidFill>
+                      <a:prstDash val="solid"/>
+                      <a:round/>
+                      <a:headEnd type="none" w="med" len="med"/>
+                      <a:tailEnd type="none" w="med" len="med"/>
+                    </a:lnL>
+                    <a:lnR w="12700" cap="flat" cmpd="sng" algn="ctr">
+                      <a:solidFill>
+                        <a:srgbClr val="EEF3F8"/>
+                      </a:solidFill>
+                      <a:prstDash val="solid"/>
+                      <a:round/>
+                      <a:headEnd type="none" w="med" len="med"/>
+                      <a:tailEnd type="none" w="med" len="med"/>
+                    </a:lnR>
+                    <a:lnT w="12700" cap="flat" cmpd="sng" algn="ctr">
+                      <a:solidFill>
+                        <a:srgbClr val="EEF3F8"/>
+                      </a:solidFill>
+                      <a:prstDash val="solid"/>
+                      <a:round/>
+                      <a:headEnd type="none" w="med" len="med"/>
+                      <a:tailEnd type="none" w="med" len="med"/>
+                    </a:lnT>
+                    <a:lnB w="12700" cap="flat" cmpd="sng" algn="ctr">
+                      <a:solidFill>
+                        <a:srgbClr val="EEF3F8"/>
+                      </a:solidFill>
+                      <a:prstDash val="solid"/>
+                      <a:round/>
+                      <a:headEnd type="none" w="med" len="med"/>
+                      <a:tailEnd type="none" w="med" len="med"/>
+                    </a:lnB>
+                    <a:solidFill>
+                      <a:schemeClr val="bg2"/>
+                    </a:solidFill>
+                  </a:tcPr>
+                </a:tc>
+                <a:tc>
+                  <a:txBody>
+                    <a:bodyPr/>
+                    <a:lstStyle/>
+                    <a:p>
+                      <a:pPr algn="ctr" indent="0" marL="0">
+                        <a:buNone/>
+                      </a:pPr>
+                      <a:r>
+                        <a:rPr lang="en-US" sz="1400" b="1" dirty="0">
+                          <a:solidFill>
+                            <a:schemeClr val="tx1"/>
+                          </a:solidFill>
+                          <a:latin typeface="Calibri" pitchFamily="34" charset="0"/>
+                          <a:ea typeface="Calibri" pitchFamily="34" charset="-122"/>
+                          <a:cs typeface="Calibri" pitchFamily="34" charset="-120"/>
+                        </a:rPr>
+                        <a:t>72,40</a:t>
+                      </a:r>
+                      <a:endParaRPr lang="en-US" sz="1400" dirty="0">
+                        <a:latin typeface="Calibri" charset="0"/>
+                        <a:ea typeface="Calibri" charset="0"/>
+                        <a:cs typeface="Calibri" charset="0"/>
+                      </a:endParaRPr>
+                    </a:p>
+                  </a:txBody>
+                  <a:tcPr marL="91440" marR="91440" marT="45720" marB="45720" anchor="ctr">
+                    <a:lnL w="12700" cap="flat" cmpd="sng" algn="ctr">
+                      <a:solidFill>
+                        <a:srgbClr val="EEF3F8"/>
+                      </a:solidFill>
+                      <a:prstDash val="solid"/>
+                      <a:round/>
+                      <a:headEnd type="none" w="med" len="med"/>
+                      <a:tailEnd type="none" w="med" len="med"/>
+                    </a:lnL>
+                    <a:lnR w="12700" cap="flat" cmpd="sng" algn="ctr">
+                      <a:solidFill>
+                        <a:srgbClr val="EEF3F8"/>
+                      </a:solidFill>
+                      <a:prstDash val="solid"/>
+                      <a:round/>
+                      <a:headEnd type="none" w="med" len="med"/>
+                      <a:tailEnd type="none" w="med" len="med"/>
+                    </a:lnR>
+                    <a:lnT w="12700" cap="flat" cmpd="sng" algn="ctr">
+                      <a:solidFill>
+                        <a:srgbClr val="EEF3F8"/>
+                      </a:solidFill>
+                      <a:prstDash val="solid"/>
+                      <a:round/>
+                      <a:headEnd type="none" w="med" len="med"/>
+                      <a:tailEnd type="none" w="med" len="med"/>
+                    </a:lnT>
+                    <a:lnB w="12700" cap="flat" cmpd="sng" algn="ctr">
+                      <a:solidFill>
+                        <a:srgbClr val="EEF3F8"/>
+                      </a:solidFill>
+                      <a:prstDash val="solid"/>
+                      <a:round/>
+                      <a:headEnd type="none" w="med" len="med"/>
+                      <a:tailEnd type="none" w="med" len="med"/>
+                    </a:lnB>
+                    <a:solidFill>
+                      <a:schemeClr val="bg2"/>
+                    </a:solidFill>
+                  </a:tcPr>
+                </a:tc>
+                <a:tc>
+                  <a:txBody>
+                    <a:bodyPr/>
+                    <a:lstStyle/>
+                    <a:p>
+                      <a:pPr algn="ctr" indent="0" marL="0">
+                        <a:buNone/>
+                      </a:pPr>
+                      <a:r>
+                        <a:rPr lang="en-US" sz="1400" b="1" dirty="0">
+                          <a:solidFill>
+                            <a:schemeClr val="tx1"/>
+                          </a:solidFill>
+                          <a:latin typeface="Calibri" pitchFamily="34" charset="0"/>
+                          <a:ea typeface="Calibri" pitchFamily="34" charset="-122"/>
+                          <a:cs typeface="Calibri" pitchFamily="34" charset="-120"/>
+                        </a:rPr>
+                        <a:t>100,0%</a:t>
+                      </a:r>
+                      <a:endParaRPr lang="en-US" sz="1400" dirty="0">
+                        <a:latin typeface="Calibri" charset="0"/>
+                        <a:ea typeface="Calibri" charset="0"/>
+                        <a:cs typeface="Calibri" charset="0"/>
+                      </a:endParaRPr>
+                    </a:p>
+                  </a:txBody>
+                  <a:tcPr marL="91440" marR="91440" marT="45720" marB="45720" anchor="ctr">
+                    <a:lnL w="12700" cap="flat" cmpd="sng" algn="ctr">
+                      <a:solidFill>
+                        <a:srgbClr val="EEF3F8"/>
+                      </a:solidFill>
+                      <a:prstDash val="solid"/>
+                      <a:round/>
+                      <a:headEnd type="none" w="med" len="med"/>
+                      <a:tailEnd type="none" w="med" len="med"/>
+                    </a:lnL>
+                    <a:lnR w="12700" cap="flat" cmpd="sng" algn="ctr">
+                      <a:solidFill>
+                        <a:srgbClr val="EEF3F8"/>
+                      </a:solidFill>
+                      <a:prstDash val="solid"/>
+                      <a:round/>
+                      <a:headEnd type="none" w="med" len="med"/>
+                      <a:tailEnd type="none" w="med" len="med"/>
+                    </a:lnR>
+                    <a:lnT w="12700" cap="flat" cmpd="sng" algn="ctr">
+                      <a:solidFill>
+                        <a:srgbClr val="EEF3F8"/>
+                      </a:solidFill>
+                      <a:prstDash val="solid"/>
+                      <a:round/>
+                      <a:headEnd type="none" w="med" len="med"/>
+                      <a:tailEnd type="none" w="med" len="med"/>
+                    </a:lnT>
+                    <a:lnB w="12700" cap="flat" cmpd="sng" algn="ctr">
+                      <a:solidFill>
+                        <a:srgbClr val="EEF3F8"/>
+                      </a:solidFill>
+                      <a:prstDash val="solid"/>
+                      <a:round/>
+                      <a:headEnd type="none" w="med" len="med"/>
+                      <a:tailEnd type="none" w="med" len="med"/>
+                    </a:lnB>
+                    <a:solidFill>
+                      <a:schemeClr val="bg2"/>
+                    </a:solidFill>
+                  </a:tcPr>
+                </a:tc>
+                <a:tc>
+                  <a:txBody>
+                    <a:bodyPr/>
+                    <a:lstStyle/>
+                    <a:p>
+                      <a:pPr algn="ctr" indent="0" marL="0">
+                        <a:buNone/>
+                      </a:pPr>
+                      <a:r>
+                        <a:rPr lang="en-US" sz="1400" b="1" dirty="0">
+                          <a:solidFill>
+                            <a:schemeClr val="tx1"/>
+                          </a:solidFill>
+                          <a:latin typeface="Calibri" pitchFamily="34" charset="0"/>
+                          <a:ea typeface="Calibri" pitchFamily="34" charset="-122"/>
+                          <a:cs typeface="Calibri" pitchFamily="34" charset="-120"/>
+                        </a:rPr>
+                        <a:t>44,80</a:t>
+                      </a:r>
+                      <a:endParaRPr lang="en-US" sz="1400" dirty="0">
+                        <a:latin typeface="Calibri" charset="0"/>
+                        <a:ea typeface="Calibri" charset="0"/>
+                        <a:cs typeface="Calibri" charset="0"/>
+                      </a:endParaRPr>
+                    </a:p>
+                  </a:txBody>
+                  <a:tcPr marL="91440" marR="91440" marT="45720" marB="45720" anchor="ctr">
+                    <a:lnL w="12700" cap="flat" cmpd="sng" algn="ctr">
+                      <a:solidFill>
+                        <a:srgbClr val="EEF3F8"/>
+                      </a:solidFill>
+                      <a:prstDash val="solid"/>
+                      <a:round/>
+                      <a:headEnd type="none" w="med" len="med"/>
+                      <a:tailEnd type="none" w="med" len="med"/>
+                    </a:lnL>
+                    <a:lnR w="12700" cap="flat" cmpd="sng" algn="ctr">
+                      <a:solidFill>
+                        <a:srgbClr val="EEF3F8"/>
+                      </a:solidFill>
+                      <a:prstDash val="solid"/>
+                      <a:round/>
+                      <a:headEnd type="none" w="med" len="med"/>
+                      <a:tailEnd type="none" w="med" len="med"/>
+                    </a:lnR>
+                    <a:lnT w="12700" cap="flat" cmpd="sng" algn="ctr">
+                      <a:solidFill>
+                        <a:srgbClr val="EEF3F8"/>
+                      </a:solidFill>
+                      <a:prstDash val="solid"/>
+                      <a:round/>
+                      <a:headEnd type="none" w="med" len="med"/>
+                      <a:tailEnd type="none" w="med" len="med"/>
+                    </a:lnT>
+                    <a:lnB w="12700" cap="flat" cmpd="sng" algn="ctr">
+                      <a:solidFill>
+                        <a:srgbClr val="EEF3F8"/>
+                      </a:solidFill>
+                      <a:prstDash val="solid"/>
+                      <a:round/>
+                      <a:headEnd type="none" w="med" len="med"/>
+                      <a:tailEnd type="none" w="med" len="med"/>
+                    </a:lnB>
+                    <a:solidFill>
+                      <a:schemeClr val="bg2"/>
+                    </a:solidFill>
+                  </a:tcPr>
+                </a:tc>
+                <a:tc>
+                  <a:txBody>
+                    <a:bodyPr/>
+                    <a:lstStyle/>
+                    <a:p>
+                      <a:pPr algn="ctr" indent="0" marL="0">
+                        <a:buNone/>
+                      </a:pPr>
+                      <a:r>
+                        <a:rPr lang="en-US" sz="1400" b="1" dirty="0">
+                          <a:solidFill>
+                            <a:schemeClr val="tx1"/>
+                          </a:solidFill>
+                          <a:latin typeface="Calibri" pitchFamily="34" charset="0"/>
+                          <a:ea typeface="Calibri" pitchFamily="34" charset="-122"/>
+                          <a:cs typeface="Calibri" pitchFamily="34" charset="-120"/>
+                        </a:rPr>
+                        <a:t>100,0%</a:t>
+                      </a:r>
+                      <a:endParaRPr lang="en-US" sz="1400" dirty="0">
+                        <a:latin typeface="Calibri" charset="0"/>
+                        <a:ea typeface="Calibri" charset="0"/>
+                        <a:cs typeface="Calibri" charset="0"/>
+                      </a:endParaRPr>
+                    </a:p>
+                  </a:txBody>
+                  <a:tcPr marL="91440" marR="91440" marT="45720" marB="45720" anchor="ctr">
+                    <a:lnL w="12700" cap="flat" cmpd="sng" algn="ctr">
+                      <a:solidFill>
+                        <a:srgbClr val="EEF3F8"/>
+                      </a:solidFill>
+                      <a:prstDash val="solid"/>
+                      <a:round/>
+                      <a:headEnd type="none" w="med" len="med"/>
+                      <a:tailEnd type="none" w="med" len="med"/>
+                    </a:lnL>
+                    <a:lnR w="12700" cap="flat" cmpd="sng" algn="ctr">
+                      <a:solidFill>
+                        <a:srgbClr val="EEF3F8"/>
+                      </a:solidFill>
+                      <a:prstDash val="solid"/>
+                      <a:round/>
+                      <a:headEnd type="none" w="med" len="med"/>
+                      <a:tailEnd type="none" w="med" len="med"/>
+                    </a:lnR>
+                    <a:lnT w="12700" cap="flat" cmpd="sng" algn="ctr">
+                      <a:solidFill>
+                        <a:srgbClr val="EEF3F8"/>
+                      </a:solidFill>
+                      <a:prstDash val="solid"/>
+                      <a:round/>
+                      <a:headEnd type="none" w="med" len="med"/>
+                      <a:tailEnd type="none" w="med" len="med"/>
+                    </a:lnT>
+                    <a:lnB w="12700" cap="flat" cmpd="sng" algn="ctr">
+                      <a:solidFill>
+                        <a:srgbClr val="EEF3F8"/>
+                      </a:solidFill>
+                      <a:prstDash val="solid"/>
+                      <a:round/>
+                      <a:headEnd type="none" w="med" len="med"/>
+                      <a:tailEnd type="none" w="med" len="med"/>
+                    </a:lnB>
+                    <a:solidFill>
+                      <a:schemeClr val="bg2"/>
+                    </a:solidFill>
+                  </a:tcPr>
+                </a:tc>
+              </a:tr>
+            </a:tbl>
+          </a:graphicData>
+        </a:graphic>
+      </p:graphicFrame>
+      <p:sp>
+        <p:nvSpPr>
+          <p:cNvPr id="4" name="Text 1"/>
+          <p:cNvSpPr txBox="1"/>
+          <p:nvPr/>
+        </p:nvSpPr>
+        <p:spPr>
+          <a:xfrm>
+            <a:off x="548640" y="4572000"/>
+            <a:ext cx="11094415" cy="365760"/>
+          </a:xfrm>
+          <a:prstGeom prst="rect">
+            <a:avLst/>
+          </a:prstGeom>
+          <a:noFill/>
+          <a:ln/>
+        </p:spPr>
+        <p:txBody>
+          <a:bodyPr wrap="square" lIns="0" tIns="0" rIns="0" bIns="0" rtlCol="0" anchor="t"/>
+          <a:lstStyle/>
+          <a:p>
+            <a:pPr indent="0" marL="0">
+              <a:buNone/>
+            </a:pPr>
+            <a:r>
+              <a:rPr lang="en-US" sz="1200" i="1" dirty="0">
+                <a:solidFill>
+                  <a:schemeClr val="tx2"/>
+                </a:solidFill>
+              </a:rPr>
+              <a:t>Pesos exibidos com duas casas. Valores exatos: B = 32,3125, 26,40 e 13,6875 (soma 72,4); C = 12,925, 26,40 e 5,475 (soma 44,8).</a:t>
+            </a:r>
+            <a:endParaRPr lang="en-US" sz="1200" dirty="0"/>
+          </a:p>
+        </p:txBody>
+      </p:sp>
+      <p:sp>
+        <p:nvSpPr>
+          <p:cNvPr id="5" name="Worked examples"/>
+          <p:cNvSpPr/>
+          <p:nvPr/>
+        </p:nvSpPr>
+        <p:spPr>
+          <a:xfrm>
+            <a:off x="548640" y="5029200"/>
+            <a:ext cx="11094415" cy="1188720"/>
+          </a:xfrm>
+          <a:prstGeom prst="roundRect">
+            <a:avLst>
+              <a:gd name="adj" fmla="val 9231"/>
+            </a:avLst>
+          </a:prstGeom>
+          <a:solidFill>
+            <a:schemeClr val="bg2"/>
+          </a:solidFill>
+          <a:ln w="12700">
+            <a:solidFill>
+              <a:schemeClr val="bg2"/>
+            </a:solidFill>
+            <a:prstDash val="solid"/>
+          </a:ln>
+        </p:spPr>
+      </p:sp>
+      <p:sp>
+        <p:nvSpPr>
+          <p:cNvPr id="6" name="Text 3"/>
+          <p:cNvSpPr txBox="1"/>
+          <p:nvPr/>
+        </p:nvSpPr>
+        <p:spPr>
+          <a:xfrm>
+            <a:off x="822960" y="5029200"/>
+            <a:ext cx="10545775" cy="1188720"/>
+          </a:xfrm>
+          <a:prstGeom prst="rect">
+            <a:avLst/>
+          </a:prstGeom>
+          <a:noFill/>
+          <a:ln/>
+        </p:spPr>
+        <p:txBody>
+          <a:bodyPr wrap="square" lIns="0" tIns="0" rIns="0" bIns="0" rtlCol="0" anchor="ctr"/>
+          <a:lstStyle/>
+          <a:p>
+            <a:pPr indent="0" marL="0">
+              <a:spcAft>
+                <a:spcPts val="600"/>
+              </a:spcAft>
+              <a:buNone/>
+            </a:pPr>
+            <a:r>
+              <a:rPr lang="en-US" sz="1600" b="1" dirty="0">
+                <a:solidFill>
+                  <a:schemeClr val="tx1"/>
+                </a:solidFill>
+              </a:rPr>
+              <a:t>Exemplo B, hidrelétricas: </a:t>
+            </a:r>
+            <a:pPr indent="0" marL="0">
+              <a:spcAft>
+                <a:spcPts val="600"/>
+              </a:spcAft>
+              <a:buNone/>
+            </a:pPr>
+            <a:r>
+              <a:rPr lang="en-US" sz="1600" dirty="0">
+                <a:solidFill>
+                  <a:schemeClr val="tx1"/>
+                </a:solidFill>
+              </a:rPr>
+              <a:t>51,7 × 0,625 = 32,3125; 32,3125 ÷ 72,4 = 0,4463, ou 44,6%.</a:t>
+            </a:r>
+            <a:endParaRPr lang="en-US" sz="1600" dirty="0"/>
+          </a:p>
+          <a:p>
+            <a:pPr indent="0" marL="0">
+              <a:spcAft>
+                <a:spcPts val="600"/>
+              </a:spcAft>
+              <a:buNone/>
+            </a:pPr>
+            <a:r>
+              <a:rPr lang="en-US" sz="1600" b="1" dirty="0">
+                <a:solidFill>
+                  <a:schemeClr val="tx1"/>
+                </a:solidFill>
+              </a:rPr>
+              <a:t>Exemplo C, térmicas: </a:t>
+            </a:r>
+            <a:pPr indent="0" marL="0">
+              <a:spcAft>
+                <a:spcPts val="600"/>
+              </a:spcAft>
+              <a:buNone/>
+            </a:pPr>
+            <a:r>
+              <a:rPr lang="en-US" sz="1600" dirty="0">
+                <a:solidFill>
+                  <a:schemeClr val="tx1"/>
+                </a:solidFill>
+              </a:rPr>
+              <a:t>21,9 × 0,25 = 5,475; 5,475 ÷ 44,8 = 0,1222, ou 12,2%.</a:t>
+            </a:r>
+            <a:endParaRPr lang="en-US" sz="1600" dirty="0"/>
+          </a:p>
+        </p:txBody>
+      </p:sp>
+      <p:sp>
+        <p:nvSpPr>
+          <p:cNvPr id="25" name="Slide Number Placeholder 0"/>
+          <p:cNvSpPr>
+            <a:spLocks noGrp="1"/>
+          </p:cNvSpPr>
+          <p:nvPr>
+            <p:ph type="sldNum" sz="quarter" idx="4294967295"/>
+          </p:nvPr>
+        </p:nvSpPr>
+        <p:spPr>
+          <a:xfrm>
+            <a:off x="11155680" y="6400800"/>
+            <a:ext cx="548640" cy="274320"/>
+          </a:xfrm>
+          <a:prstGeom prst="rect">
+            <a:avLst/>
+          </a:prstGeom>
+          <a:extLst>
+            <a:ext uri="{C572A759-6A51-4108-AA02-DFA0A04FC94B}">
+              <ma14:wrappingTextBoxFlag xmlns:ma14="http://schemas.microsoft.com/office/mac/drawingml/2011/main" val="0"/>
+            </a:ext>
+          </a:extLst>
+        </p:spPr>
+        <p:txBody>
+          <a:bodyPr/>
+          <a:lstStyle>
+            <a:lvl1pPr>
+              <a:defRPr sz="1100">
+                <a:solidFill>
+                  <a:schemeClr val="tx2"/>
+                </a:solidFill>
+              </a:defRPr>
+            </a:lvl1pPr>
+          </a:lstStyle>
+          <a:p>
+            <a:pPr algn="r"/>
+            <a:fld id="{F7021451-1387-4CA6-816F-3879F97B5CBC}" type="slidenum">
+              <a:rPr b="0" lang="en-US"/>
+              <a:t>18</a:t>
+            </a:fld>
+            <a:endParaRPr lang="en-US"/>
+          </a:p>
+        </p:txBody>
+      </p:sp>
+    </p:spTree>
+  </p:cSld>
+  <p:clrMapOvr>
+    <a:masterClrMapping/>
+  </p:clrMapOvr>
+</p:sld>
+</file>
+
+<file path=ppt/slides/slide19.xml><?xml version="1.0" encoding="utf-8"?>
+<p:sld xmlns:a="http://schemas.openxmlformats.org/drawingml/2006/main" xmlns:r="http://schemas.openxmlformats.org/officeDocument/2006/relationships" xmlns:p="http://schemas.openxmlformats.org/presentationml/2006/main">
+  <p:cSld name="Slide 19">
+    <p:spTree>
+      <p:nvGrpSpPr>
+        <p:cNvPr id="1" name=""/>
+        <p:cNvGrpSpPr/>
+        <p:nvPr/>
+      </p:nvGrpSpPr>
+      <p:grpSpPr>
+        <a:xfrm>
+          <a:off x="0" y="0"/>
+          <a:ext cx="0" cy="0"/>
+          <a:chOff x="0" y="0"/>
+          <a:chExt cx="0" cy="0"/>
+        </a:xfrm>
+      </p:grpSpPr>
+      <p:sp>
+        <p:nvSpPr>
+          <p:cNvPr id="2" name="Text 0"/>
+          <p:cNvSpPr/>
+          <p:nvPr>
+            <p:ph idx="100" type="title" hasCustomPrompt="1"/>
+          </p:nvPr>
+        </p:nvSpPr>
+        <p:spPr>
+          <a:xfrm>
+            <a:off x="548640" y="365760"/>
+            <a:ext cx="11094415" cy="822960"/>
+          </a:xfrm>
+          <a:prstGeom prst="rect">
+            <a:avLst/>
+          </a:prstGeom>
+          <a:noFill/>
+          <a:ln/>
+        </p:spPr>
+        <p:txBody>
+          <a:bodyPr wrap="square" lIns="0" tIns="0" rIns="0" bIns="0" rtlCol="0" anchor="ctr"/>
+          <a:lstStyle/>
+          <a:p>
+            <a:pPr algn="l" indent="0" marL="0">
+              <a:buNone/>
+            </a:pPr>
+            <a:r>
+              <a:rPr lang="en-US" sz="3200" b="1" dirty="0">
+                <a:solidFill>
+                  <a:schemeClr val="tx1"/>
+                </a:solidFill>
+              </a:rPr>
+              <a:t>Memória de cálculo 3/3: valores em R$ e limites</a:t>
+            </a:r>
+            <a:endParaRPr lang="en-US" sz="3200" dirty="0"/>
+          </a:p>
+        </p:txBody>
+      </p:sp>
+      <p:sp>
+        <p:nvSpPr>
+          <p:cNvPr id="3" name="Text 1"/>
+          <p:cNvSpPr txBox="1"/>
+          <p:nvPr/>
+        </p:nvSpPr>
+        <p:spPr>
+          <a:xfrm>
+            <a:off x="548640" y="1371600"/>
+            <a:ext cx="5669280" cy="365760"/>
+          </a:xfrm>
+          <a:prstGeom prst="rect">
+            <a:avLst/>
+          </a:prstGeom>
+          <a:noFill/>
+          <a:ln/>
+        </p:spPr>
+        <p:txBody>
+          <a:bodyPr wrap="square" lIns="0" tIns="0" rIns="0" bIns="0" rtlCol="0" anchor="t"/>
+          <a:lstStyle/>
+          <a:p>
+            <a:pPr indent="0" marL="0">
+              <a:buNone/>
+            </a:pPr>
+            <a:r>
+              <a:rPr lang="en-US" sz="1600" b="1" dirty="0">
+                <a:solidFill>
+                  <a:schemeClr val="tx1"/>
+                </a:solidFill>
+              </a:rPr>
+              <a:t>Por R$ 1 bilhão de receita fixa anual (R$ milhões)</a:t>
+            </a:r>
+            <a:endParaRPr lang="en-US" sz="1600" dirty="0"/>
+          </a:p>
+        </p:txBody>
+      </p:sp>
+      <p:graphicFrame>
+        <p:nvGraphicFramePr>
+          <p:cNvPr id="20" name="Table 0"/>
+          <p:cNvGraphicFramePr>
+            <a:graphicFrameLocks noGrp="1"/>
+          </p:cNvGraphicFramePr>
+          <p:nvPr>
+            <p:extLst>
+              <p:ext uri="{D42A27DB-BD31-4B8C-83A1-F6EECF244321}">
+                <p14:modId xmlns:p14="http://schemas.microsoft.com/office/powerpoint/2010/main" val="1579011935"/>
+              </p:ext>
+            </p:extLst>
+          </p:nvPr>
+        </p:nvGraphicFramePr>
+        <p:xfrm>
+          <a:off x="548640" y="1828800"/>
+          <a:ext cx="5669280" cy="914400"/>
+        </p:xfrm>
+        <a:graphic>
+          <a:graphicData uri="http://schemas.openxmlformats.org/drawingml/2006/table">
+            <a:tbl>
+              <a:tblPr/>
+              <a:tblGrid>
+                <a:gridCol w="2103120"/>
+                <a:gridCol w="1188720"/>
+                <a:gridCol w="1188720"/>
+                <a:gridCol w="1188720"/>
+              </a:tblGrid>
+              <a:tr h="548640">
+                <a:tc>
+                  <a:txBody>
+                    <a:bodyPr/>
+                    <a:lstStyle/>
+                    <a:p>
+                      <a:pPr algn="ctr" indent="0" marL="0">
+                        <a:buNone/>
+                      </a:pPr>
+                      <a:r>
+                        <a:rPr lang="en-US" sz="1300" b="1" dirty="0">
+                          <a:solidFill>
+                            <a:schemeClr val="bg1"/>
+                          </a:solidFill>
+                          <a:latin typeface="Calibri" pitchFamily="34" charset="0"/>
+                          <a:ea typeface="Calibri" pitchFamily="34" charset="-122"/>
+                          <a:cs typeface="Calibri" pitchFamily="34" charset="-120"/>
+                        </a:rPr>
+                        <a:t>Fonte</a:t>
+                      </a:r>
+                      <a:endParaRPr lang="en-US" sz="1300" dirty="0">
+                        <a:latin typeface="Calibri" charset="0"/>
+                        <a:ea typeface="Calibri" charset="0"/>
+                        <a:cs typeface="Calibri" charset="0"/>
+                      </a:endParaRPr>
+                    </a:p>
+                  </a:txBody>
+                  <a:tcPr marL="91440" marR="91440" marT="45720" marB="45720" anchor="ctr">
+                    <a:lnL w="12700" cap="flat" cmpd="sng" algn="ctr">
+                      <a:solidFill>
+                        <a:srgbClr val="EEF3F8"/>
+                      </a:solidFill>
+                      <a:prstDash val="solid"/>
+                      <a:round/>
+                      <a:headEnd type="none" w="med" len="med"/>
+                      <a:tailEnd type="none" w="med" len="med"/>
+                    </a:lnL>
+                    <a:lnR w="12700" cap="flat" cmpd="sng" algn="ctr">
+                      <a:solidFill>
+                        <a:srgbClr val="EEF3F8"/>
+                      </a:solidFill>
+                      <a:prstDash val="solid"/>
+                      <a:round/>
+                      <a:headEnd type="none" w="med" len="med"/>
+                      <a:tailEnd type="none" w="med" len="med"/>
+                    </a:lnR>
+                    <a:lnT w="12700" cap="flat" cmpd="sng" algn="ctr">
+                      <a:solidFill>
+                        <a:srgbClr val="EEF3F8"/>
+                      </a:solidFill>
+                      <a:prstDash val="solid"/>
+                      <a:round/>
+                      <a:headEnd type="none" w="med" len="med"/>
+                      <a:tailEnd type="none" w="med" len="med"/>
+                    </a:lnT>
+                    <a:lnB w="12700" cap="flat" cmpd="sng" algn="ctr">
+                      <a:solidFill>
+                        <a:srgbClr val="EEF3F8"/>
+                      </a:solidFill>
+                      <a:prstDash val="solid"/>
+                      <a:round/>
+                      <a:headEnd type="none" w="med" len="med"/>
+                      <a:tailEnd type="none" w="med" len="med"/>
+                    </a:lnB>
+                    <a:solidFill>
+                      <a:schemeClr val="tx2"/>
+                    </a:solidFill>
+                  </a:tcPr>
+                </a:tc>
+                <a:tc>
+                  <a:txBody>
+                    <a:bodyPr/>
+                    <a:lstStyle/>
+                    <a:p>
+                      <a:pPr algn="ctr" indent="0" marL="0">
+                        <a:buNone/>
+                      </a:pPr>
+                      <a:r>
+                        <a:rPr lang="en-US" sz="1300" b="1" dirty="0">
+                          <a:solidFill>
+                            <a:schemeClr val="bg1"/>
+                          </a:solidFill>
+                          <a:latin typeface="Calibri" pitchFamily="34" charset="0"/>
+                          <a:ea typeface="Calibri" pitchFamily="34" charset="-122"/>
+                          <a:cs typeface="Calibri" pitchFamily="34" charset="-120"/>
+                        </a:rPr>
+                        <a:t>A</a:t>
+                      </a:r>
+                      <a:endParaRPr lang="en-US" sz="1300" dirty="0">
+                        <a:latin typeface="Calibri" charset="0"/>
+                        <a:ea typeface="Calibri" charset="0"/>
+                        <a:cs typeface="Calibri" charset="0"/>
+                      </a:endParaRPr>
+                    </a:p>
+                  </a:txBody>
+                  <a:tcPr marL="91440" marR="91440" marT="45720" marB="45720" anchor="ctr">
+                    <a:lnL w="12700" cap="flat" cmpd="sng" algn="ctr">
+                      <a:solidFill>
+                        <a:srgbClr val="EEF3F8"/>
+                      </a:solidFill>
+                      <a:prstDash val="solid"/>
+                      <a:round/>
+                      <a:headEnd type="none" w="med" len="med"/>
+                      <a:tailEnd type="none" w="med" len="med"/>
+                    </a:lnL>
+                    <a:lnR w="12700" cap="flat" cmpd="sng" algn="ctr">
+                      <a:solidFill>
+                        <a:srgbClr val="EEF3F8"/>
+                      </a:solidFill>
+                      <a:prstDash val="solid"/>
+                      <a:round/>
+                      <a:headEnd type="none" w="med" len="med"/>
+                      <a:tailEnd type="none" w="med" len="med"/>
+                    </a:lnR>
+                    <a:lnT w="12700" cap="flat" cmpd="sng" algn="ctr">
+                      <a:solidFill>
+                        <a:srgbClr val="EEF3F8"/>
+                      </a:solidFill>
+                      <a:prstDash val="solid"/>
+                      <a:round/>
+                      <a:headEnd type="none" w="med" len="med"/>
+                      <a:tailEnd type="none" w="med" len="med"/>
+                    </a:lnT>
+                    <a:lnB w="12700" cap="flat" cmpd="sng" algn="ctr">
+                      <a:solidFill>
+                        <a:srgbClr val="EEF3F8"/>
+                      </a:solidFill>
+                      <a:prstDash val="solid"/>
+                      <a:round/>
+                      <a:headEnd type="none" w="med" len="med"/>
+                      <a:tailEnd type="none" w="med" len="med"/>
+                    </a:lnB>
+                    <a:solidFill>
+                      <a:schemeClr val="tx2"/>
+                    </a:solidFill>
+                  </a:tcPr>
+                </a:tc>
+                <a:tc>
+                  <a:txBody>
+                    <a:bodyPr/>
+                    <a:lstStyle/>
+                    <a:p>
+                      <a:pPr algn="ctr" indent="0" marL="0">
+                        <a:buNone/>
+                      </a:pPr>
+                      <a:r>
+                        <a:rPr lang="en-US" sz="1300" b="1" dirty="0">
+                          <a:solidFill>
+                            <a:schemeClr val="bg1"/>
+                          </a:solidFill>
+                          <a:latin typeface="Calibri" pitchFamily="34" charset="0"/>
+                          <a:ea typeface="Calibri" pitchFamily="34" charset="-122"/>
+                          <a:cs typeface="Calibri" pitchFamily="34" charset="-120"/>
+                        </a:rPr>
+                        <a:t>B</a:t>
+                      </a:r>
+                      <a:endParaRPr lang="en-US" sz="1300" dirty="0">
+                        <a:latin typeface="Calibri" charset="0"/>
+                        <a:ea typeface="Calibri" charset="0"/>
+                        <a:cs typeface="Calibri" charset="0"/>
+                      </a:endParaRPr>
+                    </a:p>
+                  </a:txBody>
+                  <a:tcPr marL="91440" marR="91440" marT="45720" marB="45720" anchor="ctr">
+                    <a:lnL w="12700" cap="flat" cmpd="sng" algn="ctr">
+                      <a:solidFill>
+                        <a:srgbClr val="EEF3F8"/>
+                      </a:solidFill>
+                      <a:prstDash val="solid"/>
+                      <a:round/>
+                      <a:headEnd type="none" w="med" len="med"/>
+                      <a:tailEnd type="none" w="med" len="med"/>
+                    </a:lnL>
+                    <a:lnR w="12700" cap="flat" cmpd="sng" algn="ctr">
+                      <a:solidFill>
+                        <a:srgbClr val="EEF3F8"/>
+                      </a:solidFill>
+                      <a:prstDash val="solid"/>
+                      <a:round/>
+                      <a:headEnd type="none" w="med" len="med"/>
+                      <a:tailEnd type="none" w="med" len="med"/>
+                    </a:lnR>
+                    <a:lnT w="12700" cap="flat" cmpd="sng" algn="ctr">
+                      <a:solidFill>
+                        <a:srgbClr val="EEF3F8"/>
+                      </a:solidFill>
+                      <a:prstDash val="solid"/>
+                      <a:round/>
+                      <a:headEnd type="none" w="med" len="med"/>
+                      <a:tailEnd type="none" w="med" len="med"/>
+                    </a:lnT>
+                    <a:lnB w="12700" cap="flat" cmpd="sng" algn="ctr">
+                      <a:solidFill>
+                        <a:srgbClr val="EEF3F8"/>
+                      </a:solidFill>
+                      <a:prstDash val="solid"/>
+                      <a:round/>
+                      <a:headEnd type="none" w="med" len="med"/>
+                      <a:tailEnd type="none" w="med" len="med"/>
+                    </a:lnB>
+                    <a:solidFill>
+                      <a:schemeClr val="tx2"/>
+                    </a:solidFill>
+                  </a:tcPr>
+                </a:tc>
+                <a:tc>
+                  <a:txBody>
+                    <a:bodyPr/>
+                    <a:lstStyle/>
+                    <a:p>
+                      <a:pPr algn="ctr" indent="0" marL="0">
+                        <a:buNone/>
+                      </a:pPr>
+                      <a:r>
+                        <a:rPr lang="en-US" sz="1300" b="1" dirty="0">
+                          <a:solidFill>
+                            <a:schemeClr val="bg1"/>
+                          </a:solidFill>
+                          <a:latin typeface="Calibri" pitchFamily="34" charset="0"/>
+                          <a:ea typeface="Calibri" pitchFamily="34" charset="-122"/>
+                          <a:cs typeface="Calibri" pitchFamily="34" charset="-120"/>
+                        </a:rPr>
+                        <a:t>C</a:t>
+                      </a:r>
+                      <a:endParaRPr lang="en-US" sz="1300" dirty="0">
+                        <a:latin typeface="Calibri" charset="0"/>
+                        <a:ea typeface="Calibri" charset="0"/>
+                        <a:cs typeface="Calibri" charset="0"/>
+                      </a:endParaRPr>
+                    </a:p>
+                  </a:txBody>
+                  <a:tcPr marL="91440" marR="91440" marT="45720" marB="45720" anchor="ctr">
+                    <a:lnL w="12700" cap="flat" cmpd="sng" algn="ctr">
+                      <a:solidFill>
+                        <a:srgbClr val="EEF3F8"/>
+                      </a:solidFill>
+                      <a:prstDash val="solid"/>
+                      <a:round/>
+                      <a:headEnd type="none" w="med" len="med"/>
+                      <a:tailEnd type="none" w="med" len="med"/>
+                    </a:lnL>
+                    <a:lnR w="12700" cap="flat" cmpd="sng" algn="ctr">
+                      <a:solidFill>
+                        <a:srgbClr val="EEF3F8"/>
+                      </a:solidFill>
+                      <a:prstDash val="solid"/>
+                      <a:round/>
+                      <a:headEnd type="none" w="med" len="med"/>
+                      <a:tailEnd type="none" w="med" len="med"/>
+                    </a:lnR>
+                    <a:lnT w="12700" cap="flat" cmpd="sng" algn="ctr">
+                      <a:solidFill>
+                        <a:srgbClr val="EEF3F8"/>
+                      </a:solidFill>
+                      <a:prstDash val="solid"/>
+                      <a:round/>
+                      <a:headEnd type="none" w="med" len="med"/>
+                      <a:tailEnd type="none" w="med" len="med"/>
+                    </a:lnT>
+                    <a:lnB w="12700" cap="flat" cmpd="sng" algn="ctr">
+                      <a:solidFill>
+                        <a:srgbClr val="EEF3F8"/>
+                      </a:solidFill>
+                      <a:prstDash val="solid"/>
+                      <a:round/>
+                      <a:headEnd type="none" w="med" len="med"/>
+                      <a:tailEnd type="none" w="med" len="med"/>
+                    </a:lnB>
+                    <a:solidFill>
+                      <a:schemeClr val="tx2"/>
+                    </a:solidFill>
+                  </a:tcPr>
+                </a:tc>
+              </a:tr>
+              <a:tr h="640080">
+                <a:tc>
+                  <a:txBody>
+                    <a:bodyPr/>
+                    <a:lstStyle/>
+                    <a:p>
+                      <a:pPr algn="l" indent="0" marL="0">
+                        <a:buNone/>
+                      </a:pPr>
+                      <a:r>
+                        <a:rPr lang="en-US" sz="1400" b="1" dirty="0">
+                          <a:solidFill>
+                            <a:schemeClr val="tx1"/>
+                          </a:solidFill>
+                          <a:latin typeface="Calibri" pitchFamily="34" charset="0"/>
+                          <a:ea typeface="Calibri" pitchFamily="34" charset="-122"/>
+                          <a:cs typeface="Calibri" pitchFamily="34" charset="-120"/>
+                        </a:rPr>
+                        <a:t>Hidrelétricas</a:t>
+                      </a:r>
+                      <a:endParaRPr lang="en-US" sz="1400" dirty="0">
+                        <a:latin typeface="Calibri" charset="0"/>
+                        <a:ea typeface="Calibri" charset="0"/>
+                        <a:cs typeface="Calibri" charset="0"/>
+                      </a:endParaRPr>
+                    </a:p>
+                  </a:txBody>
+                  <a:tcPr marL="91440" marR="91440" marT="45720" marB="45720" anchor="ctr">
+                    <a:lnL w="12700" cap="flat" cmpd="sng" algn="ctr">
+                      <a:solidFill>
+                        <a:srgbClr val="EEF3F8"/>
+                      </a:solidFill>
+                      <a:prstDash val="solid"/>
+                      <a:round/>
+                      <a:headEnd type="none" w="med" len="med"/>
+                      <a:tailEnd type="none" w="med" len="med"/>
+                    </a:lnL>
+                    <a:lnR w="12700" cap="flat" cmpd="sng" algn="ctr">
+                      <a:solidFill>
+                        <a:srgbClr val="EEF3F8"/>
+                      </a:solidFill>
+                      <a:prstDash val="solid"/>
+                      <a:round/>
+                      <a:headEnd type="none" w="med" len="med"/>
+                      <a:tailEnd type="none" w="med" len="med"/>
+                    </a:lnR>
+                    <a:lnT w="12700" cap="flat" cmpd="sng" algn="ctr">
+                      <a:solidFill>
+                        <a:srgbClr val="EEF3F8"/>
+                      </a:solidFill>
+                      <a:prstDash val="solid"/>
+                      <a:round/>
+                      <a:headEnd type="none" w="med" len="med"/>
+                      <a:tailEnd type="none" w="med" len="med"/>
+                    </a:lnT>
+                    <a:lnB w="12700" cap="flat" cmpd="sng" algn="ctr">
+                      <a:solidFill>
+                        <a:srgbClr val="EEF3F8"/>
+                      </a:solidFill>
+                      <a:prstDash val="solid"/>
+                      <a:round/>
+                      <a:headEnd type="none" w="med" len="med"/>
+                      <a:tailEnd type="none" w="med" len="med"/>
+                    </a:lnB>
+                    <a:solidFill>
+                      <a:schemeClr val="bg1"/>
+                    </a:solidFill>
+                  </a:tcPr>
+                </a:tc>
+                <a:tc>
+                  <a:txBody>
+                    <a:bodyPr/>
+                    <a:lstStyle/>
+                    <a:p>
+                      <a:pPr algn="ctr" indent="0" marL="0">
+                        <a:buNone/>
+                      </a:pPr>
+                      <a:r>
+                        <a:rPr lang="en-US" sz="1400" dirty="0">
+                          <a:solidFill>
+                            <a:schemeClr val="tx1"/>
+                          </a:solidFill>
+                          <a:latin typeface="Calibri" pitchFamily="34" charset="0"/>
+                          <a:ea typeface="Calibri" pitchFamily="34" charset="-122"/>
+                          <a:cs typeface="Calibri" pitchFamily="34" charset="-120"/>
+                        </a:rPr>
+                        <a:t>517</a:t>
+                      </a:r>
+                      <a:endParaRPr lang="en-US" sz="1400" dirty="0">
+                        <a:latin typeface="Calibri" charset="0"/>
+                        <a:ea typeface="Calibri" charset="0"/>
+                        <a:cs typeface="Calibri" charset="0"/>
+                      </a:endParaRPr>
+                    </a:p>
+                  </a:txBody>
+                  <a:tcPr marL="91440" marR="91440" marT="45720" marB="45720" anchor="ctr">
+                    <a:lnL w="12700" cap="flat" cmpd="sng" algn="ctr">
+                      <a:solidFill>
+                        <a:srgbClr val="EEF3F8"/>
+                      </a:solidFill>
+                      <a:prstDash val="solid"/>
+                      <a:round/>
+                      <a:headEnd type="none" w="med" len="med"/>
+                      <a:tailEnd type="none" w="med" len="med"/>
+                    </a:lnL>
+                    <a:lnR w="12700" cap="flat" cmpd="sng" algn="ctr">
+                      <a:solidFill>
+                        <a:srgbClr val="EEF3F8"/>
+                      </a:solidFill>
+                      <a:prstDash val="solid"/>
+                      <a:round/>
+                      <a:headEnd type="none" w="med" len="med"/>
+                      <a:tailEnd type="none" w="med" len="med"/>
+                    </a:lnR>
+                    <a:lnT w="12700" cap="flat" cmpd="sng" algn="ctr">
+                      <a:solidFill>
+                        <a:srgbClr val="EEF3F8"/>
+                      </a:solidFill>
+                      <a:prstDash val="solid"/>
+                      <a:round/>
+                      <a:headEnd type="none" w="med" len="med"/>
+                      <a:tailEnd type="none" w="med" len="med"/>
+                    </a:lnT>
+                    <a:lnB w="12700" cap="flat" cmpd="sng" algn="ctr">
+                      <a:solidFill>
+                        <a:srgbClr val="EEF3F8"/>
+                      </a:solidFill>
+                      <a:prstDash val="solid"/>
+                      <a:round/>
+                      <a:headEnd type="none" w="med" len="med"/>
+                      <a:tailEnd type="none" w="med" len="med"/>
+                    </a:lnB>
+                    <a:solidFill>
+                      <a:schemeClr val="bg1"/>
+                    </a:solidFill>
+                  </a:tcPr>
+                </a:tc>
+                <a:tc>
+                  <a:txBody>
+                    <a:bodyPr/>
+                    <a:lstStyle/>
+                    <a:p>
+                      <a:pPr algn="ctr" indent="0" marL="0">
+                        <a:buNone/>
+                      </a:pPr>
+                      <a:r>
+                        <a:rPr lang="en-US" sz="1400" dirty="0">
+                          <a:solidFill>
+                            <a:schemeClr val="tx1"/>
+                          </a:solidFill>
+                          <a:latin typeface="Calibri" pitchFamily="34" charset="0"/>
+                          <a:ea typeface="Calibri" pitchFamily="34" charset="-122"/>
+                          <a:cs typeface="Calibri" pitchFamily="34" charset="-120"/>
+                        </a:rPr>
+                        <a:t>446</a:t>
+                      </a:r>
+                      <a:endParaRPr lang="en-US" sz="1400" dirty="0">
+                        <a:latin typeface="Calibri" charset="0"/>
+                        <a:ea typeface="Calibri" charset="0"/>
+                        <a:cs typeface="Calibri" charset="0"/>
+                      </a:endParaRPr>
+                    </a:p>
+                  </a:txBody>
+                  <a:tcPr marL="91440" marR="91440" marT="45720" marB="45720" anchor="ctr">
+                    <a:lnL w="12700" cap="flat" cmpd="sng" algn="ctr">
+                      <a:solidFill>
+                        <a:srgbClr val="EEF3F8"/>
+                      </a:solidFill>
+                      <a:prstDash val="solid"/>
+                      <a:round/>
+                      <a:headEnd type="none" w="med" len="med"/>
+                      <a:tailEnd type="none" w="med" len="med"/>
+                    </a:lnL>
+                    <a:lnR w="12700" cap="flat" cmpd="sng" algn="ctr">
+                      <a:solidFill>
+                        <a:srgbClr val="EEF3F8"/>
+                      </a:solidFill>
+                      <a:prstDash val="solid"/>
+                      <a:round/>
+                      <a:headEnd type="none" w="med" len="med"/>
+                      <a:tailEnd type="none" w="med" len="med"/>
+                    </a:lnR>
+                    <a:lnT w="12700" cap="flat" cmpd="sng" algn="ctr">
+                      <a:solidFill>
+                        <a:srgbClr val="EEF3F8"/>
+                      </a:solidFill>
+                      <a:prstDash val="solid"/>
+                      <a:round/>
+                      <a:headEnd type="none" w="med" len="med"/>
+                      <a:tailEnd type="none" w="med" len="med"/>
+                    </a:lnT>
+                    <a:lnB w="12700" cap="flat" cmpd="sng" algn="ctr">
+                      <a:solidFill>
+                        <a:srgbClr val="EEF3F8"/>
+                      </a:solidFill>
+                      <a:prstDash val="solid"/>
+                      <a:round/>
+                      <a:headEnd type="none" w="med" len="med"/>
+                      <a:tailEnd type="none" w="med" len="med"/>
+                    </a:lnB>
+                    <a:solidFill>
+                      <a:schemeClr val="bg1"/>
+                    </a:solidFill>
+                  </a:tcPr>
+                </a:tc>
+                <a:tc>
+                  <a:txBody>
+                    <a:bodyPr/>
+                    <a:lstStyle/>
+                    <a:p>
+                      <a:pPr algn="ctr" indent="0" marL="0">
+                        <a:buNone/>
+                      </a:pPr>
+                      <a:r>
+                        <a:rPr lang="en-US" sz="1400" dirty="0">
+                          <a:solidFill>
+                            <a:schemeClr val="tx1"/>
+                          </a:solidFill>
+                          <a:latin typeface="Calibri" pitchFamily="34" charset="0"/>
+                          <a:ea typeface="Calibri" pitchFamily="34" charset="-122"/>
+                          <a:cs typeface="Calibri" pitchFamily="34" charset="-120"/>
+                        </a:rPr>
+                        <a:t>289</a:t>
+                      </a:r>
+                      <a:endParaRPr lang="en-US" sz="1400" dirty="0">
+                        <a:latin typeface="Calibri" charset="0"/>
+                        <a:ea typeface="Calibri" charset="0"/>
+                        <a:cs typeface="Calibri" charset="0"/>
+                      </a:endParaRPr>
+                    </a:p>
+                  </a:txBody>
+                  <a:tcPr marL="91440" marR="91440" marT="45720" marB="45720" anchor="ctr">
+                    <a:lnL w="12700" cap="flat" cmpd="sng" algn="ctr">
+                      <a:solidFill>
+                        <a:srgbClr val="EEF3F8"/>
+                      </a:solidFill>
+                      <a:prstDash val="solid"/>
+                      <a:round/>
+                      <a:headEnd type="none" w="med" len="med"/>
+                      <a:tailEnd type="none" w="med" len="med"/>
+                    </a:lnL>
+                    <a:lnR w="12700" cap="flat" cmpd="sng" algn="ctr">
+                      <a:solidFill>
+                        <a:srgbClr val="EEF3F8"/>
+                      </a:solidFill>
+                      <a:prstDash val="solid"/>
+                      <a:round/>
+                      <a:headEnd type="none" w="med" len="med"/>
+                      <a:tailEnd type="none" w="med" len="med"/>
+                    </a:lnR>
+                    <a:lnT w="12700" cap="flat" cmpd="sng" algn="ctr">
+                      <a:solidFill>
+                        <a:srgbClr val="EEF3F8"/>
+                      </a:solidFill>
+                      <a:prstDash val="solid"/>
+                      <a:round/>
+                      <a:headEnd type="none" w="med" len="med"/>
+                      <a:tailEnd type="none" w="med" len="med"/>
+                    </a:lnT>
+                    <a:lnB w="12700" cap="flat" cmpd="sng" algn="ctr">
+                      <a:solidFill>
+                        <a:srgbClr val="EEF3F8"/>
+                      </a:solidFill>
+                      <a:prstDash val="solid"/>
+                      <a:round/>
+                      <a:headEnd type="none" w="med" len="med"/>
+                      <a:tailEnd type="none" w="med" len="med"/>
+                    </a:lnB>
+                    <a:solidFill>
+                      <a:schemeClr val="bg1"/>
+                    </a:solidFill>
+                  </a:tcPr>
+                </a:tc>
+              </a:tr>
+              <a:tr h="640080">
+                <a:tc>
+                  <a:txBody>
+                    <a:bodyPr/>
+                    <a:lstStyle/>
+                    <a:p>
+                      <a:pPr algn="l" indent="0" marL="0">
+                        <a:buNone/>
+                      </a:pPr>
+                      <a:r>
+                        <a:rPr lang="en-US" sz="1400" b="1" dirty="0">
+                          <a:solidFill>
+                            <a:schemeClr val="tx1"/>
+                          </a:solidFill>
+                          <a:latin typeface="Calibri" pitchFamily="34" charset="0"/>
+                          <a:ea typeface="Calibri" pitchFamily="34" charset="-122"/>
+                          <a:cs typeface="Calibri" pitchFamily="34" charset="-120"/>
+                        </a:rPr>
+                        <a:t>Eólicas e solares</a:t>
+                      </a:r>
+                      <a:endParaRPr lang="en-US" sz="1400" dirty="0">
+                        <a:latin typeface="Calibri" charset="0"/>
+                        <a:ea typeface="Calibri" charset="0"/>
+                        <a:cs typeface="Calibri" charset="0"/>
+                      </a:endParaRPr>
+                    </a:p>
+                  </a:txBody>
+                  <a:tcPr marL="91440" marR="91440" marT="45720" marB="45720" anchor="ctr">
+                    <a:lnL w="12700" cap="flat" cmpd="sng" algn="ctr">
+                      <a:solidFill>
+                        <a:srgbClr val="EEF3F8"/>
+                      </a:solidFill>
+                      <a:prstDash val="solid"/>
+                      <a:round/>
+                      <a:headEnd type="none" w="med" len="med"/>
+                      <a:tailEnd type="none" w="med" len="med"/>
+                    </a:lnL>
+                    <a:lnR w="12700" cap="flat" cmpd="sng" algn="ctr">
+                      <a:solidFill>
+                        <a:srgbClr val="EEF3F8"/>
+                      </a:solidFill>
+                      <a:prstDash val="solid"/>
+                      <a:round/>
+                      <a:headEnd type="none" w="med" len="med"/>
+                      <a:tailEnd type="none" w="med" len="med"/>
+                    </a:lnR>
+                    <a:lnT w="12700" cap="flat" cmpd="sng" algn="ctr">
+                      <a:solidFill>
+                        <a:srgbClr val="EEF3F8"/>
+                      </a:solidFill>
+                      <a:prstDash val="solid"/>
+                      <a:round/>
+                      <a:headEnd type="none" w="med" len="med"/>
+                      <a:tailEnd type="none" w="med" len="med"/>
+                    </a:lnT>
+                    <a:lnB w="12700" cap="flat" cmpd="sng" algn="ctr">
+                      <a:solidFill>
+                        <a:srgbClr val="EEF3F8"/>
+                      </a:solidFill>
+                      <a:prstDash val="solid"/>
+                      <a:round/>
+                      <a:headEnd type="none" w="med" len="med"/>
+                      <a:tailEnd type="none" w="med" len="med"/>
+                    </a:lnB>
+                    <a:solidFill>
+                      <a:schemeClr val="bg1"/>
+                    </a:solidFill>
+                  </a:tcPr>
+                </a:tc>
+                <a:tc>
+                  <a:txBody>
+                    <a:bodyPr/>
+                    <a:lstStyle/>
+                    <a:p>
+                      <a:pPr algn="ctr" indent="0" marL="0">
+                        <a:buNone/>
+                      </a:pPr>
+                      <a:r>
+                        <a:rPr lang="en-US" sz="1400" dirty="0">
+                          <a:solidFill>
+                            <a:schemeClr val="tx1"/>
+                          </a:solidFill>
+                          <a:latin typeface="Calibri" pitchFamily="34" charset="0"/>
+                          <a:ea typeface="Calibri" pitchFamily="34" charset="-122"/>
+                          <a:cs typeface="Calibri" pitchFamily="34" charset="-120"/>
+                        </a:rPr>
+                        <a:t>264</a:t>
+                      </a:r>
+                      <a:endParaRPr lang="en-US" sz="1400" dirty="0">
+                        <a:latin typeface="Calibri" charset="0"/>
+                        <a:ea typeface="Calibri" charset="0"/>
+                        <a:cs typeface="Calibri" charset="0"/>
+                      </a:endParaRPr>
+                    </a:p>
+                  </a:txBody>
+                  <a:tcPr marL="91440" marR="91440" marT="45720" marB="45720" anchor="ctr">
+                    <a:lnL w="12700" cap="flat" cmpd="sng" algn="ctr">
+                      <a:solidFill>
+                        <a:srgbClr val="EEF3F8"/>
+                      </a:solidFill>
+                      <a:prstDash val="solid"/>
+                      <a:round/>
+                      <a:headEnd type="none" w="med" len="med"/>
+                      <a:tailEnd type="none" w="med" len="med"/>
+                    </a:lnL>
+                    <a:lnR w="12700" cap="flat" cmpd="sng" algn="ctr">
+                      <a:solidFill>
+                        <a:srgbClr val="EEF3F8"/>
+                      </a:solidFill>
+                      <a:prstDash val="solid"/>
+                      <a:round/>
+                      <a:headEnd type="none" w="med" len="med"/>
+                      <a:tailEnd type="none" w="med" len="med"/>
+                    </a:lnR>
+                    <a:lnT w="12700" cap="flat" cmpd="sng" algn="ctr">
+                      <a:solidFill>
+                        <a:srgbClr val="EEF3F8"/>
+                      </a:solidFill>
+                      <a:prstDash val="solid"/>
+                      <a:round/>
+                      <a:headEnd type="none" w="med" len="med"/>
+                      <a:tailEnd type="none" w="med" len="med"/>
+                    </a:lnT>
+                    <a:lnB w="12700" cap="flat" cmpd="sng" algn="ctr">
+                      <a:solidFill>
+                        <a:srgbClr val="EEF3F8"/>
+                      </a:solidFill>
+                      <a:prstDash val="solid"/>
+                      <a:round/>
+                      <a:headEnd type="none" w="med" len="med"/>
+                      <a:tailEnd type="none" w="med" len="med"/>
+                    </a:lnB>
+                    <a:solidFill>
+                      <a:schemeClr val="bg1"/>
+                    </a:solidFill>
+                  </a:tcPr>
+                </a:tc>
+                <a:tc>
+                  <a:txBody>
+                    <a:bodyPr/>
+                    <a:lstStyle/>
+                    <a:p>
+                      <a:pPr algn="ctr" indent="0" marL="0">
+                        <a:buNone/>
+                      </a:pPr>
+                      <a:r>
+                        <a:rPr lang="en-US" sz="1400" dirty="0">
+                          <a:solidFill>
+                            <a:schemeClr val="tx1"/>
+                          </a:solidFill>
+                          <a:latin typeface="Calibri" pitchFamily="34" charset="0"/>
+                          <a:ea typeface="Calibri" pitchFamily="34" charset="-122"/>
+                          <a:cs typeface="Calibri" pitchFamily="34" charset="-120"/>
+                        </a:rPr>
+                        <a:t>365</a:t>
+                      </a:r>
+                      <a:endParaRPr lang="en-US" sz="1400" dirty="0">
+                        <a:latin typeface="Calibri" charset="0"/>
+                        <a:ea typeface="Calibri" charset="0"/>
+                        <a:cs typeface="Calibri" charset="0"/>
+                      </a:endParaRPr>
+                    </a:p>
+                  </a:txBody>
+                  <a:tcPr marL="91440" marR="91440" marT="45720" marB="45720" anchor="ctr">
+                    <a:lnL w="12700" cap="flat" cmpd="sng" algn="ctr">
+                      <a:solidFill>
+                        <a:srgbClr val="EEF3F8"/>
+                      </a:solidFill>
+                      <a:prstDash val="solid"/>
+                      <a:round/>
+                      <a:headEnd type="none" w="med" len="med"/>
+                      <a:tailEnd type="none" w="med" len="med"/>
+                    </a:lnL>
+                    <a:lnR w="12700" cap="flat" cmpd="sng" algn="ctr">
+                      <a:solidFill>
+                        <a:srgbClr val="EEF3F8"/>
+                      </a:solidFill>
+                      <a:prstDash val="solid"/>
+                      <a:round/>
+                      <a:headEnd type="none" w="med" len="med"/>
+                      <a:tailEnd type="none" w="med" len="med"/>
+                    </a:lnR>
+                    <a:lnT w="12700" cap="flat" cmpd="sng" algn="ctr">
+                      <a:solidFill>
+                        <a:srgbClr val="EEF3F8"/>
+                      </a:solidFill>
+                      <a:prstDash val="solid"/>
+                      <a:round/>
+                      <a:headEnd type="none" w="med" len="med"/>
+                      <a:tailEnd type="none" w="med" len="med"/>
+                    </a:lnT>
+                    <a:lnB w="12700" cap="flat" cmpd="sng" algn="ctr">
+                      <a:solidFill>
+                        <a:srgbClr val="EEF3F8"/>
+                      </a:solidFill>
+                      <a:prstDash val="solid"/>
+                      <a:round/>
+                      <a:headEnd type="none" w="med" len="med"/>
+                      <a:tailEnd type="none" w="med" len="med"/>
+                    </a:lnB>
+                    <a:solidFill>
+                      <a:schemeClr val="bg1"/>
+                    </a:solidFill>
+                  </a:tcPr>
+                </a:tc>
+                <a:tc>
+                  <a:txBody>
+                    <a:bodyPr/>
+                    <a:lstStyle/>
+                    <a:p>
+                      <a:pPr algn="ctr" indent="0" marL="0">
+                        <a:buNone/>
+                      </a:pPr>
+                      <a:r>
+                        <a:rPr lang="en-US" sz="1400" dirty="0">
+                          <a:solidFill>
+                            <a:schemeClr val="tx1"/>
+                          </a:solidFill>
+                          <a:latin typeface="Calibri" pitchFamily="34" charset="0"/>
+                          <a:ea typeface="Calibri" pitchFamily="34" charset="-122"/>
+                          <a:cs typeface="Calibri" pitchFamily="34" charset="-120"/>
+                        </a:rPr>
+                        <a:t>589</a:t>
+                      </a:r>
+                      <a:endParaRPr lang="en-US" sz="1400" dirty="0">
+                        <a:latin typeface="Calibri" charset="0"/>
+                        <a:ea typeface="Calibri" charset="0"/>
+                        <a:cs typeface="Calibri" charset="0"/>
+                      </a:endParaRPr>
+                    </a:p>
+                  </a:txBody>
+                  <a:tcPr marL="91440" marR="91440" marT="45720" marB="45720" anchor="ctr">
+                    <a:lnL w="12700" cap="flat" cmpd="sng" algn="ctr">
+                      <a:solidFill>
+                        <a:srgbClr val="EEF3F8"/>
+                      </a:solidFill>
+                      <a:prstDash val="solid"/>
+                      <a:round/>
+                      <a:headEnd type="none" w="med" len="med"/>
+                      <a:tailEnd type="none" w="med" len="med"/>
+                    </a:lnL>
+                    <a:lnR w="12700" cap="flat" cmpd="sng" algn="ctr">
+                      <a:solidFill>
+                        <a:srgbClr val="EEF3F8"/>
+                      </a:solidFill>
+                      <a:prstDash val="solid"/>
+                      <a:round/>
+                      <a:headEnd type="none" w="med" len="med"/>
+                      <a:tailEnd type="none" w="med" len="med"/>
+                    </a:lnR>
+                    <a:lnT w="12700" cap="flat" cmpd="sng" algn="ctr">
+                      <a:solidFill>
+                        <a:srgbClr val="EEF3F8"/>
+                      </a:solidFill>
+                      <a:prstDash val="solid"/>
+                      <a:round/>
+                      <a:headEnd type="none" w="med" len="med"/>
+                      <a:tailEnd type="none" w="med" len="med"/>
+                    </a:lnT>
+                    <a:lnB w="12700" cap="flat" cmpd="sng" algn="ctr">
+                      <a:solidFill>
+                        <a:srgbClr val="EEF3F8"/>
+                      </a:solidFill>
+                      <a:prstDash val="solid"/>
+                      <a:round/>
+                      <a:headEnd type="none" w="med" len="med"/>
+                      <a:tailEnd type="none" w="med" len="med"/>
+                    </a:lnB>
+                    <a:solidFill>
+                      <a:schemeClr val="bg1"/>
+                    </a:solidFill>
+                  </a:tcPr>
+                </a:tc>
+              </a:tr>
+              <a:tr h="640080">
+                <a:tc>
+                  <a:txBody>
+                    <a:bodyPr/>
+                    <a:lstStyle/>
+                    <a:p>
+                      <a:pPr algn="l" indent="0" marL="0">
+                        <a:buNone/>
+                      </a:pPr>
+                      <a:r>
+                        <a:rPr lang="en-US" sz="1400" b="1" dirty="0">
+                          <a:solidFill>
+                            <a:schemeClr val="tx1"/>
+                          </a:solidFill>
+                          <a:latin typeface="Calibri" pitchFamily="34" charset="0"/>
+                          <a:ea typeface="Calibri" pitchFamily="34" charset="-122"/>
+                          <a:cs typeface="Calibri" pitchFamily="34" charset="-120"/>
+                        </a:rPr>
+                        <a:t>Térmicas e demais</a:t>
+                      </a:r>
+                      <a:endParaRPr lang="en-US" sz="1400" dirty="0">
+                        <a:latin typeface="Calibri" charset="0"/>
+                        <a:ea typeface="Calibri" charset="0"/>
+                        <a:cs typeface="Calibri" charset="0"/>
+                      </a:endParaRPr>
+                    </a:p>
+                  </a:txBody>
+                  <a:tcPr marL="91440" marR="91440" marT="45720" marB="45720" anchor="ctr">
+                    <a:lnL w="12700" cap="flat" cmpd="sng" algn="ctr">
+                      <a:solidFill>
+                        <a:srgbClr val="EEF3F8"/>
+                      </a:solidFill>
+                      <a:prstDash val="solid"/>
+                      <a:round/>
+                      <a:headEnd type="none" w="med" len="med"/>
+                      <a:tailEnd type="none" w="med" len="med"/>
+                    </a:lnL>
+                    <a:lnR w="12700" cap="flat" cmpd="sng" algn="ctr">
+                      <a:solidFill>
+                        <a:srgbClr val="EEF3F8"/>
+                      </a:solidFill>
+                      <a:prstDash val="solid"/>
+                      <a:round/>
+                      <a:headEnd type="none" w="med" len="med"/>
+                      <a:tailEnd type="none" w="med" len="med"/>
+                    </a:lnR>
+                    <a:lnT w="12700" cap="flat" cmpd="sng" algn="ctr">
+                      <a:solidFill>
+                        <a:srgbClr val="EEF3F8"/>
+                      </a:solidFill>
+                      <a:prstDash val="solid"/>
+                      <a:round/>
+                      <a:headEnd type="none" w="med" len="med"/>
+                      <a:tailEnd type="none" w="med" len="med"/>
+                    </a:lnT>
+                    <a:lnB w="12700" cap="flat" cmpd="sng" algn="ctr">
+                      <a:solidFill>
+                        <a:srgbClr val="EEF3F8"/>
+                      </a:solidFill>
+                      <a:prstDash val="solid"/>
+                      <a:round/>
+                      <a:headEnd type="none" w="med" len="med"/>
+                      <a:tailEnd type="none" w="med" len="med"/>
+                    </a:lnB>
+                    <a:solidFill>
+                      <a:schemeClr val="bg1"/>
+                    </a:solidFill>
+                  </a:tcPr>
+                </a:tc>
+                <a:tc>
+                  <a:txBody>
+                    <a:bodyPr/>
+                    <a:lstStyle/>
+                    <a:p>
+                      <a:pPr algn="ctr" indent="0" marL="0">
+                        <a:buNone/>
+                      </a:pPr>
+                      <a:r>
+                        <a:rPr lang="en-US" sz="1400" dirty="0">
+                          <a:solidFill>
+                            <a:schemeClr val="tx1"/>
+                          </a:solidFill>
+                          <a:latin typeface="Calibri" pitchFamily="34" charset="0"/>
+                          <a:ea typeface="Calibri" pitchFamily="34" charset="-122"/>
+                          <a:cs typeface="Calibri" pitchFamily="34" charset="-120"/>
+                        </a:rPr>
+                        <a:t>219</a:t>
+                      </a:r>
+                      <a:endParaRPr lang="en-US" sz="1400" dirty="0">
+                        <a:latin typeface="Calibri" charset="0"/>
+                        <a:ea typeface="Calibri" charset="0"/>
+                        <a:cs typeface="Calibri" charset="0"/>
+                      </a:endParaRPr>
+                    </a:p>
+                  </a:txBody>
+                  <a:tcPr marL="91440" marR="91440" marT="45720" marB="45720" anchor="ctr">
+                    <a:lnL w="12700" cap="flat" cmpd="sng" algn="ctr">
+                      <a:solidFill>
+                        <a:srgbClr val="EEF3F8"/>
+                      </a:solidFill>
+                      <a:prstDash val="solid"/>
+                      <a:round/>
+                      <a:headEnd type="none" w="med" len="med"/>
+                      <a:tailEnd type="none" w="med" len="med"/>
+                    </a:lnL>
+                    <a:lnR w="12700" cap="flat" cmpd="sng" algn="ctr">
+                      <a:solidFill>
+                        <a:srgbClr val="EEF3F8"/>
+                      </a:solidFill>
+                      <a:prstDash val="solid"/>
+                      <a:round/>
+                      <a:headEnd type="none" w="med" len="med"/>
+                      <a:tailEnd type="none" w="med" len="med"/>
+                    </a:lnR>
+                    <a:lnT w="12700" cap="flat" cmpd="sng" algn="ctr">
+                      <a:solidFill>
+                        <a:srgbClr val="EEF3F8"/>
+                      </a:solidFill>
+                      <a:prstDash val="solid"/>
+                      <a:round/>
+                      <a:headEnd type="none" w="med" len="med"/>
+                      <a:tailEnd type="none" w="med" len="med"/>
+                    </a:lnT>
+                    <a:lnB w="12700" cap="flat" cmpd="sng" algn="ctr">
+                      <a:solidFill>
+                        <a:srgbClr val="EEF3F8"/>
+                      </a:solidFill>
+                      <a:prstDash val="solid"/>
+                      <a:round/>
+                      <a:headEnd type="none" w="med" len="med"/>
+                      <a:tailEnd type="none" w="med" len="med"/>
+                    </a:lnB>
+                    <a:solidFill>
+                      <a:schemeClr val="bg1"/>
+                    </a:solidFill>
+                  </a:tcPr>
+                </a:tc>
+                <a:tc>
+                  <a:txBody>
+                    <a:bodyPr/>
+                    <a:lstStyle/>
+                    <a:p>
+                      <a:pPr algn="ctr" indent="0" marL="0">
+                        <a:buNone/>
+                      </a:pPr>
+                      <a:r>
+                        <a:rPr lang="en-US" sz="1400" dirty="0">
+                          <a:solidFill>
+                            <a:schemeClr val="tx1"/>
+                          </a:solidFill>
+                          <a:latin typeface="Calibri" pitchFamily="34" charset="0"/>
+                          <a:ea typeface="Calibri" pitchFamily="34" charset="-122"/>
+                          <a:cs typeface="Calibri" pitchFamily="34" charset="-120"/>
+                        </a:rPr>
+                        <a:t>189</a:t>
+                      </a:r>
+                      <a:endParaRPr lang="en-US" sz="1400" dirty="0">
+                        <a:latin typeface="Calibri" charset="0"/>
+                        <a:ea typeface="Calibri" charset="0"/>
+                        <a:cs typeface="Calibri" charset="0"/>
+                      </a:endParaRPr>
+                    </a:p>
+                  </a:txBody>
+                  <a:tcPr marL="91440" marR="91440" marT="45720" marB="45720" anchor="ctr">
+                    <a:lnL w="12700" cap="flat" cmpd="sng" algn="ctr">
+                      <a:solidFill>
+                        <a:srgbClr val="EEF3F8"/>
+                      </a:solidFill>
+                      <a:prstDash val="solid"/>
+                      <a:round/>
+                      <a:headEnd type="none" w="med" len="med"/>
+                      <a:tailEnd type="none" w="med" len="med"/>
+                    </a:lnL>
+                    <a:lnR w="12700" cap="flat" cmpd="sng" algn="ctr">
+                      <a:solidFill>
+                        <a:srgbClr val="EEF3F8"/>
+                      </a:solidFill>
+                      <a:prstDash val="solid"/>
+                      <a:round/>
+                      <a:headEnd type="none" w="med" len="med"/>
+                      <a:tailEnd type="none" w="med" len="med"/>
+                    </a:lnR>
+                    <a:lnT w="12700" cap="flat" cmpd="sng" algn="ctr">
+                      <a:solidFill>
+                        <a:srgbClr val="EEF3F8"/>
+                      </a:solidFill>
+                      <a:prstDash val="solid"/>
+                      <a:round/>
+                      <a:headEnd type="none" w="med" len="med"/>
+                      <a:tailEnd type="none" w="med" len="med"/>
+                    </a:lnT>
+                    <a:lnB w="12700" cap="flat" cmpd="sng" algn="ctr">
+                      <a:solidFill>
+                        <a:srgbClr val="EEF3F8"/>
+                      </a:solidFill>
+                      <a:prstDash val="solid"/>
+                      <a:round/>
+                      <a:headEnd type="none" w="med" len="med"/>
+                      <a:tailEnd type="none" w="med" len="med"/>
+                    </a:lnB>
+                    <a:solidFill>
+                      <a:schemeClr val="bg1"/>
+                    </a:solidFill>
+                  </a:tcPr>
+                </a:tc>
+                <a:tc>
+                  <a:txBody>
+                    <a:bodyPr/>
+                    <a:lstStyle/>
+                    <a:p>
+                      <a:pPr algn="ctr" indent="0" marL="0">
+                        <a:buNone/>
+                      </a:pPr>
+                      <a:r>
+                        <a:rPr lang="en-US" sz="1400" dirty="0">
+                          <a:solidFill>
+                            <a:schemeClr val="tx1"/>
+                          </a:solidFill>
+                          <a:latin typeface="Calibri" pitchFamily="34" charset="0"/>
+                          <a:ea typeface="Calibri" pitchFamily="34" charset="-122"/>
+                          <a:cs typeface="Calibri" pitchFamily="34" charset="-120"/>
+                        </a:rPr>
+                        <a:t>122</a:t>
+                      </a:r>
+                      <a:endParaRPr lang="en-US" sz="1400" dirty="0">
+                        <a:latin typeface="Calibri" charset="0"/>
+                        <a:ea typeface="Calibri" charset="0"/>
+                        <a:cs typeface="Calibri" charset="0"/>
+                      </a:endParaRPr>
+                    </a:p>
+                  </a:txBody>
+                  <a:tcPr marL="91440" marR="91440" marT="45720" marB="45720" anchor="ctr">
+                    <a:lnL w="12700" cap="flat" cmpd="sng" algn="ctr">
+                      <a:solidFill>
+                        <a:srgbClr val="EEF3F8"/>
+                      </a:solidFill>
+                      <a:prstDash val="solid"/>
+                      <a:round/>
+                      <a:headEnd type="none" w="med" len="med"/>
+                      <a:tailEnd type="none" w="med" len="med"/>
+                    </a:lnL>
+                    <a:lnR w="12700" cap="flat" cmpd="sng" algn="ctr">
+                      <a:solidFill>
+                        <a:srgbClr val="EEF3F8"/>
+                      </a:solidFill>
+                      <a:prstDash val="solid"/>
+                      <a:round/>
+                      <a:headEnd type="none" w="med" len="med"/>
+                      <a:tailEnd type="none" w="med" len="med"/>
+                    </a:lnR>
+                    <a:lnT w="12700" cap="flat" cmpd="sng" algn="ctr">
+                      <a:solidFill>
+                        <a:srgbClr val="EEF3F8"/>
+                      </a:solidFill>
+                      <a:prstDash val="solid"/>
+                      <a:round/>
+                      <a:headEnd type="none" w="med" len="med"/>
+                      <a:tailEnd type="none" w="med" len="med"/>
+                    </a:lnT>
+                    <a:lnB w="12700" cap="flat" cmpd="sng" algn="ctr">
+                      <a:solidFill>
+                        <a:srgbClr val="EEF3F8"/>
+                      </a:solidFill>
+                      <a:prstDash val="solid"/>
+                      <a:round/>
+                      <a:headEnd type="none" w="med" len="med"/>
+                      <a:tailEnd type="none" w="med" len="med"/>
+                    </a:lnB>
+                    <a:solidFill>
+                      <a:schemeClr val="bg1"/>
+                    </a:solidFill>
+                  </a:tcPr>
+                </a:tc>
+              </a:tr>
+              <a:tr h="640080">
+                <a:tc>
+                  <a:txBody>
+                    <a:bodyPr/>
+                    <a:lstStyle/>
+                    <a:p>
+                      <a:pPr algn="l" indent="0" marL="0">
+                        <a:buNone/>
+                      </a:pPr>
+                      <a:r>
+                        <a:rPr lang="en-US" sz="1400" b="1" dirty="0">
+                          <a:solidFill>
+                            <a:schemeClr val="tx1"/>
+                          </a:solidFill>
+                          <a:latin typeface="Calibri" pitchFamily="34" charset="0"/>
+                          <a:ea typeface="Calibri" pitchFamily="34" charset="-122"/>
+                          <a:cs typeface="Calibri" pitchFamily="34" charset="-120"/>
+                        </a:rPr>
+                        <a:t>Soma</a:t>
+                      </a:r>
+                      <a:endParaRPr lang="en-US" sz="1400" dirty="0">
+                        <a:latin typeface="Calibri" charset="0"/>
+                        <a:ea typeface="Calibri" charset="0"/>
+                        <a:cs typeface="Calibri" charset="0"/>
+                      </a:endParaRPr>
+                    </a:p>
+                  </a:txBody>
+                  <a:tcPr marL="91440" marR="91440" marT="45720" marB="45720" anchor="ctr">
+                    <a:lnL w="12700" cap="flat" cmpd="sng" algn="ctr">
+                      <a:solidFill>
+                        <a:srgbClr val="EEF3F8"/>
+                      </a:solidFill>
+                      <a:prstDash val="solid"/>
+                      <a:round/>
+                      <a:headEnd type="none" w="med" len="med"/>
+                      <a:tailEnd type="none" w="med" len="med"/>
+                    </a:lnL>
+                    <a:lnR w="12700" cap="flat" cmpd="sng" algn="ctr">
+                      <a:solidFill>
+                        <a:srgbClr val="EEF3F8"/>
+                      </a:solidFill>
+                      <a:prstDash val="solid"/>
+                      <a:round/>
+                      <a:headEnd type="none" w="med" len="med"/>
+                      <a:tailEnd type="none" w="med" len="med"/>
+                    </a:lnR>
+                    <a:lnT w="12700" cap="flat" cmpd="sng" algn="ctr">
+                      <a:solidFill>
+                        <a:srgbClr val="EEF3F8"/>
+                      </a:solidFill>
+                      <a:prstDash val="solid"/>
+                      <a:round/>
+                      <a:headEnd type="none" w="med" len="med"/>
+                      <a:tailEnd type="none" w="med" len="med"/>
+                    </a:lnT>
+                    <a:lnB w="12700" cap="flat" cmpd="sng" algn="ctr">
+                      <a:solidFill>
+                        <a:srgbClr val="EEF3F8"/>
+                      </a:solidFill>
+                      <a:prstDash val="solid"/>
+                      <a:round/>
+                      <a:headEnd type="none" w="med" len="med"/>
+                      <a:tailEnd type="none" w="med" len="med"/>
+                    </a:lnB>
+                    <a:solidFill>
+                      <a:schemeClr val="bg2"/>
+                    </a:solidFill>
+                  </a:tcPr>
+                </a:tc>
+                <a:tc>
+                  <a:txBody>
+                    <a:bodyPr/>
+                    <a:lstStyle/>
+                    <a:p>
+                      <a:pPr algn="ctr" indent="0" marL="0">
+                        <a:buNone/>
+                      </a:pPr>
+                      <a:r>
+                        <a:rPr lang="en-US" sz="1400" b="1" dirty="0">
+                          <a:solidFill>
+                            <a:schemeClr val="tx1"/>
+                          </a:solidFill>
+                          <a:latin typeface="Calibri" pitchFamily="34" charset="0"/>
+                          <a:ea typeface="Calibri" pitchFamily="34" charset="-122"/>
+                          <a:cs typeface="Calibri" pitchFamily="34" charset="-120"/>
+                        </a:rPr>
+                        <a:t>1.000</a:t>
+                      </a:r>
+                      <a:endParaRPr lang="en-US" sz="1400" dirty="0">
+                        <a:latin typeface="Calibri" charset="0"/>
+                        <a:ea typeface="Calibri" charset="0"/>
+                        <a:cs typeface="Calibri" charset="0"/>
+                      </a:endParaRPr>
+                    </a:p>
+                  </a:txBody>
+                  <a:tcPr marL="91440" marR="91440" marT="45720" marB="45720" anchor="ctr">
+                    <a:lnL w="12700" cap="flat" cmpd="sng" algn="ctr">
+                      <a:solidFill>
+                        <a:srgbClr val="EEF3F8"/>
+                      </a:solidFill>
+                      <a:prstDash val="solid"/>
+                      <a:round/>
+                      <a:headEnd type="none" w="med" len="med"/>
+                      <a:tailEnd type="none" w="med" len="med"/>
+                    </a:lnL>
+                    <a:lnR w="12700" cap="flat" cmpd="sng" algn="ctr">
+                      <a:solidFill>
+                        <a:srgbClr val="EEF3F8"/>
+                      </a:solidFill>
+                      <a:prstDash val="solid"/>
+                      <a:round/>
+                      <a:headEnd type="none" w="med" len="med"/>
+                      <a:tailEnd type="none" w="med" len="med"/>
+                    </a:lnR>
+                    <a:lnT w="12700" cap="flat" cmpd="sng" algn="ctr">
+                      <a:solidFill>
+                        <a:srgbClr val="EEF3F8"/>
+                      </a:solidFill>
+                      <a:prstDash val="solid"/>
+                      <a:round/>
+                      <a:headEnd type="none" w="med" len="med"/>
+                      <a:tailEnd type="none" w="med" len="med"/>
+                    </a:lnT>
+                    <a:lnB w="12700" cap="flat" cmpd="sng" algn="ctr">
+                      <a:solidFill>
+                        <a:srgbClr val="EEF3F8"/>
+                      </a:solidFill>
+                      <a:prstDash val="solid"/>
+                      <a:round/>
+                      <a:headEnd type="none" w="med" len="med"/>
+                      <a:tailEnd type="none" w="med" len="med"/>
+                    </a:lnB>
+                    <a:solidFill>
+                      <a:schemeClr val="bg2"/>
+                    </a:solidFill>
+                  </a:tcPr>
+                </a:tc>
+                <a:tc>
+                  <a:txBody>
+                    <a:bodyPr/>
+                    <a:lstStyle/>
+                    <a:p>
+                      <a:pPr algn="ctr" indent="0" marL="0">
+                        <a:buNone/>
+                      </a:pPr>
+                      <a:r>
+                        <a:rPr lang="en-US" sz="1400" b="1" dirty="0">
+                          <a:solidFill>
+                            <a:schemeClr val="tx1"/>
+                          </a:solidFill>
+                          <a:latin typeface="Calibri" pitchFamily="34" charset="0"/>
+                          <a:ea typeface="Calibri" pitchFamily="34" charset="-122"/>
+                          <a:cs typeface="Calibri" pitchFamily="34" charset="-120"/>
+                        </a:rPr>
+                        <a:t>1.000</a:t>
+                      </a:r>
+                      <a:endParaRPr lang="en-US" sz="1400" dirty="0">
+                        <a:latin typeface="Calibri" charset="0"/>
+                        <a:ea typeface="Calibri" charset="0"/>
+                        <a:cs typeface="Calibri" charset="0"/>
+                      </a:endParaRPr>
+                    </a:p>
+                  </a:txBody>
+                  <a:tcPr marL="91440" marR="91440" marT="45720" marB="45720" anchor="ctr">
+                    <a:lnL w="12700" cap="flat" cmpd="sng" algn="ctr">
+                      <a:solidFill>
+                        <a:srgbClr val="EEF3F8"/>
+                      </a:solidFill>
+                      <a:prstDash val="solid"/>
+                      <a:round/>
+                      <a:headEnd type="none" w="med" len="med"/>
+                      <a:tailEnd type="none" w="med" len="med"/>
+                    </a:lnL>
+                    <a:lnR w="12700" cap="flat" cmpd="sng" algn="ctr">
+                      <a:solidFill>
+                        <a:srgbClr val="EEF3F8"/>
+                      </a:solidFill>
+                      <a:prstDash val="solid"/>
+                      <a:round/>
+                      <a:headEnd type="none" w="med" len="med"/>
+                      <a:tailEnd type="none" w="med" len="med"/>
+                    </a:lnR>
+                    <a:lnT w="12700" cap="flat" cmpd="sng" algn="ctr">
+                      <a:solidFill>
+                        <a:srgbClr val="EEF3F8"/>
+                      </a:solidFill>
+                      <a:prstDash val="solid"/>
+                      <a:round/>
+                      <a:headEnd type="none" w="med" len="med"/>
+                      <a:tailEnd type="none" w="med" len="med"/>
+                    </a:lnT>
+                    <a:lnB w="12700" cap="flat" cmpd="sng" algn="ctr">
+                      <a:solidFill>
+                        <a:srgbClr val="EEF3F8"/>
+                      </a:solidFill>
+                      <a:prstDash val="solid"/>
+                      <a:round/>
+                      <a:headEnd type="none" w="med" len="med"/>
+                      <a:tailEnd type="none" w="med" len="med"/>
+                    </a:lnB>
+                    <a:solidFill>
+                      <a:schemeClr val="bg2"/>
+                    </a:solidFill>
+                  </a:tcPr>
+                </a:tc>
+                <a:tc>
+                  <a:txBody>
+                    <a:bodyPr/>
+                    <a:lstStyle/>
+                    <a:p>
+                      <a:pPr algn="ctr" indent="0" marL="0">
+                        <a:buNone/>
+                      </a:pPr>
+                      <a:r>
+                        <a:rPr lang="en-US" sz="1400" b="1" dirty="0">
+                          <a:solidFill>
+                            <a:schemeClr val="tx1"/>
+                          </a:solidFill>
+                          <a:latin typeface="Calibri" pitchFamily="34" charset="0"/>
+                          <a:ea typeface="Calibri" pitchFamily="34" charset="-122"/>
+                          <a:cs typeface="Calibri" pitchFamily="34" charset="-120"/>
+                        </a:rPr>
+                        <a:t>1.000</a:t>
+                      </a:r>
+                      <a:endParaRPr lang="en-US" sz="1400" dirty="0">
+                        <a:latin typeface="Calibri" charset="0"/>
+                        <a:ea typeface="Calibri" charset="0"/>
+                        <a:cs typeface="Calibri" charset="0"/>
+                      </a:endParaRPr>
+                    </a:p>
+                  </a:txBody>
+                  <a:tcPr marL="91440" marR="91440" marT="45720" marB="45720" anchor="ctr">
+                    <a:lnL w="12700" cap="flat" cmpd="sng" algn="ctr">
+                      <a:solidFill>
+                        <a:srgbClr val="EEF3F8"/>
+                      </a:solidFill>
+                      <a:prstDash val="solid"/>
+                      <a:round/>
+                      <a:headEnd type="none" w="med" len="med"/>
+                      <a:tailEnd type="none" w="med" len="med"/>
+                    </a:lnL>
+                    <a:lnR w="12700" cap="flat" cmpd="sng" algn="ctr">
+                      <a:solidFill>
+                        <a:srgbClr val="EEF3F8"/>
+                      </a:solidFill>
+                      <a:prstDash val="solid"/>
+                      <a:round/>
+                      <a:headEnd type="none" w="med" len="med"/>
+                      <a:tailEnd type="none" w="med" len="med"/>
+                    </a:lnR>
+                    <a:lnT w="12700" cap="flat" cmpd="sng" algn="ctr">
+                      <a:solidFill>
+                        <a:srgbClr val="EEF3F8"/>
+                      </a:solidFill>
+                      <a:prstDash val="solid"/>
+                      <a:round/>
+                      <a:headEnd type="none" w="med" len="med"/>
+                      <a:tailEnd type="none" w="med" len="med"/>
+                    </a:lnT>
+                    <a:lnB w="12700" cap="flat" cmpd="sng" algn="ctr">
+                      <a:solidFill>
+                        <a:srgbClr val="EEF3F8"/>
+                      </a:solidFill>
+                      <a:prstDash val="solid"/>
+                      <a:round/>
+                      <a:headEnd type="none" w="med" len="med"/>
+                      <a:tailEnd type="none" w="med" len="med"/>
+                    </a:lnB>
+                    <a:solidFill>
+                      <a:schemeClr val="bg2"/>
+                    </a:solidFill>
+                  </a:tcPr>
+                </a:tc>
+              </a:tr>
+            </a:tbl>
+          </a:graphicData>
+        </a:graphic>
+      </p:graphicFrame>
+      <p:sp>
+        <p:nvSpPr>
+          <p:cNvPr id="5" name="Text 2"/>
+          <p:cNvSpPr txBox="1"/>
+          <p:nvPr/>
+        </p:nvSpPr>
+        <p:spPr>
+          <a:xfrm>
+            <a:off x="548640" y="5029200"/>
+            <a:ext cx="5669280" cy="1188720"/>
+          </a:xfrm>
+          <a:prstGeom prst="rect">
+            <a:avLst/>
+          </a:prstGeom>
+          <a:noFill/>
+          <a:ln/>
+        </p:spPr>
+        <p:txBody>
+          <a:bodyPr wrap="square" lIns="0" tIns="0" rIns="0" bIns="0" rtlCol="0" anchor="t"/>
+          <a:lstStyle/>
+          <a:p>
+            <a:pPr indent="0" marL="0">
+              <a:buNone/>
+            </a:pPr>
+            <a:r>
+              <a:rPr lang="en-US" sz="1400" dirty="0">
+                <a:solidFill>
+                  <a:schemeClr val="tx2"/>
+                </a:solidFill>
+              </a:rPr>
+              <a:t>Conversão: parcela (%) × 10. Exemplo: eólicas e solares no cenário B, 36,5% de R$ 1 bi = R$ 365 mi. O encargo total depende do deságio do leilão e ainda não é conhecido.</a:t>
+            </a:r>
+            <a:endParaRPr lang="en-US" sz="1400" dirty="0"/>
+          </a:p>
+        </p:txBody>
+      </p:sp>
+      <p:sp>
+        <p:nvSpPr>
+          <p:cNvPr id="6" name="Limits card"/>
+          <p:cNvSpPr/>
+          <p:nvPr/>
+        </p:nvSpPr>
+        <p:spPr>
+          <a:xfrm>
+            <a:off x="6583680" y="1417320"/>
+            <a:ext cx="5059375" cy="4800600"/>
+          </a:xfrm>
+          <a:prstGeom prst="roundRect">
+            <a:avLst>
+              <a:gd name="adj" fmla="val 2286"/>
+            </a:avLst>
+          </a:prstGeom>
+          <a:solidFill>
+            <a:schemeClr val="bg1"/>
+          </a:solidFill>
+          <a:ln w="12700">
+            <a:solidFill>
+              <a:schemeClr val="bg1"/>
+            </a:solidFill>
+            <a:prstDash val="solid"/>
+          </a:ln>
+          <a:effectLst>
+            <a:outerShdw sx="100000" sy="100000" kx="0" ky="0" algn="bl" rotWithShape="0" blurRad="101600" dist="25400" dir="5400000">
+              <a:srgbClr val="0B1A2E">
+                <a:alpha val="12000"/>
+              </a:srgbClr>
+            </a:outerShdw>
+          </a:effectLst>
+        </p:spPr>
+      </p:sp>
+      <p:sp>
+        <p:nvSpPr>
+          <p:cNvPr id="7" name="Icon circle"/>
+          <p:cNvSpPr/>
+          <p:nvPr/>
+        </p:nvSpPr>
+        <p:spPr>
+          <a:xfrm>
+            <a:off x="6858000" y="1645920"/>
+            <a:ext cx="548640" cy="548640"/>
+          </a:xfrm>
+          <a:prstGeom prst="ellipse">
+            <a:avLst/>
+          </a:prstGeom>
+          <a:solidFill>
+            <a:schemeClr val="accent4"/>
+          </a:solidFill>
+          <a:ln w="12700">
+            <a:solidFill>
+              <a:schemeClr val="accent4"/>
+            </a:solidFill>
+            <a:prstDash val="solid"/>
+          </a:ln>
+        </p:spPr>
+      </p:sp>
+      <p:pic>
+        <p:nvPicPr>
+          <p:cNvPr id="8" name="Image 0" descr="FaSearch">    </p:cNvPr>
+          <p:cNvPicPr>
+            <a:picLocks noChangeAspect="1"/>
+          </p:cNvPicPr>
+          <p:nvPr/>
+        </p:nvPicPr>
+        <p:blipFill>
+          <a:blip r:embed="rId1"/>
+          <a:stretch>
+            <a:fillRect/>
+          </a:stretch>
+        </p:blipFill>
+        <p:spPr>
+          <a:xfrm>
+            <a:off x="6995160" y="1783080"/>
+            <a:ext cx="274320" cy="274320"/>
+          </a:xfrm>
+          <a:prstGeom prst="rect">
+            <a:avLst/>
+          </a:prstGeom>
+        </p:spPr>
+      </p:pic>
+      <p:sp>
+        <p:nvSpPr>
+          <p:cNvPr id="9" name="Text 5"/>
+          <p:cNvSpPr txBox="1"/>
+          <p:nvPr/>
+        </p:nvSpPr>
+        <p:spPr>
+          <a:xfrm>
+            <a:off x="7589520" y="1645920"/>
+            <a:ext cx="3870655" cy="548640"/>
+          </a:xfrm>
+          <a:prstGeom prst="rect">
+            <a:avLst/>
+          </a:prstGeom>
+          <a:noFill/>
+          <a:ln/>
+        </p:spPr>
+        <p:txBody>
+          <a:bodyPr wrap="square" lIns="0" tIns="0" rIns="0" bIns="0" rtlCol="0" anchor="ctr"/>
+          <a:lstStyle/>
+          <a:p>
+            <a:pPr indent="0" marL="0">
+              <a:buNone/>
+            </a:pPr>
+            <a:r>
+              <a:rPr lang="en-US" sz="1800" b="1" dirty="0">
+                <a:solidFill>
+                  <a:schemeClr val="tx1"/>
+                </a:solidFill>
+                <a:latin typeface="Cambria" pitchFamily="34" charset="0"/>
+                <a:ea typeface="Cambria" pitchFamily="34" charset="-122"/>
+                <a:cs typeface="Cambria" pitchFamily="34" charset="-120"/>
+              </a:rPr>
+              <a:t>Limitações</a:t>
+            </a:r>
+            <a:endParaRPr lang="en-US" sz="1800" dirty="0"/>
+          </a:p>
+        </p:txBody>
+      </p:sp>
+      <p:sp>
+        <p:nvSpPr>
+          <p:cNvPr id="10" name="Text 6"/>
+          <p:cNvSpPr txBox="1"/>
+          <p:nvPr/>
+        </p:nvSpPr>
+        <p:spPr>
+          <a:xfrm>
+            <a:off x="6858000" y="2468880"/>
+            <a:ext cx="4510735" cy="3566160"/>
+          </a:xfrm>
+          <a:prstGeom prst="rect">
+            <a:avLst/>
+          </a:prstGeom>
+          <a:noFill/>
+          <a:ln/>
+        </p:spPr>
+        <p:txBody>
+          <a:bodyPr wrap="square" lIns="0" tIns="0" rIns="0" bIns="0" rtlCol="0" anchor="t"/>
+          <a:lstStyle/>
+          <a:p>
+            <a:pPr marL="342900" indent="-342900">
+              <a:spcAft>
+                <a:spcPts val="900"/>
+              </a:spcAft>
+              <a:buSzPct val="100000"/>
+              <a:buChar char="•"/>
+            </a:pPr>
+            <a:r>
+              <a:rPr lang="en-US" sz="1400" dirty="0">
+                <a:solidFill>
+                  <a:schemeClr val="tx1"/>
+                </a:solidFill>
+              </a:rPr>
+              <a:t>Os critérios de cada patamar e a classificação das usinas pelo ONS não foram localizados.</a:t>
+            </a:r>
+            <a:endParaRPr lang="en-US" sz="1400" dirty="0"/>
+          </a:p>
+          <a:p>
+            <a:pPr marL="342900" indent="-342900">
+              <a:spcAft>
+                <a:spcPts val="900"/>
+              </a:spcAft>
+              <a:buSzPct val="100000"/>
+              <a:buChar char="•"/>
+            </a:pPr>
+            <a:r>
+              <a:rPr lang="en-US" sz="1400" dirty="0">
+                <a:solidFill>
+                  <a:schemeClr val="tx1"/>
+                </a:solidFill>
+              </a:rPr>
+              <a:t>Hidrelétricas e térmicas recebem o mesmo k em cada cenário, o que na prática não ocorre.</a:t>
+            </a:r>
+            <a:endParaRPr lang="en-US" sz="1400" dirty="0"/>
+          </a:p>
+          <a:p>
+            <a:pPr marL="342900" indent="-342900">
+              <a:spcAft>
+                <a:spcPts val="900"/>
+              </a:spcAft>
+              <a:buSzPct val="100000"/>
+              <a:buChar char="•"/>
+            </a:pPr>
+            <a:r>
+              <a:rPr lang="en-US" sz="1400" dirty="0">
+                <a:solidFill>
+                  <a:schemeClr val="tx1"/>
+                </a:solidFill>
+              </a:rPr>
+              <a:t>Térmicas e demais é um resíduo e pode incluir MMGD, que fica fora do rateio.</a:t>
+            </a:r>
+            <a:endParaRPr lang="en-US" sz="1400" dirty="0"/>
+          </a:p>
+          <a:p>
+            <a:pPr marL="342900" indent="-342900">
+              <a:spcAft>
+                <a:spcPts val="900"/>
+              </a:spcAft>
+              <a:buSzPct val="100000"/>
+              <a:buChar char="•"/>
+            </a:pPr>
+            <a:r>
+              <a:rPr lang="en-US" sz="1400" dirty="0">
+                <a:solidFill>
+                  <a:schemeClr val="tx1"/>
+                </a:solidFill>
+              </a:rPr>
+              <a:t>A base da proposta é a energia associada de cada agente, e não a participação anual na geração.</a:t>
+            </a:r>
+            <a:endParaRPr lang="en-US" sz="1400" dirty="0"/>
+          </a:p>
+          <a:p>
+            <a:pPr marL="342900" indent="-342900">
+              <a:spcAft>
+                <a:spcPts val="900"/>
+              </a:spcAft>
+              <a:buSzPct val="100000"/>
+              <a:buChar char="•"/>
+            </a:pPr>
+            <a:r>
+              <a:rPr lang="en-US" sz="1400" dirty="0">
+                <a:solidFill>
+                  <a:schemeClr val="tx1"/>
+                </a:solidFill>
+              </a:rPr>
+              <a:t>Os patamares vêm de resumos setoriais, e a proposta ainda está em consulta.</a:t>
+            </a:r>
+            <a:endParaRPr lang="en-US" sz="1400" dirty="0"/>
+          </a:p>
+        </p:txBody>
+      </p:sp>
+      <p:sp>
+        <p:nvSpPr>
+          <p:cNvPr id="25" name="Slide Number Placeholder 0"/>
+          <p:cNvSpPr>
+            <a:spLocks noGrp="1"/>
+          </p:cNvSpPr>
+          <p:nvPr>
+            <p:ph type="sldNum" sz="quarter" idx="4294967295"/>
+          </p:nvPr>
+        </p:nvSpPr>
+        <p:spPr>
+          <a:xfrm>
+            <a:off x="11155680" y="6400800"/>
+            <a:ext cx="548640" cy="274320"/>
+          </a:xfrm>
+          <a:prstGeom prst="rect">
+            <a:avLst/>
+          </a:prstGeom>
+          <a:extLst>
+            <a:ext uri="{C572A759-6A51-4108-AA02-DFA0A04FC94B}">
+              <ma14:wrappingTextBoxFlag xmlns:ma14="http://schemas.microsoft.com/office/mac/drawingml/2011/main" val="0"/>
+            </a:ext>
+          </a:extLst>
+        </p:spPr>
+        <p:txBody>
+          <a:bodyPr/>
+          <a:lstStyle>
+            <a:lvl1pPr>
+              <a:defRPr sz="1100">
+                <a:solidFill>
+                  <a:schemeClr val="tx2"/>
+                </a:solidFill>
+              </a:defRPr>
+            </a:lvl1pPr>
+          </a:lstStyle>
+          <a:p>
+            <a:pPr algn="r"/>
+            <a:fld id="{F7021451-1387-4CA6-816F-3879F97B5CBC}" type="slidenum">
+              <a:rPr b="0" lang="en-US"/>
+              <a:t>19</a:t>
+            </a:fld>
+            <a:endParaRPr lang="en-US"/>
+          </a:p>
+        </p:txBody>
+      </p:sp>
+    </p:spTree>
+  </p:cSld>
+  <p:clrMapOvr>
+    <a:masterClrMapping/>
+  </p:clrMapOvr>
+</p:sld>
+</file>
+
+<file path=ppt/slides/slide2.xml><?xml version="1.0" encoding="utf-8"?>
+<p:sld xmlns:a="http://schemas.openxmlformats.org/drawingml/2006/main" xmlns:r="http://schemas.openxmlformats.org/officeDocument/2006/relationships" xmlns:p="http://schemas.openxmlformats.org/presentationml/2006/main">
+  <p:cSld name="Slide 2">
+    <p:spTree>
+      <p:nvGrpSpPr>
+        <p:cNvPr id="1" name=""/>
+        <p:cNvGrpSpPr/>
+        <p:nvPr/>
+      </p:nvGrpSpPr>
+      <p:grpSpPr>
+        <a:xfrm>
+          <a:off x="0" y="0"/>
+          <a:ext cx="0" cy="0"/>
+          <a:chOff x="0" y="0"/>
+          <a:chExt cx="0" cy="0"/>
+        </a:xfrm>
+      </p:grpSpPr>
+      <p:sp>
+        <p:nvSpPr>
+          <p:cNvPr id="2" name="Text 0"/>
+          <p:cNvSpPr/>
+          <p:nvPr>
+            <p:ph idx="100" type="title" hasCustomPrompt="1"/>
+          </p:nvPr>
+        </p:nvSpPr>
+        <p:spPr>
+          <a:xfrm>
+            <a:off x="548640" y="365760"/>
+            <a:ext cx="11094415" cy="822960"/>
+          </a:xfrm>
+          <a:prstGeom prst="rect">
+            <a:avLst/>
+          </a:prstGeom>
+          <a:noFill/>
+          <a:ln/>
+        </p:spPr>
+        <p:txBody>
+          <a:bodyPr wrap="square" lIns="0" tIns="0" rIns="0" bIns="0" rtlCol="0" anchor="ctr"/>
+          <a:lstStyle/>
+          <a:p>
+            <a:pPr algn="l" indent="0" marL="0">
+              <a:buNone/>
+            </a:pPr>
+            <a:r>
+              <a:rPr lang="en-US" sz="3200" b="1" dirty="0">
+                <a:solidFill>
+                  <a:schemeClr val="tx1"/>
+                </a:solidFill>
+              </a:rPr>
+              <a:t>Contexto: o SIN já corta energia renovável</a:t>
+            </a:r>
+            <a:endParaRPr lang="en-US" sz="3200" dirty="0"/>
+          </a:p>
+        </p:txBody>
+      </p:sp>
+      <p:sp>
+        <p:nvSpPr>
+          <p:cNvPr id="3" name="Text 1"/>
+          <p:cNvSpPr txBox="1"/>
+          <p:nvPr/>
+        </p:nvSpPr>
+        <p:spPr>
+          <a:xfrm>
+            <a:off x="548640" y="1234440"/>
+            <a:ext cx="10607040" cy="640080"/>
+          </a:xfrm>
+          <a:prstGeom prst="rect">
+            <a:avLst/>
+          </a:prstGeom>
+          <a:noFill/>
+          <a:ln/>
+        </p:spPr>
+        <p:txBody>
+          <a:bodyPr wrap="square" lIns="0" tIns="0" rIns="0" bIns="0" rtlCol="0" anchor="t"/>
+          <a:lstStyle/>
+          <a:p>
+            <a:pPr indent="0" marL="0">
+              <a:buNone/>
+            </a:pPr>
+            <a:r>
+              <a:rPr lang="en-US" sz="1600" dirty="0">
+                <a:solidFill>
+                  <a:schemeClr val="tx2"/>
+                </a:solidFill>
+              </a:rPr>
+              <a:t>A micro e minigeração distribuída (MMGD) cresce, a carga líquida do meio do dia cai e a geração centralizada precisa ser cortada.</a:t>
+            </a:r>
+            <a:endParaRPr lang="en-US" sz="1600" dirty="0"/>
+          </a:p>
+        </p:txBody>
+      </p:sp>
+      <p:sp>
+        <p:nvSpPr>
+          <p:cNvPr id="4" name="Stat card 1"/>
+          <p:cNvSpPr/>
+          <p:nvPr/>
+        </p:nvSpPr>
+        <p:spPr>
+          <a:xfrm>
+            <a:off x="548640" y="2148840"/>
+            <a:ext cx="2560320" cy="3291840"/>
+          </a:xfrm>
+          <a:prstGeom prst="roundRect">
+            <a:avLst>
+              <a:gd name="adj" fmla="val 4286"/>
+            </a:avLst>
+          </a:prstGeom>
+          <a:solidFill>
+            <a:schemeClr val="bg1"/>
+          </a:solidFill>
+          <a:ln w="12700">
+            <a:solidFill>
+              <a:schemeClr val="bg1"/>
+            </a:solidFill>
+            <a:prstDash val="solid"/>
+          </a:ln>
+          <a:effectLst>
+            <a:outerShdw sx="100000" sy="100000" kx="0" ky="0" algn="bl" rotWithShape="0" blurRad="101600" dist="25400" dir="5400000">
+              <a:srgbClr val="0B1A2E">
+                <a:alpha val="12000"/>
+              </a:srgbClr>
+            </a:outerShdw>
+          </a:effectLst>
+        </p:spPr>
+      </p:sp>
+      <p:sp>
+        <p:nvSpPr>
+          <p:cNvPr id="5" name="Icon circle"/>
+          <p:cNvSpPr/>
+          <p:nvPr/>
+        </p:nvSpPr>
+        <p:spPr>
+          <a:xfrm>
+            <a:off x="822960" y="2423160"/>
+            <a:ext cx="566928" cy="566928"/>
+          </a:xfrm>
+          <a:prstGeom prst="ellipse">
+            <a:avLst/>
+          </a:prstGeom>
+          <a:solidFill>
+            <a:schemeClr val="accent4"/>
+          </a:solidFill>
+          <a:ln w="12700">
+            <a:solidFill>
+              <a:schemeClr val="accent4"/>
+            </a:solidFill>
+            <a:prstDash val="solid"/>
+          </a:ln>
+        </p:spPr>
+      </p:sp>
+      <p:pic>
+        <p:nvPicPr>
+          <p:cNvPr id="6" name="Image 0" descr="FaCut">    </p:cNvPr>
+          <p:cNvPicPr>
+            <a:picLocks noChangeAspect="1"/>
+          </p:cNvPicPr>
+          <p:nvPr/>
+        </p:nvPicPr>
+        <p:blipFill>
+          <a:blip r:embed="rId1"/>
+          <a:stretch>
+            <a:fillRect/>
+          </a:stretch>
+        </p:blipFill>
+        <p:spPr>
+          <a:xfrm>
+            <a:off x="964692" y="2564892"/>
+            <a:ext cx="283464" cy="283464"/>
+          </a:xfrm>
+          <a:prstGeom prst="rect">
+            <a:avLst/>
+          </a:prstGeom>
+        </p:spPr>
+      </p:pic>
+      <p:sp>
+        <p:nvSpPr>
+          <p:cNvPr id="7" name="Text 4"/>
+          <p:cNvSpPr txBox="1"/>
+          <p:nvPr/>
+        </p:nvSpPr>
+        <p:spPr>
+          <a:xfrm>
+            <a:off x="822960" y="3200400"/>
+            <a:ext cx="2103120" cy="822960"/>
+          </a:xfrm>
+          <a:prstGeom prst="rect">
+            <a:avLst/>
+          </a:prstGeom>
+          <a:noFill/>
+          <a:ln/>
+        </p:spPr>
+        <p:txBody>
+          <a:bodyPr wrap="square" lIns="0" tIns="0" rIns="0" bIns="0" rtlCol="0" anchor="ctr">
+            <a:normAutofit/>
+          </a:bodyPr>
+          <a:lstStyle/>
+          <a:p>
+            <a:pPr indent="0" marL="0">
+              <a:buNone/>
+            </a:pPr>
+            <a:r>
+              <a:rPr lang="en-US" sz="3600" b="1" dirty="0">
+                <a:solidFill>
+                  <a:schemeClr val="tx2"/>
+                </a:solidFill>
+                <a:latin typeface="Cambria" pitchFamily="34" charset="0"/>
+                <a:ea typeface="Cambria" pitchFamily="34" charset="-122"/>
+                <a:cs typeface="Cambria" pitchFamily="34" charset="-120"/>
+              </a:rPr>
+              <a:t>20,6%</a:t>
+            </a:r>
+            <a:endParaRPr lang="en-US" sz="3600" dirty="0"/>
+          </a:p>
+        </p:txBody>
+      </p:sp>
+      <p:sp>
+        <p:nvSpPr>
+          <p:cNvPr id="8" name="Text 5"/>
+          <p:cNvSpPr txBox="1"/>
+          <p:nvPr/>
+        </p:nvSpPr>
+        <p:spPr>
+          <a:xfrm>
+            <a:off x="822960" y="4114800"/>
+            <a:ext cx="2057400" cy="1463040"/>
+          </a:xfrm>
+          <a:prstGeom prst="rect">
+            <a:avLst/>
+          </a:prstGeom>
+          <a:noFill/>
+          <a:ln/>
+        </p:spPr>
+        <p:txBody>
+          <a:bodyPr wrap="square" lIns="0" tIns="0" rIns="0" bIns="0" rtlCol="0" anchor="t"/>
+          <a:lstStyle/>
+          <a:p>
+            <a:pPr indent="0" marL="0">
+              <a:buNone/>
+            </a:pPr>
+            <a:r>
+              <a:rPr lang="en-US" sz="1400" dirty="0">
+                <a:solidFill>
+                  <a:schemeClr val="tx1"/>
+                </a:solidFill>
+              </a:rPr>
+              <a:t>da geração eólica e solar disponível não foi aproveitada em 2025</a:t>
+            </a:r>
+            <a:endParaRPr lang="en-US" sz="1400" dirty="0"/>
+          </a:p>
+        </p:txBody>
+      </p:sp>
+      <p:sp>
+        <p:nvSpPr>
+          <p:cNvPr id="9" name="Stat card 2"/>
+          <p:cNvSpPr/>
+          <p:nvPr/>
+        </p:nvSpPr>
+        <p:spPr>
+          <a:xfrm>
+            <a:off x="3383280" y="2148840"/>
+            <a:ext cx="2560320" cy="3291840"/>
+          </a:xfrm>
+          <a:prstGeom prst="roundRect">
+            <a:avLst>
+              <a:gd name="adj" fmla="val 4286"/>
+            </a:avLst>
+          </a:prstGeom>
+          <a:solidFill>
+            <a:schemeClr val="bg1"/>
+          </a:solidFill>
+          <a:ln w="12700">
+            <a:solidFill>
+              <a:schemeClr val="bg1"/>
+            </a:solidFill>
+            <a:prstDash val="solid"/>
+          </a:ln>
+          <a:effectLst>
+            <a:outerShdw sx="100000" sy="100000" kx="0" ky="0" algn="bl" rotWithShape="0" blurRad="101600" dist="25400" dir="5400000">
+              <a:srgbClr val="0B1A2E">
+                <a:alpha val="12000"/>
+              </a:srgbClr>
+            </a:outerShdw>
+          </a:effectLst>
+        </p:spPr>
+      </p:sp>
+      <p:sp>
+        <p:nvSpPr>
+          <p:cNvPr id="10" name="Icon circle"/>
+          <p:cNvSpPr/>
+          <p:nvPr/>
+        </p:nvSpPr>
+        <p:spPr>
+          <a:xfrm>
+            <a:off x="3657600" y="2423160"/>
+            <a:ext cx="566928" cy="566928"/>
+          </a:xfrm>
+          <a:prstGeom prst="ellipse">
+            <a:avLst/>
+          </a:prstGeom>
+          <a:solidFill>
+            <a:schemeClr val="accent1"/>
+          </a:solidFill>
+          <a:ln w="12700">
+            <a:solidFill>
+              <a:schemeClr val="accent1"/>
+            </a:solidFill>
+            <a:prstDash val="solid"/>
+          </a:ln>
+        </p:spPr>
+      </p:sp>
+      <p:pic>
+        <p:nvPicPr>
+          <p:cNvPr id="11" name="Image 1" descr="FaCoins">    </p:cNvPr>
+          <p:cNvPicPr>
+            <a:picLocks noChangeAspect="1"/>
+          </p:cNvPicPr>
+          <p:nvPr/>
+        </p:nvPicPr>
+        <p:blipFill>
+          <a:blip r:embed="rId2"/>
+          <a:stretch>
+            <a:fillRect/>
+          </a:stretch>
+        </p:blipFill>
+        <p:spPr>
+          <a:xfrm>
+            <a:off x="3799332" y="2564892"/>
+            <a:ext cx="283464" cy="283464"/>
+          </a:xfrm>
+          <a:prstGeom prst="rect">
+            <a:avLst/>
+          </a:prstGeom>
+        </p:spPr>
+      </p:pic>
+      <p:sp>
+        <p:nvSpPr>
+          <p:cNvPr id="12" name="Text 8"/>
+          <p:cNvSpPr txBox="1"/>
+          <p:nvPr/>
+        </p:nvSpPr>
+        <p:spPr>
+          <a:xfrm>
+            <a:off x="3657600" y="3200400"/>
+            <a:ext cx="2103120" cy="822960"/>
+          </a:xfrm>
+          <a:prstGeom prst="rect">
+            <a:avLst/>
+          </a:prstGeom>
+          <a:noFill/>
+          <a:ln/>
+        </p:spPr>
+        <p:txBody>
+          <a:bodyPr wrap="square" lIns="0" tIns="0" rIns="0" bIns="0" rtlCol="0" anchor="ctr">
+            <a:normAutofit/>
+          </a:bodyPr>
+          <a:lstStyle/>
+          <a:p>
+            <a:pPr indent="0" marL="0">
+              <a:buNone/>
+            </a:pPr>
+            <a:r>
+              <a:rPr lang="en-US" sz="3600" b="1" dirty="0">
+                <a:solidFill>
+                  <a:schemeClr val="tx2"/>
+                </a:solidFill>
+                <a:latin typeface="Cambria" pitchFamily="34" charset="0"/>
+                <a:ea typeface="Cambria" pitchFamily="34" charset="-122"/>
+                <a:cs typeface="Cambria" pitchFamily="34" charset="-120"/>
+              </a:rPr>
+              <a:t>R$ 6 bi+</a:t>
+            </a:r>
+            <a:endParaRPr lang="en-US" sz="3600" dirty="0"/>
+          </a:p>
+        </p:txBody>
+      </p:sp>
+      <p:sp>
+        <p:nvSpPr>
+          <p:cNvPr id="13" name="Text 9"/>
+          <p:cNvSpPr txBox="1"/>
+          <p:nvPr/>
+        </p:nvSpPr>
+        <p:spPr>
+          <a:xfrm>
+            <a:off x="3657600" y="4114800"/>
+            <a:ext cx="2057400" cy="1463040"/>
+          </a:xfrm>
+          <a:prstGeom prst="rect">
+            <a:avLst/>
+          </a:prstGeom>
+          <a:noFill/>
+          <a:ln/>
+        </p:spPr>
+        <p:txBody>
+          <a:bodyPr wrap="square" lIns="0" tIns="0" rIns="0" bIns="0" rtlCol="0" anchor="t"/>
+          <a:lstStyle/>
+          <a:p>
+            <a:pPr indent="0" marL="0">
+              <a:buNone/>
+            </a:pPr>
+            <a:r>
+              <a:rPr lang="en-US" sz="1400" dirty="0">
+                <a:solidFill>
+                  <a:schemeClr val="tx1"/>
+                </a:solidFill>
+              </a:rPr>
+              <a:t>de perdas estimadas dos geradores eólicos e solares com cortes em 2025</a:t>
+            </a:r>
+            <a:endParaRPr lang="en-US" sz="1400" dirty="0"/>
+          </a:p>
+        </p:txBody>
+      </p:sp>
+      <p:sp>
+        <p:nvSpPr>
+          <p:cNvPr id="14" name="Stat card 3"/>
+          <p:cNvSpPr/>
+          <p:nvPr/>
+        </p:nvSpPr>
+        <p:spPr>
+          <a:xfrm>
+            <a:off x="6217920" y="2148840"/>
+            <a:ext cx="2560320" cy="3291840"/>
+          </a:xfrm>
+          <a:prstGeom prst="roundRect">
+            <a:avLst>
+              <a:gd name="adj" fmla="val 4286"/>
+            </a:avLst>
+          </a:prstGeom>
+          <a:solidFill>
+            <a:schemeClr val="bg1"/>
+          </a:solidFill>
+          <a:ln w="12700">
+            <a:solidFill>
+              <a:schemeClr val="bg1"/>
+            </a:solidFill>
+            <a:prstDash val="solid"/>
+          </a:ln>
+          <a:effectLst>
+            <a:outerShdw sx="100000" sy="100000" kx="0" ky="0" algn="bl" rotWithShape="0" blurRad="101600" dist="25400" dir="5400000">
+              <a:srgbClr val="0B1A2E">
+                <a:alpha val="12000"/>
+              </a:srgbClr>
+            </a:outerShdw>
+          </a:effectLst>
+        </p:spPr>
+      </p:sp>
+      <p:sp>
+        <p:nvSpPr>
+          <p:cNvPr id="15" name="Icon circle"/>
+          <p:cNvSpPr/>
+          <p:nvPr/>
+        </p:nvSpPr>
+        <p:spPr>
+          <a:xfrm>
+            <a:off x="6492240" y="2423160"/>
+            <a:ext cx="566928" cy="566928"/>
+          </a:xfrm>
+          <a:prstGeom prst="ellipse">
+            <a:avLst/>
+          </a:prstGeom>
+          <a:solidFill>
+            <a:schemeClr val="accent2"/>
+          </a:solidFill>
+          <a:ln w="12700">
+            <a:solidFill>
+              <a:schemeClr val="accent2"/>
+            </a:solidFill>
+            <a:prstDash val="solid"/>
+          </a:ln>
+        </p:spPr>
+      </p:sp>
+      <p:pic>
+        <p:nvPicPr>
+          <p:cNvPr id="16" name="Image 2" descr="FaSolarPanel">    </p:cNvPr>
+          <p:cNvPicPr>
+            <a:picLocks noChangeAspect="1"/>
+          </p:cNvPicPr>
+          <p:nvPr/>
+        </p:nvPicPr>
+        <p:blipFill>
+          <a:blip r:embed="rId3"/>
+          <a:stretch>
+            <a:fillRect/>
+          </a:stretch>
+        </p:blipFill>
+        <p:spPr>
+          <a:xfrm>
+            <a:off x="6633972" y="2564892"/>
+            <a:ext cx="283464" cy="283464"/>
+          </a:xfrm>
+          <a:prstGeom prst="rect">
+            <a:avLst/>
+          </a:prstGeom>
+        </p:spPr>
+      </p:pic>
+      <p:sp>
+        <p:nvSpPr>
+          <p:cNvPr id="17" name="Text 12"/>
+          <p:cNvSpPr txBox="1"/>
+          <p:nvPr/>
+        </p:nvSpPr>
+        <p:spPr>
+          <a:xfrm>
+            <a:off x="6492240" y="3200400"/>
+            <a:ext cx="2103120" cy="822960"/>
+          </a:xfrm>
+          <a:prstGeom prst="rect">
+            <a:avLst/>
+          </a:prstGeom>
+          <a:noFill/>
+          <a:ln/>
+        </p:spPr>
+        <p:txBody>
+          <a:bodyPr wrap="square" lIns="0" tIns="0" rIns="0" bIns="0" rtlCol="0" anchor="ctr">
+            <a:normAutofit/>
+          </a:bodyPr>
+          <a:lstStyle/>
+          <a:p>
+            <a:pPr indent="0" marL="0">
+              <a:buNone/>
+            </a:pPr>
+            <a:r>
+              <a:rPr lang="en-US" sz="3600" b="1" dirty="0">
+                <a:solidFill>
+                  <a:schemeClr val="tx2"/>
+                </a:solidFill>
+                <a:latin typeface="Cambria" pitchFamily="34" charset="0"/>
+                <a:ea typeface="Cambria" pitchFamily="34" charset="-122"/>
+                <a:cs typeface="Cambria" pitchFamily="34" charset="-120"/>
+              </a:rPr>
+              <a:t>~40%</a:t>
+            </a:r>
+            <a:endParaRPr lang="en-US" sz="3600" dirty="0"/>
+          </a:p>
+        </p:txBody>
+      </p:sp>
+      <p:sp>
+        <p:nvSpPr>
+          <p:cNvPr id="18" name="Text 13"/>
+          <p:cNvSpPr txBox="1"/>
+          <p:nvPr/>
+        </p:nvSpPr>
+        <p:spPr>
+          <a:xfrm>
+            <a:off x="6492240" y="4114800"/>
+            <a:ext cx="2057400" cy="1463040"/>
+          </a:xfrm>
+          <a:prstGeom prst="rect">
+            <a:avLst/>
+          </a:prstGeom>
+          <a:noFill/>
+          <a:ln/>
+        </p:spPr>
+        <p:txBody>
+          <a:bodyPr wrap="square" lIns="0" tIns="0" rIns="0" bIns="0" rtlCol="0" anchor="t"/>
+          <a:lstStyle/>
+          <a:p>
+            <a:pPr indent="0" marL="0">
+              <a:buNone/>
+            </a:pPr>
+            <a:r>
+              <a:rPr lang="en-US" sz="1400" dirty="0">
+                <a:solidFill>
+                  <a:schemeClr val="tx1"/>
+                </a:solidFill>
+              </a:rPr>
+              <a:t>da carga atendida pela MMGD em 10/08/2025, com UHEs e UTEs no mínimo técnico</a:t>
+            </a:r>
+            <a:endParaRPr lang="en-US" sz="1400" dirty="0"/>
+          </a:p>
+        </p:txBody>
+      </p:sp>
+      <p:sp>
+        <p:nvSpPr>
+          <p:cNvPr id="19" name="Stat card 4"/>
+          <p:cNvSpPr/>
+          <p:nvPr/>
+        </p:nvSpPr>
+        <p:spPr>
+          <a:xfrm>
+            <a:off x="9052560" y="2148840"/>
+            <a:ext cx="2560320" cy="3291840"/>
+          </a:xfrm>
+          <a:prstGeom prst="roundRect">
+            <a:avLst>
+              <a:gd name="adj" fmla="val 4286"/>
+            </a:avLst>
+          </a:prstGeom>
+          <a:solidFill>
+            <a:schemeClr val="bg1"/>
+          </a:solidFill>
+          <a:ln w="12700">
+            <a:solidFill>
+              <a:schemeClr val="bg1"/>
+            </a:solidFill>
+            <a:prstDash val="solid"/>
+          </a:ln>
+          <a:effectLst>
+            <a:outerShdw sx="100000" sy="100000" kx="0" ky="0" algn="bl" rotWithShape="0" blurRad="101600" dist="25400" dir="5400000">
+              <a:srgbClr val="0B1A2E">
+                <a:alpha val="12000"/>
+              </a:srgbClr>
+            </a:outerShdw>
+          </a:effectLst>
+        </p:spPr>
+      </p:sp>
+      <p:sp>
+        <p:nvSpPr>
+          <p:cNvPr id="20" name="Icon circle"/>
+          <p:cNvSpPr/>
+          <p:nvPr/>
+        </p:nvSpPr>
+        <p:spPr>
+          <a:xfrm>
+            <a:off x="9326880" y="2423160"/>
+            <a:ext cx="566928" cy="566928"/>
+          </a:xfrm>
+          <a:prstGeom prst="ellipse">
+            <a:avLst/>
+          </a:prstGeom>
+          <a:solidFill>
+            <a:schemeClr val="accent3"/>
+          </a:solidFill>
+          <a:ln w="12700">
+            <a:solidFill>
+              <a:schemeClr val="accent3"/>
+            </a:solidFill>
+            <a:prstDash val="solid"/>
+          </a:ln>
+        </p:spPr>
+      </p:sp>
+      <p:pic>
+        <p:nvPicPr>
+          <p:cNvPr id="21" name="Image 3" descr="FaChartLine">    </p:cNvPr>
+          <p:cNvPicPr>
+            <a:picLocks noChangeAspect="1"/>
+          </p:cNvPicPr>
+          <p:nvPr/>
+        </p:nvPicPr>
+        <p:blipFill>
+          <a:blip r:embed="rId4"/>
+          <a:stretch>
+            <a:fillRect/>
+          </a:stretch>
+        </p:blipFill>
+        <p:spPr>
+          <a:xfrm>
+            <a:off x="9468612" y="2564892"/>
+            <a:ext cx="283464" cy="283464"/>
+          </a:xfrm>
+          <a:prstGeom prst="rect">
+            <a:avLst/>
+          </a:prstGeom>
+        </p:spPr>
+      </p:pic>
+      <p:sp>
+        <p:nvSpPr>
+          <p:cNvPr id="22" name="Text 16"/>
+          <p:cNvSpPr txBox="1"/>
+          <p:nvPr/>
+        </p:nvSpPr>
+        <p:spPr>
+          <a:xfrm>
+            <a:off x="9326880" y="3200400"/>
+            <a:ext cx="2103120" cy="822960"/>
+          </a:xfrm>
+          <a:prstGeom prst="rect">
+            <a:avLst/>
+          </a:prstGeom>
+          <a:noFill/>
+          <a:ln/>
+        </p:spPr>
+        <p:txBody>
+          <a:bodyPr wrap="square" lIns="0" tIns="0" rIns="0" bIns="0" rtlCol="0" anchor="ctr">
+            <a:normAutofit/>
+          </a:bodyPr>
+          <a:lstStyle/>
+          <a:p>
+            <a:pPr indent="0" marL="0">
+              <a:buNone/>
+            </a:pPr>
+            <a:r>
+              <a:rPr lang="en-US" sz="3600" b="1" dirty="0">
+                <a:solidFill>
+                  <a:schemeClr val="tx2"/>
+                </a:solidFill>
+                <a:latin typeface="Cambria" pitchFamily="34" charset="0"/>
+                <a:ea typeface="Cambria" pitchFamily="34" charset="-122"/>
+                <a:cs typeface="Cambria" pitchFamily="34" charset="-120"/>
+              </a:rPr>
+              <a:t>47–71 GW</a:t>
+            </a:r>
+            <a:endParaRPr lang="en-US" sz="3600" dirty="0"/>
+          </a:p>
+        </p:txBody>
+      </p:sp>
+      <p:sp>
+        <p:nvSpPr>
+          <p:cNvPr id="23" name="Text 17"/>
+          <p:cNvSpPr txBox="1"/>
+          <p:nvPr/>
+        </p:nvSpPr>
+        <p:spPr>
+          <a:xfrm>
+            <a:off x="9326880" y="4114800"/>
+            <a:ext cx="2057400" cy="1463040"/>
+          </a:xfrm>
+          <a:prstGeom prst="rect">
+            <a:avLst/>
+          </a:prstGeom>
+          <a:noFill/>
+          <a:ln/>
+        </p:spPr>
+        <p:txBody>
+          <a:bodyPr wrap="square" lIns="0" tIns="0" rIns="0" bIns="0" rtlCol="0" anchor="t"/>
+          <a:lstStyle/>
+          <a:p>
+            <a:pPr indent="0" marL="0">
+              <a:buNone/>
+            </a:pPr>
+            <a:r>
+              <a:rPr lang="en-US" sz="1400" dirty="0">
+                <a:solidFill>
+                  <a:schemeClr val="tx1"/>
+                </a:solidFill>
+              </a:rPr>
+              <a:t>de MMGD projetados pela EPE para 2034 (referência: 59 GW)</a:t>
+            </a:r>
+            <a:endParaRPr lang="en-US" sz="1400" dirty="0"/>
+          </a:p>
+        </p:txBody>
+      </p:sp>
+      <p:sp>
+        <p:nvSpPr>
+          <p:cNvPr id="24" name="Text 18"/>
+          <p:cNvSpPr txBox="1"/>
+          <p:nvPr/>
+        </p:nvSpPr>
+        <p:spPr>
+          <a:xfrm>
+            <a:off x="548640" y="6382512"/>
+            <a:ext cx="10424160" cy="274320"/>
+          </a:xfrm>
+          <a:prstGeom prst="rect">
+            <a:avLst/>
+          </a:prstGeom>
+          <a:noFill/>
+          <a:ln/>
+        </p:spPr>
+        <p:txBody>
+          <a:bodyPr wrap="square" lIns="0" tIns="0" rIns="0" bIns="0" rtlCol="0" anchor="ctr"/>
+          <a:lstStyle/>
+          <a:p>
+            <a:pPr indent="0" marL="0">
+              <a:buNone/>
+            </a:pPr>
+            <a:r>
+              <a:rPr lang="en-US" sz="1000" i="1" dirty="0">
+                <a:solidFill>
+                  <a:schemeClr val="tx2"/>
+                </a:solidFill>
+              </a:rPr>
+              <a:t>Fontes: ONS (2025); Acende Brasil (2025); Volts Robotics via Agência Infra (2025); EPE/MME, PDE 2034, Caderno MMGD e Baterias (2024). Estimativas de cortes variam conforme a metodologia.</a:t>
+            </a:r>
+            <a:endParaRPr lang="en-US" sz="1000" dirty="0"/>
+          </a:p>
+        </p:txBody>
+      </p:sp>
+      <p:sp>
+        <p:nvSpPr>
+          <p:cNvPr id="25" name="Slide Number Placeholder 0"/>
+          <p:cNvSpPr>
+            <a:spLocks noGrp="1"/>
+          </p:cNvSpPr>
+          <p:nvPr>
+            <p:ph type="sldNum" sz="quarter" idx="4294967295"/>
+          </p:nvPr>
+        </p:nvSpPr>
+        <p:spPr>
+          <a:xfrm>
+            <a:off x="11155680" y="6400800"/>
+            <a:ext cx="548640" cy="274320"/>
+          </a:xfrm>
+          <a:prstGeom prst="rect">
+            <a:avLst/>
+          </a:prstGeom>
+          <a:extLst>
+            <a:ext uri="{C572A759-6A51-4108-AA02-DFA0A04FC94B}">
+              <ma14:wrappingTextBoxFlag xmlns:ma14="http://schemas.microsoft.com/office/mac/drawingml/2011/main" val="0"/>
+            </a:ext>
+          </a:extLst>
+        </p:spPr>
+        <p:txBody>
+          <a:bodyPr/>
+          <a:lstStyle>
+            <a:lvl1pPr>
+              <a:defRPr sz="1100">
+                <a:solidFill>
+                  <a:schemeClr val="tx2"/>
+                </a:solidFill>
+              </a:defRPr>
+            </a:lvl1pPr>
+          </a:lstStyle>
+          <a:p>
+            <a:pPr algn="r"/>
+            <a:fld id="{F7021451-1387-4CA6-816F-3879F97B5CBC}" type="slidenum">
+              <a:rPr b="0" lang="en-US"/>
+              <a:t>2</a:t>
+            </a:fld>
+            <a:endParaRPr lang="en-US"/>
+          </a:p>
+        </p:txBody>
+      </p:sp>
+    </p:spTree>
+  </p:cSld>
+  <p:clrMapOvr>
+    <a:masterClrMapping/>
+  </p:clrMapOvr>
+</p:sld>
+</file>
+
+<file path=ppt/slides/slide20.xml><?xml version="1.0" encoding="utf-8"?>
+<p:sld xmlns:a="http://schemas.openxmlformats.org/drawingml/2006/main" xmlns:r="http://schemas.openxmlformats.org/officeDocument/2006/relationships" xmlns:p="http://schemas.openxmlformats.org/presentationml/2006/main">
+  <p:cSld name="Slide 20">
+    <p:spTree>
+      <p:nvGrpSpPr>
+        <p:cNvPr id="1" name=""/>
+        <p:cNvGrpSpPr/>
+        <p:nvPr/>
+      </p:nvGrpSpPr>
+      <p:grpSpPr>
+        <a:xfrm>
+          <a:off x="0" y="0"/>
+          <a:ext cx="0" cy="0"/>
+          <a:chOff x="0" y="0"/>
+          <a:chExt cx="0" cy="0"/>
+        </a:xfrm>
+      </p:grpSpPr>
+      <p:sp>
+        <p:nvSpPr>
+          <p:cNvPr id="2" name="Text 0"/>
+          <p:cNvSpPr/>
+          <p:nvPr>
+            <p:ph idx="100" type="title" hasCustomPrompt="1"/>
+          </p:nvPr>
+        </p:nvSpPr>
+        <p:spPr>
+          <a:xfrm>
+            <a:off x="548640" y="365760"/>
+            <a:ext cx="11094415" cy="822960"/>
+          </a:xfrm>
+          <a:prstGeom prst="rect">
+            <a:avLst/>
+          </a:prstGeom>
+          <a:noFill/>
+          <a:ln/>
+        </p:spPr>
+        <p:txBody>
+          <a:bodyPr wrap="square" lIns="0" tIns="0" rIns="0" bIns="0" rtlCol="0" anchor="ctr"/>
+          <a:lstStyle/>
+          <a:p>
+            <a:pPr algn="l" indent="0" marL="0">
+              <a:buNone/>
+            </a:pPr>
+            <a:r>
+              <a:rPr lang="en-US" sz="3200" b="1" dirty="0">
+                <a:solidFill>
+                  <a:schemeClr val="tx1"/>
+                </a:solidFill>
+              </a:rPr>
               <a:t>Quanto cada fonte pagaria: exercício ilustrativo</a:t>
             </a:r>
             <a:endParaRPr lang="en-US" sz="3200" dirty="0"/>
@@ -13004,7 +20479,7 @@
       </p:graphicFrame>
       <p:graphicFrame>
         <p:nvGraphicFramePr>
-          <p:cNvPr id="18" name="Table 0"/>
+          <p:cNvPr id="21" name="Table 0"/>
           <p:cNvGraphicFramePr>
             <a:graphicFrameLocks noGrp="1"/>
           </p:cNvGraphicFramePr>
@@ -14315,7 +21790,7 @@
             <a:pPr algn="r"/>
             <a:fld id="{F7021451-1387-4CA6-816F-3879F97B5CBC}" type="slidenum">
               <a:rPr b="0" lang="en-US"/>
-              <a:t>17</a:t>
+              <a:t>20</a:t>
             </a:fld>
             <a:endParaRPr lang="en-US"/>
           </a:p>
@@ -14329,9 +21804,9 @@
 </p:sld>
 </file>
 
-<file path=ppt/slides/slide18.xml><?xml version="1.0" encoding="utf-8"?>
+<file path=ppt/slides/slide21.xml><?xml version="1.0" encoding="utf-8"?>
 <p:sld xmlns:a="http://schemas.openxmlformats.org/drawingml/2006/main" xmlns:r="http://schemas.openxmlformats.org/officeDocument/2006/relationships" xmlns:p="http://schemas.openxmlformats.org/presentationml/2006/main">
-  <p:cSld name="Slide 18">
+  <p:cSld name="Slide 21">
     <p:spTree>
       <p:nvGrpSpPr>
         <p:cNvPr id="1" name=""/>
@@ -15031,7 +22506,7 @@
             <a:pPr algn="r"/>
             <a:fld id="{F7021451-1387-4CA6-816F-3879F97B5CBC}" type="slidenum">
               <a:rPr b="0" lang="en-US"/>
-              <a:t>18</a:t>
+              <a:t>21</a:t>
             </a:fld>
             <a:endParaRPr lang="en-US"/>
           </a:p>
@@ -15045,9 +22520,9 @@
 </p:sld>
 </file>
 
-<file path=ppt/slides/slide19.xml><?xml version="1.0" encoding="utf-8"?>
+<file path=ppt/slides/slide22.xml><?xml version="1.0" encoding="utf-8"?>
 <p:sld xmlns:a="http://schemas.openxmlformats.org/drawingml/2006/main" xmlns:r="http://schemas.openxmlformats.org/officeDocument/2006/relationships" xmlns:p="http://schemas.openxmlformats.org/presentationml/2006/main">
-  <p:cSld name="Slide 19">
+  <p:cSld name="Slide 22">
     <p:spTree>
       <p:nvGrpSpPr>
         <p:cNvPr id="1" name=""/>
@@ -15102,7 +22577,7 @@
       </p:sp>
       <p:graphicFrame>
         <p:nvGraphicFramePr>
-          <p:cNvPr id="20" name="Table 0"/>
+          <p:cNvPr id="23" name="Table 0"/>
           <p:cNvGraphicFramePr>
             <a:graphicFrameLocks noGrp="1"/>
           </p:cNvGraphicFramePr>
@@ -16651,7 +24126,7 @@
             <a:pPr algn="r"/>
             <a:fld id="{F7021451-1387-4CA6-816F-3879F97B5CBC}" type="slidenum">
               <a:rPr b="0" lang="en-US"/>
-              <a:t>19</a:t>
+              <a:t>22</a:t>
             </a:fld>
             <a:endParaRPr lang="en-US"/>
           </a:p>
@@ -16665,9 +24140,9 @@
 </p:sld>
 </file>
 
-<file path=ppt/slides/slide2.xml><?xml version="1.0" encoding="utf-8"?>
+<file path=ppt/slides/slide23.xml><?xml version="1.0" encoding="utf-8"?>
 <p:sld xmlns:a="http://schemas.openxmlformats.org/drawingml/2006/main" xmlns:r="http://schemas.openxmlformats.org/officeDocument/2006/relationships" xmlns:p="http://schemas.openxmlformats.org/presentationml/2006/main">
-  <p:cSld name="Slide 2">
+  <p:cSld name="Slide 23">
     <p:spTree>
       <p:nvGrpSpPr>
         <p:cNvPr id="1" name=""/>
@@ -16711,10 +24186,10 @@
             <a:r>
               <a:rPr lang="en-US" sz="3200" b="1" dirty="0">
                 <a:solidFill>
-                  <a:schemeClr val="tx1"/>
-                </a:solidFill>
-              </a:rPr>
-              <a:t>Contexto: o SIN já corta energia renovável</a:t>
+                  <a:schemeClr val="bg1"/>
+                </a:solidFill>
+              </a:rPr>
+              <a:t>Síntese</a:t>
             </a:r>
             <a:endParaRPr lang="en-US" sz="3200" dirty="0"/>
           </a:p>
@@ -16722,133 +24197,143 @@
       </p:sp>
       <p:sp>
         <p:nvSpPr>
-          <p:cNvPr id="3" name="Text 1"/>
-          <p:cNvSpPr txBox="1"/>
-          <p:nvPr/>
-        </p:nvSpPr>
-        <p:spPr>
-          <a:xfrm>
-            <a:off x="548640" y="1234440"/>
-            <a:ext cx="10607040" cy="640080"/>
-          </a:xfrm>
-          <a:prstGeom prst="rect">
-            <a:avLst/>
-          </a:prstGeom>
-          <a:noFill/>
-          <a:ln/>
-        </p:spPr>
-        <p:txBody>
-          <a:bodyPr wrap="square" lIns="0" tIns="0" rIns="0" bIns="0" rtlCol="0" anchor="t"/>
-          <a:lstStyle/>
-          <a:p>
-            <a:pPr indent="0" marL="0">
-              <a:buNone/>
-            </a:pPr>
-            <a:r>
-              <a:rPr lang="en-US" sz="1600" dirty="0">
-                <a:solidFill>
-                  <a:schemeClr val="tx2"/>
-                </a:solidFill>
-              </a:rPr>
-              <a:t>A micro e minigeração distribuída (MMGD) cresce, a carga líquida do meio do dia cai e a geração centralizada precisa ser cortada.</a:t>
-            </a:r>
-            <a:endParaRPr lang="en-US" sz="1600" dirty="0"/>
-          </a:p>
-        </p:txBody>
-      </p:sp>
-      <p:sp>
-        <p:nvSpPr>
-          <p:cNvPr id="4" name="Stat card 1"/>
+          <p:cNvPr id="3" name="Summary row 1"/>
           <p:cNvSpPr/>
           <p:nvPr/>
         </p:nvSpPr>
         <p:spPr>
           <a:xfrm>
-            <a:off x="548640" y="2148840"/>
-            <a:ext cx="2560320" cy="3291840"/>
+            <a:off x="548640" y="1463040"/>
+            <a:ext cx="11094415" cy="1097280"/>
           </a:xfrm>
           <a:prstGeom prst="roundRect">
             <a:avLst>
-              <a:gd name="adj" fmla="val 4286"/>
+              <a:gd name="adj" fmla="val 10000"/>
             </a:avLst>
           </a:prstGeom>
           <a:solidFill>
-            <a:schemeClr val="bg1"/>
+            <a:schemeClr val="tx2"/>
           </a:solidFill>
           <a:ln w="12700">
             <a:solidFill>
-              <a:schemeClr val="bg1"/>
+              <a:schemeClr val="tx2"/>
             </a:solidFill>
             <a:prstDash val="solid"/>
           </a:ln>
-          <a:effectLst>
-            <a:outerShdw sx="100000" sy="100000" kx="0" ky="0" algn="bl" rotWithShape="0" blurRad="101600" dist="25400" dir="5400000">
-              <a:srgbClr val="0B1A2E">
-                <a:alpha val="12000"/>
-              </a:srgbClr>
-            </a:outerShdw>
-          </a:effectLst>
-        </p:spPr>
-      </p:sp>
-      <p:sp>
-        <p:nvSpPr>
-          <p:cNvPr id="5" name="Icon circle"/>
+        </p:spPr>
+      </p:sp>
+      <p:sp>
+        <p:nvSpPr>
+          <p:cNvPr id="4" name="Text 2"/>
+          <p:cNvSpPr txBox="1"/>
+          <p:nvPr/>
+        </p:nvSpPr>
+        <p:spPr>
+          <a:xfrm>
+            <a:off x="914400" y="1463040"/>
+            <a:ext cx="2194560" cy="1097280"/>
+          </a:xfrm>
+          <a:prstGeom prst="rect">
+            <a:avLst/>
+          </a:prstGeom>
+          <a:noFill/>
+          <a:ln/>
+        </p:spPr>
+        <p:txBody>
+          <a:bodyPr wrap="square" lIns="0" tIns="0" rIns="0" bIns="0" rtlCol="0" anchor="ctr"/>
+          <a:lstStyle/>
+          <a:p>
+            <a:pPr indent="0" marL="0">
+              <a:buNone/>
+            </a:pPr>
+            <a:r>
+              <a:rPr lang="en-US" sz="2000" b="1" dirty="0">
+                <a:solidFill>
+                  <a:schemeClr val="accent1"/>
+                </a:solidFill>
+                <a:latin typeface="Cambria" pitchFamily="34" charset="0"/>
+                <a:ea typeface="Cambria" pitchFamily="34" charset="-122"/>
+                <a:cs typeface="Cambria" pitchFamily="34" charset="-120"/>
+              </a:rPr>
+              <a:t>Problema</a:t>
+            </a:r>
+            <a:endParaRPr lang="en-US" sz="2000" dirty="0"/>
+          </a:p>
+        </p:txBody>
+      </p:sp>
+      <p:sp>
+        <p:nvSpPr>
+          <p:cNvPr id="5" name="Text 3"/>
+          <p:cNvSpPr txBox="1"/>
+          <p:nvPr/>
+        </p:nvSpPr>
+        <p:spPr>
+          <a:xfrm>
+            <a:off x="3291840" y="1463040"/>
+            <a:ext cx="7985455" cy="1097280"/>
+          </a:xfrm>
+          <a:prstGeom prst="rect">
+            <a:avLst/>
+          </a:prstGeom>
+          <a:noFill/>
+          <a:ln/>
+        </p:spPr>
+        <p:txBody>
+          <a:bodyPr wrap="square" lIns="0" tIns="0" rIns="0" bIns="0" rtlCol="0" anchor="ctr"/>
+          <a:lstStyle/>
+          <a:p>
+            <a:pPr indent="0" marL="0">
+              <a:buNone/>
+            </a:pPr>
+            <a:r>
+              <a:rPr lang="en-US" sz="1800" dirty="0">
+                <a:solidFill>
+                  <a:schemeClr val="bg1"/>
+                </a:solidFill>
+              </a:rPr>
+              <a:t>MMGD em expansão gera curtailment e perdas bilionárias.</a:t>
+            </a:r>
+            <a:endParaRPr lang="en-US" sz="1800" dirty="0"/>
+          </a:p>
+        </p:txBody>
+      </p:sp>
+      <p:sp>
+        <p:nvSpPr>
+          <p:cNvPr id="6" name="Summary row 2"/>
           <p:cNvSpPr/>
           <p:nvPr/>
         </p:nvSpPr>
         <p:spPr>
           <a:xfrm>
-            <a:off x="822960" y="2423160"/>
-            <a:ext cx="566928" cy="566928"/>
-          </a:xfrm>
-          <a:prstGeom prst="ellipse">
-            <a:avLst/>
+            <a:off x="548640" y="2743200"/>
+            <a:ext cx="11094415" cy="1097280"/>
+          </a:xfrm>
+          <a:prstGeom prst="roundRect">
+            <a:avLst>
+              <a:gd name="adj" fmla="val 10000"/>
+            </a:avLst>
           </a:prstGeom>
           <a:solidFill>
-            <a:schemeClr val="accent4"/>
+            <a:schemeClr val="tx2"/>
           </a:solidFill>
           <a:ln w="12700">
             <a:solidFill>
-              <a:schemeClr val="accent4"/>
+              <a:schemeClr val="tx2"/>
             </a:solidFill>
             <a:prstDash val="solid"/>
           </a:ln>
         </p:spPr>
       </p:sp>
-      <p:pic>
-        <p:nvPicPr>
-          <p:cNvPr id="6" name="Image 0" descr="FaCut">    </p:cNvPr>
-          <p:cNvPicPr>
-            <a:picLocks noChangeAspect="1"/>
-          </p:cNvPicPr>
-          <p:nvPr/>
-        </p:nvPicPr>
-        <p:blipFill>
-          <a:blip r:embed="rId1"/>
-          <a:stretch>
-            <a:fillRect/>
-          </a:stretch>
-        </p:blipFill>
-        <p:spPr>
-          <a:xfrm>
-            <a:off x="964692" y="2564892"/>
-            <a:ext cx="283464" cy="283464"/>
-          </a:xfrm>
-          <a:prstGeom prst="rect">
-            <a:avLst/>
-          </a:prstGeom>
-        </p:spPr>
-      </p:pic>
-      <p:sp>
-        <p:nvSpPr>
-          <p:cNvPr id="7" name="Text 4"/>
+      <p:sp>
+        <p:nvSpPr>
+          <p:cNvPr id="7" name="Text 5"/>
           <p:cNvSpPr txBox="1"/>
           <p:nvPr/>
         </p:nvSpPr>
         <p:spPr>
           <a:xfrm>
-            <a:off x="822960" y="3200400"/>
-            <a:ext cx="2103120" cy="822960"/>
+            <a:off x="914400" y="2743200"/>
+            <a:ext cx="2194560" cy="1097280"/>
           </a:xfrm>
           <a:prstGeom prst="rect">
             <a:avLst/>
@@ -16857,39 +24342,37 @@
           <a:ln/>
         </p:spPr>
         <p:txBody>
-          <a:bodyPr wrap="square" lIns="0" tIns="0" rIns="0" bIns="0" rtlCol="0" anchor="ctr">
-            <a:normAutofit/>
-          </a:bodyPr>
+          <a:bodyPr wrap="square" lIns="0" tIns="0" rIns="0" bIns="0" rtlCol="0" anchor="ctr"/>
           <a:lstStyle/>
           <a:p>
             <a:pPr indent="0" marL="0">
               <a:buNone/>
             </a:pPr>
             <a:r>
-              <a:rPr lang="en-US" sz="3600" b="1" dirty="0">
-                <a:solidFill>
-                  <a:schemeClr val="tx2"/>
+              <a:rPr lang="en-US" sz="2000" b="1" dirty="0">
+                <a:solidFill>
+                  <a:schemeClr val="accent1"/>
                 </a:solidFill>
                 <a:latin typeface="Cambria" pitchFamily="34" charset="0"/>
                 <a:ea typeface="Cambria" pitchFamily="34" charset="-122"/>
                 <a:cs typeface="Cambria" pitchFamily="34" charset="-120"/>
               </a:rPr>
-              <a:t>20,6%</a:t>
-            </a:r>
-            <a:endParaRPr lang="en-US" sz="3600" dirty="0"/>
-          </a:p>
-        </p:txBody>
-      </p:sp>
-      <p:sp>
-        <p:nvSpPr>
-          <p:cNvPr id="8" name="Text 5"/>
+              <a:t>Pergunta</a:t>
+            </a:r>
+            <a:endParaRPr lang="en-US" sz="2000" dirty="0"/>
+          </a:p>
+        </p:txBody>
+      </p:sp>
+      <p:sp>
+        <p:nvSpPr>
+          <p:cNvPr id="8" name="Text 6"/>
           <p:cNvSpPr txBox="1"/>
           <p:nvPr/>
         </p:nvSpPr>
         <p:spPr>
           <a:xfrm>
-            <a:off x="822960" y="4114800"/>
-            <a:ext cx="2057400" cy="1463040"/>
+            <a:off x="3291840" y="2743200"/>
+            <a:ext cx="7985455" cy="1097280"/>
           </a:xfrm>
           <a:prstGeom prst="rect">
             <a:avLst/>
@@ -16898,117 +24381,163 @@
           <a:ln/>
         </p:spPr>
         <p:txBody>
-          <a:bodyPr wrap="square" lIns="0" tIns="0" rIns="0" bIns="0" rtlCol="0" anchor="t"/>
+          <a:bodyPr wrap="square" lIns="0" tIns="0" rIns="0" bIns="0" rtlCol="0" anchor="ctr"/>
           <a:lstStyle/>
           <a:p>
             <a:pPr indent="0" marL="0">
               <a:buNone/>
             </a:pPr>
             <a:r>
-              <a:rPr lang="en-US" sz="1400" dirty="0">
-                <a:solidFill>
-                  <a:schemeClr val="tx1"/>
-                </a:solidFill>
-              </a:rPr>
-              <a:t>da geração eólica e solar disponível não foi aproveitada em 2025</a:t>
-            </a:r>
-            <a:endParaRPr lang="en-US" sz="1400" dirty="0"/>
-          </a:p>
-        </p:txBody>
-      </p:sp>
-      <p:sp>
-        <p:nvSpPr>
-          <p:cNvPr id="9" name="Stat card 2"/>
+              <a:rPr lang="en-US" sz="1800" dirty="0">
+                <a:solidFill>
+                  <a:schemeClr val="bg1"/>
+                </a:solidFill>
+              </a:rPr>
+              <a:t>O ganho do sistema com baterias cobre os encargos das fontes?</a:t>
+            </a:r>
+            <a:endParaRPr lang="en-US" sz="1800" dirty="0"/>
+          </a:p>
+        </p:txBody>
+      </p:sp>
+      <p:sp>
+        <p:nvSpPr>
+          <p:cNvPr id="9" name="Summary row 3"/>
           <p:cNvSpPr/>
           <p:nvPr/>
         </p:nvSpPr>
         <p:spPr>
           <a:xfrm>
-            <a:off x="3383280" y="2148840"/>
-            <a:ext cx="2560320" cy="3291840"/>
+            <a:off x="548640" y="4023360"/>
+            <a:ext cx="11094415" cy="1097280"/>
           </a:xfrm>
           <a:prstGeom prst="roundRect">
             <a:avLst>
-              <a:gd name="adj" fmla="val 4286"/>
+              <a:gd name="adj" fmla="val 10000"/>
             </a:avLst>
           </a:prstGeom>
           <a:solidFill>
-            <a:schemeClr val="bg1"/>
+            <a:schemeClr val="tx2"/>
           </a:solidFill>
           <a:ln w="12700">
             <a:solidFill>
-              <a:schemeClr val="bg1"/>
+              <a:schemeClr val="tx2"/>
             </a:solidFill>
             <a:prstDash val="solid"/>
           </a:ln>
-          <a:effectLst>
-            <a:outerShdw sx="100000" sy="100000" kx="0" ky="0" algn="bl" rotWithShape="0" blurRad="101600" dist="25400" dir="5400000">
-              <a:srgbClr val="0B1A2E">
-                <a:alpha val="12000"/>
-              </a:srgbClr>
-            </a:outerShdw>
-          </a:effectLst>
-        </p:spPr>
-      </p:sp>
-      <p:sp>
-        <p:nvSpPr>
-          <p:cNvPr id="10" name="Icon circle"/>
+        </p:spPr>
+      </p:sp>
+      <p:sp>
+        <p:nvSpPr>
+          <p:cNvPr id="10" name="Text 8"/>
+          <p:cNvSpPr txBox="1"/>
+          <p:nvPr/>
+        </p:nvSpPr>
+        <p:spPr>
+          <a:xfrm>
+            <a:off x="914400" y="4023360"/>
+            <a:ext cx="2194560" cy="1097280"/>
+          </a:xfrm>
+          <a:prstGeom prst="rect">
+            <a:avLst/>
+          </a:prstGeom>
+          <a:noFill/>
+          <a:ln/>
+        </p:spPr>
+        <p:txBody>
+          <a:bodyPr wrap="square" lIns="0" tIns="0" rIns="0" bIns="0" rtlCol="0" anchor="ctr"/>
+          <a:lstStyle/>
+          <a:p>
+            <a:pPr indent="0" marL="0">
+              <a:buNone/>
+            </a:pPr>
+            <a:r>
+              <a:rPr lang="en-US" sz="2000" b="1" dirty="0">
+                <a:solidFill>
+                  <a:schemeClr val="accent1"/>
+                </a:solidFill>
+                <a:latin typeface="Cambria" pitchFamily="34" charset="0"/>
+                <a:ea typeface="Cambria" pitchFamily="34" charset="-122"/>
+                <a:cs typeface="Cambria" pitchFamily="34" charset="-120"/>
+              </a:rPr>
+              <a:t>Método</a:t>
+            </a:r>
+            <a:endParaRPr lang="en-US" sz="2000" dirty="0"/>
+          </a:p>
+        </p:txBody>
+      </p:sp>
+      <p:sp>
+        <p:nvSpPr>
+          <p:cNvPr id="11" name="Text 9"/>
+          <p:cNvSpPr txBox="1"/>
+          <p:nvPr/>
+        </p:nvSpPr>
+        <p:spPr>
+          <a:xfrm>
+            <a:off x="3291840" y="4023360"/>
+            <a:ext cx="7985455" cy="1097280"/>
+          </a:xfrm>
+          <a:prstGeom prst="rect">
+            <a:avLst/>
+          </a:prstGeom>
+          <a:noFill/>
+          <a:ln/>
+        </p:spPr>
+        <p:txBody>
+          <a:bodyPr wrap="square" lIns="0" tIns="0" rIns="0" bIns="0" rtlCol="0" anchor="ctr"/>
+          <a:lstStyle/>
+          <a:p>
+            <a:pPr indent="0" marL="0">
+              <a:buNone/>
+            </a:pPr>
+            <a:r>
+              <a:rPr lang="en-US" sz="1800" dirty="0">
+                <a:solidFill>
+                  <a:schemeClr val="bg1"/>
+                </a:solidFill>
+              </a:rPr>
+              <a:t>Simulações horárias sem e com baterias (NE + SE, 4 h) em cenários de MMGD.</a:t>
+            </a:r>
+            <a:endParaRPr lang="en-US" sz="1800" dirty="0"/>
+          </a:p>
+        </p:txBody>
+      </p:sp>
+      <p:sp>
+        <p:nvSpPr>
+          <p:cNvPr id="12" name="Summary row 4"/>
           <p:cNvSpPr/>
           <p:nvPr/>
         </p:nvSpPr>
         <p:spPr>
           <a:xfrm>
-            <a:off x="3657600" y="2423160"/>
-            <a:ext cx="566928" cy="566928"/>
-          </a:xfrm>
-          <a:prstGeom prst="ellipse">
-            <a:avLst/>
+            <a:off x="548640" y="5303520"/>
+            <a:ext cx="11094415" cy="1097280"/>
+          </a:xfrm>
+          <a:prstGeom prst="roundRect">
+            <a:avLst>
+              <a:gd name="adj" fmla="val 10000"/>
+            </a:avLst>
           </a:prstGeom>
           <a:solidFill>
-            <a:schemeClr val="accent1"/>
+            <a:schemeClr val="tx2"/>
           </a:solidFill>
           <a:ln w="12700">
             <a:solidFill>
-              <a:schemeClr val="accent1"/>
+              <a:schemeClr val="tx2"/>
             </a:solidFill>
             <a:prstDash val="solid"/>
           </a:ln>
         </p:spPr>
       </p:sp>
-      <p:pic>
-        <p:nvPicPr>
-          <p:cNvPr id="11" name="Image 1" descr="FaCoins">    </p:cNvPr>
-          <p:cNvPicPr>
-            <a:picLocks noChangeAspect="1"/>
-          </p:cNvPicPr>
-          <p:nvPr/>
-        </p:nvPicPr>
-        <p:blipFill>
-          <a:blip r:embed="rId2"/>
-          <a:stretch>
-            <a:fillRect/>
-          </a:stretch>
-        </p:blipFill>
-        <p:spPr>
-          <a:xfrm>
-            <a:off x="3799332" y="2564892"/>
-            <a:ext cx="283464" cy="283464"/>
-          </a:xfrm>
-          <a:prstGeom prst="rect">
-            <a:avLst/>
-          </a:prstGeom>
-        </p:spPr>
-      </p:pic>
-      <p:sp>
-        <p:nvSpPr>
-          <p:cNvPr id="12" name="Text 8"/>
+      <p:sp>
+        <p:nvSpPr>
+          <p:cNvPr id="13" name="Text 11"/>
           <p:cNvSpPr txBox="1"/>
           <p:nvPr/>
         </p:nvSpPr>
         <p:spPr>
           <a:xfrm>
-            <a:off x="3657600" y="3200400"/>
-            <a:ext cx="2103120" cy="822960"/>
+            <a:off x="914400" y="5303520"/>
+            <a:ext cx="2194560" cy="1097280"/>
           </a:xfrm>
           <a:prstGeom prst="rect">
             <a:avLst/>
@@ -17017,39 +24546,37 @@
           <a:ln/>
         </p:spPr>
         <p:txBody>
-          <a:bodyPr wrap="square" lIns="0" tIns="0" rIns="0" bIns="0" rtlCol="0" anchor="ctr">
-            <a:normAutofit/>
-          </a:bodyPr>
+          <a:bodyPr wrap="square" lIns="0" tIns="0" rIns="0" bIns="0" rtlCol="0" anchor="ctr"/>
           <a:lstStyle/>
           <a:p>
             <a:pPr indent="0" marL="0">
               <a:buNone/>
             </a:pPr>
             <a:r>
-              <a:rPr lang="en-US" sz="3600" b="1" dirty="0">
-                <a:solidFill>
-                  <a:schemeClr val="tx2"/>
+              <a:rPr lang="en-US" sz="2000" b="1" dirty="0">
+                <a:solidFill>
+                  <a:schemeClr val="accent1"/>
                 </a:solidFill>
                 <a:latin typeface="Cambria" pitchFamily="34" charset="0"/>
                 <a:ea typeface="Cambria" pitchFamily="34" charset="-122"/>
                 <a:cs typeface="Cambria" pitchFamily="34" charset="-120"/>
               </a:rPr>
-              <a:t>R$ 6 bi+</a:t>
-            </a:r>
-            <a:endParaRPr lang="en-US" sz="3600" dirty="0"/>
-          </a:p>
-        </p:txBody>
-      </p:sp>
-      <p:sp>
-        <p:nvSpPr>
-          <p:cNvPr id="13" name="Text 9"/>
+              <a:t>Resposta</a:t>
+            </a:r>
+            <a:endParaRPr lang="en-US" sz="2000" dirty="0"/>
+          </a:p>
+        </p:txBody>
+      </p:sp>
+      <p:sp>
+        <p:nvSpPr>
+          <p:cNvPr id="14" name="Text 12"/>
           <p:cNvSpPr txBox="1"/>
           <p:nvPr/>
         </p:nvSpPr>
         <p:spPr>
           <a:xfrm>
-            <a:off x="3657600" y="4114800"/>
-            <a:ext cx="2057400" cy="1463040"/>
+            <a:off x="3291840" y="5303520"/>
+            <a:ext cx="7985455" cy="1097280"/>
           </a:xfrm>
           <a:prstGeom prst="rect">
             <a:avLst/>
@@ -17058,422 +24585,21 @@
           <a:ln/>
         </p:spPr>
         <p:txBody>
-          <a:bodyPr wrap="square" lIns="0" tIns="0" rIns="0" bIns="0" rtlCol="0" anchor="t"/>
+          <a:bodyPr wrap="square" lIns="0" tIns="0" rIns="0" bIns="0" rtlCol="0" anchor="ctr"/>
           <a:lstStyle/>
           <a:p>
             <a:pPr indent="0" marL="0">
               <a:buNone/>
             </a:pPr>
             <a:r>
-              <a:rPr lang="en-US" sz="1400" dirty="0">
-                <a:solidFill>
-                  <a:schemeClr val="tx1"/>
-                </a:solidFill>
-              </a:rPr>
-              <a:t>de perdas estimadas dos geradores eólicos e solares com cortes em 2025</a:t>
-            </a:r>
-            <a:endParaRPr lang="en-US" sz="1400" dirty="0"/>
-          </a:p>
-        </p:txBody>
-      </p:sp>
-      <p:sp>
-        <p:nvSpPr>
-          <p:cNvPr id="14" name="Stat card 3"/>
-          <p:cNvSpPr/>
-          <p:nvPr/>
-        </p:nvSpPr>
-        <p:spPr>
-          <a:xfrm>
-            <a:off x="6217920" y="2148840"/>
-            <a:ext cx="2560320" cy="3291840"/>
-          </a:xfrm>
-          <a:prstGeom prst="roundRect">
-            <a:avLst>
-              <a:gd name="adj" fmla="val 4286"/>
-            </a:avLst>
-          </a:prstGeom>
-          <a:solidFill>
-            <a:schemeClr val="bg1"/>
-          </a:solidFill>
-          <a:ln w="12700">
-            <a:solidFill>
-              <a:schemeClr val="bg1"/>
-            </a:solidFill>
-            <a:prstDash val="solid"/>
-          </a:ln>
-          <a:effectLst>
-            <a:outerShdw sx="100000" sy="100000" kx="0" ky="0" algn="bl" rotWithShape="0" blurRad="101600" dist="25400" dir="5400000">
-              <a:srgbClr val="0B1A2E">
-                <a:alpha val="12000"/>
-              </a:srgbClr>
-            </a:outerShdw>
-          </a:effectLst>
-        </p:spPr>
-      </p:sp>
-      <p:sp>
-        <p:nvSpPr>
-          <p:cNvPr id="15" name="Icon circle"/>
-          <p:cNvSpPr/>
-          <p:nvPr/>
-        </p:nvSpPr>
-        <p:spPr>
-          <a:xfrm>
-            <a:off x="6492240" y="2423160"/>
-            <a:ext cx="566928" cy="566928"/>
-          </a:xfrm>
-          <a:prstGeom prst="ellipse">
-            <a:avLst/>
-          </a:prstGeom>
-          <a:solidFill>
-            <a:schemeClr val="accent2"/>
-          </a:solidFill>
-          <a:ln w="12700">
-            <a:solidFill>
-              <a:schemeClr val="accent2"/>
-            </a:solidFill>
-            <a:prstDash val="solid"/>
-          </a:ln>
-        </p:spPr>
-      </p:sp>
-      <p:pic>
-        <p:nvPicPr>
-          <p:cNvPr id="16" name="Image 2" descr="FaSolarPanel">    </p:cNvPr>
-          <p:cNvPicPr>
-            <a:picLocks noChangeAspect="1"/>
-          </p:cNvPicPr>
-          <p:nvPr/>
-        </p:nvPicPr>
-        <p:blipFill>
-          <a:blip r:embed="rId3"/>
-          <a:stretch>
-            <a:fillRect/>
-          </a:stretch>
-        </p:blipFill>
-        <p:spPr>
-          <a:xfrm>
-            <a:off x="6633972" y="2564892"/>
-            <a:ext cx="283464" cy="283464"/>
-          </a:xfrm>
-          <a:prstGeom prst="rect">
-            <a:avLst/>
-          </a:prstGeom>
-        </p:spPr>
-      </p:pic>
-      <p:sp>
-        <p:nvSpPr>
-          <p:cNvPr id="17" name="Text 12"/>
-          <p:cNvSpPr txBox="1"/>
-          <p:nvPr/>
-        </p:nvSpPr>
-        <p:spPr>
-          <a:xfrm>
-            <a:off x="6492240" y="3200400"/>
-            <a:ext cx="2103120" cy="822960"/>
-          </a:xfrm>
-          <a:prstGeom prst="rect">
-            <a:avLst/>
-          </a:prstGeom>
-          <a:noFill/>
-          <a:ln/>
-        </p:spPr>
-        <p:txBody>
-          <a:bodyPr wrap="square" lIns="0" tIns="0" rIns="0" bIns="0" rtlCol="0" anchor="ctr">
-            <a:normAutofit/>
-          </a:bodyPr>
-          <a:lstStyle/>
-          <a:p>
-            <a:pPr indent="0" marL="0">
-              <a:buNone/>
-            </a:pPr>
-            <a:r>
-              <a:rPr lang="en-US" sz="3600" b="1" dirty="0">
-                <a:solidFill>
-                  <a:schemeClr val="tx2"/>
-                </a:solidFill>
-                <a:latin typeface="Cambria" pitchFamily="34" charset="0"/>
-                <a:ea typeface="Cambria" pitchFamily="34" charset="-122"/>
-                <a:cs typeface="Cambria" pitchFamily="34" charset="-120"/>
-              </a:rPr>
-              <a:t>~40%</a:t>
-            </a:r>
-            <a:endParaRPr lang="en-US" sz="3600" dirty="0"/>
-          </a:p>
-        </p:txBody>
-      </p:sp>
-      <p:sp>
-        <p:nvSpPr>
-          <p:cNvPr id="18" name="Text 13"/>
-          <p:cNvSpPr txBox="1"/>
-          <p:nvPr/>
-        </p:nvSpPr>
-        <p:spPr>
-          <a:xfrm>
-            <a:off x="6492240" y="4114800"/>
-            <a:ext cx="2057400" cy="1463040"/>
-          </a:xfrm>
-          <a:prstGeom prst="rect">
-            <a:avLst/>
-          </a:prstGeom>
-          <a:noFill/>
-          <a:ln/>
-        </p:spPr>
-        <p:txBody>
-          <a:bodyPr wrap="square" lIns="0" tIns="0" rIns="0" bIns="0" rtlCol="0" anchor="t"/>
-          <a:lstStyle/>
-          <a:p>
-            <a:pPr indent="0" marL="0">
-              <a:buNone/>
-            </a:pPr>
-            <a:r>
-              <a:rPr lang="en-US" sz="1400" dirty="0">
-                <a:solidFill>
-                  <a:schemeClr val="tx1"/>
-                </a:solidFill>
-              </a:rPr>
-              <a:t>da carga atendida pela MMGD em 10/08/2025, com UHEs e UTEs no mínimo técnico</a:t>
-            </a:r>
-            <a:endParaRPr lang="en-US" sz="1400" dirty="0"/>
-          </a:p>
-        </p:txBody>
-      </p:sp>
-      <p:sp>
-        <p:nvSpPr>
-          <p:cNvPr id="19" name="Stat card 4"/>
-          <p:cNvSpPr/>
-          <p:nvPr/>
-        </p:nvSpPr>
-        <p:spPr>
-          <a:xfrm>
-            <a:off x="9052560" y="2148840"/>
-            <a:ext cx="2560320" cy="3291840"/>
-          </a:xfrm>
-          <a:prstGeom prst="roundRect">
-            <a:avLst>
-              <a:gd name="adj" fmla="val 4286"/>
-            </a:avLst>
-          </a:prstGeom>
-          <a:solidFill>
-            <a:schemeClr val="bg1"/>
-          </a:solidFill>
-          <a:ln w="12700">
-            <a:solidFill>
-              <a:schemeClr val="bg1"/>
-            </a:solidFill>
-            <a:prstDash val="solid"/>
-          </a:ln>
-          <a:effectLst>
-            <a:outerShdw sx="100000" sy="100000" kx="0" ky="0" algn="bl" rotWithShape="0" blurRad="101600" dist="25400" dir="5400000">
-              <a:srgbClr val="0B1A2E">
-                <a:alpha val="12000"/>
-              </a:srgbClr>
-            </a:outerShdw>
-          </a:effectLst>
-        </p:spPr>
-      </p:sp>
-      <p:sp>
-        <p:nvSpPr>
-          <p:cNvPr id="20" name="Icon circle"/>
-          <p:cNvSpPr/>
-          <p:nvPr/>
-        </p:nvSpPr>
-        <p:spPr>
-          <a:xfrm>
-            <a:off x="9326880" y="2423160"/>
-            <a:ext cx="566928" cy="566928"/>
-          </a:xfrm>
-          <a:prstGeom prst="ellipse">
-            <a:avLst/>
-          </a:prstGeom>
-          <a:solidFill>
-            <a:schemeClr val="accent3"/>
-          </a:solidFill>
-          <a:ln w="12700">
-            <a:solidFill>
-              <a:schemeClr val="accent3"/>
-            </a:solidFill>
-            <a:prstDash val="solid"/>
-          </a:ln>
-        </p:spPr>
-      </p:sp>
-      <p:pic>
-        <p:nvPicPr>
-          <p:cNvPr id="21" name="Image 3" descr="FaChartLine">    </p:cNvPr>
-          <p:cNvPicPr>
-            <a:picLocks noChangeAspect="1"/>
-          </p:cNvPicPr>
-          <p:nvPr/>
-        </p:nvPicPr>
-        <p:blipFill>
-          <a:blip r:embed="rId4"/>
-          <a:stretch>
-            <a:fillRect/>
-          </a:stretch>
-        </p:blipFill>
-        <p:spPr>
-          <a:xfrm>
-            <a:off x="9468612" y="2564892"/>
-            <a:ext cx="283464" cy="283464"/>
-          </a:xfrm>
-          <a:prstGeom prst="rect">
-            <a:avLst/>
-          </a:prstGeom>
-        </p:spPr>
-      </p:pic>
-      <p:sp>
-        <p:nvSpPr>
-          <p:cNvPr id="22" name="Text 16"/>
-          <p:cNvSpPr txBox="1"/>
-          <p:nvPr/>
-        </p:nvSpPr>
-        <p:spPr>
-          <a:xfrm>
-            <a:off x="9326880" y="3200400"/>
-            <a:ext cx="2103120" cy="822960"/>
-          </a:xfrm>
-          <a:prstGeom prst="rect">
-            <a:avLst/>
-          </a:prstGeom>
-          <a:noFill/>
-          <a:ln/>
-        </p:spPr>
-        <p:txBody>
-          <a:bodyPr wrap="square" lIns="0" tIns="0" rIns="0" bIns="0" rtlCol="0" anchor="ctr">
-            <a:normAutofit/>
-          </a:bodyPr>
-          <a:lstStyle/>
-          <a:p>
-            <a:pPr indent="0" marL="0">
-              <a:buNone/>
-            </a:pPr>
-            <a:r>
-              <a:rPr lang="en-US" sz="3600" b="1" dirty="0">
-                <a:solidFill>
-                  <a:schemeClr val="tx2"/>
-                </a:solidFill>
-                <a:latin typeface="Cambria" pitchFamily="34" charset="0"/>
-                <a:ea typeface="Cambria" pitchFamily="34" charset="-122"/>
-                <a:cs typeface="Cambria" pitchFamily="34" charset="-120"/>
-              </a:rPr>
-              <a:t>47–71 GW</a:t>
-            </a:r>
-            <a:endParaRPr lang="en-US" sz="3600" dirty="0"/>
-          </a:p>
-        </p:txBody>
-      </p:sp>
-      <p:sp>
-        <p:nvSpPr>
-          <p:cNvPr id="23" name="Text 17"/>
-          <p:cNvSpPr txBox="1"/>
-          <p:nvPr/>
-        </p:nvSpPr>
-        <p:spPr>
-          <a:xfrm>
-            <a:off x="9326880" y="4114800"/>
-            <a:ext cx="2057400" cy="1463040"/>
-          </a:xfrm>
-          <a:prstGeom prst="rect">
-            <a:avLst/>
-          </a:prstGeom>
-          <a:noFill/>
-          <a:ln/>
-        </p:spPr>
-        <p:txBody>
-          <a:bodyPr wrap="square" lIns="0" tIns="0" rIns="0" bIns="0" rtlCol="0" anchor="t"/>
-          <a:lstStyle/>
-          <a:p>
-            <a:pPr indent="0" marL="0">
-              <a:buNone/>
-            </a:pPr>
-            <a:r>
-              <a:rPr lang="en-US" sz="1400" dirty="0">
-                <a:solidFill>
-                  <a:schemeClr val="tx1"/>
-                </a:solidFill>
-              </a:rPr>
-              <a:t>de MMGD projetados pela EPE para 2034 (referência: 59 GW)</a:t>
-            </a:r>
-            <a:endParaRPr lang="en-US" sz="1400" dirty="0"/>
-          </a:p>
-        </p:txBody>
-      </p:sp>
-      <p:sp>
-        <p:nvSpPr>
-          <p:cNvPr id="24" name="Text 18"/>
-          <p:cNvSpPr txBox="1"/>
-          <p:nvPr/>
-        </p:nvSpPr>
-        <p:spPr>
-          <a:xfrm>
-            <a:off x="548640" y="6382512"/>
-            <a:ext cx="10424160" cy="274320"/>
-          </a:xfrm>
-          <a:prstGeom prst="rect">
-            <a:avLst/>
-          </a:prstGeom>
-          <a:noFill/>
-          <a:ln/>
-        </p:spPr>
-        <p:txBody>
-          <a:bodyPr wrap="square" lIns="0" tIns="0" rIns="0" bIns="0" rtlCol="0" anchor="ctr"/>
-          <a:lstStyle/>
-          <a:p>
-            <a:pPr indent="0" marL="0">
-              <a:buNone/>
-            </a:pPr>
-            <a:r>
-              <a:rPr lang="en-US" sz="1000" i="1" dirty="0">
-                <a:solidFill>
-                  <a:schemeClr val="tx2"/>
-                </a:solidFill>
-              </a:rPr>
-              <a:t>Fontes: ONS (2025); Acende Brasil (2025); Volts Robotics via Agência Infra (2025); EPE/MME, PDE 2034, Caderno MMGD e Baterias (2024). Estimativas de cortes variam conforme a metodologia.</a:t>
-            </a:r>
-            <a:endParaRPr lang="en-US" sz="1000" dirty="0"/>
-          </a:p>
-        </p:txBody>
-      </p:sp>
-      <p:sp>
-        <p:nvSpPr>
-          <p:cNvPr id="25" name="Slide Number Placeholder 0"/>
-          <p:cNvSpPr>
-            <a:spLocks noGrp="1"/>
-          </p:cNvSpPr>
-          <p:nvPr>
-            <p:ph type="sldNum" sz="quarter" idx="4294967295"/>
-          </p:nvPr>
-        </p:nvSpPr>
-        <p:spPr>
-          <a:xfrm>
-            <a:off x="11155680" y="6400800"/>
-            <a:ext cx="548640" cy="274320"/>
-          </a:xfrm>
-          <a:prstGeom prst="rect">
-            <a:avLst/>
-          </a:prstGeom>
-          <a:extLst>
-            <a:ext uri="{C572A759-6A51-4108-AA02-DFA0A04FC94B}">
-              <ma14:wrappingTextBoxFlag xmlns:ma14="http://schemas.microsoft.com/office/mac/drawingml/2011/main" val="0"/>
-            </a:ext>
-          </a:extLst>
-        </p:spPr>
-        <p:txBody>
-          <a:bodyPr/>
-          <a:lstStyle>
-            <a:lvl1pPr>
-              <a:defRPr sz="1100">
-                <a:solidFill>
-                  <a:schemeClr val="tx2"/>
-                </a:solidFill>
-              </a:defRPr>
-            </a:lvl1pPr>
-          </a:lstStyle>
-          <a:p>
-            <a:pPr algn="r"/>
-            <a:fld id="{F7021451-1387-4CA6-816F-3879F97B5CBC}" type="slidenum">
-              <a:rPr b="0" lang="en-US"/>
-              <a:t>2</a:t>
-            </a:fld>
-            <a:endParaRPr lang="en-US"/>
+              <a:rPr lang="en-US" sz="1800" dirty="0">
+                <a:solidFill>
+                  <a:schemeClr val="bg1"/>
+                </a:solidFill>
+              </a:rPr>
+              <a:t>ΔCTO comparado à soma dos encargos, no sistema e por fonte.</a:t>
+            </a:r>
+            <a:endParaRPr lang="en-US" sz="1800" dirty="0"/>
           </a:p>
         </p:txBody>
       </p:sp>
@@ -17485,9 +24611,9 @@
 </p:sld>
 </file>
 
-<file path=ppt/slides/slide20.xml><?xml version="1.0" encoding="utf-8"?>
+<file path=ppt/slides/slide24.xml><?xml version="1.0" encoding="utf-8"?>
 <p:sld xmlns:a="http://schemas.openxmlformats.org/drawingml/2006/main" xmlns:r="http://schemas.openxmlformats.org/officeDocument/2006/relationships" xmlns:p="http://schemas.openxmlformats.org/presentationml/2006/main">
-  <p:cSld name="Slide 20">
+  <p:cSld name="Slide 24">
     <p:spTree>
       <p:nvGrpSpPr>
         <p:cNvPr id="1" name=""/>
@@ -17531,477 +24657,6 @@
             <a:r>
               <a:rPr lang="en-US" sz="3200" b="1" dirty="0">
                 <a:solidFill>
-                  <a:schemeClr val="bg1"/>
-                </a:solidFill>
-              </a:rPr>
-              <a:t>Síntese</a:t>
-            </a:r>
-            <a:endParaRPr lang="en-US" sz="3200" dirty="0"/>
-          </a:p>
-        </p:txBody>
-      </p:sp>
-      <p:sp>
-        <p:nvSpPr>
-          <p:cNvPr id="3" name="Summary row 1"/>
-          <p:cNvSpPr/>
-          <p:nvPr/>
-        </p:nvSpPr>
-        <p:spPr>
-          <a:xfrm>
-            <a:off x="548640" y="1463040"/>
-            <a:ext cx="11094415" cy="1097280"/>
-          </a:xfrm>
-          <a:prstGeom prst="roundRect">
-            <a:avLst>
-              <a:gd name="adj" fmla="val 10000"/>
-            </a:avLst>
-          </a:prstGeom>
-          <a:solidFill>
-            <a:schemeClr val="tx2"/>
-          </a:solidFill>
-          <a:ln w="12700">
-            <a:solidFill>
-              <a:schemeClr val="tx2"/>
-            </a:solidFill>
-            <a:prstDash val="solid"/>
-          </a:ln>
-        </p:spPr>
-      </p:sp>
-      <p:sp>
-        <p:nvSpPr>
-          <p:cNvPr id="4" name="Text 2"/>
-          <p:cNvSpPr txBox="1"/>
-          <p:nvPr/>
-        </p:nvSpPr>
-        <p:spPr>
-          <a:xfrm>
-            <a:off x="914400" y="1463040"/>
-            <a:ext cx="2194560" cy="1097280"/>
-          </a:xfrm>
-          <a:prstGeom prst="rect">
-            <a:avLst/>
-          </a:prstGeom>
-          <a:noFill/>
-          <a:ln/>
-        </p:spPr>
-        <p:txBody>
-          <a:bodyPr wrap="square" lIns="0" tIns="0" rIns="0" bIns="0" rtlCol="0" anchor="ctr"/>
-          <a:lstStyle/>
-          <a:p>
-            <a:pPr indent="0" marL="0">
-              <a:buNone/>
-            </a:pPr>
-            <a:r>
-              <a:rPr lang="en-US" sz="2000" b="1" dirty="0">
-                <a:solidFill>
-                  <a:schemeClr val="accent1"/>
-                </a:solidFill>
-                <a:latin typeface="Cambria" pitchFamily="34" charset="0"/>
-                <a:ea typeface="Cambria" pitchFamily="34" charset="-122"/>
-                <a:cs typeface="Cambria" pitchFamily="34" charset="-120"/>
-              </a:rPr>
-              <a:t>Problema</a:t>
-            </a:r>
-            <a:endParaRPr lang="en-US" sz="2000" dirty="0"/>
-          </a:p>
-        </p:txBody>
-      </p:sp>
-      <p:sp>
-        <p:nvSpPr>
-          <p:cNvPr id="5" name="Text 3"/>
-          <p:cNvSpPr txBox="1"/>
-          <p:nvPr/>
-        </p:nvSpPr>
-        <p:spPr>
-          <a:xfrm>
-            <a:off x="3291840" y="1463040"/>
-            <a:ext cx="7985455" cy="1097280"/>
-          </a:xfrm>
-          <a:prstGeom prst="rect">
-            <a:avLst/>
-          </a:prstGeom>
-          <a:noFill/>
-          <a:ln/>
-        </p:spPr>
-        <p:txBody>
-          <a:bodyPr wrap="square" lIns="0" tIns="0" rIns="0" bIns="0" rtlCol="0" anchor="ctr"/>
-          <a:lstStyle/>
-          <a:p>
-            <a:pPr indent="0" marL="0">
-              <a:buNone/>
-            </a:pPr>
-            <a:r>
-              <a:rPr lang="en-US" sz="1800" dirty="0">
-                <a:solidFill>
-                  <a:schemeClr val="bg1"/>
-                </a:solidFill>
-              </a:rPr>
-              <a:t>MMGD em expansão gera curtailment e perdas bilionárias.</a:t>
-            </a:r>
-            <a:endParaRPr lang="en-US" sz="1800" dirty="0"/>
-          </a:p>
-        </p:txBody>
-      </p:sp>
-      <p:sp>
-        <p:nvSpPr>
-          <p:cNvPr id="6" name="Summary row 2"/>
-          <p:cNvSpPr/>
-          <p:nvPr/>
-        </p:nvSpPr>
-        <p:spPr>
-          <a:xfrm>
-            <a:off x="548640" y="2743200"/>
-            <a:ext cx="11094415" cy="1097280"/>
-          </a:xfrm>
-          <a:prstGeom prst="roundRect">
-            <a:avLst>
-              <a:gd name="adj" fmla="val 10000"/>
-            </a:avLst>
-          </a:prstGeom>
-          <a:solidFill>
-            <a:schemeClr val="tx2"/>
-          </a:solidFill>
-          <a:ln w="12700">
-            <a:solidFill>
-              <a:schemeClr val="tx2"/>
-            </a:solidFill>
-            <a:prstDash val="solid"/>
-          </a:ln>
-        </p:spPr>
-      </p:sp>
-      <p:sp>
-        <p:nvSpPr>
-          <p:cNvPr id="7" name="Text 5"/>
-          <p:cNvSpPr txBox="1"/>
-          <p:nvPr/>
-        </p:nvSpPr>
-        <p:spPr>
-          <a:xfrm>
-            <a:off x="914400" y="2743200"/>
-            <a:ext cx="2194560" cy="1097280"/>
-          </a:xfrm>
-          <a:prstGeom prst="rect">
-            <a:avLst/>
-          </a:prstGeom>
-          <a:noFill/>
-          <a:ln/>
-        </p:spPr>
-        <p:txBody>
-          <a:bodyPr wrap="square" lIns="0" tIns="0" rIns="0" bIns="0" rtlCol="0" anchor="ctr"/>
-          <a:lstStyle/>
-          <a:p>
-            <a:pPr indent="0" marL="0">
-              <a:buNone/>
-            </a:pPr>
-            <a:r>
-              <a:rPr lang="en-US" sz="2000" b="1" dirty="0">
-                <a:solidFill>
-                  <a:schemeClr val="accent1"/>
-                </a:solidFill>
-                <a:latin typeface="Cambria" pitchFamily="34" charset="0"/>
-                <a:ea typeface="Cambria" pitchFamily="34" charset="-122"/>
-                <a:cs typeface="Cambria" pitchFamily="34" charset="-120"/>
-              </a:rPr>
-              <a:t>Pergunta</a:t>
-            </a:r>
-            <a:endParaRPr lang="en-US" sz="2000" dirty="0"/>
-          </a:p>
-        </p:txBody>
-      </p:sp>
-      <p:sp>
-        <p:nvSpPr>
-          <p:cNvPr id="8" name="Text 6"/>
-          <p:cNvSpPr txBox="1"/>
-          <p:nvPr/>
-        </p:nvSpPr>
-        <p:spPr>
-          <a:xfrm>
-            <a:off x="3291840" y="2743200"/>
-            <a:ext cx="7985455" cy="1097280"/>
-          </a:xfrm>
-          <a:prstGeom prst="rect">
-            <a:avLst/>
-          </a:prstGeom>
-          <a:noFill/>
-          <a:ln/>
-        </p:spPr>
-        <p:txBody>
-          <a:bodyPr wrap="square" lIns="0" tIns="0" rIns="0" bIns="0" rtlCol="0" anchor="ctr"/>
-          <a:lstStyle/>
-          <a:p>
-            <a:pPr indent="0" marL="0">
-              <a:buNone/>
-            </a:pPr>
-            <a:r>
-              <a:rPr lang="en-US" sz="1800" dirty="0">
-                <a:solidFill>
-                  <a:schemeClr val="bg1"/>
-                </a:solidFill>
-              </a:rPr>
-              <a:t>O ganho do sistema com baterias cobre os encargos das fontes?</a:t>
-            </a:r>
-            <a:endParaRPr lang="en-US" sz="1800" dirty="0"/>
-          </a:p>
-        </p:txBody>
-      </p:sp>
-      <p:sp>
-        <p:nvSpPr>
-          <p:cNvPr id="9" name="Summary row 3"/>
-          <p:cNvSpPr/>
-          <p:nvPr/>
-        </p:nvSpPr>
-        <p:spPr>
-          <a:xfrm>
-            <a:off x="548640" y="4023360"/>
-            <a:ext cx="11094415" cy="1097280"/>
-          </a:xfrm>
-          <a:prstGeom prst="roundRect">
-            <a:avLst>
-              <a:gd name="adj" fmla="val 10000"/>
-            </a:avLst>
-          </a:prstGeom>
-          <a:solidFill>
-            <a:schemeClr val="tx2"/>
-          </a:solidFill>
-          <a:ln w="12700">
-            <a:solidFill>
-              <a:schemeClr val="tx2"/>
-            </a:solidFill>
-            <a:prstDash val="solid"/>
-          </a:ln>
-        </p:spPr>
-      </p:sp>
-      <p:sp>
-        <p:nvSpPr>
-          <p:cNvPr id="10" name="Text 8"/>
-          <p:cNvSpPr txBox="1"/>
-          <p:nvPr/>
-        </p:nvSpPr>
-        <p:spPr>
-          <a:xfrm>
-            <a:off x="914400" y="4023360"/>
-            <a:ext cx="2194560" cy="1097280"/>
-          </a:xfrm>
-          <a:prstGeom prst="rect">
-            <a:avLst/>
-          </a:prstGeom>
-          <a:noFill/>
-          <a:ln/>
-        </p:spPr>
-        <p:txBody>
-          <a:bodyPr wrap="square" lIns="0" tIns="0" rIns="0" bIns="0" rtlCol="0" anchor="ctr"/>
-          <a:lstStyle/>
-          <a:p>
-            <a:pPr indent="0" marL="0">
-              <a:buNone/>
-            </a:pPr>
-            <a:r>
-              <a:rPr lang="en-US" sz="2000" b="1" dirty="0">
-                <a:solidFill>
-                  <a:schemeClr val="accent1"/>
-                </a:solidFill>
-                <a:latin typeface="Cambria" pitchFamily="34" charset="0"/>
-                <a:ea typeface="Cambria" pitchFamily="34" charset="-122"/>
-                <a:cs typeface="Cambria" pitchFamily="34" charset="-120"/>
-              </a:rPr>
-              <a:t>Método</a:t>
-            </a:r>
-            <a:endParaRPr lang="en-US" sz="2000" dirty="0"/>
-          </a:p>
-        </p:txBody>
-      </p:sp>
-      <p:sp>
-        <p:nvSpPr>
-          <p:cNvPr id="11" name="Text 9"/>
-          <p:cNvSpPr txBox="1"/>
-          <p:nvPr/>
-        </p:nvSpPr>
-        <p:spPr>
-          <a:xfrm>
-            <a:off x="3291840" y="4023360"/>
-            <a:ext cx="7985455" cy="1097280"/>
-          </a:xfrm>
-          <a:prstGeom prst="rect">
-            <a:avLst/>
-          </a:prstGeom>
-          <a:noFill/>
-          <a:ln/>
-        </p:spPr>
-        <p:txBody>
-          <a:bodyPr wrap="square" lIns="0" tIns="0" rIns="0" bIns="0" rtlCol="0" anchor="ctr"/>
-          <a:lstStyle/>
-          <a:p>
-            <a:pPr indent="0" marL="0">
-              <a:buNone/>
-            </a:pPr>
-            <a:r>
-              <a:rPr lang="en-US" sz="1800" dirty="0">
-                <a:solidFill>
-                  <a:schemeClr val="bg1"/>
-                </a:solidFill>
-              </a:rPr>
-              <a:t>Simulações horárias sem e com baterias (NE + SE, 4 h) em cenários de MMGD.</a:t>
-            </a:r>
-            <a:endParaRPr lang="en-US" sz="1800" dirty="0"/>
-          </a:p>
-        </p:txBody>
-      </p:sp>
-      <p:sp>
-        <p:nvSpPr>
-          <p:cNvPr id="12" name="Summary row 4"/>
-          <p:cNvSpPr/>
-          <p:nvPr/>
-        </p:nvSpPr>
-        <p:spPr>
-          <a:xfrm>
-            <a:off x="548640" y="5303520"/>
-            <a:ext cx="11094415" cy="1097280"/>
-          </a:xfrm>
-          <a:prstGeom prst="roundRect">
-            <a:avLst>
-              <a:gd name="adj" fmla="val 10000"/>
-            </a:avLst>
-          </a:prstGeom>
-          <a:solidFill>
-            <a:schemeClr val="tx2"/>
-          </a:solidFill>
-          <a:ln w="12700">
-            <a:solidFill>
-              <a:schemeClr val="tx2"/>
-            </a:solidFill>
-            <a:prstDash val="solid"/>
-          </a:ln>
-        </p:spPr>
-      </p:sp>
-      <p:sp>
-        <p:nvSpPr>
-          <p:cNvPr id="13" name="Text 11"/>
-          <p:cNvSpPr txBox="1"/>
-          <p:nvPr/>
-        </p:nvSpPr>
-        <p:spPr>
-          <a:xfrm>
-            <a:off x="914400" y="5303520"/>
-            <a:ext cx="2194560" cy="1097280"/>
-          </a:xfrm>
-          <a:prstGeom prst="rect">
-            <a:avLst/>
-          </a:prstGeom>
-          <a:noFill/>
-          <a:ln/>
-        </p:spPr>
-        <p:txBody>
-          <a:bodyPr wrap="square" lIns="0" tIns="0" rIns="0" bIns="0" rtlCol="0" anchor="ctr"/>
-          <a:lstStyle/>
-          <a:p>
-            <a:pPr indent="0" marL="0">
-              <a:buNone/>
-            </a:pPr>
-            <a:r>
-              <a:rPr lang="en-US" sz="2000" b="1" dirty="0">
-                <a:solidFill>
-                  <a:schemeClr val="accent1"/>
-                </a:solidFill>
-                <a:latin typeface="Cambria" pitchFamily="34" charset="0"/>
-                <a:ea typeface="Cambria" pitchFamily="34" charset="-122"/>
-                <a:cs typeface="Cambria" pitchFamily="34" charset="-120"/>
-              </a:rPr>
-              <a:t>Resposta</a:t>
-            </a:r>
-            <a:endParaRPr lang="en-US" sz="2000" dirty="0"/>
-          </a:p>
-        </p:txBody>
-      </p:sp>
-      <p:sp>
-        <p:nvSpPr>
-          <p:cNvPr id="14" name="Text 12"/>
-          <p:cNvSpPr txBox="1"/>
-          <p:nvPr/>
-        </p:nvSpPr>
-        <p:spPr>
-          <a:xfrm>
-            <a:off x="3291840" y="5303520"/>
-            <a:ext cx="7985455" cy="1097280"/>
-          </a:xfrm>
-          <a:prstGeom prst="rect">
-            <a:avLst/>
-          </a:prstGeom>
-          <a:noFill/>
-          <a:ln/>
-        </p:spPr>
-        <p:txBody>
-          <a:bodyPr wrap="square" lIns="0" tIns="0" rIns="0" bIns="0" rtlCol="0" anchor="ctr"/>
-          <a:lstStyle/>
-          <a:p>
-            <a:pPr indent="0" marL="0">
-              <a:buNone/>
-            </a:pPr>
-            <a:r>
-              <a:rPr lang="en-US" sz="1800" dirty="0">
-                <a:solidFill>
-                  <a:schemeClr val="bg1"/>
-                </a:solidFill>
-              </a:rPr>
-              <a:t>ΔCTO comparado à soma dos encargos, no sistema e por fonte.</a:t>
-            </a:r>
-            <a:endParaRPr lang="en-US" sz="1800" dirty="0"/>
-          </a:p>
-        </p:txBody>
-      </p:sp>
-    </p:spTree>
-  </p:cSld>
-  <p:clrMapOvr>
-    <a:masterClrMapping/>
-  </p:clrMapOvr>
-</p:sld>
-</file>
-
-<file path=ppt/slides/slide21.xml><?xml version="1.0" encoding="utf-8"?>
-<p:sld xmlns:a="http://schemas.openxmlformats.org/drawingml/2006/main" xmlns:r="http://schemas.openxmlformats.org/officeDocument/2006/relationships" xmlns:p="http://schemas.openxmlformats.org/presentationml/2006/main">
-  <p:cSld name="Slide 21">
-    <p:spTree>
-      <p:nvGrpSpPr>
-        <p:cNvPr id="1" name=""/>
-        <p:cNvGrpSpPr/>
-        <p:nvPr/>
-      </p:nvGrpSpPr>
-      <p:grpSpPr>
-        <a:xfrm>
-          <a:off x="0" y="0"/>
-          <a:ext cx="0" cy="0"/>
-          <a:chOff x="0" y="0"/>
-          <a:chExt cx="0" cy="0"/>
-        </a:xfrm>
-      </p:grpSpPr>
-      <p:sp>
-        <p:nvSpPr>
-          <p:cNvPr id="2" name="Text 0"/>
-          <p:cNvSpPr/>
-          <p:nvPr>
-            <p:ph idx="100" type="title" hasCustomPrompt="1"/>
-          </p:nvPr>
-        </p:nvSpPr>
-        <p:spPr>
-          <a:xfrm>
-            <a:off x="548640" y="365760"/>
-            <a:ext cx="11094415" cy="822960"/>
-          </a:xfrm>
-          <a:prstGeom prst="rect">
-            <a:avLst/>
-          </a:prstGeom>
-          <a:noFill/>
-          <a:ln/>
-        </p:spPr>
-        <p:txBody>
-          <a:bodyPr wrap="square" lIns="0" tIns="0" rIns="0" bIns="0" rtlCol="0" anchor="ctr"/>
-          <a:lstStyle/>
-          <a:p>
-            <a:pPr algn="l" indent="0" marL="0">
-              <a:buNone/>
-            </a:pPr>
-            <a:r>
-              <a:rPr lang="en-US" sz="3200" b="1" dirty="0">
-                <a:solidFill>
                   <a:schemeClr val="tx1"/>
                 </a:solidFill>
               </a:rPr>
@@ -18436,7 +25091,7 @@
             <a:pPr algn="r"/>
             <a:fld id="{F7021451-1387-4CA6-816F-3879F97B5CBC}" type="slidenum">
               <a:rPr b="0" lang="en-US"/>
-              <a:t>21</a:t>
+              <a:t>24</a:t>
             </a:fld>
             <a:endParaRPr lang="en-US"/>
           </a:p>

--- a/Baterias_SIN_Economia_Setor_Eletrico_I.pptx
+++ b/Baterias_SIN_Economia_Setor_Eletrico_I.pptx
@@ -131,12 +131,12 @@
   <p:extLst>
     <p:ext uri="{521415D9-36F7-43E2-AB2F-B90AF26B5E84}">
       <p14:sectionLst xmlns:p14="http://schemas.microsoft.com/office/powerpoint/2010/main">
-        <p14:section name="Abertura" id="{36edeb6e-91a4-0365-74f4-873af5953851}">
+        <p14:section name="Abertura" id="{66bbd201-a693-5c9e-804d-3811eec1350e}">
           <p14:sldIdLst>
             <p14:sldId id="256"/>
           </p14:sldIdLst>
         </p14:section>
-        <p14:section name="Introdução" id="{65caff95-bd64-a356-a4a0-3bcf9611aa9b}">
+        <p14:section name="Introdução" id="{b961fbde-c4eb-606c-e181-03b366a58069}">
           <p14:sldIdLst>
             <p14:sldId id="257"/>
             <p14:sldId id="258"/>
@@ -145,13 +145,13 @@
             <p14:sldId id="261"/>
           </p14:sldIdLst>
         </p14:section>
-        <p14:section name="Objetivos" id="{cdc3bfb1-d238-5371-c585-b5e441886467}">
+        <p14:section name="Objetivos" id="{885a9312-f992-282f-d21d-025d68800ca3}">
           <p14:sldIdLst>
             <p14:sldId id="262"/>
             <p14:sldId id="263"/>
           </p14:sldIdLst>
         </p14:section>
-        <p14:section name="Método" id="{fd6fe593-014e-9fac-f7dd-11de7edbd744}">
+        <p14:section name="Método" id="{80bd6b9b-a47a-ce54-e344-70ae784eb013}">
           <p14:sldIdLst>
             <p14:sldId id="264"/>
             <p14:sldId id="265"/>
@@ -159,13 +159,13 @@
             <p14:sldId id="267"/>
           </p14:sldIdLst>
         </p14:section>
-        <p14:section name="Análise" id="{4a44bdb9-234f-3b08-d971-1f62eba5da9d}">
+        <p14:section name="Análise" id="{501ec1aa-cd57-8916-9117-6eef78707400}">
           <p14:sldIdLst>
             <p14:sldId id="268"/>
             <p14:sldId id="269"/>
           </p14:sldIdLst>
         </p14:section>
-        <p14:section name="Encargos e benefícios" id="{4a3dea8b-7775-9f8f-df75-0c559ca7693d}">
+        <p14:section name="Encargos e benefícios" id="{eb95b551-7e7e-af02-0739-3141f371b355}">
           <p14:sldIdLst>
             <p14:sldId id="270"/>
             <p14:sldId id="271"/>
@@ -178,7 +178,7 @@
             <p14:sldId id="278"/>
           </p14:sldIdLst>
         </p14:section>
-        <p14:section name="Fechamento" id="{0b229d36-c933-3bf1-f17d-a26bd388e0a3}">
+        <p14:section name="Fechamento" id="{66e1ebd0-5d08-8f76-c89c-abcefa339038}">
           <p14:sldIdLst>
             <p14:sldId id="279"/>
             <p14:sldId id="280"/>
@@ -1169,7 +1169,7 @@
               <a:lstStyle/>
               <a:p>
                 <a:pPr>
-                  <a:defRPr b="0" i="0" strike="noStrike" sz="1200" u="none">
+                  <a:defRPr b="0" i="0" strike="noStrike" sz="1100" u="none">
                     <a:solidFill>
                       <a:srgbClr val="0B1A2E"/>
                     </a:solidFill>
@@ -1188,18 +1188,21 @@
           </c:dLbls>
           <c:cat>
             <c:multiLvlStrRef>
-              <c:f>Sheet1!$A$2:$A$4</c:f>
+              <c:f>Sheet1!$A$2:$A$5</c:f>
               <c:multiLvlStrCache>
-                <c:ptCount val="3"/>
+                <c:ptCount val="4"/>
                 <c:lvl>
                   <c:pt idx="0">
                     <c:v>Hidrelétricas</c:v>
                   </c:pt>
                   <c:pt idx="1">
-                    <c:v>Eólicas e solares</c:v>
+                    <c:v>Eólicas</c:v>
                   </c:pt>
                   <c:pt idx="2">
-                    <c:v>Térmicas e demais</c:v>
+                    <c:v>Solares</c:v>
+                  </c:pt>
+                  <c:pt idx="3">
+                    <c:v>Térmicas e biomassa</c:v>
                   </c:pt>
                 </c:lvl>
               </c:multiLvlStrCache>
@@ -1207,18 +1210,21 @@
           </c:cat>
           <c:val>
             <c:numRef>
-              <c:f>Sheet1!$B$2:$B$4</c:f>
+              <c:f>Sheet1!$B$2:$B$5</c:f>
               <c:numCache>
                 <c:formatCode>General</c:formatCode>
-                <c:ptCount val="3"/>
+                <c:ptCount val="4"/>
                 <c:pt idx="0">
-                  <c:v>51.7</c:v>
+                  <c:v>62.3</c:v>
                 </c:pt>
                 <c:pt idx="1">
-                  <c:v>26.4</c:v>
+                  <c:v>17.9</c:v>
                 </c:pt>
                 <c:pt idx="2">
-                  <c:v>21.9</c:v>
+                  <c:v>5.3</c:v>
+                </c:pt>
+                <c:pt idx="3">
+                  <c:v>14.5</c:v>
                 </c:pt>
               </c:numCache>
             </c:numRef>
@@ -1252,7 +1258,7 @@
               <a:lstStyle/>
               <a:p>
                 <a:pPr>
-                  <a:defRPr b="0" i="0" strike="noStrike" sz="1200" u="none">
+                  <a:defRPr b="0" i="0" strike="noStrike" sz="1100" u="none">
                     <a:solidFill>
                       <a:srgbClr val="0B1A2E"/>
                     </a:solidFill>
@@ -1271,18 +1277,21 @@
           </c:dLbls>
           <c:cat>
             <c:multiLvlStrRef>
-              <c:f>Sheet1!$A$2:$A$4</c:f>
+              <c:f>Sheet1!$A$2:$A$5</c:f>
               <c:multiLvlStrCache>
-                <c:ptCount val="3"/>
+                <c:ptCount val="4"/>
                 <c:lvl>
                   <c:pt idx="0">
                     <c:v>Hidrelétricas</c:v>
                   </c:pt>
                   <c:pt idx="1">
-                    <c:v>Eólicas e solares</c:v>
+                    <c:v>Eólicas</c:v>
                   </c:pt>
                   <c:pt idx="2">
-                    <c:v>Térmicas e demais</c:v>
+                    <c:v>Solares</c:v>
+                  </c:pt>
+                  <c:pt idx="3">
+                    <c:v>Térmicas e biomassa</c:v>
                   </c:pt>
                 </c:lvl>
               </c:multiLvlStrCache>
@@ -1290,18 +1299,21 @@
           </c:cat>
           <c:val>
             <c:numRef>
-              <c:f>Sheet1!$C$2:$C$4</c:f>
+              <c:f>Sheet1!$C$2:$C$5</c:f>
               <c:numCache>
                 <c:formatCode>General</c:formatCode>
-                <c:ptCount val="3"/>
+                <c:ptCount val="4"/>
                 <c:pt idx="0">
-                  <c:v>44.6</c:v>
+                  <c:v>54.6</c:v>
                 </c:pt>
                 <c:pt idx="1">
-                  <c:v>36.5</c:v>
+                  <c:v>25.2</c:v>
                 </c:pt>
                 <c:pt idx="2">
-                  <c:v>18.9</c:v>
+                  <c:v>7.5</c:v>
+                </c:pt>
+                <c:pt idx="3">
+                  <c:v>12.7</c:v>
                 </c:pt>
               </c:numCache>
             </c:numRef>
@@ -1335,7 +1347,7 @@
               <a:lstStyle/>
               <a:p>
                 <a:pPr>
-                  <a:defRPr b="0" i="0" strike="noStrike" sz="1200" u="none">
+                  <a:defRPr b="0" i="0" strike="noStrike" sz="1100" u="none">
                     <a:solidFill>
                       <a:srgbClr val="0B1A2E"/>
                     </a:solidFill>
@@ -1354,18 +1366,21 @@
           </c:dLbls>
           <c:cat>
             <c:multiLvlStrRef>
-              <c:f>Sheet1!$A$2:$A$4</c:f>
+              <c:f>Sheet1!$A$2:$A$5</c:f>
               <c:multiLvlStrCache>
-                <c:ptCount val="3"/>
+                <c:ptCount val="4"/>
                 <c:lvl>
                   <c:pt idx="0">
                     <c:v>Hidrelétricas</c:v>
                   </c:pt>
                   <c:pt idx="1">
-                    <c:v>Eólicas e solares</c:v>
+                    <c:v>Eólicas</c:v>
                   </c:pt>
                   <c:pt idx="2">
-                    <c:v>Térmicas e demais</c:v>
+                    <c:v>Solares</c:v>
+                  </c:pt>
+                  <c:pt idx="3">
+                    <c:v>Térmicas e biomassa</c:v>
                   </c:pt>
                 </c:lvl>
               </c:multiLvlStrCache>
@@ -1373,18 +1388,21 @@
           </c:cat>
           <c:val>
             <c:numRef>
-              <c:f>Sheet1!$D$2:$D$4</c:f>
+              <c:f>Sheet1!$D$2:$D$5</c:f>
               <c:numCache>
                 <c:formatCode>General</c:formatCode>
-                <c:ptCount val="3"/>
+                <c:ptCount val="4"/>
                 <c:pt idx="0">
-                  <c:v>28.9</c:v>
+                  <c:v>36.7</c:v>
                 </c:pt>
                 <c:pt idx="1">
-                  <c:v>58.9</c:v>
+                  <c:v>42.2</c:v>
                 </c:pt>
                 <c:pt idx="2">
-                  <c:v>12.2</c:v>
+                  <c:v>12.5</c:v>
+                </c:pt>
+                <c:pt idx="3">
+                  <c:v>8.6</c:v>
                 </c:pt>
               </c:numCache>
             </c:numRef>
@@ -1397,7 +1415,7 @@
             <a:lstStyle/>
             <a:p>
               <a:pPr>
-                <a:defRPr b="0" i="0" strike="noStrike" sz="1200" u="none">
+                <a:defRPr b="0" i="0" strike="noStrike" sz="1100" u="none">
                   <a:solidFill>
                     <a:srgbClr val="0B1A2E"/>
                   </a:solidFill>
@@ -2223,7 +2241,7 @@
           <a:p>
             <a:r>
               <a:rPr lang="en-US" dirty="0"/>
-              <a:t>Abertura: tema, disciplina e identificação. A pergunta central do trabalho é se o ganho sistêmico com baterias cobre os encargos pagos pelas demais fontes.</a:t>
+              <a:t>Abertura: tema, disciplina e identificação. A pergunta central é, para cada fonte (eólicas, solares e UHEs), se o ganho com menos cortes compensa o encargo das baterias.</a:t>
             </a:r>
             <a:endParaRPr lang="en-US" dirty="0"/>
           </a:p>
@@ -2311,7 +2329,7 @@
           <a:p>
             <a:r>
               <a:rPr lang="en-US" dirty="0"/>
-              <a:t>Fluxo em serpentina: a etapa 1 gera a linha de base sem baterias; a etapa 2 repete as simulações com baterias em cenários crescentes de MMGD; a etapa 3 compara os resultados, calcula os encargos por fonte e testa a hipótese.</a:t>
+              <a:t>Fluxo em serpentina: a etapa 1 gera a linha de base sem baterias; a etapa 2 repete as simulações com baterias em níveis crescentes de MMGD; a etapa 3 mede a geração evitada de corte de cada fonte, valora o ganho, estima o encargo pela regra de rateio e calcula o saldo de cada fonte.</a:t>
             </a:r>
             <a:endParaRPr lang="en-US" dirty="0"/>
           </a:p>
@@ -2399,7 +2417,7 @@
           <a:p>
             <a:r>
               <a:rPr lang="en-US" dirty="0"/>
-              <a:t>Matriz 3 x 2. A faixa de 47 a 71 GW com referência de 59 GW é a do caderno de MMGD do PDE 2034 e serve de ordem de grandeza; os valores finais dependem do ano-horizonte escolhido.</a:t>
+              <a:t>Matriz 3 x 2, avaliada sob três regras de rateio (R1 a R3). A faixa de 47 a 71 GW com referência de 59 GW é a do caderno de MMGD do PDE 2034 e serve de ordem de grandeza; os valores finais dependem do ano-horizonte escolhido.</a:t>
             </a:r>
             <a:endParaRPr lang="en-US" dirty="0"/>
           </a:p>
@@ -2487,7 +2505,7 @@
           <a:p>
             <a:r>
               <a:rPr lang="en-US" dirty="0"/>
-              <a:t>Cada objetivo específico tem uma variável, uma unidade e um critério de comparação definidos.</a:t>
+              <a:t>Cada objetivo específico tem uma variável, uma unidade e um critério de comparação definidos, sempre por fonte.</a:t>
             </a:r>
             <a:endParaRPr lang="en-US" dirty="0"/>
           </a:p>
@@ -2575,7 +2593,7 @@
           <a:p>
             <a:r>
               <a:rPr lang="en-US" dirty="0"/>
-              <a:t>A regra de decisão é simples: se a redução do CTO for maior ou igual à soma dos encargos, as baterias se pagam do ponto de vista do sistema. A análise por fonte mostra a distribuição do resultado.</a:t>
+              <a:t>Para cada fonte i, compara-se o ganho (geração evitada de corte vezes preço) com o encargo (receita fixa vezes a parcela da fonte). A razão ganho sobre encargo maior ou igual a 1 indica vantagem. O ponto de equilíbrio é a geração evitada de corte mínima para pagar o encargo: encargo dividido pelo preço. Como o rateio usa a energia associada, quem gera mais paga mais, e isso entra no cálculo.</a:t>
             </a:r>
             <a:endParaRPr lang="en-US" dirty="0"/>
           </a:p>
@@ -2663,7 +2681,7 @@
           <a:p>
             <a:r>
               <a:rPr lang="en-US" dirty="0"/>
-              <a:t>Entregas, contribuição e limitações do estudo.</a:t>
+              <a:t>Entregas, contribuição e limitações do estudo. A receita fixa depende do deságio do leilão de dezembro de 2026, e o ressarcimento de cortes da Lei 15.269 pode reduzir o ganho incremental.</a:t>
             </a:r>
             <a:endParaRPr lang="en-US" dirty="0"/>
           </a:p>
@@ -3015,7 +3033,7 @@
           <a:p>
             <a:r>
               <a:rPr lang="en-US" dirty="0"/>
-              <a:t>A parcela de cada fonte é o peso dela (geração x coeficiente) dividido pela soma dos pesos. Eólicas e solares ficam em P1. Hidrelétricas e térmicas recebem o mesmo k em cada cenário, porque não há classificação por usina.</a:t>
+              <a:t>A parcela de cada fonte é o peso dela (geração x coeficiente) dividido pela soma dos pesos. Eólicas e solares ficam em P1. Hidrelétricas e térmicas recebem o mesmo k em cada cenário, porque não há classificação por usina. A base é a geração centralizada de 2025 (CCEE/EPE), que separa eólicas e solares.</a:t>
             </a:r>
             <a:endParaRPr lang="en-US" dirty="0"/>
           </a:p>
@@ -3103,7 +3121,7 @@
           <a:p>
             <a:r>
               <a:rPr lang="en-US" dirty="0"/>
-              <a:t>Tabela completa do cálculo. No cenário A todos os coeficientes são 1, então as parcelas coincidem com a participação na geração. Nos cenários B e C, reduzir k das hidrelétricas e térmicas diminui a soma dos pesos e aumenta a parcela das eólicas e solares, que ficam em P1.</a:t>
+              <a:t>Tabela completa do cálculo, com eólicas e solares separadas. No cenário A todos os coeficientes são 1, então as parcelas coincidem com a participação na geração. Nos cenários B e C, reduzir k das hidrelétricas e térmicas diminui a soma dos pesos e aumenta a parcela de eólicas e solares, que ficam em P1.</a:t>
             </a:r>
             <a:endParaRPr lang="en-US" dirty="0"/>
           </a:p>
@@ -3367,7 +3385,7 @@
           <a:p>
             <a:r>
               <a:rPr lang="en-US" dirty="0"/>
-              <a:t>Exercício ilustrativo, não é a regra oficial. Parcela da fonte = geração x coeficiente, dividida pela soma dos pesos. Eólicas e solares ficam em P1 (100%), como na proposta. Hidrelétricas e térmicas recebem o mesmo coeficiente k em cada cenário. A: k = 100% (todas em P1), que equivale ao rateio universal sem diferenciar: 51,7%, 26,4% e 21,9%. B: k = 62,5%, média simples dos quatro patamares (1 + 0,75 + 0,5 + 0,25, dividido por 4), equivalente a distribuição uniforme: pesos 32,31, 26,40 e 13,69, soma 72,4, parcelas 44,6%, 36,5% e 18,9%. C: k = 25% (todas em P4): pesos 12,93, 26,40 e 5,48, soma 44,8, parcelas 28,9%, 58,9% e 12,2%. Limitações: os critérios de cada patamar e a classificação das usinas não foram localizados; hidro e térmicas têm distribuições diferentes na prática; 'térmicas e demais' é um resíduo e pode incluir MMGD, que está fora do rateio.</a:t>
+              <a:t>Exercício ilustrativo, não é a regra oficial. Parcela da fonte = geração x coeficiente, dividida pela soma dos pesos. Eólicas e solares ficam em P1 (100%), como na proposta. Hidrelétricas e térmicas recebem o mesmo coeficiente k em cada cenário. A: k = 100%, equivalente ao rateio universal. B: k = 62,5%, média simples dos quatro patamares. C: k = 25%, todas em P4. Os pesos e somas de cada cenário estão nos slides de memória de cálculo. Limitações: os critérios de cada patamar não foram localizados; 'térmicas e biomassa' agrupa fontes com flexibilidades diferentes.</a:t>
             </a:r>
             <a:endParaRPr lang="en-US" dirty="0"/>
           </a:p>
@@ -3543,7 +3561,7 @@
           <a:p>
             <a:r>
               <a:rPr lang="en-US" dirty="0"/>
-              <a:t>Esta tabela organiza as hipóteses: eólicas e UFVs partem do patamar mais alto, mas são as que mais ganham com menos corte. As térmicas podem perder despacho. As hidrelétricas dependem do patamar em que forem classificadas e ganham em risco hidrológico e armazenamento. As simulações dirão o saldo real.</a:t>
+              <a:t>A tabela organiza as hipóteses por fonte. Eólicas e solares partem do patamar mais alto, mas têm o maior corte a evitar. As UHEs dependem do patamar em que forem classificadas e ganham em menos corte e mais água armazenada. As térmicas e a biomassa só são reportadas.</a:t>
             </a:r>
             <a:endParaRPr lang="en-US" dirty="0"/>
           </a:p>
@@ -3983,7 +4001,7 @@
           <a:p>
             <a:r>
               <a:rPr lang="en-US" dirty="0"/>
-              <a:t>A justificativa combina três coisas: perda econômica já observada, uma janela de decisão regulatória (leilão de baterias) e uma lacuna analítica sobre rateio de custos.</a:t>
+              <a:t>A justificativa combina perda econômica já observada, uma janela de decisão regulatória (leilão de baterias) e uma lacuna analítica: ninguém mostrou, fonte a fonte, se o ganho com menos cortes compensa o encargo.</a:t>
             </a:r>
             <a:endParaRPr lang="en-US" dirty="0"/>
           </a:p>
@@ -4071,7 +4089,7 @@
           <a:p>
             <a:r>
               <a:rPr lang="en-US" dirty="0"/>
-              <a:t>A hipótese é testável: compara a redução do CTO com a soma dos encargos.</a:t>
+              <a:t>A pergunta agora é fonte a fonte: para eólicas, solares e UHEs, o ganho com menos cortes supera o encargo que cada uma pagará pelas baterias? A hipótese H1 vale para cada fonte i. Os percentuais de corte são do 3º trimestre de 2025 (BTG); o dado da Abrage cobre 2022 a 2024.</a:t>
             </a:r>
             <a:endParaRPr lang="en-US" dirty="0"/>
           </a:p>
@@ -4159,7 +4177,7 @@
           <a:p>
             <a:r>
               <a:rPr lang="en-US" dirty="0"/>
-              <a:t>O objetivo geral é único e mensurável: comparar o ganho sistêmico (redução do CTO) com os encargos pagos pelas fontes.</a:t>
+              <a:t>O objetivo geral responde à pergunta de pesquisa: para cada fonte, o ganho com menos cortes (receita adicional) supera o encargo da receita fixa das baterias?</a:t>
             </a:r>
             <a:endParaRPr lang="en-US" dirty="0"/>
           </a:p>
@@ -4247,7 +4265,7 @@
           <a:p>
             <a:r>
               <a:rPr lang="en-US" dirty="0"/>
-              <a:t>Os cinco objetivos específicos formam uma cadeia: efeitos das baterias (OE1 e OE2), ganho sistêmico (OE3), custo (OE4) e comparação final (OE5), que responde à pergunta de pesquisa.</a:t>
+              <a:t>Os objetivos formam uma cadeia, sempre fonte a fonte: geração evitada de corte (OE1), ganho (OE2), encargo (OE3), comparação (OE4) e sensibilidade (OE5).</a:t>
             </a:r>
             <a:endParaRPr lang="en-US" dirty="0"/>
           </a:p>
@@ -4335,7 +4353,7 @@
           <a:p>
             <a:r>
               <a:rPr lang="en-US" dirty="0"/>
-              <a:t>Nordeste e Sudeste e a duração de 4 horas vêm do desenho original do trabalho. Os demais parâmetros ficam marcados como a definir.</a:t>
+              <a:t>O escopo agora se limita às três fontes da pergunta: eólicas, UFVs centralizadas e UHEs. As térmicas e a biomassa também pagam encargo, mas só são reportadas. As premissas ainda a definir incluem a receita fixa, que depende do deságio do leilão.</a:t>
             </a:r>
             <a:endParaRPr lang="en-US" dirty="0"/>
           </a:p>
@@ -5376,7 +5394,7 @@
                 <a:ea typeface="Cambria" pitchFamily="34" charset="-122"/>
                 <a:cs typeface="Cambria" pitchFamily="34" charset="-120"/>
               </a:rPr>
-              <a:t>Ganho econômico para o SIN?</a:t>
+              <a:t>As fontes ganham mais do que pagam?</a:t>
             </a:r>
             <a:endParaRPr lang="en-US" sz="2800" dirty="0"/>
           </a:p>
@@ -6496,7 +6514,7 @@
                   <a:schemeClr val="tx2"/>
                 </a:solidFill>
               </a:rPr>
-              <a:t>Curtailment, despacho, armazenamento, CTO</a:t>
+              <a:t>Geração, curtailment e armazenamento por fonte</a:t>
             </a:r>
             <a:endParaRPr lang="en-US" sz="1200" dirty="0"/>
           </a:p>
@@ -7332,7 +7350,7 @@
                   <a:schemeClr val="tx1"/>
                 </a:solidFill>
               </a:rPr>
-              <a:t>Comparação</a:t>
+              <a:t>Geração evitada de corte</a:t>
             </a:r>
             <a:endParaRPr lang="en-US" sz="1400" dirty="0"/>
           </a:p>
@@ -7368,7 +7386,7 @@
                   <a:schemeClr val="tx2"/>
                 </a:solidFill>
               </a:rPr>
-              <a:t>Δ curtailment, Δ despacho, Δ armazenamento, Δ CTO</a:t>
+              <a:t>Δ geração de eólicas, UFVs e UHEs: com × sem BESS</a:t>
             </a:r>
             <a:endParaRPr lang="en-US" sz="1200" dirty="0"/>
           </a:p>
@@ -7516,7 +7534,7 @@
                   <a:schemeClr val="tx1"/>
                 </a:solidFill>
               </a:rPr>
-              <a:t>Encargos por fonte</a:t>
+              <a:t>Ganho por fonte</a:t>
             </a:r>
             <a:endParaRPr lang="en-US" sz="1400" dirty="0"/>
           </a:p>
@@ -7552,7 +7570,7 @@
                   <a:schemeClr val="tx2"/>
                 </a:solidFill>
               </a:rPr>
-              <a:t>Custo das baterias rateado entre as fontes</a:t>
+              <a:t>Δ geração × preço de valoração (UHE: valor da água)</a:t>
             </a:r>
             <a:endParaRPr lang="en-US" sz="1200" dirty="0"/>
           </a:p>
@@ -7700,7 +7718,7 @@
                   <a:schemeClr val="tx1"/>
                 </a:solidFill>
               </a:rPr>
-              <a:t>Balanço econômico</a:t>
+              <a:t>Encargo por fonte</a:t>
             </a:r>
             <a:endParaRPr lang="en-US" sz="1400" dirty="0"/>
           </a:p>
@@ -7736,7 +7754,7 @@
                   <a:schemeClr val="tx2"/>
                 </a:solidFill>
               </a:rPr>
-              <a:t>Ganho sistêmico × encargos</a:t>
+              <a:t>Receita fixa rateada pelas regras R1 a R3</a:t>
             </a:r>
             <a:endParaRPr lang="en-US" sz="1200" dirty="0"/>
           </a:p>
@@ -7884,7 +7902,7 @@
                   <a:schemeClr val="tx1"/>
                 </a:solidFill>
               </a:rPr>
-              <a:t>Conclusão</a:t>
+              <a:t>Saldo por fonte</a:t>
             </a:r>
             <a:endParaRPr lang="en-US" sz="1400" dirty="0"/>
           </a:p>
@@ -7920,7 +7938,7 @@
                   <a:schemeClr val="tx2"/>
                 </a:solidFill>
               </a:rPr>
-              <a:t>Fontes beneficiadas e deslocadas; teste da hipótese</a:t>
+              <a:t>Ganho − encargo, razão e ponto de equilíbrio</a:t>
             </a:r>
             <a:endParaRPr lang="en-US" sz="1200" dirty="0"/>
           </a:p>
@@ -8004,7 +8022,7 @@
                   <a:schemeClr val="tx2"/>
                 </a:solidFill>
               </a:rPr>
-              <a:t>Etapa 3 compara os resultados das etapas 1 e 2. O cenário de MMGD define as variações simuladas em cada etapa.</a:t>
+              <a:t>A etapa 3 compara as etapas 1 e 2 e fecha o balanço de cada fonte: ganho com menos cortes menos o encargo das baterias.</a:t>
             </a:r>
             <a:endParaRPr lang="en-US" sz="1000" dirty="0"/>
           </a:p>
@@ -8148,7 +8166,7 @@
                   <a:schemeClr val="tx2"/>
                 </a:solidFill>
               </a:rPr>
-              <a:t>Três níveis de MMGD, com e sem baterias, geram seis casos. A referência é o C3.</a:t>
+              <a:t>Seis casos (3 níveis de MMGD, com e sem baterias), cada um sob as regras de rateio R1 a R3.</a:t>
             </a:r>
             <a:endParaRPr lang="en-US" sz="1600" dirty="0"/>
           </a:p>
@@ -9769,7 +9787,7 @@
                           <a:ea typeface="Calibri" pitchFamily="34" charset="-122"/>
                           <a:cs typeface="Calibri" pitchFamily="34" charset="-120"/>
                         </a:rPr>
-                        <a:t>Curtailment de eólicas, UFVs e UHEs</a:t>
+                        <a:t>Geração evitada de corte por fonte (eólicas, UFVs, UHEs)</a:t>
                       </a:r>
                       <a:endParaRPr lang="en-US" sz="1400" dirty="0">
                         <a:latin typeface="Calibri" charset="0"/>
@@ -9837,7 +9855,7 @@
                           <a:ea typeface="Calibri" pitchFamily="34" charset="-122"/>
                           <a:cs typeface="Calibri" pitchFamily="34" charset="-120"/>
                         </a:rPr>
-                        <a:t>MWh e % da geração disponível</a:t>
+                        <a:t>MWh/ano e % do corte</a:t>
                       </a:r>
                       <a:endParaRPr lang="en-US" sz="1400" dirty="0">
                         <a:latin typeface="Calibri" charset="0"/>
@@ -9905,7 +9923,7 @@
                           <a:ea typeface="Calibri" pitchFamily="34" charset="-122"/>
                           <a:cs typeface="Calibri" pitchFamily="34" charset="-120"/>
                         </a:rPr>
-                        <a:t>Sem × com BESS, por nível de MMGD</a:t>
+                        <a:t>Com × sem BESS, por nível de MMGD</a:t>
                       </a:r>
                       <a:endParaRPr lang="en-US" sz="1400" dirty="0">
                         <a:latin typeface="Calibri" charset="0"/>
@@ -10043,7 +10061,7 @@
                           <a:ea typeface="Calibri" pitchFamily="34" charset="-122"/>
                           <a:cs typeface="Calibri" pitchFamily="34" charset="-120"/>
                         </a:rPr>
-                        <a:t>Despacho por fonte e energia armazenada nas UHEs</a:t>
+                        <a:t>Ganho por fonte (receita da energia adicional)</a:t>
                       </a:r>
                       <a:endParaRPr lang="en-US" sz="1400" dirty="0">
                         <a:latin typeface="Calibri" charset="0"/>
@@ -10111,7 +10129,7 @@
                           <a:ea typeface="Calibri" pitchFamily="34" charset="-122"/>
                           <a:cs typeface="Calibri" pitchFamily="34" charset="-120"/>
                         </a:rPr>
-                        <a:t>MWh/ano, MW médios e % da capacidade</a:t>
+                        <a:t>R$ milhões/ano</a:t>
                       </a:r>
                       <a:endParaRPr lang="en-US" sz="1400" dirty="0">
                         <a:latin typeface="Calibri" charset="0"/>
@@ -10179,7 +10197,7 @@
                           <a:ea typeface="Calibri" pitchFamily="34" charset="-122"/>
                           <a:cs typeface="Calibri" pitchFamily="34" charset="-120"/>
                         </a:rPr>
-                        <a:t>Fontes beneficiadas × deslocadas</a:t>
+                        <a:t>ΔG × preço (UHE: valor da água)</a:t>
                       </a:r>
                       <a:endParaRPr lang="en-US" sz="1400" dirty="0">
                         <a:latin typeface="Calibri" charset="0"/>
@@ -10317,7 +10335,7 @@
                           <a:ea typeface="Calibri" pitchFamily="34" charset="-122"/>
                           <a:cs typeface="Calibri" pitchFamily="34" charset="-120"/>
                         </a:rPr>
-                        <a:t>Custo total de operação (CTO)</a:t>
+                        <a:t>Encargo por fonte</a:t>
                       </a:r>
                       <a:endParaRPr lang="en-US" sz="1400" dirty="0">
                         <a:latin typeface="Calibri" charset="0"/>
@@ -10385,7 +10403,7 @@
                           <a:ea typeface="Calibri" pitchFamily="34" charset="-122"/>
                           <a:cs typeface="Calibri" pitchFamily="34" charset="-120"/>
                         </a:rPr>
-                        <a:t>R$ bilhões/ano</a:t>
+                        <a:t>R$ milhões/ano</a:t>
                       </a:r>
                       <a:endParaRPr lang="en-US" sz="1400" dirty="0">
                         <a:latin typeface="Calibri" charset="0"/>
@@ -10453,7 +10471,7 @@
                           <a:ea typeface="Calibri" pitchFamily="34" charset="-122"/>
                           <a:cs typeface="Calibri" pitchFamily="34" charset="-120"/>
                         </a:rPr>
-                        <a:t>ΔCTO em R$ e em %</a:t>
+                        <a:t>Regras de rateio R1 a R3</a:t>
                       </a:r>
                       <a:endParaRPr lang="en-US" sz="1400" dirty="0">
                         <a:latin typeface="Calibri" charset="0"/>
@@ -10591,7 +10609,7 @@
                           <a:ea typeface="Calibri" pitchFamily="34" charset="-122"/>
                           <a:cs typeface="Calibri" pitchFamily="34" charset="-120"/>
                         </a:rPr>
-                        <a:t>Encargos pagos por fonte</a:t>
+                        <a:t>Saldo e razão ganho ÷ encargo, por fonte</a:t>
                       </a:r>
                       <a:endParaRPr lang="en-US" sz="1400" dirty="0">
                         <a:latin typeface="Calibri" charset="0"/>
@@ -10659,7 +10677,7 @@
                           <a:ea typeface="Calibri" pitchFamily="34" charset="-122"/>
                           <a:cs typeface="Calibri" pitchFamily="34" charset="-120"/>
                         </a:rPr>
-                        <a:t>R$ milhões/ano</a:t>
+                        <a:t>R$ milhões/ano e razão</a:t>
                       </a:r>
                       <a:endParaRPr lang="en-US" sz="1400" dirty="0">
                         <a:latin typeface="Calibri" charset="0"/>
@@ -10727,7 +10745,7 @@
                           <a:ea typeface="Calibri" pitchFamily="34" charset="-122"/>
                           <a:cs typeface="Calibri" pitchFamily="34" charset="-120"/>
                         </a:rPr>
-                        <a:t>Conforme a regra de rateio</a:t>
+                        <a:t>Razão ≥ 1: vantajoso</a:t>
                       </a:r>
                       <a:endParaRPr lang="en-US" sz="1400" dirty="0">
                         <a:latin typeface="Calibri" charset="0"/>
@@ -10865,7 +10883,7 @@
                           <a:ea typeface="Calibri" pitchFamily="34" charset="-122"/>
                           <a:cs typeface="Calibri" pitchFamily="34" charset="-120"/>
                         </a:rPr>
-                        <a:t>Razão ΔCTO ÷ Σ encargos e resultado por fonte</a:t>
+                        <a:t>Ponto de equilíbrio e sensibilidade</a:t>
                       </a:r>
                       <a:endParaRPr lang="en-US" sz="1400" dirty="0">
                         <a:latin typeface="Calibri" charset="0"/>
@@ -10933,7 +10951,7 @@
                           <a:ea typeface="Calibri" pitchFamily="34" charset="-122"/>
                           <a:cs typeface="Calibri" pitchFamily="34" charset="-120"/>
                         </a:rPr>
-                        <a:t>Razão e R$ milhões/ano</a:t>
+                        <a:t>MWh e R$/MWh</a:t>
                       </a:r>
                       <a:endParaRPr lang="en-US" sz="1400" dirty="0">
                         <a:latin typeface="Calibri" charset="0"/>
@@ -11001,7 +11019,7 @@
                           <a:ea typeface="Calibri" pitchFamily="34" charset="-122"/>
                           <a:cs typeface="Calibri" pitchFamily="34" charset="-120"/>
                         </a:rPr>
-                        <a:t>≥ 1 confirma H1; varia com a MMGD</a:t>
+                        <a:t>MMGD, rateio, preço e patamar</a:t>
                       </a:r>
                       <a:endParaRPr lang="en-US" sz="1400" dirty="0">
                         <a:latin typeface="Calibri" charset="0"/>
@@ -11087,7 +11105,7 @@
                   <a:schemeClr val="tx2"/>
                 </a:solidFill>
               </a:rPr>
-              <a:t>Todas as variáveis vêm das simulações horárias, exceto os encargos (OE4), calculados a partir do custo das baterias e da regra de rateio.</a:t>
+              <a:t>As variáveis vêm das simulações horárias, exceto o encargo (OE3) e o preço de valoração, que dependem do edital, da regra de rateio e do PLD.</a:t>
             </a:r>
             <a:endParaRPr lang="en-US" sz="1400" dirty="0"/>
           </a:p>
@@ -11195,7 +11213,7 @@
                   <a:schemeClr val="tx1"/>
                 </a:solidFill>
               </a:rPr>
-              <a:t>Análise econômica: ganho versus encargos</a:t>
+              <a:t>Análise econômica: o que cada fonte ganha e paga</a:t>
             </a:r>
             <a:endParaRPr lang="en-US" sz="3200" dirty="0"/>
           </a:p>
@@ -11209,12 +11227,12 @@
         </p:nvSpPr>
         <p:spPr>
           <a:xfrm>
-            <a:off x="548640" y="1463040"/>
-            <a:ext cx="4754880" cy="2468880"/>
+            <a:off x="548640" y="1417320"/>
+            <a:ext cx="4754880" cy="2148840"/>
           </a:xfrm>
           <a:prstGeom prst="roundRect">
             <a:avLst>
-              <a:gd name="adj" fmla="val 4444"/>
+              <a:gd name="adj" fmla="val 5106"/>
             </a:avLst>
           </a:prstGeom>
           <a:solidFill>
@@ -11243,8 +11261,8 @@
         </p:nvSpPr>
         <p:spPr>
           <a:xfrm>
-            <a:off x="822960" y="1737360"/>
-            <a:ext cx="594360" cy="594360"/>
+            <a:off x="822960" y="1645920"/>
+            <a:ext cx="548640" cy="548640"/>
           </a:xfrm>
           <a:prstGeom prst="ellipse">
             <a:avLst/>
@@ -11276,8 +11294,8 @@
         </p:blipFill>
         <p:spPr>
           <a:xfrm>
-            <a:off x="971550" y="1885950"/>
-            <a:ext cx="297180" cy="297180"/>
+            <a:off x="960120" y="1783080"/>
+            <a:ext cx="274320" cy="274320"/>
           </a:xfrm>
           <a:prstGeom prst="rect">
             <a:avLst/>
@@ -11292,8 +11310,8 @@
         </p:nvSpPr>
         <p:spPr>
           <a:xfrm>
-            <a:off x="1645920" y="1737360"/>
-            <a:ext cx="3474720" cy="594360"/>
+            <a:off x="1554480" y="1645920"/>
+            <a:ext cx="3566160" cy="548640"/>
           </a:xfrm>
           <a:prstGeom prst="rect">
             <a:avLst/>
@@ -11314,7 +11332,7 @@
                   <a:schemeClr val="tx2"/>
                 </a:solidFill>
               </a:rPr>
-              <a:t>GANHO SISTÊMICO</a:t>
+              <a:t>GANHO DA FONTE i</a:t>
             </a:r>
             <a:endParaRPr lang="en-US" sz="1600" dirty="0"/>
           </a:p>
@@ -11328,8 +11346,8 @@
         </p:nvSpPr>
         <p:spPr>
           <a:xfrm>
-            <a:off x="822960" y="2560320"/>
-            <a:ext cx="4297680" cy="548640"/>
+            <a:off x="822960" y="2331720"/>
+            <a:ext cx="4297680" cy="457200"/>
           </a:xfrm>
           <a:prstGeom prst="rect">
             <a:avLst/>
@@ -11345,7 +11363,7 @@
               <a:buNone/>
             </a:pPr>
             <a:r>
-              <a:rPr lang="en-US" sz="1700" b="1" dirty="0">
+              <a:rPr lang="en-US" sz="2200" b="1" dirty="0">
                 <a:solidFill>
                   <a:schemeClr val="tx1"/>
                 </a:solidFill>
@@ -11353,9 +11371,9 @@
                 <a:ea typeface="Cambria" pitchFamily="34" charset="-122"/>
                 <a:cs typeface="Cambria" pitchFamily="34" charset="-120"/>
               </a:rPr>
-              <a:t>ΔCTO = CTO(sem BESS) − CTO(com BESS)</a:t>
-            </a:r>
-            <a:endParaRPr lang="en-US" sz="1700" dirty="0"/>
+              <a:t>Ganho = ΔG × p</a:t>
+            </a:r>
+            <a:endParaRPr lang="en-US" sz="2200" dirty="0"/>
           </a:p>
         </p:txBody>
       </p:sp>
@@ -11367,8 +11385,8 @@
         </p:nvSpPr>
         <p:spPr>
           <a:xfrm>
-            <a:off x="822960" y="3200400"/>
-            <a:ext cx="4206240" cy="640080"/>
+            <a:off x="822960" y="2880360"/>
+            <a:ext cx="4206240" cy="594360"/>
           </a:xfrm>
           <a:prstGeom prst="rect">
             <a:avLst/>
@@ -11389,7 +11407,7 @@
                   <a:schemeClr val="tx2"/>
                 </a:solidFill>
               </a:rPr>
-              <a:t>Inclui a economia de menos curtailment, menos térmica e mais água armazenada.</a:t>
+              <a:t>ΔG: geração evitada de corte (MWh). p: preço de valoração (R$/MWh).</a:t>
             </a:r>
             <a:endParaRPr lang="en-US" sz="1400" dirty="0"/>
           </a:p>
@@ -11403,12 +11421,12 @@
         </p:nvSpPr>
         <p:spPr>
           <a:xfrm>
-            <a:off x="6888175" y="1463040"/>
-            <a:ext cx="4754880" cy="2468880"/>
+            <a:off x="6888175" y="1417320"/>
+            <a:ext cx="4754880" cy="2148840"/>
           </a:xfrm>
           <a:prstGeom prst="roundRect">
             <a:avLst>
-              <a:gd name="adj" fmla="val 4444"/>
+              <a:gd name="adj" fmla="val 5106"/>
             </a:avLst>
           </a:prstGeom>
           <a:solidFill>
@@ -11437,8 +11455,8 @@
         </p:nvSpPr>
         <p:spPr>
           <a:xfrm>
-            <a:off x="7162495" y="1737360"/>
-            <a:ext cx="594360" cy="594360"/>
+            <a:off x="7162495" y="1645920"/>
+            <a:ext cx="548640" cy="548640"/>
           </a:xfrm>
           <a:prstGeom prst="ellipse">
             <a:avLst/>
@@ -11470,8 +11488,8 @@
         </p:blipFill>
         <p:spPr>
           <a:xfrm>
-            <a:off x="7311085" y="1885950"/>
-            <a:ext cx="297180" cy="297180"/>
+            <a:off x="7299655" y="1783080"/>
+            <a:ext cx="274320" cy="274320"/>
           </a:xfrm>
           <a:prstGeom prst="rect">
             <a:avLst/>
@@ -11486,8 +11504,8 @@
         </p:nvSpPr>
         <p:spPr>
           <a:xfrm>
-            <a:off x="7985455" y="1737360"/>
-            <a:ext cx="3474720" cy="594360"/>
+            <a:off x="7894015" y="1645920"/>
+            <a:ext cx="3566160" cy="548640"/>
           </a:xfrm>
           <a:prstGeom prst="rect">
             <a:avLst/>
@@ -11508,7 +11526,7 @@
                   <a:schemeClr val="tx2"/>
                 </a:solidFill>
               </a:rPr>
-              <a:t>ENCARGOS DAS FONTES</a:t>
+              <a:t>ENCARGO DA FONTE i</a:t>
             </a:r>
             <a:endParaRPr lang="en-US" sz="1600" dirty="0"/>
           </a:p>
@@ -11522,8 +11540,8 @@
         </p:nvSpPr>
         <p:spPr>
           <a:xfrm>
-            <a:off x="7162495" y="2560320"/>
-            <a:ext cx="4297680" cy="548640"/>
+            <a:off x="7162495" y="2331720"/>
+            <a:ext cx="4297680" cy="457200"/>
           </a:xfrm>
           <a:prstGeom prst="rect">
             <a:avLst/>
@@ -11539,7 +11557,7 @@
               <a:buNone/>
             </a:pPr>
             <a:r>
-              <a:rPr lang="en-US" sz="1700" b="1" dirty="0">
+              <a:rPr lang="en-US" sz="1900" b="1" dirty="0">
                 <a:solidFill>
                   <a:schemeClr val="tx1"/>
                 </a:solidFill>
@@ -11547,9 +11565,9 @@
                 <a:ea typeface="Cambria" pitchFamily="34" charset="-122"/>
                 <a:cs typeface="Cambria" pitchFamily="34" charset="-120"/>
               </a:rPr>
-              <a:t>Σ Ei,  i = UHE, UTE, eólica, UFV</a:t>
-            </a:r>
-            <a:endParaRPr lang="en-US" sz="1700" dirty="0"/>
+              <a:t>Encargo = receita fixa × parcela</a:t>
+            </a:r>
+            <a:endParaRPr lang="en-US" sz="1900" dirty="0"/>
           </a:p>
         </p:txBody>
       </p:sp>
@@ -11561,7 +11579,7 @@
         </p:nvSpPr>
         <p:spPr>
           <a:xfrm>
-            <a:off x="7162495" y="3200400"/>
+            <a:off x="7162495" y="2880360"/>
             <a:ext cx="4206240" cy="640080"/>
           </a:xfrm>
           <a:prstGeom prst="rect">
@@ -11583,7 +11601,7 @@
                   <a:schemeClr val="tx2"/>
                 </a:solidFill>
               </a:rPr>
-              <a:t>Custo das baterias pago por cada fonte, conforme a regra de rateio adotada.</a:t>
+              <a:t>Parcela pela regra R1 a R3. Inclui a geração adicional, pois o rateio usa a energia associada.</a:t>
             </a:r>
             <a:endParaRPr lang="en-US" sz="1400" dirty="0"/>
           </a:p>
@@ -11597,7 +11615,7 @@
         </p:nvSpPr>
         <p:spPr>
           <a:xfrm>
-            <a:off x="5592928" y="2194560"/>
+            <a:off x="5592928" y="1988820"/>
             <a:ext cx="1005840" cy="1005840"/>
           </a:xfrm>
           <a:prstGeom prst="ellipse">
@@ -11622,7 +11640,7 @@
         </p:nvSpPr>
         <p:spPr>
           <a:xfrm>
-            <a:off x="5592928" y="2194560"/>
+            <a:off x="5592928" y="1988820"/>
             <a:ext cx="1005840" cy="1005840"/>
           </a:xfrm>
           <a:prstGeom prst="rect">
@@ -11655,18 +11673,18 @@
       </p:sp>
       <p:sp>
         <p:nvSpPr>
-          <p:cNvPr id="17" name="Outcome 1"/>
+          <p:cNvPr id="17" name="Source economics 1"/>
           <p:cNvSpPr/>
           <p:nvPr/>
         </p:nvSpPr>
         <p:spPr>
           <a:xfrm>
-            <a:off x="548640" y="4206240"/>
-            <a:ext cx="3520440" cy="1965960"/>
+            <a:off x="548640" y="3749040"/>
+            <a:ext cx="3520440" cy="1783080"/>
           </a:xfrm>
           <a:prstGeom prst="roundRect">
             <a:avLst>
-              <a:gd name="adj" fmla="val 5581"/>
+              <a:gd name="adj" fmla="val 6154"/>
             </a:avLst>
           </a:prstGeom>
           <a:solidFill>
@@ -11695,8 +11713,8 @@
         </p:nvSpPr>
         <p:spPr>
           <a:xfrm>
-            <a:off x="822960" y="4480560"/>
-            <a:ext cx="548640" cy="548640"/>
+            <a:off x="822960" y="3931920"/>
+            <a:ext cx="502920" cy="502920"/>
           </a:xfrm>
           <a:prstGeom prst="ellipse">
             <a:avLst/>
@@ -11714,7 +11732,7 @@
       </p:sp>
       <p:pic>
         <p:nvPicPr>
-          <p:cNvPr id="19" name="Image 2" descr="FaCheckCircle">    </p:cNvPr>
+          <p:cNvPr id="19" name="Image 2" descr="FaWind">    </p:cNvPr>
           <p:cNvPicPr>
             <a:picLocks noChangeAspect="1"/>
           </p:cNvPicPr>
@@ -11728,8 +11746,8 @@
         </p:blipFill>
         <p:spPr>
           <a:xfrm>
-            <a:off x="960120" y="4617720"/>
-            <a:ext cx="274320" cy="274320"/>
+            <a:off x="948690" y="4057650"/>
+            <a:ext cx="251460" cy="251460"/>
           </a:xfrm>
           <a:prstGeom prst="rect">
             <a:avLst/>
@@ -11744,8 +11762,8 @@
         </p:nvSpPr>
         <p:spPr>
           <a:xfrm>
-            <a:off x="1554480" y="4480560"/>
-            <a:ext cx="2331720" cy="548640"/>
+            <a:off x="1508760" y="3931920"/>
+            <a:ext cx="2377440" cy="502920"/>
           </a:xfrm>
           <a:prstGeom prst="rect">
             <a:avLst/>
@@ -11769,7 +11787,7 @@
                 <a:ea typeface="Cambria" pitchFamily="34" charset="-122"/>
                 <a:cs typeface="Cambria" pitchFamily="34" charset="-120"/>
               </a:rPr>
-              <a:t>ΔCTO ≥ Σ Ei</a:t>
+              <a:t>Eólicas</a:t>
             </a:r>
             <a:endParaRPr lang="en-US" sz="1800" dirty="0"/>
           </a:p>
@@ -11783,8 +11801,8 @@
         </p:nvSpPr>
         <p:spPr>
           <a:xfrm>
-            <a:off x="822960" y="5212080"/>
-            <a:ext cx="2971800" cy="868680"/>
+            <a:off x="822960" y="4572000"/>
+            <a:ext cx="2971800" cy="914400"/>
           </a:xfrm>
           <a:prstGeom prst="rect">
             <a:avLst/>
@@ -11800,31 +11818,31 @@
               <a:buNone/>
             </a:pPr>
             <a:r>
-              <a:rPr lang="en-US" sz="1400" dirty="0">
+              <a:rPr lang="en-US" sz="1300" dirty="0">
                 <a:solidFill>
                   <a:schemeClr val="tx2"/>
                 </a:solidFill>
               </a:rPr>
-              <a:t>H1 confirmada: o ganho sistêmico cobre os encargos.</a:t>
-            </a:r>
-            <a:endParaRPr lang="en-US" sz="1400" dirty="0"/>
-          </a:p>
-        </p:txBody>
-      </p:sp>
-      <p:sp>
-        <p:nvSpPr>
-          <p:cNvPr id="22" name="Outcome 2"/>
+              <a:t>Ganho: MWh eólicos antes cortados × preço do contrato ou PLD. Encargo: parte do P1 (100%).</a:t>
+            </a:r>
+            <a:endParaRPr lang="en-US" sz="1300" dirty="0"/>
+          </a:p>
+        </p:txBody>
+      </p:sp>
+      <p:sp>
+        <p:nvSpPr>
+          <p:cNvPr id="22" name="Source economics 2"/>
           <p:cNvSpPr/>
           <p:nvPr/>
         </p:nvSpPr>
         <p:spPr>
           <a:xfrm>
-            <a:off x="4334256" y="4206240"/>
-            <a:ext cx="3520440" cy="1965960"/>
+            <a:off x="4334256" y="3749040"/>
+            <a:ext cx="3520440" cy="1783080"/>
           </a:xfrm>
           <a:prstGeom prst="roundRect">
             <a:avLst>
-              <a:gd name="adj" fmla="val 5581"/>
+              <a:gd name="adj" fmla="val 6154"/>
             </a:avLst>
           </a:prstGeom>
           <a:solidFill>
@@ -11853,18 +11871,18 @@
         </p:nvSpPr>
         <p:spPr>
           <a:xfrm>
-            <a:off x="4608576" y="4480560"/>
-            <a:ext cx="548640" cy="548640"/>
+            <a:off x="4608576" y="3931920"/>
+            <a:ext cx="502920" cy="502920"/>
           </a:xfrm>
           <a:prstGeom prst="ellipse">
             <a:avLst/>
           </a:prstGeom>
           <a:solidFill>
-            <a:schemeClr val="accent4"/>
+            <a:schemeClr val="accent1"/>
           </a:solidFill>
           <a:ln w="12700">
             <a:solidFill>
-              <a:schemeClr val="accent4"/>
+              <a:schemeClr val="accent1"/>
             </a:solidFill>
             <a:prstDash val="solid"/>
           </a:ln>
@@ -11872,7 +11890,7 @@
       </p:sp>
       <p:pic>
         <p:nvPicPr>
-          <p:cNvPr id="24" name="Image 3" descr="FaTimesCircle">    </p:cNvPr>
+          <p:cNvPr id="24" name="Image 3" descr="FaSun">    </p:cNvPr>
           <p:cNvPicPr>
             <a:picLocks noChangeAspect="1"/>
           </p:cNvPicPr>
@@ -11886,8 +11904,8 @@
         </p:blipFill>
         <p:spPr>
           <a:xfrm>
-            <a:off x="4745736" y="4617720"/>
-            <a:ext cx="274320" cy="274320"/>
+            <a:off x="4734306" y="4057650"/>
+            <a:ext cx="251460" cy="251460"/>
           </a:xfrm>
           <a:prstGeom prst="rect">
             <a:avLst/>
@@ -11902,8 +11920,8 @@
         </p:nvSpPr>
         <p:spPr>
           <a:xfrm>
-            <a:off x="5340096" y="4480560"/>
-            <a:ext cx="2331720" cy="548640"/>
+            <a:off x="5294376" y="3931920"/>
+            <a:ext cx="2377440" cy="502920"/>
           </a:xfrm>
           <a:prstGeom prst="rect">
             <a:avLst/>
@@ -11927,7 +11945,7 @@
                 <a:ea typeface="Cambria" pitchFamily="34" charset="-122"/>
                 <a:cs typeface="Cambria" pitchFamily="34" charset="-120"/>
               </a:rPr>
-              <a:t>ΔCTO &lt; Σ Ei</a:t>
+              <a:t>Solares</a:t>
             </a:r>
             <a:endParaRPr lang="en-US" sz="1800" dirty="0"/>
           </a:p>
@@ -11941,8 +11959,8 @@
         </p:nvSpPr>
         <p:spPr>
           <a:xfrm>
-            <a:off x="4608576" y="5212080"/>
-            <a:ext cx="2971800" cy="868680"/>
+            <a:off x="4608576" y="4572000"/>
+            <a:ext cx="2971800" cy="914400"/>
           </a:xfrm>
           <a:prstGeom prst="rect">
             <a:avLst/>
@@ -11958,31 +11976,31 @@
               <a:buNone/>
             </a:pPr>
             <a:r>
-              <a:rPr lang="en-US" sz="1400" dirty="0">
+              <a:rPr lang="en-US" sz="1300" dirty="0">
                 <a:solidFill>
                   <a:schemeClr val="tx2"/>
                 </a:solidFill>
               </a:rPr>
-              <a:t>H0 mantida: o custo das baterias excede o ganho.</a:t>
-            </a:r>
-            <a:endParaRPr lang="en-US" sz="1400" dirty="0"/>
-          </a:p>
-        </p:txBody>
-      </p:sp>
-      <p:sp>
-        <p:nvSpPr>
-          <p:cNvPr id="27" name="Outcome 3"/>
+              <a:t>Ganho: MWh solares antes cortados × preço. Maior corte e menor peso na geração. Encargo: parte do P1.</a:t>
+            </a:r>
+            <a:endParaRPr lang="en-US" sz="1300" dirty="0"/>
+          </a:p>
+        </p:txBody>
+      </p:sp>
+      <p:sp>
+        <p:nvSpPr>
+          <p:cNvPr id="27" name="Source economics 3"/>
           <p:cNvSpPr/>
           <p:nvPr/>
         </p:nvSpPr>
         <p:spPr>
           <a:xfrm>
-            <a:off x="8119872" y="4206240"/>
-            <a:ext cx="3520440" cy="1965960"/>
+            <a:off x="8119872" y="3749040"/>
+            <a:ext cx="3520440" cy="1783080"/>
           </a:xfrm>
           <a:prstGeom prst="roundRect">
             <a:avLst>
-              <a:gd name="adj" fmla="val 5581"/>
+              <a:gd name="adj" fmla="val 6154"/>
             </a:avLst>
           </a:prstGeom>
           <a:solidFill>
@@ -12011,8 +12029,8 @@
         </p:nvSpPr>
         <p:spPr>
           <a:xfrm>
-            <a:off x="8394192" y="4480560"/>
-            <a:ext cx="548640" cy="548640"/>
+            <a:off x="8394192" y="3931920"/>
+            <a:ext cx="502920" cy="502920"/>
           </a:xfrm>
           <a:prstGeom prst="ellipse">
             <a:avLst/>
@@ -12030,7 +12048,7 @@
       </p:sp>
       <p:pic>
         <p:nvPicPr>
-          <p:cNvPr id="29" name="Image 4" descr="FaBalanceScale">    </p:cNvPr>
+          <p:cNvPr id="29" name="Image 4" descr="FaWater">    </p:cNvPr>
           <p:cNvPicPr>
             <a:picLocks noChangeAspect="1"/>
           </p:cNvPicPr>
@@ -12044,8 +12062,8 @@
         </p:blipFill>
         <p:spPr>
           <a:xfrm>
-            <a:off x="8531352" y="4617720"/>
-            <a:ext cx="274320" cy="274320"/>
+            <a:off x="8519922" y="4057650"/>
+            <a:ext cx="251460" cy="251460"/>
           </a:xfrm>
           <a:prstGeom prst="rect">
             <a:avLst/>
@@ -12060,8 +12078,8 @@
         </p:nvSpPr>
         <p:spPr>
           <a:xfrm>
-            <a:off x="9125712" y="4480560"/>
-            <a:ext cx="2331720" cy="548640"/>
+            <a:off x="9079992" y="3931920"/>
+            <a:ext cx="2377440" cy="502920"/>
           </a:xfrm>
           <a:prstGeom prst="rect">
             <a:avLst/>
@@ -12085,7 +12103,7 @@
                 <a:ea typeface="Cambria" pitchFamily="34" charset="-122"/>
                 <a:cs typeface="Cambria" pitchFamily="34" charset="-120"/>
               </a:rPr>
-              <a:t>Resultado por fonte</a:t>
+              <a:t>UHEs</a:t>
             </a:r>
             <a:endParaRPr lang="en-US" sz="1800" dirty="0"/>
           </a:p>
@@ -12099,8 +12117,8 @@
         </p:nvSpPr>
         <p:spPr>
           <a:xfrm>
-            <a:off x="8394192" y="5212080"/>
-            <a:ext cx="2971800" cy="868680"/>
+            <a:off x="8394192" y="4572000"/>
+            <a:ext cx="2971800" cy="914400"/>
           </a:xfrm>
           <a:prstGeom prst="rect">
             <a:avLst/>
@@ -12116,14 +12134,88 @@
               <a:buNone/>
             </a:pPr>
             <a:r>
-              <a:rPr lang="en-US" sz="1400" dirty="0">
+              <a:rPr lang="en-US" sz="1300" dirty="0">
                 <a:solidFill>
                   <a:schemeClr val="tx2"/>
                 </a:solidFill>
               </a:rPr>
-              <a:t>Ganho de despacho da fonte i menos Ei mostra quem ganha e quem perde.</a:t>
-            </a:r>
-            <a:endParaRPr lang="en-US" sz="1400" dirty="0"/>
+              <a:t>Ganho: menos corte e vertimento e mais água armazenada, valorados pelo PLD. Encargo: P1 a P4.</a:t>
+            </a:r>
+            <a:endParaRPr lang="en-US" sz="1300" dirty="0"/>
+          </a:p>
+        </p:txBody>
+      </p:sp>
+      <p:sp>
+        <p:nvSpPr>
+          <p:cNvPr id="32" name="Decision rule"/>
+          <p:cNvSpPr/>
+          <p:nvPr/>
+        </p:nvSpPr>
+        <p:spPr>
+          <a:xfrm>
+            <a:off x="548640" y="5669280"/>
+            <a:ext cx="11094415" cy="594360"/>
+          </a:xfrm>
+          <a:prstGeom prst="roundRect">
+            <a:avLst>
+              <a:gd name="adj" fmla="val 18462"/>
+            </a:avLst>
+          </a:prstGeom>
+          <a:solidFill>
+            <a:schemeClr val="tx2"/>
+          </a:solidFill>
+          <a:ln w="12700">
+            <a:solidFill>
+              <a:schemeClr val="tx2"/>
+            </a:solidFill>
+            <a:prstDash val="solid"/>
+          </a:ln>
+        </p:spPr>
+      </p:sp>
+      <p:sp>
+        <p:nvSpPr>
+          <p:cNvPr id="33" name="Text 26"/>
+          <p:cNvSpPr txBox="1"/>
+          <p:nvPr/>
+        </p:nvSpPr>
+        <p:spPr>
+          <a:xfrm>
+            <a:off x="822960" y="5669280"/>
+            <a:ext cx="10545775" cy="594360"/>
+          </a:xfrm>
+          <a:prstGeom prst="rect">
+            <a:avLst/>
+          </a:prstGeom>
+          <a:noFill/>
+          <a:ln/>
+        </p:spPr>
+        <p:txBody>
+          <a:bodyPr wrap="square" lIns="0" tIns="0" rIns="0" bIns="0" rtlCol="0" anchor="ctr"/>
+          <a:lstStyle/>
+          <a:p>
+            <a:pPr indent="0" marL="0">
+              <a:buNone/>
+            </a:pPr>
+            <a:r>
+              <a:rPr lang="en-US" sz="1600" b="1" dirty="0">
+                <a:solidFill>
+                  <a:schemeClr val="accent1"/>
+                </a:solidFill>
+              </a:rPr>
+              <a:t>Vantajoso se ganho ÷ encargo ≥ 1. </a:t>
+            </a:r>
+            <a:pPr indent="0" marL="0">
+              <a:buNone/>
+            </a:pPr>
+            <a:r>
+              <a:rPr lang="en-US" sz="1600" dirty="0">
+                <a:solidFill>
+                  <a:schemeClr val="bg1"/>
+                </a:solidFill>
+              </a:rPr>
+              <a:t>Ponto de equilíbrio: ΔG* = encargo ÷ p.</a:t>
+            </a:r>
+            <a:endParaRPr lang="en-US" sz="1600" dirty="0"/>
           </a:p>
         </p:txBody>
       </p:sp>
@@ -12244,7 +12336,7 @@
         <p:spPr>
           <a:xfrm>
             <a:off x="548640" y="1463040"/>
-            <a:ext cx="3520440" cy="4114800"/>
+            <a:ext cx="3520440" cy="4480560"/>
           </a:xfrm>
           <a:prstGeom prst="roundRect">
             <a:avLst>
@@ -12359,7 +12451,7 @@
         <p:spPr>
           <a:xfrm>
             <a:off x="822960" y="2560320"/>
-            <a:ext cx="3017520" cy="3383280"/>
+            <a:ext cx="3017520" cy="3291840"/>
           </a:xfrm>
           <a:prstGeom prst="rect">
             <a:avLst/>
@@ -12384,7 +12476,7 @@
                   <a:schemeClr val="tx1"/>
                 </a:solidFill>
               </a:rPr>
-              <a:t>Efeito das baterias no curtailment, no despacho e nos reservatórios</a:t>
+              <a:t>Ganho, encargo, saldo e razão de eólicas, solares e UHEs, por cenário</a:t>
             </a:r>
             <a:endParaRPr lang="en-US" sz="1600" dirty="0"/>
           </a:p>
@@ -12402,7 +12494,7 @@
                   <a:schemeClr val="tx1"/>
                 </a:solidFill>
               </a:rPr>
-              <a:t>ΔCTO para cada nível de MMGD</a:t>
+              <a:t>Ponto de equilíbrio de cada fonte</a:t>
             </a:r>
             <a:endParaRPr lang="en-US" sz="1600" dirty="0"/>
           </a:p>
@@ -12420,7 +12512,7 @@
                   <a:schemeClr val="tx1"/>
                 </a:solidFill>
               </a:rPr>
-              <a:t>Balanço entre ganho sistêmico e encargos por fonte</a:t>
+              <a:t>Condições em que cada fonte ganha ou perde</a:t>
             </a:r>
             <a:endParaRPr lang="en-US" sz="1600" dirty="0"/>
           </a:p>
@@ -12435,7 +12527,7 @@
         <p:spPr>
           <a:xfrm>
             <a:off x="4334256" y="1463040"/>
-            <a:ext cx="3520440" cy="4114800"/>
+            <a:ext cx="3520440" cy="4480560"/>
           </a:xfrm>
           <a:prstGeom prst="roundRect">
             <a:avLst>
@@ -12550,7 +12642,7 @@
         <p:spPr>
           <a:xfrm>
             <a:off x="4608576" y="2560320"/>
-            <a:ext cx="3017520" cy="3383280"/>
+            <a:ext cx="3017520" cy="3291840"/>
           </a:xfrm>
           <a:prstGeom prst="rect">
             <a:avLst/>
@@ -12575,7 +12667,7 @@
                   <a:schemeClr val="tx1"/>
                 </a:solidFill>
               </a:rPr>
-              <a:t>Evidência para o debate sobre o rateio dos custos das baterias</a:t>
+              <a:t>Evidência por fonte para o debate sobre o rateio do Ercap</a:t>
             </a:r>
             <a:endParaRPr lang="en-US" sz="1600" dirty="0"/>
           </a:p>
@@ -12593,7 +12685,7 @@
                   <a:schemeClr val="tx1"/>
                 </a:solidFill>
               </a:rPr>
-              <a:t>Apoio ao desenho de futuros leilões de armazenamento</a:t>
+              <a:t>Subsídio à ANEEL, que ainda define a fórmula</a:t>
             </a:r>
             <a:endParaRPr lang="en-US" sz="1600" dirty="0"/>
           </a:p>
@@ -12626,7 +12718,7 @@
         <p:spPr>
           <a:xfrm>
             <a:off x="8119872" y="1463040"/>
-            <a:ext cx="3520440" cy="4114800"/>
+            <a:ext cx="3520440" cy="4480560"/>
           </a:xfrm>
           <a:prstGeom prst="roundRect">
             <a:avLst>
@@ -12741,7 +12833,7 @@
         <p:spPr>
           <a:xfrm>
             <a:off x="8394192" y="2560320"/>
-            <a:ext cx="3017520" cy="3383280"/>
+            <a:ext cx="3017520" cy="3291840"/>
           </a:xfrm>
           <a:prstGeom prst="rect">
             <a:avLst/>
@@ -12766,7 +12858,7 @@
                   <a:schemeClr val="tx1"/>
                 </a:solidFill>
               </a:rPr>
-              <a:t>Resultados dependem das premissas de MMGD, potência e localização das baterias</a:t>
+              <a:t>Receita fixa só será conhecida após o leilão</a:t>
             </a:r>
             <a:endParaRPr lang="en-US" sz="1600" dirty="0"/>
           </a:p>
@@ -12784,7 +12876,7 @@
                   <a:schemeClr val="tx1"/>
                 </a:solidFill>
               </a:rPr>
-              <a:t>Regra de rateio dos encargos ainda em discussão regulatória</a:t>
+              <a:t>Critérios dos patamares P1 a P4 não localizados</a:t>
             </a:r>
             <a:endParaRPr lang="en-US" sz="1600" dirty="0"/>
           </a:p>
@@ -12802,7 +12894,7 @@
                   <a:schemeClr val="tx1"/>
                 </a:solidFill>
               </a:rPr>
-              <a:t>Estimativas de cortes variam entre fontes</a:t>
+              <a:t>Preço de valoração e ressarcimento de cortes alteram o ganho</a:t>
             </a:r>
             <a:endParaRPr lang="en-US" sz="1600" dirty="0"/>
           </a:p>
@@ -16922,7 +17014,7 @@
           </p:nvPr>
         </p:nvGraphicFramePr>
         <p:xfrm>
-          <a:off x="822960" y="2514600"/>
+          <a:off x="822960" y="2468880"/>
           <a:ext cx="2971800" cy="914400"/>
         </p:xfrm>
         <a:graphic>
@@ -16933,7 +17025,7 @@
                 <a:gridCol w="2057400"/>
                 <a:gridCol w="914400"/>
               </a:tblGrid>
-              <a:tr h="457200">
+              <a:tr h="411480">
                 <a:tc>
                   <a:txBody>
                     <a:bodyPr/>
@@ -17071,7 +17163,7 @@
                   </a:tcPr>
                 </a:tc>
               </a:tr>
-              <a:tr h="502920">
+              <a:tr h="438912">
                 <a:tc>
                   <a:txBody>
                     <a:bodyPr/>
@@ -17081,7 +17173,7 @@
                         <a:buNone/>
                       </a:pPr>
                       <a:r>
-                        <a:rPr lang="en-US" sz="1400" b="1" dirty="0">
+                        <a:rPr lang="en-US" sz="1300" b="1" dirty="0">
                           <a:solidFill>
                             <a:schemeClr val="tx1"/>
                           </a:solidFill>
@@ -17091,7 +17183,7 @@
                         </a:rPr>
                         <a:t>Hidrelétricas</a:t>
                       </a:r>
-                      <a:endParaRPr lang="en-US" sz="1400" dirty="0">
+                      <a:endParaRPr lang="en-US" sz="1300" dirty="0">
                         <a:latin typeface="Calibri" charset="0"/>
                         <a:ea typeface="Calibri" charset="0"/>
                         <a:cs typeface="Calibri" charset="0"/>
@@ -17157,7 +17249,7 @@
                           <a:ea typeface="Calibri" pitchFamily="34" charset="-122"/>
                           <a:cs typeface="Calibri" pitchFamily="34" charset="-120"/>
                         </a:rPr>
-                        <a:t>51,7</a:t>
+                        <a:t>62,2</a:t>
                       </a:r>
                       <a:endParaRPr lang="en-US" sz="1400" dirty="0">
                         <a:latin typeface="Calibri" charset="0"/>
@@ -17209,7 +17301,7 @@
                   </a:tcPr>
                 </a:tc>
               </a:tr>
-              <a:tr h="502920">
+              <a:tr h="438912">
                 <a:tc>
                   <a:txBody>
                     <a:bodyPr/>
@@ -17219,7 +17311,7 @@
                         <a:buNone/>
                       </a:pPr>
                       <a:r>
-                        <a:rPr lang="en-US" sz="1400" b="1" dirty="0">
+                        <a:rPr lang="en-US" sz="1300" b="1" dirty="0">
                           <a:solidFill>
                             <a:schemeClr val="tx1"/>
                           </a:solidFill>
@@ -17227,9 +17319,9 @@
                           <a:ea typeface="Calibri" pitchFamily="34" charset="-122"/>
                           <a:cs typeface="Calibri" pitchFamily="34" charset="-120"/>
                         </a:rPr>
-                        <a:t>Eólicas e solares</a:t>
+                        <a:t>Eólicas</a:t>
                       </a:r>
-                      <a:endParaRPr lang="en-US" sz="1400" dirty="0">
+                      <a:endParaRPr lang="en-US" sz="1300" dirty="0">
                         <a:latin typeface="Calibri" charset="0"/>
                         <a:ea typeface="Calibri" charset="0"/>
                         <a:cs typeface="Calibri" charset="0"/>
@@ -17295,7 +17387,7 @@
                           <a:ea typeface="Calibri" pitchFamily="34" charset="-122"/>
                           <a:cs typeface="Calibri" pitchFamily="34" charset="-120"/>
                         </a:rPr>
-                        <a:t>26,4</a:t>
+                        <a:t>17,9</a:t>
                       </a:r>
                       <a:endParaRPr lang="en-US" sz="1400" dirty="0">
                         <a:latin typeface="Calibri" charset="0"/>
@@ -17347,7 +17439,7 @@
                   </a:tcPr>
                 </a:tc>
               </a:tr>
-              <a:tr h="502920">
+              <a:tr h="438912">
                 <a:tc>
                   <a:txBody>
                     <a:bodyPr/>
@@ -17357,7 +17449,7 @@
                         <a:buNone/>
                       </a:pPr>
                       <a:r>
-                        <a:rPr lang="en-US" sz="1400" b="1" dirty="0">
+                        <a:rPr lang="en-US" sz="1300" b="1" dirty="0">
                           <a:solidFill>
                             <a:schemeClr val="tx1"/>
                           </a:solidFill>
@@ -17365,9 +17457,9 @@
                           <a:ea typeface="Calibri" pitchFamily="34" charset="-122"/>
                           <a:cs typeface="Calibri" pitchFamily="34" charset="-120"/>
                         </a:rPr>
-                        <a:t>Térmicas e demais</a:t>
+                        <a:t>Solares</a:t>
                       </a:r>
-                      <a:endParaRPr lang="en-US" sz="1400" dirty="0">
+                      <a:endParaRPr lang="en-US" sz="1300" dirty="0">
                         <a:latin typeface="Calibri" charset="0"/>
                         <a:ea typeface="Calibri" charset="0"/>
                         <a:cs typeface="Calibri" charset="0"/>
@@ -17433,7 +17525,7 @@
                           <a:ea typeface="Calibri" pitchFamily="34" charset="-122"/>
                           <a:cs typeface="Calibri" pitchFamily="34" charset="-120"/>
                         </a:rPr>
-                        <a:t>21,9</a:t>
+                        <a:t>5,3</a:t>
                       </a:r>
                       <a:endParaRPr lang="en-US" sz="1400" dirty="0">
                         <a:latin typeface="Calibri" charset="0"/>
@@ -17485,7 +17577,145 @@
                   </a:tcPr>
                 </a:tc>
               </a:tr>
-              <a:tr h="502920">
+              <a:tr h="438912">
+                <a:tc>
+                  <a:txBody>
+                    <a:bodyPr/>
+                    <a:lstStyle/>
+                    <a:p>
+                      <a:pPr indent="0" marL="0">
+                        <a:buNone/>
+                      </a:pPr>
+                      <a:r>
+                        <a:rPr lang="en-US" sz="1300" b="1" dirty="0">
+                          <a:solidFill>
+                            <a:schemeClr val="tx1"/>
+                          </a:solidFill>
+                          <a:latin typeface="Calibri" pitchFamily="34" charset="0"/>
+                          <a:ea typeface="Calibri" pitchFamily="34" charset="-122"/>
+                          <a:cs typeface="Calibri" pitchFamily="34" charset="-120"/>
+                        </a:rPr>
+                        <a:t>Térmicas e biomassa</a:t>
+                      </a:r>
+                      <a:endParaRPr lang="en-US" sz="1300" dirty="0">
+                        <a:latin typeface="Calibri" charset="0"/>
+                        <a:ea typeface="Calibri" charset="0"/>
+                        <a:cs typeface="Calibri" charset="0"/>
+                      </a:endParaRPr>
+                    </a:p>
+                  </a:txBody>
+                  <a:tcPr marL="91440" marR="91440" marT="45720" marB="45720" anchor="ctr">
+                    <a:lnL w="12700" cap="flat" cmpd="sng" algn="ctr">
+                      <a:solidFill>
+                        <a:srgbClr val="EEF3F8"/>
+                      </a:solidFill>
+                      <a:prstDash val="solid"/>
+                      <a:round/>
+                      <a:headEnd type="none" w="med" len="med"/>
+                      <a:tailEnd type="none" w="med" len="med"/>
+                    </a:lnL>
+                    <a:lnR w="12700" cap="flat" cmpd="sng" algn="ctr">
+                      <a:solidFill>
+                        <a:srgbClr val="EEF3F8"/>
+                      </a:solidFill>
+                      <a:prstDash val="solid"/>
+                      <a:round/>
+                      <a:headEnd type="none" w="med" len="med"/>
+                      <a:tailEnd type="none" w="med" len="med"/>
+                    </a:lnR>
+                    <a:lnT w="12700" cap="flat" cmpd="sng" algn="ctr">
+                      <a:solidFill>
+                        <a:srgbClr val="EEF3F8"/>
+                      </a:solidFill>
+                      <a:prstDash val="solid"/>
+                      <a:round/>
+                      <a:headEnd type="none" w="med" len="med"/>
+                      <a:tailEnd type="none" w="med" len="med"/>
+                    </a:lnT>
+                    <a:lnB w="12700" cap="flat" cmpd="sng" algn="ctr">
+                      <a:solidFill>
+                        <a:srgbClr val="EEF3F8"/>
+                      </a:solidFill>
+                      <a:prstDash val="solid"/>
+                      <a:round/>
+                      <a:headEnd type="none" w="med" len="med"/>
+                      <a:tailEnd type="none" w="med" len="med"/>
+                    </a:lnB>
+                    <a:solidFill>
+                      <a:schemeClr val="bg1"/>
+                    </a:solidFill>
+                  </a:tcPr>
+                </a:tc>
+                <a:tc>
+                  <a:txBody>
+                    <a:bodyPr/>
+                    <a:lstStyle/>
+                    <a:p>
+                      <a:pPr indent="0" marL="0">
+                        <a:buNone/>
+                      </a:pPr>
+                      <a:r>
+                        <a:rPr lang="en-US" sz="1400" dirty="0">
+                          <a:solidFill>
+                            <a:schemeClr val="tx1"/>
+                          </a:solidFill>
+                          <a:latin typeface="Calibri" pitchFamily="34" charset="0"/>
+                          <a:ea typeface="Calibri" pitchFamily="34" charset="-122"/>
+                          <a:cs typeface="Calibri" pitchFamily="34" charset="-120"/>
+                        </a:rPr>
+                        <a:t>14,5</a:t>
+                      </a:r>
+                      <a:endParaRPr lang="en-US" sz="1400" dirty="0">
+                        <a:latin typeface="Calibri" charset="0"/>
+                        <a:ea typeface="Calibri" charset="0"/>
+                        <a:cs typeface="Calibri" charset="0"/>
+                      </a:endParaRPr>
+                    </a:p>
+                  </a:txBody>
+                  <a:tcPr marL="91440" marR="91440" marT="45720" marB="45720" anchor="ctr">
+                    <a:lnL w="12700" cap="flat" cmpd="sng" algn="ctr">
+                      <a:solidFill>
+                        <a:srgbClr val="EEF3F8"/>
+                      </a:solidFill>
+                      <a:prstDash val="solid"/>
+                      <a:round/>
+                      <a:headEnd type="none" w="med" len="med"/>
+                      <a:tailEnd type="none" w="med" len="med"/>
+                    </a:lnL>
+                    <a:lnR w="12700" cap="flat" cmpd="sng" algn="ctr">
+                      <a:solidFill>
+                        <a:srgbClr val="EEF3F8"/>
+                      </a:solidFill>
+                      <a:prstDash val="solid"/>
+                      <a:round/>
+                      <a:headEnd type="none" w="med" len="med"/>
+                      <a:tailEnd type="none" w="med" len="med"/>
+                    </a:lnR>
+                    <a:lnT w="12700" cap="flat" cmpd="sng" algn="ctr">
+                      <a:solidFill>
+                        <a:srgbClr val="EEF3F8"/>
+                      </a:solidFill>
+                      <a:prstDash val="solid"/>
+                      <a:round/>
+                      <a:headEnd type="none" w="med" len="med"/>
+                      <a:tailEnd type="none" w="med" len="med"/>
+                    </a:lnT>
+                    <a:lnB w="12700" cap="flat" cmpd="sng" algn="ctr">
+                      <a:solidFill>
+                        <a:srgbClr val="EEF3F8"/>
+                      </a:solidFill>
+                      <a:prstDash val="solid"/>
+                      <a:round/>
+                      <a:headEnd type="none" w="med" len="med"/>
+                      <a:tailEnd type="none" w="med" len="med"/>
+                    </a:lnB>
+                    <a:solidFill>
+                      <a:schemeClr val="bg1"/>
+                    </a:solidFill>
+                  </a:tcPr>
+                </a:tc>
+              </a:tr>
+              <a:tr h="438912">
                 <a:tc>
                   <a:txBody>
                     <a:bodyPr/>
@@ -17571,7 +17801,7 @@
                           <a:ea typeface="Calibri" pitchFamily="34" charset="-122"/>
                           <a:cs typeface="Calibri" pitchFamily="34" charset="-120"/>
                         </a:rPr>
-                        <a:t>100,0</a:t>
+                        <a:t>99,9</a:t>
                       </a:r>
                       <a:endParaRPr lang="en-US" sz="1400" dirty="0">
                         <a:latin typeface="Calibri" charset="0"/>
@@ -17635,8 +17865,8 @@
         </p:nvSpPr>
         <p:spPr>
           <a:xfrm>
-            <a:off x="822960" y="5166360"/>
-            <a:ext cx="2971800" cy="914400"/>
+            <a:off x="822960" y="5257800"/>
+            <a:ext cx="2971800" cy="868680"/>
           </a:xfrm>
           <a:prstGeom prst="rect">
             <a:avLst/>
@@ -17657,7 +17887,7 @@
                   <a:schemeClr val="tx2"/>
                 </a:solidFill>
               </a:rPr>
-              <a:t>Térmicas e demais = 100 − 51,7 − 26,4 = 21,9 (resíduo). Fonte: EPE, Anuário Estatístico de Energia Elétrica 2025.</a:t>
+              <a:t>Geração centralizada de 2025: hidráulica 62,2%, eólica 17,9%, solar 5,3%, térmica 10,0% e biomassa 4,5%. O total de 99,9% é arredondamento. Fonte: CCEE/EPE.</a:t>
             </a:r>
             <a:endParaRPr lang="en-US" sz="1200" dirty="0"/>
           </a:p>
@@ -18356,16 +18586,16 @@
             <a:tbl>
               <a:tblPr/>
               <a:tblGrid>
-                <a:gridCol w="2011680"/>
+                <a:gridCol w="2103120"/>
                 <a:gridCol w="914400"/>
                 <a:gridCol w="1417320"/>
                 <a:gridCol w="1188720"/>
-                <a:gridCol w="1508760"/>
+                <a:gridCol w="1463040"/>
                 <a:gridCol w="1188720"/>
-                <a:gridCol w="1508760"/>
+                <a:gridCol w="1463040"/>
                 <a:gridCol w="1353312"/>
               </a:tblGrid>
-              <a:tr h="731520">
+              <a:tr h="685800">
                 <a:tc>
                   <a:txBody>
                     <a:bodyPr/>
@@ -18911,7 +19141,7 @@
                   </a:tcPr>
                 </a:tc>
               </a:tr>
-              <a:tr h="594360">
+              <a:tr h="502920">
                 <a:tc>
                   <a:txBody>
                     <a:bodyPr/>
@@ -18921,7 +19151,7 @@
                         <a:buNone/>
                       </a:pPr>
                       <a:r>
-                        <a:rPr lang="en-US" sz="1400" b="1" dirty="0">
+                        <a:rPr lang="en-US" sz="1300" b="1" dirty="0">
                           <a:solidFill>
                             <a:schemeClr val="tx1"/>
                           </a:solidFill>
@@ -18931,7 +19161,7 @@
                         </a:rPr>
                         <a:t>Hidrelétricas</a:t>
                       </a:r>
-                      <a:endParaRPr lang="en-US" sz="1400" dirty="0">
+                      <a:endParaRPr lang="en-US" sz="1300" dirty="0">
                         <a:latin typeface="Calibri" charset="0"/>
                         <a:ea typeface="Calibri" charset="0"/>
                         <a:cs typeface="Calibri" charset="0"/>
@@ -18997,7 +19227,7 @@
                           <a:ea typeface="Calibri" pitchFamily="34" charset="-122"/>
                           <a:cs typeface="Calibri" pitchFamily="34" charset="-120"/>
                         </a:rPr>
-                        <a:t>51,7</a:t>
+                        <a:t>62,2</a:t>
                       </a:r>
                       <a:endParaRPr lang="en-US" sz="1400" dirty="0">
                         <a:latin typeface="Calibri" charset="0"/>
@@ -19065,7 +19295,7 @@
                           <a:ea typeface="Calibri" pitchFamily="34" charset="-122"/>
                           <a:cs typeface="Calibri" pitchFamily="34" charset="-120"/>
                         </a:rPr>
-                        <a:t>51,70</a:t>
+                        <a:t>62,20</a:t>
                       </a:r>
                       <a:endParaRPr lang="en-US" sz="1400" dirty="0">
                         <a:latin typeface="Calibri" charset="0"/>
@@ -19133,7 +19363,7 @@
                           <a:ea typeface="Calibri" pitchFamily="34" charset="-122"/>
                           <a:cs typeface="Calibri" pitchFamily="34" charset="-120"/>
                         </a:rPr>
-                        <a:t>51,7%</a:t>
+                        <a:t>62,3%</a:t>
                       </a:r>
                       <a:endParaRPr lang="en-US" sz="1400" dirty="0">
                         <a:latin typeface="Calibri" charset="0"/>
@@ -19201,7 +19431,7 @@
                           <a:ea typeface="Calibri" pitchFamily="34" charset="-122"/>
                           <a:cs typeface="Calibri" pitchFamily="34" charset="-120"/>
                         </a:rPr>
-                        <a:t>32,31</a:t>
+                        <a:t>38,88</a:t>
                       </a:r>
                       <a:endParaRPr lang="en-US" sz="1400" dirty="0">
                         <a:latin typeface="Calibri" charset="0"/>
@@ -19269,7 +19499,7 @@
                           <a:ea typeface="Calibri" pitchFamily="34" charset="-122"/>
                           <a:cs typeface="Calibri" pitchFamily="34" charset="-120"/>
                         </a:rPr>
-                        <a:t>44,6%</a:t>
+                        <a:t>54,6%</a:t>
                       </a:r>
                       <a:endParaRPr lang="en-US" sz="1400" dirty="0">
                         <a:latin typeface="Calibri" charset="0"/>
@@ -19337,7 +19567,7 @@
                           <a:ea typeface="Calibri" pitchFamily="34" charset="-122"/>
                           <a:cs typeface="Calibri" pitchFamily="34" charset="-120"/>
                         </a:rPr>
-                        <a:t>12,93</a:t>
+                        <a:t>15,55</a:t>
                       </a:r>
                       <a:endParaRPr lang="en-US" sz="1400" dirty="0">
                         <a:latin typeface="Calibri" charset="0"/>
@@ -19405,7 +19635,7 @@
                           <a:ea typeface="Calibri" pitchFamily="34" charset="-122"/>
                           <a:cs typeface="Calibri" pitchFamily="34" charset="-120"/>
                         </a:rPr>
-                        <a:t>28,9%</a:t>
+                        <a:t>36,7%</a:t>
                       </a:r>
                       <a:endParaRPr lang="en-US" sz="1400" dirty="0">
                         <a:latin typeface="Calibri" charset="0"/>
@@ -19457,7 +19687,7 @@
                   </a:tcPr>
                 </a:tc>
               </a:tr>
-              <a:tr h="594360">
+              <a:tr h="502920">
                 <a:tc>
                   <a:txBody>
                     <a:bodyPr/>
@@ -19467,7 +19697,7 @@
                         <a:buNone/>
                       </a:pPr>
                       <a:r>
-                        <a:rPr lang="en-US" sz="1400" b="1" dirty="0">
+                        <a:rPr lang="en-US" sz="1300" b="1" dirty="0">
                           <a:solidFill>
                             <a:schemeClr val="tx1"/>
                           </a:solidFill>
@@ -19475,9 +19705,9 @@
                           <a:ea typeface="Calibri" pitchFamily="34" charset="-122"/>
                           <a:cs typeface="Calibri" pitchFamily="34" charset="-120"/>
                         </a:rPr>
-                        <a:t>Eólicas e solares</a:t>
+                        <a:t>Eólicas</a:t>
                       </a:r>
-                      <a:endParaRPr lang="en-US" sz="1400" dirty="0">
+                      <a:endParaRPr lang="en-US" sz="1300" dirty="0">
                         <a:latin typeface="Calibri" charset="0"/>
                         <a:ea typeface="Calibri" charset="0"/>
                         <a:cs typeface="Calibri" charset="0"/>
@@ -19543,7 +19773,7 @@
                           <a:ea typeface="Calibri" pitchFamily="34" charset="-122"/>
                           <a:cs typeface="Calibri" pitchFamily="34" charset="-120"/>
                         </a:rPr>
-                        <a:t>26,4</a:t>
+                        <a:t>17,9</a:t>
                       </a:r>
                       <a:endParaRPr lang="en-US" sz="1400" dirty="0">
                         <a:latin typeface="Calibri" charset="0"/>
@@ -19611,7 +19841,7 @@
                           <a:ea typeface="Calibri" pitchFamily="34" charset="-122"/>
                           <a:cs typeface="Calibri" pitchFamily="34" charset="-120"/>
                         </a:rPr>
-                        <a:t>26,40</a:t>
+                        <a:t>17,90</a:t>
                       </a:r>
                       <a:endParaRPr lang="en-US" sz="1400" dirty="0">
                         <a:latin typeface="Calibri" charset="0"/>
@@ -19679,7 +19909,7 @@
                           <a:ea typeface="Calibri" pitchFamily="34" charset="-122"/>
                           <a:cs typeface="Calibri" pitchFamily="34" charset="-120"/>
                         </a:rPr>
-                        <a:t>26,4%</a:t>
+                        <a:t>17,9%</a:t>
                       </a:r>
                       <a:endParaRPr lang="en-US" sz="1400" dirty="0">
                         <a:latin typeface="Calibri" charset="0"/>
@@ -19747,7 +19977,7 @@
                           <a:ea typeface="Calibri" pitchFamily="34" charset="-122"/>
                           <a:cs typeface="Calibri" pitchFamily="34" charset="-120"/>
                         </a:rPr>
-                        <a:t>26,40</a:t>
+                        <a:t>17,90</a:t>
                       </a:r>
                       <a:endParaRPr lang="en-US" sz="1400" dirty="0">
                         <a:latin typeface="Calibri" charset="0"/>
@@ -19815,7 +20045,7 @@
                           <a:ea typeface="Calibri" pitchFamily="34" charset="-122"/>
                           <a:cs typeface="Calibri" pitchFamily="34" charset="-120"/>
                         </a:rPr>
-                        <a:t>36,5%</a:t>
+                        <a:t>25,2%</a:t>
                       </a:r>
                       <a:endParaRPr lang="en-US" sz="1400" dirty="0">
                         <a:latin typeface="Calibri" charset="0"/>
@@ -19883,7 +20113,7 @@
                           <a:ea typeface="Calibri" pitchFamily="34" charset="-122"/>
                           <a:cs typeface="Calibri" pitchFamily="34" charset="-120"/>
                         </a:rPr>
-                        <a:t>26,40</a:t>
+                        <a:t>17,90</a:t>
                       </a:r>
                       <a:endParaRPr lang="en-US" sz="1400" dirty="0">
                         <a:latin typeface="Calibri" charset="0"/>
@@ -19951,7 +20181,7 @@
                           <a:ea typeface="Calibri" pitchFamily="34" charset="-122"/>
                           <a:cs typeface="Calibri" pitchFamily="34" charset="-120"/>
                         </a:rPr>
-                        <a:t>58,9%</a:t>
+                        <a:t>42,2%</a:t>
                       </a:r>
                       <a:endParaRPr lang="en-US" sz="1400" dirty="0">
                         <a:latin typeface="Calibri" charset="0"/>
@@ -20003,7 +20233,7 @@
                   </a:tcPr>
                 </a:tc>
               </a:tr>
-              <a:tr h="594360">
+              <a:tr h="502920">
                 <a:tc>
                   <a:txBody>
                     <a:bodyPr/>
@@ -20013,7 +20243,7 @@
                         <a:buNone/>
                       </a:pPr>
                       <a:r>
-                        <a:rPr lang="en-US" sz="1400" b="1" dirty="0">
+                        <a:rPr lang="en-US" sz="1300" b="1" dirty="0">
                           <a:solidFill>
                             <a:schemeClr val="tx1"/>
                           </a:solidFill>
@@ -20021,9 +20251,9 @@
                           <a:ea typeface="Calibri" pitchFamily="34" charset="-122"/>
                           <a:cs typeface="Calibri" pitchFamily="34" charset="-120"/>
                         </a:rPr>
-                        <a:t>Térmicas e demais</a:t>
+                        <a:t>Solares</a:t>
                       </a:r>
-                      <a:endParaRPr lang="en-US" sz="1400" dirty="0">
+                      <a:endParaRPr lang="en-US" sz="1300" dirty="0">
                         <a:latin typeface="Calibri" charset="0"/>
                         <a:ea typeface="Calibri" charset="0"/>
                         <a:cs typeface="Calibri" charset="0"/>
@@ -20089,7 +20319,7 @@
                           <a:ea typeface="Calibri" pitchFamily="34" charset="-122"/>
                           <a:cs typeface="Calibri" pitchFamily="34" charset="-120"/>
                         </a:rPr>
-                        <a:t>21,9</a:t>
+                        <a:t>5,3</a:t>
                       </a:r>
                       <a:endParaRPr lang="en-US" sz="1400" dirty="0">
                         <a:latin typeface="Calibri" charset="0"/>
@@ -20157,7 +20387,7 @@
                           <a:ea typeface="Calibri" pitchFamily="34" charset="-122"/>
                           <a:cs typeface="Calibri" pitchFamily="34" charset="-120"/>
                         </a:rPr>
-                        <a:t>21,90</a:t>
+                        <a:t>5,30</a:t>
                       </a:r>
                       <a:endParaRPr lang="en-US" sz="1400" dirty="0">
                         <a:latin typeface="Calibri" charset="0"/>
@@ -20225,7 +20455,7 @@
                           <a:ea typeface="Calibri" pitchFamily="34" charset="-122"/>
                           <a:cs typeface="Calibri" pitchFamily="34" charset="-120"/>
                         </a:rPr>
-                        <a:t>21,9%</a:t>
+                        <a:t>5,3%</a:t>
                       </a:r>
                       <a:endParaRPr lang="en-US" sz="1400" dirty="0">
                         <a:latin typeface="Calibri" charset="0"/>
@@ -20293,7 +20523,7 @@
                           <a:ea typeface="Calibri" pitchFamily="34" charset="-122"/>
                           <a:cs typeface="Calibri" pitchFamily="34" charset="-120"/>
                         </a:rPr>
-                        <a:t>13,69</a:t>
+                        <a:t>5,30</a:t>
                       </a:r>
                       <a:endParaRPr lang="en-US" sz="1400" dirty="0">
                         <a:latin typeface="Calibri" charset="0"/>
@@ -20361,7 +20591,7 @@
                           <a:ea typeface="Calibri" pitchFamily="34" charset="-122"/>
                           <a:cs typeface="Calibri" pitchFamily="34" charset="-120"/>
                         </a:rPr>
-                        <a:t>18,9%</a:t>
+                        <a:t>7,5%</a:t>
                       </a:r>
                       <a:endParaRPr lang="en-US" sz="1400" dirty="0">
                         <a:latin typeface="Calibri" charset="0"/>
@@ -20429,7 +20659,7 @@
                           <a:ea typeface="Calibri" pitchFamily="34" charset="-122"/>
                           <a:cs typeface="Calibri" pitchFamily="34" charset="-120"/>
                         </a:rPr>
-                        <a:t>5,48</a:t>
+                        <a:t>5,30</a:t>
                       </a:r>
                       <a:endParaRPr lang="en-US" sz="1400" dirty="0">
                         <a:latin typeface="Calibri" charset="0"/>
@@ -20497,7 +20727,7 @@
                           <a:ea typeface="Calibri" pitchFamily="34" charset="-122"/>
                           <a:cs typeface="Calibri" pitchFamily="34" charset="-120"/>
                         </a:rPr>
-                        <a:t>12,2%</a:t>
+                        <a:t>12,5%</a:t>
                       </a:r>
                       <a:endParaRPr lang="en-US" sz="1400" dirty="0">
                         <a:latin typeface="Calibri" charset="0"/>
@@ -20549,7 +20779,553 @@
                   </a:tcPr>
                 </a:tc>
               </a:tr>
-              <a:tr h="594360">
+              <a:tr h="502920">
+                <a:tc>
+                  <a:txBody>
+                    <a:bodyPr/>
+                    <a:lstStyle/>
+                    <a:p>
+                      <a:pPr algn="l" indent="0" marL="0">
+                        <a:buNone/>
+                      </a:pPr>
+                      <a:r>
+                        <a:rPr lang="en-US" sz="1300" b="1" dirty="0">
+                          <a:solidFill>
+                            <a:schemeClr val="tx1"/>
+                          </a:solidFill>
+                          <a:latin typeface="Calibri" pitchFamily="34" charset="0"/>
+                          <a:ea typeface="Calibri" pitchFamily="34" charset="-122"/>
+                          <a:cs typeface="Calibri" pitchFamily="34" charset="-120"/>
+                        </a:rPr>
+                        <a:t>Térmicas e biomassa</a:t>
+                      </a:r>
+                      <a:endParaRPr lang="en-US" sz="1300" dirty="0">
+                        <a:latin typeface="Calibri" charset="0"/>
+                        <a:ea typeface="Calibri" charset="0"/>
+                        <a:cs typeface="Calibri" charset="0"/>
+                      </a:endParaRPr>
+                    </a:p>
+                  </a:txBody>
+                  <a:tcPr marL="91440" marR="91440" marT="45720" marB="45720" anchor="ctr">
+                    <a:lnL w="12700" cap="flat" cmpd="sng" algn="ctr">
+                      <a:solidFill>
+                        <a:srgbClr val="EEF3F8"/>
+                      </a:solidFill>
+                      <a:prstDash val="solid"/>
+                      <a:round/>
+                      <a:headEnd type="none" w="med" len="med"/>
+                      <a:tailEnd type="none" w="med" len="med"/>
+                    </a:lnL>
+                    <a:lnR w="12700" cap="flat" cmpd="sng" algn="ctr">
+                      <a:solidFill>
+                        <a:srgbClr val="EEF3F8"/>
+                      </a:solidFill>
+                      <a:prstDash val="solid"/>
+                      <a:round/>
+                      <a:headEnd type="none" w="med" len="med"/>
+                      <a:tailEnd type="none" w="med" len="med"/>
+                    </a:lnR>
+                    <a:lnT w="12700" cap="flat" cmpd="sng" algn="ctr">
+                      <a:solidFill>
+                        <a:srgbClr val="EEF3F8"/>
+                      </a:solidFill>
+                      <a:prstDash val="solid"/>
+                      <a:round/>
+                      <a:headEnd type="none" w="med" len="med"/>
+                      <a:tailEnd type="none" w="med" len="med"/>
+                    </a:lnT>
+                    <a:lnB w="12700" cap="flat" cmpd="sng" algn="ctr">
+                      <a:solidFill>
+                        <a:srgbClr val="EEF3F8"/>
+                      </a:solidFill>
+                      <a:prstDash val="solid"/>
+                      <a:round/>
+                      <a:headEnd type="none" w="med" len="med"/>
+                      <a:tailEnd type="none" w="med" len="med"/>
+                    </a:lnB>
+                    <a:solidFill>
+                      <a:schemeClr val="bg1"/>
+                    </a:solidFill>
+                  </a:tcPr>
+                </a:tc>
+                <a:tc>
+                  <a:txBody>
+                    <a:bodyPr/>
+                    <a:lstStyle/>
+                    <a:p>
+                      <a:pPr algn="ctr" indent="0" marL="0">
+                        <a:buNone/>
+                      </a:pPr>
+                      <a:r>
+                        <a:rPr lang="en-US" sz="1400" dirty="0">
+                          <a:solidFill>
+                            <a:schemeClr val="tx1"/>
+                          </a:solidFill>
+                          <a:latin typeface="Calibri" pitchFamily="34" charset="0"/>
+                          <a:ea typeface="Calibri" pitchFamily="34" charset="-122"/>
+                          <a:cs typeface="Calibri" pitchFamily="34" charset="-120"/>
+                        </a:rPr>
+                        <a:t>14,5</a:t>
+                      </a:r>
+                      <a:endParaRPr lang="en-US" sz="1400" dirty="0">
+                        <a:latin typeface="Calibri" charset="0"/>
+                        <a:ea typeface="Calibri" charset="0"/>
+                        <a:cs typeface="Calibri" charset="0"/>
+                      </a:endParaRPr>
+                    </a:p>
+                  </a:txBody>
+                  <a:tcPr marL="91440" marR="91440" marT="45720" marB="45720" anchor="ctr">
+                    <a:lnL w="12700" cap="flat" cmpd="sng" algn="ctr">
+                      <a:solidFill>
+                        <a:srgbClr val="EEF3F8"/>
+                      </a:solidFill>
+                      <a:prstDash val="solid"/>
+                      <a:round/>
+                      <a:headEnd type="none" w="med" len="med"/>
+                      <a:tailEnd type="none" w="med" len="med"/>
+                    </a:lnL>
+                    <a:lnR w="12700" cap="flat" cmpd="sng" algn="ctr">
+                      <a:solidFill>
+                        <a:srgbClr val="EEF3F8"/>
+                      </a:solidFill>
+                      <a:prstDash val="solid"/>
+                      <a:round/>
+                      <a:headEnd type="none" w="med" len="med"/>
+                      <a:tailEnd type="none" w="med" len="med"/>
+                    </a:lnR>
+                    <a:lnT w="12700" cap="flat" cmpd="sng" algn="ctr">
+                      <a:solidFill>
+                        <a:srgbClr val="EEF3F8"/>
+                      </a:solidFill>
+                      <a:prstDash val="solid"/>
+                      <a:round/>
+                      <a:headEnd type="none" w="med" len="med"/>
+                      <a:tailEnd type="none" w="med" len="med"/>
+                    </a:lnT>
+                    <a:lnB w="12700" cap="flat" cmpd="sng" algn="ctr">
+                      <a:solidFill>
+                        <a:srgbClr val="EEF3F8"/>
+                      </a:solidFill>
+                      <a:prstDash val="solid"/>
+                      <a:round/>
+                      <a:headEnd type="none" w="med" len="med"/>
+                      <a:tailEnd type="none" w="med" len="med"/>
+                    </a:lnB>
+                    <a:solidFill>
+                      <a:schemeClr val="bg1"/>
+                    </a:solidFill>
+                  </a:tcPr>
+                </a:tc>
+                <a:tc>
+                  <a:txBody>
+                    <a:bodyPr/>
+                    <a:lstStyle/>
+                    <a:p>
+                      <a:pPr algn="ctr" indent="0" marL="0">
+                        <a:buNone/>
+                      </a:pPr>
+                      <a:r>
+                        <a:rPr lang="en-US" sz="1400" dirty="0">
+                          <a:solidFill>
+                            <a:schemeClr val="tx1"/>
+                          </a:solidFill>
+                          <a:latin typeface="Calibri" pitchFamily="34" charset="0"/>
+                          <a:ea typeface="Calibri" pitchFamily="34" charset="-122"/>
+                          <a:cs typeface="Calibri" pitchFamily="34" charset="-120"/>
+                        </a:rPr>
+                        <a:t>14,50</a:t>
+                      </a:r>
+                      <a:endParaRPr lang="en-US" sz="1400" dirty="0">
+                        <a:latin typeface="Calibri" charset="0"/>
+                        <a:ea typeface="Calibri" charset="0"/>
+                        <a:cs typeface="Calibri" charset="0"/>
+                      </a:endParaRPr>
+                    </a:p>
+                  </a:txBody>
+                  <a:tcPr marL="91440" marR="91440" marT="45720" marB="45720" anchor="ctr">
+                    <a:lnL w="12700" cap="flat" cmpd="sng" algn="ctr">
+                      <a:solidFill>
+                        <a:srgbClr val="EEF3F8"/>
+                      </a:solidFill>
+                      <a:prstDash val="solid"/>
+                      <a:round/>
+                      <a:headEnd type="none" w="med" len="med"/>
+                      <a:tailEnd type="none" w="med" len="med"/>
+                    </a:lnL>
+                    <a:lnR w="12700" cap="flat" cmpd="sng" algn="ctr">
+                      <a:solidFill>
+                        <a:srgbClr val="EEF3F8"/>
+                      </a:solidFill>
+                      <a:prstDash val="solid"/>
+                      <a:round/>
+                      <a:headEnd type="none" w="med" len="med"/>
+                      <a:tailEnd type="none" w="med" len="med"/>
+                    </a:lnR>
+                    <a:lnT w="12700" cap="flat" cmpd="sng" algn="ctr">
+                      <a:solidFill>
+                        <a:srgbClr val="EEF3F8"/>
+                      </a:solidFill>
+                      <a:prstDash val="solid"/>
+                      <a:round/>
+                      <a:headEnd type="none" w="med" len="med"/>
+                      <a:tailEnd type="none" w="med" len="med"/>
+                    </a:lnT>
+                    <a:lnB w="12700" cap="flat" cmpd="sng" algn="ctr">
+                      <a:solidFill>
+                        <a:srgbClr val="EEF3F8"/>
+                      </a:solidFill>
+                      <a:prstDash val="solid"/>
+                      <a:round/>
+                      <a:headEnd type="none" w="med" len="med"/>
+                      <a:tailEnd type="none" w="med" len="med"/>
+                    </a:lnB>
+                    <a:solidFill>
+                      <a:schemeClr val="bg1"/>
+                    </a:solidFill>
+                  </a:tcPr>
+                </a:tc>
+                <a:tc>
+                  <a:txBody>
+                    <a:bodyPr/>
+                    <a:lstStyle/>
+                    <a:p>
+                      <a:pPr algn="ctr" indent="0" marL="0">
+                        <a:buNone/>
+                      </a:pPr>
+                      <a:r>
+                        <a:rPr lang="en-US" sz="1400" dirty="0">
+                          <a:solidFill>
+                            <a:schemeClr val="tx1"/>
+                          </a:solidFill>
+                          <a:latin typeface="Calibri" pitchFamily="34" charset="0"/>
+                          <a:ea typeface="Calibri" pitchFamily="34" charset="-122"/>
+                          <a:cs typeface="Calibri" pitchFamily="34" charset="-120"/>
+                        </a:rPr>
+                        <a:t>14,5%</a:t>
+                      </a:r>
+                      <a:endParaRPr lang="en-US" sz="1400" dirty="0">
+                        <a:latin typeface="Calibri" charset="0"/>
+                        <a:ea typeface="Calibri" charset="0"/>
+                        <a:cs typeface="Calibri" charset="0"/>
+                      </a:endParaRPr>
+                    </a:p>
+                  </a:txBody>
+                  <a:tcPr marL="91440" marR="91440" marT="45720" marB="45720" anchor="ctr">
+                    <a:lnL w="12700" cap="flat" cmpd="sng" algn="ctr">
+                      <a:solidFill>
+                        <a:srgbClr val="EEF3F8"/>
+                      </a:solidFill>
+                      <a:prstDash val="solid"/>
+                      <a:round/>
+                      <a:headEnd type="none" w="med" len="med"/>
+                      <a:tailEnd type="none" w="med" len="med"/>
+                    </a:lnL>
+                    <a:lnR w="12700" cap="flat" cmpd="sng" algn="ctr">
+                      <a:solidFill>
+                        <a:srgbClr val="EEF3F8"/>
+                      </a:solidFill>
+                      <a:prstDash val="solid"/>
+                      <a:round/>
+                      <a:headEnd type="none" w="med" len="med"/>
+                      <a:tailEnd type="none" w="med" len="med"/>
+                    </a:lnR>
+                    <a:lnT w="12700" cap="flat" cmpd="sng" algn="ctr">
+                      <a:solidFill>
+                        <a:srgbClr val="EEF3F8"/>
+                      </a:solidFill>
+                      <a:prstDash val="solid"/>
+                      <a:round/>
+                      <a:headEnd type="none" w="med" len="med"/>
+                      <a:tailEnd type="none" w="med" len="med"/>
+                    </a:lnT>
+                    <a:lnB w="12700" cap="flat" cmpd="sng" algn="ctr">
+                      <a:solidFill>
+                        <a:srgbClr val="EEF3F8"/>
+                      </a:solidFill>
+                      <a:prstDash val="solid"/>
+                      <a:round/>
+                      <a:headEnd type="none" w="med" len="med"/>
+                      <a:tailEnd type="none" w="med" len="med"/>
+                    </a:lnB>
+                    <a:solidFill>
+                      <a:schemeClr val="bg1"/>
+                    </a:solidFill>
+                  </a:tcPr>
+                </a:tc>
+                <a:tc>
+                  <a:txBody>
+                    <a:bodyPr/>
+                    <a:lstStyle/>
+                    <a:p>
+                      <a:pPr algn="ctr" indent="0" marL="0">
+                        <a:buNone/>
+                      </a:pPr>
+                      <a:r>
+                        <a:rPr lang="en-US" sz="1400" dirty="0">
+                          <a:solidFill>
+                            <a:schemeClr val="tx1"/>
+                          </a:solidFill>
+                          <a:latin typeface="Calibri" pitchFamily="34" charset="0"/>
+                          <a:ea typeface="Calibri" pitchFamily="34" charset="-122"/>
+                          <a:cs typeface="Calibri" pitchFamily="34" charset="-120"/>
+                        </a:rPr>
+                        <a:t>9,06</a:t>
+                      </a:r>
+                      <a:endParaRPr lang="en-US" sz="1400" dirty="0">
+                        <a:latin typeface="Calibri" charset="0"/>
+                        <a:ea typeface="Calibri" charset="0"/>
+                        <a:cs typeface="Calibri" charset="0"/>
+                      </a:endParaRPr>
+                    </a:p>
+                  </a:txBody>
+                  <a:tcPr marL="91440" marR="91440" marT="45720" marB="45720" anchor="ctr">
+                    <a:lnL w="12700" cap="flat" cmpd="sng" algn="ctr">
+                      <a:solidFill>
+                        <a:srgbClr val="EEF3F8"/>
+                      </a:solidFill>
+                      <a:prstDash val="solid"/>
+                      <a:round/>
+                      <a:headEnd type="none" w="med" len="med"/>
+                      <a:tailEnd type="none" w="med" len="med"/>
+                    </a:lnL>
+                    <a:lnR w="12700" cap="flat" cmpd="sng" algn="ctr">
+                      <a:solidFill>
+                        <a:srgbClr val="EEF3F8"/>
+                      </a:solidFill>
+                      <a:prstDash val="solid"/>
+                      <a:round/>
+                      <a:headEnd type="none" w="med" len="med"/>
+                      <a:tailEnd type="none" w="med" len="med"/>
+                    </a:lnR>
+                    <a:lnT w="12700" cap="flat" cmpd="sng" algn="ctr">
+                      <a:solidFill>
+                        <a:srgbClr val="EEF3F8"/>
+                      </a:solidFill>
+                      <a:prstDash val="solid"/>
+                      <a:round/>
+                      <a:headEnd type="none" w="med" len="med"/>
+                      <a:tailEnd type="none" w="med" len="med"/>
+                    </a:lnT>
+                    <a:lnB w="12700" cap="flat" cmpd="sng" algn="ctr">
+                      <a:solidFill>
+                        <a:srgbClr val="EEF3F8"/>
+                      </a:solidFill>
+                      <a:prstDash val="solid"/>
+                      <a:round/>
+                      <a:headEnd type="none" w="med" len="med"/>
+                      <a:tailEnd type="none" w="med" len="med"/>
+                    </a:lnB>
+                    <a:solidFill>
+                      <a:schemeClr val="bg1"/>
+                    </a:solidFill>
+                  </a:tcPr>
+                </a:tc>
+                <a:tc>
+                  <a:txBody>
+                    <a:bodyPr/>
+                    <a:lstStyle/>
+                    <a:p>
+                      <a:pPr algn="ctr" indent="0" marL="0">
+                        <a:buNone/>
+                      </a:pPr>
+                      <a:r>
+                        <a:rPr lang="en-US" sz="1400" dirty="0">
+                          <a:solidFill>
+                            <a:schemeClr val="tx1"/>
+                          </a:solidFill>
+                          <a:latin typeface="Calibri" pitchFamily="34" charset="0"/>
+                          <a:ea typeface="Calibri" pitchFamily="34" charset="-122"/>
+                          <a:cs typeface="Calibri" pitchFamily="34" charset="-120"/>
+                        </a:rPr>
+                        <a:t>12,7%</a:t>
+                      </a:r>
+                      <a:endParaRPr lang="en-US" sz="1400" dirty="0">
+                        <a:latin typeface="Calibri" charset="0"/>
+                        <a:ea typeface="Calibri" charset="0"/>
+                        <a:cs typeface="Calibri" charset="0"/>
+                      </a:endParaRPr>
+                    </a:p>
+                  </a:txBody>
+                  <a:tcPr marL="91440" marR="91440" marT="45720" marB="45720" anchor="ctr">
+                    <a:lnL w="12700" cap="flat" cmpd="sng" algn="ctr">
+                      <a:solidFill>
+                        <a:srgbClr val="EEF3F8"/>
+                      </a:solidFill>
+                      <a:prstDash val="solid"/>
+                      <a:round/>
+                      <a:headEnd type="none" w="med" len="med"/>
+                      <a:tailEnd type="none" w="med" len="med"/>
+                    </a:lnL>
+                    <a:lnR w="12700" cap="flat" cmpd="sng" algn="ctr">
+                      <a:solidFill>
+                        <a:srgbClr val="EEF3F8"/>
+                      </a:solidFill>
+                      <a:prstDash val="solid"/>
+                      <a:round/>
+                      <a:headEnd type="none" w="med" len="med"/>
+                      <a:tailEnd type="none" w="med" len="med"/>
+                    </a:lnR>
+                    <a:lnT w="12700" cap="flat" cmpd="sng" algn="ctr">
+                      <a:solidFill>
+                        <a:srgbClr val="EEF3F8"/>
+                      </a:solidFill>
+                      <a:prstDash val="solid"/>
+                      <a:round/>
+                      <a:headEnd type="none" w="med" len="med"/>
+                      <a:tailEnd type="none" w="med" len="med"/>
+                    </a:lnT>
+                    <a:lnB w="12700" cap="flat" cmpd="sng" algn="ctr">
+                      <a:solidFill>
+                        <a:srgbClr val="EEF3F8"/>
+                      </a:solidFill>
+                      <a:prstDash val="solid"/>
+                      <a:round/>
+                      <a:headEnd type="none" w="med" len="med"/>
+                      <a:tailEnd type="none" w="med" len="med"/>
+                    </a:lnB>
+                    <a:solidFill>
+                      <a:schemeClr val="bg1"/>
+                    </a:solidFill>
+                  </a:tcPr>
+                </a:tc>
+                <a:tc>
+                  <a:txBody>
+                    <a:bodyPr/>
+                    <a:lstStyle/>
+                    <a:p>
+                      <a:pPr algn="ctr" indent="0" marL="0">
+                        <a:buNone/>
+                      </a:pPr>
+                      <a:r>
+                        <a:rPr lang="en-US" sz="1400" dirty="0">
+                          <a:solidFill>
+                            <a:schemeClr val="tx1"/>
+                          </a:solidFill>
+                          <a:latin typeface="Calibri" pitchFamily="34" charset="0"/>
+                          <a:ea typeface="Calibri" pitchFamily="34" charset="-122"/>
+                          <a:cs typeface="Calibri" pitchFamily="34" charset="-120"/>
+                        </a:rPr>
+                        <a:t>3,63</a:t>
+                      </a:r>
+                      <a:endParaRPr lang="en-US" sz="1400" dirty="0">
+                        <a:latin typeface="Calibri" charset="0"/>
+                        <a:ea typeface="Calibri" charset="0"/>
+                        <a:cs typeface="Calibri" charset="0"/>
+                      </a:endParaRPr>
+                    </a:p>
+                  </a:txBody>
+                  <a:tcPr marL="91440" marR="91440" marT="45720" marB="45720" anchor="ctr">
+                    <a:lnL w="12700" cap="flat" cmpd="sng" algn="ctr">
+                      <a:solidFill>
+                        <a:srgbClr val="EEF3F8"/>
+                      </a:solidFill>
+                      <a:prstDash val="solid"/>
+                      <a:round/>
+                      <a:headEnd type="none" w="med" len="med"/>
+                      <a:tailEnd type="none" w="med" len="med"/>
+                    </a:lnL>
+                    <a:lnR w="12700" cap="flat" cmpd="sng" algn="ctr">
+                      <a:solidFill>
+                        <a:srgbClr val="EEF3F8"/>
+                      </a:solidFill>
+                      <a:prstDash val="solid"/>
+                      <a:round/>
+                      <a:headEnd type="none" w="med" len="med"/>
+                      <a:tailEnd type="none" w="med" len="med"/>
+                    </a:lnR>
+                    <a:lnT w="12700" cap="flat" cmpd="sng" algn="ctr">
+                      <a:solidFill>
+                        <a:srgbClr val="EEF3F8"/>
+                      </a:solidFill>
+                      <a:prstDash val="solid"/>
+                      <a:round/>
+                      <a:headEnd type="none" w="med" len="med"/>
+                      <a:tailEnd type="none" w="med" len="med"/>
+                    </a:lnT>
+                    <a:lnB w="12700" cap="flat" cmpd="sng" algn="ctr">
+                      <a:solidFill>
+                        <a:srgbClr val="EEF3F8"/>
+                      </a:solidFill>
+                      <a:prstDash val="solid"/>
+                      <a:round/>
+                      <a:headEnd type="none" w="med" len="med"/>
+                      <a:tailEnd type="none" w="med" len="med"/>
+                    </a:lnB>
+                    <a:solidFill>
+                      <a:schemeClr val="bg1"/>
+                    </a:solidFill>
+                  </a:tcPr>
+                </a:tc>
+                <a:tc>
+                  <a:txBody>
+                    <a:bodyPr/>
+                    <a:lstStyle/>
+                    <a:p>
+                      <a:pPr algn="ctr" indent="0" marL="0">
+                        <a:buNone/>
+                      </a:pPr>
+                      <a:r>
+                        <a:rPr lang="en-US" sz="1400" dirty="0">
+                          <a:solidFill>
+                            <a:schemeClr val="tx1"/>
+                          </a:solidFill>
+                          <a:latin typeface="Calibri" pitchFamily="34" charset="0"/>
+                          <a:ea typeface="Calibri" pitchFamily="34" charset="-122"/>
+                          <a:cs typeface="Calibri" pitchFamily="34" charset="-120"/>
+                        </a:rPr>
+                        <a:t>8,6%</a:t>
+                      </a:r>
+                      <a:endParaRPr lang="en-US" sz="1400" dirty="0">
+                        <a:latin typeface="Calibri" charset="0"/>
+                        <a:ea typeface="Calibri" charset="0"/>
+                        <a:cs typeface="Calibri" charset="0"/>
+                      </a:endParaRPr>
+                    </a:p>
+                  </a:txBody>
+                  <a:tcPr marL="91440" marR="91440" marT="45720" marB="45720" anchor="ctr">
+                    <a:lnL w="12700" cap="flat" cmpd="sng" algn="ctr">
+                      <a:solidFill>
+                        <a:srgbClr val="EEF3F8"/>
+                      </a:solidFill>
+                      <a:prstDash val="solid"/>
+                      <a:round/>
+                      <a:headEnd type="none" w="med" len="med"/>
+                      <a:tailEnd type="none" w="med" len="med"/>
+                    </a:lnL>
+                    <a:lnR w="12700" cap="flat" cmpd="sng" algn="ctr">
+                      <a:solidFill>
+                        <a:srgbClr val="EEF3F8"/>
+                      </a:solidFill>
+                      <a:prstDash val="solid"/>
+                      <a:round/>
+                      <a:headEnd type="none" w="med" len="med"/>
+                      <a:tailEnd type="none" w="med" len="med"/>
+                    </a:lnR>
+                    <a:lnT w="12700" cap="flat" cmpd="sng" algn="ctr">
+                      <a:solidFill>
+                        <a:srgbClr val="EEF3F8"/>
+                      </a:solidFill>
+                      <a:prstDash val="solid"/>
+                      <a:round/>
+                      <a:headEnd type="none" w="med" len="med"/>
+                      <a:tailEnd type="none" w="med" len="med"/>
+                    </a:lnT>
+                    <a:lnB w="12700" cap="flat" cmpd="sng" algn="ctr">
+                      <a:solidFill>
+                        <a:srgbClr val="EEF3F8"/>
+                      </a:solidFill>
+                      <a:prstDash val="solid"/>
+                      <a:round/>
+                      <a:headEnd type="none" w="med" len="med"/>
+                      <a:tailEnd type="none" w="med" len="med"/>
+                    </a:lnB>
+                    <a:solidFill>
+                      <a:schemeClr val="bg1"/>
+                    </a:solidFill>
+                  </a:tcPr>
+                </a:tc>
+              </a:tr>
+              <a:tr h="502920">
                 <a:tc>
                   <a:txBody>
                     <a:bodyPr/>
@@ -20635,7 +21411,7 @@
                           <a:ea typeface="Calibri" pitchFamily="34" charset="-122"/>
                           <a:cs typeface="Calibri" pitchFamily="34" charset="-120"/>
                         </a:rPr>
-                        <a:t>100,0</a:t>
+                        <a:t>99,9</a:t>
                       </a:r>
                       <a:endParaRPr lang="en-US" sz="1400" dirty="0">
                         <a:latin typeface="Calibri" charset="0"/>
@@ -20703,7 +21479,7 @@
                           <a:ea typeface="Calibri" pitchFamily="34" charset="-122"/>
                           <a:cs typeface="Calibri" pitchFamily="34" charset="-120"/>
                         </a:rPr>
-                        <a:t>100,00</a:t>
+                        <a:t>99,90</a:t>
                       </a:r>
                       <a:endParaRPr lang="en-US" sz="1400" dirty="0">
                         <a:latin typeface="Calibri" charset="0"/>
@@ -20839,7 +21615,7 @@
                           <a:ea typeface="Calibri" pitchFamily="34" charset="-122"/>
                           <a:cs typeface="Calibri" pitchFamily="34" charset="-120"/>
                         </a:rPr>
-                        <a:t>72,40</a:t>
+                        <a:t>71,14</a:t>
                       </a:r>
                       <a:endParaRPr lang="en-US" sz="1400" dirty="0">
                         <a:latin typeface="Calibri" charset="0"/>
@@ -20975,7 +21751,7 @@
                           <a:ea typeface="Calibri" pitchFamily="34" charset="-122"/>
                           <a:cs typeface="Calibri" pitchFamily="34" charset="-120"/>
                         </a:rPr>
-                        <a:t>44,80</a:t>
+                        <a:t>42,38</a:t>
                       </a:r>
                       <a:endParaRPr lang="en-US" sz="1400" dirty="0">
                         <a:latin typeface="Calibri" charset="0"/>
@@ -21107,8 +21883,8 @@
         </p:nvSpPr>
         <p:spPr>
           <a:xfrm>
-            <a:off x="548640" y="4572000"/>
-            <a:ext cx="11094415" cy="365760"/>
+            <a:off x="548640" y="4709160"/>
+            <a:ext cx="11094415" cy="320040"/>
           </a:xfrm>
           <a:prstGeom prst="rect">
             <a:avLst/>
@@ -21129,7 +21905,7 @@
                   <a:schemeClr val="tx2"/>
                 </a:solidFill>
               </a:rPr>
-              <a:t>Pesos exibidos com duas casas. Valores exatos: B = 32,3125, 26,40 e 13,6875 (soma 72,4); C = 12,925, 26,40 e 5,475 (soma 44,8).</a:t>
+              <a:t>Pesos exibidos com duas casas. Valores exatos de B: 38,875; 17,9; 5,3; 9,0625 (soma 71,1375).</a:t>
             </a:r>
             <a:endParaRPr lang="en-US" sz="1200" dirty="0"/>
           </a:p>
@@ -21143,12 +21919,12 @@
         </p:nvSpPr>
         <p:spPr>
           <a:xfrm>
-            <a:off x="548640" y="5029200"/>
-            <a:ext cx="11094415" cy="1188720"/>
+            <a:off x="548640" y="5166360"/>
+            <a:ext cx="11094415" cy="1097280"/>
           </a:xfrm>
           <a:prstGeom prst="roundRect">
             <a:avLst>
-              <a:gd name="adj" fmla="val 9231"/>
+              <a:gd name="adj" fmla="val 10000"/>
             </a:avLst>
           </a:prstGeom>
           <a:solidFill>
@@ -21170,8 +21946,8 @@
         </p:nvSpPr>
         <p:spPr>
           <a:xfrm>
-            <a:off x="822960" y="5029200"/>
-            <a:ext cx="10545775" cy="1188720"/>
+            <a:off x="822960" y="5166360"/>
+            <a:ext cx="10545775" cy="1097280"/>
           </a:xfrm>
           <a:prstGeom prst="rect">
             <a:avLst/>
@@ -21209,7 +21985,7 @@
                   <a:schemeClr val="tx1"/>
                 </a:solidFill>
               </a:rPr>
-              <a:t>51,7 × 0,625 = 32,3125; 32,3125 ÷ 72,4 = 0,4463, ou 44,6%.</a:t>
+              <a:t>62,2 × 0,625 = 38,875; 38,875 ÷ 71,1375 = 0,5465, ou 54,6%.</a:t>
             </a:r>
             <a:endParaRPr lang="en-US" sz="1600" dirty="0"/>
           </a:p>
@@ -21226,7 +22002,7 @@
                   <a:schemeClr val="tx1"/>
                 </a:solidFill>
               </a:rPr>
-              <a:t>Exemplo C, térmicas: </a:t>
+              <a:t>Exemplo C, solares: </a:t>
             </a:r>
             <a:pPr indent="0" marL="0">
               <a:spcAft>
@@ -21240,7 +22016,7 @@
                   <a:schemeClr val="tx1"/>
                 </a:solidFill>
               </a:rPr>
-              <a:t>21,9 × 0,25 = 5,475; 5,475 ÷ 44,8 = 0,1222, ou 12,2%.</a:t>
+              <a:t>5,3 × 1,00 = 5,3; 5,3 ÷ 42,375 = 0,1251, ou 12,5%.</a:t>
             </a:r>
             <a:endParaRPr lang="en-US" sz="1600" dirty="0"/>
           </a:p>
@@ -22238,7 +23014,7 @@
                 <a:gridCol w="1188720"/>
                 <a:gridCol w="1188720"/>
               </a:tblGrid>
-              <a:tr h="548640">
+              <a:tr h="502920">
                 <a:tc>
                   <a:txBody>
                     <a:bodyPr/>
@@ -22512,7 +23288,7 @@
                   </a:tcPr>
                 </a:tc>
               </a:tr>
-              <a:tr h="640080">
+              <a:tr h="502920">
                 <a:tc>
                   <a:txBody>
                     <a:bodyPr/>
@@ -22522,7 +23298,7 @@
                         <a:buNone/>
                       </a:pPr>
                       <a:r>
-                        <a:rPr lang="en-US" sz="1400" b="1" dirty="0">
+                        <a:rPr lang="en-US" sz="1300" b="1" dirty="0">
                           <a:solidFill>
                             <a:schemeClr val="tx1"/>
                           </a:solidFill>
@@ -22532,7 +23308,7 @@
                         </a:rPr>
                         <a:t>Hidrelétricas</a:t>
                       </a:r>
-                      <a:endParaRPr lang="en-US" sz="1400" dirty="0">
+                      <a:endParaRPr lang="en-US" sz="1300" dirty="0">
                         <a:latin typeface="Calibri" charset="0"/>
                         <a:ea typeface="Calibri" charset="0"/>
                         <a:cs typeface="Calibri" charset="0"/>
@@ -22598,7 +23374,7 @@
                           <a:ea typeface="Calibri" pitchFamily="34" charset="-122"/>
                           <a:cs typeface="Calibri" pitchFamily="34" charset="-120"/>
                         </a:rPr>
-                        <a:t>517</a:t>
+                        <a:t>623</a:t>
                       </a:r>
                       <a:endParaRPr lang="en-US" sz="1400" dirty="0">
                         <a:latin typeface="Calibri" charset="0"/>
@@ -22666,7 +23442,7 @@
                           <a:ea typeface="Calibri" pitchFamily="34" charset="-122"/>
                           <a:cs typeface="Calibri" pitchFamily="34" charset="-120"/>
                         </a:rPr>
-                        <a:t>446</a:t>
+                        <a:t>546</a:t>
                       </a:r>
                       <a:endParaRPr lang="en-US" sz="1400" dirty="0">
                         <a:latin typeface="Calibri" charset="0"/>
@@ -22734,7 +23510,7 @@
                           <a:ea typeface="Calibri" pitchFamily="34" charset="-122"/>
                           <a:cs typeface="Calibri" pitchFamily="34" charset="-120"/>
                         </a:rPr>
-                        <a:t>289</a:t>
+                        <a:t>367</a:t>
                       </a:r>
                       <a:endParaRPr lang="en-US" sz="1400" dirty="0">
                         <a:latin typeface="Calibri" charset="0"/>
@@ -22786,7 +23562,7 @@
                   </a:tcPr>
                 </a:tc>
               </a:tr>
-              <a:tr h="640080">
+              <a:tr h="502920">
                 <a:tc>
                   <a:txBody>
                     <a:bodyPr/>
@@ -22796,7 +23572,7 @@
                         <a:buNone/>
                       </a:pPr>
                       <a:r>
-                        <a:rPr lang="en-US" sz="1400" b="1" dirty="0">
+                        <a:rPr lang="en-US" sz="1300" b="1" dirty="0">
                           <a:solidFill>
                             <a:schemeClr val="tx1"/>
                           </a:solidFill>
@@ -22804,9 +23580,9 @@
                           <a:ea typeface="Calibri" pitchFamily="34" charset="-122"/>
                           <a:cs typeface="Calibri" pitchFamily="34" charset="-120"/>
                         </a:rPr>
-                        <a:t>Eólicas e solares</a:t>
+                        <a:t>Eólicas</a:t>
                       </a:r>
-                      <a:endParaRPr lang="en-US" sz="1400" dirty="0">
+                      <a:endParaRPr lang="en-US" sz="1300" dirty="0">
                         <a:latin typeface="Calibri" charset="0"/>
                         <a:ea typeface="Calibri" charset="0"/>
                         <a:cs typeface="Calibri" charset="0"/>
@@ -22872,7 +23648,7 @@
                           <a:ea typeface="Calibri" pitchFamily="34" charset="-122"/>
                           <a:cs typeface="Calibri" pitchFamily="34" charset="-120"/>
                         </a:rPr>
-                        <a:t>264</a:t>
+                        <a:t>179</a:t>
                       </a:r>
                       <a:endParaRPr lang="en-US" sz="1400" dirty="0">
                         <a:latin typeface="Calibri" charset="0"/>
@@ -22940,7 +23716,7 @@
                           <a:ea typeface="Calibri" pitchFamily="34" charset="-122"/>
                           <a:cs typeface="Calibri" pitchFamily="34" charset="-120"/>
                         </a:rPr>
-                        <a:t>365</a:t>
+                        <a:t>252</a:t>
                       </a:r>
                       <a:endParaRPr lang="en-US" sz="1400" dirty="0">
                         <a:latin typeface="Calibri" charset="0"/>
@@ -23008,7 +23784,7 @@
                           <a:ea typeface="Calibri" pitchFamily="34" charset="-122"/>
                           <a:cs typeface="Calibri" pitchFamily="34" charset="-120"/>
                         </a:rPr>
-                        <a:t>589</a:t>
+                        <a:t>422</a:t>
                       </a:r>
                       <a:endParaRPr lang="en-US" sz="1400" dirty="0">
                         <a:latin typeface="Calibri" charset="0"/>
@@ -23060,7 +23836,7 @@
                   </a:tcPr>
                 </a:tc>
               </a:tr>
-              <a:tr h="640080">
+              <a:tr h="502920">
                 <a:tc>
                   <a:txBody>
                     <a:bodyPr/>
@@ -23070,7 +23846,7 @@
                         <a:buNone/>
                       </a:pPr>
                       <a:r>
-                        <a:rPr lang="en-US" sz="1400" b="1" dirty="0">
+                        <a:rPr lang="en-US" sz="1300" b="1" dirty="0">
                           <a:solidFill>
                             <a:schemeClr val="tx1"/>
                           </a:solidFill>
@@ -23078,9 +23854,9 @@
                           <a:ea typeface="Calibri" pitchFamily="34" charset="-122"/>
                           <a:cs typeface="Calibri" pitchFamily="34" charset="-120"/>
                         </a:rPr>
-                        <a:t>Térmicas e demais</a:t>
+                        <a:t>Solares</a:t>
                       </a:r>
-                      <a:endParaRPr lang="en-US" sz="1400" dirty="0">
+                      <a:endParaRPr lang="en-US" sz="1300" dirty="0">
                         <a:latin typeface="Calibri" charset="0"/>
                         <a:ea typeface="Calibri" charset="0"/>
                         <a:cs typeface="Calibri" charset="0"/>
@@ -23146,7 +23922,7 @@
                           <a:ea typeface="Calibri" pitchFamily="34" charset="-122"/>
                           <a:cs typeface="Calibri" pitchFamily="34" charset="-120"/>
                         </a:rPr>
-                        <a:t>219</a:t>
+                        <a:t>53</a:t>
                       </a:r>
                       <a:endParaRPr lang="en-US" sz="1400" dirty="0">
                         <a:latin typeface="Calibri" charset="0"/>
@@ -23214,7 +23990,7 @@
                           <a:ea typeface="Calibri" pitchFamily="34" charset="-122"/>
                           <a:cs typeface="Calibri" pitchFamily="34" charset="-120"/>
                         </a:rPr>
-                        <a:t>189</a:t>
+                        <a:t>75</a:t>
                       </a:r>
                       <a:endParaRPr lang="en-US" sz="1400" dirty="0">
                         <a:latin typeface="Calibri" charset="0"/>
@@ -23282,7 +24058,7 @@
                           <a:ea typeface="Calibri" pitchFamily="34" charset="-122"/>
                           <a:cs typeface="Calibri" pitchFamily="34" charset="-120"/>
                         </a:rPr>
-                        <a:t>122</a:t>
+                        <a:t>125</a:t>
                       </a:r>
                       <a:endParaRPr lang="en-US" sz="1400" dirty="0">
                         <a:latin typeface="Calibri" charset="0"/>
@@ -23334,7 +24110,281 @@
                   </a:tcPr>
                 </a:tc>
               </a:tr>
-              <a:tr h="640080">
+              <a:tr h="502920">
+                <a:tc>
+                  <a:txBody>
+                    <a:bodyPr/>
+                    <a:lstStyle/>
+                    <a:p>
+                      <a:pPr algn="l" indent="0" marL="0">
+                        <a:buNone/>
+                      </a:pPr>
+                      <a:r>
+                        <a:rPr lang="en-US" sz="1300" b="1" dirty="0">
+                          <a:solidFill>
+                            <a:schemeClr val="tx1"/>
+                          </a:solidFill>
+                          <a:latin typeface="Calibri" pitchFamily="34" charset="0"/>
+                          <a:ea typeface="Calibri" pitchFamily="34" charset="-122"/>
+                          <a:cs typeface="Calibri" pitchFamily="34" charset="-120"/>
+                        </a:rPr>
+                        <a:t>Térmicas e biomassa</a:t>
+                      </a:r>
+                      <a:endParaRPr lang="en-US" sz="1300" dirty="0">
+                        <a:latin typeface="Calibri" charset="0"/>
+                        <a:ea typeface="Calibri" charset="0"/>
+                        <a:cs typeface="Calibri" charset="0"/>
+                      </a:endParaRPr>
+                    </a:p>
+                  </a:txBody>
+                  <a:tcPr marL="91440" marR="91440" marT="45720" marB="45720" anchor="ctr">
+                    <a:lnL w="12700" cap="flat" cmpd="sng" algn="ctr">
+                      <a:solidFill>
+                        <a:srgbClr val="EEF3F8"/>
+                      </a:solidFill>
+                      <a:prstDash val="solid"/>
+                      <a:round/>
+                      <a:headEnd type="none" w="med" len="med"/>
+                      <a:tailEnd type="none" w="med" len="med"/>
+                    </a:lnL>
+                    <a:lnR w="12700" cap="flat" cmpd="sng" algn="ctr">
+                      <a:solidFill>
+                        <a:srgbClr val="EEF3F8"/>
+                      </a:solidFill>
+                      <a:prstDash val="solid"/>
+                      <a:round/>
+                      <a:headEnd type="none" w="med" len="med"/>
+                      <a:tailEnd type="none" w="med" len="med"/>
+                    </a:lnR>
+                    <a:lnT w="12700" cap="flat" cmpd="sng" algn="ctr">
+                      <a:solidFill>
+                        <a:srgbClr val="EEF3F8"/>
+                      </a:solidFill>
+                      <a:prstDash val="solid"/>
+                      <a:round/>
+                      <a:headEnd type="none" w="med" len="med"/>
+                      <a:tailEnd type="none" w="med" len="med"/>
+                    </a:lnT>
+                    <a:lnB w="12700" cap="flat" cmpd="sng" algn="ctr">
+                      <a:solidFill>
+                        <a:srgbClr val="EEF3F8"/>
+                      </a:solidFill>
+                      <a:prstDash val="solid"/>
+                      <a:round/>
+                      <a:headEnd type="none" w="med" len="med"/>
+                      <a:tailEnd type="none" w="med" len="med"/>
+                    </a:lnB>
+                    <a:solidFill>
+                      <a:schemeClr val="bg1"/>
+                    </a:solidFill>
+                  </a:tcPr>
+                </a:tc>
+                <a:tc>
+                  <a:txBody>
+                    <a:bodyPr/>
+                    <a:lstStyle/>
+                    <a:p>
+                      <a:pPr algn="ctr" indent="0" marL="0">
+                        <a:buNone/>
+                      </a:pPr>
+                      <a:r>
+                        <a:rPr lang="en-US" sz="1400" dirty="0">
+                          <a:solidFill>
+                            <a:schemeClr val="tx1"/>
+                          </a:solidFill>
+                          <a:latin typeface="Calibri" pitchFamily="34" charset="0"/>
+                          <a:ea typeface="Calibri" pitchFamily="34" charset="-122"/>
+                          <a:cs typeface="Calibri" pitchFamily="34" charset="-120"/>
+                        </a:rPr>
+                        <a:t>145</a:t>
+                      </a:r>
+                      <a:endParaRPr lang="en-US" sz="1400" dirty="0">
+                        <a:latin typeface="Calibri" charset="0"/>
+                        <a:ea typeface="Calibri" charset="0"/>
+                        <a:cs typeface="Calibri" charset="0"/>
+                      </a:endParaRPr>
+                    </a:p>
+                  </a:txBody>
+                  <a:tcPr marL="91440" marR="91440" marT="45720" marB="45720" anchor="ctr">
+                    <a:lnL w="12700" cap="flat" cmpd="sng" algn="ctr">
+                      <a:solidFill>
+                        <a:srgbClr val="EEF3F8"/>
+                      </a:solidFill>
+                      <a:prstDash val="solid"/>
+                      <a:round/>
+                      <a:headEnd type="none" w="med" len="med"/>
+                      <a:tailEnd type="none" w="med" len="med"/>
+                    </a:lnL>
+                    <a:lnR w="12700" cap="flat" cmpd="sng" algn="ctr">
+                      <a:solidFill>
+                        <a:srgbClr val="EEF3F8"/>
+                      </a:solidFill>
+                      <a:prstDash val="solid"/>
+                      <a:round/>
+                      <a:headEnd type="none" w="med" len="med"/>
+                      <a:tailEnd type="none" w="med" len="med"/>
+                    </a:lnR>
+                    <a:lnT w="12700" cap="flat" cmpd="sng" algn="ctr">
+                      <a:solidFill>
+                        <a:srgbClr val="EEF3F8"/>
+                      </a:solidFill>
+                      <a:prstDash val="solid"/>
+                      <a:round/>
+                      <a:headEnd type="none" w="med" len="med"/>
+                      <a:tailEnd type="none" w="med" len="med"/>
+                    </a:lnT>
+                    <a:lnB w="12700" cap="flat" cmpd="sng" algn="ctr">
+                      <a:solidFill>
+                        <a:srgbClr val="EEF3F8"/>
+                      </a:solidFill>
+                      <a:prstDash val="solid"/>
+                      <a:round/>
+                      <a:headEnd type="none" w="med" len="med"/>
+                      <a:tailEnd type="none" w="med" len="med"/>
+                    </a:lnB>
+                    <a:solidFill>
+                      <a:schemeClr val="bg1"/>
+                    </a:solidFill>
+                  </a:tcPr>
+                </a:tc>
+                <a:tc>
+                  <a:txBody>
+                    <a:bodyPr/>
+                    <a:lstStyle/>
+                    <a:p>
+                      <a:pPr algn="ctr" indent="0" marL="0">
+                        <a:buNone/>
+                      </a:pPr>
+                      <a:r>
+                        <a:rPr lang="en-US" sz="1400" dirty="0">
+                          <a:solidFill>
+                            <a:schemeClr val="tx1"/>
+                          </a:solidFill>
+                          <a:latin typeface="Calibri" pitchFamily="34" charset="0"/>
+                          <a:ea typeface="Calibri" pitchFamily="34" charset="-122"/>
+                          <a:cs typeface="Calibri" pitchFamily="34" charset="-120"/>
+                        </a:rPr>
+                        <a:t>127</a:t>
+                      </a:r>
+                      <a:endParaRPr lang="en-US" sz="1400" dirty="0">
+                        <a:latin typeface="Calibri" charset="0"/>
+                        <a:ea typeface="Calibri" charset="0"/>
+                        <a:cs typeface="Calibri" charset="0"/>
+                      </a:endParaRPr>
+                    </a:p>
+                  </a:txBody>
+                  <a:tcPr marL="91440" marR="91440" marT="45720" marB="45720" anchor="ctr">
+                    <a:lnL w="12700" cap="flat" cmpd="sng" algn="ctr">
+                      <a:solidFill>
+                        <a:srgbClr val="EEF3F8"/>
+                      </a:solidFill>
+                      <a:prstDash val="solid"/>
+                      <a:round/>
+                      <a:headEnd type="none" w="med" len="med"/>
+                      <a:tailEnd type="none" w="med" len="med"/>
+                    </a:lnL>
+                    <a:lnR w="12700" cap="flat" cmpd="sng" algn="ctr">
+                      <a:solidFill>
+                        <a:srgbClr val="EEF3F8"/>
+                      </a:solidFill>
+                      <a:prstDash val="solid"/>
+                      <a:round/>
+                      <a:headEnd type="none" w="med" len="med"/>
+                      <a:tailEnd type="none" w="med" len="med"/>
+                    </a:lnR>
+                    <a:lnT w="12700" cap="flat" cmpd="sng" algn="ctr">
+                      <a:solidFill>
+                        <a:srgbClr val="EEF3F8"/>
+                      </a:solidFill>
+                      <a:prstDash val="solid"/>
+                      <a:round/>
+                      <a:headEnd type="none" w="med" len="med"/>
+                      <a:tailEnd type="none" w="med" len="med"/>
+                    </a:lnT>
+                    <a:lnB w="12700" cap="flat" cmpd="sng" algn="ctr">
+                      <a:solidFill>
+                        <a:srgbClr val="EEF3F8"/>
+                      </a:solidFill>
+                      <a:prstDash val="solid"/>
+                      <a:round/>
+                      <a:headEnd type="none" w="med" len="med"/>
+                      <a:tailEnd type="none" w="med" len="med"/>
+                    </a:lnB>
+                    <a:solidFill>
+                      <a:schemeClr val="bg1"/>
+                    </a:solidFill>
+                  </a:tcPr>
+                </a:tc>
+                <a:tc>
+                  <a:txBody>
+                    <a:bodyPr/>
+                    <a:lstStyle/>
+                    <a:p>
+                      <a:pPr algn="ctr" indent="0" marL="0">
+                        <a:buNone/>
+                      </a:pPr>
+                      <a:r>
+                        <a:rPr lang="en-US" sz="1400" dirty="0">
+                          <a:solidFill>
+                            <a:schemeClr val="tx1"/>
+                          </a:solidFill>
+                          <a:latin typeface="Calibri" pitchFamily="34" charset="0"/>
+                          <a:ea typeface="Calibri" pitchFamily="34" charset="-122"/>
+                          <a:cs typeface="Calibri" pitchFamily="34" charset="-120"/>
+                        </a:rPr>
+                        <a:t>86</a:t>
+                      </a:r>
+                      <a:endParaRPr lang="en-US" sz="1400" dirty="0">
+                        <a:latin typeface="Calibri" charset="0"/>
+                        <a:ea typeface="Calibri" charset="0"/>
+                        <a:cs typeface="Calibri" charset="0"/>
+                      </a:endParaRPr>
+                    </a:p>
+                  </a:txBody>
+                  <a:tcPr marL="91440" marR="91440" marT="45720" marB="45720" anchor="ctr">
+                    <a:lnL w="12700" cap="flat" cmpd="sng" algn="ctr">
+                      <a:solidFill>
+                        <a:srgbClr val="EEF3F8"/>
+                      </a:solidFill>
+                      <a:prstDash val="solid"/>
+                      <a:round/>
+                      <a:headEnd type="none" w="med" len="med"/>
+                      <a:tailEnd type="none" w="med" len="med"/>
+                    </a:lnL>
+                    <a:lnR w="12700" cap="flat" cmpd="sng" algn="ctr">
+                      <a:solidFill>
+                        <a:srgbClr val="EEF3F8"/>
+                      </a:solidFill>
+                      <a:prstDash val="solid"/>
+                      <a:round/>
+                      <a:headEnd type="none" w="med" len="med"/>
+                      <a:tailEnd type="none" w="med" len="med"/>
+                    </a:lnR>
+                    <a:lnT w="12700" cap="flat" cmpd="sng" algn="ctr">
+                      <a:solidFill>
+                        <a:srgbClr val="EEF3F8"/>
+                      </a:solidFill>
+                      <a:prstDash val="solid"/>
+                      <a:round/>
+                      <a:headEnd type="none" w="med" len="med"/>
+                      <a:tailEnd type="none" w="med" len="med"/>
+                    </a:lnT>
+                    <a:lnB w="12700" cap="flat" cmpd="sng" algn="ctr">
+                      <a:solidFill>
+                        <a:srgbClr val="EEF3F8"/>
+                      </a:solidFill>
+                      <a:prstDash val="solid"/>
+                      <a:round/>
+                      <a:headEnd type="none" w="med" len="med"/>
+                      <a:tailEnd type="none" w="med" len="med"/>
+                    </a:lnB>
+                    <a:solidFill>
+                      <a:schemeClr val="bg1"/>
+                    </a:solidFill>
+                  </a:tcPr>
+                </a:tc>
+              </a:tr>
+              <a:tr h="502920">
                 <a:tc>
                   <a:txBody>
                     <a:bodyPr/>
@@ -23620,7 +24670,7 @@
         </p:nvSpPr>
         <p:spPr>
           <a:xfrm>
-            <a:off x="548640" y="5029200"/>
+            <a:off x="548640" y="5120640"/>
             <a:ext cx="5669280" cy="1188720"/>
           </a:xfrm>
           <a:prstGeom prst="rect">
@@ -23642,7 +24692,7 @@
                   <a:schemeClr val="tx2"/>
                 </a:solidFill>
               </a:rPr>
-              <a:t>Conversão: parcela (%) × 10. Exemplo: eólicas e solares no cenário B, 36,5% de R$ 1 bi = R$ 365 mi. O encargo total depende do deságio do leilão e ainda não é conhecido.</a:t>
+              <a:t>Conversão: parcela (%) × 10. Exemplo: eólicas no cenário B, 25,2% de R$ 1 bi = R$ 252 mi. O encargo total depende do deságio do leilão e ainda não é conhecido.</a:t>
             </a:r>
             <a:endParaRPr lang="en-US" sz="1400" dirty="0"/>
           </a:p>
@@ -23840,7 +24890,7 @@
                   <a:schemeClr val="tx1"/>
                 </a:solidFill>
               </a:rPr>
-              <a:t>Térmicas e demais é um resíduo e pode incluir MMGD, que fica fora do rateio.</a:t>
+              <a:t>A base da proposta é a energia associada de cada agente, e não a participação anual na geração.</a:t>
             </a:r>
             <a:endParaRPr lang="en-US" sz="1400" dirty="0"/>
           </a:p>
@@ -23858,7 +24908,7 @@
                   <a:schemeClr val="tx1"/>
                 </a:solidFill>
               </a:rPr>
-              <a:t>A base da proposta é a energia associada de cada agente, e não a participação anual na geração.</a:t>
+              <a:t>Os patamares vêm de resumos setoriais, e a proposta ainda está em consulta.</a:t>
             </a:r>
             <a:endParaRPr lang="en-US" sz="1400" dirty="0"/>
           </a:p>
@@ -23876,7 +24926,7 @@
                   <a:schemeClr val="tx1"/>
                 </a:solidFill>
               </a:rPr>
-              <a:t>Os patamares vêm de resumos setoriais, e a proposta ainda está em consulta.</a:t>
+              <a:t>A parcela de cada fonte muda com a geração adicional, pois quem gera mais paga mais.</a:t>
             </a:r>
             <a:endParaRPr lang="en-US" sz="1400" dirty="0"/>
           </a:p>
@@ -24335,7 +25385,7 @@
                   </a:tcPr>
                 </a:tc>
               </a:tr>
-              <a:tr h="731520">
+              <a:tr h="594360">
                 <a:tc>
                   <a:txBody>
                     <a:bodyPr/>
@@ -24345,7 +25395,7 @@
                         <a:buNone/>
                       </a:pPr>
                       <a:r>
-                        <a:rPr lang="en-US" sz="1400" b="1" dirty="0">
+                        <a:rPr lang="en-US" sz="1300" b="1" dirty="0">
                           <a:solidFill>
                             <a:schemeClr val="tx1"/>
                           </a:solidFill>
@@ -24355,7 +25405,7 @@
                         </a:rPr>
                         <a:t>Hidrelétricas</a:t>
                       </a:r>
-                      <a:endParaRPr lang="en-US" sz="1400" dirty="0">
+                      <a:endParaRPr lang="en-US" sz="1300" dirty="0">
                         <a:latin typeface="Calibri" charset="0"/>
                         <a:ea typeface="Calibri" charset="0"/>
                         <a:cs typeface="Calibri" charset="0"/>
@@ -24421,7 +25471,7 @@
                           <a:ea typeface="Calibri" pitchFamily="34" charset="-122"/>
                           <a:cs typeface="Calibri" pitchFamily="34" charset="-120"/>
                         </a:rPr>
-                        <a:t>51,7%</a:t>
+                        <a:t>62,3%</a:t>
                       </a:r>
                       <a:endParaRPr lang="en-US" sz="1400" dirty="0">
                         <a:latin typeface="Calibri" charset="0"/>
@@ -24489,7 +25539,7 @@
                           <a:ea typeface="Calibri" pitchFamily="34" charset="-122"/>
                           <a:cs typeface="Calibri" pitchFamily="34" charset="-120"/>
                         </a:rPr>
-                        <a:t>44,6%</a:t>
+                        <a:t>54,6%</a:t>
                       </a:r>
                       <a:endParaRPr lang="en-US" sz="1400" dirty="0">
                         <a:latin typeface="Calibri" charset="0"/>
@@ -24557,7 +25607,7 @@
                           <a:ea typeface="Calibri" pitchFamily="34" charset="-122"/>
                           <a:cs typeface="Calibri" pitchFamily="34" charset="-120"/>
                         </a:rPr>
-                        <a:t>28,9%</a:t>
+                        <a:t>36,7%</a:t>
                       </a:r>
                       <a:endParaRPr lang="en-US" sz="1400" dirty="0">
                         <a:latin typeface="Calibri" charset="0"/>
@@ -24609,7 +25659,7 @@
                   </a:tcPr>
                 </a:tc>
               </a:tr>
-              <a:tr h="731520">
+              <a:tr h="594360">
                 <a:tc>
                   <a:txBody>
                     <a:bodyPr/>
@@ -24619,7 +25669,7 @@
                         <a:buNone/>
                       </a:pPr>
                       <a:r>
-                        <a:rPr lang="en-US" sz="1400" b="1" dirty="0">
+                        <a:rPr lang="en-US" sz="1300" b="1" dirty="0">
                           <a:solidFill>
                             <a:schemeClr val="tx1"/>
                           </a:solidFill>
@@ -24627,9 +25677,9 @@
                           <a:ea typeface="Calibri" pitchFamily="34" charset="-122"/>
                           <a:cs typeface="Calibri" pitchFamily="34" charset="-120"/>
                         </a:rPr>
-                        <a:t>Eólicas e solares</a:t>
+                        <a:t>Eólicas</a:t>
                       </a:r>
-                      <a:endParaRPr lang="en-US" sz="1400" dirty="0">
+                      <a:endParaRPr lang="en-US" sz="1300" dirty="0">
                         <a:latin typeface="Calibri" charset="0"/>
                         <a:ea typeface="Calibri" charset="0"/>
                         <a:cs typeface="Calibri" charset="0"/>
@@ -24695,7 +25745,7 @@
                           <a:ea typeface="Calibri" pitchFamily="34" charset="-122"/>
                           <a:cs typeface="Calibri" pitchFamily="34" charset="-120"/>
                         </a:rPr>
-                        <a:t>26,4%</a:t>
+                        <a:t>17,9%</a:t>
                       </a:r>
                       <a:endParaRPr lang="en-US" sz="1400" dirty="0">
                         <a:latin typeface="Calibri" charset="0"/>
@@ -24763,7 +25813,7 @@
                           <a:ea typeface="Calibri" pitchFamily="34" charset="-122"/>
                           <a:cs typeface="Calibri" pitchFamily="34" charset="-120"/>
                         </a:rPr>
-                        <a:t>36,5%</a:t>
+                        <a:t>25,2%</a:t>
                       </a:r>
                       <a:endParaRPr lang="en-US" sz="1400" dirty="0">
                         <a:latin typeface="Calibri" charset="0"/>
@@ -24831,7 +25881,7 @@
                           <a:ea typeface="Calibri" pitchFamily="34" charset="-122"/>
                           <a:cs typeface="Calibri" pitchFamily="34" charset="-120"/>
                         </a:rPr>
-                        <a:t>58,9%</a:t>
+                        <a:t>42,2%</a:t>
                       </a:r>
                       <a:endParaRPr lang="en-US" sz="1400" dirty="0">
                         <a:latin typeface="Calibri" charset="0"/>
@@ -24883,7 +25933,7 @@
                   </a:tcPr>
                 </a:tc>
               </a:tr>
-              <a:tr h="731520">
+              <a:tr h="594360">
                 <a:tc>
                   <a:txBody>
                     <a:bodyPr/>
@@ -24901,7 +25951,7 @@
                           <a:ea typeface="Calibri" pitchFamily="34" charset="-122"/>
                           <a:cs typeface="Calibri" pitchFamily="34" charset="-120"/>
                         </a:rPr>
-                        <a:t>Térmicas e demais</a:t>
+                        <a:t>Solares</a:t>
                       </a:r>
                       <a:endParaRPr lang="en-US" sz="1300" dirty="0">
                         <a:latin typeface="Calibri" charset="0"/>
@@ -24969,7 +26019,7 @@
                           <a:ea typeface="Calibri" pitchFamily="34" charset="-122"/>
                           <a:cs typeface="Calibri" pitchFamily="34" charset="-120"/>
                         </a:rPr>
-                        <a:t>21,9%</a:t>
+                        <a:t>5,3%</a:t>
                       </a:r>
                       <a:endParaRPr lang="en-US" sz="1400" dirty="0">
                         <a:latin typeface="Calibri" charset="0"/>
@@ -25037,7 +26087,7 @@
                           <a:ea typeface="Calibri" pitchFamily="34" charset="-122"/>
                           <a:cs typeface="Calibri" pitchFamily="34" charset="-120"/>
                         </a:rPr>
-                        <a:t>18,9%</a:t>
+                        <a:t>7,5%</a:t>
                       </a:r>
                       <a:endParaRPr lang="en-US" sz="1400" dirty="0">
                         <a:latin typeface="Calibri" charset="0"/>
@@ -25105,7 +26155,281 @@
                           <a:ea typeface="Calibri" pitchFamily="34" charset="-122"/>
                           <a:cs typeface="Calibri" pitchFamily="34" charset="-120"/>
                         </a:rPr>
-                        <a:t>12,2%</a:t>
+                        <a:t>12,5%</a:t>
+                      </a:r>
+                      <a:endParaRPr lang="en-US" sz="1400" dirty="0">
+                        <a:latin typeface="Calibri" charset="0"/>
+                        <a:ea typeface="Calibri" charset="0"/>
+                        <a:cs typeface="Calibri" charset="0"/>
+                      </a:endParaRPr>
+                    </a:p>
+                  </a:txBody>
+                  <a:tcPr marL="91440" marR="91440" marT="45720" marB="45720" anchor="ctr">
+                    <a:lnL w="12700" cap="flat" cmpd="sng" algn="ctr">
+                      <a:solidFill>
+                        <a:srgbClr val="EEF3F8"/>
+                      </a:solidFill>
+                      <a:prstDash val="solid"/>
+                      <a:round/>
+                      <a:headEnd type="none" w="med" len="med"/>
+                      <a:tailEnd type="none" w="med" len="med"/>
+                    </a:lnL>
+                    <a:lnR w="12700" cap="flat" cmpd="sng" algn="ctr">
+                      <a:solidFill>
+                        <a:srgbClr val="EEF3F8"/>
+                      </a:solidFill>
+                      <a:prstDash val="solid"/>
+                      <a:round/>
+                      <a:headEnd type="none" w="med" len="med"/>
+                      <a:tailEnd type="none" w="med" len="med"/>
+                    </a:lnR>
+                    <a:lnT w="12700" cap="flat" cmpd="sng" algn="ctr">
+                      <a:solidFill>
+                        <a:srgbClr val="EEF3F8"/>
+                      </a:solidFill>
+                      <a:prstDash val="solid"/>
+                      <a:round/>
+                      <a:headEnd type="none" w="med" len="med"/>
+                      <a:tailEnd type="none" w="med" len="med"/>
+                    </a:lnT>
+                    <a:lnB w="12700" cap="flat" cmpd="sng" algn="ctr">
+                      <a:solidFill>
+                        <a:srgbClr val="EEF3F8"/>
+                      </a:solidFill>
+                      <a:prstDash val="solid"/>
+                      <a:round/>
+                      <a:headEnd type="none" w="med" len="med"/>
+                      <a:tailEnd type="none" w="med" len="med"/>
+                    </a:lnB>
+                    <a:solidFill>
+                      <a:schemeClr val="bg1"/>
+                    </a:solidFill>
+                  </a:tcPr>
+                </a:tc>
+              </a:tr>
+              <a:tr h="594360">
+                <a:tc>
+                  <a:txBody>
+                    <a:bodyPr/>
+                    <a:lstStyle/>
+                    <a:p>
+                      <a:pPr indent="0" marL="0">
+                        <a:buNone/>
+                      </a:pPr>
+                      <a:r>
+                        <a:rPr lang="en-US" sz="1300" b="1" dirty="0">
+                          <a:solidFill>
+                            <a:schemeClr val="tx1"/>
+                          </a:solidFill>
+                          <a:latin typeface="Calibri" pitchFamily="34" charset="0"/>
+                          <a:ea typeface="Calibri" pitchFamily="34" charset="-122"/>
+                          <a:cs typeface="Calibri" pitchFamily="34" charset="-120"/>
+                        </a:rPr>
+                        <a:t>Térmicas e biomassa</a:t>
+                      </a:r>
+                      <a:endParaRPr lang="en-US" sz="1300" dirty="0">
+                        <a:latin typeface="Calibri" charset="0"/>
+                        <a:ea typeface="Calibri" charset="0"/>
+                        <a:cs typeface="Calibri" charset="0"/>
+                      </a:endParaRPr>
+                    </a:p>
+                  </a:txBody>
+                  <a:tcPr marL="91440" marR="91440" marT="45720" marB="45720" anchor="ctr">
+                    <a:lnL w="12700" cap="flat" cmpd="sng" algn="ctr">
+                      <a:solidFill>
+                        <a:srgbClr val="EEF3F8"/>
+                      </a:solidFill>
+                      <a:prstDash val="solid"/>
+                      <a:round/>
+                      <a:headEnd type="none" w="med" len="med"/>
+                      <a:tailEnd type="none" w="med" len="med"/>
+                    </a:lnL>
+                    <a:lnR w="12700" cap="flat" cmpd="sng" algn="ctr">
+                      <a:solidFill>
+                        <a:srgbClr val="EEF3F8"/>
+                      </a:solidFill>
+                      <a:prstDash val="solid"/>
+                      <a:round/>
+                      <a:headEnd type="none" w="med" len="med"/>
+                      <a:tailEnd type="none" w="med" len="med"/>
+                    </a:lnR>
+                    <a:lnT w="12700" cap="flat" cmpd="sng" algn="ctr">
+                      <a:solidFill>
+                        <a:srgbClr val="EEF3F8"/>
+                      </a:solidFill>
+                      <a:prstDash val="solid"/>
+                      <a:round/>
+                      <a:headEnd type="none" w="med" len="med"/>
+                      <a:tailEnd type="none" w="med" len="med"/>
+                    </a:lnT>
+                    <a:lnB w="12700" cap="flat" cmpd="sng" algn="ctr">
+                      <a:solidFill>
+                        <a:srgbClr val="EEF3F8"/>
+                      </a:solidFill>
+                      <a:prstDash val="solid"/>
+                      <a:round/>
+                      <a:headEnd type="none" w="med" len="med"/>
+                      <a:tailEnd type="none" w="med" len="med"/>
+                    </a:lnB>
+                    <a:solidFill>
+                      <a:schemeClr val="bg1"/>
+                    </a:solidFill>
+                  </a:tcPr>
+                </a:tc>
+                <a:tc>
+                  <a:txBody>
+                    <a:bodyPr/>
+                    <a:lstStyle/>
+                    <a:p>
+                      <a:pPr indent="0" marL="0">
+                        <a:buNone/>
+                      </a:pPr>
+                      <a:r>
+                        <a:rPr lang="en-US" sz="1400" dirty="0">
+                          <a:solidFill>
+                            <a:schemeClr val="tx1"/>
+                          </a:solidFill>
+                          <a:latin typeface="Calibri" pitchFamily="34" charset="0"/>
+                          <a:ea typeface="Calibri" pitchFamily="34" charset="-122"/>
+                          <a:cs typeface="Calibri" pitchFamily="34" charset="-120"/>
+                        </a:rPr>
+                        <a:t>14,5%</a:t>
+                      </a:r>
+                      <a:endParaRPr lang="en-US" sz="1400" dirty="0">
+                        <a:latin typeface="Calibri" charset="0"/>
+                        <a:ea typeface="Calibri" charset="0"/>
+                        <a:cs typeface="Calibri" charset="0"/>
+                      </a:endParaRPr>
+                    </a:p>
+                  </a:txBody>
+                  <a:tcPr marL="91440" marR="91440" marT="45720" marB="45720" anchor="ctr">
+                    <a:lnL w="12700" cap="flat" cmpd="sng" algn="ctr">
+                      <a:solidFill>
+                        <a:srgbClr val="EEF3F8"/>
+                      </a:solidFill>
+                      <a:prstDash val="solid"/>
+                      <a:round/>
+                      <a:headEnd type="none" w="med" len="med"/>
+                      <a:tailEnd type="none" w="med" len="med"/>
+                    </a:lnL>
+                    <a:lnR w="12700" cap="flat" cmpd="sng" algn="ctr">
+                      <a:solidFill>
+                        <a:srgbClr val="EEF3F8"/>
+                      </a:solidFill>
+                      <a:prstDash val="solid"/>
+                      <a:round/>
+                      <a:headEnd type="none" w="med" len="med"/>
+                      <a:tailEnd type="none" w="med" len="med"/>
+                    </a:lnR>
+                    <a:lnT w="12700" cap="flat" cmpd="sng" algn="ctr">
+                      <a:solidFill>
+                        <a:srgbClr val="EEF3F8"/>
+                      </a:solidFill>
+                      <a:prstDash val="solid"/>
+                      <a:round/>
+                      <a:headEnd type="none" w="med" len="med"/>
+                      <a:tailEnd type="none" w="med" len="med"/>
+                    </a:lnT>
+                    <a:lnB w="12700" cap="flat" cmpd="sng" algn="ctr">
+                      <a:solidFill>
+                        <a:srgbClr val="EEF3F8"/>
+                      </a:solidFill>
+                      <a:prstDash val="solid"/>
+                      <a:round/>
+                      <a:headEnd type="none" w="med" len="med"/>
+                      <a:tailEnd type="none" w="med" len="med"/>
+                    </a:lnB>
+                    <a:solidFill>
+                      <a:schemeClr val="bg1"/>
+                    </a:solidFill>
+                  </a:tcPr>
+                </a:tc>
+                <a:tc>
+                  <a:txBody>
+                    <a:bodyPr/>
+                    <a:lstStyle/>
+                    <a:p>
+                      <a:pPr indent="0" marL="0">
+                        <a:buNone/>
+                      </a:pPr>
+                      <a:r>
+                        <a:rPr lang="en-US" sz="1400" dirty="0">
+                          <a:solidFill>
+                            <a:schemeClr val="tx1"/>
+                          </a:solidFill>
+                          <a:latin typeface="Calibri" pitchFamily="34" charset="0"/>
+                          <a:ea typeface="Calibri" pitchFamily="34" charset="-122"/>
+                          <a:cs typeface="Calibri" pitchFamily="34" charset="-120"/>
+                        </a:rPr>
+                        <a:t>12,7%</a:t>
+                      </a:r>
+                      <a:endParaRPr lang="en-US" sz="1400" dirty="0">
+                        <a:latin typeface="Calibri" charset="0"/>
+                        <a:ea typeface="Calibri" charset="0"/>
+                        <a:cs typeface="Calibri" charset="0"/>
+                      </a:endParaRPr>
+                    </a:p>
+                  </a:txBody>
+                  <a:tcPr marL="91440" marR="91440" marT="45720" marB="45720" anchor="ctr">
+                    <a:lnL w="12700" cap="flat" cmpd="sng" algn="ctr">
+                      <a:solidFill>
+                        <a:srgbClr val="EEF3F8"/>
+                      </a:solidFill>
+                      <a:prstDash val="solid"/>
+                      <a:round/>
+                      <a:headEnd type="none" w="med" len="med"/>
+                      <a:tailEnd type="none" w="med" len="med"/>
+                    </a:lnL>
+                    <a:lnR w="12700" cap="flat" cmpd="sng" algn="ctr">
+                      <a:solidFill>
+                        <a:srgbClr val="EEF3F8"/>
+                      </a:solidFill>
+                      <a:prstDash val="solid"/>
+                      <a:round/>
+                      <a:headEnd type="none" w="med" len="med"/>
+                      <a:tailEnd type="none" w="med" len="med"/>
+                    </a:lnR>
+                    <a:lnT w="12700" cap="flat" cmpd="sng" algn="ctr">
+                      <a:solidFill>
+                        <a:srgbClr val="EEF3F8"/>
+                      </a:solidFill>
+                      <a:prstDash val="solid"/>
+                      <a:round/>
+                      <a:headEnd type="none" w="med" len="med"/>
+                      <a:tailEnd type="none" w="med" len="med"/>
+                    </a:lnT>
+                    <a:lnB w="12700" cap="flat" cmpd="sng" algn="ctr">
+                      <a:solidFill>
+                        <a:srgbClr val="EEF3F8"/>
+                      </a:solidFill>
+                      <a:prstDash val="solid"/>
+                      <a:round/>
+                      <a:headEnd type="none" w="med" len="med"/>
+                      <a:tailEnd type="none" w="med" len="med"/>
+                    </a:lnB>
+                    <a:solidFill>
+                      <a:schemeClr val="bg1"/>
+                    </a:solidFill>
+                  </a:tcPr>
+                </a:tc>
+                <a:tc>
+                  <a:txBody>
+                    <a:bodyPr/>
+                    <a:lstStyle/>
+                    <a:p>
+                      <a:pPr indent="0" marL="0">
+                        <a:buNone/>
+                      </a:pPr>
+                      <a:r>
+                        <a:rPr lang="en-US" sz="1400" dirty="0">
+                          <a:solidFill>
+                            <a:schemeClr val="tx1"/>
+                          </a:solidFill>
+                          <a:latin typeface="Calibri" pitchFamily="34" charset="0"/>
+                          <a:ea typeface="Calibri" pitchFamily="34" charset="-122"/>
+                          <a:cs typeface="Calibri" pitchFamily="34" charset="-120"/>
+                        </a:rPr>
+                        <a:t>8,6%</a:t>
                       </a:r>
                       <a:endParaRPr lang="en-US" sz="1400" dirty="0">
                         <a:latin typeface="Calibri" charset="0"/>
@@ -25169,8 +26493,8 @@
         </p:nvSpPr>
         <p:spPr>
           <a:xfrm>
-            <a:off x="6903720" y="4389120"/>
-            <a:ext cx="4739335" cy="1097280"/>
+            <a:off x="6903720" y="4526280"/>
+            <a:ext cx="4739335" cy="1005840"/>
           </a:xfrm>
           <a:prstGeom prst="rect">
             <a:avLst/>
@@ -25191,7 +26515,7 @@
                   <a:schemeClr val="tx2"/>
                 </a:solidFill>
               </a:rPr>
-              <a:t>Eólicas e solares fixas em P1 (100%). Hidrelétricas e térmicas usam o mesmo coeficiente k: 100% (tudo P1), 62,5% (média dos quatro patamares) e 25% (tudo P4). Para cada R$ 1 bi de receita fixa, 1% equivale a R$ 10 mi.</a:t>
+              <a:t>Eólicas e solares fixas em P1 (100%). Hidrelétricas e térmicas usam o mesmo k: 100% (tudo P1), 62,5% (média dos quatro patamares) e 25% (tudo P4). Para cada R$ 1 bi de receita fixa, 1% equivale a R$ 10 mi.</a:t>
             </a:r>
             <a:endParaRPr lang="en-US" sz="1200" dirty="0"/>
           </a:p>
@@ -25265,7 +26589,7 @@
                   <a:schemeClr val="bg1"/>
                 </a:solidFill>
               </a:rPr>
-              <a:t>A ANEEL ainda define a fórmula e os critérios de cada patamar. Os cenários mostram o intervalo possível, com a geração de 2025 (EPE) como base.</a:t>
+              <a:t>A ANEEL ainda define a fórmula e os critérios de cada patamar. Os cenários mostram o intervalo possível, com a geração centralizada de 2025 como base.</a:t>
             </a:r>
             <a:endParaRPr lang="en-US" sz="1400" dirty="0"/>
           </a:p>
@@ -25301,7 +26625,7 @@
                   <a:schemeClr val="tx2"/>
                 </a:solidFill>
               </a:rPr>
-              <a:t>Cálculo próprio com a geração de 2025 do Anuário Estatístico de Energia Elétrica 2025 (EPE): hidráulica 51,7%, eólica e solar 26,4% e demais 21,9% (resíduo).</a:t>
+              <a:t>Cálculo próprio com a geração centralizada de 2025 (CCEE/EPE, Balanço de consumo e geração 2025): hidráulica 62,2%, eólica 17,9%, solar 5,3%, térmica 10,0% e biomassa 4,5%.</a:t>
             </a:r>
             <a:endParaRPr lang="en-US" sz="1000" dirty="0"/>
           </a:p>
@@ -26125,7 +27449,7 @@
                   <a:schemeClr val="tx1"/>
                 </a:solidFill>
               </a:rPr>
-              <a:t>Comparativo por fonte: encargo × benefício</a:t>
+              <a:t>Comparativo por fonte: ganho × encargo</a:t>
             </a:r>
             <a:endParaRPr lang="en-US" sz="3200" dirty="0"/>
           </a:p>
@@ -26245,7 +27569,7 @@
                           <a:ea typeface="Calibri" pitchFamily="34" charset="-122"/>
                           <a:cs typeface="Calibri" pitchFamily="34" charset="-120"/>
                         </a:rPr>
-                        <a:t>Encargo (proposta em consulta)</a:t>
+                        <a:t>Ganho com baterias</a:t>
                       </a:r>
                       <a:endParaRPr lang="en-US" sz="1400" dirty="0">
                         <a:latin typeface="Calibri" charset="0"/>
@@ -26313,7 +27637,7 @@
                           <a:ea typeface="Calibri" pitchFamily="34" charset="-122"/>
                           <a:cs typeface="Calibri" pitchFamily="34" charset="-120"/>
                         </a:rPr>
-                        <a:t>Benefício esperado com baterias</a:t>
+                        <a:t>Encargo (proposta em consulta)</a:t>
                       </a:r>
                       <a:endParaRPr lang="en-US" sz="1400" dirty="0">
                         <a:latin typeface="Calibri" charset="0"/>
@@ -26381,7 +27705,7 @@
                           <a:ea typeface="Calibri" pitchFamily="34" charset="-122"/>
                           <a:cs typeface="Calibri" pitchFamily="34" charset="-120"/>
                         </a:rPr>
-                        <a:t>Saldo (hipótese a testar)</a:t>
+                        <a:t>Hipótese a testar</a:t>
                       </a:r>
                       <a:endParaRPr lang="en-US" sz="1400" dirty="0">
                         <a:latin typeface="Calibri" charset="0"/>
@@ -26451,7 +27775,75 @@
                           <a:ea typeface="Calibri" pitchFamily="34" charset="-122"/>
                           <a:cs typeface="Calibri" pitchFamily="34" charset="-120"/>
                         </a:rPr>
-                        <a:t>Eólicas e UFVs</a:t>
+                        <a:t>Eólicas</a:t>
+                      </a:r>
+                      <a:endParaRPr lang="en-US" sz="1400" dirty="0">
+                        <a:latin typeface="Calibri" charset="0"/>
+                        <a:ea typeface="Calibri" charset="0"/>
+                        <a:cs typeface="Calibri" charset="0"/>
+                      </a:endParaRPr>
+                    </a:p>
+                  </a:txBody>
+                  <a:tcPr marL="137160" marR="137160" marT="45720" marB="45720" anchor="ctr">
+                    <a:lnL w="12700" cap="flat" cmpd="sng" algn="ctr">
+                      <a:solidFill>
+                        <a:srgbClr val="EEF3F8"/>
+                      </a:solidFill>
+                      <a:prstDash val="solid"/>
+                      <a:round/>
+                      <a:headEnd type="none" w="med" len="med"/>
+                      <a:tailEnd type="none" w="med" len="med"/>
+                    </a:lnL>
+                    <a:lnR w="12700" cap="flat" cmpd="sng" algn="ctr">
+                      <a:solidFill>
+                        <a:srgbClr val="EEF3F8"/>
+                      </a:solidFill>
+                      <a:prstDash val="solid"/>
+                      <a:round/>
+                      <a:headEnd type="none" w="med" len="med"/>
+                      <a:tailEnd type="none" w="med" len="med"/>
+                    </a:lnR>
+                    <a:lnT w="12700" cap="flat" cmpd="sng" algn="ctr">
+                      <a:solidFill>
+                        <a:srgbClr val="EEF3F8"/>
+                      </a:solidFill>
+                      <a:prstDash val="solid"/>
+                      <a:round/>
+                      <a:headEnd type="none" w="med" len="med"/>
+                      <a:tailEnd type="none" w="med" len="med"/>
+                    </a:lnT>
+                    <a:lnB w="12700" cap="flat" cmpd="sng" algn="ctr">
+                      <a:solidFill>
+                        <a:srgbClr val="EEF3F8"/>
+                      </a:solidFill>
+                      <a:prstDash val="solid"/>
+                      <a:round/>
+                      <a:headEnd type="none" w="med" len="med"/>
+                      <a:tailEnd type="none" w="med" len="med"/>
+                    </a:lnB>
+                    <a:solidFill>
+                      <a:schemeClr val="bg1"/>
+                    </a:solidFill>
+                  </a:tcPr>
+                </a:tc>
+                <a:tc>
+                  <a:txBody>
+                    <a:bodyPr/>
+                    <a:lstStyle/>
+                    <a:p>
+                      <a:pPr indent="0" marL="0">
+                        <a:buNone/>
+                      </a:pPr>
+                      <a:r>
+                        <a:rPr lang="en-US" sz="1400" dirty="0">
+                          <a:solidFill>
+                            <a:schemeClr val="tx1"/>
+                          </a:solidFill>
+                          <a:latin typeface="Calibri" pitchFamily="34" charset="0"/>
+                          <a:ea typeface="Calibri" pitchFamily="34" charset="-122"/>
+                          <a:cs typeface="Calibri" pitchFamily="34" charset="-120"/>
+                        </a:rPr>
+                        <a:t>Menos cortes: mais energia vendida</a:t>
                       </a:r>
                       <a:endParaRPr lang="en-US" sz="1400" dirty="0">
                         <a:latin typeface="Calibri" charset="0"/>
@@ -26587,75 +27979,7 @@
                           <a:ea typeface="Calibri" pitchFamily="34" charset="-122"/>
                           <a:cs typeface="Calibri" pitchFamily="34" charset="-120"/>
                         </a:rPr>
-                        <a:t>Menos curtailment: mais energia vendida</a:t>
-                      </a:r>
-                      <a:endParaRPr lang="en-US" sz="1400" dirty="0">
-                        <a:latin typeface="Calibri" charset="0"/>
-                        <a:ea typeface="Calibri" charset="0"/>
-                        <a:cs typeface="Calibri" charset="0"/>
-                      </a:endParaRPr>
-                    </a:p>
-                  </a:txBody>
-                  <a:tcPr marL="137160" marR="137160" marT="45720" marB="45720" anchor="ctr">
-                    <a:lnL w="12700" cap="flat" cmpd="sng" algn="ctr">
-                      <a:solidFill>
-                        <a:srgbClr val="EEF3F8"/>
-                      </a:solidFill>
-                      <a:prstDash val="solid"/>
-                      <a:round/>
-                      <a:headEnd type="none" w="med" len="med"/>
-                      <a:tailEnd type="none" w="med" len="med"/>
-                    </a:lnL>
-                    <a:lnR w="12700" cap="flat" cmpd="sng" algn="ctr">
-                      <a:solidFill>
-                        <a:srgbClr val="EEF3F8"/>
-                      </a:solidFill>
-                      <a:prstDash val="solid"/>
-                      <a:round/>
-                      <a:headEnd type="none" w="med" len="med"/>
-                      <a:tailEnd type="none" w="med" len="med"/>
-                    </a:lnR>
-                    <a:lnT w="12700" cap="flat" cmpd="sng" algn="ctr">
-                      <a:solidFill>
-                        <a:srgbClr val="EEF3F8"/>
-                      </a:solidFill>
-                      <a:prstDash val="solid"/>
-                      <a:round/>
-                      <a:headEnd type="none" w="med" len="med"/>
-                      <a:tailEnd type="none" w="med" len="med"/>
-                    </a:lnT>
-                    <a:lnB w="12700" cap="flat" cmpd="sng" algn="ctr">
-                      <a:solidFill>
-                        <a:srgbClr val="EEF3F8"/>
-                      </a:solidFill>
-                      <a:prstDash val="solid"/>
-                      <a:round/>
-                      <a:headEnd type="none" w="med" len="med"/>
-                      <a:tailEnd type="none" w="med" len="med"/>
-                    </a:lnB>
-                    <a:solidFill>
-                      <a:schemeClr val="bg1"/>
-                    </a:solidFill>
-                  </a:tcPr>
-                </a:tc>
-                <a:tc>
-                  <a:txBody>
-                    <a:bodyPr/>
-                    <a:lstStyle/>
-                    <a:p>
-                      <a:pPr indent="0" marL="0">
-                        <a:buNone/>
-                      </a:pPr>
-                      <a:r>
-                        <a:rPr lang="en-US" sz="1400" dirty="0">
-                          <a:solidFill>
-                            <a:schemeClr val="tx1"/>
-                          </a:solidFill>
-                          <a:latin typeface="Calibri" pitchFamily="34" charset="0"/>
-                          <a:ea typeface="Calibri" pitchFamily="34" charset="-122"/>
-                          <a:cs typeface="Calibri" pitchFamily="34" charset="-120"/>
-                        </a:rPr>
-                        <a:t>Depende do corte evitado</a:t>
+                        <a:t>Ganho cobre o encargo se o corte evitado for alto</a:t>
                       </a:r>
                       <a:endParaRPr lang="en-US" sz="1400" dirty="0">
                         <a:latin typeface="Calibri" charset="0"/>
@@ -26725,7 +28049,349 @@
                           <a:ea typeface="Calibri" pitchFamily="34" charset="-122"/>
                           <a:cs typeface="Calibri" pitchFamily="34" charset="-120"/>
                         </a:rPr>
-                        <a:t>Termelétricas</a:t>
+                        <a:t>Solares</a:t>
+                      </a:r>
+                      <a:endParaRPr lang="en-US" sz="1400" dirty="0">
+                        <a:latin typeface="Calibri" charset="0"/>
+                        <a:ea typeface="Calibri" charset="0"/>
+                        <a:cs typeface="Calibri" charset="0"/>
+                      </a:endParaRPr>
+                    </a:p>
+                  </a:txBody>
+                  <a:tcPr marL="137160" marR="137160" marT="45720" marB="45720" anchor="ctr">
+                    <a:lnL w="12700" cap="flat" cmpd="sng" algn="ctr">
+                      <a:solidFill>
+                        <a:srgbClr val="EEF3F8"/>
+                      </a:solidFill>
+                      <a:prstDash val="solid"/>
+                      <a:round/>
+                      <a:headEnd type="none" w="med" len="med"/>
+                      <a:tailEnd type="none" w="med" len="med"/>
+                    </a:lnL>
+                    <a:lnR w="12700" cap="flat" cmpd="sng" algn="ctr">
+                      <a:solidFill>
+                        <a:srgbClr val="EEF3F8"/>
+                      </a:solidFill>
+                      <a:prstDash val="solid"/>
+                      <a:round/>
+                      <a:headEnd type="none" w="med" len="med"/>
+                      <a:tailEnd type="none" w="med" len="med"/>
+                    </a:lnR>
+                    <a:lnT w="12700" cap="flat" cmpd="sng" algn="ctr">
+                      <a:solidFill>
+                        <a:srgbClr val="EEF3F8"/>
+                      </a:solidFill>
+                      <a:prstDash val="solid"/>
+                      <a:round/>
+                      <a:headEnd type="none" w="med" len="med"/>
+                      <a:tailEnd type="none" w="med" len="med"/>
+                    </a:lnT>
+                    <a:lnB w="12700" cap="flat" cmpd="sng" algn="ctr">
+                      <a:solidFill>
+                        <a:srgbClr val="EEF3F8"/>
+                      </a:solidFill>
+                      <a:prstDash val="solid"/>
+                      <a:round/>
+                      <a:headEnd type="none" w="med" len="med"/>
+                      <a:tailEnd type="none" w="med" len="med"/>
+                    </a:lnB>
+                    <a:solidFill>
+                      <a:schemeClr val="bg1"/>
+                    </a:solidFill>
+                  </a:tcPr>
+                </a:tc>
+                <a:tc>
+                  <a:txBody>
+                    <a:bodyPr/>
+                    <a:lstStyle/>
+                    <a:p>
+                      <a:pPr indent="0" marL="0">
+                        <a:buNone/>
+                      </a:pPr>
+                      <a:r>
+                        <a:rPr lang="en-US" sz="1400" dirty="0">
+                          <a:solidFill>
+                            <a:schemeClr val="tx1"/>
+                          </a:solidFill>
+                          <a:latin typeface="Calibri" pitchFamily="34" charset="0"/>
+                          <a:ea typeface="Calibri" pitchFamily="34" charset="-122"/>
+                          <a:cs typeface="Calibri" pitchFamily="34" charset="-120"/>
+                        </a:rPr>
+                        <a:t>Maior corte evitado por MWh instalado</a:t>
+                      </a:r>
+                      <a:endParaRPr lang="en-US" sz="1400" dirty="0">
+                        <a:latin typeface="Calibri" charset="0"/>
+                        <a:ea typeface="Calibri" charset="0"/>
+                        <a:cs typeface="Calibri" charset="0"/>
+                      </a:endParaRPr>
+                    </a:p>
+                  </a:txBody>
+                  <a:tcPr marL="137160" marR="137160" marT="45720" marB="45720" anchor="ctr">
+                    <a:lnL w="12700" cap="flat" cmpd="sng" algn="ctr">
+                      <a:solidFill>
+                        <a:srgbClr val="EEF3F8"/>
+                      </a:solidFill>
+                      <a:prstDash val="solid"/>
+                      <a:round/>
+                      <a:headEnd type="none" w="med" len="med"/>
+                      <a:tailEnd type="none" w="med" len="med"/>
+                    </a:lnL>
+                    <a:lnR w="12700" cap="flat" cmpd="sng" algn="ctr">
+                      <a:solidFill>
+                        <a:srgbClr val="EEF3F8"/>
+                      </a:solidFill>
+                      <a:prstDash val="solid"/>
+                      <a:round/>
+                      <a:headEnd type="none" w="med" len="med"/>
+                      <a:tailEnd type="none" w="med" len="med"/>
+                    </a:lnR>
+                    <a:lnT w="12700" cap="flat" cmpd="sng" algn="ctr">
+                      <a:solidFill>
+                        <a:srgbClr val="EEF3F8"/>
+                      </a:solidFill>
+                      <a:prstDash val="solid"/>
+                      <a:round/>
+                      <a:headEnd type="none" w="med" len="med"/>
+                      <a:tailEnd type="none" w="med" len="med"/>
+                    </a:lnT>
+                    <a:lnB w="12700" cap="flat" cmpd="sng" algn="ctr">
+                      <a:solidFill>
+                        <a:srgbClr val="EEF3F8"/>
+                      </a:solidFill>
+                      <a:prstDash val="solid"/>
+                      <a:round/>
+                      <a:headEnd type="none" w="med" len="med"/>
+                      <a:tailEnd type="none" w="med" len="med"/>
+                    </a:lnB>
+                    <a:solidFill>
+                      <a:schemeClr val="bg1"/>
+                    </a:solidFill>
+                  </a:tcPr>
+                </a:tc>
+                <a:tc>
+                  <a:txBody>
+                    <a:bodyPr/>
+                    <a:lstStyle/>
+                    <a:p>
+                      <a:pPr indent="0" marL="0">
+                        <a:buNone/>
+                      </a:pPr>
+                      <a:r>
+                        <a:rPr lang="en-US" sz="1400" dirty="0">
+                          <a:solidFill>
+                            <a:schemeClr val="tx1"/>
+                          </a:solidFill>
+                          <a:latin typeface="Calibri" pitchFamily="34" charset="0"/>
+                          <a:ea typeface="Calibri" pitchFamily="34" charset="-122"/>
+                          <a:cs typeface="Calibri" pitchFamily="34" charset="-120"/>
+                        </a:rPr>
+                        <a:t>Parte do P1 (100%); peso de 5,3% na geração</a:t>
+                      </a:r>
+                      <a:endParaRPr lang="en-US" sz="1400" dirty="0">
+                        <a:latin typeface="Calibri" charset="0"/>
+                        <a:ea typeface="Calibri" charset="0"/>
+                        <a:cs typeface="Calibri" charset="0"/>
+                      </a:endParaRPr>
+                    </a:p>
+                  </a:txBody>
+                  <a:tcPr marL="137160" marR="137160" marT="45720" marB="45720" anchor="ctr">
+                    <a:lnL w="12700" cap="flat" cmpd="sng" algn="ctr">
+                      <a:solidFill>
+                        <a:srgbClr val="EEF3F8"/>
+                      </a:solidFill>
+                      <a:prstDash val="solid"/>
+                      <a:round/>
+                      <a:headEnd type="none" w="med" len="med"/>
+                      <a:tailEnd type="none" w="med" len="med"/>
+                    </a:lnL>
+                    <a:lnR w="12700" cap="flat" cmpd="sng" algn="ctr">
+                      <a:solidFill>
+                        <a:srgbClr val="EEF3F8"/>
+                      </a:solidFill>
+                      <a:prstDash val="solid"/>
+                      <a:round/>
+                      <a:headEnd type="none" w="med" len="med"/>
+                      <a:tailEnd type="none" w="med" len="med"/>
+                    </a:lnR>
+                    <a:lnT w="12700" cap="flat" cmpd="sng" algn="ctr">
+                      <a:solidFill>
+                        <a:srgbClr val="EEF3F8"/>
+                      </a:solidFill>
+                      <a:prstDash val="solid"/>
+                      <a:round/>
+                      <a:headEnd type="none" w="med" len="med"/>
+                      <a:tailEnd type="none" w="med" len="med"/>
+                    </a:lnT>
+                    <a:lnB w="12700" cap="flat" cmpd="sng" algn="ctr">
+                      <a:solidFill>
+                        <a:srgbClr val="EEF3F8"/>
+                      </a:solidFill>
+                      <a:prstDash val="solid"/>
+                      <a:round/>
+                      <a:headEnd type="none" w="med" len="med"/>
+                      <a:tailEnd type="none" w="med" len="med"/>
+                    </a:lnB>
+                    <a:solidFill>
+                      <a:schemeClr val="bg1"/>
+                    </a:solidFill>
+                  </a:tcPr>
+                </a:tc>
+                <a:tc>
+                  <a:txBody>
+                    <a:bodyPr/>
+                    <a:lstStyle/>
+                    <a:p>
+                      <a:pPr indent="0" marL="0">
+                        <a:buNone/>
+                      </a:pPr>
+                      <a:r>
+                        <a:rPr lang="en-US" sz="1400" dirty="0">
+                          <a:solidFill>
+                            <a:schemeClr val="tx1"/>
+                          </a:solidFill>
+                          <a:latin typeface="Calibri" pitchFamily="34" charset="0"/>
+                          <a:ea typeface="Calibri" pitchFamily="34" charset="-122"/>
+                          <a:cs typeface="Calibri" pitchFamily="34" charset="-120"/>
+                        </a:rPr>
+                        <a:t>Tende a ser mais vantajoso que o das eólicas</a:t>
+                      </a:r>
+                      <a:endParaRPr lang="en-US" sz="1400" dirty="0">
+                        <a:latin typeface="Calibri" charset="0"/>
+                        <a:ea typeface="Calibri" charset="0"/>
+                        <a:cs typeface="Calibri" charset="0"/>
+                      </a:endParaRPr>
+                    </a:p>
+                  </a:txBody>
+                  <a:tcPr marL="137160" marR="137160" marT="45720" marB="45720" anchor="ctr">
+                    <a:lnL w="12700" cap="flat" cmpd="sng" algn="ctr">
+                      <a:solidFill>
+                        <a:srgbClr val="EEF3F8"/>
+                      </a:solidFill>
+                      <a:prstDash val="solid"/>
+                      <a:round/>
+                      <a:headEnd type="none" w="med" len="med"/>
+                      <a:tailEnd type="none" w="med" len="med"/>
+                    </a:lnL>
+                    <a:lnR w="12700" cap="flat" cmpd="sng" algn="ctr">
+                      <a:solidFill>
+                        <a:srgbClr val="EEF3F8"/>
+                      </a:solidFill>
+                      <a:prstDash val="solid"/>
+                      <a:round/>
+                      <a:headEnd type="none" w="med" len="med"/>
+                      <a:tailEnd type="none" w="med" len="med"/>
+                    </a:lnR>
+                    <a:lnT w="12700" cap="flat" cmpd="sng" algn="ctr">
+                      <a:solidFill>
+                        <a:srgbClr val="EEF3F8"/>
+                      </a:solidFill>
+                      <a:prstDash val="solid"/>
+                      <a:round/>
+                      <a:headEnd type="none" w="med" len="med"/>
+                      <a:tailEnd type="none" w="med" len="med"/>
+                    </a:lnT>
+                    <a:lnB w="12700" cap="flat" cmpd="sng" algn="ctr">
+                      <a:solidFill>
+                        <a:srgbClr val="EEF3F8"/>
+                      </a:solidFill>
+                      <a:prstDash val="solid"/>
+                      <a:round/>
+                      <a:headEnd type="none" w="med" len="med"/>
+                      <a:tailEnd type="none" w="med" len="med"/>
+                    </a:lnB>
+                    <a:solidFill>
+                      <a:schemeClr val="bg1"/>
+                    </a:solidFill>
+                  </a:tcPr>
+                </a:tc>
+              </a:tr>
+              <a:tr h="777240">
+                <a:tc>
+                  <a:txBody>
+                    <a:bodyPr/>
+                    <a:lstStyle/>
+                    <a:p>
+                      <a:pPr indent="0" marL="0">
+                        <a:buNone/>
+                      </a:pPr>
+                      <a:r>
+                        <a:rPr lang="en-US" sz="1400" b="1" dirty="0">
+                          <a:solidFill>
+                            <a:schemeClr val="tx1"/>
+                          </a:solidFill>
+                          <a:latin typeface="Calibri" pitchFamily="34" charset="0"/>
+                          <a:ea typeface="Calibri" pitchFamily="34" charset="-122"/>
+                          <a:cs typeface="Calibri" pitchFamily="34" charset="-120"/>
+                        </a:rPr>
+                        <a:t>UHEs</a:t>
+                      </a:r>
+                      <a:endParaRPr lang="en-US" sz="1400" dirty="0">
+                        <a:latin typeface="Calibri" charset="0"/>
+                        <a:ea typeface="Calibri" charset="0"/>
+                        <a:cs typeface="Calibri" charset="0"/>
+                      </a:endParaRPr>
+                    </a:p>
+                  </a:txBody>
+                  <a:tcPr marL="137160" marR="137160" marT="45720" marB="45720" anchor="ctr">
+                    <a:lnL w="12700" cap="flat" cmpd="sng" algn="ctr">
+                      <a:solidFill>
+                        <a:srgbClr val="EEF3F8"/>
+                      </a:solidFill>
+                      <a:prstDash val="solid"/>
+                      <a:round/>
+                      <a:headEnd type="none" w="med" len="med"/>
+                      <a:tailEnd type="none" w="med" len="med"/>
+                    </a:lnL>
+                    <a:lnR w="12700" cap="flat" cmpd="sng" algn="ctr">
+                      <a:solidFill>
+                        <a:srgbClr val="EEF3F8"/>
+                      </a:solidFill>
+                      <a:prstDash val="solid"/>
+                      <a:round/>
+                      <a:headEnd type="none" w="med" len="med"/>
+                      <a:tailEnd type="none" w="med" len="med"/>
+                    </a:lnR>
+                    <a:lnT w="12700" cap="flat" cmpd="sng" algn="ctr">
+                      <a:solidFill>
+                        <a:srgbClr val="EEF3F8"/>
+                      </a:solidFill>
+                      <a:prstDash val="solid"/>
+                      <a:round/>
+                      <a:headEnd type="none" w="med" len="med"/>
+                      <a:tailEnd type="none" w="med" len="med"/>
+                    </a:lnT>
+                    <a:lnB w="12700" cap="flat" cmpd="sng" algn="ctr">
+                      <a:solidFill>
+                        <a:srgbClr val="EEF3F8"/>
+                      </a:solidFill>
+                      <a:prstDash val="solid"/>
+                      <a:round/>
+                      <a:headEnd type="none" w="med" len="med"/>
+                      <a:tailEnd type="none" w="med" len="med"/>
+                    </a:lnB>
+                    <a:solidFill>
+                      <a:schemeClr val="bg1"/>
+                    </a:solidFill>
+                  </a:tcPr>
+                </a:tc>
+                <a:tc>
+                  <a:txBody>
+                    <a:bodyPr/>
+                    <a:lstStyle/>
+                    <a:p>
+                      <a:pPr indent="0" marL="0">
+                        <a:buNone/>
+                      </a:pPr>
+                      <a:r>
+                        <a:rPr lang="en-US" sz="1400" dirty="0">
+                          <a:solidFill>
+                            <a:schemeClr val="tx1"/>
+                          </a:solidFill>
+                          <a:latin typeface="Calibri" pitchFamily="34" charset="0"/>
+                          <a:ea typeface="Calibri" pitchFamily="34" charset="-122"/>
+                          <a:cs typeface="Calibri" pitchFamily="34" charset="-120"/>
+                        </a:rPr>
+                        <a:t>Menos corte e vertimento; mais água armazenada</a:t>
                       </a:r>
                       <a:endParaRPr lang="en-US" sz="1400" dirty="0">
                         <a:latin typeface="Calibri" charset="0"/>
@@ -26861,75 +28527,7 @@
                           <a:ea typeface="Calibri" pitchFamily="34" charset="-122"/>
                           <a:cs typeface="Calibri" pitchFamily="34" charset="-120"/>
                         </a:rPr>
-                        <a:t>Menos acionamento na rampa do fim da tarde</a:t>
-                      </a:r>
-                      <a:endParaRPr lang="en-US" sz="1400" dirty="0">
-                        <a:latin typeface="Calibri" charset="0"/>
-                        <a:ea typeface="Calibri" charset="0"/>
-                        <a:cs typeface="Calibri" charset="0"/>
-                      </a:endParaRPr>
-                    </a:p>
-                  </a:txBody>
-                  <a:tcPr marL="137160" marR="137160" marT="45720" marB="45720" anchor="ctr">
-                    <a:lnL w="12700" cap="flat" cmpd="sng" algn="ctr">
-                      <a:solidFill>
-                        <a:srgbClr val="EEF3F8"/>
-                      </a:solidFill>
-                      <a:prstDash val="solid"/>
-                      <a:round/>
-                      <a:headEnd type="none" w="med" len="med"/>
-                      <a:tailEnd type="none" w="med" len="med"/>
-                    </a:lnL>
-                    <a:lnR w="12700" cap="flat" cmpd="sng" algn="ctr">
-                      <a:solidFill>
-                        <a:srgbClr val="EEF3F8"/>
-                      </a:solidFill>
-                      <a:prstDash val="solid"/>
-                      <a:round/>
-                      <a:headEnd type="none" w="med" len="med"/>
-                      <a:tailEnd type="none" w="med" len="med"/>
-                    </a:lnR>
-                    <a:lnT w="12700" cap="flat" cmpd="sng" algn="ctr">
-                      <a:solidFill>
-                        <a:srgbClr val="EEF3F8"/>
-                      </a:solidFill>
-                      <a:prstDash val="solid"/>
-                      <a:round/>
-                      <a:headEnd type="none" w="med" len="med"/>
-                      <a:tailEnd type="none" w="med" len="med"/>
-                    </a:lnT>
-                    <a:lnB w="12700" cap="flat" cmpd="sng" algn="ctr">
-                      <a:solidFill>
-                        <a:srgbClr val="EEF3F8"/>
-                      </a:solidFill>
-                      <a:prstDash val="solid"/>
-                      <a:round/>
-                      <a:headEnd type="none" w="med" len="med"/>
-                      <a:tailEnd type="none" w="med" len="med"/>
-                    </a:lnB>
-                    <a:solidFill>
-                      <a:schemeClr val="bg1"/>
-                    </a:solidFill>
-                  </a:tcPr>
-                </a:tc>
-                <a:tc>
-                  <a:txBody>
-                    <a:bodyPr/>
-                    <a:lstStyle/>
-                    <a:p>
-                      <a:pPr indent="0" marL="0">
-                        <a:buNone/>
-                      </a:pPr>
-                      <a:r>
-                        <a:rPr lang="en-US" sz="1400" dirty="0">
-                          <a:solidFill>
-                            <a:schemeClr val="tx1"/>
-                          </a:solidFill>
-                          <a:latin typeface="Calibri" pitchFamily="34" charset="0"/>
-                          <a:ea typeface="Calibri" pitchFamily="34" charset="-122"/>
-                          <a:cs typeface="Calibri" pitchFamily="34" charset="-120"/>
-                        </a:rPr>
-                        <a:t>Tende a ser negativo: perdem despacho</a:t>
+                        <a:t>Depende do patamar e do valor da água</a:t>
                       </a:r>
                       <a:endParaRPr lang="en-US" sz="1400" dirty="0">
                         <a:latin typeface="Calibri" charset="0"/>
@@ -26999,7 +28597,7 @@
                           <a:ea typeface="Calibri" pitchFamily="34" charset="-122"/>
                           <a:cs typeface="Calibri" pitchFamily="34" charset="-120"/>
                         </a:rPr>
-                        <a:t>Hidrelétricas</a:t>
+                        <a:t>Térmicas e biomassa</a:t>
                       </a:r>
                       <a:endParaRPr lang="en-US" sz="1400" dirty="0">
                         <a:latin typeface="Calibri" charset="0"/>
@@ -27067,7 +28665,7 @@
                           <a:ea typeface="Calibri" pitchFamily="34" charset="-122"/>
                           <a:cs typeface="Calibri" pitchFamily="34" charset="-120"/>
                         </a:rPr>
-                        <a:t>P1 a P4 (100% a 25%), conforme a classificação do ONS</a:t>
+                        <a:t>Menos acionamento na rampa: perdem despacho</a:t>
                       </a:r>
                       <a:endParaRPr lang="en-US" sz="1400" dirty="0">
                         <a:latin typeface="Calibri" charset="0"/>
@@ -27135,7 +28733,7 @@
                           <a:ea typeface="Calibri" pitchFamily="34" charset="-122"/>
                           <a:cs typeface="Calibri" pitchFamily="34" charset="-120"/>
                         </a:rPr>
-                        <a:t>Menor risco hidrológico e mais água armazenada</a:t>
+                        <a:t>P1 a P4, conforme a classificação do ONS</a:t>
                       </a:r>
                       <a:endParaRPr lang="en-US" sz="1400" dirty="0">
                         <a:latin typeface="Calibri" charset="0"/>
@@ -27203,281 +28801,7 @@
                           <a:ea typeface="Calibri" pitchFamily="34" charset="-122"/>
                           <a:cs typeface="Calibri" pitchFamily="34" charset="-120"/>
                         </a:rPr>
-                        <a:t>Depende do patamar e do ganho hídrico</a:t>
-                      </a:r>
-                      <a:endParaRPr lang="en-US" sz="1400" dirty="0">
-                        <a:latin typeface="Calibri" charset="0"/>
-                        <a:ea typeface="Calibri" charset="0"/>
-                        <a:cs typeface="Calibri" charset="0"/>
-                      </a:endParaRPr>
-                    </a:p>
-                  </a:txBody>
-                  <a:tcPr marL="137160" marR="137160" marT="45720" marB="45720" anchor="ctr">
-                    <a:lnL w="12700" cap="flat" cmpd="sng" algn="ctr">
-                      <a:solidFill>
-                        <a:srgbClr val="EEF3F8"/>
-                      </a:solidFill>
-                      <a:prstDash val="solid"/>
-                      <a:round/>
-                      <a:headEnd type="none" w="med" len="med"/>
-                      <a:tailEnd type="none" w="med" len="med"/>
-                    </a:lnL>
-                    <a:lnR w="12700" cap="flat" cmpd="sng" algn="ctr">
-                      <a:solidFill>
-                        <a:srgbClr val="EEF3F8"/>
-                      </a:solidFill>
-                      <a:prstDash val="solid"/>
-                      <a:round/>
-                      <a:headEnd type="none" w="med" len="med"/>
-                      <a:tailEnd type="none" w="med" len="med"/>
-                    </a:lnR>
-                    <a:lnT w="12700" cap="flat" cmpd="sng" algn="ctr">
-                      <a:solidFill>
-                        <a:srgbClr val="EEF3F8"/>
-                      </a:solidFill>
-                      <a:prstDash val="solid"/>
-                      <a:round/>
-                      <a:headEnd type="none" w="med" len="med"/>
-                      <a:tailEnd type="none" w="med" len="med"/>
-                    </a:lnT>
-                    <a:lnB w="12700" cap="flat" cmpd="sng" algn="ctr">
-                      <a:solidFill>
-                        <a:srgbClr val="EEF3F8"/>
-                      </a:solidFill>
-                      <a:prstDash val="solid"/>
-                      <a:round/>
-                      <a:headEnd type="none" w="med" len="med"/>
-                      <a:tailEnd type="none" w="med" len="med"/>
-                    </a:lnB>
-                    <a:solidFill>
-                      <a:schemeClr val="bg1"/>
-                    </a:solidFill>
-                  </a:tcPr>
-                </a:tc>
-              </a:tr>
-              <a:tr h="777240">
-                <a:tc>
-                  <a:txBody>
-                    <a:bodyPr/>
-                    <a:lstStyle/>
-                    <a:p>
-                      <a:pPr indent="0" marL="0">
-                        <a:buNone/>
-                      </a:pPr>
-                      <a:r>
-                        <a:rPr lang="en-US" sz="1400" b="1" dirty="0">
-                          <a:solidFill>
-                            <a:schemeClr val="tx1"/>
-                          </a:solidFill>
-                          <a:latin typeface="Calibri" pitchFamily="34" charset="0"/>
-                          <a:ea typeface="Calibri" pitchFamily="34" charset="-122"/>
-                          <a:cs typeface="Calibri" pitchFamily="34" charset="-120"/>
-                        </a:rPr>
-                        <a:t>MMGD</a:t>
-                      </a:r>
-                      <a:endParaRPr lang="en-US" sz="1400" dirty="0">
-                        <a:latin typeface="Calibri" charset="0"/>
-                        <a:ea typeface="Calibri" charset="0"/>
-                        <a:cs typeface="Calibri" charset="0"/>
-                      </a:endParaRPr>
-                    </a:p>
-                  </a:txBody>
-                  <a:tcPr marL="137160" marR="137160" marT="45720" marB="45720" anchor="ctr">
-                    <a:lnL w="12700" cap="flat" cmpd="sng" algn="ctr">
-                      <a:solidFill>
-                        <a:srgbClr val="EEF3F8"/>
-                      </a:solidFill>
-                      <a:prstDash val="solid"/>
-                      <a:round/>
-                      <a:headEnd type="none" w="med" len="med"/>
-                      <a:tailEnd type="none" w="med" len="med"/>
-                    </a:lnL>
-                    <a:lnR w="12700" cap="flat" cmpd="sng" algn="ctr">
-                      <a:solidFill>
-                        <a:srgbClr val="EEF3F8"/>
-                      </a:solidFill>
-                      <a:prstDash val="solid"/>
-                      <a:round/>
-                      <a:headEnd type="none" w="med" len="med"/>
-                      <a:tailEnd type="none" w="med" len="med"/>
-                    </a:lnR>
-                    <a:lnT w="12700" cap="flat" cmpd="sng" algn="ctr">
-                      <a:solidFill>
-                        <a:srgbClr val="EEF3F8"/>
-                      </a:solidFill>
-                      <a:prstDash val="solid"/>
-                      <a:round/>
-                      <a:headEnd type="none" w="med" len="med"/>
-                      <a:tailEnd type="none" w="med" len="med"/>
-                    </a:lnT>
-                    <a:lnB w="12700" cap="flat" cmpd="sng" algn="ctr">
-                      <a:solidFill>
-                        <a:srgbClr val="EEF3F8"/>
-                      </a:solidFill>
-                      <a:prstDash val="solid"/>
-                      <a:round/>
-                      <a:headEnd type="none" w="med" len="med"/>
-                      <a:tailEnd type="none" w="med" len="med"/>
-                    </a:lnB>
-                    <a:solidFill>
-                      <a:schemeClr val="bg1"/>
-                    </a:solidFill>
-                  </a:tcPr>
-                </a:tc>
-                <a:tc>
-                  <a:txBody>
-                    <a:bodyPr/>
-                    <a:lstStyle/>
-                    <a:p>
-                      <a:pPr indent="0" marL="0">
-                        <a:buNone/>
-                      </a:pPr>
-                      <a:r>
-                        <a:rPr lang="en-US" sz="1400" dirty="0">
-                          <a:solidFill>
-                            <a:schemeClr val="tx1"/>
-                          </a:solidFill>
-                          <a:latin typeface="Calibri" pitchFamily="34" charset="0"/>
-                          <a:ea typeface="Calibri" pitchFamily="34" charset="-122"/>
-                          <a:cs typeface="Calibri" pitchFamily="34" charset="-120"/>
-                        </a:rPr>
-                        <a:t>Fora do rateio</a:t>
-                      </a:r>
-                      <a:endParaRPr lang="en-US" sz="1400" dirty="0">
-                        <a:latin typeface="Calibri" charset="0"/>
-                        <a:ea typeface="Calibri" charset="0"/>
-                        <a:cs typeface="Calibri" charset="0"/>
-                      </a:endParaRPr>
-                    </a:p>
-                  </a:txBody>
-                  <a:tcPr marL="137160" marR="137160" marT="45720" marB="45720" anchor="ctr">
-                    <a:lnL w="12700" cap="flat" cmpd="sng" algn="ctr">
-                      <a:solidFill>
-                        <a:srgbClr val="EEF3F8"/>
-                      </a:solidFill>
-                      <a:prstDash val="solid"/>
-                      <a:round/>
-                      <a:headEnd type="none" w="med" len="med"/>
-                      <a:tailEnd type="none" w="med" len="med"/>
-                    </a:lnL>
-                    <a:lnR w="12700" cap="flat" cmpd="sng" algn="ctr">
-                      <a:solidFill>
-                        <a:srgbClr val="EEF3F8"/>
-                      </a:solidFill>
-                      <a:prstDash val="solid"/>
-                      <a:round/>
-                      <a:headEnd type="none" w="med" len="med"/>
-                      <a:tailEnd type="none" w="med" len="med"/>
-                    </a:lnR>
-                    <a:lnT w="12700" cap="flat" cmpd="sng" algn="ctr">
-                      <a:solidFill>
-                        <a:srgbClr val="EEF3F8"/>
-                      </a:solidFill>
-                      <a:prstDash val="solid"/>
-                      <a:round/>
-                      <a:headEnd type="none" w="med" len="med"/>
-                      <a:tailEnd type="none" w="med" len="med"/>
-                    </a:lnT>
-                    <a:lnB w="12700" cap="flat" cmpd="sng" algn="ctr">
-                      <a:solidFill>
-                        <a:srgbClr val="EEF3F8"/>
-                      </a:solidFill>
-                      <a:prstDash val="solid"/>
-                      <a:round/>
-                      <a:headEnd type="none" w="med" len="med"/>
-                      <a:tailEnd type="none" w="med" len="med"/>
-                    </a:lnB>
-                    <a:solidFill>
-                      <a:schemeClr val="bg1"/>
-                    </a:solidFill>
-                  </a:tcPr>
-                </a:tc>
-                <a:tc>
-                  <a:txBody>
-                    <a:bodyPr/>
-                    <a:lstStyle/>
-                    <a:p>
-                      <a:pPr indent="0" marL="0">
-                        <a:buNone/>
-                      </a:pPr>
-                      <a:r>
-                        <a:rPr lang="en-US" sz="1400" dirty="0">
-                          <a:solidFill>
-                            <a:schemeClr val="tx1"/>
-                          </a:solidFill>
-                          <a:latin typeface="Calibri" pitchFamily="34" charset="0"/>
-                          <a:ea typeface="Calibri" pitchFamily="34" charset="-122"/>
-                          <a:cs typeface="Calibri" pitchFamily="34" charset="-120"/>
-                        </a:rPr>
-                        <a:t>Menos excedente e menos cortes na rede</a:t>
-                      </a:r>
-                      <a:endParaRPr lang="en-US" sz="1400" dirty="0">
-                        <a:latin typeface="Calibri" charset="0"/>
-                        <a:ea typeface="Calibri" charset="0"/>
-                        <a:cs typeface="Calibri" charset="0"/>
-                      </a:endParaRPr>
-                    </a:p>
-                  </a:txBody>
-                  <a:tcPr marL="137160" marR="137160" marT="45720" marB="45720" anchor="ctr">
-                    <a:lnL w="12700" cap="flat" cmpd="sng" algn="ctr">
-                      <a:solidFill>
-                        <a:srgbClr val="EEF3F8"/>
-                      </a:solidFill>
-                      <a:prstDash val="solid"/>
-                      <a:round/>
-                      <a:headEnd type="none" w="med" len="med"/>
-                      <a:tailEnd type="none" w="med" len="med"/>
-                    </a:lnL>
-                    <a:lnR w="12700" cap="flat" cmpd="sng" algn="ctr">
-                      <a:solidFill>
-                        <a:srgbClr val="EEF3F8"/>
-                      </a:solidFill>
-                      <a:prstDash val="solid"/>
-                      <a:round/>
-                      <a:headEnd type="none" w="med" len="med"/>
-                      <a:tailEnd type="none" w="med" len="med"/>
-                    </a:lnR>
-                    <a:lnT w="12700" cap="flat" cmpd="sng" algn="ctr">
-                      <a:solidFill>
-                        <a:srgbClr val="EEF3F8"/>
-                      </a:solidFill>
-                      <a:prstDash val="solid"/>
-                      <a:round/>
-                      <a:headEnd type="none" w="med" len="med"/>
-                      <a:tailEnd type="none" w="med" len="med"/>
-                    </a:lnT>
-                    <a:lnB w="12700" cap="flat" cmpd="sng" algn="ctr">
-                      <a:solidFill>
-                        <a:srgbClr val="EEF3F8"/>
-                      </a:solidFill>
-                      <a:prstDash val="solid"/>
-                      <a:round/>
-                      <a:headEnd type="none" w="med" len="med"/>
-                      <a:tailEnd type="none" w="med" len="med"/>
-                    </a:lnB>
-                    <a:solidFill>
-                      <a:schemeClr val="bg1"/>
-                    </a:solidFill>
-                  </a:tcPr>
-                </a:tc>
-                <a:tc>
-                  <a:txBody>
-                    <a:bodyPr/>
-                    <a:lstStyle/>
-                    <a:p>
-                      <a:pPr indent="0" marL="0">
-                        <a:buNone/>
-                      </a:pPr>
-                      <a:r>
-                        <a:rPr lang="en-US" sz="1400" dirty="0">
-                          <a:solidFill>
-                            <a:schemeClr val="tx1"/>
-                          </a:solidFill>
-                          <a:latin typeface="Calibri" pitchFamily="34" charset="0"/>
-                          <a:ea typeface="Calibri" pitchFamily="34" charset="-122"/>
-                          <a:cs typeface="Calibri" pitchFamily="34" charset="-120"/>
-                        </a:rPr>
-                        <a:t>Não paga, mas é a origem do excedente</a:t>
+                        <a:t>Fora do foco: só reportado</a:t>
                       </a:r>
                       <a:endParaRPr lang="en-US" sz="1400" dirty="0">
                         <a:latin typeface="Calibri" charset="0"/>
@@ -27590,7 +28914,7 @@
                   <a:schemeClr val="tx1"/>
                 </a:solidFill>
               </a:rPr>
-              <a:t>Saldo da fonte i = ganho com baterias − Ei. </a:t>
+              <a:t>Saldo da fonte i = ganho − encargo. </a:t>
             </a:r>
             <a:pPr indent="0" marL="0">
               <a:buNone/>
@@ -27601,7 +28925,7 @@
                   <a:schemeClr val="tx1"/>
                 </a:solidFill>
               </a:rPr>
-              <a:t>As simulações (OE2 a OE5) quantificam cada célula e testam os três cenários de rateio (R1 a R3).</a:t>
+              <a:t>As simulações (OE1 a OE5) quantificam cada célula e testam as regras de rateio R1 a R3.</a:t>
             </a:r>
             <a:endParaRPr lang="en-US" sz="1600" dirty="0"/>
           </a:p>
@@ -27637,7 +28961,7 @@
                   <a:schemeClr val="tx2"/>
                 </a:solidFill>
               </a:rPr>
-              <a:t>Encargos: proposta da ANEEL (NT 101/2026), via resumos setoriais. Os sinais do saldo são hipóteses de trabalho, não resultados.</a:t>
+              <a:t>Encargos: proposta da ANEEL (NT 101/2026), via resumos setoriais. As hipóteses são de trabalho, não resultados.</a:t>
             </a:r>
             <a:endParaRPr lang="en-US" sz="1000" dirty="0"/>
           </a:p>
@@ -27847,7 +29171,7 @@
                   <a:schemeClr val="bg1"/>
                 </a:solidFill>
               </a:rPr>
-              <a:t>MMGD em expansão gera curtailment e perdas bilionárias.</a:t>
+              <a:t>MMGD em expansão gera cortes e perdas bilionárias em eólicas, solares e UHEs.</a:t>
             </a:r>
             <a:endParaRPr lang="en-US" sz="1800" dirty="0"/>
           </a:p>
@@ -27949,7 +29273,7 @@
                   <a:schemeClr val="bg1"/>
                 </a:solidFill>
               </a:rPr>
-              <a:t>O ganho do sistema com baterias cobre os encargos das fontes?</a:t>
+              <a:t>Para cada fonte, o ganho com menos cortes supera o encargo das baterias?</a:t>
             </a:r>
             <a:endParaRPr lang="en-US" sz="1800" dirty="0"/>
           </a:p>
@@ -28051,7 +29375,7 @@
                   <a:schemeClr val="bg1"/>
                 </a:solidFill>
               </a:rPr>
-              <a:t>Simulações horárias sem e com baterias (NE + SE, 4 h) em cenários de MMGD.</a:t>
+              <a:t>Simulações horárias sem e com baterias (NE + SE, 4 h), em níveis de MMGD e regras de rateio.</a:t>
             </a:r>
             <a:endParaRPr lang="en-US" sz="1800" dirty="0"/>
           </a:p>
@@ -28153,7 +29477,7 @@
                   <a:schemeClr val="bg1"/>
                 </a:solidFill>
               </a:rPr>
-              <a:t>ΔCTO comparado à soma dos encargos, no sistema e por fonte.</a:t>
+              <a:t>Saldo, razão ganho ÷ encargo e ponto de equilíbrio de cada fonte.</a:t>
             </a:r>
             <a:endParaRPr lang="en-US" sz="1800" dirty="0"/>
           </a:p>
@@ -28451,28 +29775,6 @@
             </a:r>
             <a:endParaRPr lang="en-US" sz="1200" dirty="0"/>
           </a:p>
-        </p:txBody>
-      </p:sp>
-      <p:sp>
-        <p:nvSpPr>
-          <p:cNvPr id="4" name="Text 2"/>
-          <p:cNvSpPr txBox="1"/>
-          <p:nvPr/>
-        </p:nvSpPr>
-        <p:spPr>
-          <a:xfrm>
-            <a:off x="6217920" y="1417320"/>
-            <a:ext cx="5394960" cy="4846320"/>
-          </a:xfrm>
-          <a:prstGeom prst="rect">
-            <a:avLst/>
-          </a:prstGeom>
-          <a:noFill/>
-          <a:ln/>
-        </p:spPr>
-        <p:txBody>
-          <a:bodyPr wrap="square" lIns="0" tIns="0" rIns="0" bIns="0" rtlCol="0" anchor="t"/>
-          <a:lstStyle/>
           <a:p>
             <a:pPr marL="342900" indent="-342900">
               <a:spcAft>
@@ -28480,7 +29782,7 @@
               </a:spcAft>
               <a:buSzPct val="100000"/>
               <a:buFont typeface="+mj-lt"/>
-              <a:buAutoNum type="arabicPeriod" startAt="12"/>
+              <a:buAutoNum type="arabicPeriod" startAt="1"/>
             </a:pPr>
             <a:r>
               <a:rPr lang="en-US" sz="1200" dirty="0">
@@ -28492,6 +29794,28 @@
             </a:r>
             <a:endParaRPr lang="en-US" sz="1200" dirty="0"/>
           </a:p>
+        </p:txBody>
+      </p:sp>
+      <p:sp>
+        <p:nvSpPr>
+          <p:cNvPr id="4" name="Text 2"/>
+          <p:cNvSpPr txBox="1"/>
+          <p:nvPr/>
+        </p:nvSpPr>
+        <p:spPr>
+          <a:xfrm>
+            <a:off x="6217920" y="1417320"/>
+            <a:ext cx="5394960" cy="4846320"/>
+          </a:xfrm>
+          <a:prstGeom prst="rect">
+            <a:avLst/>
+          </a:prstGeom>
+          <a:noFill/>
+          <a:ln/>
+        </p:spPr>
+        <p:txBody>
+          <a:bodyPr wrap="square" lIns="0" tIns="0" rIns="0" bIns="0" rtlCol="0" anchor="t"/>
+          <a:lstStyle/>
           <a:p>
             <a:pPr marL="342900" indent="-342900">
               <a:spcAft>
@@ -28499,7 +29823,7 @@
               </a:spcAft>
               <a:buSzPct val="100000"/>
               <a:buFont typeface="+mj-lt"/>
-              <a:buAutoNum type="arabicPeriod" startAt="12"/>
+              <a:buAutoNum type="arabicPeriod" startAt="13"/>
             </a:pPr>
             <a:r>
               <a:rPr lang="en-US" sz="1200" dirty="0">
@@ -28518,7 +29842,7 @@
               </a:spcAft>
               <a:buSzPct val="100000"/>
               <a:buFont typeface="+mj-lt"/>
-              <a:buAutoNum type="arabicPeriod" startAt="12"/>
+              <a:buAutoNum type="arabicPeriod" startAt="13"/>
             </a:pPr>
             <a:r>
               <a:rPr lang="en-US" sz="1200" dirty="0">
@@ -28537,7 +29861,7 @@
               </a:spcAft>
               <a:buSzPct val="100000"/>
               <a:buFont typeface="+mj-lt"/>
-              <a:buAutoNum type="arabicPeriod" startAt="12"/>
+              <a:buAutoNum type="arabicPeriod" startAt="13"/>
             </a:pPr>
             <a:r>
               <a:rPr lang="en-US" sz="1200" dirty="0">
@@ -28556,7 +29880,7 @@
               </a:spcAft>
               <a:buSzPct val="100000"/>
               <a:buFont typeface="+mj-lt"/>
-              <a:buAutoNum type="arabicPeriod" startAt="12"/>
+              <a:buAutoNum type="arabicPeriod" startAt="13"/>
             </a:pPr>
             <a:r>
               <a:rPr lang="en-US" sz="1200" dirty="0">
@@ -28575,7 +29899,7 @@
               </a:spcAft>
               <a:buSzPct val="100000"/>
               <a:buFont typeface="+mj-lt"/>
-              <a:buAutoNum type="arabicPeriod" startAt="12"/>
+              <a:buAutoNum type="arabicPeriod" startAt="13"/>
             </a:pPr>
             <a:r>
               <a:rPr lang="en-US" sz="1200" dirty="0">
@@ -28594,7 +29918,7 @@
               </a:spcAft>
               <a:buSzPct val="100000"/>
               <a:buFont typeface="+mj-lt"/>
-              <a:buAutoNum type="arabicPeriod" startAt="12"/>
+              <a:buAutoNum type="arabicPeriod" startAt="13"/>
             </a:pPr>
             <a:r>
               <a:rPr lang="en-US" sz="1200" dirty="0">
@@ -28613,7 +29937,7 @@
               </a:spcAft>
               <a:buSzPct val="100000"/>
               <a:buFont typeface="+mj-lt"/>
-              <a:buAutoNum type="arabicPeriod" startAt="12"/>
+              <a:buAutoNum type="arabicPeriod" startAt="13"/>
             </a:pPr>
             <a:r>
               <a:rPr lang="en-US" sz="1200" dirty="0">
@@ -28632,7 +29956,7 @@
               </a:spcAft>
               <a:buSzPct val="100000"/>
               <a:buFont typeface="+mj-lt"/>
-              <a:buAutoNum type="arabicPeriod" startAt="12"/>
+              <a:buAutoNum type="arabicPeriod" startAt="13"/>
             </a:pPr>
             <a:r>
               <a:rPr lang="en-US" sz="1200" dirty="0">
@@ -28651,7 +29975,7 @@
               </a:spcAft>
               <a:buSzPct val="100000"/>
               <a:buFont typeface="+mj-lt"/>
-              <a:buAutoNum type="arabicPeriod" startAt="12"/>
+              <a:buAutoNum type="arabicPeriod" startAt="13"/>
             </a:pPr>
             <a:r>
               <a:rPr lang="en-US" sz="1200" dirty="0">
@@ -28670,7 +29994,7 @@
               </a:spcAft>
               <a:buSzPct val="100000"/>
               <a:buFont typeface="+mj-lt"/>
-              <a:buAutoNum type="arabicPeriod" startAt="12"/>
+              <a:buAutoNum type="arabicPeriod" startAt="13"/>
             </a:pPr>
             <a:r>
               <a:rPr lang="en-US" sz="1200" dirty="0">
@@ -28678,7 +30002,64 @@
                   <a:schemeClr val="tx1"/>
                 </a:solidFill>
               </a:rPr>
-              <a:t>EPE (2025). Anuário Estatístico de Energia Elétrica 2025: participação por fonte na geração.</a:t>
+              <a:t>CCEE/EPE (2026). Balanço de consumo e geração 2025: participação por fonte na geração centralizada.</a:t>
+            </a:r>
+            <a:endParaRPr lang="en-US" sz="1200" dirty="0"/>
+          </a:p>
+          <a:p>
+            <a:pPr marL="342900" indent="-342900">
+              <a:spcAft>
+                <a:spcPts val="600"/>
+              </a:spcAft>
+              <a:buSzPct val="100000"/>
+              <a:buFont typeface="+mj-lt"/>
+              <a:buAutoNum type="arabicPeriod" startAt="13"/>
+            </a:pPr>
+            <a:r>
+              <a:rPr lang="en-US" sz="1200" dirty="0">
+                <a:solidFill>
+                  <a:schemeClr val="tx1"/>
+                </a:solidFill>
+              </a:rPr>
+              <a:t>BTG Pactual via NeoFeed (2025). Cortes de energia renovável: solar 34,1% e eólica 20,4% no 3º trimestre de 2025.</a:t>
+            </a:r>
+            <a:endParaRPr lang="en-US" sz="1200" dirty="0"/>
+          </a:p>
+          <a:p>
+            <a:pPr marL="342900" indent="-342900">
+              <a:spcAft>
+                <a:spcPts val="600"/>
+              </a:spcAft>
+              <a:buSzPct val="100000"/>
+              <a:buFont typeface="+mj-lt"/>
+              <a:buAutoNum type="arabicPeriod" startAt="13"/>
+            </a:pPr>
+            <a:r>
+              <a:rPr lang="en-US" sz="1200" dirty="0">
+                <a:solidFill>
+                  <a:schemeClr val="tx1"/>
+                </a:solidFill>
+              </a:rPr>
+              <a:t>Volt Robotics (2026). Análise de curtailment: balanço de 2025 (via Agência Infra).</a:t>
+            </a:r>
+            <a:endParaRPr lang="en-US" sz="1200" dirty="0"/>
+          </a:p>
+          <a:p>
+            <a:pPr marL="342900" indent="-342900">
+              <a:spcAft>
+                <a:spcPts val="600"/>
+              </a:spcAft>
+              <a:buSzPct val="100000"/>
+              <a:buFont typeface="+mj-lt"/>
+              <a:buAutoNum type="arabicPeriod" startAt="13"/>
+            </a:pPr>
+            <a:r>
+              <a:rPr lang="en-US" sz="1200" dirty="0">
+                <a:solidFill>
+                  <a:schemeClr val="tx1"/>
+                </a:solidFill>
+              </a:rPr>
+              <a:t>Abrage (2025). Participação das hidrelétricas nos cortes de geração, 2022 a 2024.</a:t>
             </a:r>
             <a:endParaRPr lang="en-US" sz="1200" dirty="0"/>
           </a:p>
@@ -31954,7 +33335,7 @@
                   <a:schemeClr val="bg1"/>
                 </a:solidFill>
               </a:rPr>
-              <a:t>falta comparar o ganho sistêmico das baterias com os encargos que cada fonte pagará.</a:t>
+              <a:t>falta saber, fonte a fonte, se o ganho com menos cortes compensa o encargo das baterias.</a:t>
             </a:r>
             <a:endParaRPr lang="en-US" sz="1600" dirty="0"/>
           </a:p>
@@ -32098,7 +33479,7 @@
                   <a:schemeClr val="tx1"/>
                 </a:solidFill>
               </a:rPr>
-              <a:t>Problema de pesquisa e hipótese</a:t>
+              <a:t>Problema de pesquisa e hipóteses</a:t>
             </a:r>
             <a:endParaRPr lang="en-US" sz="3200" dirty="0"/>
           </a:p>
@@ -32113,7 +33494,7 @@
         <p:spPr>
           <a:xfrm>
             <a:off x="548640" y="1463040"/>
-            <a:ext cx="5486400" cy="4663440"/>
+            <a:ext cx="4754880" cy="4663440"/>
           </a:xfrm>
           <a:prstGeom prst="roundRect">
             <a:avLst>
@@ -32139,7 +33520,7 @@
         </p:nvSpPr>
         <p:spPr>
           <a:xfrm>
-            <a:off x="914400" y="1783080"/>
+            <a:off x="914400" y="1737360"/>
             <a:ext cx="640080" cy="640080"/>
           </a:xfrm>
           <a:prstGeom prst="ellipse">
@@ -32172,7 +33553,7 @@
         </p:blipFill>
         <p:spPr>
           <a:xfrm>
-            <a:off x="1074420" y="1943100"/>
+            <a:off x="1074420" y="1897380"/>
             <a:ext cx="320040" cy="320040"/>
           </a:xfrm>
           <a:prstGeom prst="rect">
@@ -32188,8 +33569,8 @@
         </p:nvSpPr>
         <p:spPr>
           <a:xfrm>
-            <a:off x="1737360" y="1874520"/>
-            <a:ext cx="3657600" cy="457200"/>
+            <a:off x="1737360" y="1828800"/>
+            <a:ext cx="3200400" cy="457200"/>
           </a:xfrm>
           <a:prstGeom prst="rect">
             <a:avLst/>
@@ -32224,8 +33605,8 @@
         </p:nvSpPr>
         <p:spPr>
           <a:xfrm>
-            <a:off x="914400" y="2743200"/>
-            <a:ext cx="4754880" cy="2377440"/>
+            <a:off x="914400" y="2606040"/>
+            <a:ext cx="4023360" cy="2651760"/>
           </a:xfrm>
           <a:prstGeom prst="rect">
             <a:avLst/>
@@ -32241,7 +33622,7 @@
               <a:buNone/>
             </a:pPr>
             <a:r>
-              <a:rPr lang="en-US" sz="2400" dirty="0">
+              <a:rPr lang="en-US" sz="2200" dirty="0">
                 <a:solidFill>
                   <a:schemeClr val="bg1"/>
                 </a:solidFill>
@@ -32249,9 +33630,9 @@
                 <a:ea typeface="Cambria" pitchFamily="34" charset="-122"/>
                 <a:cs typeface="Cambria" pitchFamily="34" charset="-120"/>
               </a:rPr>
-              <a:t>O ganho econômico com a redução do curtailment pode ser equivalente aos encargos pagos pelas demais fontes para implantar as baterias?</a:t>
-            </a:r>
-            <a:endParaRPr lang="en-US" sz="2400" dirty="0"/>
+              <a:t>Para cada fonte (eólicas, solares e UHEs), o ganho com o aumento de geração, por deixar de ser cortada, é maior que o encargo que ela pagará pelas baterias?</a:t>
+            </a:r>
+            <a:endParaRPr lang="en-US" sz="2200" dirty="0"/>
           </a:p>
         </p:txBody>
       </p:sp>
@@ -32264,7 +33645,7 @@
         <p:spPr>
           <a:xfrm>
             <a:off x="914400" y="5257800"/>
-            <a:ext cx="4754880" cy="640080"/>
+            <a:ext cx="4023360" cy="731520"/>
           </a:xfrm>
           <a:prstGeom prst="rect">
             <a:avLst/>
@@ -32285,7 +33666,7 @@
                   <a:schemeClr val="accent6"/>
                 </a:solidFill>
               </a:rPr>
-              <a:t>Ganho = redução do custo total de operação (CTO) do SIN</a:t>
+              <a:t>Ganho = receita da energia que deixa de ser cortada. Encargo = parcela da receita fixa das baterias.</a:t>
             </a:r>
             <a:endParaRPr lang="en-US" sz="1400" dirty="0"/>
           </a:p>
@@ -32293,18 +33674,18 @@
       </p:sp>
       <p:sp>
         <p:nvSpPr>
-          <p:cNvPr id="9" name="H1 card"/>
+          <p:cNvPr id="9" name="Source card 1"/>
           <p:cNvSpPr/>
           <p:nvPr/>
         </p:nvSpPr>
         <p:spPr>
           <a:xfrm>
-            <a:off x="6355080" y="1463040"/>
-            <a:ext cx="5287975" cy="2103120"/>
+            <a:off x="5577840" y="1463040"/>
+            <a:ext cx="6065215" cy="1188720"/>
           </a:xfrm>
           <a:prstGeom prst="roundRect">
             <a:avLst>
-              <a:gd name="adj" fmla="val 5217"/>
+              <a:gd name="adj" fmla="val 9231"/>
             </a:avLst>
           </a:prstGeom>
           <a:solidFill>
@@ -32333,8 +33714,8 @@
         </p:nvSpPr>
         <p:spPr>
           <a:xfrm>
-            <a:off x="6629400" y="1737360"/>
-            <a:ext cx="548640" cy="548640"/>
+            <a:off x="5852160" y="1764792"/>
+            <a:ext cx="585216" cy="585216"/>
           </a:xfrm>
           <a:prstGeom prst="ellipse">
             <a:avLst/>
@@ -32352,7 +33733,7 @@
       </p:sp>
       <p:pic>
         <p:nvPicPr>
-          <p:cNvPr id="11" name="Image 1" descr="FaCheckCircle">    </p:cNvPr>
+          <p:cNvPr id="11" name="Image 1" descr="FaWind">    </p:cNvPr>
           <p:cNvPicPr>
             <a:picLocks noChangeAspect="1"/>
           </p:cNvPicPr>
@@ -32366,8 +33747,8 @@
         </p:blipFill>
         <p:spPr>
           <a:xfrm>
-            <a:off x="6766560" y="1874520"/>
-            <a:ext cx="274320" cy="274320"/>
+            <a:off x="5998464" y="1911096"/>
+            <a:ext cx="292608" cy="292608"/>
           </a:xfrm>
           <a:prstGeom prst="rect">
             <a:avLst/>
@@ -32382,8 +33763,8 @@
         </p:nvSpPr>
         <p:spPr>
           <a:xfrm>
-            <a:off x="7360920" y="1737360"/>
-            <a:ext cx="4099255" cy="548640"/>
+            <a:off x="6675120" y="1554480"/>
+            <a:ext cx="4785055" cy="365760"/>
           </a:xfrm>
           <a:prstGeom prst="rect">
             <a:avLst/>
@@ -32399,7 +33780,7 @@
               <a:buNone/>
             </a:pPr>
             <a:r>
-              <a:rPr lang="en-US" sz="2000" b="1" dirty="0">
+              <a:rPr lang="en-US" sz="1800" b="1" dirty="0">
                 <a:solidFill>
                   <a:schemeClr val="tx1"/>
                 </a:solidFill>
@@ -32407,9 +33788,9 @@
                 <a:ea typeface="Cambria" pitchFamily="34" charset="-122"/>
                 <a:cs typeface="Cambria" pitchFamily="34" charset="-120"/>
               </a:rPr>
-              <a:t>H1: as baterias se pagam</a:t>
-            </a:r>
-            <a:endParaRPr lang="en-US" sz="2000" dirty="0"/>
+              <a:t>Eólicas</a:t>
+            </a:r>
+            <a:endParaRPr lang="en-US" sz="1800" dirty="0"/>
           </a:p>
         </p:txBody>
       </p:sp>
@@ -32421,8 +33802,8 @@
         </p:nvSpPr>
         <p:spPr>
           <a:xfrm>
-            <a:off x="6629400" y="2468880"/>
-            <a:ext cx="4739335" cy="822960"/>
+            <a:off x="6675120" y="1965960"/>
+            <a:ext cx="4785055" cy="640080"/>
           </a:xfrm>
           <a:prstGeom prst="rect">
             <a:avLst/>
@@ -32443,7 +33824,7 @@
                   <a:schemeClr val="tx2"/>
                 </a:solidFill>
               </a:rPr>
-              <a:t>A redução do CTO é maior ou igual à soma dos encargos pagos pelas fontes.</a:t>
+              <a:t>Cortes de 20,4% no 3º trimestre de 2025. O encargo parte do patamar P1 (100%).</a:t>
             </a:r>
             <a:endParaRPr lang="en-US" sz="1400" dirty="0"/>
           </a:p>
@@ -32451,18 +33832,18 @@
       </p:sp>
       <p:sp>
         <p:nvSpPr>
-          <p:cNvPr id="14" name="H0 card"/>
+          <p:cNvPr id="14" name="Source card 2"/>
           <p:cNvSpPr/>
           <p:nvPr/>
         </p:nvSpPr>
         <p:spPr>
           <a:xfrm>
-            <a:off x="6355080" y="3749040"/>
-            <a:ext cx="5287975" cy="1097280"/>
+            <a:off x="5577840" y="2788920"/>
+            <a:ext cx="6065215" cy="1188720"/>
           </a:xfrm>
           <a:prstGeom prst="roundRect">
             <a:avLst>
-              <a:gd name="adj" fmla="val 10000"/>
+              <a:gd name="adj" fmla="val 9231"/>
             </a:avLst>
           </a:prstGeom>
           <a:solidFill>
@@ -32491,18 +33872,18 @@
         </p:nvSpPr>
         <p:spPr>
           <a:xfrm>
-            <a:off x="6629400" y="4023360"/>
-            <a:ext cx="548640" cy="548640"/>
+            <a:off x="5852160" y="3090672"/>
+            <a:ext cx="585216" cy="585216"/>
           </a:xfrm>
           <a:prstGeom prst="ellipse">
             <a:avLst/>
           </a:prstGeom>
           <a:solidFill>
-            <a:schemeClr val="accent4"/>
+            <a:schemeClr val="accent1"/>
           </a:solidFill>
           <a:ln w="12700">
             <a:solidFill>
-              <a:schemeClr val="accent4"/>
+              <a:schemeClr val="accent1"/>
             </a:solidFill>
             <a:prstDash val="solid"/>
           </a:ln>
@@ -32510,7 +33891,7 @@
       </p:sp>
       <p:pic>
         <p:nvPicPr>
-          <p:cNvPr id="16" name="Image 2" descr="FaTimesCircle">    </p:cNvPr>
+          <p:cNvPr id="16" name="Image 2" descr="FaSun">    </p:cNvPr>
           <p:cNvPicPr>
             <a:picLocks noChangeAspect="1"/>
           </p:cNvPicPr>
@@ -32524,8 +33905,8 @@
         </p:blipFill>
         <p:spPr>
           <a:xfrm>
-            <a:off x="6766560" y="4160520"/>
-            <a:ext cx="274320" cy="274320"/>
+            <a:off x="5998464" y="3236976"/>
+            <a:ext cx="292608" cy="292608"/>
           </a:xfrm>
           <a:prstGeom prst="rect">
             <a:avLst/>
@@ -32540,8 +33921,8 @@
         </p:nvSpPr>
         <p:spPr>
           <a:xfrm>
-            <a:off x="7360920" y="3749040"/>
-            <a:ext cx="4099255" cy="548640"/>
+            <a:off x="6675120" y="2880360"/>
+            <a:ext cx="4785055" cy="365760"/>
           </a:xfrm>
           <a:prstGeom prst="rect">
             <a:avLst/>
@@ -32557,7 +33938,7 @@
               <a:buNone/>
             </a:pPr>
             <a:r>
-              <a:rPr lang="en-US" sz="2000" b="1" dirty="0">
+              <a:rPr lang="en-US" sz="1800" b="1" dirty="0">
                 <a:solidFill>
                   <a:schemeClr val="tx1"/>
                 </a:solidFill>
@@ -32565,9 +33946,9 @@
                 <a:ea typeface="Cambria" pitchFamily="34" charset="-122"/>
                 <a:cs typeface="Cambria" pitchFamily="34" charset="-120"/>
               </a:rPr>
-              <a:t>H0: o custo excede o ganho</a:t>
-            </a:r>
-            <a:endParaRPr lang="en-US" sz="2000" dirty="0"/>
+              <a:t>Solares</a:t>
+            </a:r>
+            <a:endParaRPr lang="en-US" sz="1800" dirty="0"/>
           </a:p>
         </p:txBody>
       </p:sp>
@@ -32579,8 +33960,8 @@
         </p:nvSpPr>
         <p:spPr>
           <a:xfrm>
-            <a:off x="7360920" y="4297680"/>
-            <a:ext cx="4099255" cy="457200"/>
+            <a:off x="6675120" y="3291840"/>
+            <a:ext cx="4785055" cy="640080"/>
           </a:xfrm>
           <a:prstGeom prst="rect">
             <a:avLst/>
@@ -32601,7 +33982,7 @@
                   <a:schemeClr val="tx2"/>
                 </a:solidFill>
               </a:rPr>
-              <a:t>A redução do CTO é menor que a soma dos encargos.</a:t>
+              <a:t>Maior corte: 34,1% no 3º trimestre de 2025, com peso de 5,3% na geração. O encargo parte do P1.</a:t>
             </a:r>
             <a:endParaRPr lang="en-US" sz="1400" dirty="0"/>
           </a:p>
@@ -32609,18 +33990,18 @@
       </p:sp>
       <p:sp>
         <p:nvSpPr>
-          <p:cNvPr id="19" name="Variables card"/>
+          <p:cNvPr id="19" name="Source card 3"/>
           <p:cNvSpPr/>
           <p:nvPr/>
         </p:nvSpPr>
         <p:spPr>
           <a:xfrm>
-            <a:off x="6355080" y="5029200"/>
-            <a:ext cx="5287975" cy="1097280"/>
+            <a:off x="5577840" y="4114800"/>
+            <a:ext cx="6065215" cy="1188720"/>
           </a:xfrm>
           <a:prstGeom prst="roundRect">
             <a:avLst>
-              <a:gd name="adj" fmla="val 10000"/>
+              <a:gd name="adj" fmla="val 9231"/>
             </a:avLst>
           </a:prstGeom>
           <a:solidFill>
@@ -32643,14 +34024,63 @@
       </p:sp>
       <p:sp>
         <p:nvSpPr>
-          <p:cNvPr id="20" name="Text 15"/>
+          <p:cNvPr id="20" name="Icon circle"/>
+          <p:cNvSpPr/>
+          <p:nvPr/>
+        </p:nvSpPr>
+        <p:spPr>
+          <a:xfrm>
+            <a:off x="5852160" y="4416552"/>
+            <a:ext cx="585216" cy="585216"/>
+          </a:xfrm>
+          <a:prstGeom prst="ellipse">
+            <a:avLst/>
+          </a:prstGeom>
+          <a:solidFill>
+            <a:schemeClr val="accent3"/>
+          </a:solidFill>
+          <a:ln w="12700">
+            <a:solidFill>
+              <a:schemeClr val="accent3"/>
+            </a:solidFill>
+            <a:prstDash val="solid"/>
+          </a:ln>
+        </p:spPr>
+      </p:sp>
+      <p:pic>
+        <p:nvPicPr>
+          <p:cNvPr id="21" name="Image 3" descr="FaWater">    </p:cNvPr>
+          <p:cNvPicPr>
+            <a:picLocks noChangeAspect="1"/>
+          </p:cNvPicPr>
+          <p:nvPr/>
+        </p:nvPicPr>
+        <p:blipFill>
+          <a:blip r:embed="rId4"/>
+          <a:stretch>
+            <a:fillRect/>
+          </a:stretch>
+        </p:blipFill>
+        <p:spPr>
+          <a:xfrm>
+            <a:off x="5998464" y="4562856"/>
+            <a:ext cx="292608" cy="292608"/>
+          </a:xfrm>
+          <a:prstGeom prst="rect">
+            <a:avLst/>
+          </a:prstGeom>
+        </p:spPr>
+      </p:pic>
+      <p:sp>
+        <p:nvSpPr>
+          <p:cNvPr id="22" name="Text 16"/>
           <p:cNvSpPr txBox="1"/>
           <p:nvPr/>
         </p:nvSpPr>
         <p:spPr>
           <a:xfrm>
-            <a:off x="6629400" y="5029200"/>
-            <a:ext cx="4739335" cy="1097280"/>
+            <a:off x="6675120" y="4206240"/>
+            <a:ext cx="4785055" cy="365760"/>
           </a:xfrm>
           <a:prstGeom prst="rect">
             <a:avLst/>
@@ -32666,25 +34096,185 @@
               <a:buNone/>
             </a:pPr>
             <a:r>
-              <a:rPr lang="en-US" sz="1400" b="1" dirty="0">
+              <a:rPr lang="en-US" sz="1800" b="1" dirty="0">
                 <a:solidFill>
                   <a:schemeClr val="tx1"/>
                 </a:solidFill>
-              </a:rPr>
-              <a:t>Variáveis: </a:t>
-            </a:r>
+                <a:latin typeface="Cambria" pitchFamily="34" charset="0"/>
+                <a:ea typeface="Cambria" pitchFamily="34" charset="-122"/>
+                <a:cs typeface="Cambria" pitchFamily="34" charset="-120"/>
+              </a:rPr>
+              <a:t>UHEs</a:t>
+            </a:r>
+            <a:endParaRPr lang="en-US" sz="1800" dirty="0"/>
+          </a:p>
+        </p:txBody>
+      </p:sp>
+      <p:sp>
+        <p:nvSpPr>
+          <p:cNvPr id="23" name="Text 17"/>
+          <p:cNvSpPr txBox="1"/>
+          <p:nvPr/>
+        </p:nvSpPr>
+        <p:spPr>
+          <a:xfrm>
+            <a:off x="6675120" y="4617720"/>
+            <a:ext cx="4785055" cy="640080"/>
+          </a:xfrm>
+          <a:prstGeom prst="rect">
+            <a:avLst/>
+          </a:prstGeom>
+          <a:noFill/>
+          <a:ln/>
+        </p:spPr>
+        <p:txBody>
+          <a:bodyPr wrap="square" lIns="0" tIns="0" rIns="0" bIns="0" rtlCol="0" anchor="t"/>
+          <a:lstStyle/>
+          <a:p>
             <a:pPr indent="0" marL="0">
               <a:buNone/>
             </a:pPr>
             <a:r>
               <a:rPr lang="en-US" sz="1400" dirty="0">
                 <a:solidFill>
+                  <a:schemeClr val="tx2"/>
+                </a:solidFill>
+              </a:rPr>
+              <a:t>Responderam por 86% dos cortes obrigatórios de 2022 a 2024. O encargo depende do patamar de flexibilidade.</a:t>
+            </a:r>
+            <a:endParaRPr lang="en-US" sz="1400" dirty="0"/>
+          </a:p>
+        </p:txBody>
+      </p:sp>
+      <p:sp>
+        <p:nvSpPr>
+          <p:cNvPr id="24" name="Hypothesis banner"/>
+          <p:cNvSpPr/>
+          <p:nvPr/>
+        </p:nvSpPr>
+        <p:spPr>
+          <a:xfrm>
+            <a:off x="5577840" y="5440680"/>
+            <a:ext cx="6065215" cy="685800"/>
+          </a:xfrm>
+          <a:prstGeom prst="roundRect">
+            <a:avLst>
+              <a:gd name="adj" fmla="val 16000"/>
+            </a:avLst>
+          </a:prstGeom>
+          <a:solidFill>
+            <a:schemeClr val="bg1"/>
+          </a:solidFill>
+          <a:ln w="19050">
+            <a:solidFill>
+              <a:schemeClr val="accent2"/>
+            </a:solidFill>
+            <a:prstDash val="solid"/>
+          </a:ln>
+        </p:spPr>
+      </p:sp>
+      <p:sp>
+        <p:nvSpPr>
+          <p:cNvPr id="25" name="Text 19"/>
+          <p:cNvSpPr txBox="1"/>
+          <p:nvPr/>
+        </p:nvSpPr>
+        <p:spPr>
+          <a:xfrm>
+            <a:off x="5852160" y="5440680"/>
+            <a:ext cx="5516575" cy="685800"/>
+          </a:xfrm>
+          <a:prstGeom prst="rect">
+            <a:avLst/>
+          </a:prstGeom>
+          <a:noFill/>
+          <a:ln/>
+        </p:spPr>
+        <p:txBody>
+          <a:bodyPr wrap="square" lIns="0" tIns="0" rIns="0" bIns="0" rtlCol="0" anchor="ctr"/>
+          <a:lstStyle/>
+          <a:p>
+            <a:pPr indent="0" marL="0">
+              <a:buNone/>
+            </a:pPr>
+            <a:r>
+              <a:rPr lang="en-US" sz="1600" b="1" dirty="0">
+                <a:solidFill>
                   <a:schemeClr val="tx1"/>
                 </a:solidFill>
               </a:rPr>
-              <a:t>causa = nível de MMGD e presença de baterias. Efeitos = curtailment, despacho, armazenamento, CTO e encargos.</a:t>
-            </a:r>
-            <a:endParaRPr lang="en-US" sz="1400" dirty="0"/>
+              <a:t>H1 (fonte i): </a:t>
+            </a:r>
+            <a:pPr indent="0" marL="0">
+              <a:buNone/>
+            </a:pPr>
+            <a:r>
+              <a:rPr lang="en-US" sz="1600" dirty="0">
+                <a:solidFill>
+                  <a:schemeClr val="tx1"/>
+                </a:solidFill>
+              </a:rPr>
+              <a:t>ganho ≥ encargo.   </a:t>
+            </a:r>
+            <a:pPr indent="0" marL="0">
+              <a:buNone/>
+            </a:pPr>
+            <a:r>
+              <a:rPr lang="en-US" sz="1600" b="1" dirty="0">
+                <a:solidFill>
+                  <a:schemeClr val="tx1"/>
+                </a:solidFill>
+              </a:rPr>
+              <a:t>H0: </a:t>
+            </a:r>
+            <a:pPr indent="0" marL="0">
+              <a:buNone/>
+            </a:pPr>
+            <a:r>
+              <a:rPr lang="en-US" sz="1600" dirty="0">
+                <a:solidFill>
+                  <a:schemeClr val="tx1"/>
+                </a:solidFill>
+              </a:rPr>
+              <a:t>ganho &lt; encargo.</a:t>
+            </a:r>
+            <a:endParaRPr lang="en-US" sz="1600" dirty="0"/>
+          </a:p>
+        </p:txBody>
+      </p:sp>
+      <p:sp>
+        <p:nvSpPr>
+          <p:cNvPr id="26" name="Text 20"/>
+          <p:cNvSpPr txBox="1"/>
+          <p:nvPr/>
+        </p:nvSpPr>
+        <p:spPr>
+          <a:xfrm>
+            <a:off x="548640" y="6382512"/>
+            <a:ext cx="10424160" cy="274320"/>
+          </a:xfrm>
+          <a:prstGeom prst="rect">
+            <a:avLst/>
+          </a:prstGeom>
+          <a:noFill/>
+          <a:ln/>
+        </p:spPr>
+        <p:txBody>
+          <a:bodyPr wrap="square" lIns="0" tIns="0" rIns="0" bIns="0" rtlCol="0" anchor="ctr"/>
+          <a:lstStyle/>
+          <a:p>
+            <a:pPr indent="0" marL="0">
+              <a:buNone/>
+            </a:pPr>
+            <a:r>
+              <a:rPr lang="en-US" sz="1000" i="1" dirty="0">
+                <a:solidFill>
+                  <a:schemeClr val="tx2"/>
+                </a:solidFill>
+              </a:rPr>
+              <a:t>Fontes: BTG Pactual via NeoFeed (2025); CCEE/EPE (2026); Abrage (2025); NT 101/2026 da ANEEL.</a:t>
+            </a:r>
+            <a:endParaRPr lang="en-US" sz="1000" dirty="0"/>
           </a:p>
         </p:txBody>
       </p:sp>
@@ -32880,8 +34470,8 @@
         </p:nvSpPr>
         <p:spPr>
           <a:xfrm>
-            <a:off x="2011680" y="1554480"/>
-            <a:ext cx="9265615" cy="1874520"/>
+            <a:off x="2011680" y="1508760"/>
+            <a:ext cx="9265615" cy="1965960"/>
           </a:xfrm>
           <a:prstGeom prst="rect">
             <a:avLst/>
@@ -32897,7 +34487,7 @@
               <a:buNone/>
             </a:pPr>
             <a:r>
-              <a:rPr lang="en-US" sz="2200" dirty="0">
+              <a:rPr lang="en-US" sz="2100" dirty="0">
                 <a:solidFill>
                   <a:schemeClr val="bg1"/>
                 </a:solidFill>
@@ -32905,9 +34495,9 @@
                 <a:ea typeface="Cambria" pitchFamily="34" charset="-122"/>
                 <a:cs typeface="Cambria" pitchFamily="34" charset="-120"/>
               </a:rPr>
-              <a:t>Verificar, por meio de simulações horárias do SIN sem e com baterias, se o ganho econômico com a redução do curtailment (menor custo total de operação) é equivalente aos encargos que as demais fontes pagarão pela implantação das baterias.</a:t>
-            </a:r>
-            <a:endParaRPr lang="en-US" sz="2200" dirty="0"/>
+              <a:t>Verificar, para cada fonte (eólicas, UFVs centralizadas e UHEs), se a receita adicional obtida com a redução dos cortes de geração, após a inserção de baterias, é maior que o encargo que a fonte pagará pela receita fixa do LRCAP armazenamento.</a:t>
+            </a:r>
+            <a:endParaRPr lang="en-US" sz="2100" dirty="0"/>
           </a:p>
         </p:txBody>
       </p:sp>
@@ -33053,7 +34643,7 @@
                   <a:schemeClr val="bg1"/>
                 </a:solidFill>
               </a:rPr>
-              <a:t>Ganho sistêmico (redução do CTO) em confronto com os encargos pagos por cada fonte.</a:t>
+              <a:t>Ganho com menos cortes em confronto com o encargo, fonte a fonte.</a:t>
             </a:r>
             <a:endParaRPr lang="en-US" sz="1400" dirty="0"/>
           </a:p>
@@ -33201,7 +34791,7 @@
                   <a:schemeClr val="bg1"/>
                 </a:solidFill>
               </a:rPr>
-              <a:t>Simulações horárias do SIN sem e com baterias (NE e SE, 4 h), em níveis crescentes de MMGD.</a:t>
+              <a:t>Simulações horárias sem e com baterias (NE e SE, 4 h), em níveis de MMGD e regras de rateio.</a:t>
             </a:r>
             <a:endParaRPr lang="en-US" sz="1400" dirty="0"/>
           </a:p>
@@ -33349,7 +34939,7 @@
                   <a:schemeClr val="bg1"/>
                 </a:solidFill>
               </a:rPr>
-              <a:t>Dizer se as baterias se pagam e quais fontes ganham ou perdem, subsidiando o rateio dos custos.</a:t>
+              <a:t>Dizer a cada fonte se as baterias valem o encargo e subsidiar a regra de rateio.</a:t>
             </a:r>
             <a:endParaRPr lang="en-US" sz="1400" dirty="0"/>
           </a:p>
@@ -33544,7 +35134,7 @@
                 <a:ea typeface="Cambria" pitchFamily="34" charset="-122"/>
                 <a:cs typeface="Cambria" pitchFamily="34" charset="-120"/>
               </a:rPr>
-              <a:t>Quantificar a redução do curtailment</a:t>
+              <a:t>Quantificar a geração evitada de corte</a:t>
             </a:r>
             <a:endParaRPr lang="en-US" sz="1800" dirty="0"/>
           </a:p>
@@ -33580,7 +35170,7 @@
                   <a:schemeClr val="tx2"/>
                 </a:solidFill>
               </a:rPr>
-              <a:t>de eólicas, UFVs centralizadas e UHEs com baterias, em cada nível de MMGD.</a:t>
+              <a:t>de eólicas, UFVs centralizadas e UHEs, com e sem baterias, em cada nível de MMGD.</a:t>
             </a:r>
             <a:endParaRPr lang="en-US" sz="1400" dirty="0"/>
           </a:p>
@@ -33588,7 +35178,7 @@
       </p:sp>
       <p:pic>
         <p:nvPicPr>
-          <p:cNvPr id="8" name="Image 0" descr="Quantificar a redução do curtailment">    </p:cNvPr>
+          <p:cNvPr id="8" name="Image 0" descr="Quantificar a geração evitada de corte">    </p:cNvPr>
           <p:cNvPicPr>
             <a:picLocks noChangeAspect="1"/>
           </p:cNvPicPr>
@@ -33736,7 +35326,7 @@
                 <a:ea typeface="Cambria" pitchFamily="34" charset="-122"/>
                 <a:cs typeface="Cambria" pitchFamily="34" charset="-120"/>
               </a:rPr>
-              <a:t>Analisar despacho e armazenamento</a:t>
+              <a:t>Valorar o ganho de cada fonte</a:t>
             </a:r>
             <a:endParaRPr lang="en-US" sz="1800" dirty="0"/>
           </a:p>
@@ -33772,7 +35362,7 @@
                   <a:schemeClr val="tx2"/>
                 </a:solidFill>
               </a:rPr>
-              <a:t>identificar fontes beneficiadas e deslocadas e se a energia armazenada nas UHEs aumenta.</a:t>
+              <a:t>receita da energia adicional (preço de venda ou PLD) e, nas UHEs, valor da água.</a:t>
             </a:r>
             <a:endParaRPr lang="en-US" sz="1400" dirty="0"/>
           </a:p>
@@ -33780,7 +35370,7 @@
       </p:sp>
       <p:pic>
         <p:nvPicPr>
-          <p:cNvPr id="14" name="Image 1" descr="Analisar despacho e armazenamento">    </p:cNvPr>
+          <p:cNvPr id="14" name="Image 1" descr="Valorar o ganho de cada fonte">    </p:cNvPr>
           <p:cNvPicPr>
             <a:picLocks noChangeAspect="1"/>
           </p:cNvPicPr>
@@ -33928,7 +35518,7 @@
                 <a:ea typeface="Cambria" pitchFamily="34" charset="-122"/>
                 <a:cs typeface="Cambria" pitchFamily="34" charset="-120"/>
               </a:rPr>
-              <a:t>Calcular o ganho sistêmico (ΔCTO)</a:t>
+              <a:t>Estimar o encargo de cada fonte</a:t>
             </a:r>
             <a:endParaRPr lang="en-US" sz="1800" dirty="0"/>
           </a:p>
@@ -33964,7 +35554,7 @@
                   <a:schemeClr val="tx2"/>
                 </a:solidFill>
               </a:rPr>
-              <a:t>variação do custo total de operação do SIN, sem e com baterias.</a:t>
+              <a:t>parcela da receita fixa das baterias, pelas regras de rateio R1 a R3.</a:t>
             </a:r>
             <a:endParaRPr lang="en-US" sz="1400" dirty="0"/>
           </a:p>
@@ -33972,7 +35562,7 @@
       </p:sp>
       <p:pic>
         <p:nvPicPr>
-          <p:cNvPr id="20" name="Image 2" descr="Calcular o ganho sistêmico (ΔCTO)">    </p:cNvPr>
+          <p:cNvPr id="20" name="Image 2" descr="Estimar o encargo de cada fonte">    </p:cNvPr>
           <p:cNvPicPr>
             <a:picLocks noChangeAspect="1"/>
           </p:cNvPicPr>
@@ -34120,7 +35710,7 @@
                 <a:ea typeface="Cambria" pitchFamily="34" charset="-122"/>
                 <a:cs typeface="Cambria" pitchFamily="34" charset="-120"/>
               </a:rPr>
-              <a:t>Estimar os encargos por fonte</a:t>
+              <a:t>Comparar ganho e encargo</a:t>
             </a:r>
             <a:endParaRPr lang="en-US" sz="1800" dirty="0"/>
           </a:p>
@@ -34156,7 +35746,7 @@
                   <a:schemeClr val="tx2"/>
                 </a:solidFill>
               </a:rPr>
-              <a:t>valor a ser pago por UHEs, UTEs, eólicas e UFVs pela implantação das baterias.</a:t>
+              <a:t>saldo, razão ganho ÷ encargo e ponto de equilíbrio de cada fonte.</a:t>
             </a:r>
             <a:endParaRPr lang="en-US" sz="1400" dirty="0"/>
           </a:p>
@@ -34164,7 +35754,7 @@
       </p:sp>
       <p:pic>
         <p:nvPicPr>
-          <p:cNvPr id="26" name="Image 3" descr="Estimar os encargos por fonte">    </p:cNvPr>
+          <p:cNvPr id="26" name="Image 3" descr="Comparar ganho e encargo">    </p:cNvPr>
           <p:cNvPicPr>
             <a:picLocks noChangeAspect="1"/>
           </p:cNvPicPr>
@@ -34312,7 +35902,7 @@
                 <a:ea typeface="Cambria" pitchFamily="34" charset="-122"/>
                 <a:cs typeface="Cambria" pitchFamily="34" charset="-120"/>
               </a:rPr>
-              <a:t>Comparar ganho e encargos</a:t>
+              <a:t>Testar a sensibilidade</a:t>
             </a:r>
             <a:endParaRPr lang="en-US" sz="1800" dirty="0"/>
           </a:p>
@@ -34348,7 +35938,7 @@
                   <a:schemeClr val="tx2"/>
                 </a:solidFill>
               </a:rPr>
-              <a:t>no sistema e por fonte, testando H1 e a sensibilidade ao nível de MMGD.</a:t>
+              <a:t>nível de MMGD, regra de rateio, preço de valoração e patamar de flexibilidade.</a:t>
             </a:r>
             <a:endParaRPr lang="en-US" sz="1400" dirty="0"/>
           </a:p>
@@ -34356,7 +35946,7 @@
       </p:sp>
       <p:pic>
         <p:nvPicPr>
-          <p:cNvPr id="32" name="Image 4" descr="Comparar ganho e encargos">    </p:cNvPr>
+          <p:cNvPr id="32" name="Image 4" descr="Testar a sensibilidade">    </p:cNvPr>
           <p:cNvPicPr>
             <a:picLocks noChangeAspect="1"/>
           </p:cNvPicPr>
@@ -34408,7 +35998,7 @@
                   <a:schemeClr val="tx2"/>
                 </a:solidFill>
               </a:rPr>
-              <a:t>OE1 a OE3 medem o ganho, OE4 mede o custo e OE5 responde à pergunta de pesquisa.</a:t>
+              <a:t>OE1 e OE2 medem o ganho, OE3 mede o custo, OE4 responde à pergunta e OE5 mostra quando a resposta muda.</a:t>
             </a:r>
             <a:endParaRPr lang="en-US" sz="1400" dirty="0"/>
           </a:p>
@@ -34531,7 +36121,7 @@
         <p:spPr>
           <a:xfrm>
             <a:off x="548640" y="1463040"/>
-            <a:ext cx="3520440" cy="4114800"/>
+            <a:ext cx="3520440" cy="4663440"/>
           </a:xfrm>
           <a:prstGeom prst="roundRect">
             <a:avLst>
@@ -34652,8 +36242,8 @@
         </p:nvSpPr>
         <p:spPr>
           <a:xfrm>
-            <a:off x="822960" y="2560320"/>
-            <a:ext cx="3017520" cy="3383280"/>
+            <a:off x="822960" y="2514600"/>
+            <a:ext cx="3017520" cy="3474720"/>
           </a:xfrm>
           <a:prstGeom prst="rect">
             <a:avLst/>
@@ -34667,92 +36257,92 @@
           <a:p>
             <a:pPr marL="342900" indent="-342900">
               <a:spcAft>
-                <a:spcPts val="1200"/>
+                <a:spcPts val="1000"/>
               </a:spcAft>
               <a:buSzPct val="100000"/>
               <a:buChar char="•"/>
             </a:pPr>
             <a:r>
-              <a:rPr lang="en-US" sz="1600" dirty="0">
+              <a:rPr lang="en-US" sz="1500" dirty="0">
                 <a:solidFill>
                   <a:schemeClr val="tx1"/>
                 </a:solidFill>
               </a:rPr>
-              <a:t>Sistema Interligado Nacional (SIN)</a:t>
-            </a:r>
-            <a:endParaRPr lang="en-US" sz="1600" dirty="0"/>
+              <a:t>Fontes: eólicas, UFVs centralizadas e UHEs</a:t>
+            </a:r>
+            <a:endParaRPr lang="en-US" sz="1500" dirty="0"/>
           </a:p>
           <a:p>
             <a:pPr marL="342900" indent="-342900">
               <a:spcAft>
-                <a:spcPts val="1200"/>
+                <a:spcPts val="1000"/>
               </a:spcAft>
               <a:buSzPct val="100000"/>
               <a:buChar char="•"/>
             </a:pPr>
             <a:r>
-              <a:rPr lang="en-US" sz="1600" dirty="0">
+              <a:rPr lang="en-US" sz="1500" dirty="0">
                 <a:solidFill>
                   <a:schemeClr val="tx1"/>
                 </a:solidFill>
               </a:rPr>
-              <a:t>Baterias no Nordeste e no Sudeste</a:t>
-            </a:r>
-            <a:endParaRPr lang="en-US" sz="1600" dirty="0"/>
+              <a:t>SIN com baterias no Nordeste e Sudeste, 4 h</a:t>
+            </a:r>
+            <a:endParaRPr lang="en-US" sz="1500" dirty="0"/>
           </a:p>
           <a:p>
             <a:pPr marL="342900" indent="-342900">
               <a:spcAft>
-                <a:spcPts val="1200"/>
+                <a:spcPts val="1000"/>
               </a:spcAft>
               <a:buSzPct val="100000"/>
               <a:buChar char="•"/>
             </a:pPr>
             <a:r>
-              <a:rPr lang="en-US" sz="1600" dirty="0">
+              <a:rPr lang="en-US" sz="1500" dirty="0">
                 <a:solidFill>
                   <a:schemeClr val="tx1"/>
                 </a:solidFill>
               </a:rPr>
-              <a:t>Armazenamento de 4 horas</a:t>
-            </a:r>
-            <a:endParaRPr lang="en-US" sz="1600" dirty="0"/>
+              <a:t>Simulação horária, sem e com baterias</a:t>
+            </a:r>
+            <a:endParaRPr lang="en-US" sz="1500" dirty="0"/>
           </a:p>
           <a:p>
             <a:pPr marL="342900" indent="-342900">
               <a:spcAft>
-                <a:spcPts val="1200"/>
+                <a:spcPts val="1000"/>
               </a:spcAft>
               <a:buSzPct val="100000"/>
               <a:buChar char="•"/>
             </a:pPr>
             <a:r>
-              <a:rPr lang="en-US" sz="1600" dirty="0">
+              <a:rPr lang="en-US" sz="1500" dirty="0">
                 <a:solidFill>
                   <a:schemeClr val="tx1"/>
                 </a:solidFill>
               </a:rPr>
-              <a:t>Simulação horária do despacho hidrotérmico</a:t>
-            </a:r>
-            <a:endParaRPr lang="en-US" sz="1600" dirty="0"/>
+              <a:t>Ganho: receita da geração que deixa de ser cortada</a:t>
+            </a:r>
+            <a:endParaRPr lang="en-US" sz="1500" dirty="0"/>
           </a:p>
           <a:p>
             <a:pPr marL="342900" indent="-342900">
               <a:spcAft>
-                <a:spcPts val="1200"/>
+                <a:spcPts val="1000"/>
               </a:spcAft>
               <a:buSzPct val="100000"/>
               <a:buChar char="•"/>
             </a:pPr>
             <a:r>
-              <a:rPr lang="en-US" sz="1600" dirty="0">
+              <a:rPr lang="en-US" sz="1500" dirty="0">
                 <a:solidFill>
                   <a:schemeClr val="tx1"/>
                 </a:solidFill>
               </a:rPr>
-              <a:t>Cenários de MMGD a partir de uma referência</a:t>
-            </a:r>
-            <a:endParaRPr lang="en-US" sz="1600" dirty="0"/>
+              <a:t>Encargo: parcela da receita fixa do LRCAP armazenamento</a:t>
+            </a:r>
+            <a:endParaRPr lang="en-US" sz="1500" dirty="0"/>
           </a:p>
         </p:txBody>
       </p:sp>
@@ -34765,7 +36355,7 @@
         <p:spPr>
           <a:xfrm>
             <a:off x="4334256" y="1463040"/>
-            <a:ext cx="3520440" cy="4114800"/>
+            <a:ext cx="3520440" cy="4663440"/>
           </a:xfrm>
           <a:prstGeom prst="roundRect">
             <a:avLst>
@@ -34872,7 +36462,7 @@
                 <a:ea typeface="Cambria" pitchFamily="34" charset="-122"/>
                 <a:cs typeface="Cambria" pitchFamily="34" charset="-120"/>
               </a:rPr>
-              <a:t>A definir no estudo</a:t>
+              <a:t>Premissas a definir</a:t>
             </a:r>
             <a:endParaRPr lang="en-US" sz="2000" dirty="0"/>
           </a:p>
@@ -34886,8 +36476,8 @@
         </p:nvSpPr>
         <p:spPr>
           <a:xfrm>
-            <a:off x="4608576" y="2560320"/>
-            <a:ext cx="3017520" cy="3383280"/>
+            <a:off x="4608576" y="2514600"/>
+            <a:ext cx="3017520" cy="3474720"/>
           </a:xfrm>
           <a:prstGeom prst="rect">
             <a:avLst/>
@@ -34901,92 +36491,92 @@
           <a:p>
             <a:pPr marL="342900" indent="-342900">
               <a:spcAft>
-                <a:spcPts val="1200"/>
+                <a:spcPts val="1000"/>
               </a:spcAft>
               <a:buSzPct val="100000"/>
               <a:buChar char="•"/>
             </a:pPr>
             <a:r>
-              <a:rPr lang="en-US" sz="1600" dirty="0">
+              <a:rPr lang="en-US" sz="1500" dirty="0">
                 <a:solidFill>
                   <a:schemeClr val="tx1"/>
                 </a:solidFill>
               </a:rPr>
-              <a:t>Potência instalada das baterias (MW)</a:t>
-            </a:r>
-            <a:endParaRPr lang="en-US" sz="1600" dirty="0"/>
+              <a:t>Potência das baterias e receita fixa, conforme o deságio do leilão</a:t>
+            </a:r>
+            <a:endParaRPr lang="en-US" sz="1500" dirty="0"/>
           </a:p>
           <a:p>
             <a:pPr marL="342900" indent="-342900">
               <a:spcAft>
-                <a:spcPts val="1200"/>
+                <a:spcPts val="1000"/>
               </a:spcAft>
               <a:buSzPct val="100000"/>
               <a:buChar char="•"/>
             </a:pPr>
             <a:r>
-              <a:rPr lang="en-US" sz="1600" dirty="0">
+              <a:rPr lang="en-US" sz="1500" dirty="0">
                 <a:solidFill>
                   <a:schemeClr val="tx1"/>
                 </a:solidFill>
               </a:rPr>
-              <a:t>Ano-horizonte da simulação</a:t>
-            </a:r>
-            <a:endParaRPr lang="en-US" sz="1600" dirty="0"/>
+              <a:t>Preço de valoração: PLD ou preço do contrato</a:t>
+            </a:r>
+            <a:endParaRPr lang="en-US" sz="1500" dirty="0"/>
           </a:p>
           <a:p>
             <a:pPr marL="342900" indent="-342900">
               <a:spcAft>
-                <a:spcPts val="1200"/>
+                <a:spcPts val="1000"/>
               </a:spcAft>
               <a:buSzPct val="100000"/>
               <a:buChar char="•"/>
             </a:pPr>
             <a:r>
-              <a:rPr lang="en-US" sz="1600" dirty="0">
+              <a:rPr lang="en-US" sz="1500" dirty="0">
                 <a:solidFill>
                   <a:schemeClr val="tx1"/>
                 </a:solidFill>
               </a:rPr>
-              <a:t>Eficiência de ida e volta (ref.: mínimo de 85% no LRCAP)</a:t>
-            </a:r>
-            <a:endParaRPr lang="en-US" sz="1600" dirty="0"/>
+              <a:t>Regra de rateio (R1 a R3) e patamar P1 a P4 de cada fonte</a:t>
+            </a:r>
+            <a:endParaRPr lang="en-US" sz="1500" dirty="0"/>
           </a:p>
           <a:p>
             <a:pPr marL="342900" indent="-342900">
               <a:spcAft>
-                <a:spcPts val="1200"/>
+                <a:spcPts val="1000"/>
               </a:spcAft>
               <a:buSzPct val="100000"/>
               <a:buChar char="•"/>
             </a:pPr>
             <a:r>
-              <a:rPr lang="en-US" sz="1600" dirty="0">
+              <a:rPr lang="en-US" sz="1500" dirty="0">
                 <a:solidFill>
                   <a:schemeClr val="tx1"/>
                 </a:solidFill>
               </a:rPr>
-              <a:t>Valores dos cenários de MMGD (ref.: faixa do PDE 2034)</a:t>
-            </a:r>
-            <a:endParaRPr lang="en-US" sz="1600" dirty="0"/>
+              <a:t>Cortes sem ressarcimento; Lei 15.269 como sensibilidade</a:t>
+            </a:r>
+            <a:endParaRPr lang="en-US" sz="1500" dirty="0"/>
           </a:p>
           <a:p>
             <a:pPr marL="342900" indent="-342900">
               <a:spcAft>
-                <a:spcPts val="1200"/>
+                <a:spcPts val="1000"/>
               </a:spcAft>
               <a:buSzPct val="100000"/>
               <a:buChar char="•"/>
             </a:pPr>
             <a:r>
-              <a:rPr lang="en-US" sz="1600" dirty="0">
+              <a:rPr lang="en-US" sz="1500" dirty="0">
                 <a:solidFill>
                   <a:schemeClr val="tx1"/>
                 </a:solidFill>
               </a:rPr>
-              <a:t>Regra de rateio dos encargos (cenários R1 a R3)</a:t>
-            </a:r>
-            <a:endParaRPr lang="en-US" sz="1600" dirty="0"/>
+              <a:t>Ano-horizonte e níveis de MMGD (ref.: PDE 2034)</a:t>
+            </a:r>
+            <a:endParaRPr lang="en-US" sz="1500" dirty="0"/>
           </a:p>
         </p:txBody>
       </p:sp>
@@ -34999,7 +36589,7 @@
         <p:spPr>
           <a:xfrm>
             <a:off x="8119872" y="1463040"/>
-            <a:ext cx="3520440" cy="4114800"/>
+            <a:ext cx="3520440" cy="4663440"/>
           </a:xfrm>
           <a:prstGeom prst="roundRect">
             <a:avLst>
@@ -35120,8 +36710,8 @@
         </p:nvSpPr>
         <p:spPr>
           <a:xfrm>
-            <a:off x="8394192" y="2560320"/>
-            <a:ext cx="3017520" cy="3383280"/>
+            <a:off x="8394192" y="2514600"/>
+            <a:ext cx="3017520" cy="3474720"/>
           </a:xfrm>
           <a:prstGeom prst="rect">
             <a:avLst/>
@@ -35135,74 +36725,92 @@
           <a:p>
             <a:pPr marL="342900" indent="-342900">
               <a:spcAft>
-                <a:spcPts val="1200"/>
+                <a:spcPts val="1000"/>
               </a:spcAft>
               <a:buSzPct val="100000"/>
               <a:buChar char="•"/>
             </a:pPr>
             <a:r>
-              <a:rPr lang="en-US" sz="1600" dirty="0">
+              <a:rPr lang="en-US" sz="1500" dirty="0">
                 <a:solidFill>
                   <a:schemeClr val="tx1"/>
                 </a:solidFill>
               </a:rPr>
-              <a:t>Dimensionamento ótimo e localização por barra</a:t>
-            </a:r>
-            <a:endParaRPr lang="en-US" sz="1600" dirty="0"/>
+              <a:t>Térmicas e biomassa: efeitos apenas reportados</a:t>
+            </a:r>
+            <a:endParaRPr lang="en-US" sz="1500" dirty="0"/>
           </a:p>
           <a:p>
             <a:pPr marL="342900" indent="-342900">
               <a:spcAft>
-                <a:spcPts val="1200"/>
+                <a:spcPts val="1000"/>
               </a:spcAft>
               <a:buSzPct val="100000"/>
               <a:buChar char="•"/>
             </a:pPr>
             <a:r>
-              <a:rPr lang="en-US" sz="1600" dirty="0">
+              <a:rPr lang="en-US" sz="1500" dirty="0">
                 <a:solidFill>
                   <a:schemeClr val="tx1"/>
                 </a:solidFill>
               </a:rPr>
-              <a:t>Baterias atrás do medidor</a:t>
-            </a:r>
-            <a:endParaRPr lang="en-US" sz="1600" dirty="0"/>
+              <a:t>MMGD, que fica fora do rateio</a:t>
+            </a:r>
+            <a:endParaRPr lang="en-US" sz="1500" dirty="0"/>
           </a:p>
           <a:p>
             <a:pPr marL="342900" indent="-342900">
               <a:spcAft>
-                <a:spcPts val="1200"/>
+                <a:spcPts val="1000"/>
               </a:spcAft>
               <a:buSzPct val="100000"/>
               <a:buChar char="•"/>
             </a:pPr>
             <a:r>
-              <a:rPr lang="en-US" sz="1600" dirty="0">
+              <a:rPr lang="en-US" sz="1500" dirty="0">
                 <a:solidFill>
                   <a:schemeClr val="tx1"/>
                 </a:solidFill>
               </a:rPr>
-              <a:t>Efeitos sobre a tarifa do consumidor final</a:t>
-            </a:r>
-            <a:endParaRPr lang="en-US" sz="1600" dirty="0"/>
+              <a:t>Efeitos sobre a tarifa do consumidor</a:t>
+            </a:r>
+            <a:endParaRPr lang="en-US" sz="1500" dirty="0"/>
           </a:p>
           <a:p>
             <a:pPr marL="342900" indent="-342900">
               <a:spcAft>
-                <a:spcPts val="1200"/>
+                <a:spcPts val="1000"/>
               </a:spcAft>
               <a:buSzPct val="100000"/>
               <a:buChar char="•"/>
             </a:pPr>
             <a:r>
-              <a:rPr lang="en-US" sz="1600" dirty="0">
+              <a:rPr lang="en-US" sz="1500" dirty="0">
                 <a:solidFill>
                   <a:schemeClr val="tx1"/>
                 </a:solidFill>
               </a:rPr>
-              <a:t>Outras tecnologias de armazenamento</a:t>
-            </a:r>
-            <a:endParaRPr lang="en-US" sz="1600" dirty="0"/>
+              <a:t>Dimensionamento ótimo e localização por barra</a:t>
+            </a:r>
+            <a:endParaRPr lang="en-US" sz="1500" dirty="0"/>
+          </a:p>
+          <a:p>
+            <a:pPr marL="342900" indent="-342900">
+              <a:spcAft>
+                <a:spcPts val="1000"/>
+              </a:spcAft>
+              <a:buSzPct val="100000"/>
+              <a:buChar char="•"/>
+            </a:pPr>
+            <a:r>
+              <a:rPr lang="en-US" sz="1500" dirty="0">
+                <a:solidFill>
+                  <a:schemeClr val="tx1"/>
+                </a:solidFill>
+              </a:rPr>
+              <a:t>Baterias atrás do medidor</a:t>
+            </a:r>
+            <a:endParaRPr lang="en-US" sz="1500" dirty="0"/>
           </a:p>
         </p:txBody>
       </p:sp>
@@ -35236,7 +36844,7 @@
                   <a:schemeClr val="tx2"/>
                 </a:solidFill>
               </a:rPr>
-              <a:t>Fonte de referência: requisitos técnicos do LRCAP 2026 (ePowerBay, 2026) e EPE, PDE 2034, Caderno MMGD e Baterias (2024).</a:t>
+              <a:t>Referências: requisitos do LRCAP 2026 (ePowerBay, 2026); EPE, PDE 2034, Caderno MMGD e Baterias (2024); NT 101/2026 da ANEEL.</a:t>
             </a:r>
             <a:endParaRPr lang="en-US" sz="1000" dirty="0"/>
           </a:p>

--- a/Baterias_SIN_Economia_Setor_Eletrico_I.pptx
+++ b/Baterias_SIN_Economia_Setor_Eletrico_I.pptx
@@ -131,12 +131,12 @@
   <p:extLst>
     <p:ext uri="{521415D9-36F7-43E2-AB2F-B90AF26B5E84}">
       <p14:sectionLst xmlns:p14="http://schemas.microsoft.com/office/powerpoint/2010/main">
-        <p14:section name="Abertura" id="{66bbd201-a693-5c9e-804d-3811eec1350e}">
+        <p14:section name="Abertura" id="{22d14a1a-359c-07cc-bf6c-f406d29c2f44}">
           <p14:sldIdLst>
             <p14:sldId id="256"/>
           </p14:sldIdLst>
         </p14:section>
-        <p14:section name="Introdução" id="{b961fbde-c4eb-606c-e181-03b366a58069}">
+        <p14:section name="Introdução" id="{ff90a364-07fa-5700-7b24-b3974b2bbdce}">
           <p14:sldIdLst>
             <p14:sldId id="257"/>
             <p14:sldId id="258"/>
@@ -145,13 +145,13 @@
             <p14:sldId id="261"/>
           </p14:sldIdLst>
         </p14:section>
-        <p14:section name="Objetivos" id="{885a9312-f992-282f-d21d-025d68800ca3}">
+        <p14:section name="Objetivos" id="{b145d3b4-46f3-d0bf-b640-bbd0af6ad0a6}">
           <p14:sldIdLst>
             <p14:sldId id="262"/>
             <p14:sldId id="263"/>
           </p14:sldIdLst>
         </p14:section>
-        <p14:section name="Método" id="{80bd6b9b-a47a-ce54-e344-70ae784eb013}">
+        <p14:section name="Método" id="{4a15fffa-de2f-08e4-f8e5-cb8b23b29b9f}">
           <p14:sldIdLst>
             <p14:sldId id="264"/>
             <p14:sldId id="265"/>
@@ -159,13 +159,13 @@
             <p14:sldId id="267"/>
           </p14:sldIdLst>
         </p14:section>
-        <p14:section name="Análise" id="{501ec1aa-cd57-8916-9117-6eef78707400}">
+        <p14:section name="Análise" id="{7055d899-ff08-dc86-96d3-4e366a1d16da}">
           <p14:sldIdLst>
             <p14:sldId id="268"/>
             <p14:sldId id="269"/>
           </p14:sldIdLst>
         </p14:section>
-        <p14:section name="Encargos e benefícios" id="{eb95b551-7e7e-af02-0739-3141f371b355}">
+        <p14:section name="Encargos e benefícios" id="{c464c56f-cfd6-fb6b-75cc-b4faacc37738}">
           <p14:sldIdLst>
             <p14:sldId id="270"/>
             <p14:sldId id="271"/>
@@ -178,7 +178,7 @@
             <p14:sldId id="278"/>
           </p14:sldIdLst>
         </p14:section>
-        <p14:section name="Fechamento" id="{66e1ebd0-5d08-8f76-c89c-abcefa339038}">
+        <p14:section name="Fechamento" id="{452ce5d8-ce11-c07b-94de-08d60050caf0}">
           <p14:sldIdLst>
             <p14:sldId id="279"/>
             <p14:sldId id="280"/>
@@ -219,7 +219,7 @@
                 </a:solidFill>
                 <a:latin typeface="+mn-lt"/>
               </a:rPr>
-              <a:t>Perfil diário ilustrativo (índice, sem dados reais)</a:t>
+              <a:t>SIN, domingo 10/08/2025 (GW por hora)</a:t>
             </a:r>
           </a:p>
         </c:rich>
@@ -390,76 +390,76 @@
                 <c:formatCode>General</c:formatCode>
                 <c:ptCount val="24"/>
                 <c:pt idx="0">
-                  <c:v>52</c:v>
+                  <c:v>65.13</c:v>
                 </c:pt>
                 <c:pt idx="1">
-                  <c:v>52</c:v>
+                  <c:v>61.87</c:v>
                 </c:pt>
                 <c:pt idx="2">
-                  <c:v>52</c:v>
+                  <c:v>59.65</c:v>
                 </c:pt>
                 <c:pt idx="3">
-                  <c:v>52</c:v>
+                  <c:v>58.23</c:v>
                 </c:pt>
                 <c:pt idx="4">
-                  <c:v>52</c:v>
+                  <c:v>57.47</c:v>
                 </c:pt>
                 <c:pt idx="5">
-                  <c:v>52.1</c:v>
+                  <c:v>56.94</c:v>
                 </c:pt>
                 <c:pt idx="6">
-                  <c:v>52.3</c:v>
+                  <c:v>56.4</c:v>
                 </c:pt>
                 <c:pt idx="7">
-                  <c:v>52.7</c:v>
+                  <c:v>56.72</c:v>
                 </c:pt>
                 <c:pt idx="8">
-                  <c:v>53.8</c:v>
+                  <c:v>57.24</c:v>
                 </c:pt>
                 <c:pt idx="9">
-                  <c:v>55.8</c:v>
+                  <c:v>58.13</c:v>
                 </c:pt>
                 <c:pt idx="10">
-                  <c:v>58.7</c:v>
+                  <c:v>59.73</c:v>
                 </c:pt>
                 <c:pt idx="11">
-                  <c:v>62.1</c:v>
+                  <c:v>60.58</c:v>
                 </c:pt>
                 <c:pt idx="12">
-                  <c:v>64.9</c:v>
+                  <c:v>58.98</c:v>
                 </c:pt>
                 <c:pt idx="13">
-                  <c:v>66</c:v>
+                  <c:v>56.55</c:v>
                 </c:pt>
                 <c:pt idx="14">
-                  <c:v>64.9</c:v>
+                  <c:v>55.13</c:v>
                 </c:pt>
                 <c:pt idx="15">
-                  <c:v>62.5</c:v>
+                  <c:v>56.07</c:v>
                 </c:pt>
                 <c:pt idx="16">
-                  <c:v>60.6</c:v>
+                  <c:v>60.32</c:v>
                 </c:pt>
                 <c:pt idx="17">
-                  <c:v>62.4</c:v>
+                  <c:v>68.72</c:v>
                 </c:pt>
                 <c:pt idx="18">
-                  <c:v>68.9</c:v>
+                  <c:v>78.06</c:v>
                 </c:pt>
                 <c:pt idx="19">
-                  <c:v>75.5</c:v>
+                  <c:v>78.2</c:v>
                 </c:pt>
                 <c:pt idx="20">
-                  <c:v>75</c:v>
+                  <c:v>76.48</c:v>
                 </c:pt>
                 <c:pt idx="21">
-                  <c:v>67.2</c:v>
+                  <c:v>74.89</c:v>
                 </c:pt>
                 <c:pt idx="22">
-                  <c:v>58.6</c:v>
+                  <c:v>71.63</c:v>
                 </c:pt>
                 <c:pt idx="23">
-                  <c:v>53.9</c:v>
+                  <c:v>67.38</c:v>
                 </c:pt>
               </c:numCache>
             </c:numRef>
@@ -475,7 +475,7 @@
               <c:strCache>
                 <c:ptCount val="1"/>
                 <c:pt idx="0">
-                  <c:v>MMGD solar</c:v>
+                  <c:v>MMGD</c:v>
                 </c:pt>
               </c:strCache>
             </c:strRef>
@@ -639,46 +639,46 @@
                   <c:v>0</c:v>
                 </c:pt>
                 <c:pt idx="5">
-                  <c:v>0</c:v>
+                  <c:v>0.11</c:v>
                 </c:pt>
                 <c:pt idx="6">
-                  <c:v>0</c:v>
+                  <c:v>1.49</c:v>
                 </c:pt>
                 <c:pt idx="7">
-                  <c:v>3.4</c:v>
+                  <c:v>6.02</c:v>
                 </c:pt>
                 <c:pt idx="8">
-                  <c:v>9.2</c:v>
+                  <c:v>12.12</c:v>
                 </c:pt>
                 <c:pt idx="9">
-                  <c:v>15.5</c:v>
+                  <c:v>17.51</c:v>
                 </c:pt>
                 <c:pt idx="10">
-                  <c:v>21</c:v>
+                  <c:v>21.45</c:v>
                 </c:pt>
                 <c:pt idx="11">
-                  <c:v>24.7</c:v>
+                  <c:v>23.35</c:v>
                 </c:pt>
                 <c:pt idx="12">
-                  <c:v>26</c:v>
+                  <c:v>23.22</c:v>
                 </c:pt>
                 <c:pt idx="13">
-                  <c:v>24.7</c:v>
+                  <c:v>21.08</c:v>
                 </c:pt>
                 <c:pt idx="14">
-                  <c:v>21</c:v>
+                  <c:v>17.22</c:v>
                 </c:pt>
                 <c:pt idx="15">
-                  <c:v>15.5</c:v>
+                  <c:v>11.97</c:v>
                 </c:pt>
                 <c:pt idx="16">
-                  <c:v>9.2</c:v>
+                  <c:v>6</c:v>
                 </c:pt>
                 <c:pt idx="17">
-                  <c:v>3.4</c:v>
+                  <c:v>1.32</c:v>
                 </c:pt>
                 <c:pt idx="18">
-                  <c:v>0</c:v>
+                  <c:v>0.06</c:v>
                 </c:pt>
                 <c:pt idx="19">
                   <c:v>0</c:v>
@@ -709,7 +709,7 @@
               <c:strCache>
                 <c:ptCount val="1"/>
                 <c:pt idx="0">
-                  <c:v>Carga líquida</c:v>
+                  <c:v>Carga líquida (bruta − MMGD)</c:v>
                 </c:pt>
               </c:strCache>
             </c:strRef>
@@ -858,76 +858,76 @@
                 <c:formatCode>General</c:formatCode>
                 <c:ptCount val="24"/>
                 <c:pt idx="0">
-                  <c:v>52</c:v>
+                  <c:v>65.13</c:v>
                 </c:pt>
                 <c:pt idx="1">
-                  <c:v>52</c:v>
+                  <c:v>61.87</c:v>
                 </c:pt>
                 <c:pt idx="2">
-                  <c:v>52</c:v>
+                  <c:v>59.65</c:v>
                 </c:pt>
                 <c:pt idx="3">
-                  <c:v>52</c:v>
+                  <c:v>58.23</c:v>
                 </c:pt>
                 <c:pt idx="4">
-                  <c:v>52</c:v>
+                  <c:v>57.47</c:v>
                 </c:pt>
                 <c:pt idx="5">
-                  <c:v>52.1</c:v>
+                  <c:v>56.82</c:v>
                 </c:pt>
                 <c:pt idx="6">
-                  <c:v>52.3</c:v>
+                  <c:v>54.91</c:v>
                 </c:pt>
                 <c:pt idx="7">
-                  <c:v>49.3</c:v>
+                  <c:v>50.7</c:v>
                 </c:pt>
                 <c:pt idx="8">
-                  <c:v>44.6</c:v>
+                  <c:v>45.12</c:v>
                 </c:pt>
                 <c:pt idx="9">
-                  <c:v>40.3</c:v>
+                  <c:v>40.62</c:v>
                 </c:pt>
                 <c:pt idx="10">
-                  <c:v>37.8</c:v>
+                  <c:v>38.29</c:v>
                 </c:pt>
                 <c:pt idx="11">
-                  <c:v>37.4</c:v>
+                  <c:v>37.23</c:v>
                 </c:pt>
                 <c:pt idx="12">
-                  <c:v>38.9</c:v>
+                  <c:v>35.76</c:v>
                 </c:pt>
                 <c:pt idx="13">
-                  <c:v>41.3</c:v>
+                  <c:v>35.47</c:v>
                 </c:pt>
                 <c:pt idx="14">
-                  <c:v>44</c:v>
+                  <c:v>37.91</c:v>
                 </c:pt>
                 <c:pt idx="15">
-                  <c:v>47</c:v>
+                  <c:v>44.11</c:v>
                 </c:pt>
                 <c:pt idx="16">
-                  <c:v>51.4</c:v>
+                  <c:v>54.32</c:v>
                 </c:pt>
                 <c:pt idx="17">
-                  <c:v>59</c:v>
+                  <c:v>67.4</c:v>
                 </c:pt>
                 <c:pt idx="18">
-                  <c:v>68.9</c:v>
+                  <c:v>78</c:v>
                 </c:pt>
                 <c:pt idx="19">
-                  <c:v>75.5</c:v>
+                  <c:v>78.2</c:v>
                 </c:pt>
                 <c:pt idx="20">
-                  <c:v>75</c:v>
+                  <c:v>76.48</c:v>
                 </c:pt>
                 <c:pt idx="21">
-                  <c:v>67.2</c:v>
+                  <c:v>74.89</c:v>
                 </c:pt>
                 <c:pt idx="22">
-                  <c:v>58.6</c:v>
+                  <c:v>71.63</c:v>
                 </c:pt>
                 <c:pt idx="23">
-                  <c:v>53.9</c:v>
+                  <c:v>67.38</c:v>
                 </c:pt>
               </c:numCache>
             </c:numRef>
@@ -1011,7 +1011,7 @@
           <c:max val="90"/>
           <c:min val="0"/>
         </c:scaling>
-        <c:delete val="1"/>
+        <c:delete val="0"/>
         <c:axPos val="l"/>
         <c:majorGridlines>
           <c:spPr>
@@ -1044,9 +1044,9 @@
             <a:pPr>
               <a:defRPr sz="1200" b="0" i="0" u="none" strike="noStrike">
                 <a:solidFill>
-                  <a:srgbClr val="000000"/>
-                </a:solidFill>
-                <a:latin typeface="Arial"/>
+                  <a:srgbClr val="5B6B80"/>
+                </a:solidFill>
+                <a:latin typeface="+mn-lt"/>
               </a:defRPr>
             </a:pPr>
             <a:endParaRPr lang="en-US"/>
@@ -1055,6 +1055,7 @@
         <c:crossAx val="2094734554"/>
         <c:crosses val="autoZero"/>
         <c:crossBetween val="between"/>
+        <c:majorUnit val="15"/>
       </c:valAx>
       <c:spPr>
         <a:noFill/>
@@ -3913,7 +3914,7 @@
           <a:p>
             <a:r>
               <a:rPr lang="en-US" dirty="0"/>
-              <a:t>A curva do pato foi popularizada pelo operador da Califórnia (CAISO) em 2013. A carga líquida é a carga bruta menos a geração variável: a EPE define a carga líquida como a carga bruta descontada da MMGD fotovoltaica e de outros geradores não representados, e a versão usada pelo setor também desconta eólica e solar centralizada. O gráfico é um perfil ilustrativo, calculado com funções suaves, e não usa dados reais. A MMGD faz a carga líquida afundar ao meio-dia (barriga) e depois subir rápido no fim da tarde (pescoço). Hidrelétricas e térmicas respondem pela rampa; o Ipea cita 82,7% e 17,3% em agosto de 2024. A projeção do ONS para 2029 indica rampas acima de 40 GW em poucas horas.</a:t>
+              <a:t>Curva real do SIN em 10/08/2025, um domingo e o dia do episódio de excedente citado pelo setor. Os dados são os dados abertos do ONS em base horária: a carga vem do balanço de energia nos subsistemas (linha SIN), e a MMGD é a modalidade 'Pequenas Usinas (MMGD)' do conjunto de geração por usina, que é uma estimativa do ONS. A soma de MMGD e solar centralizada reproduz a geração solar do balanço, e a geração total reproduz a carga, o que indica que a carga do ONS é a carga bruta, incluindo a parcela atendida pela MMGD. Carga líquida = carga bruta menos MMGD, que é a definição da EPE; a versão ampla também desconta eólica e solar centralizada. Resultados do dia: MMGD de 23,2 GW às 12h, equivalente a 39,4% da carga de 59,0 GW; carga líquida mínima de 35,5 GW às 13h e máxima de 78,2 GW às 19h; rampa de 33,9 GW entre 15h e 18h. A solar centralizada gerou 0,5 GW às 12h, contra 7,3 GW na média de agosto. A média de agosto/2025 (31 dias) mostra o mesmo formato, com carga líquida de 51,9 GW às 12h e 87,8 GW às 18h.</a:t>
             </a:r>
             <a:endParaRPr lang="en-US" dirty="0"/>
           </a:p>
@@ -29964,26 +29965,7 @@
                   <a:schemeClr val="tx1"/>
                 </a:solidFill>
               </a:rPr>
-              <a:t>Ipea. Estudo sobre a rampa da carga líquida e as renováveis variáveis no SIN (repositório Ipea).</a:t>
-            </a:r>
-            <a:endParaRPr lang="en-US" sz="1200" dirty="0"/>
-          </a:p>
-          <a:p>
-            <a:pPr marL="342900" indent="-342900">
-              <a:spcAft>
-                <a:spcPts val="600"/>
-              </a:spcAft>
-              <a:buSzPct val="100000"/>
-              <a:buFont typeface="+mj-lt"/>
-              <a:buAutoNum type="arabicPeriod" startAt="13"/>
-            </a:pPr>
-            <a:r>
-              <a:rPr lang="en-US" sz="1200" dirty="0">
-                <a:solidFill>
-                  <a:schemeClr val="tx1"/>
-                </a:solidFill>
-              </a:rPr>
-              <a:t>Abraceel (2023). Contribuição à revisão dos PR para inclusão da MMGD na previsão de carga.</a:t>
+              <a:t>ONS (2026). Dados abertos: balanço de energia nos subsistemas e geração por usina, base horária, 2025.</a:t>
             </a:r>
             <a:endParaRPr lang="en-US" sz="1200" dirty="0"/>
           </a:p>
@@ -31733,7 +31715,7 @@
                   <a:schemeClr val="tx1"/>
                 </a:solidFill>
               </a:rPr>
-              <a:t>A curva do pato: carga bruta, MMGD e carga líquida</a:t>
+              <a:t>A curva do pato no SIN: domingo, 10/08/2025</a:t>
             </a:r>
             <a:endParaRPr lang="en-US" sz="3200" dirty="0"/>
           </a:p>
@@ -31748,7 +31730,7 @@
         <p:spPr>
           <a:xfrm>
             <a:off x="548640" y="1371600"/>
-            <a:ext cx="6400800" cy="4023360"/>
+            <a:ext cx="6675120" cy="4023360"/>
           </a:xfrm>
           <a:prstGeom prst="roundRect">
             <a:avLst>
@@ -31781,7 +31763,7 @@
         </p:nvGraphicFramePr>
         <p:xfrm>
           <a:off x="685800" y="1463040"/>
-          <a:ext cx="6126480" cy="3291840"/>
+          <a:ext cx="6400800" cy="3840480"/>
         </p:xfrm>
         <a:graphic xmlns:a="http://schemas.openxmlformats.org/drawingml/2006/main">
           <a:graphicData uri="http://schemas.openxmlformats.org/drawingml/2006/chart">
@@ -31791,140 +31773,14 @@
       </p:graphicFrame>
       <p:sp>
         <p:nvSpPr>
-          <p:cNvPr id="5" name="Duck callout 1"/>
+          <p:cNvPr id="5" name="Duck stat 1"/>
           <p:cNvSpPr/>
           <p:nvPr/>
         </p:nvSpPr>
         <p:spPr>
           <a:xfrm>
-            <a:off x="822960" y="4846320"/>
-            <a:ext cx="2834640" cy="384048"/>
-          </a:xfrm>
-          <a:prstGeom prst="roundRect">
-            <a:avLst>
-              <a:gd name="adj" fmla="val 23810"/>
-            </a:avLst>
-          </a:prstGeom>
-          <a:solidFill>
-            <a:schemeClr val="accent4"/>
-          </a:solidFill>
-          <a:ln w="12700">
-            <a:solidFill>
-              <a:schemeClr val="accent4"/>
-            </a:solidFill>
-            <a:prstDash val="solid"/>
-          </a:ln>
-        </p:spPr>
-      </p:sp>
-      <p:sp>
-        <p:nvSpPr>
-          <p:cNvPr id="6" name="Text 3"/>
-          <p:cNvSpPr txBox="1"/>
-          <p:nvPr/>
-        </p:nvSpPr>
-        <p:spPr>
-          <a:xfrm>
-            <a:off x="822960" y="4846320"/>
-            <a:ext cx="2834640" cy="384048"/>
-          </a:xfrm>
-          <a:prstGeom prst="rect">
-            <a:avLst/>
-          </a:prstGeom>
-          <a:noFill/>
-          <a:ln/>
-        </p:spPr>
-        <p:txBody>
-          <a:bodyPr wrap="square" lIns="0" tIns="0" rIns="0" bIns="0" rtlCol="0" anchor="ctr"/>
-          <a:lstStyle/>
-          <a:p>
-            <a:pPr algn="ctr" indent="0" marL="0">
-              <a:buNone/>
-            </a:pPr>
-            <a:r>
-              <a:rPr lang="en-US" sz="1300" b="1" dirty="0">
-                <a:solidFill>
-                  <a:schemeClr val="bg1"/>
-                </a:solidFill>
-              </a:rPr>
-              <a:t>Barriga: excesso ao meio-dia</a:t>
-            </a:r>
-            <a:endParaRPr lang="en-US" sz="1300" dirty="0"/>
-          </a:p>
-        </p:txBody>
-      </p:sp>
-      <p:sp>
-        <p:nvSpPr>
-          <p:cNvPr id="7" name="Duck callout 2"/>
-          <p:cNvSpPr/>
-          <p:nvPr/>
-        </p:nvSpPr>
-        <p:spPr>
-          <a:xfrm>
-            <a:off x="3886200" y="4846320"/>
-            <a:ext cx="2834640" cy="384048"/>
-          </a:xfrm>
-          <a:prstGeom prst="roundRect">
-            <a:avLst>
-              <a:gd name="adj" fmla="val 23810"/>
-            </a:avLst>
-          </a:prstGeom>
-          <a:solidFill>
-            <a:schemeClr val="accent1"/>
-          </a:solidFill>
-          <a:ln w="12700">
-            <a:solidFill>
-              <a:schemeClr val="accent1"/>
-            </a:solidFill>
-            <a:prstDash val="solid"/>
-          </a:ln>
-        </p:spPr>
-      </p:sp>
-      <p:sp>
-        <p:nvSpPr>
-          <p:cNvPr id="8" name="Text 5"/>
-          <p:cNvSpPr txBox="1"/>
-          <p:nvPr/>
-        </p:nvSpPr>
-        <p:spPr>
-          <a:xfrm>
-            <a:off x="3886200" y="4846320"/>
-            <a:ext cx="2834640" cy="384048"/>
-          </a:xfrm>
-          <a:prstGeom prst="rect">
-            <a:avLst/>
-          </a:prstGeom>
-          <a:noFill/>
-          <a:ln/>
-        </p:spPr>
-        <p:txBody>
-          <a:bodyPr wrap="square" lIns="0" tIns="0" rIns="0" bIns="0" rtlCol="0" anchor="ctr"/>
-          <a:lstStyle/>
-          <a:p>
-            <a:pPr algn="ctr" indent="0" marL="0">
-              <a:buNone/>
-            </a:pPr>
-            <a:r>
-              <a:rPr lang="en-US" sz="1300" b="1" dirty="0">
-                <a:solidFill>
-                  <a:schemeClr val="tx1"/>
-                </a:solidFill>
-              </a:rPr>
-              <a:t>Pescoço: rampa no fim da tarde</a:t>
-            </a:r>
-            <a:endParaRPr lang="en-US" sz="1300" dirty="0"/>
-          </a:p>
-        </p:txBody>
-      </p:sp>
-      <p:sp>
-        <p:nvSpPr>
-          <p:cNvPr id="9" name="Definition 1"/>
-          <p:cNvSpPr/>
-          <p:nvPr/>
-        </p:nvSpPr>
-        <p:spPr>
-          <a:xfrm>
-            <a:off x="7223760" y="1371600"/>
-            <a:ext cx="4419295" cy="1234440"/>
+            <a:off x="7498080" y="1371600"/>
+            <a:ext cx="4144975" cy="1234440"/>
           </a:xfrm>
           <a:prstGeom prst="roundRect">
             <a:avLst>
@@ -31951,63 +31807,41 @@
       </p:sp>
       <p:sp>
         <p:nvSpPr>
-          <p:cNvPr id="10" name="Icon circle"/>
+          <p:cNvPr id="6" name="Duck stat tag 1"/>
           <p:cNvSpPr/>
           <p:nvPr/>
         </p:nvSpPr>
         <p:spPr>
           <a:xfrm>
-            <a:off x="7452360" y="1691640"/>
-            <a:ext cx="548640" cy="548640"/>
-          </a:xfrm>
-          <a:prstGeom prst="ellipse">
-            <a:avLst/>
+            <a:off x="7680960" y="1600200"/>
+            <a:ext cx="1417320" cy="777240"/>
+          </a:xfrm>
+          <a:prstGeom prst="roundRect">
+            <a:avLst>
+              <a:gd name="adj" fmla="val 11765"/>
+            </a:avLst>
           </a:prstGeom>
           <a:solidFill>
-            <a:schemeClr val="accent3"/>
+            <a:schemeClr val="accent1"/>
           </a:solidFill>
           <a:ln w="12700">
             <a:solidFill>
-              <a:schemeClr val="accent3"/>
+              <a:schemeClr val="accent1"/>
             </a:solidFill>
             <a:prstDash val="solid"/>
           </a:ln>
         </p:spPr>
       </p:sp>
-      <p:pic>
-        <p:nvPicPr>
-          <p:cNvPr id="11" name="Image 0" descr="FaBolt">    </p:cNvPr>
-          <p:cNvPicPr>
-            <a:picLocks noChangeAspect="1"/>
-          </p:cNvPicPr>
-          <p:nvPr/>
-        </p:nvPicPr>
-        <p:blipFill>
-          <a:blip r:embed="rId2"/>
-          <a:stretch>
-            <a:fillRect/>
-          </a:stretch>
-        </p:blipFill>
-        <p:spPr>
-          <a:xfrm>
-            <a:off x="7589520" y="1828800"/>
-            <a:ext cx="274320" cy="274320"/>
-          </a:xfrm>
-          <a:prstGeom prst="rect">
-            <a:avLst/>
-          </a:prstGeom>
-        </p:spPr>
-      </p:pic>
-      <p:sp>
-        <p:nvSpPr>
-          <p:cNvPr id="12" name="Text 8"/>
+      <p:sp>
+        <p:nvSpPr>
+          <p:cNvPr id="7" name="Text 4"/>
           <p:cNvSpPr txBox="1"/>
           <p:nvPr/>
         </p:nvSpPr>
         <p:spPr>
           <a:xfrm>
-            <a:off x="8229600" y="1481328"/>
-            <a:ext cx="3230575" cy="365760"/>
+            <a:off x="7680960" y="1600200"/>
+            <a:ext cx="1417320" cy="777240"/>
           </a:xfrm>
           <a:prstGeom prst="rect">
             <a:avLst/>
@@ -32016,14 +31850,16 @@
           <a:ln/>
         </p:spPr>
         <p:txBody>
-          <a:bodyPr wrap="square" lIns="0" tIns="0" rIns="0" bIns="0" rtlCol="0" anchor="ctr"/>
+          <a:bodyPr wrap="square" lIns="0" tIns="0" rIns="0" bIns="0" rtlCol="0" anchor="ctr">
+            <a:normAutofit/>
+          </a:bodyPr>
           <a:lstStyle/>
           <a:p>
-            <a:pPr indent="0" marL="0">
+            <a:pPr algn="ctr" indent="0" marL="0">
               <a:buNone/>
             </a:pPr>
             <a:r>
-              <a:rPr lang="en-US" sz="1600" b="1" dirty="0">
+              <a:rPr lang="en-US" sz="2200" b="1" dirty="0">
                 <a:solidFill>
                   <a:schemeClr val="tx1"/>
                 </a:solidFill>
@@ -32031,22 +31867,22 @@
                 <a:ea typeface="Cambria" pitchFamily="34" charset="-122"/>
                 <a:cs typeface="Cambria" pitchFamily="34" charset="-120"/>
               </a:rPr>
-              <a:t>Carga bruta</a:t>
-            </a:r>
-            <a:endParaRPr lang="en-US" sz="1600" dirty="0"/>
-          </a:p>
-        </p:txBody>
-      </p:sp>
-      <p:sp>
-        <p:nvSpPr>
-          <p:cNvPr id="13" name="Text 9"/>
+              <a:t>39%</a:t>
+            </a:r>
+            <a:endParaRPr lang="en-US" sz="2200" dirty="0"/>
+          </a:p>
+        </p:txBody>
+      </p:sp>
+      <p:sp>
+        <p:nvSpPr>
+          <p:cNvPr id="8" name="Text 5"/>
           <p:cNvSpPr txBox="1"/>
           <p:nvPr/>
         </p:nvSpPr>
         <p:spPr>
           <a:xfrm>
-            <a:off x="8229600" y="1874520"/>
-            <a:ext cx="3230575" cy="685800"/>
+            <a:off x="9281160" y="1463040"/>
+            <a:ext cx="2179015" cy="1051560"/>
           </a:xfrm>
           <a:prstGeom prst="rect">
             <a:avLst/>
@@ -32055,7 +31891,7 @@
           <a:ln/>
         </p:spPr>
         <p:txBody>
-          <a:bodyPr wrap="square" lIns="0" tIns="0" rIns="0" bIns="0" rtlCol="0" anchor="t"/>
+          <a:bodyPr wrap="square" lIns="0" tIns="0" rIns="0" bIns="0" rtlCol="0" anchor="ctr"/>
           <a:lstStyle/>
           <a:p>
             <a:pPr indent="0" marL="0">
@@ -32064,10 +31900,10 @@
             <a:r>
               <a:rPr lang="en-US" sz="1300" dirty="0">
                 <a:solidFill>
-                  <a:schemeClr val="tx2"/>
-                </a:solidFill>
-              </a:rPr>
-              <a:t>Consumo total de potência, inclusive o atendido atrás do medidor.</a:t>
+                  <a:schemeClr val="tx1"/>
+                </a:solidFill>
+              </a:rPr>
+              <a:t>da carga às 12h foi atendida pela MMGD: 23,2 de 59,0 GW.</a:t>
             </a:r>
             <a:endParaRPr lang="en-US" sz="1300" dirty="0"/>
           </a:p>
@@ -32075,14 +31911,14 @@
       </p:sp>
       <p:sp>
         <p:nvSpPr>
-          <p:cNvPr id="14" name="Definition 2"/>
+          <p:cNvPr id="9" name="Duck stat 2"/>
           <p:cNvSpPr/>
           <p:nvPr/>
         </p:nvSpPr>
         <p:spPr>
           <a:xfrm>
-            <a:off x="7223760" y="2743200"/>
-            <a:ext cx="4419295" cy="1234440"/>
+            <a:off x="7498080" y="2743200"/>
+            <a:ext cx="4144975" cy="1234440"/>
           </a:xfrm>
           <a:prstGeom prst="roundRect">
             <a:avLst>
@@ -32109,63 +31945,41 @@
       </p:sp>
       <p:sp>
         <p:nvSpPr>
-          <p:cNvPr id="15" name="Icon circle"/>
+          <p:cNvPr id="10" name="Duck stat tag 2"/>
           <p:cNvSpPr/>
           <p:nvPr/>
         </p:nvSpPr>
         <p:spPr>
           <a:xfrm>
-            <a:off x="7452360" y="3063240"/>
-            <a:ext cx="548640" cy="548640"/>
-          </a:xfrm>
-          <a:prstGeom prst="ellipse">
-            <a:avLst/>
+            <a:off x="7680960" y="2971800"/>
+            <a:ext cx="1417320" cy="777240"/>
+          </a:xfrm>
+          <a:prstGeom prst="roundRect">
+            <a:avLst>
+              <a:gd name="adj" fmla="val 11765"/>
+            </a:avLst>
           </a:prstGeom>
           <a:solidFill>
-            <a:schemeClr val="accent1"/>
+            <a:schemeClr val="accent4"/>
           </a:solidFill>
           <a:ln w="12700">
             <a:solidFill>
-              <a:schemeClr val="accent1"/>
+              <a:schemeClr val="accent4"/>
             </a:solidFill>
             <a:prstDash val="solid"/>
           </a:ln>
         </p:spPr>
       </p:sp>
-      <p:pic>
-        <p:nvPicPr>
-          <p:cNvPr id="16" name="Image 1" descr="FaSolarPanel">    </p:cNvPr>
-          <p:cNvPicPr>
-            <a:picLocks noChangeAspect="1"/>
-          </p:cNvPicPr>
-          <p:nvPr/>
-        </p:nvPicPr>
-        <p:blipFill>
-          <a:blip r:embed="rId3"/>
-          <a:stretch>
-            <a:fillRect/>
-          </a:stretch>
-        </p:blipFill>
-        <p:spPr>
-          <a:xfrm>
-            <a:off x="7589520" y="3200400"/>
-            <a:ext cx="274320" cy="274320"/>
-          </a:xfrm>
-          <a:prstGeom prst="rect">
-            <a:avLst/>
-          </a:prstGeom>
-        </p:spPr>
-      </p:pic>
-      <p:sp>
-        <p:nvSpPr>
-          <p:cNvPr id="17" name="Text 12"/>
+      <p:sp>
+        <p:nvSpPr>
+          <p:cNvPr id="11" name="Text 8"/>
           <p:cNvSpPr txBox="1"/>
           <p:nvPr/>
         </p:nvSpPr>
         <p:spPr>
           <a:xfrm>
-            <a:off x="8229600" y="2852928"/>
-            <a:ext cx="3230575" cy="365760"/>
+            <a:off x="7680960" y="2971800"/>
+            <a:ext cx="1417320" cy="777240"/>
           </a:xfrm>
           <a:prstGeom prst="rect">
             <a:avLst/>
@@ -32174,37 +31988,39 @@
           <a:ln/>
         </p:spPr>
         <p:txBody>
-          <a:bodyPr wrap="square" lIns="0" tIns="0" rIns="0" bIns="0" rtlCol="0" anchor="ctr"/>
+          <a:bodyPr wrap="square" lIns="0" tIns="0" rIns="0" bIns="0" rtlCol="0" anchor="ctr">
+            <a:normAutofit/>
+          </a:bodyPr>
           <a:lstStyle/>
           <a:p>
-            <a:pPr indent="0" marL="0">
+            <a:pPr algn="ctr" indent="0" marL="0">
               <a:buNone/>
             </a:pPr>
             <a:r>
-              <a:rPr lang="en-US" sz="1600" b="1" dirty="0">
-                <a:solidFill>
-                  <a:schemeClr val="tx1"/>
+              <a:rPr lang="en-US" sz="2200" b="1" dirty="0">
+                <a:solidFill>
+                  <a:schemeClr val="bg1"/>
                 </a:solidFill>
                 <a:latin typeface="Cambria" pitchFamily="34" charset="0"/>
                 <a:ea typeface="Cambria" pitchFamily="34" charset="-122"/>
                 <a:cs typeface="Cambria" pitchFamily="34" charset="-120"/>
               </a:rPr>
-              <a:t>MMGD</a:t>
-            </a:r>
-            <a:endParaRPr lang="en-US" sz="1600" dirty="0"/>
-          </a:p>
-        </p:txBody>
-      </p:sp>
-      <p:sp>
-        <p:nvSpPr>
-          <p:cNvPr id="18" name="Text 13"/>
+              <a:t>+34 GW</a:t>
+            </a:r>
+            <a:endParaRPr lang="en-US" sz="2200" dirty="0"/>
+          </a:p>
+        </p:txBody>
+      </p:sp>
+      <p:sp>
+        <p:nvSpPr>
+          <p:cNvPr id="12" name="Text 9"/>
           <p:cNvSpPr txBox="1"/>
           <p:nvPr/>
         </p:nvSpPr>
         <p:spPr>
           <a:xfrm>
-            <a:off x="8229600" y="3246120"/>
-            <a:ext cx="3230575" cy="685800"/>
+            <a:off x="9281160" y="2834640"/>
+            <a:ext cx="2179015" cy="1051560"/>
           </a:xfrm>
           <a:prstGeom prst="rect">
             <a:avLst/>
@@ -32213,7 +32029,7 @@
           <a:ln/>
         </p:spPr>
         <p:txBody>
-          <a:bodyPr wrap="square" lIns="0" tIns="0" rIns="0" bIns="0" rtlCol="0" anchor="t"/>
+          <a:bodyPr wrap="square" lIns="0" tIns="0" rIns="0" bIns="0" rtlCol="0" anchor="ctr"/>
           <a:lstStyle/>
           <a:p>
             <a:pPr indent="0" marL="0">
@@ -32222,10 +32038,10 @@
             <a:r>
               <a:rPr lang="en-US" sz="1300" dirty="0">
                 <a:solidFill>
-                  <a:schemeClr val="tx2"/>
-                </a:solidFill>
-              </a:rPr>
-              <a:t>Solar na rede de distribuição, fora do controle do ONS. Gera no meio do dia.</a:t>
+                  <a:schemeClr val="tx1"/>
+                </a:solidFill>
+              </a:rPr>
+              <a:t>de rampa da carga líquida em 3 h, das 15h às 18h (de 44,1 para 78,0 GW).</a:t>
             </a:r>
             <a:endParaRPr lang="en-US" sz="1300" dirty="0"/>
           </a:p>
@@ -32233,14 +32049,14 @@
       </p:sp>
       <p:sp>
         <p:nvSpPr>
-          <p:cNvPr id="19" name="Definition 3"/>
+          <p:cNvPr id="13" name="Duck stat 3"/>
           <p:cNvSpPr/>
           <p:nvPr/>
         </p:nvSpPr>
         <p:spPr>
           <a:xfrm>
-            <a:off x="7223760" y="4114800"/>
-            <a:ext cx="4419295" cy="1234440"/>
+            <a:off x="7498080" y="4114800"/>
+            <a:ext cx="4144975" cy="1234440"/>
           </a:xfrm>
           <a:prstGeom prst="roundRect">
             <a:avLst>
@@ -32267,63 +32083,41 @@
       </p:sp>
       <p:sp>
         <p:nvSpPr>
-          <p:cNvPr id="20" name="Icon circle"/>
+          <p:cNvPr id="14" name="Duck stat tag 3"/>
           <p:cNvSpPr/>
           <p:nvPr/>
         </p:nvSpPr>
         <p:spPr>
           <a:xfrm>
-            <a:off x="7452360" y="4434840"/>
-            <a:ext cx="548640" cy="548640"/>
-          </a:xfrm>
-          <a:prstGeom prst="ellipse">
-            <a:avLst/>
+            <a:off x="7680960" y="4343400"/>
+            <a:ext cx="1417320" cy="777240"/>
+          </a:xfrm>
+          <a:prstGeom prst="roundRect">
+            <a:avLst>
+              <a:gd name="adj" fmla="val 11765"/>
+            </a:avLst>
           </a:prstGeom>
           <a:solidFill>
-            <a:schemeClr val="accent4"/>
+            <a:schemeClr val="accent3"/>
           </a:solidFill>
           <a:ln w="12700">
             <a:solidFill>
-              <a:schemeClr val="accent4"/>
+              <a:schemeClr val="accent3"/>
             </a:solidFill>
             <a:prstDash val="solid"/>
           </a:ln>
         </p:spPr>
       </p:sp>
-      <p:pic>
-        <p:nvPicPr>
-          <p:cNvPr id="21" name="Image 2" descr="FaChartLine">    </p:cNvPr>
-          <p:cNvPicPr>
-            <a:picLocks noChangeAspect="1"/>
-          </p:cNvPicPr>
-          <p:nvPr/>
-        </p:nvPicPr>
-        <p:blipFill>
-          <a:blip r:embed="rId4"/>
-          <a:stretch>
-            <a:fillRect/>
-          </a:stretch>
-        </p:blipFill>
-        <p:spPr>
-          <a:xfrm>
-            <a:off x="7589520" y="4572000"/>
-            <a:ext cx="274320" cy="274320"/>
-          </a:xfrm>
-          <a:prstGeom prst="rect">
-            <a:avLst/>
-          </a:prstGeom>
-        </p:spPr>
-      </p:pic>
-      <p:sp>
-        <p:nvSpPr>
-          <p:cNvPr id="22" name="Text 16"/>
+      <p:sp>
+        <p:nvSpPr>
+          <p:cNvPr id="15" name="Text 12"/>
           <p:cNvSpPr txBox="1"/>
           <p:nvPr/>
         </p:nvSpPr>
         <p:spPr>
           <a:xfrm>
-            <a:off x="8229600" y="4224528"/>
-            <a:ext cx="3230575" cy="365760"/>
+            <a:off x="7680960" y="4343400"/>
+            <a:ext cx="1417320" cy="777240"/>
           </a:xfrm>
           <a:prstGeom prst="rect">
             <a:avLst/>
@@ -32332,37 +32126,39 @@
           <a:ln/>
         </p:spPr>
         <p:txBody>
-          <a:bodyPr wrap="square" lIns="0" tIns="0" rIns="0" bIns="0" rtlCol="0" anchor="ctr"/>
+          <a:bodyPr wrap="square" lIns="0" tIns="0" rIns="0" bIns="0" rtlCol="0" anchor="ctr">
+            <a:normAutofit/>
+          </a:bodyPr>
           <a:lstStyle/>
           <a:p>
-            <a:pPr indent="0" marL="0">
+            <a:pPr algn="ctr" indent="0" marL="0">
               <a:buNone/>
             </a:pPr>
             <a:r>
-              <a:rPr lang="en-US" sz="1600" b="1" dirty="0">
-                <a:solidFill>
-                  <a:schemeClr val="tx1"/>
+              <a:rPr lang="en-US" sz="2200" b="1" dirty="0">
+                <a:solidFill>
+                  <a:schemeClr val="bg1"/>
                 </a:solidFill>
                 <a:latin typeface="Cambria" pitchFamily="34" charset="0"/>
                 <a:ea typeface="Cambria" pitchFamily="34" charset="-122"/>
                 <a:cs typeface="Cambria" pitchFamily="34" charset="-120"/>
               </a:rPr>
-              <a:t>Carga líquida</a:t>
-            </a:r>
-            <a:endParaRPr lang="en-US" sz="1600" dirty="0"/>
-          </a:p>
-        </p:txBody>
-      </p:sp>
-      <p:sp>
-        <p:nvSpPr>
-          <p:cNvPr id="23" name="Text 17"/>
+              <a:t>0,5 GW</a:t>
+            </a:r>
+            <a:endParaRPr lang="en-US" sz="2200" dirty="0"/>
+          </a:p>
+        </p:txBody>
+      </p:sp>
+      <p:sp>
+        <p:nvSpPr>
+          <p:cNvPr id="16" name="Text 13"/>
           <p:cNvSpPr txBox="1"/>
           <p:nvPr/>
         </p:nvSpPr>
         <p:spPr>
           <a:xfrm>
-            <a:off x="8229600" y="4617720"/>
-            <a:ext cx="3230575" cy="685800"/>
+            <a:off x="9281160" y="4206240"/>
+            <a:ext cx="2179015" cy="1051560"/>
           </a:xfrm>
           <a:prstGeom prst="rect">
             <a:avLst/>
@@ -32371,7 +32167,7 @@
           <a:ln/>
         </p:spPr>
         <p:txBody>
-          <a:bodyPr wrap="square" lIns="0" tIns="0" rIns="0" bIns="0" rtlCol="0" anchor="t"/>
+          <a:bodyPr wrap="square" lIns="0" tIns="0" rIns="0" bIns="0" rtlCol="0" anchor="ctr"/>
           <a:lstStyle/>
           <a:p>
             <a:pPr indent="0" marL="0">
@@ -32380,10 +32176,10 @@
             <a:r>
               <a:rPr lang="en-US" sz="1300" dirty="0">
                 <a:solidFill>
-                  <a:schemeClr val="tx2"/>
-                </a:solidFill>
-              </a:rPr>
-              <a:t>O que sobra para hidrelétricas e térmicas atenderem.</a:t>
+                  <a:schemeClr val="tx1"/>
+                </a:solidFill>
+              </a:rPr>
+              <a:t>geraram as solares centralizadas às 12h, contra 7,3 GW na média de agosto: o excedente forçou cortes.</a:t>
             </a:r>
             <a:endParaRPr lang="en-US" sz="1300" dirty="0"/>
           </a:p>
@@ -32391,18 +32187,18 @@
       </p:sp>
       <p:sp>
         <p:nvSpPr>
-          <p:cNvPr id="24" name="Duck formula banner"/>
+          <p:cNvPr id="17" name="Duck formula banner"/>
           <p:cNvSpPr/>
           <p:nvPr/>
         </p:nvSpPr>
         <p:spPr>
           <a:xfrm>
             <a:off x="548640" y="5532120"/>
-            <a:ext cx="11094415" cy="749808"/>
+            <a:ext cx="11094415" cy="777240"/>
           </a:xfrm>
           <a:prstGeom prst="roundRect">
             <a:avLst>
-              <a:gd name="adj" fmla="val 14634"/>
+              <a:gd name="adj" fmla="val 14118"/>
             </a:avLst>
           </a:prstGeom>
           <a:solidFill>
@@ -32418,14 +32214,14 @@
       </p:sp>
       <p:sp>
         <p:nvSpPr>
-          <p:cNvPr id="25" name="Text 19"/>
+          <p:cNvPr id="18" name="Text 15"/>
           <p:cNvSpPr txBox="1"/>
           <p:nvPr/>
         </p:nvSpPr>
         <p:spPr>
           <a:xfrm>
             <a:off x="822960" y="5532120"/>
-            <a:ext cx="6035040" cy="749808"/>
+            <a:ext cx="10545775" cy="777240"/>
           </a:xfrm>
           <a:prstGeom prst="rect">
             <a:avLst/>
@@ -32441,30 +32237,38 @@
               <a:buNone/>
             </a:pPr>
             <a:r>
-              <a:rPr lang="en-US" sz="1600" b="1" dirty="0">
+              <a:rPr lang="en-US" sz="1400" b="1" dirty="0">
+                <a:solidFill>
+                  <a:schemeClr val="accent1"/>
+                </a:solidFill>
+              </a:rPr>
+              <a:t>Carga líquida = carga bruta − MMGD. </a:t>
+            </a:r>
+            <a:pPr indent="0" marL="0">
+              <a:buNone/>
+            </a:pPr>
+            <a:r>
+              <a:rPr lang="en-US" sz="1400" dirty="0">
                 <a:solidFill>
                   <a:schemeClr val="bg1"/>
                 </a:solidFill>
-                <a:latin typeface="Cambria" pitchFamily="34" charset="0"/>
-                <a:ea typeface="Cambria" pitchFamily="34" charset="-122"/>
-                <a:cs typeface="Cambria" pitchFamily="34" charset="-120"/>
-              </a:rPr>
-              <a:t>Carga líquida = carga bruta − MMGD − eólica − solar centralizada</a:t>
-            </a:r>
-            <a:endParaRPr lang="en-US" sz="1600" dirty="0"/>
-          </a:p>
-        </p:txBody>
-      </p:sp>
-      <p:sp>
-        <p:nvSpPr>
-          <p:cNvPr id="26" name="Text 20"/>
+              </a:rPr>
+              <a:t>A versão ampla também subtrai eólica e solar centralizada. Na média de agosto/2025, a MMGD chegou a 22,4 GW ao meio-dia e a carga líquida foi de 51,9 GW (12h) a 87,8 GW (18h).</a:t>
+            </a:r>
+            <a:endParaRPr lang="en-US" sz="1400" dirty="0"/>
+          </a:p>
+        </p:txBody>
+      </p:sp>
+      <p:sp>
+        <p:nvSpPr>
+          <p:cNvPr id="19" name="Text 16"/>
           <p:cNvSpPr txBox="1"/>
           <p:nvPr/>
         </p:nvSpPr>
         <p:spPr>
           <a:xfrm>
-            <a:off x="7040880" y="5532120"/>
-            <a:ext cx="4327855" cy="749808"/>
+            <a:off x="548640" y="6382512"/>
+            <a:ext cx="10424160" cy="274320"/>
           </a:xfrm>
           <a:prstGeom prst="rect">
             <a:avLst/>
@@ -32480,48 +32284,12 @@
               <a:buNone/>
             </a:pPr>
             <a:r>
-              <a:rPr lang="en-US" sz="1200" dirty="0">
-                <a:solidFill>
-                  <a:schemeClr val="bg1"/>
-                </a:solidFill>
-              </a:rPr>
-              <a:t>Projeção do ONS para 2029: rampas acima de 40 GW em poucas horas, entre 16h30 e 19h. A bateria carrega na barriga e descarrega no pescoço.</a:t>
-            </a:r>
-            <a:endParaRPr lang="en-US" sz="1200" dirty="0"/>
-          </a:p>
-        </p:txBody>
-      </p:sp>
-      <p:sp>
-        <p:nvSpPr>
-          <p:cNvPr id="27" name="Text 21"/>
-          <p:cNvSpPr txBox="1"/>
-          <p:nvPr/>
-        </p:nvSpPr>
-        <p:spPr>
-          <a:xfrm>
-            <a:off x="548640" y="6382512"/>
-            <a:ext cx="10424160" cy="274320"/>
-          </a:xfrm>
-          <a:prstGeom prst="rect">
-            <a:avLst/>
-          </a:prstGeom>
-          <a:noFill/>
-          <a:ln/>
-        </p:spPr>
-        <p:txBody>
-          <a:bodyPr wrap="square" lIns="0" tIns="0" rIns="0" bIns="0" rtlCol="0" anchor="ctr"/>
-          <a:lstStyle/>
-          <a:p>
-            <a:pPr indent="0" marL="0">
-              <a:buNone/>
-            </a:pPr>
-            <a:r>
               <a:rPr lang="en-US" sz="1000" i="1" dirty="0">
                 <a:solidFill>
                   <a:schemeClr val="tx2"/>
                 </a:solidFill>
               </a:rPr>
-              <a:t>Fontes: EPE (2026), base de fluxo de potência do PDE 2035; CAISO (2013), Fast Facts; Ipea; Abraceel (2023). A EPE desconta só a MMGD fotovoltaica, e a versão do setor inclui eólica e solar centralizada.</a:t>
+              <a:t>Fonte: elaboração própria com dados abertos do ONS (balanço de energia e geração por usina, base horária, 2025); MMGD estimada pelo ONS; definição da EPE (2026).</a:t>
             </a:r>
             <a:endParaRPr lang="en-US" sz="1000" dirty="0"/>
           </a:p>

--- a/Baterias_SIN_Economia_Setor_Eletrico_I.pptx
+++ b/Baterias_SIN_Economia_Setor_Eletrico_I.pptx
@@ -131,12 +131,12 @@
   <p:extLst>
     <p:ext uri="{521415D9-36F7-43E2-AB2F-B90AF26B5E84}">
       <p14:sectionLst xmlns:p14="http://schemas.microsoft.com/office/powerpoint/2010/main">
-        <p14:section name="Abertura" id="{22d14a1a-359c-07cc-bf6c-f406d29c2f44}">
+        <p14:section name="Abertura" id="{2a16064b-dcd0-71f7-ca45-edd8a9c528d9}">
           <p14:sldIdLst>
             <p14:sldId id="256"/>
           </p14:sldIdLst>
         </p14:section>
-        <p14:section name="Introdução" id="{ff90a364-07fa-5700-7b24-b3974b2bbdce}">
+        <p14:section name="Introdução" id="{9308c725-e97d-7995-42fc-0636f346ea33}">
           <p14:sldIdLst>
             <p14:sldId id="257"/>
             <p14:sldId id="258"/>
@@ -145,13 +145,13 @@
             <p14:sldId id="261"/>
           </p14:sldIdLst>
         </p14:section>
-        <p14:section name="Objetivos" id="{b145d3b4-46f3-d0bf-b640-bbd0af6ad0a6}">
+        <p14:section name="Objetivos" id="{3bca2eb7-3ad6-6720-e9a9-740c43a251af}">
           <p14:sldIdLst>
             <p14:sldId id="262"/>
             <p14:sldId id="263"/>
           </p14:sldIdLst>
         </p14:section>
-        <p14:section name="Método" id="{4a15fffa-de2f-08e4-f8e5-cb8b23b29b9f}">
+        <p14:section name="Método" id="{63f8184c-c58d-e6b9-4bdf-f20fecbb676a}">
           <p14:sldIdLst>
             <p14:sldId id="264"/>
             <p14:sldId id="265"/>
@@ -159,13 +159,13 @@
             <p14:sldId id="267"/>
           </p14:sldIdLst>
         </p14:section>
-        <p14:section name="Análise" id="{7055d899-ff08-dc86-96d3-4e366a1d16da}">
+        <p14:section name="Análise" id="{6db83971-e0aa-4f73-577c-0b98e870a772}">
           <p14:sldIdLst>
             <p14:sldId id="268"/>
             <p14:sldId id="269"/>
           </p14:sldIdLst>
         </p14:section>
-        <p14:section name="Encargos e benefícios" id="{c464c56f-cfd6-fb6b-75cc-b4faacc37738}">
+        <p14:section name="Encargos e benefícios" id="{c327c3c6-2d13-830d-dd63-056c9b787312}">
           <p14:sldIdLst>
             <p14:sldId id="270"/>
             <p14:sldId id="271"/>
@@ -178,7 +178,7 @@
             <p14:sldId id="278"/>
           </p14:sldIdLst>
         </p14:section>
-        <p14:section name="Fechamento" id="{452ce5d8-ce11-c07b-94de-08d60050caf0}">
+        <p14:section name="Fechamento" id="{496b3457-0153-2e6c-acec-733c789f968d}">
           <p14:sldIdLst>
             <p14:sldId id="279"/>
             <p14:sldId id="280"/>
@@ -709,18 +709,18 @@
               <c:strCache>
                 <c:ptCount val="1"/>
                 <c:pt idx="0">
-                  <c:v>Carga líquida (bruta − MMGD)</c:v>
+                  <c:v>Eólica e solar centralizada</c:v>
                 </c:pt>
               </c:strCache>
             </c:strRef>
           </c:tx>
           <c:spPr>
             <a:solidFill>
-              <a:srgbClr val="E4572E"/>
+              <a:srgbClr val="1FB5A8"/>
             </a:solidFill>
             <a:ln w="38100" cap="flat">
               <a:solidFill>
-                <a:srgbClr val="E4572E"/>
+                <a:srgbClr val="1FB5A8"/>
               </a:solidFill>
               <a:prstDash val="solid"/>
               <a:round/>
@@ -757,11 +757,11 @@
             <c:size val="6"/>
             <c:spPr>
               <a:solidFill>
-                <a:srgbClr val="E4572E"/>
+                <a:srgbClr val="1FB5A8"/>
               </a:solidFill>
               <a:ln w="9525" cap="flat">
                 <a:solidFill>
-                  <a:srgbClr val="E4572E"/>
+                  <a:srgbClr val="1FB5A8"/>
                 </a:solidFill>
                 <a:prstDash val="solid"/>
                 <a:round/>
@@ -858,76 +858,310 @@
                 <c:formatCode>General</c:formatCode>
                 <c:ptCount val="24"/>
                 <c:pt idx="0">
-                  <c:v>65.13</c:v>
+                  <c:v>14.15</c:v>
                 </c:pt>
                 <c:pt idx="1">
-                  <c:v>61.87</c:v>
+                  <c:v>14.33</c:v>
                 </c:pt>
                 <c:pt idx="2">
-                  <c:v>59.65</c:v>
+                  <c:v>13.95</c:v>
                 </c:pt>
                 <c:pt idx="3">
+                  <c:v>13.35</c:v>
+                </c:pt>
+                <c:pt idx="4">
+                  <c:v>12.37</c:v>
+                </c:pt>
+                <c:pt idx="5">
+                  <c:v>11.95</c:v>
+                </c:pt>
+                <c:pt idx="6">
+                  <c:v>12.48</c:v>
+                </c:pt>
+                <c:pt idx="7">
+                  <c:v>11.08</c:v>
+                </c:pt>
+                <c:pt idx="8">
+                  <c:v>7.94</c:v>
+                </c:pt>
+                <c:pt idx="9">
+                  <c:v>4.41</c:v>
+                </c:pt>
+                <c:pt idx="10">
+                  <c:v>2.72</c:v>
+                </c:pt>
+                <c:pt idx="11">
+                  <c:v>1.77</c:v>
+                </c:pt>
+                <c:pt idx="12">
+                  <c:v>1.09</c:v>
+                </c:pt>
+                <c:pt idx="13">
+                  <c:v>0.97</c:v>
+                </c:pt>
+                <c:pt idx="14">
+                  <c:v>2.11</c:v>
+                </c:pt>
+                <c:pt idx="15">
+                  <c:v>6.8</c:v>
+                </c:pt>
+                <c:pt idx="16">
+                  <c:v>11.91</c:v>
+                </c:pt>
+                <c:pt idx="17">
+                  <c:v>10.87</c:v>
+                </c:pt>
+                <c:pt idx="18">
+                  <c:v>10.78</c:v>
+                </c:pt>
+                <c:pt idx="19">
+                  <c:v>11.47</c:v>
+                </c:pt>
+                <c:pt idx="20">
+                  <c:v>12.1</c:v>
+                </c:pt>
+                <c:pt idx="21">
+                  <c:v>12.21</c:v>
+                </c:pt>
+                <c:pt idx="22">
+                  <c:v>13.4</c:v>
+                </c:pt>
+                <c:pt idx="23">
+                  <c:v>15.6</c:v>
+                </c:pt>
+              </c:numCache>
+            </c:numRef>
+          </c:val>
+          <c:smooth val="0"/>
+        </c:ser>
+        <c:ser>
+          <c:idx val="3"/>
+          <c:order val="3"/>
+          <c:tx>
+            <c:strRef>
+              <c:f>Sheet1!$E$1</c:f>
+              <c:strCache>
+                <c:ptCount val="1"/>
+                <c:pt idx="0">
+                  <c:v>Carga líquida</c:v>
+                </c:pt>
+              </c:strCache>
+            </c:strRef>
+          </c:tx>
+          <c:spPr>
+            <a:solidFill>
+              <a:srgbClr val="E4572E"/>
+            </a:solidFill>
+            <a:ln w="38100" cap="flat">
+              <a:solidFill>
+                <a:srgbClr val="E4572E"/>
+              </a:solidFill>
+              <a:prstDash val="solid"/>
+              <a:round/>
+            </a:ln>
+            <a:effectLst/>
+          </c:spPr>
+          <c:invertIfNegative val="0"/>
+          <c:dLbls>
+            <c:numFmt formatCode="#,##0" sourceLinked="0"/>
+            <c:txPr>
+              <a:bodyPr/>
+              <a:lstStyle/>
+              <a:p>
+                <a:pPr>
+                  <a:defRPr b="0" i="0" strike="noStrike" sz="1200" u="none">
+                    <a:solidFill>
+                      <a:srgbClr val="000000"/>
+                    </a:solidFill>
+                    <a:latin typeface="Arial"/>
+                  </a:defRPr>
+                </a:pPr>
+              </a:p>
+            </c:txPr>
+            <c:showLegendKey val="0"/>
+            <c:showVal val="0"/>
+            <c:showCatName val="0"/>
+            <c:showSerName val="0"/>
+            <c:showPercent val="0"/>
+            <c:showBubbleSize val="0"/>
+            <c:showLeaderLines val="0"/>
+          </c:dLbls>
+          <c:marker>
+            <c:symbol val="none"/>
+            <c:size val="6"/>
+            <c:spPr>
+              <a:solidFill>
+                <a:srgbClr val="E4572E"/>
+              </a:solidFill>
+              <a:ln w="9525" cap="flat">
+                <a:solidFill>
+                  <a:srgbClr val="E4572E"/>
+                </a:solidFill>
+                <a:prstDash val="solid"/>
+                <a:round/>
+              </a:ln>
+              <a:effectLst/>
+            </c:spPr>
+          </c:marker>
+          <c:cat>
+            <c:multiLvlStrRef>
+              <c:f>Sheet1!$A$2:$A$25</c:f>
+              <c:multiLvlStrCache>
+                <c:ptCount val="24"/>
+                <c:lvl>
+                  <c:pt idx="0">
+                    <c:v>0h</c:v>
+                  </c:pt>
+                  <c:pt idx="1">
+                    <c:v> </c:v>
+                  </c:pt>
+                  <c:pt idx="2">
+                    <c:v>  </c:v>
+                  </c:pt>
+                  <c:pt idx="3">
+                    <c:v>3h</c:v>
+                  </c:pt>
+                  <c:pt idx="4">
+                    <c:v> </c:v>
+                  </c:pt>
+                  <c:pt idx="5">
+                    <c:v>  </c:v>
+                  </c:pt>
+                  <c:pt idx="6">
+                    <c:v>6h</c:v>
+                  </c:pt>
+                  <c:pt idx="7">
+                    <c:v> </c:v>
+                  </c:pt>
+                  <c:pt idx="8">
+                    <c:v>  </c:v>
+                  </c:pt>
+                  <c:pt idx="9">
+                    <c:v>9h</c:v>
+                  </c:pt>
+                  <c:pt idx="10">
+                    <c:v> </c:v>
+                  </c:pt>
+                  <c:pt idx="11">
+                    <c:v>  </c:v>
+                  </c:pt>
+                  <c:pt idx="12">
+                    <c:v>12h</c:v>
+                  </c:pt>
+                  <c:pt idx="13">
+                    <c:v> </c:v>
+                  </c:pt>
+                  <c:pt idx="14">
+                    <c:v>  </c:v>
+                  </c:pt>
+                  <c:pt idx="15">
+                    <c:v>15h</c:v>
+                  </c:pt>
+                  <c:pt idx="16">
+                    <c:v> </c:v>
+                  </c:pt>
+                  <c:pt idx="17">
+                    <c:v>  </c:v>
+                  </c:pt>
+                  <c:pt idx="18">
+                    <c:v>18h</c:v>
+                  </c:pt>
+                  <c:pt idx="19">
+                    <c:v> </c:v>
+                  </c:pt>
+                  <c:pt idx="20">
+                    <c:v>  </c:v>
+                  </c:pt>
+                  <c:pt idx="21">
+                    <c:v>21h</c:v>
+                  </c:pt>
+                  <c:pt idx="22">
+                    <c:v> </c:v>
+                  </c:pt>
+                  <c:pt idx="23">
+                    <c:v>  </c:v>
+                  </c:pt>
+                </c:lvl>
+              </c:multiLvlStrCache>
+            </c:multiLvlStrRef>
+          </c:cat>
+          <c:val>
+            <c:numRef>
+              <c:f>Sheet1!$E$2:$E$25</c:f>
+              <c:numCache>
+                <c:formatCode>General</c:formatCode>
+                <c:ptCount val="24"/>
+                <c:pt idx="0">
+                  <c:v>50.98</c:v>
+                </c:pt>
+                <c:pt idx="1">
+                  <c:v>47.54</c:v>
+                </c:pt>
+                <c:pt idx="2">
+                  <c:v>45.7</c:v>
+                </c:pt>
+                <c:pt idx="3">
+                  <c:v>44.88</c:v>
+                </c:pt>
+                <c:pt idx="4">
+                  <c:v>45.1</c:v>
+                </c:pt>
+                <c:pt idx="5">
+                  <c:v>44.88</c:v>
+                </c:pt>
+                <c:pt idx="6">
+                  <c:v>42.43</c:v>
+                </c:pt>
+                <c:pt idx="7">
+                  <c:v>39.62</c:v>
+                </c:pt>
+                <c:pt idx="8">
+                  <c:v>37.18</c:v>
+                </c:pt>
+                <c:pt idx="9">
+                  <c:v>36.21</c:v>
+                </c:pt>
+                <c:pt idx="10">
+                  <c:v>35.56</c:v>
+                </c:pt>
+                <c:pt idx="11">
+                  <c:v>35.46</c:v>
+                </c:pt>
+                <c:pt idx="12">
+                  <c:v>34.67</c:v>
+                </c:pt>
+                <c:pt idx="13">
+                  <c:v>34.5</c:v>
+                </c:pt>
+                <c:pt idx="14">
+                  <c:v>35.8</c:v>
+                </c:pt>
+                <c:pt idx="15">
+                  <c:v>37.3</c:v>
+                </c:pt>
+                <c:pt idx="16">
+                  <c:v>42.41</c:v>
+                </c:pt>
+                <c:pt idx="17">
+                  <c:v>56.53</c:v>
+                </c:pt>
+                <c:pt idx="18">
+                  <c:v>67.22</c:v>
+                </c:pt>
+                <c:pt idx="19">
+                  <c:v>66.73</c:v>
+                </c:pt>
+                <c:pt idx="20">
+                  <c:v>64.38</c:v>
+                </c:pt>
+                <c:pt idx="21">
+                  <c:v>62.68</c:v>
+                </c:pt>
+                <c:pt idx="22">
                   <c:v>58.23</c:v>
                 </c:pt>
-                <c:pt idx="4">
-                  <c:v>57.47</c:v>
-                </c:pt>
-                <c:pt idx="5">
-                  <c:v>56.82</c:v>
-                </c:pt>
-                <c:pt idx="6">
-                  <c:v>54.91</c:v>
-                </c:pt>
-                <c:pt idx="7">
-                  <c:v>50.7</c:v>
-                </c:pt>
-                <c:pt idx="8">
-                  <c:v>45.12</c:v>
-                </c:pt>
-                <c:pt idx="9">
-                  <c:v>40.62</c:v>
-                </c:pt>
-                <c:pt idx="10">
-                  <c:v>38.29</c:v>
-                </c:pt>
-                <c:pt idx="11">
-                  <c:v>37.23</c:v>
-                </c:pt>
-                <c:pt idx="12">
-                  <c:v>35.76</c:v>
-                </c:pt>
-                <c:pt idx="13">
-                  <c:v>35.47</c:v>
-                </c:pt>
-                <c:pt idx="14">
-                  <c:v>37.91</c:v>
-                </c:pt>
-                <c:pt idx="15">
-                  <c:v>44.11</c:v>
-                </c:pt>
-                <c:pt idx="16">
-                  <c:v>54.32</c:v>
-                </c:pt>
-                <c:pt idx="17">
-                  <c:v>67.4</c:v>
-                </c:pt>
-                <c:pt idx="18">
-                  <c:v>78</c:v>
-                </c:pt>
-                <c:pt idx="19">
-                  <c:v>78.2</c:v>
-                </c:pt>
-                <c:pt idx="20">
-                  <c:v>76.48</c:v>
-                </c:pt>
-                <c:pt idx="21">
-                  <c:v>74.89</c:v>
-                </c:pt>
-                <c:pt idx="22">
-                  <c:v>71.63</c:v>
-                </c:pt>
                 <c:pt idx="23">
-                  <c:v>67.38</c:v>
+                  <c:v>51.78</c:v>
                 </c:pt>
               </c:numCache>
             </c:numRef>
@@ -3914,7 +4148,7 @@
           <a:p>
             <a:r>
               <a:rPr lang="en-US" dirty="0"/>
-              <a:t>Curva real do SIN em 10/08/2025, um domingo e o dia do episódio de excedente citado pelo setor. Os dados são os dados abertos do ONS em base horária: a carga vem do balanço de energia nos subsistemas (linha SIN), e a MMGD é a modalidade 'Pequenas Usinas (MMGD)' do conjunto de geração por usina, que é uma estimativa do ONS. A soma de MMGD e solar centralizada reproduz a geração solar do balanço, e a geração total reproduz a carga, o que indica que a carga do ONS é a carga bruta, incluindo a parcela atendida pela MMGD. Carga líquida = carga bruta menos MMGD, que é a definição da EPE; a versão ampla também desconta eólica e solar centralizada. Resultados do dia: MMGD de 23,2 GW às 12h, equivalente a 39,4% da carga de 59,0 GW; carga líquida mínima de 35,5 GW às 13h e máxima de 78,2 GW às 19h; rampa de 33,9 GW entre 15h e 18h. A solar centralizada gerou 0,5 GW às 12h, contra 7,3 GW na média de agosto. A média de agosto/2025 (31 dias) mostra o mesmo formato, com carga líquida de 51,9 GW às 12h e 87,8 GW às 18h.</a:t>
+              <a:t>Curva real do SIN em 10/08/2025, um domingo e o dia do episódio de excedente citado pelo setor. Dados abertos do ONS em base horária: a carga vem do balanço de energia nos subsistemas (linha SIN), e a MMGD é a modalidade 'Pequenas Usinas (MMGD)' do conjunto de geração por usina, que é uma estimativa do ONS. A soma de MMGD e solar centralizada reproduz a geração solar do balanço, e a geração total reproduz a carga, o que indica que a carga do ONS é a carga bruta, incluindo a parcela atendida pela MMGD. Carga líquida = carga bruta menos MMGD, menos geração eólica e menos solar centralizada; o gráfico calcula as quatro curvas a partir da mesma base, e a identidade fecha com erro máximo de 0,02 GW por arredondamento. Não são descontadas outras fontes não despacháveis, como PCHs, biomassa e térmicas inflexíveis. Atenção: a eólica e a solar centralizada usadas são as efetivamente geradas, já com os cortes; no dia 10/08 elas somaram apenas 1,1 GW às 12h, contra 14,3 GW na média de agosto, então parte da barriga da carga líquida estaria ainda mais profunda sem os cortes. Resultados do dia: MMGD de 23,2 GW às 12h, equivalente a 39,4% da carga de 59,0 GW; carga líquida mínima de 34,5 GW às 13h e máxima de 67,2 GW às 18h; rampa de 29,9 GW entre 15h e 18h. A média de agosto/2025 (31 dias) tem o mesmo formato: carga líquida de 37,7 GW às 12h e 70,7 GW às 18h.</a:t>
             </a:r>
             <a:endParaRPr lang="en-US" dirty="0"/>
           </a:p>
@@ -32005,7 +32239,7 @@
                 <a:ea typeface="Cambria" pitchFamily="34" charset="-122"/>
                 <a:cs typeface="Cambria" pitchFamily="34" charset="-120"/>
               </a:rPr>
-              <a:t>+34 GW</a:t>
+              <a:t>+30 GW</a:t>
             </a:r>
             <a:endParaRPr lang="en-US" sz="2200" dirty="0"/>
           </a:p>
@@ -32041,7 +32275,7 @@
                   <a:schemeClr val="tx1"/>
                 </a:solidFill>
               </a:rPr>
-              <a:t>de rampa da carga líquida em 3 h, das 15h às 18h (de 44,1 para 78,0 GW).</a:t>
+              <a:t>de rampa da carga líquida em 3 h, das 15h às 18h (de 37,3 para 67,2 GW).</a:t>
             </a:r>
             <a:endParaRPr lang="en-US" sz="1300" dirty="0"/>
           </a:p>
@@ -32098,11 +32332,11 @@
             </a:avLst>
           </a:prstGeom>
           <a:solidFill>
-            <a:schemeClr val="accent3"/>
+            <a:schemeClr val="accent2"/>
           </a:solidFill>
           <a:ln w="12700">
             <a:solidFill>
-              <a:schemeClr val="accent3"/>
+              <a:schemeClr val="accent2"/>
             </a:solidFill>
             <a:prstDash val="solid"/>
           </a:ln>
@@ -32137,13 +32371,13 @@
             <a:r>
               <a:rPr lang="en-US" sz="2200" b="1" dirty="0">
                 <a:solidFill>
-                  <a:schemeClr val="bg1"/>
+                  <a:schemeClr val="tx1"/>
                 </a:solidFill>
                 <a:latin typeface="Cambria" pitchFamily="34" charset="0"/>
                 <a:ea typeface="Cambria" pitchFamily="34" charset="-122"/>
                 <a:cs typeface="Cambria" pitchFamily="34" charset="-120"/>
               </a:rPr>
-              <a:t>0,5 GW</a:t>
+              <a:t>1,1 GW</a:t>
             </a:r>
             <a:endParaRPr lang="en-US" sz="2200" dirty="0"/>
           </a:p>
@@ -32179,7 +32413,7 @@
                   <a:schemeClr val="tx1"/>
                 </a:solidFill>
               </a:rPr>
-              <a:t>geraram as solares centralizadas às 12h, contra 7,3 GW na média de agosto: o excedente forçou cortes.</a:t>
+              <a:t>geraram eólicas e solares centralizadas às 12h, contra 14,3 GW na média de agosto: o excedente forçou cortes.</a:t>
             </a:r>
             <a:endParaRPr lang="en-US" sz="1300" dirty="0"/>
           </a:p>
@@ -32242,7 +32476,7 @@
                   <a:schemeClr val="accent1"/>
                 </a:solidFill>
               </a:rPr>
-              <a:t>Carga líquida = carga bruta − MMGD. </a:t>
+              <a:t>Carga líquida = carga bruta − MMGD − eólica − solar centralizada. </a:t>
             </a:r>
             <a:pPr indent="0" marL="0">
               <a:buNone/>
@@ -32253,7 +32487,7 @@
                   <a:schemeClr val="bg1"/>
                 </a:solidFill>
               </a:rPr>
-              <a:t>A versão ampla também subtrai eólica e solar centralizada. Na média de agosto/2025, a MMGD chegou a 22,4 GW ao meio-dia e a carga líquida foi de 51,9 GW (12h) a 87,8 GW (18h).</a:t>
+              <a:t>No dia 10/08, caiu a 34,7 GW às 12h (59% da carga bruta) e chegou a 67,2 GW às 18h. Média de agosto/2025: de 37,7 GW (12h) a 70,7 GW (18h).</a:t>
             </a:r>
             <a:endParaRPr lang="en-US" sz="1400" dirty="0"/>
           </a:p>
@@ -32289,7 +32523,7 @@
                   <a:schemeClr val="tx2"/>
                 </a:solidFill>
               </a:rPr>
-              <a:t>Fonte: elaboração própria com dados abertos do ONS (balanço de energia e geração por usina, base horária, 2025); MMGD estimada pelo ONS; definição da EPE (2026).</a:t>
+              <a:t>Fonte: elaboração própria com dados abertos do ONS (balanço de energia e geração por usina, base horária, 2025); MMGD estimada pelo ONS. Termo popularizado pelo CAISO (2013).</a:t>
             </a:r>
             <a:endParaRPr lang="en-US" sz="1000" dirty="0"/>
           </a:p>

--- a/Baterias_SIN_Economia_Setor_Eletrico_I.pptx
+++ b/Baterias_SIN_Economia_Setor_Eletrico_I.pptx
@@ -131,12 +131,12 @@
   <p:extLst>
     <p:ext uri="{521415D9-36F7-43E2-AB2F-B90AF26B5E84}">
       <p14:sectionLst xmlns:p14="http://schemas.microsoft.com/office/powerpoint/2010/main">
-        <p14:section name="Abertura" id="{2a16064b-dcd0-71f7-ca45-edd8a9c528d9}">
+        <p14:section name="Abertura" id="{1a2d4c0a-b890-c880-0039-e60a76593e2a}">
           <p14:sldIdLst>
             <p14:sldId id="256"/>
           </p14:sldIdLst>
         </p14:section>
-        <p14:section name="Introdução" id="{9308c725-e97d-7995-42fc-0636f346ea33}">
+        <p14:section name="Introdução" id="{07f448da-0587-3a8a-16a7-10c211cb14af}">
           <p14:sldIdLst>
             <p14:sldId id="257"/>
             <p14:sldId id="258"/>
@@ -145,13 +145,13 @@
             <p14:sldId id="261"/>
           </p14:sldIdLst>
         </p14:section>
-        <p14:section name="Objetivos" id="{3bca2eb7-3ad6-6720-e9a9-740c43a251af}">
+        <p14:section name="Objetivos" id="{542f5a89-0154-bba7-fa22-981b2029a50c}">
           <p14:sldIdLst>
             <p14:sldId id="262"/>
             <p14:sldId id="263"/>
           </p14:sldIdLst>
         </p14:section>
-        <p14:section name="Método" id="{63f8184c-c58d-e6b9-4bdf-f20fecbb676a}">
+        <p14:section name="Método" id="{1080dd48-39f9-824d-87b5-97916fd7a6ce}">
           <p14:sldIdLst>
             <p14:sldId id="264"/>
             <p14:sldId id="265"/>
@@ -159,13 +159,13 @@
             <p14:sldId id="267"/>
           </p14:sldIdLst>
         </p14:section>
-        <p14:section name="Análise" id="{6db83971-e0aa-4f73-577c-0b98e870a772}">
+        <p14:section name="Análise" id="{b6bd59b5-7ad3-12e0-6e2b-ae8551d41982}">
           <p14:sldIdLst>
             <p14:sldId id="268"/>
             <p14:sldId id="269"/>
           </p14:sldIdLst>
         </p14:section>
-        <p14:section name="Encargos e benefícios" id="{c327c3c6-2d13-830d-dd63-056c9b787312}">
+        <p14:section name="Encargos e benefícios" id="{ab62028d-bc8e-2b38-1484-2c66b91c5667}">
           <p14:sldIdLst>
             <p14:sldId id="270"/>
             <p14:sldId id="271"/>
@@ -178,7 +178,7 @@
             <p14:sldId id="278"/>
           </p14:sldIdLst>
         </p14:section>
-        <p14:section name="Fechamento" id="{496b3457-0153-2e6c-acec-733c789f968d}">
+        <p14:section name="Fechamento" id="{00a5d4fb-8b18-48c1-7e91-4980bc5b3b4d}">
           <p14:sldIdLst>
             <p14:sldId id="279"/>
             <p14:sldId id="280"/>
@@ -4148,7 +4148,7 @@
           <a:p>
             <a:r>
               <a:rPr lang="en-US" dirty="0"/>
-              <a:t>Curva real do SIN em 10/08/2025, um domingo e o dia do episódio de excedente citado pelo setor. Dados abertos do ONS em base horária: a carga vem do balanço de energia nos subsistemas (linha SIN), e a MMGD é a modalidade 'Pequenas Usinas (MMGD)' do conjunto de geração por usina, que é uma estimativa do ONS. A soma de MMGD e solar centralizada reproduz a geração solar do balanço, e a geração total reproduz a carga, o que indica que a carga do ONS é a carga bruta, incluindo a parcela atendida pela MMGD. Carga líquida = carga bruta menos MMGD, menos geração eólica e menos solar centralizada; o gráfico calcula as quatro curvas a partir da mesma base, e a identidade fecha com erro máximo de 0,02 GW por arredondamento. Não são descontadas outras fontes não despacháveis, como PCHs, biomassa e térmicas inflexíveis. Atenção: a eólica e a solar centralizada usadas são as efetivamente geradas, já com os cortes; no dia 10/08 elas somaram apenas 1,1 GW às 12h, contra 14,3 GW na média de agosto, então parte da barriga da carga líquida estaria ainda mais profunda sem os cortes. Resultados do dia: MMGD de 23,2 GW às 12h, equivalente a 39,4% da carga de 59,0 GW; carga líquida mínima de 34,5 GW às 13h e máxima de 67,2 GW às 18h; rampa de 29,9 GW entre 15h e 18h. A média de agosto/2025 (31 dias) tem o mesmo formato: carga líquida de 37,7 GW às 12h e 70,7 GW às 18h.</a:t>
+              <a:t>Curva real do SIN em 10/08/2025, um domingo e o dia do episódio de excedente citado pelo setor. Dados abertos do ONS em base horária: a carga vem do balanço de energia nos subsistemas (linha SIN), e a MMGD é a modalidade 'Pequenas Usinas (MMGD)' do conjunto de geração por usina, que é uma estimativa do ONS. A soma de MMGD e solar centralizada reproduz a geração solar do balanço, e a geração total reproduz a carga, o que indica que a carga do ONS é a carga bruta, incluindo a parcela atendida pela MMGD. Carga líquida = carga bruta menos MMGD, menos geração eólica e menos solar centralizada; o gráfico calcula as quatro curvas a partir da mesma base, e a identidade fecha com erro máximo de 0,02 GW por arredondamento. Não são descontadas outras fontes não despacháveis, como PCHs, biomassa e térmicas inflexíveis. Atenção: a eólica e a solar centralizada descontadas no gráfico são as efetivamente geradas, já com os cortes. Às 12h de 10/08 elas geraram 1,09 GW (eólica 0,62 e solar 0,47). Sem cortes, seriam 18,6 GW: a geração não realizada apurada pelo ONS por razão energética foi de 4,53 GW na eólica e 12,99 GW na solar centralizada (conjunto de restrição do ONS, média das leituras de 12h00 e 12h30), o que dá 5,15 GW de eólica e 13,46 GW de solar, e 94% de corte. Os 18,6 GW somam a geração realizada do arquivo por usina e o corte apurado no arquivo de restrição; os dois arquivos cobrem conjuntos de usinas diferentes, então a soma é uma estimativa. Resultados do dia: MMGD de 23,2 GW às 12h, equivalente a 39,4% da carga de 59,0 GW; carga líquida mínima de 34,5 GW às 13h e máxima de 67,2 GW às 18h; rampa de 29,9 GW entre 15h e 18h. A média de agosto/2025 (31 dias) tem o mesmo formato: carga líquida de 37,7 GW às 12h e 70,7 GW às 18h.</a:t>
             </a:r>
             <a:endParaRPr lang="en-US" dirty="0"/>
           </a:p>
@@ -32377,7 +32377,7 @@
                 <a:ea typeface="Cambria" pitchFamily="34" charset="-122"/>
                 <a:cs typeface="Cambria" pitchFamily="34" charset="-120"/>
               </a:rPr>
-              <a:t>1,1 GW</a:t>
+              <a:t>18,6 GW</a:t>
             </a:r>
             <a:endParaRPr lang="en-US" sz="2200" dirty="0"/>
           </a:p>
@@ -32413,7 +32413,7 @@
                   <a:schemeClr val="tx1"/>
                 </a:solidFill>
               </a:rPr>
-              <a:t>geraram eólicas e solares centralizadas às 12h, contra 14,3 GW na média de agosto: o excedente forçou cortes.</a:t>
+              <a:t>seriam gerados por eólicas (5,1) e solares centralizadas (13,5) às 12h sem cortes. Geraram só 1,1 GW: 94% foi cortado.</a:t>
             </a:r>
             <a:endParaRPr lang="en-US" sz="1300" dirty="0"/>
           </a:p>
@@ -32523,7 +32523,7 @@
                   <a:schemeClr val="tx2"/>
                 </a:solidFill>
               </a:rPr>
-              <a:t>Fonte: elaboração própria com dados abertos do ONS (balanço de energia e geração por usina, base horária, 2025); MMGD estimada pelo ONS. Termo popularizado pelo CAISO (2013).</a:t>
+              <a:t>Fonte: elaboração própria com dados abertos do ONS (balanço, geração por usina e restrições de eólicas e solares, 2025); MMGD estimada pelo ONS.</a:t>
             </a:r>
             <a:endParaRPr lang="en-US" sz="1000" dirty="0"/>
           </a:p>
